--- a/tools/llm-as-a-judge/readme.pptx
+++ b/tools/llm-as-a-judge/readme.pptx
@@ -8,18 +8,20 @@
     <p:sldId id="257" r:id="rId2"/>
     <p:sldId id="261" r:id="rId3"/>
     <p:sldId id="258" r:id="rId4"/>
-    <p:sldId id="262" r:id="rId5"/>
-    <p:sldId id="263" r:id="rId6"/>
-    <p:sldId id="264" r:id="rId7"/>
-    <p:sldId id="265" r:id="rId8"/>
-    <p:sldId id="266" r:id="rId9"/>
-    <p:sldId id="259" r:id="rId10"/>
-    <p:sldId id="267" r:id="rId11"/>
-    <p:sldId id="268" r:id="rId12"/>
-    <p:sldId id="269" r:id="rId13"/>
-    <p:sldId id="270" r:id="rId14"/>
-    <p:sldId id="271" r:id="rId15"/>
-    <p:sldId id="272" r:id="rId16"/>
+    <p:sldId id="273" r:id="rId5"/>
+    <p:sldId id="274" r:id="rId6"/>
+    <p:sldId id="262" r:id="rId7"/>
+    <p:sldId id="263" r:id="rId8"/>
+    <p:sldId id="264" r:id="rId9"/>
+    <p:sldId id="265" r:id="rId10"/>
+    <p:sldId id="266" r:id="rId11"/>
+    <p:sldId id="259" r:id="rId12"/>
+    <p:sldId id="267" r:id="rId13"/>
+    <p:sldId id="268" r:id="rId14"/>
+    <p:sldId id="269" r:id="rId15"/>
+    <p:sldId id="270" r:id="rId16"/>
+    <p:sldId id="271" r:id="rId17"/>
+    <p:sldId id="272" r:id="rId18"/>
   </p:sldIdLst>
   <p:sldSz cx="12192000" cy="6858000"/>
   <p:notesSz cx="6858000" cy="9144000"/>
@@ -118,6 +120,11 @@
       </a:defRPr>
     </a:lvl9pPr>
   </p:defaultTextStyle>
+  <p:extLst>
+    <p:ext uri="{EFAFB233-063F-42B5-8137-9DF3F51BA10A}">
+      <p15:sldGuideLst xmlns:p15="http://schemas.microsoft.com/office/powerpoint/2012/main"/>
+    </p:ext>
+  </p:extLst>
 </p:presentation>
 </file>
 
@@ -15811,6 +15818,220 @@
         <p:cNvPr id="1" name="">
           <a:extLst>
             <a:ext uri="{FF2B5EF4-FFF2-40B4-BE49-F238E27FC236}">
+              <a16:creationId xmlns:a16="http://schemas.microsoft.com/office/drawing/2014/main" id="{000D65ED-AB26-B0BD-CED1-C183D7EF3C95}"/>
+            </a:ext>
+          </a:extLst>
+        </p:cNvPr>
+        <p:cNvGrpSpPr/>
+        <p:nvPr/>
+      </p:nvGrpSpPr>
+      <p:grpSpPr>
+        <a:xfrm>
+          <a:off x="0" y="0"/>
+          <a:ext cx="0" cy="0"/>
+          <a:chOff x="0" y="0"/>
+          <a:chExt cx="0" cy="0"/>
+        </a:xfrm>
+      </p:grpSpPr>
+    </p:spTree>
+    <p:extLst>
+      <p:ext uri="{BB962C8B-B14F-4D97-AF65-F5344CB8AC3E}">
+        <p14:creationId xmlns:p14="http://schemas.microsoft.com/office/powerpoint/2010/main" val="4235853481"/>
+      </p:ext>
+    </p:extLst>
+  </p:cSld>
+  <p:clrMapOvr>
+    <a:masterClrMapping/>
+  </p:clrMapOvr>
+</p:sld>
+</file>
+
+<file path=ppt/slides/slide11.xml><?xml version="1.0" encoding="utf-8"?>
+<p:sld xmlns:a="http://schemas.openxmlformats.org/drawingml/2006/main" xmlns:r="http://schemas.openxmlformats.org/officeDocument/2006/relationships" xmlns:p="http://schemas.openxmlformats.org/presentationml/2006/main">
+  <p:cSld>
+    <p:spTree>
+      <p:nvGrpSpPr>
+        <p:cNvPr id="1" name=""/>
+        <p:cNvGrpSpPr/>
+        <p:nvPr/>
+      </p:nvGrpSpPr>
+      <p:grpSpPr>
+        <a:xfrm>
+          <a:off x="0" y="0"/>
+          <a:ext cx="0" cy="0"/>
+          <a:chOff x="0" y="0"/>
+          <a:chExt cx="0" cy="0"/>
+        </a:xfrm>
+      </p:grpSpPr>
+      <p:sp>
+        <p:nvSpPr>
+          <p:cNvPr id="4" name="フリーフォーム: 図形 3">
+            <a:extLst>
+              <a:ext uri="{FF2B5EF4-FFF2-40B4-BE49-F238E27FC236}">
+                <a16:creationId xmlns:a16="http://schemas.microsoft.com/office/drawing/2014/main" id="{0B9173A0-3250-0ECC-59B2-5D1DDFB22AB1}"/>
+              </a:ext>
+            </a:extLst>
+          </p:cNvPr>
+          <p:cNvSpPr/>
+          <p:nvPr/>
+        </p:nvSpPr>
+        <p:spPr>
+          <a:xfrm>
+            <a:off x="0" y="0"/>
+            <a:ext cx="12192000" cy="6858000"/>
+          </a:xfrm>
+          <a:custGeom>
+            <a:avLst/>
+            <a:gdLst>
+              <a:gd name="csX0" fmla="*/ 3123526 w 12192000"/>
+              <a:gd name="csY0" fmla="*/ 3706153 h 6858000"/>
+              <a:gd name="csX1" fmla="*/ 2184850 w 12192000"/>
+              <a:gd name="csY1" fmla="*/ 4644829 h 6858000"/>
+              <a:gd name="csX2" fmla="*/ 3123526 w 12192000"/>
+              <a:gd name="csY2" fmla="*/ 5583505 h 6858000"/>
+              <a:gd name="csX3" fmla="*/ 4062202 w 12192000"/>
+              <a:gd name="csY3" fmla="*/ 4644829 h 6858000"/>
+              <a:gd name="csX4" fmla="*/ 3123526 w 12192000"/>
+              <a:gd name="csY4" fmla="*/ 3706153 h 6858000"/>
+              <a:gd name="csX5" fmla="*/ 0 w 12192000"/>
+              <a:gd name="csY5" fmla="*/ 0 h 6858000"/>
+              <a:gd name="csX6" fmla="*/ 12192000 w 12192000"/>
+              <a:gd name="csY6" fmla="*/ 0 h 6858000"/>
+              <a:gd name="csX7" fmla="*/ 12192000 w 12192000"/>
+              <a:gd name="csY7" fmla="*/ 6858000 h 6858000"/>
+              <a:gd name="csX8" fmla="*/ 0 w 12192000"/>
+              <a:gd name="csY8" fmla="*/ 6858000 h 6858000"/>
+            </a:gdLst>
+            <a:ahLst/>
+            <a:cxnLst>
+              <a:cxn ang="0">
+                <a:pos x="csX0" y="csY0"/>
+              </a:cxn>
+              <a:cxn ang="0">
+                <a:pos x="csX1" y="csY1"/>
+              </a:cxn>
+              <a:cxn ang="0">
+                <a:pos x="csX2" y="csY2"/>
+              </a:cxn>
+              <a:cxn ang="0">
+                <a:pos x="csX3" y="csY3"/>
+              </a:cxn>
+              <a:cxn ang="0">
+                <a:pos x="csX4" y="csY4"/>
+              </a:cxn>
+              <a:cxn ang="0">
+                <a:pos x="csX5" y="csY5"/>
+              </a:cxn>
+              <a:cxn ang="0">
+                <a:pos x="csX6" y="csY6"/>
+              </a:cxn>
+              <a:cxn ang="0">
+                <a:pos x="csX7" y="csY7"/>
+              </a:cxn>
+              <a:cxn ang="0">
+                <a:pos x="csX8" y="csY8"/>
+              </a:cxn>
+            </a:cxnLst>
+            <a:rect l="l" t="t" r="r" b="b"/>
+            <a:pathLst>
+              <a:path w="12192000" h="6858000">
+                <a:moveTo>
+                  <a:pt x="3123526" y="3706153"/>
+                </a:moveTo>
+                <a:cubicBezTo>
+                  <a:pt x="2605110" y="3706153"/>
+                  <a:pt x="2184850" y="4126413"/>
+                  <a:pt x="2184850" y="4644829"/>
+                </a:cubicBezTo>
+                <a:cubicBezTo>
+                  <a:pt x="2184850" y="5163245"/>
+                  <a:pt x="2605110" y="5583505"/>
+                  <a:pt x="3123526" y="5583505"/>
+                </a:cubicBezTo>
+                <a:cubicBezTo>
+                  <a:pt x="3641942" y="5583505"/>
+                  <a:pt x="4062202" y="5163245"/>
+                  <a:pt x="4062202" y="4644829"/>
+                </a:cubicBezTo>
+                <a:cubicBezTo>
+                  <a:pt x="4062202" y="4126413"/>
+                  <a:pt x="3641942" y="3706153"/>
+                  <a:pt x="3123526" y="3706153"/>
+                </a:cubicBezTo>
+                <a:close/>
+                <a:moveTo>
+                  <a:pt x="0" y="0"/>
+                </a:moveTo>
+                <a:lnTo>
+                  <a:pt x="12192000" y="0"/>
+                </a:lnTo>
+                <a:lnTo>
+                  <a:pt x="12192000" y="6858000"/>
+                </a:lnTo>
+                <a:lnTo>
+                  <a:pt x="0" y="6858000"/>
+                </a:lnTo>
+                <a:close/>
+              </a:path>
+            </a:pathLst>
+          </a:custGeom>
+          <a:solidFill>
+            <a:srgbClr val="000000">
+              <a:alpha val="20000"/>
+            </a:srgbClr>
+          </a:solidFill>
+          <a:ln>
+            <a:noFill/>
+          </a:ln>
+        </p:spPr>
+        <p:style>
+          <a:lnRef idx="2">
+            <a:schemeClr val="accent1">
+              <a:shade val="15000"/>
+            </a:schemeClr>
+          </a:lnRef>
+          <a:fillRef idx="1">
+            <a:schemeClr val="accent1"/>
+          </a:fillRef>
+          <a:effectRef idx="0">
+            <a:schemeClr val="accent1"/>
+          </a:effectRef>
+          <a:fontRef idx="minor">
+            <a:schemeClr val="lt1"/>
+          </a:fontRef>
+        </p:style>
+        <p:txBody>
+          <a:bodyPr wrap="square" rtlCol="0" anchor="ctr">
+            <a:noAutofit/>
+          </a:bodyPr>
+          <a:lstStyle/>
+          <a:p>
+            <a:pPr algn="ctr"/>
+            <a:endParaRPr lang="ja-JP" altLang="en-US"/>
+          </a:p>
+        </p:txBody>
+      </p:sp>
+    </p:spTree>
+    <p:extLst>
+      <p:ext uri="{BB962C8B-B14F-4D97-AF65-F5344CB8AC3E}">
+        <p14:creationId xmlns:p14="http://schemas.microsoft.com/office/powerpoint/2010/main" val="953920564"/>
+      </p:ext>
+    </p:extLst>
+  </p:cSld>
+  <p:clrMapOvr>
+    <a:masterClrMapping/>
+  </p:clrMapOvr>
+</p:sld>
+</file>
+
+<file path=ppt/slides/slide12.xml><?xml version="1.0" encoding="utf-8"?>
+<p:sld xmlns:a="http://schemas.openxmlformats.org/drawingml/2006/main" xmlns:r="http://schemas.openxmlformats.org/officeDocument/2006/relationships" xmlns:p="http://schemas.openxmlformats.org/presentationml/2006/main">
+  <p:cSld>
+    <p:spTree>
+      <p:nvGrpSpPr>
+        <p:cNvPr id="1" name="">
+          <a:extLst>
+            <a:ext uri="{FF2B5EF4-FFF2-40B4-BE49-F238E27FC236}">
               <a16:creationId xmlns:a16="http://schemas.microsoft.com/office/drawing/2014/main" id="{889E7D3D-5029-08AB-8B26-CC73DB263EF9}"/>
             </a:ext>
           </a:extLst>
@@ -15971,7 +16192,7 @@
 </p:sld>
 </file>
 
-<file path=ppt/slides/slide11.xml><?xml version="1.0" encoding="utf-8"?>
+<file path=ppt/slides/slide13.xml><?xml version="1.0" encoding="utf-8"?>
 <p:sld xmlns:a="http://schemas.openxmlformats.org/drawingml/2006/main" xmlns:r="http://schemas.openxmlformats.org/officeDocument/2006/relationships" xmlns:p="http://schemas.openxmlformats.org/presentationml/2006/main">
   <p:cSld>
     <p:spTree>
@@ -16155,7 +16376,7 @@
 </p:sld>
 </file>
 
-<file path=ppt/slides/slide12.xml><?xml version="1.0" encoding="utf-8"?>
+<file path=ppt/slides/slide14.xml><?xml version="1.0" encoding="utf-8"?>
 <p:sld xmlns:a="http://schemas.openxmlformats.org/drawingml/2006/main" xmlns:r="http://schemas.openxmlformats.org/officeDocument/2006/relationships" xmlns:p="http://schemas.openxmlformats.org/presentationml/2006/main">
   <p:cSld>
     <p:spTree>
@@ -16323,7 +16544,7 @@
 </p:sld>
 </file>
 
-<file path=ppt/slides/slide13.xml><?xml version="1.0" encoding="utf-8"?>
+<file path=ppt/slides/slide15.xml><?xml version="1.0" encoding="utf-8"?>
 <p:sld xmlns:a="http://schemas.openxmlformats.org/drawingml/2006/main" xmlns:r="http://schemas.openxmlformats.org/officeDocument/2006/relationships" xmlns:p="http://schemas.openxmlformats.org/presentationml/2006/main">
   <p:cSld>
     <p:spTree>
@@ -16507,7 +16728,7 @@
 </p:sld>
 </file>
 
-<file path=ppt/slides/slide14.xml><?xml version="1.0" encoding="utf-8"?>
+<file path=ppt/slides/slide16.xml><?xml version="1.0" encoding="utf-8"?>
 <p:sld xmlns:a="http://schemas.openxmlformats.org/drawingml/2006/main" xmlns:r="http://schemas.openxmlformats.org/officeDocument/2006/relationships" xmlns:p="http://schemas.openxmlformats.org/presentationml/2006/main">
   <p:cSld>
     <p:spTree>
@@ -16675,7 +16896,7 @@
 </p:sld>
 </file>
 
-<file path=ppt/slides/slide15.xml><?xml version="1.0" encoding="utf-8"?>
+<file path=ppt/slides/slide17.xml><?xml version="1.0" encoding="utf-8"?>
 <p:sld xmlns:a="http://schemas.openxmlformats.org/drawingml/2006/main" xmlns:r="http://schemas.openxmlformats.org/officeDocument/2006/relationships" xmlns:p="http://schemas.openxmlformats.org/presentationml/2006/main">
   <p:cSld>
     <p:spTree>
@@ -16814,6 +17035,358 @@
 </file>
 
 <file path=ppt/slides/slide4.xml><?xml version="1.0" encoding="utf-8"?>
+<p:sld xmlns:a="http://schemas.openxmlformats.org/drawingml/2006/main" xmlns:r="http://schemas.openxmlformats.org/officeDocument/2006/relationships" xmlns:p="http://schemas.openxmlformats.org/presentationml/2006/main">
+  <p:cSld>
+    <p:spTree>
+      <p:nvGrpSpPr>
+        <p:cNvPr id="1" name="">
+          <a:extLst>
+            <a:ext uri="{FF2B5EF4-FFF2-40B4-BE49-F238E27FC236}">
+              <a16:creationId xmlns:a16="http://schemas.microsoft.com/office/drawing/2014/main" id="{01D19129-3810-BE5A-81B5-603646231A2F}"/>
+            </a:ext>
+          </a:extLst>
+        </p:cNvPr>
+        <p:cNvGrpSpPr/>
+        <p:nvPr/>
+      </p:nvGrpSpPr>
+      <p:grpSpPr>
+        <a:xfrm>
+          <a:off x="0" y="0"/>
+          <a:ext cx="0" cy="0"/>
+          <a:chOff x="0" y="0"/>
+          <a:chExt cx="0" cy="0"/>
+        </a:xfrm>
+      </p:grpSpPr>
+      <p:sp>
+        <p:nvSpPr>
+          <p:cNvPr id="4" name="フリーフォーム: 図形 3">
+            <a:extLst>
+              <a:ext uri="{FF2B5EF4-FFF2-40B4-BE49-F238E27FC236}">
+                <a16:creationId xmlns:a16="http://schemas.microsoft.com/office/drawing/2014/main" id="{B7DFCDFD-7E7B-6736-F4BF-AD5B48930C38}"/>
+              </a:ext>
+            </a:extLst>
+          </p:cNvPr>
+          <p:cNvSpPr/>
+          <p:nvPr/>
+        </p:nvSpPr>
+        <p:spPr>
+          <a:xfrm>
+            <a:off x="0" y="0"/>
+            <a:ext cx="12192000" cy="6858000"/>
+          </a:xfrm>
+          <a:custGeom>
+            <a:avLst/>
+            <a:gdLst>
+              <a:gd name="csX0" fmla="*/ 5834359 w 12192000"/>
+              <a:gd name="csY0" fmla="*/ 2905041 h 6858000"/>
+              <a:gd name="csX1" fmla="*/ 4895682 w 12192000"/>
+              <a:gd name="csY1" fmla="*/ 3843717 h 6858000"/>
+              <a:gd name="csX2" fmla="*/ 5834359 w 12192000"/>
+              <a:gd name="csY2" fmla="*/ 4782393 h 6858000"/>
+              <a:gd name="csX3" fmla="*/ 6773034 w 12192000"/>
+              <a:gd name="csY3" fmla="*/ 3843717 h 6858000"/>
+              <a:gd name="csX4" fmla="*/ 5834359 w 12192000"/>
+              <a:gd name="csY4" fmla="*/ 2905041 h 6858000"/>
+              <a:gd name="csX5" fmla="*/ 0 w 12192000"/>
+              <a:gd name="csY5" fmla="*/ 0 h 6858000"/>
+              <a:gd name="csX6" fmla="*/ 12192000 w 12192000"/>
+              <a:gd name="csY6" fmla="*/ 0 h 6858000"/>
+              <a:gd name="csX7" fmla="*/ 12192000 w 12192000"/>
+              <a:gd name="csY7" fmla="*/ 6858000 h 6858000"/>
+              <a:gd name="csX8" fmla="*/ 0 w 12192000"/>
+              <a:gd name="csY8" fmla="*/ 6858000 h 6858000"/>
+            </a:gdLst>
+            <a:ahLst/>
+            <a:cxnLst>
+              <a:cxn ang="0">
+                <a:pos x="csX0" y="csY0"/>
+              </a:cxn>
+              <a:cxn ang="0">
+                <a:pos x="csX1" y="csY1"/>
+              </a:cxn>
+              <a:cxn ang="0">
+                <a:pos x="csX2" y="csY2"/>
+              </a:cxn>
+              <a:cxn ang="0">
+                <a:pos x="csX3" y="csY3"/>
+              </a:cxn>
+              <a:cxn ang="0">
+                <a:pos x="csX4" y="csY4"/>
+              </a:cxn>
+              <a:cxn ang="0">
+                <a:pos x="csX5" y="csY5"/>
+              </a:cxn>
+              <a:cxn ang="0">
+                <a:pos x="csX6" y="csY6"/>
+              </a:cxn>
+              <a:cxn ang="0">
+                <a:pos x="csX7" y="csY7"/>
+              </a:cxn>
+              <a:cxn ang="0">
+                <a:pos x="csX8" y="csY8"/>
+              </a:cxn>
+            </a:cxnLst>
+            <a:rect l="l" t="t" r="r" b="b"/>
+            <a:pathLst>
+              <a:path w="12192000" h="6858000">
+                <a:moveTo>
+                  <a:pt x="5834359" y="2905041"/>
+                </a:moveTo>
+                <a:cubicBezTo>
+                  <a:pt x="5315942" y="2905041"/>
+                  <a:pt x="4895682" y="3325301"/>
+                  <a:pt x="4895682" y="3843717"/>
+                </a:cubicBezTo>
+                <a:cubicBezTo>
+                  <a:pt x="4895682" y="4362133"/>
+                  <a:pt x="5315942" y="4782393"/>
+                  <a:pt x="5834359" y="4782393"/>
+                </a:cubicBezTo>
+                <a:cubicBezTo>
+                  <a:pt x="6352774" y="4782393"/>
+                  <a:pt x="6773034" y="4362133"/>
+                  <a:pt x="6773034" y="3843717"/>
+                </a:cubicBezTo>
+                <a:cubicBezTo>
+                  <a:pt x="6773034" y="3325301"/>
+                  <a:pt x="6352774" y="2905041"/>
+                  <a:pt x="5834359" y="2905041"/>
+                </a:cubicBezTo>
+                <a:close/>
+                <a:moveTo>
+                  <a:pt x="0" y="0"/>
+                </a:moveTo>
+                <a:lnTo>
+                  <a:pt x="12192000" y="0"/>
+                </a:lnTo>
+                <a:lnTo>
+                  <a:pt x="12192000" y="6858000"/>
+                </a:lnTo>
+                <a:lnTo>
+                  <a:pt x="0" y="6858000"/>
+                </a:lnTo>
+                <a:close/>
+              </a:path>
+            </a:pathLst>
+          </a:custGeom>
+          <a:solidFill>
+            <a:srgbClr val="000000">
+              <a:alpha val="20000"/>
+            </a:srgbClr>
+          </a:solidFill>
+          <a:ln>
+            <a:noFill/>
+          </a:ln>
+        </p:spPr>
+        <p:style>
+          <a:lnRef idx="2">
+            <a:schemeClr val="accent1">
+              <a:shade val="15000"/>
+            </a:schemeClr>
+          </a:lnRef>
+          <a:fillRef idx="1">
+            <a:schemeClr val="accent1"/>
+          </a:fillRef>
+          <a:effectRef idx="0">
+            <a:schemeClr val="accent1"/>
+          </a:effectRef>
+          <a:fontRef idx="minor">
+            <a:schemeClr val="lt1"/>
+          </a:fontRef>
+        </p:style>
+        <p:txBody>
+          <a:bodyPr wrap="square" rtlCol="0" anchor="ctr">
+            <a:noAutofit/>
+          </a:bodyPr>
+          <a:lstStyle/>
+          <a:p>
+            <a:pPr algn="ctr"/>
+            <a:endParaRPr lang="ja-JP" altLang="en-US"/>
+          </a:p>
+        </p:txBody>
+      </p:sp>
+    </p:spTree>
+    <p:extLst>
+      <p:ext uri="{BB962C8B-B14F-4D97-AF65-F5344CB8AC3E}">
+        <p14:creationId xmlns:p14="http://schemas.microsoft.com/office/powerpoint/2010/main" val="3498351537"/>
+      </p:ext>
+    </p:extLst>
+  </p:cSld>
+  <p:clrMapOvr>
+    <a:masterClrMapping/>
+  </p:clrMapOvr>
+</p:sld>
+</file>
+
+<file path=ppt/slides/slide5.xml><?xml version="1.0" encoding="utf-8"?>
+<p:sld xmlns:a="http://schemas.openxmlformats.org/drawingml/2006/main" xmlns:r="http://schemas.openxmlformats.org/officeDocument/2006/relationships" xmlns:p="http://schemas.openxmlformats.org/presentationml/2006/main">
+  <p:cSld>
+    <p:spTree>
+      <p:nvGrpSpPr>
+        <p:cNvPr id="1" name="">
+          <a:extLst>
+            <a:ext uri="{FF2B5EF4-FFF2-40B4-BE49-F238E27FC236}">
+              <a16:creationId xmlns:a16="http://schemas.microsoft.com/office/drawing/2014/main" id="{D65B2E54-CD7D-3123-E610-A0E96C7BF5AC}"/>
+            </a:ext>
+          </a:extLst>
+        </p:cNvPr>
+        <p:cNvGrpSpPr/>
+        <p:nvPr/>
+      </p:nvGrpSpPr>
+      <p:grpSpPr>
+        <a:xfrm>
+          <a:off x="0" y="0"/>
+          <a:ext cx="0" cy="0"/>
+          <a:chOff x="0" y="0"/>
+          <a:chExt cx="0" cy="0"/>
+        </a:xfrm>
+      </p:grpSpPr>
+      <p:sp>
+        <p:nvSpPr>
+          <p:cNvPr id="4" name="フリーフォーム: 図形 3">
+            <a:extLst>
+              <a:ext uri="{FF2B5EF4-FFF2-40B4-BE49-F238E27FC236}">
+                <a16:creationId xmlns:a16="http://schemas.microsoft.com/office/drawing/2014/main" id="{C54D1445-C348-3C05-2C47-190B5720269B}"/>
+              </a:ext>
+            </a:extLst>
+          </p:cNvPr>
+          <p:cNvSpPr/>
+          <p:nvPr/>
+        </p:nvSpPr>
+        <p:spPr>
+          <a:xfrm>
+            <a:off x="0" y="0"/>
+            <a:ext cx="12192000" cy="6858000"/>
+          </a:xfrm>
+          <a:custGeom>
+            <a:avLst/>
+            <a:gdLst>
+              <a:gd name="csX0" fmla="*/ 1594131 w 12192000"/>
+              <a:gd name="csY0" fmla="*/ 4855221 h 6858000"/>
+              <a:gd name="csX1" fmla="*/ 1594131 w 12192000"/>
+              <a:gd name="csY1" fmla="*/ 5478308 h 6858000"/>
+              <a:gd name="csX2" fmla="*/ 10600566 w 12192000"/>
+              <a:gd name="csY2" fmla="*/ 5478308 h 6858000"/>
+              <a:gd name="csX3" fmla="*/ 10600566 w 12192000"/>
+              <a:gd name="csY3" fmla="*/ 4855221 h 6858000"/>
+              <a:gd name="csX4" fmla="*/ 0 w 12192000"/>
+              <a:gd name="csY4" fmla="*/ 0 h 6858000"/>
+              <a:gd name="csX5" fmla="*/ 12192000 w 12192000"/>
+              <a:gd name="csY5" fmla="*/ 0 h 6858000"/>
+              <a:gd name="csX6" fmla="*/ 12192000 w 12192000"/>
+              <a:gd name="csY6" fmla="*/ 6858000 h 6858000"/>
+              <a:gd name="csX7" fmla="*/ 0 w 12192000"/>
+              <a:gd name="csY7" fmla="*/ 6858000 h 6858000"/>
+            </a:gdLst>
+            <a:ahLst/>
+            <a:cxnLst>
+              <a:cxn ang="0">
+                <a:pos x="csX0" y="csY0"/>
+              </a:cxn>
+              <a:cxn ang="0">
+                <a:pos x="csX1" y="csY1"/>
+              </a:cxn>
+              <a:cxn ang="0">
+                <a:pos x="csX2" y="csY2"/>
+              </a:cxn>
+              <a:cxn ang="0">
+                <a:pos x="csX3" y="csY3"/>
+              </a:cxn>
+              <a:cxn ang="0">
+                <a:pos x="csX4" y="csY4"/>
+              </a:cxn>
+              <a:cxn ang="0">
+                <a:pos x="csX5" y="csY5"/>
+              </a:cxn>
+              <a:cxn ang="0">
+                <a:pos x="csX6" y="csY6"/>
+              </a:cxn>
+              <a:cxn ang="0">
+                <a:pos x="csX7" y="csY7"/>
+              </a:cxn>
+            </a:cxnLst>
+            <a:rect l="l" t="t" r="r" b="b"/>
+            <a:pathLst>
+              <a:path w="12192000" h="6858000">
+                <a:moveTo>
+                  <a:pt x="1594131" y="4855221"/>
+                </a:moveTo>
+                <a:lnTo>
+                  <a:pt x="1594131" y="5478308"/>
+                </a:lnTo>
+                <a:lnTo>
+                  <a:pt x="10600566" y="5478308"/>
+                </a:lnTo>
+                <a:lnTo>
+                  <a:pt x="10600566" y="4855221"/>
+                </a:lnTo>
+                <a:close/>
+                <a:moveTo>
+                  <a:pt x="0" y="0"/>
+                </a:moveTo>
+                <a:lnTo>
+                  <a:pt x="12192000" y="0"/>
+                </a:lnTo>
+                <a:lnTo>
+                  <a:pt x="12192000" y="6858000"/>
+                </a:lnTo>
+                <a:lnTo>
+                  <a:pt x="0" y="6858000"/>
+                </a:lnTo>
+                <a:close/>
+              </a:path>
+            </a:pathLst>
+          </a:custGeom>
+          <a:solidFill>
+            <a:srgbClr val="000000">
+              <a:alpha val="20000"/>
+            </a:srgbClr>
+          </a:solidFill>
+          <a:ln>
+            <a:noFill/>
+          </a:ln>
+        </p:spPr>
+        <p:style>
+          <a:lnRef idx="2">
+            <a:schemeClr val="accent1">
+              <a:shade val="15000"/>
+            </a:schemeClr>
+          </a:lnRef>
+          <a:fillRef idx="1">
+            <a:schemeClr val="accent1"/>
+          </a:fillRef>
+          <a:effectRef idx="0">
+            <a:schemeClr val="accent1"/>
+          </a:effectRef>
+          <a:fontRef idx="minor">
+            <a:schemeClr val="lt1"/>
+          </a:fontRef>
+        </p:style>
+        <p:txBody>
+          <a:bodyPr wrap="square" rtlCol="0" anchor="ctr">
+            <a:noAutofit/>
+          </a:bodyPr>
+          <a:lstStyle/>
+          <a:p>
+            <a:pPr algn="ctr"/>
+            <a:endParaRPr lang="ja-JP" altLang="en-US"/>
+          </a:p>
+        </p:txBody>
+      </p:sp>
+    </p:spTree>
+    <p:extLst>
+      <p:ext uri="{BB962C8B-B14F-4D97-AF65-F5344CB8AC3E}">
+        <p14:creationId xmlns:p14="http://schemas.microsoft.com/office/powerpoint/2010/main" val="1784387623"/>
+      </p:ext>
+    </p:extLst>
+  </p:cSld>
+  <p:clrMapOvr>
+    <a:masterClrMapping/>
+  </p:clrMapOvr>
+</p:sld>
+</file>
+
+<file path=ppt/slides/slide6.xml><?xml version="1.0" encoding="utf-8"?>
 <p:sld xmlns:a="http://schemas.openxmlformats.org/drawingml/2006/main" xmlns:r="http://schemas.openxmlformats.org/officeDocument/2006/relationships" xmlns:p="http://schemas.openxmlformats.org/presentationml/2006/main">
   <p:cSld>
     <p:spTree>
@@ -16997,7 +17570,7 @@
 </p:sld>
 </file>
 
-<file path=ppt/slides/slide5.xml><?xml version="1.0" encoding="utf-8"?>
+<file path=ppt/slides/slide7.xml><?xml version="1.0" encoding="utf-8"?>
 <p:sld xmlns:a="http://schemas.openxmlformats.org/drawingml/2006/main" xmlns:r="http://schemas.openxmlformats.org/officeDocument/2006/relationships" xmlns:p="http://schemas.openxmlformats.org/presentationml/2006/main">
   <p:cSld>
     <p:spTree>
@@ -17165,7 +17738,7 @@
 </p:sld>
 </file>
 
-<file path=ppt/slides/slide6.xml><?xml version="1.0" encoding="utf-8"?>
+<file path=ppt/slides/slide8.xml><?xml version="1.0" encoding="utf-8"?>
 <p:sld xmlns:a="http://schemas.openxmlformats.org/drawingml/2006/main" xmlns:r="http://schemas.openxmlformats.org/officeDocument/2006/relationships" xmlns:p="http://schemas.openxmlformats.org/presentationml/2006/main">
   <p:cSld>
     <p:spTree>
@@ -17349,7 +17922,7 @@
 </p:sld>
 </file>
 
-<file path=ppt/slides/slide7.xml><?xml version="1.0" encoding="utf-8"?>
+<file path=ppt/slides/slide9.xml><?xml version="1.0" encoding="utf-8"?>
 <p:sld xmlns:a="http://schemas.openxmlformats.org/drawingml/2006/main" xmlns:r="http://schemas.openxmlformats.org/officeDocument/2006/relationships" xmlns:p="http://schemas.openxmlformats.org/presentationml/2006/main">
   <p:cSld>
     <p:spTree>
@@ -17508,220 +18081,6 @@
     <p:extLst>
       <p:ext uri="{BB962C8B-B14F-4D97-AF65-F5344CB8AC3E}">
         <p14:creationId xmlns:p14="http://schemas.microsoft.com/office/powerpoint/2010/main" val="3979558141"/>
-      </p:ext>
-    </p:extLst>
-  </p:cSld>
-  <p:clrMapOvr>
-    <a:masterClrMapping/>
-  </p:clrMapOvr>
-</p:sld>
-</file>
-
-<file path=ppt/slides/slide8.xml><?xml version="1.0" encoding="utf-8"?>
-<p:sld xmlns:a="http://schemas.openxmlformats.org/drawingml/2006/main" xmlns:r="http://schemas.openxmlformats.org/officeDocument/2006/relationships" xmlns:p="http://schemas.openxmlformats.org/presentationml/2006/main">
-  <p:cSld>
-    <p:spTree>
-      <p:nvGrpSpPr>
-        <p:cNvPr id="1" name="">
-          <a:extLst>
-            <a:ext uri="{FF2B5EF4-FFF2-40B4-BE49-F238E27FC236}">
-              <a16:creationId xmlns:a16="http://schemas.microsoft.com/office/drawing/2014/main" id="{000D65ED-AB26-B0BD-CED1-C183D7EF3C95}"/>
-            </a:ext>
-          </a:extLst>
-        </p:cNvPr>
-        <p:cNvGrpSpPr/>
-        <p:nvPr/>
-      </p:nvGrpSpPr>
-      <p:grpSpPr>
-        <a:xfrm>
-          <a:off x="0" y="0"/>
-          <a:ext cx="0" cy="0"/>
-          <a:chOff x="0" y="0"/>
-          <a:chExt cx="0" cy="0"/>
-        </a:xfrm>
-      </p:grpSpPr>
-    </p:spTree>
-    <p:extLst>
-      <p:ext uri="{BB962C8B-B14F-4D97-AF65-F5344CB8AC3E}">
-        <p14:creationId xmlns:p14="http://schemas.microsoft.com/office/powerpoint/2010/main" val="4235853481"/>
-      </p:ext>
-    </p:extLst>
-  </p:cSld>
-  <p:clrMapOvr>
-    <a:masterClrMapping/>
-  </p:clrMapOvr>
-</p:sld>
-</file>
-
-<file path=ppt/slides/slide9.xml><?xml version="1.0" encoding="utf-8"?>
-<p:sld xmlns:a="http://schemas.openxmlformats.org/drawingml/2006/main" xmlns:r="http://schemas.openxmlformats.org/officeDocument/2006/relationships" xmlns:p="http://schemas.openxmlformats.org/presentationml/2006/main">
-  <p:cSld>
-    <p:spTree>
-      <p:nvGrpSpPr>
-        <p:cNvPr id="1" name=""/>
-        <p:cNvGrpSpPr/>
-        <p:nvPr/>
-      </p:nvGrpSpPr>
-      <p:grpSpPr>
-        <a:xfrm>
-          <a:off x="0" y="0"/>
-          <a:ext cx="0" cy="0"/>
-          <a:chOff x="0" y="0"/>
-          <a:chExt cx="0" cy="0"/>
-        </a:xfrm>
-      </p:grpSpPr>
-      <p:sp>
-        <p:nvSpPr>
-          <p:cNvPr id="4" name="フリーフォーム: 図形 3">
-            <a:extLst>
-              <a:ext uri="{FF2B5EF4-FFF2-40B4-BE49-F238E27FC236}">
-                <a16:creationId xmlns:a16="http://schemas.microsoft.com/office/drawing/2014/main" id="{0B9173A0-3250-0ECC-59B2-5D1DDFB22AB1}"/>
-              </a:ext>
-            </a:extLst>
-          </p:cNvPr>
-          <p:cNvSpPr/>
-          <p:nvPr/>
-        </p:nvSpPr>
-        <p:spPr>
-          <a:xfrm>
-            <a:off x="0" y="0"/>
-            <a:ext cx="12192000" cy="6858000"/>
-          </a:xfrm>
-          <a:custGeom>
-            <a:avLst/>
-            <a:gdLst>
-              <a:gd name="csX0" fmla="*/ 3123526 w 12192000"/>
-              <a:gd name="csY0" fmla="*/ 3706153 h 6858000"/>
-              <a:gd name="csX1" fmla="*/ 2184850 w 12192000"/>
-              <a:gd name="csY1" fmla="*/ 4644829 h 6858000"/>
-              <a:gd name="csX2" fmla="*/ 3123526 w 12192000"/>
-              <a:gd name="csY2" fmla="*/ 5583505 h 6858000"/>
-              <a:gd name="csX3" fmla="*/ 4062202 w 12192000"/>
-              <a:gd name="csY3" fmla="*/ 4644829 h 6858000"/>
-              <a:gd name="csX4" fmla="*/ 3123526 w 12192000"/>
-              <a:gd name="csY4" fmla="*/ 3706153 h 6858000"/>
-              <a:gd name="csX5" fmla="*/ 0 w 12192000"/>
-              <a:gd name="csY5" fmla="*/ 0 h 6858000"/>
-              <a:gd name="csX6" fmla="*/ 12192000 w 12192000"/>
-              <a:gd name="csY6" fmla="*/ 0 h 6858000"/>
-              <a:gd name="csX7" fmla="*/ 12192000 w 12192000"/>
-              <a:gd name="csY7" fmla="*/ 6858000 h 6858000"/>
-              <a:gd name="csX8" fmla="*/ 0 w 12192000"/>
-              <a:gd name="csY8" fmla="*/ 6858000 h 6858000"/>
-            </a:gdLst>
-            <a:ahLst/>
-            <a:cxnLst>
-              <a:cxn ang="0">
-                <a:pos x="csX0" y="csY0"/>
-              </a:cxn>
-              <a:cxn ang="0">
-                <a:pos x="csX1" y="csY1"/>
-              </a:cxn>
-              <a:cxn ang="0">
-                <a:pos x="csX2" y="csY2"/>
-              </a:cxn>
-              <a:cxn ang="0">
-                <a:pos x="csX3" y="csY3"/>
-              </a:cxn>
-              <a:cxn ang="0">
-                <a:pos x="csX4" y="csY4"/>
-              </a:cxn>
-              <a:cxn ang="0">
-                <a:pos x="csX5" y="csY5"/>
-              </a:cxn>
-              <a:cxn ang="0">
-                <a:pos x="csX6" y="csY6"/>
-              </a:cxn>
-              <a:cxn ang="0">
-                <a:pos x="csX7" y="csY7"/>
-              </a:cxn>
-              <a:cxn ang="0">
-                <a:pos x="csX8" y="csY8"/>
-              </a:cxn>
-            </a:cxnLst>
-            <a:rect l="l" t="t" r="r" b="b"/>
-            <a:pathLst>
-              <a:path w="12192000" h="6858000">
-                <a:moveTo>
-                  <a:pt x="3123526" y="3706153"/>
-                </a:moveTo>
-                <a:cubicBezTo>
-                  <a:pt x="2605110" y="3706153"/>
-                  <a:pt x="2184850" y="4126413"/>
-                  <a:pt x="2184850" y="4644829"/>
-                </a:cubicBezTo>
-                <a:cubicBezTo>
-                  <a:pt x="2184850" y="5163245"/>
-                  <a:pt x="2605110" y="5583505"/>
-                  <a:pt x="3123526" y="5583505"/>
-                </a:cubicBezTo>
-                <a:cubicBezTo>
-                  <a:pt x="3641942" y="5583505"/>
-                  <a:pt x="4062202" y="5163245"/>
-                  <a:pt x="4062202" y="4644829"/>
-                </a:cubicBezTo>
-                <a:cubicBezTo>
-                  <a:pt x="4062202" y="4126413"/>
-                  <a:pt x="3641942" y="3706153"/>
-                  <a:pt x="3123526" y="3706153"/>
-                </a:cubicBezTo>
-                <a:close/>
-                <a:moveTo>
-                  <a:pt x="0" y="0"/>
-                </a:moveTo>
-                <a:lnTo>
-                  <a:pt x="12192000" y="0"/>
-                </a:lnTo>
-                <a:lnTo>
-                  <a:pt x="12192000" y="6858000"/>
-                </a:lnTo>
-                <a:lnTo>
-                  <a:pt x="0" y="6858000"/>
-                </a:lnTo>
-                <a:close/>
-              </a:path>
-            </a:pathLst>
-          </a:custGeom>
-          <a:solidFill>
-            <a:srgbClr val="000000">
-              <a:alpha val="20000"/>
-            </a:srgbClr>
-          </a:solidFill>
-          <a:ln>
-            <a:noFill/>
-          </a:ln>
-        </p:spPr>
-        <p:style>
-          <a:lnRef idx="2">
-            <a:schemeClr val="accent1">
-              <a:shade val="15000"/>
-            </a:schemeClr>
-          </a:lnRef>
-          <a:fillRef idx="1">
-            <a:schemeClr val="accent1"/>
-          </a:fillRef>
-          <a:effectRef idx="0">
-            <a:schemeClr val="accent1"/>
-          </a:effectRef>
-          <a:fontRef idx="minor">
-            <a:schemeClr val="lt1"/>
-          </a:fontRef>
-        </p:style>
-        <p:txBody>
-          <a:bodyPr wrap="square" rtlCol="0" anchor="ctr">
-            <a:noAutofit/>
-          </a:bodyPr>
-          <a:lstStyle/>
-          <a:p>
-            <a:pPr algn="ctr"/>
-            <a:endParaRPr lang="ja-JP" altLang="en-US"/>
-          </a:p>
-        </p:txBody>
-      </p:sp>
-    </p:spTree>
-    <p:extLst>
-      <p:ext uri="{BB962C8B-B14F-4D97-AF65-F5344CB8AC3E}">
-        <p14:creationId xmlns:p14="http://schemas.microsoft.com/office/powerpoint/2010/main" val="953920564"/>
       </p:ext>
     </p:extLst>
   </p:cSld>

--- a/tools/llm-as-a-judge/readme.pptx
+++ b/tools/llm-as-a-judge/readme.pptx
@@ -1424,7 +1424,7 @@
           <p:nvPr userDrawn="1">
             <p:extLst>
               <p:ext uri="{D42A27DB-BD31-4B8C-83A1-F6EECF244321}">
-                <p14:modId xmlns:p14="http://schemas.microsoft.com/office/powerpoint/2010/main" val="3447788637"/>
+                <p14:modId xmlns:p14="http://schemas.microsoft.com/office/powerpoint/2010/main" val="4272971702"/>
               </p:ext>
             </p:extLst>
           </p:nvPr>
@@ -1941,6 +1941,9 @@
                       </a:r>
                       <a:r>
                         <a:rPr kumimoji="1" lang="en-US" altLang="ja-JP" sz="1200" b="1" i="1">
+                          <a:solidFill>
+                            <a:srgbClr val="FF0000"/>
+                          </a:solidFill>
                           <a:latin typeface="Cascadia Code SemiBold" panose="020B0609020000020004" pitchFamily="49" charset="0"/>
                           <a:ea typeface="Cascadia Code SemiBold" panose="020B0609020000020004" pitchFamily="49" charset="0"/>
                           <a:cs typeface="Cascadia Code SemiBold" panose="020B0609020000020004" pitchFamily="49" charset="0"/>
@@ -1957,11 +1960,14 @@
                       </a:r>
                       <a:r>
                         <a:rPr kumimoji="1" lang="en-US" altLang="ja-JP" sz="1200" b="1" i="1">
+                          <a:solidFill>
+                            <a:srgbClr val="FF0000"/>
+                          </a:solidFill>
                           <a:latin typeface="Cascadia Code SemiBold" panose="020B0609020000020004" pitchFamily="49" charset="0"/>
                           <a:ea typeface="Cascadia Code SemiBold" panose="020B0609020000020004" pitchFamily="49" charset="0"/>
                           <a:cs typeface="Cascadia Code SemiBold" panose="020B0609020000020004" pitchFamily="49" charset="0"/>
                         </a:rPr>
-                        <a:t>work/*.prompt.txt</a:t>
+                        <a:t>work/*.01-prompt.txt</a:t>
                       </a:r>
                       <a:r>
                         <a:rPr kumimoji="1" lang="en-US" altLang="ja-JP" sz="1200">
@@ -2099,11 +2105,14 @@
                       </a:r>
                       <a:r>
                         <a:rPr kumimoji="1" lang="en-US" altLang="ja-JP" sz="1200" b="1" i="1">
+                          <a:solidFill>
+                            <a:srgbClr val="FF0000"/>
+                          </a:solidFill>
                           <a:latin typeface="Cascadia Code SemiBold" panose="020B0609020000020004" pitchFamily="49" charset="0"/>
                           <a:ea typeface="Cascadia Code SemiBold" panose="020B0609020000020004" pitchFamily="49" charset="0"/>
                           <a:cs typeface="Cascadia Code SemiBold" panose="020B0609020000020004" pitchFamily="49" charset="0"/>
                         </a:rPr>
-                        <a:t>work/*.prompt.txt</a:t>
+                        <a:t>work/*.01-prompt.txt</a:t>
                       </a:r>
                       <a:r>
                         <a:rPr kumimoji="1" lang="en-US" altLang="ja-JP" sz="1200">
@@ -2115,6 +2124,9 @@
                       </a:r>
                       <a:r>
                         <a:rPr kumimoji="1" lang="en-US" altLang="ja-JP" sz="1200" b="1" i="1">
+                          <a:solidFill>
+                            <a:srgbClr val="FF0000"/>
+                          </a:solidFill>
                           <a:latin typeface="Cascadia Code SemiBold" panose="020B0609020000020004" pitchFamily="49" charset="0"/>
                           <a:ea typeface="Cascadia Code SemiBold" panose="020B0609020000020004" pitchFamily="49" charset="0"/>
                           <a:cs typeface="Cascadia Code SemiBold" panose="020B0609020000020004" pitchFamily="49" charset="0"/>
@@ -2131,11 +2143,14 @@
                       </a:r>
                       <a:r>
                         <a:rPr kumimoji="1" lang="en-US" altLang="ja-JP" sz="1200" b="1" i="1">
+                          <a:solidFill>
+                            <a:srgbClr val="FF0000"/>
+                          </a:solidFill>
                           <a:latin typeface="Cascadia Code SemiBold" panose="020B0609020000020004" pitchFamily="49" charset="0"/>
                           <a:ea typeface="Cascadia Code SemiBold" panose="020B0609020000020004" pitchFamily="49" charset="0"/>
                           <a:cs typeface="Cascadia Code SemiBold" panose="020B0609020000020004" pitchFamily="49" charset="0"/>
                         </a:rPr>
-                        <a:t>work/*.generated.xlsx</a:t>
+                        <a:t>work/*.02-generated.xlsx</a:t>
                       </a:r>
                       <a:r>
                         <a:rPr kumimoji="1" lang="en-US" altLang="ja-JP" sz="1200">
@@ -2273,11 +2288,14 @@
                       </a:r>
                       <a:r>
                         <a:rPr kumimoji="1" lang="en-US" altLang="ja-JP" sz="1200" b="1" i="1">
+                          <a:solidFill>
+                            <a:srgbClr val="FF0000"/>
+                          </a:solidFill>
                           <a:latin typeface="Cascadia Code SemiBold" panose="020B0609020000020004" pitchFamily="49" charset="0"/>
                           <a:ea typeface="Cascadia Code SemiBold" panose="020B0609020000020004" pitchFamily="49" charset="0"/>
                           <a:cs typeface="Cascadia Code SemiBold" panose="020B0609020000020004" pitchFamily="49" charset="0"/>
                         </a:rPr>
-                        <a:t>work/*.generated.xlsx</a:t>
+                        <a:t>work/*.02-generated.xlsx</a:t>
                       </a:r>
                       <a:r>
                         <a:rPr kumimoji="1" lang="en-US" altLang="ja-JP" sz="1200">
@@ -2289,6 +2307,9 @@
                       </a:r>
                       <a:r>
                         <a:rPr kumimoji="1" lang="en-US" altLang="ja-JP" sz="1200" b="1" i="1">
+                          <a:solidFill>
+                            <a:srgbClr val="FF0000"/>
+                          </a:solidFill>
                           <a:latin typeface="Cascadia Code SemiBold" panose="020B0609020000020004" pitchFamily="49" charset="0"/>
                           <a:ea typeface="Cascadia Code SemiBold" panose="020B0609020000020004" pitchFamily="49" charset="0"/>
                           <a:cs typeface="Cascadia Code SemiBold" panose="020B0609020000020004" pitchFamily="49" charset="0"/>
@@ -2305,11 +2326,14 @@
                       </a:r>
                       <a:r>
                         <a:rPr kumimoji="1" lang="en-US" altLang="ja-JP" sz="1200" b="1" i="1">
+                          <a:solidFill>
+                            <a:srgbClr val="FF0000"/>
+                          </a:solidFill>
                           <a:latin typeface="Cascadia Code SemiBold" panose="020B0609020000020004" pitchFamily="49" charset="0"/>
                           <a:ea typeface="Cascadia Code SemiBold" panose="020B0609020000020004" pitchFamily="49" charset="0"/>
                           <a:cs typeface="Cascadia Code SemiBold" panose="020B0609020000020004" pitchFamily="49" charset="0"/>
                         </a:rPr>
-                        <a:t>work/*.judged.xlsx</a:t>
+                        <a:t>work/*.03-judged.xlsx</a:t>
                       </a:r>
                       <a:r>
                         <a:rPr kumimoji="1" lang="en-US" altLang="ja-JP" sz="1200">
@@ -2443,15 +2467,37 @@
                           <a:ea typeface="Cascadia Code SemiBold" panose="020B0609020000020004" pitchFamily="49" charset="0"/>
                           <a:cs typeface="Cascadia Code SemiBold" panose="020B0609020000020004" pitchFamily="49" charset="0"/>
                         </a:rPr>
-                        <a:t>This SCRIPT generates report.html based on the results in </a:t>
+                        <a:t>This SCRIPT generates </a:t>
                       </a:r>
                       <a:r>
-                        <a:rPr kumimoji="1" lang="en-US" altLang="ja-JP" sz="1200" b="1" i="1">
+                        <a:rPr kumimoji="1" lang="en-US" altLang="ja-JP" sz="1200">
+                          <a:solidFill>
+                            <a:srgbClr val="FF0000"/>
+                          </a:solidFill>
                           <a:latin typeface="Cascadia Code SemiBold" panose="020B0609020000020004" pitchFamily="49" charset="0"/>
                           <a:ea typeface="Cascadia Code SemiBold" panose="020B0609020000020004" pitchFamily="49" charset="0"/>
                           <a:cs typeface="Cascadia Code SemiBold" panose="020B0609020000020004" pitchFamily="49" charset="0"/>
                         </a:rPr>
-                        <a:t>work/*.judged.xlsx</a:t>
+                        <a:t>report.html</a:t>
+                      </a:r>
+                      <a:r>
+                        <a:rPr kumimoji="1" lang="en-US" altLang="ja-JP" sz="1200">
+                          <a:latin typeface="Cascadia Code SemiBold" panose="020B0609020000020004" pitchFamily="49" charset="0"/>
+                          <a:ea typeface="Cascadia Code SemiBold" panose="020B0609020000020004" pitchFamily="49" charset="0"/>
+                          <a:cs typeface="Cascadia Code SemiBold" panose="020B0609020000020004" pitchFamily="49" charset="0"/>
+                        </a:rPr>
+                        <a:t> based on the results in </a:t>
+                      </a:r>
+                      <a:r>
+                        <a:rPr kumimoji="1" lang="en-US" altLang="ja-JP" sz="1200" b="1" i="1">
+                          <a:solidFill>
+                            <a:srgbClr val="FF0000"/>
+                          </a:solidFill>
+                          <a:latin typeface="Cascadia Code SemiBold" panose="020B0609020000020004" pitchFamily="49" charset="0"/>
+                          <a:ea typeface="Cascadia Code SemiBold" panose="020B0609020000020004" pitchFamily="49" charset="0"/>
+                          <a:cs typeface="Cascadia Code SemiBold" panose="020B0609020000020004" pitchFamily="49" charset="0"/>
+                        </a:rPr>
+                        <a:t>work/*.03-judged.xlsx</a:t>
                       </a:r>
                       <a:r>
                         <a:rPr kumimoji="1" lang="en-US" altLang="ja-JP" sz="1200">
@@ -2589,6 +2635,9 @@
                       </a:r>
                       <a:r>
                         <a:rPr kumimoji="1" lang="en-US" altLang="ja-JP" sz="1200" b="1" i="1">
+                          <a:solidFill>
+                            <a:srgbClr val="FF0000"/>
+                          </a:solidFill>
                           <a:latin typeface="Cascadia Code SemiBold" panose="020B0609020000020004" pitchFamily="49" charset="0"/>
                           <a:ea typeface="Cascadia Code SemiBold" panose="020B0609020000020004" pitchFamily="49" charset="0"/>
                           <a:cs typeface="Cascadia Code SemiBold" panose="020B0609020000020004" pitchFamily="49" charset="0"/>
@@ -2605,6 +2654,9 @@
                       </a:r>
                       <a:r>
                         <a:rPr kumimoji="1" lang="en-US" altLang="ja-JP" sz="1200" b="1" i="1">
+                          <a:solidFill>
+                            <a:srgbClr val="FF0000"/>
+                          </a:solidFill>
                           <a:latin typeface="Cascadia Code SemiBold" panose="020B0609020000020004" pitchFamily="49" charset="0"/>
                           <a:ea typeface="Cascadia Code SemiBold" panose="020B0609020000020004" pitchFamily="49" charset="0"/>
                           <a:cs typeface="Cascadia Code SemiBold" panose="020B0609020000020004" pitchFamily="49" charset="0"/>
@@ -2621,6 +2673,9 @@
                       </a:r>
                       <a:r>
                         <a:rPr kumimoji="1" lang="en-US" altLang="ja-JP" sz="1200" b="1" i="1">
+                          <a:solidFill>
+                            <a:srgbClr val="FF0000"/>
+                          </a:solidFill>
                           <a:latin typeface="Cascadia Code SemiBold" panose="020B0609020000020004" pitchFamily="49" charset="0"/>
                           <a:ea typeface="Cascadia Code SemiBold" panose="020B0609020000020004" pitchFamily="49" charset="0"/>
                           <a:cs typeface="Cascadia Code SemiBold" panose="020B0609020000020004" pitchFamily="49" charset="0"/>
@@ -3015,11 +3070,14 @@
                       </a:r>
                       <a:r>
                         <a:rPr kumimoji="1" lang="en-US" altLang="ja-JP" sz="1200" b="1" i="1">
+                          <a:solidFill>
+                            <a:srgbClr val="FF0000"/>
+                          </a:solidFill>
                           <a:latin typeface="Cascadia Code SemiBold" panose="020B0609020000020004" pitchFamily="49" charset="0"/>
                           <a:ea typeface="Cascadia Code SemiBold" panose="020B0609020000020004" pitchFamily="49" charset="0"/>
                           <a:cs typeface="Cascadia Code SemiBold" panose="020B0609020000020004" pitchFamily="49" charset="0"/>
                         </a:rPr>
-                        <a:t>*.prompt.txt</a:t>
+                        <a:t>*.01-prompt.txt</a:t>
                       </a:r>
                       <a:r>
                         <a:rPr kumimoji="1" lang="en-US" altLang="ja-JP" sz="1200">
@@ -3031,11 +3089,14 @@
                       </a:r>
                       <a:r>
                         <a:rPr kumimoji="1" lang="en-US" altLang="ja-JP" sz="1200" b="1" i="1">
+                          <a:solidFill>
+                            <a:srgbClr val="FF0000"/>
+                          </a:solidFill>
                           <a:latin typeface="Cascadia Code SemiBold" panose="020B0609020000020004" pitchFamily="49" charset="0"/>
                           <a:ea typeface="Cascadia Code SemiBold" panose="020B0609020000020004" pitchFamily="49" charset="0"/>
                           <a:cs typeface="Cascadia Code SemiBold" panose="020B0609020000020004" pitchFamily="49" charset="0"/>
                         </a:rPr>
-                        <a:t>*.generated.xlsx</a:t>
+                        <a:t>*.02-generated.xlsx</a:t>
                       </a:r>
                       <a:r>
                         <a:rPr kumimoji="1" lang="en-US" altLang="ja-JP" sz="1200">
@@ -3047,11 +3108,14 @@
                       </a:r>
                       <a:r>
                         <a:rPr kumimoji="1" lang="en-US" altLang="ja-JP" sz="1200" b="1" i="1">
+                          <a:solidFill>
+                            <a:srgbClr val="FF0000"/>
+                          </a:solidFill>
                           <a:latin typeface="Cascadia Code SemiBold" panose="020B0609020000020004" pitchFamily="49" charset="0"/>
                           <a:ea typeface="Cascadia Code SemiBold" panose="020B0609020000020004" pitchFamily="49" charset="0"/>
                           <a:cs typeface="Cascadia Code SemiBold" panose="020B0609020000020004" pitchFamily="49" charset="0"/>
                         </a:rPr>
-                        <a:t>*.judged.xlsx</a:t>
+                        <a:t>*.03-judged.xlsx</a:t>
                       </a:r>
                       <a:r>
                         <a:rPr kumimoji="1" lang="en-US" altLang="ja-JP" sz="1200">
@@ -3063,6 +3127,9 @@
                       </a:r>
                       <a:r>
                         <a:rPr kumimoji="1" lang="en-US" altLang="ja-JP" sz="1200" b="1" i="1">
+                          <a:solidFill>
+                            <a:srgbClr val="FF0000"/>
+                          </a:solidFill>
                           <a:latin typeface="Cascadia Code SemiBold" panose="020B0609020000020004" pitchFamily="49" charset="0"/>
                           <a:ea typeface="Cascadia Code SemiBold" panose="020B0609020000020004" pitchFamily="49" charset="0"/>
                           <a:cs typeface="Cascadia Code SemiBold" panose="020B0609020000020004" pitchFamily="49" charset="0"/>

--- a/tools/llm-as-a-judge/readme.pptx
+++ b/tools/llm-as-a-judge/readme.pptx
@@ -6,22 +6,21 @@
   </p:sldMasterIdLst>
   <p:sldIdLst>
     <p:sldId id="257" r:id="rId2"/>
-    <p:sldId id="261" r:id="rId3"/>
+    <p:sldId id="276" r:id="rId3"/>
     <p:sldId id="258" r:id="rId4"/>
     <p:sldId id="273" r:id="rId5"/>
-    <p:sldId id="274" r:id="rId6"/>
+    <p:sldId id="277" r:id="rId6"/>
     <p:sldId id="262" r:id="rId7"/>
-    <p:sldId id="263" r:id="rId8"/>
+    <p:sldId id="278" r:id="rId8"/>
     <p:sldId id="264" r:id="rId9"/>
-    <p:sldId id="265" r:id="rId10"/>
+    <p:sldId id="279" r:id="rId10"/>
     <p:sldId id="266" r:id="rId11"/>
     <p:sldId id="259" r:id="rId12"/>
-    <p:sldId id="267" r:id="rId13"/>
+    <p:sldId id="280" r:id="rId13"/>
     <p:sldId id="268" r:id="rId14"/>
-    <p:sldId id="269" r:id="rId15"/>
-    <p:sldId id="270" r:id="rId16"/>
-    <p:sldId id="271" r:id="rId17"/>
-    <p:sldId id="272" r:id="rId18"/>
+    <p:sldId id="270" r:id="rId15"/>
+    <p:sldId id="281" r:id="rId16"/>
+    <p:sldId id="272" r:id="rId17"/>
   </p:sldIdLst>
   <p:sldSz cx="12192000" cy="6858000"/>
   <p:notesSz cx="6858000" cy="9144000"/>
@@ -3212,6 +3211,1685 @@
 </file>
 
 <file path=ppt/slideLayouts/slideLayout4.xml><?xml version="1.0" encoding="utf-8"?>
+<p:sldLayout xmlns:a="http://schemas.openxmlformats.org/drawingml/2006/main" xmlns:r="http://schemas.openxmlformats.org/officeDocument/2006/relationships" xmlns:p="http://schemas.openxmlformats.org/presentationml/2006/main" preserve="1" userDrawn="1">
+  <p:cSld name="4_ユーザー設定レイアウト">
+    <p:spTree>
+      <p:nvGrpSpPr>
+        <p:cNvPr id="1" name=""/>
+        <p:cNvGrpSpPr/>
+        <p:nvPr/>
+      </p:nvGrpSpPr>
+      <p:grpSpPr>
+        <a:xfrm>
+          <a:off x="0" y="0"/>
+          <a:ext cx="0" cy="0"/>
+          <a:chOff x="0" y="0"/>
+          <a:chExt cx="0" cy="0"/>
+        </a:xfrm>
+      </p:grpSpPr>
+      <p:graphicFrame>
+        <p:nvGraphicFramePr>
+          <p:cNvPr id="3" name="表 2">
+            <a:extLst>
+              <a:ext uri="{FF2B5EF4-FFF2-40B4-BE49-F238E27FC236}">
+                <a16:creationId xmlns:a16="http://schemas.microsoft.com/office/drawing/2014/main" id="{EA636EB6-EB77-40C9-E45F-E03223F67DB1}"/>
+              </a:ext>
+            </a:extLst>
+          </p:cNvPr>
+          <p:cNvGraphicFramePr>
+            <a:graphicFrameLocks noGrp="1"/>
+          </p:cNvGraphicFramePr>
+          <p:nvPr userDrawn="1">
+            <p:extLst>
+              <p:ext uri="{D42A27DB-BD31-4B8C-83A1-F6EECF244321}">
+                <p14:modId xmlns:p14="http://schemas.microsoft.com/office/powerpoint/2010/main" val="2814276960"/>
+              </p:ext>
+            </p:extLst>
+          </p:nvPr>
+        </p:nvGraphicFramePr>
+        <p:xfrm>
+          <a:off x="765629" y="868680"/>
+          <a:ext cx="10660742" cy="5120640"/>
+        </p:xfrm>
+        <a:graphic>
+          <a:graphicData uri="http://schemas.openxmlformats.org/drawingml/2006/table">
+            <a:tbl>
+              <a:tblPr firstRow="1" bandRow="1">
+                <a:effectLst>
+                  <a:outerShdw blurRad="50800" dist="38100" dir="2700000" algn="tl" rotWithShape="0">
+                    <a:prstClr val="black">
+                      <a:alpha val="40000"/>
+                    </a:prstClr>
+                  </a:outerShdw>
+                </a:effectLst>
+                <a:tableStyleId>{5C22544A-7EE6-4342-B048-85BDC9FD1C3A}</a:tableStyleId>
+              </a:tblPr>
+              <a:tblGrid>
+                <a:gridCol w="2524913">
+                  <a:extLst>
+                    <a:ext uri="{9D8B030D-6E8A-4147-A177-3AD203B41FA5}">
+                      <a16:colId xmlns:a16="http://schemas.microsoft.com/office/drawing/2014/main" val="2777621706"/>
+                    </a:ext>
+                  </a:extLst>
+                </a:gridCol>
+                <a:gridCol w="8135829">
+                  <a:extLst>
+                    <a:ext uri="{9D8B030D-6E8A-4147-A177-3AD203B41FA5}">
+                      <a16:colId xmlns:a16="http://schemas.microsoft.com/office/drawing/2014/main" val="2952094520"/>
+                    </a:ext>
+                  </a:extLst>
+                </a:gridCol>
+              </a:tblGrid>
+              <a:tr h="0">
+                <a:tc>
+                  <a:txBody>
+                    <a:bodyPr/>
+                    <a:lstStyle/>
+                    <a:p>
+                      <a:r>
+                        <a:rPr kumimoji="1" lang="en-US" altLang="ja-JP" sz="1200">
+                          <a:solidFill>
+                            <a:schemeClr val="bg1"/>
+                          </a:solidFill>
+                          <a:latin typeface="Cascadia Code SemiBold" panose="020B0609020000020004" pitchFamily="49" charset="0"/>
+                          <a:ea typeface="Cascadia Code SemiBold" panose="020B0609020000020004" pitchFamily="49" charset="0"/>
+                          <a:cs typeface="Cascadia Code SemiBold" panose="020B0609020000020004" pitchFamily="49" charset="0"/>
+                        </a:rPr>
+                        <a:t>resource</a:t>
+                      </a:r>
+                      <a:endParaRPr kumimoji="1" lang="ja-JP" altLang="en-US" sz="1200">
+                        <a:solidFill>
+                          <a:schemeClr val="bg1"/>
+                        </a:solidFill>
+                        <a:latin typeface="Cascadia Code SemiBold" panose="020B0609020000020004" pitchFamily="49" charset="0"/>
+                        <a:ea typeface="BIZ UDゴシック" panose="020B0400000000000000" pitchFamily="49" charset="-128"/>
+                        <a:cs typeface="Cascadia Code SemiBold" panose="020B0609020000020004" pitchFamily="49" charset="0"/>
+                      </a:endParaRPr>
+                    </a:p>
+                  </a:txBody>
+                  <a:tcPr marL="137160" marR="137160" marT="137160" marB="137160">
+                    <a:lnL w="12700" cap="flat" cmpd="sng" algn="ctr">
+                      <a:solidFill>
+                        <a:schemeClr val="tx1"/>
+                      </a:solidFill>
+                      <a:prstDash val="solid"/>
+                      <a:round/>
+                      <a:headEnd type="none" w="med" len="med"/>
+                      <a:tailEnd type="none" w="med" len="med"/>
+                    </a:lnL>
+                    <a:lnR w="12700" cap="flat" cmpd="sng" algn="ctr">
+                      <a:solidFill>
+                        <a:schemeClr val="tx1"/>
+                      </a:solidFill>
+                      <a:prstDash val="solid"/>
+                      <a:round/>
+                      <a:headEnd type="none" w="med" len="med"/>
+                      <a:tailEnd type="none" w="med" len="med"/>
+                    </a:lnR>
+                    <a:lnT w="12700" cap="flat" cmpd="sng" algn="ctr">
+                      <a:solidFill>
+                        <a:schemeClr val="tx1"/>
+                      </a:solidFill>
+                      <a:prstDash val="solid"/>
+                      <a:round/>
+                      <a:headEnd type="none" w="med" len="med"/>
+                      <a:tailEnd type="none" w="med" len="med"/>
+                    </a:lnT>
+                    <a:lnB w="12700" cap="flat" cmpd="sng" algn="ctr">
+                      <a:solidFill>
+                        <a:schemeClr val="tx1"/>
+                      </a:solidFill>
+                      <a:prstDash val="solid"/>
+                      <a:round/>
+                      <a:headEnd type="none" w="med" len="med"/>
+                      <a:tailEnd type="none" w="med" len="med"/>
+                    </a:lnB>
+                    <a:solidFill>
+                      <a:schemeClr val="tx1">
+                        <a:lumMod val="65000"/>
+                        <a:lumOff val="35000"/>
+                      </a:schemeClr>
+                    </a:solidFill>
+                  </a:tcPr>
+                </a:tc>
+                <a:tc>
+                  <a:txBody>
+                    <a:bodyPr/>
+                    <a:lstStyle/>
+                    <a:p>
+                      <a:r>
+                        <a:rPr kumimoji="1" lang="en-US" altLang="ja-JP" sz="1200">
+                          <a:solidFill>
+                            <a:schemeClr val="bg1"/>
+                          </a:solidFill>
+                          <a:latin typeface="Cascadia Code SemiBold" panose="020B0609020000020004" pitchFamily="49" charset="0"/>
+                          <a:ea typeface="Cascadia Code SemiBold" panose="020B0609020000020004" pitchFamily="49" charset="0"/>
+                          <a:cs typeface="Cascadia Code SemiBold" panose="020B0609020000020004" pitchFamily="49" charset="0"/>
+                        </a:rPr>
+                        <a:t>note</a:t>
+                      </a:r>
+                      <a:endParaRPr kumimoji="1" lang="ja-JP" altLang="en-US" sz="1200">
+                        <a:solidFill>
+                          <a:schemeClr val="bg1"/>
+                        </a:solidFill>
+                        <a:latin typeface="Cascadia Code SemiBold" panose="020B0609020000020004" pitchFamily="49" charset="0"/>
+                        <a:ea typeface="BIZ UDゴシック" panose="020B0400000000000000" pitchFamily="49" charset="-128"/>
+                        <a:cs typeface="Cascadia Code SemiBold" panose="020B0609020000020004" pitchFamily="49" charset="0"/>
+                      </a:endParaRPr>
+                    </a:p>
+                  </a:txBody>
+                  <a:tcPr marL="137160" marR="137160" marT="137160" marB="137160">
+                    <a:lnL w="12700" cap="flat" cmpd="sng" algn="ctr">
+                      <a:solidFill>
+                        <a:schemeClr val="tx1"/>
+                      </a:solidFill>
+                      <a:prstDash val="solid"/>
+                      <a:round/>
+                      <a:headEnd type="none" w="med" len="med"/>
+                      <a:tailEnd type="none" w="med" len="med"/>
+                    </a:lnL>
+                    <a:lnR w="12700" cap="flat" cmpd="sng" algn="ctr">
+                      <a:solidFill>
+                        <a:schemeClr val="tx1"/>
+                      </a:solidFill>
+                      <a:prstDash val="solid"/>
+                      <a:round/>
+                      <a:headEnd type="none" w="med" len="med"/>
+                      <a:tailEnd type="none" w="med" len="med"/>
+                    </a:lnR>
+                    <a:lnT w="12700" cap="flat" cmpd="sng" algn="ctr">
+                      <a:solidFill>
+                        <a:schemeClr val="tx1"/>
+                      </a:solidFill>
+                      <a:prstDash val="solid"/>
+                      <a:round/>
+                      <a:headEnd type="none" w="med" len="med"/>
+                      <a:tailEnd type="none" w="med" len="med"/>
+                    </a:lnT>
+                    <a:lnB w="12700" cap="flat" cmpd="sng" algn="ctr">
+                      <a:solidFill>
+                        <a:schemeClr val="tx1"/>
+                      </a:solidFill>
+                      <a:prstDash val="solid"/>
+                      <a:round/>
+                      <a:headEnd type="none" w="med" len="med"/>
+                      <a:tailEnd type="none" w="med" len="med"/>
+                    </a:lnB>
+                    <a:solidFill>
+                      <a:schemeClr val="tx1">
+                        <a:lumMod val="65000"/>
+                        <a:lumOff val="35000"/>
+                      </a:schemeClr>
+                    </a:solidFill>
+                  </a:tcPr>
+                </a:tc>
+                <a:extLst>
+                  <a:ext uri="{0D108BD9-81ED-4DB2-BD59-A6C34878D82A}">
+                    <a16:rowId xmlns:a16="http://schemas.microsoft.com/office/drawing/2014/main" val="526102552"/>
+                  </a:ext>
+                </a:extLst>
+              </a:tr>
+              <a:tr h="0">
+                <a:tc>
+                  <a:txBody>
+                    <a:bodyPr/>
+                    <a:lstStyle/>
+                    <a:p>
+                      <a:r>
+                        <a:rPr kumimoji="1" lang="en-US" altLang="ja-JP" sz="1200">
+                          <a:latin typeface="Cascadia Code SemiBold" panose="020B0609020000020004" pitchFamily="49" charset="0"/>
+                          <a:ea typeface="Cascadia Code SemiBold" panose="020B0609020000020004" pitchFamily="49" charset="0"/>
+                          <a:cs typeface="Cascadia Code SemiBold" panose="020B0609020000020004" pitchFamily="49" charset="0"/>
+                        </a:rPr>
+                        <a:t>.env</a:t>
+                      </a:r>
+                      <a:endParaRPr kumimoji="1" lang="ja-JP" altLang="en-US" sz="1200">
+                        <a:latin typeface="Cascadia Code SemiBold" panose="020B0609020000020004" pitchFamily="49" charset="0"/>
+                        <a:ea typeface="BIZ UDゴシック" panose="020B0400000000000000" pitchFamily="49" charset="-128"/>
+                        <a:cs typeface="Cascadia Code SemiBold" panose="020B0609020000020004" pitchFamily="49" charset="0"/>
+                      </a:endParaRPr>
+                    </a:p>
+                  </a:txBody>
+                  <a:tcPr marL="137160" marR="137160" marT="137160" marB="137160">
+                    <a:lnL w="12700" cap="flat" cmpd="sng" algn="ctr">
+                      <a:solidFill>
+                        <a:schemeClr val="tx1"/>
+                      </a:solidFill>
+                      <a:prstDash val="solid"/>
+                      <a:round/>
+                      <a:headEnd type="none" w="med" len="med"/>
+                      <a:tailEnd type="none" w="med" len="med"/>
+                    </a:lnL>
+                    <a:lnR w="12700" cap="flat" cmpd="sng" algn="ctr">
+                      <a:solidFill>
+                        <a:schemeClr val="tx1"/>
+                      </a:solidFill>
+                      <a:prstDash val="solid"/>
+                      <a:round/>
+                      <a:headEnd type="none" w="med" len="med"/>
+                      <a:tailEnd type="none" w="med" len="med"/>
+                    </a:lnR>
+                    <a:lnT w="12700" cap="flat" cmpd="sng" algn="ctr">
+                      <a:solidFill>
+                        <a:schemeClr val="tx1"/>
+                      </a:solidFill>
+                      <a:prstDash val="solid"/>
+                      <a:round/>
+                      <a:headEnd type="none" w="med" len="med"/>
+                      <a:tailEnd type="none" w="med" len="med"/>
+                    </a:lnT>
+                    <a:lnB w="12700" cap="flat" cmpd="sng" algn="ctr">
+                      <a:solidFill>
+                        <a:schemeClr val="tx1"/>
+                      </a:solidFill>
+                      <a:prstDash val="solid"/>
+                      <a:round/>
+                      <a:headEnd type="none" w="med" len="med"/>
+                      <a:tailEnd type="none" w="med" len="med"/>
+                    </a:lnB>
+                    <a:solidFill>
+                      <a:schemeClr val="bg1"/>
+                    </a:solidFill>
+                  </a:tcPr>
+                </a:tc>
+                <a:tc>
+                  <a:txBody>
+                    <a:bodyPr/>
+                    <a:lstStyle/>
+                    <a:p>
+                      <a:r>
+                        <a:rPr kumimoji="1" lang="en-US" altLang="ja-JP" sz="1200">
+                          <a:latin typeface="Cascadia Code SemiBold" panose="020B0609020000020004" pitchFamily="49" charset="0"/>
+                          <a:ea typeface="Cascadia Code SemiBold" panose="020B0609020000020004" pitchFamily="49" charset="0"/>
+                          <a:cs typeface="Cascadia Code SemiBold" panose="020B0609020000020004" pitchFamily="49" charset="0"/>
+                        </a:rPr>
+                        <a:t>File containing LLM API credentials</a:t>
+                      </a:r>
+                    </a:p>
+                  </a:txBody>
+                  <a:tcPr marL="137160" marR="137160" marT="137160" marB="137160">
+                    <a:lnL w="12700" cap="flat" cmpd="sng" algn="ctr">
+                      <a:solidFill>
+                        <a:schemeClr val="tx1"/>
+                      </a:solidFill>
+                      <a:prstDash val="solid"/>
+                      <a:round/>
+                      <a:headEnd type="none" w="med" len="med"/>
+                      <a:tailEnd type="none" w="med" len="med"/>
+                    </a:lnL>
+                    <a:lnR w="12700" cap="flat" cmpd="sng" algn="ctr">
+                      <a:solidFill>
+                        <a:schemeClr val="tx1"/>
+                      </a:solidFill>
+                      <a:prstDash val="solid"/>
+                      <a:round/>
+                      <a:headEnd type="none" w="med" len="med"/>
+                      <a:tailEnd type="none" w="med" len="med"/>
+                    </a:lnR>
+                    <a:lnT w="12700" cap="flat" cmpd="sng" algn="ctr">
+                      <a:solidFill>
+                        <a:schemeClr val="tx1"/>
+                      </a:solidFill>
+                      <a:prstDash val="solid"/>
+                      <a:round/>
+                      <a:headEnd type="none" w="med" len="med"/>
+                      <a:tailEnd type="none" w="med" len="med"/>
+                    </a:lnT>
+                    <a:lnB w="12700" cap="flat" cmpd="sng" algn="ctr">
+                      <a:solidFill>
+                        <a:schemeClr val="tx1"/>
+                      </a:solidFill>
+                      <a:prstDash val="solid"/>
+                      <a:round/>
+                      <a:headEnd type="none" w="med" len="med"/>
+                      <a:tailEnd type="none" w="med" len="med"/>
+                    </a:lnB>
+                    <a:solidFill>
+                      <a:schemeClr val="bg1"/>
+                    </a:solidFill>
+                  </a:tcPr>
+                </a:tc>
+                <a:extLst>
+                  <a:ext uri="{0D108BD9-81ED-4DB2-BD59-A6C34878D82A}">
+                    <a16:rowId xmlns:a16="http://schemas.microsoft.com/office/drawing/2014/main" val="1660497218"/>
+                  </a:ext>
+                </a:extLst>
+              </a:tr>
+              <a:tr h="0">
+                <a:tc>
+                  <a:txBody>
+                    <a:bodyPr/>
+                    <a:lstStyle/>
+                    <a:p>
+                      <a:r>
+                        <a:rPr kumimoji="1" lang="en-US" altLang="ja-JP" sz="1200">
+                          <a:latin typeface="Cascadia Code SemiBold" panose="020B0609020000020004" pitchFamily="49" charset="0"/>
+                          <a:ea typeface="Cascadia Code SemiBold" panose="020B0609020000020004" pitchFamily="49" charset="0"/>
+                          <a:cs typeface="Cascadia Code SemiBold" panose="020B0609020000020004" pitchFamily="49" charset="0"/>
+                        </a:rPr>
+                        <a:t>llmj.py</a:t>
+                      </a:r>
+                      <a:endParaRPr kumimoji="1" lang="ja-JP" altLang="en-US" sz="1200">
+                        <a:latin typeface="Cascadia Code SemiBold" panose="020B0609020000020004" pitchFamily="49" charset="0"/>
+                        <a:ea typeface="BIZ UDゴシック" panose="020B0400000000000000" pitchFamily="49" charset="-128"/>
+                        <a:cs typeface="Cascadia Code SemiBold" panose="020B0609020000020004" pitchFamily="49" charset="0"/>
+                      </a:endParaRPr>
+                    </a:p>
+                  </a:txBody>
+                  <a:tcPr marL="137160" marR="137160" marT="137160" marB="137160">
+                    <a:lnL w="12700" cap="flat" cmpd="sng" algn="ctr">
+                      <a:solidFill>
+                        <a:schemeClr val="tx1"/>
+                      </a:solidFill>
+                      <a:prstDash val="solid"/>
+                      <a:round/>
+                      <a:headEnd type="none" w="med" len="med"/>
+                      <a:tailEnd type="none" w="med" len="med"/>
+                    </a:lnL>
+                    <a:lnR w="12700" cap="flat" cmpd="sng" algn="ctr">
+                      <a:solidFill>
+                        <a:schemeClr val="tx1"/>
+                      </a:solidFill>
+                      <a:prstDash val="solid"/>
+                      <a:round/>
+                      <a:headEnd type="none" w="med" len="med"/>
+                      <a:tailEnd type="none" w="med" len="med"/>
+                    </a:lnR>
+                    <a:lnT w="12700" cap="flat" cmpd="sng" algn="ctr">
+                      <a:solidFill>
+                        <a:schemeClr val="tx1"/>
+                      </a:solidFill>
+                      <a:prstDash val="solid"/>
+                      <a:round/>
+                      <a:headEnd type="none" w="med" len="med"/>
+                      <a:tailEnd type="none" w="med" len="med"/>
+                    </a:lnT>
+                    <a:lnB w="12700" cap="flat" cmpd="sng" algn="ctr">
+                      <a:solidFill>
+                        <a:schemeClr val="tx1"/>
+                      </a:solidFill>
+                      <a:prstDash val="solid"/>
+                      <a:round/>
+                      <a:headEnd type="none" w="med" len="med"/>
+                      <a:tailEnd type="none" w="med" len="med"/>
+                    </a:lnB>
+                    <a:solidFill>
+                      <a:schemeClr val="bg1"/>
+                    </a:solidFill>
+                  </a:tcPr>
+                </a:tc>
+                <a:tc>
+                  <a:txBody>
+                    <a:bodyPr/>
+                    <a:lstStyle/>
+                    <a:p>
+                      <a:r>
+                        <a:rPr kumimoji="1" lang="en-US" altLang="ja-JP" sz="1200">
+                          <a:latin typeface="Cascadia Code SemiBold" panose="020B0609020000020004" pitchFamily="49" charset="0"/>
+                          <a:ea typeface="Cascadia Code SemiBold" panose="020B0609020000020004" pitchFamily="49" charset="0"/>
+                          <a:cs typeface="Cascadia Code SemiBold" panose="020B0609020000020004" pitchFamily="49" charset="0"/>
+                        </a:rPr>
+                        <a:t>Common definitions and common processing</a:t>
+                      </a:r>
+                    </a:p>
+                  </a:txBody>
+                  <a:tcPr marL="137160" marR="137160" marT="137160" marB="137160">
+                    <a:lnL w="12700" cap="flat" cmpd="sng" algn="ctr">
+                      <a:solidFill>
+                        <a:schemeClr val="tx1"/>
+                      </a:solidFill>
+                      <a:prstDash val="solid"/>
+                      <a:round/>
+                      <a:headEnd type="none" w="med" len="med"/>
+                      <a:tailEnd type="none" w="med" len="med"/>
+                    </a:lnL>
+                    <a:lnR w="12700" cap="flat" cmpd="sng" algn="ctr">
+                      <a:solidFill>
+                        <a:schemeClr val="tx1"/>
+                      </a:solidFill>
+                      <a:prstDash val="solid"/>
+                      <a:round/>
+                      <a:headEnd type="none" w="med" len="med"/>
+                      <a:tailEnd type="none" w="med" len="med"/>
+                    </a:lnR>
+                    <a:lnT w="12700" cap="flat" cmpd="sng" algn="ctr">
+                      <a:solidFill>
+                        <a:schemeClr val="tx1"/>
+                      </a:solidFill>
+                      <a:prstDash val="solid"/>
+                      <a:round/>
+                      <a:headEnd type="none" w="med" len="med"/>
+                      <a:tailEnd type="none" w="med" len="med"/>
+                    </a:lnT>
+                    <a:lnB w="12700" cap="flat" cmpd="sng" algn="ctr">
+                      <a:solidFill>
+                        <a:schemeClr val="tx1"/>
+                      </a:solidFill>
+                      <a:prstDash val="solid"/>
+                      <a:round/>
+                      <a:headEnd type="none" w="med" len="med"/>
+                      <a:tailEnd type="none" w="med" len="med"/>
+                    </a:lnB>
+                    <a:solidFill>
+                      <a:schemeClr val="bg1"/>
+                    </a:solidFill>
+                  </a:tcPr>
+                </a:tc>
+                <a:extLst>
+                  <a:ext uri="{0D108BD9-81ED-4DB2-BD59-A6C34878D82A}">
+                    <a16:rowId xmlns:a16="http://schemas.microsoft.com/office/drawing/2014/main" val="1288496352"/>
+                  </a:ext>
+                </a:extLst>
+              </a:tr>
+              <a:tr h="0">
+                <a:tc>
+                  <a:txBody>
+                    <a:bodyPr/>
+                    <a:lstStyle/>
+                    <a:p>
+                      <a:pPr marL="0" marR="0" lvl="0" indent="0" algn="l" defTabSz="914400" rtl="0" eaLnBrk="1" fontAlgn="auto" latinLnBrk="0" hangingPunct="1">
+                        <a:lnSpc>
+                          <a:spcPct val="100000"/>
+                        </a:lnSpc>
+                        <a:spcBef>
+                          <a:spcPts val="0"/>
+                        </a:spcBef>
+                        <a:spcAft>
+                          <a:spcPts val="0"/>
+                        </a:spcAft>
+                        <a:buClrTx/>
+                        <a:buSzTx/>
+                        <a:buFontTx/>
+                        <a:buNone/>
+                        <a:tabLst/>
+                        <a:defRPr/>
+                      </a:pPr>
+                      <a:r>
+                        <a:rPr kumimoji="1" lang="en-US" altLang="ja-JP" sz="1200">
+                          <a:latin typeface="Cascadia Code SemiBold" panose="020B0609020000020004" pitchFamily="49" charset="0"/>
+                          <a:ea typeface="Cascadia Code SemiBold" panose="020B0609020000020004" pitchFamily="49" charset="0"/>
+                          <a:cs typeface="Cascadia Code SemiBold" panose="020B0609020000020004" pitchFamily="49" charset="0"/>
+                        </a:rPr>
+                        <a:t>llmj-generate.py</a:t>
+                      </a:r>
+                      <a:endParaRPr kumimoji="1" lang="ja-JP" altLang="en-US" sz="1200">
+                        <a:latin typeface="Cascadia Code SemiBold" panose="020B0609020000020004" pitchFamily="49" charset="0"/>
+                        <a:ea typeface="BIZ UDゴシック" panose="020B0400000000000000" pitchFamily="49" charset="-128"/>
+                        <a:cs typeface="Cascadia Code SemiBold" panose="020B0609020000020004" pitchFamily="49" charset="0"/>
+                      </a:endParaRPr>
+                    </a:p>
+                  </a:txBody>
+                  <a:tcPr marL="137160" marR="137160" marT="137160" marB="137160">
+                    <a:lnL w="12700" cap="flat" cmpd="sng" algn="ctr">
+                      <a:solidFill>
+                        <a:schemeClr val="tx1"/>
+                      </a:solidFill>
+                      <a:prstDash val="solid"/>
+                      <a:round/>
+                      <a:headEnd type="none" w="med" len="med"/>
+                      <a:tailEnd type="none" w="med" len="med"/>
+                    </a:lnL>
+                    <a:lnR w="12700" cap="flat" cmpd="sng" algn="ctr">
+                      <a:solidFill>
+                        <a:schemeClr val="tx1"/>
+                      </a:solidFill>
+                      <a:prstDash val="solid"/>
+                      <a:round/>
+                      <a:headEnd type="none" w="med" len="med"/>
+                      <a:tailEnd type="none" w="med" len="med"/>
+                    </a:lnR>
+                    <a:lnT w="12700" cap="flat" cmpd="sng" algn="ctr">
+                      <a:solidFill>
+                        <a:schemeClr val="tx1"/>
+                      </a:solidFill>
+                      <a:prstDash val="solid"/>
+                      <a:round/>
+                      <a:headEnd type="none" w="med" len="med"/>
+                      <a:tailEnd type="none" w="med" len="med"/>
+                    </a:lnT>
+                    <a:lnB w="12700" cap="flat" cmpd="sng" algn="ctr">
+                      <a:solidFill>
+                        <a:schemeClr val="tx1"/>
+                      </a:solidFill>
+                      <a:prstDash val="solid"/>
+                      <a:round/>
+                      <a:headEnd type="none" w="med" len="med"/>
+                      <a:tailEnd type="none" w="med" len="med"/>
+                    </a:lnB>
+                    <a:solidFill>
+                      <a:schemeClr val="bg1"/>
+                    </a:solidFill>
+                  </a:tcPr>
+                </a:tc>
+                <a:tc>
+                  <a:txBody>
+                    <a:bodyPr/>
+                    <a:lstStyle/>
+                    <a:p>
+                      <a:pPr marL="0" marR="0" lvl="0" indent="0" algn="l" defTabSz="914400" rtl="0" eaLnBrk="1" fontAlgn="auto" latinLnBrk="0" hangingPunct="1">
+                        <a:lnSpc>
+                          <a:spcPct val="100000"/>
+                        </a:lnSpc>
+                        <a:spcBef>
+                          <a:spcPts val="0"/>
+                        </a:spcBef>
+                        <a:spcAft>
+                          <a:spcPts val="0"/>
+                        </a:spcAft>
+                        <a:buClrTx/>
+                        <a:buSzTx/>
+                        <a:buFontTx/>
+                        <a:buNone/>
+                        <a:tabLst/>
+                        <a:defRPr/>
+                      </a:pPr>
+                      <a:r>
+                        <a:rPr kumimoji="1" lang="en-US" altLang="ja-JP" sz="1200">
+                          <a:latin typeface="Cascadia Code SemiBold" panose="020B0609020000020004" pitchFamily="49" charset="0"/>
+                          <a:ea typeface="Cascadia Code SemiBold" panose="020B0609020000020004" pitchFamily="49" charset="0"/>
+                          <a:cs typeface="Cascadia Code SemiBold" panose="020B0609020000020004" pitchFamily="49" charset="0"/>
+                        </a:rPr>
+                        <a:t>This SCRIPT uses </a:t>
+                      </a:r>
+                      <a:r>
+                        <a:rPr kumimoji="1" lang="en-US" altLang="ja-JP" sz="1200" b="1" i="1">
+                          <a:solidFill>
+                            <a:srgbClr val="FF0000"/>
+                          </a:solidFill>
+                          <a:latin typeface="Cascadia Code SemiBold" panose="020B0609020000020004" pitchFamily="49" charset="0"/>
+                          <a:ea typeface="Cascadia Code SemiBold" panose="020B0609020000020004" pitchFamily="49" charset="0"/>
+                          <a:cs typeface="Cascadia Code SemiBold" panose="020B0609020000020004" pitchFamily="49" charset="0"/>
+                        </a:rPr>
+                        <a:t>work/*.txt</a:t>
+                      </a:r>
+                      <a:r>
+                        <a:rPr kumimoji="1" lang="en-US" altLang="ja-JP" sz="1200">
+                          <a:latin typeface="Cascadia Code SemiBold" panose="020B0609020000020004" pitchFamily="49" charset="0"/>
+                          <a:ea typeface="Cascadia Code SemiBold" panose="020B0609020000020004" pitchFamily="49" charset="0"/>
+                          <a:cs typeface="Cascadia Code SemiBold" panose="020B0609020000020004" pitchFamily="49" charset="0"/>
+                        </a:rPr>
+                        <a:t> to transform </a:t>
+                      </a:r>
+                      <a:r>
+                        <a:rPr kumimoji="1" lang="en-US" altLang="ja-JP" sz="1200" b="1" i="1">
+                          <a:solidFill>
+                            <a:srgbClr val="FF0000"/>
+                          </a:solidFill>
+                          <a:latin typeface="Cascadia Code SemiBold" panose="020B0609020000020004" pitchFamily="49" charset="0"/>
+                          <a:ea typeface="Cascadia Code SemiBold" panose="020B0609020000020004" pitchFamily="49" charset="0"/>
+                          <a:cs typeface="Cascadia Code SemiBold" panose="020B0609020000020004" pitchFamily="49" charset="0"/>
+                        </a:rPr>
+                        <a:t>source/*.txt</a:t>
+                      </a:r>
+                      <a:r>
+                        <a:rPr kumimoji="1" lang="en-US" altLang="ja-JP" sz="1200">
+                          <a:latin typeface="Cascadia Code SemiBold" panose="020B0609020000020004" pitchFamily="49" charset="0"/>
+                          <a:ea typeface="Cascadia Code SemiBold" panose="020B0609020000020004" pitchFamily="49" charset="0"/>
+                          <a:cs typeface="Cascadia Code SemiBold" panose="020B0609020000020004" pitchFamily="49" charset="0"/>
+                        </a:rPr>
+                        <a:t> and generates </a:t>
+                      </a:r>
+                      <a:r>
+                        <a:rPr kumimoji="1" lang="en-US" altLang="ja-JP" sz="1200" b="1" i="1">
+                          <a:solidFill>
+                            <a:srgbClr val="FF0000"/>
+                          </a:solidFill>
+                          <a:latin typeface="Cascadia Code SemiBold" panose="020B0609020000020004" pitchFamily="49" charset="0"/>
+                          <a:ea typeface="Cascadia Code SemiBold" panose="020B0609020000020004" pitchFamily="49" charset="0"/>
+                          <a:cs typeface="Cascadia Code SemiBold" panose="020B0609020000020004" pitchFamily="49" charset="0"/>
+                        </a:rPr>
+                        <a:t>work/*.xlsx</a:t>
+                      </a:r>
+                      <a:r>
+                        <a:rPr kumimoji="1" lang="en-US" altLang="ja-JP" sz="1200">
+                          <a:latin typeface="Cascadia Code SemiBold" panose="020B0609020000020004" pitchFamily="49" charset="0"/>
+                          <a:ea typeface="Cascadia Code SemiBold" panose="020B0609020000020004" pitchFamily="49" charset="0"/>
+                          <a:cs typeface="Cascadia Code SemiBold" panose="020B0609020000020004" pitchFamily="49" charset="0"/>
+                        </a:rPr>
+                        <a:t>.</a:t>
+                      </a:r>
+                    </a:p>
+                  </a:txBody>
+                  <a:tcPr marL="137160" marR="137160" marT="137160" marB="137160">
+                    <a:lnL w="12700" cap="flat" cmpd="sng" algn="ctr">
+                      <a:solidFill>
+                        <a:schemeClr val="tx1"/>
+                      </a:solidFill>
+                      <a:prstDash val="solid"/>
+                      <a:round/>
+                      <a:headEnd type="none" w="med" len="med"/>
+                      <a:tailEnd type="none" w="med" len="med"/>
+                    </a:lnL>
+                    <a:lnR w="12700" cap="flat" cmpd="sng" algn="ctr">
+                      <a:solidFill>
+                        <a:schemeClr val="tx1"/>
+                      </a:solidFill>
+                      <a:prstDash val="solid"/>
+                      <a:round/>
+                      <a:headEnd type="none" w="med" len="med"/>
+                      <a:tailEnd type="none" w="med" len="med"/>
+                    </a:lnR>
+                    <a:lnT w="12700" cap="flat" cmpd="sng" algn="ctr">
+                      <a:solidFill>
+                        <a:schemeClr val="tx1"/>
+                      </a:solidFill>
+                      <a:prstDash val="solid"/>
+                      <a:round/>
+                      <a:headEnd type="none" w="med" len="med"/>
+                      <a:tailEnd type="none" w="med" len="med"/>
+                    </a:lnT>
+                    <a:lnB w="12700" cap="flat" cmpd="sng" algn="ctr">
+                      <a:solidFill>
+                        <a:schemeClr val="tx1"/>
+                      </a:solidFill>
+                      <a:prstDash val="solid"/>
+                      <a:round/>
+                      <a:headEnd type="none" w="med" len="med"/>
+                      <a:tailEnd type="none" w="med" len="med"/>
+                    </a:lnB>
+                    <a:solidFill>
+                      <a:schemeClr val="bg1"/>
+                    </a:solidFill>
+                  </a:tcPr>
+                </a:tc>
+                <a:extLst>
+                  <a:ext uri="{0D108BD9-81ED-4DB2-BD59-A6C34878D82A}">
+                    <a16:rowId xmlns:a16="http://schemas.microsoft.com/office/drawing/2014/main" val="2978836238"/>
+                  </a:ext>
+                </a:extLst>
+              </a:tr>
+              <a:tr h="0">
+                <a:tc>
+                  <a:txBody>
+                    <a:bodyPr/>
+                    <a:lstStyle/>
+                    <a:p>
+                      <a:r>
+                        <a:rPr kumimoji="1" lang="en-US" altLang="ja-JP" sz="1200">
+                          <a:latin typeface="Cascadia Code SemiBold" panose="020B0609020000020004" pitchFamily="49" charset="0"/>
+                          <a:ea typeface="Cascadia Code SemiBold" panose="020B0609020000020004" pitchFamily="49" charset="0"/>
+                          <a:cs typeface="Cascadia Code SemiBold" panose="020B0609020000020004" pitchFamily="49" charset="0"/>
+                        </a:rPr>
+                        <a:t>llmj-judge.py</a:t>
+                      </a:r>
+                      <a:endParaRPr kumimoji="1" lang="ja-JP" altLang="en-US" sz="1200">
+                        <a:latin typeface="Cascadia Code SemiBold" panose="020B0609020000020004" pitchFamily="49" charset="0"/>
+                        <a:ea typeface="BIZ UDゴシック" panose="020B0400000000000000" pitchFamily="49" charset="-128"/>
+                        <a:cs typeface="Cascadia Code SemiBold" panose="020B0609020000020004" pitchFamily="49" charset="0"/>
+                      </a:endParaRPr>
+                    </a:p>
+                  </a:txBody>
+                  <a:tcPr marL="137160" marR="137160" marT="137160" marB="137160">
+                    <a:lnL w="12700" cap="flat" cmpd="sng" algn="ctr">
+                      <a:solidFill>
+                        <a:schemeClr val="tx1"/>
+                      </a:solidFill>
+                      <a:prstDash val="solid"/>
+                      <a:round/>
+                      <a:headEnd type="none" w="med" len="med"/>
+                      <a:tailEnd type="none" w="med" len="med"/>
+                    </a:lnL>
+                    <a:lnR w="12700" cap="flat" cmpd="sng" algn="ctr">
+                      <a:solidFill>
+                        <a:schemeClr val="tx1"/>
+                      </a:solidFill>
+                      <a:prstDash val="solid"/>
+                      <a:round/>
+                      <a:headEnd type="none" w="med" len="med"/>
+                      <a:tailEnd type="none" w="med" len="med"/>
+                    </a:lnR>
+                    <a:lnT w="12700" cap="flat" cmpd="sng" algn="ctr">
+                      <a:solidFill>
+                        <a:schemeClr val="tx1"/>
+                      </a:solidFill>
+                      <a:prstDash val="solid"/>
+                      <a:round/>
+                      <a:headEnd type="none" w="med" len="med"/>
+                      <a:tailEnd type="none" w="med" len="med"/>
+                    </a:lnT>
+                    <a:lnB w="12700" cap="flat" cmpd="sng" algn="ctr">
+                      <a:solidFill>
+                        <a:schemeClr val="tx1"/>
+                      </a:solidFill>
+                      <a:prstDash val="solid"/>
+                      <a:round/>
+                      <a:headEnd type="none" w="med" len="med"/>
+                      <a:tailEnd type="none" w="med" len="med"/>
+                    </a:lnB>
+                    <a:solidFill>
+                      <a:schemeClr val="bg1"/>
+                    </a:solidFill>
+                  </a:tcPr>
+                </a:tc>
+                <a:tc>
+                  <a:txBody>
+                    <a:bodyPr/>
+                    <a:lstStyle/>
+                    <a:p>
+                      <a:r>
+                        <a:rPr kumimoji="1" lang="en-US" altLang="ja-JP" sz="1200">
+                          <a:latin typeface="Cascadia Code SemiBold" panose="020B0609020000020004" pitchFamily="49" charset="0"/>
+                          <a:ea typeface="Cascadia Code SemiBold" panose="020B0609020000020004" pitchFamily="49" charset="0"/>
+                          <a:cs typeface="Cascadia Code SemiBold" panose="020B0609020000020004" pitchFamily="49" charset="0"/>
+                        </a:rPr>
+                        <a:t>This SCRIPT evaluates the contents of </a:t>
+                      </a:r>
+                      <a:r>
+                        <a:rPr kumimoji="1" lang="en-US" altLang="ja-JP" sz="1200" b="1" i="1">
+                          <a:solidFill>
+                            <a:srgbClr val="FF0000"/>
+                          </a:solidFill>
+                          <a:latin typeface="Cascadia Code SemiBold" panose="020B0609020000020004" pitchFamily="49" charset="0"/>
+                          <a:ea typeface="Cascadia Code SemiBold" panose="020B0609020000020004" pitchFamily="49" charset="0"/>
+                          <a:cs typeface="Cascadia Code SemiBold" panose="020B0609020000020004" pitchFamily="49" charset="0"/>
+                        </a:rPr>
+                        <a:t>work/*.xlsx</a:t>
+                      </a:r>
+                      <a:r>
+                        <a:rPr kumimoji="1" lang="en-US" altLang="ja-JP" sz="1200">
+                          <a:latin typeface="Cascadia Code SemiBold" panose="020B0609020000020004" pitchFamily="49" charset="0"/>
+                          <a:ea typeface="Cascadia Code SemiBold" panose="020B0609020000020004" pitchFamily="49" charset="0"/>
+                          <a:cs typeface="Cascadia Code SemiBold" panose="020B0609020000020004" pitchFamily="49" charset="0"/>
+                        </a:rPr>
+                        <a:t> against </a:t>
+                      </a:r>
+                      <a:r>
+                        <a:rPr kumimoji="1" lang="en-US" altLang="ja-JP" sz="1200" b="1" i="1">
+                          <a:solidFill>
+                            <a:srgbClr val="FF0000"/>
+                          </a:solidFill>
+                          <a:latin typeface="Cascadia Code SemiBold" panose="020B0609020000020004" pitchFamily="49" charset="0"/>
+                          <a:ea typeface="Cascadia Code SemiBold" panose="020B0609020000020004" pitchFamily="49" charset="0"/>
+                          <a:cs typeface="Cascadia Code SemiBold" panose="020B0609020000020004" pitchFamily="49" charset="0"/>
+                        </a:rPr>
+                        <a:t>rubric/*.json</a:t>
+                      </a:r>
+                      <a:r>
+                        <a:rPr kumimoji="1" lang="en-US" altLang="ja-JP" sz="1200">
+                          <a:latin typeface="Cascadia Code SemiBold" panose="020B0609020000020004" pitchFamily="49" charset="0"/>
+                          <a:ea typeface="Cascadia Code SemiBold" panose="020B0609020000020004" pitchFamily="49" charset="0"/>
+                          <a:cs typeface="Cascadia Code SemiBold" panose="020B0609020000020004" pitchFamily="49" charset="0"/>
+                        </a:rPr>
+                        <a:t> and writes the results to </a:t>
+                      </a:r>
+                      <a:r>
+                        <a:rPr kumimoji="1" lang="en-US" altLang="ja-JP" sz="1200" b="1" i="1">
+                          <a:solidFill>
+                            <a:srgbClr val="FF0000"/>
+                          </a:solidFill>
+                          <a:latin typeface="Cascadia Code SemiBold" panose="020B0609020000020004" pitchFamily="49" charset="0"/>
+                          <a:ea typeface="Cascadia Code SemiBold" panose="020B0609020000020004" pitchFamily="49" charset="0"/>
+                          <a:cs typeface="Cascadia Code SemiBold" panose="020B0609020000020004" pitchFamily="49" charset="0"/>
+                        </a:rPr>
+                        <a:t>work/*.xlsx</a:t>
+                      </a:r>
+                      <a:r>
+                        <a:rPr kumimoji="1" lang="en-US" altLang="ja-JP" sz="1200" b="0" i="0">
+                          <a:solidFill>
+                            <a:schemeClr val="tx1"/>
+                          </a:solidFill>
+                          <a:latin typeface="Cascadia Code SemiBold" panose="020B0609020000020004" pitchFamily="49" charset="0"/>
+                          <a:ea typeface="Cascadia Code SemiBold" panose="020B0609020000020004" pitchFamily="49" charset="0"/>
+                          <a:cs typeface="Cascadia Code SemiBold" panose="020B0609020000020004" pitchFamily="49" charset="0"/>
+                        </a:rPr>
+                        <a:t>, and </a:t>
+                      </a:r>
+                      <a:r>
+                        <a:rPr kumimoji="1" lang="en-US" altLang="ja-JP" sz="1200">
+                          <a:latin typeface="Cascadia Code SemiBold" panose="020B0609020000020004" pitchFamily="49" charset="0"/>
+                          <a:ea typeface="Cascadia Code SemiBold" panose="020B0609020000020004" pitchFamily="49" charset="0"/>
+                          <a:cs typeface="Cascadia Code SemiBold" panose="020B0609020000020004" pitchFamily="49" charset="0"/>
+                        </a:rPr>
+                        <a:t>generates </a:t>
+                      </a:r>
+                      <a:r>
+                        <a:rPr kumimoji="1" lang="en-US" altLang="ja-JP" sz="1200">
+                          <a:solidFill>
+                            <a:srgbClr val="FF0000"/>
+                          </a:solidFill>
+                          <a:latin typeface="Cascadia Code SemiBold" panose="020B0609020000020004" pitchFamily="49" charset="0"/>
+                          <a:ea typeface="Cascadia Code SemiBold" panose="020B0609020000020004" pitchFamily="49" charset="0"/>
+                          <a:cs typeface="Cascadia Code SemiBold" panose="020B0609020000020004" pitchFamily="49" charset="0"/>
+                        </a:rPr>
+                        <a:t>report.html</a:t>
+                      </a:r>
+                      <a:r>
+                        <a:rPr kumimoji="1" lang="en-US" altLang="ja-JP" sz="1200">
+                          <a:latin typeface="Cascadia Code SemiBold" panose="020B0609020000020004" pitchFamily="49" charset="0"/>
+                          <a:ea typeface="Cascadia Code SemiBold" panose="020B0609020000020004" pitchFamily="49" charset="0"/>
+                          <a:cs typeface="Cascadia Code SemiBold" panose="020B0609020000020004" pitchFamily="49" charset="0"/>
+                        </a:rPr>
+                        <a:t> based on it.</a:t>
+                      </a:r>
+                    </a:p>
+                  </a:txBody>
+                  <a:tcPr marL="137160" marR="137160" marT="137160" marB="137160">
+                    <a:lnL w="12700" cap="flat" cmpd="sng" algn="ctr">
+                      <a:solidFill>
+                        <a:schemeClr val="tx1"/>
+                      </a:solidFill>
+                      <a:prstDash val="solid"/>
+                      <a:round/>
+                      <a:headEnd type="none" w="med" len="med"/>
+                      <a:tailEnd type="none" w="med" len="med"/>
+                    </a:lnL>
+                    <a:lnR w="12700" cap="flat" cmpd="sng" algn="ctr">
+                      <a:solidFill>
+                        <a:schemeClr val="tx1"/>
+                      </a:solidFill>
+                      <a:prstDash val="solid"/>
+                      <a:round/>
+                      <a:headEnd type="none" w="med" len="med"/>
+                      <a:tailEnd type="none" w="med" len="med"/>
+                    </a:lnR>
+                    <a:lnT w="12700" cap="flat" cmpd="sng" algn="ctr">
+                      <a:solidFill>
+                        <a:schemeClr val="tx1"/>
+                      </a:solidFill>
+                      <a:prstDash val="solid"/>
+                      <a:round/>
+                      <a:headEnd type="none" w="med" len="med"/>
+                      <a:tailEnd type="none" w="med" len="med"/>
+                    </a:lnT>
+                    <a:lnB w="12700" cap="flat" cmpd="sng" algn="ctr">
+                      <a:solidFill>
+                        <a:schemeClr val="tx1"/>
+                      </a:solidFill>
+                      <a:prstDash val="solid"/>
+                      <a:round/>
+                      <a:headEnd type="none" w="med" len="med"/>
+                      <a:tailEnd type="none" w="med" len="med"/>
+                    </a:lnB>
+                    <a:solidFill>
+                      <a:schemeClr val="bg1"/>
+                    </a:solidFill>
+                  </a:tcPr>
+                </a:tc>
+                <a:extLst>
+                  <a:ext uri="{0D108BD9-81ED-4DB2-BD59-A6C34878D82A}">
+                    <a16:rowId xmlns:a16="http://schemas.microsoft.com/office/drawing/2014/main" val="4198762670"/>
+                  </a:ext>
+                </a:extLst>
+              </a:tr>
+              <a:tr h="417498">
+                <a:tc>
+                  <a:txBody>
+                    <a:bodyPr/>
+                    <a:lstStyle/>
+                    <a:p>
+                      <a:r>
+                        <a:rPr kumimoji="1" lang="en-US" altLang="ja-JP" sz="1200">
+                          <a:latin typeface="Cascadia Code SemiBold" panose="020B0609020000020004" pitchFamily="49" charset="0"/>
+                          <a:ea typeface="Cascadia Code SemiBold" panose="020B0609020000020004" pitchFamily="49" charset="0"/>
+                          <a:cs typeface="Cascadia Code SemiBold" panose="020B0609020000020004" pitchFamily="49" charset="0"/>
+                        </a:rPr>
+                        <a:t>rubric/*.json</a:t>
+                      </a:r>
+                      <a:endParaRPr kumimoji="1" lang="ja-JP" altLang="en-US" sz="1200">
+                        <a:latin typeface="Cascadia Code SemiBold" panose="020B0609020000020004" pitchFamily="49" charset="0"/>
+                        <a:ea typeface="BIZ UDゴシック" panose="020B0400000000000000" pitchFamily="49" charset="-128"/>
+                        <a:cs typeface="Cascadia Code SemiBold" panose="020B0609020000020004" pitchFamily="49" charset="0"/>
+                      </a:endParaRPr>
+                    </a:p>
+                  </a:txBody>
+                  <a:tcPr marL="137160" marR="137160" marT="137160" marB="137160">
+                    <a:lnL w="12700" cap="flat" cmpd="sng" algn="ctr">
+                      <a:solidFill>
+                        <a:schemeClr val="tx1"/>
+                      </a:solidFill>
+                      <a:prstDash val="solid"/>
+                      <a:round/>
+                      <a:headEnd type="none" w="med" len="med"/>
+                      <a:tailEnd type="none" w="med" len="med"/>
+                    </a:lnL>
+                    <a:lnR w="12700" cap="flat" cmpd="sng" algn="ctr">
+                      <a:solidFill>
+                        <a:schemeClr val="tx1"/>
+                      </a:solidFill>
+                      <a:prstDash val="solid"/>
+                      <a:round/>
+                      <a:headEnd type="none" w="med" len="med"/>
+                      <a:tailEnd type="none" w="med" len="med"/>
+                    </a:lnR>
+                    <a:lnT w="12700" cap="flat" cmpd="sng" algn="ctr">
+                      <a:solidFill>
+                        <a:schemeClr val="tx1"/>
+                      </a:solidFill>
+                      <a:prstDash val="solid"/>
+                      <a:round/>
+                      <a:headEnd type="none" w="med" len="med"/>
+                      <a:tailEnd type="none" w="med" len="med"/>
+                    </a:lnT>
+                    <a:lnB w="12700" cap="flat" cmpd="sng" algn="ctr">
+                      <a:solidFill>
+                        <a:schemeClr val="tx1"/>
+                      </a:solidFill>
+                      <a:prstDash val="solid"/>
+                      <a:round/>
+                      <a:headEnd type="none" w="med" len="med"/>
+                      <a:tailEnd type="none" w="med" len="med"/>
+                    </a:lnB>
+                    <a:solidFill>
+                      <a:schemeClr val="bg1"/>
+                    </a:solidFill>
+                  </a:tcPr>
+                </a:tc>
+                <a:tc>
+                  <a:txBody>
+                    <a:bodyPr/>
+                    <a:lstStyle/>
+                    <a:p>
+                      <a:r>
+                        <a:rPr kumimoji="1" lang="en-US" altLang="ja-JP" sz="1200">
+                          <a:latin typeface="Cascadia Code SemiBold" panose="020B0609020000020004" pitchFamily="49" charset="0"/>
+                          <a:ea typeface="Cascadia Code SemiBold" panose="020B0609020000020004" pitchFamily="49" charset="0"/>
+                          <a:cs typeface="Cascadia Code SemiBold" panose="020B0609020000020004" pitchFamily="49" charset="0"/>
+                        </a:rPr>
+                        <a:t>This JSON defines the criteria used for both initial prompt template generation and LLM-as-a-Judge evaluation.</a:t>
+                      </a:r>
+                    </a:p>
+                  </a:txBody>
+                  <a:tcPr marL="137160" marR="137160" marT="137160" marB="137160">
+                    <a:lnL w="12700" cap="flat" cmpd="sng" algn="ctr">
+                      <a:solidFill>
+                        <a:schemeClr val="tx1"/>
+                      </a:solidFill>
+                      <a:prstDash val="solid"/>
+                      <a:round/>
+                      <a:headEnd type="none" w="med" len="med"/>
+                      <a:tailEnd type="none" w="med" len="med"/>
+                    </a:lnL>
+                    <a:lnR w="12700" cap="flat" cmpd="sng" algn="ctr">
+                      <a:solidFill>
+                        <a:schemeClr val="tx1"/>
+                      </a:solidFill>
+                      <a:prstDash val="solid"/>
+                      <a:round/>
+                      <a:headEnd type="none" w="med" len="med"/>
+                      <a:tailEnd type="none" w="med" len="med"/>
+                    </a:lnR>
+                    <a:lnT w="12700" cap="flat" cmpd="sng" algn="ctr">
+                      <a:solidFill>
+                        <a:schemeClr val="tx1"/>
+                      </a:solidFill>
+                      <a:prstDash val="solid"/>
+                      <a:round/>
+                      <a:headEnd type="none" w="med" len="med"/>
+                      <a:tailEnd type="none" w="med" len="med"/>
+                    </a:lnT>
+                    <a:lnB w="12700" cap="flat" cmpd="sng" algn="ctr">
+                      <a:solidFill>
+                        <a:schemeClr val="tx1"/>
+                      </a:solidFill>
+                      <a:prstDash val="solid"/>
+                      <a:round/>
+                      <a:headEnd type="none" w="med" len="med"/>
+                      <a:tailEnd type="none" w="med" len="med"/>
+                    </a:lnB>
+                    <a:solidFill>
+                      <a:schemeClr val="bg1"/>
+                    </a:solidFill>
+                  </a:tcPr>
+                </a:tc>
+                <a:extLst>
+                  <a:ext uri="{0D108BD9-81ED-4DB2-BD59-A6C34878D82A}">
+                    <a16:rowId xmlns:a16="http://schemas.microsoft.com/office/drawing/2014/main" val="1707978084"/>
+                  </a:ext>
+                </a:extLst>
+              </a:tr>
+              <a:tr h="0">
+                <a:tc>
+                  <a:txBody>
+                    <a:bodyPr/>
+                    <a:lstStyle/>
+                    <a:p>
+                      <a:r>
+                        <a:rPr kumimoji="1" lang="en-US" altLang="ja-JP" sz="1200">
+                          <a:latin typeface="Cascadia Code SemiBold" panose="020B0609020000020004" pitchFamily="49" charset="0"/>
+                          <a:ea typeface="Cascadia Code SemiBold" panose="020B0609020000020004" pitchFamily="49" charset="0"/>
+                          <a:cs typeface="Cascadia Code SemiBold" panose="020B0609020000020004" pitchFamily="49" charset="0"/>
+                        </a:rPr>
+                        <a:t>source/*.txt</a:t>
+                      </a:r>
+                      <a:endParaRPr kumimoji="1" lang="ja-JP" altLang="en-US" sz="1200">
+                        <a:latin typeface="Cascadia Code SemiBold" panose="020B0609020000020004" pitchFamily="49" charset="0"/>
+                        <a:ea typeface="BIZ UDゴシック" panose="020B0400000000000000" pitchFamily="49" charset="-128"/>
+                        <a:cs typeface="Cascadia Code SemiBold" panose="020B0609020000020004" pitchFamily="49" charset="0"/>
+                      </a:endParaRPr>
+                    </a:p>
+                  </a:txBody>
+                  <a:tcPr marL="137160" marR="137160" marT="137160" marB="137160">
+                    <a:lnL w="12700" cap="flat" cmpd="sng" algn="ctr">
+                      <a:solidFill>
+                        <a:schemeClr val="tx1"/>
+                      </a:solidFill>
+                      <a:prstDash val="solid"/>
+                      <a:round/>
+                      <a:headEnd type="none" w="med" len="med"/>
+                      <a:tailEnd type="none" w="med" len="med"/>
+                    </a:lnL>
+                    <a:lnR w="12700" cap="flat" cmpd="sng" algn="ctr">
+                      <a:solidFill>
+                        <a:schemeClr val="tx1"/>
+                      </a:solidFill>
+                      <a:prstDash val="solid"/>
+                      <a:round/>
+                      <a:headEnd type="none" w="med" len="med"/>
+                      <a:tailEnd type="none" w="med" len="med"/>
+                    </a:lnR>
+                    <a:lnT w="12700" cap="flat" cmpd="sng" algn="ctr">
+                      <a:solidFill>
+                        <a:schemeClr val="tx1"/>
+                      </a:solidFill>
+                      <a:prstDash val="solid"/>
+                      <a:round/>
+                      <a:headEnd type="none" w="med" len="med"/>
+                      <a:tailEnd type="none" w="med" len="med"/>
+                    </a:lnT>
+                    <a:lnB w="12700" cap="flat" cmpd="sng" algn="ctr">
+                      <a:solidFill>
+                        <a:schemeClr val="tx1"/>
+                      </a:solidFill>
+                      <a:prstDash val="solid"/>
+                      <a:round/>
+                      <a:headEnd type="none" w="med" len="med"/>
+                      <a:tailEnd type="none" w="med" len="med"/>
+                    </a:lnB>
+                    <a:solidFill>
+                      <a:schemeClr val="bg1"/>
+                    </a:solidFill>
+                  </a:tcPr>
+                </a:tc>
+                <a:tc>
+                  <a:txBody>
+                    <a:bodyPr/>
+                    <a:lstStyle/>
+                    <a:p>
+                      <a:r>
+                        <a:rPr kumimoji="1" lang="en-US" altLang="ja-JP" sz="1200">
+                          <a:latin typeface="Cascadia Code SemiBold" panose="020B0609020000020004" pitchFamily="49" charset="0"/>
+                          <a:ea typeface="Cascadia Code SemiBold" panose="020B0609020000020004" pitchFamily="49" charset="0"/>
+                          <a:cs typeface="Cascadia Code SemiBold" panose="020B0609020000020004" pitchFamily="49" charset="0"/>
+                        </a:rPr>
+                        <a:t>This TXT file contains the original text.</a:t>
+                      </a:r>
+                    </a:p>
+                  </a:txBody>
+                  <a:tcPr marL="137160" marR="137160" marT="137160" marB="137160">
+                    <a:lnL w="12700" cap="flat" cmpd="sng" algn="ctr">
+                      <a:solidFill>
+                        <a:schemeClr val="tx1"/>
+                      </a:solidFill>
+                      <a:prstDash val="solid"/>
+                      <a:round/>
+                      <a:headEnd type="none" w="med" len="med"/>
+                      <a:tailEnd type="none" w="med" len="med"/>
+                    </a:lnL>
+                    <a:lnR w="12700" cap="flat" cmpd="sng" algn="ctr">
+                      <a:solidFill>
+                        <a:schemeClr val="tx1"/>
+                      </a:solidFill>
+                      <a:prstDash val="solid"/>
+                      <a:round/>
+                      <a:headEnd type="none" w="med" len="med"/>
+                      <a:tailEnd type="none" w="med" len="med"/>
+                    </a:lnR>
+                    <a:lnT w="12700" cap="flat" cmpd="sng" algn="ctr">
+                      <a:solidFill>
+                        <a:schemeClr val="tx1"/>
+                      </a:solidFill>
+                      <a:prstDash val="solid"/>
+                      <a:round/>
+                      <a:headEnd type="none" w="med" len="med"/>
+                      <a:tailEnd type="none" w="med" len="med"/>
+                    </a:lnT>
+                    <a:lnB w="12700" cap="flat" cmpd="sng" algn="ctr">
+                      <a:solidFill>
+                        <a:schemeClr val="tx1"/>
+                      </a:solidFill>
+                      <a:prstDash val="solid"/>
+                      <a:round/>
+                      <a:headEnd type="none" w="med" len="med"/>
+                      <a:tailEnd type="none" w="med" len="med"/>
+                    </a:lnB>
+                    <a:solidFill>
+                      <a:schemeClr val="bg1"/>
+                    </a:solidFill>
+                  </a:tcPr>
+                </a:tc>
+                <a:extLst>
+                  <a:ext uri="{0D108BD9-81ED-4DB2-BD59-A6C34878D82A}">
+                    <a16:rowId xmlns:a16="http://schemas.microsoft.com/office/drawing/2014/main" val="1262082791"/>
+                  </a:ext>
+                </a:extLst>
+              </a:tr>
+              <a:tr h="0">
+                <a:tc>
+                  <a:txBody>
+                    <a:bodyPr/>
+                    <a:lstStyle/>
+                    <a:p>
+                      <a:r>
+                        <a:rPr kumimoji="1" lang="en-US" altLang="ja-JP" sz="1200">
+                          <a:latin typeface="Cascadia Code SemiBold" panose="020B0609020000020004" pitchFamily="49" charset="0"/>
+                          <a:ea typeface="Cascadia Code SemiBold" panose="020B0609020000020004" pitchFamily="49" charset="0"/>
+                          <a:cs typeface="Cascadia Code SemiBold" panose="020B0609020000020004" pitchFamily="49" charset="0"/>
+                        </a:rPr>
+                        <a:t>supports/llmj-initial.py</a:t>
+                      </a:r>
+                      <a:endParaRPr kumimoji="1" lang="ja-JP" altLang="en-US" sz="1200">
+                        <a:latin typeface="Cascadia Code SemiBold" panose="020B0609020000020004" pitchFamily="49" charset="0"/>
+                        <a:ea typeface="BIZ UDゴシック" panose="020B0400000000000000" pitchFamily="49" charset="-128"/>
+                        <a:cs typeface="Cascadia Code SemiBold" panose="020B0609020000020004" pitchFamily="49" charset="0"/>
+                      </a:endParaRPr>
+                    </a:p>
+                  </a:txBody>
+                  <a:tcPr marL="137160" marR="137160" marT="137160" marB="137160">
+                    <a:lnL w="12700" cap="flat" cmpd="sng" algn="ctr">
+                      <a:solidFill>
+                        <a:schemeClr val="tx1"/>
+                      </a:solidFill>
+                      <a:prstDash val="solid"/>
+                      <a:round/>
+                      <a:headEnd type="none" w="med" len="med"/>
+                      <a:tailEnd type="none" w="med" len="med"/>
+                    </a:lnL>
+                    <a:lnR w="12700" cap="flat" cmpd="sng" algn="ctr">
+                      <a:solidFill>
+                        <a:schemeClr val="tx1"/>
+                      </a:solidFill>
+                      <a:prstDash val="solid"/>
+                      <a:round/>
+                      <a:headEnd type="none" w="med" len="med"/>
+                      <a:tailEnd type="none" w="med" len="med"/>
+                    </a:lnR>
+                    <a:lnT w="12700" cap="flat" cmpd="sng" algn="ctr">
+                      <a:solidFill>
+                        <a:schemeClr val="tx1"/>
+                      </a:solidFill>
+                      <a:prstDash val="solid"/>
+                      <a:round/>
+                      <a:headEnd type="none" w="med" len="med"/>
+                      <a:tailEnd type="none" w="med" len="med"/>
+                    </a:lnT>
+                    <a:lnB w="12700" cap="flat" cmpd="sng" algn="ctr">
+                      <a:solidFill>
+                        <a:schemeClr val="tx1"/>
+                      </a:solidFill>
+                      <a:prstDash val="solid"/>
+                      <a:round/>
+                      <a:headEnd type="none" w="med" len="med"/>
+                      <a:tailEnd type="none" w="med" len="med"/>
+                    </a:lnB>
+                    <a:solidFill>
+                      <a:schemeClr val="bg1"/>
+                    </a:solidFill>
+                  </a:tcPr>
+                </a:tc>
+                <a:tc>
+                  <a:txBody>
+                    <a:bodyPr/>
+                    <a:lstStyle/>
+                    <a:p>
+                      <a:r>
+                        <a:rPr kumimoji="1" lang="en-US" altLang="ja-JP" sz="1200">
+                          <a:latin typeface="Cascadia Code SemiBold" panose="020B0609020000020004" pitchFamily="49" charset="0"/>
+                          <a:ea typeface="Cascadia Code SemiBold" panose="020B0609020000020004" pitchFamily="49" charset="0"/>
+                          <a:cs typeface="Cascadia Code SemiBold" panose="020B0609020000020004" pitchFamily="49" charset="0"/>
+                        </a:rPr>
+                        <a:t>This SCRIPT generates prompt templates from </a:t>
+                      </a:r>
+                      <a:r>
+                        <a:rPr kumimoji="1" lang="en-US" altLang="ja-JP" sz="1200" b="1" i="1">
+                          <a:solidFill>
+                            <a:srgbClr val="FF0000"/>
+                          </a:solidFill>
+                          <a:latin typeface="Cascadia Code SemiBold" panose="020B0609020000020004" pitchFamily="49" charset="0"/>
+                          <a:ea typeface="Cascadia Code SemiBold" panose="020B0609020000020004" pitchFamily="49" charset="0"/>
+                          <a:cs typeface="Cascadia Code SemiBold" panose="020B0609020000020004" pitchFamily="49" charset="0"/>
+                        </a:rPr>
+                        <a:t>rubric/*.json</a:t>
+                      </a:r>
+                      <a:r>
+                        <a:rPr kumimoji="1" lang="en-US" altLang="ja-JP" sz="1200">
+                          <a:latin typeface="Cascadia Code SemiBold" panose="020B0609020000020004" pitchFamily="49" charset="0"/>
+                          <a:ea typeface="Cascadia Code SemiBold" panose="020B0609020000020004" pitchFamily="49" charset="0"/>
+                          <a:cs typeface="Cascadia Code SemiBold" panose="020B0609020000020004" pitchFamily="49" charset="0"/>
+                        </a:rPr>
+                        <a:t> and writes them to </a:t>
+                      </a:r>
+                      <a:r>
+                        <a:rPr kumimoji="1" lang="en-US" altLang="ja-JP" sz="1200" b="1" i="1">
+                          <a:solidFill>
+                            <a:srgbClr val="FF0000"/>
+                          </a:solidFill>
+                          <a:latin typeface="Cascadia Code SemiBold" panose="020B0609020000020004" pitchFamily="49" charset="0"/>
+                          <a:ea typeface="Cascadia Code SemiBold" panose="020B0609020000020004" pitchFamily="49" charset="0"/>
+                          <a:cs typeface="Cascadia Code SemiBold" panose="020B0609020000020004" pitchFamily="49" charset="0"/>
+                        </a:rPr>
+                        <a:t>work/*.txt</a:t>
+                      </a:r>
+                      <a:r>
+                        <a:rPr kumimoji="1" lang="en-US" altLang="ja-JP" sz="1200">
+                          <a:latin typeface="Cascadia Code SemiBold" panose="020B0609020000020004" pitchFamily="49" charset="0"/>
+                          <a:ea typeface="Cascadia Code SemiBold" panose="020B0609020000020004" pitchFamily="49" charset="0"/>
+                          <a:cs typeface="Cascadia Code SemiBold" panose="020B0609020000020004" pitchFamily="49" charset="0"/>
+                        </a:rPr>
+                        <a:t>. These prompts serve as a baseline for human tuning.</a:t>
+                      </a:r>
+                    </a:p>
+                  </a:txBody>
+                  <a:tcPr marL="137160" marR="137160" marT="137160" marB="137160">
+                    <a:lnL w="12700" cap="flat" cmpd="sng" algn="ctr">
+                      <a:solidFill>
+                        <a:schemeClr val="tx1"/>
+                      </a:solidFill>
+                      <a:prstDash val="solid"/>
+                      <a:round/>
+                      <a:headEnd type="none" w="med" len="med"/>
+                      <a:tailEnd type="none" w="med" len="med"/>
+                    </a:lnL>
+                    <a:lnR w="12700" cap="flat" cmpd="sng" algn="ctr">
+                      <a:solidFill>
+                        <a:schemeClr val="tx1"/>
+                      </a:solidFill>
+                      <a:prstDash val="solid"/>
+                      <a:round/>
+                      <a:headEnd type="none" w="med" len="med"/>
+                      <a:tailEnd type="none" w="med" len="med"/>
+                    </a:lnR>
+                    <a:lnT w="12700" cap="flat" cmpd="sng" algn="ctr">
+                      <a:solidFill>
+                        <a:schemeClr val="tx1"/>
+                      </a:solidFill>
+                      <a:prstDash val="solid"/>
+                      <a:round/>
+                      <a:headEnd type="none" w="med" len="med"/>
+                      <a:tailEnd type="none" w="med" len="med"/>
+                    </a:lnT>
+                    <a:lnB w="12700" cap="flat" cmpd="sng" algn="ctr">
+                      <a:solidFill>
+                        <a:schemeClr val="tx1"/>
+                      </a:solidFill>
+                      <a:prstDash val="solid"/>
+                      <a:round/>
+                      <a:headEnd type="none" w="med" len="med"/>
+                      <a:tailEnd type="none" w="med" len="med"/>
+                    </a:lnB>
+                    <a:solidFill>
+                      <a:schemeClr val="bg1"/>
+                    </a:solidFill>
+                  </a:tcPr>
+                </a:tc>
+                <a:extLst>
+                  <a:ext uri="{0D108BD9-81ED-4DB2-BD59-A6C34878D82A}">
+                    <a16:rowId xmlns:a16="http://schemas.microsoft.com/office/drawing/2014/main" val="3817967045"/>
+                  </a:ext>
+                </a:extLst>
+              </a:tr>
+              <a:tr h="0">
+                <a:tc>
+                  <a:txBody>
+                    <a:bodyPr/>
+                    <a:lstStyle/>
+                    <a:p>
+                      <a:pPr marL="0" marR="0" lvl="0" indent="0" algn="l" defTabSz="914400" rtl="0" eaLnBrk="1" fontAlgn="auto" latinLnBrk="0" hangingPunct="1">
+                        <a:lnSpc>
+                          <a:spcPct val="100000"/>
+                        </a:lnSpc>
+                        <a:spcBef>
+                          <a:spcPts val="0"/>
+                        </a:spcBef>
+                        <a:spcAft>
+                          <a:spcPts val="0"/>
+                        </a:spcAft>
+                        <a:buClrTx/>
+                        <a:buSzTx/>
+                        <a:buFontTx/>
+                        <a:buNone/>
+                        <a:tabLst/>
+                        <a:defRPr/>
+                      </a:pPr>
+                      <a:r>
+                        <a:rPr kumimoji="1" lang="en-US" altLang="ja-JP" sz="1200">
+                          <a:latin typeface="Cascadia Code SemiBold" panose="020B0609020000020004" pitchFamily="49" charset="0"/>
+                          <a:ea typeface="Cascadia Code SemiBold" panose="020B0609020000020004" pitchFamily="49" charset="0"/>
+                          <a:cs typeface="Cascadia Code SemiBold" panose="020B0609020000020004" pitchFamily="49" charset="0"/>
+                        </a:rPr>
+                        <a:t>supports/template-*</a:t>
+                      </a:r>
+                      <a:endParaRPr kumimoji="1" lang="ja-JP" altLang="en-US" sz="1200">
+                        <a:latin typeface="Cascadia Code SemiBold" panose="020B0609020000020004" pitchFamily="49" charset="0"/>
+                        <a:ea typeface="BIZ UDゴシック" panose="020B0400000000000000" pitchFamily="49" charset="-128"/>
+                        <a:cs typeface="Cascadia Code SemiBold" panose="020B0609020000020004" pitchFamily="49" charset="0"/>
+                      </a:endParaRPr>
+                    </a:p>
+                  </a:txBody>
+                  <a:tcPr marL="137160" marR="137160" marT="137160" marB="137160">
+                    <a:lnL w="12700" cap="flat" cmpd="sng" algn="ctr">
+                      <a:solidFill>
+                        <a:schemeClr val="tx1"/>
+                      </a:solidFill>
+                      <a:prstDash val="solid"/>
+                      <a:round/>
+                      <a:headEnd type="none" w="med" len="med"/>
+                      <a:tailEnd type="none" w="med" len="med"/>
+                    </a:lnL>
+                    <a:lnR w="12700" cap="flat" cmpd="sng" algn="ctr">
+                      <a:solidFill>
+                        <a:schemeClr val="tx1"/>
+                      </a:solidFill>
+                      <a:prstDash val="solid"/>
+                      <a:round/>
+                      <a:headEnd type="none" w="med" len="med"/>
+                      <a:tailEnd type="none" w="med" len="med"/>
+                    </a:lnR>
+                    <a:lnT w="12700" cap="flat" cmpd="sng" algn="ctr">
+                      <a:solidFill>
+                        <a:schemeClr val="tx1"/>
+                      </a:solidFill>
+                      <a:prstDash val="solid"/>
+                      <a:round/>
+                      <a:headEnd type="none" w="med" len="med"/>
+                      <a:tailEnd type="none" w="med" len="med"/>
+                    </a:lnT>
+                    <a:lnB w="12700" cap="flat" cmpd="sng" algn="ctr">
+                      <a:solidFill>
+                        <a:schemeClr val="tx1"/>
+                      </a:solidFill>
+                      <a:prstDash val="solid"/>
+                      <a:round/>
+                      <a:headEnd type="none" w="med" len="med"/>
+                      <a:tailEnd type="none" w="med" len="med"/>
+                    </a:lnB>
+                    <a:solidFill>
+                      <a:schemeClr val="bg1"/>
+                    </a:solidFill>
+                  </a:tcPr>
+                </a:tc>
+                <a:tc>
+                  <a:txBody>
+                    <a:bodyPr/>
+                    <a:lstStyle/>
+                    <a:p>
+                      <a:r>
+                        <a:rPr kumimoji="1" lang="en-US" altLang="ja-JP" sz="1200">
+                          <a:latin typeface="Cascadia Code SemiBold" panose="020B0609020000020004" pitchFamily="49" charset="0"/>
+                          <a:ea typeface="Cascadia Code SemiBold" panose="020B0609020000020004" pitchFamily="49" charset="0"/>
+                          <a:cs typeface="Cascadia Code SemiBold" panose="020B0609020000020004" pitchFamily="49" charset="0"/>
+                        </a:rPr>
+                        <a:t>These templates are used by </a:t>
+                      </a:r>
+                      <a:r>
+                        <a:rPr kumimoji="1" lang="en-US" altLang="ja-JP" sz="1200" b="1" i="1">
+                          <a:solidFill>
+                            <a:srgbClr val="FF0000"/>
+                          </a:solidFill>
+                          <a:latin typeface="Cascadia Code SemiBold" panose="020B0609020000020004" pitchFamily="49" charset="0"/>
+                          <a:ea typeface="Cascadia Code SemiBold" panose="020B0609020000020004" pitchFamily="49" charset="0"/>
+                          <a:cs typeface="Cascadia Code SemiBold" panose="020B0609020000020004" pitchFamily="49" charset="0"/>
+                        </a:rPr>
+                        <a:t>*.py</a:t>
+                      </a:r>
+                      <a:r>
+                        <a:rPr kumimoji="1" lang="en-US" altLang="ja-JP" sz="1200">
+                          <a:latin typeface="Cascadia Code SemiBold" panose="020B0609020000020004" pitchFamily="49" charset="0"/>
+                          <a:ea typeface="Cascadia Code SemiBold" panose="020B0609020000020004" pitchFamily="49" charset="0"/>
+                          <a:cs typeface="Cascadia Code SemiBold" panose="020B0609020000020004" pitchFamily="49" charset="0"/>
+                        </a:rPr>
+                        <a:t> scripts.</a:t>
+                      </a:r>
+                    </a:p>
+                  </a:txBody>
+                  <a:tcPr marL="137160" marR="137160" marT="137160" marB="137160">
+                    <a:lnL w="12700" cap="flat" cmpd="sng" algn="ctr">
+                      <a:solidFill>
+                        <a:schemeClr val="tx1"/>
+                      </a:solidFill>
+                      <a:prstDash val="solid"/>
+                      <a:round/>
+                      <a:headEnd type="none" w="med" len="med"/>
+                      <a:tailEnd type="none" w="med" len="med"/>
+                    </a:lnL>
+                    <a:lnR w="12700" cap="flat" cmpd="sng" algn="ctr">
+                      <a:solidFill>
+                        <a:schemeClr val="tx1"/>
+                      </a:solidFill>
+                      <a:prstDash val="solid"/>
+                      <a:round/>
+                      <a:headEnd type="none" w="med" len="med"/>
+                      <a:tailEnd type="none" w="med" len="med"/>
+                    </a:lnR>
+                    <a:lnT w="12700" cap="flat" cmpd="sng" algn="ctr">
+                      <a:solidFill>
+                        <a:schemeClr val="tx1"/>
+                      </a:solidFill>
+                      <a:prstDash val="solid"/>
+                      <a:round/>
+                      <a:headEnd type="none" w="med" len="med"/>
+                      <a:tailEnd type="none" w="med" len="med"/>
+                    </a:lnT>
+                    <a:lnB w="12700" cap="flat" cmpd="sng" algn="ctr">
+                      <a:solidFill>
+                        <a:schemeClr val="tx1"/>
+                      </a:solidFill>
+                      <a:prstDash val="solid"/>
+                      <a:round/>
+                      <a:headEnd type="none" w="med" len="med"/>
+                      <a:tailEnd type="none" w="med" len="med"/>
+                    </a:lnB>
+                    <a:solidFill>
+                      <a:schemeClr val="bg1"/>
+                    </a:solidFill>
+                  </a:tcPr>
+                </a:tc>
+                <a:extLst>
+                  <a:ext uri="{0D108BD9-81ED-4DB2-BD59-A6C34878D82A}">
+                    <a16:rowId xmlns:a16="http://schemas.microsoft.com/office/drawing/2014/main" val="1259418972"/>
+                  </a:ext>
+                </a:extLst>
+              </a:tr>
+              <a:tr h="417498">
+                <a:tc>
+                  <a:txBody>
+                    <a:bodyPr/>
+                    <a:lstStyle/>
+                    <a:p>
+                      <a:r>
+                        <a:rPr kumimoji="1" lang="en-US" altLang="ja-JP" sz="1200">
+                          <a:latin typeface="Cascadia Code SemiBold" panose="020B0609020000020004" pitchFamily="49" charset="0"/>
+                          <a:ea typeface="Cascadia Code SemiBold" panose="020B0609020000020004" pitchFamily="49" charset="0"/>
+                          <a:cs typeface="Cascadia Code SemiBold" panose="020B0609020000020004" pitchFamily="49" charset="0"/>
+                        </a:rPr>
+                        <a:t>work/*</a:t>
+                      </a:r>
+                      <a:endParaRPr kumimoji="1" lang="ja-JP" altLang="en-US" sz="1200">
+                        <a:latin typeface="Cascadia Code SemiBold" panose="020B0609020000020004" pitchFamily="49" charset="0"/>
+                        <a:ea typeface="BIZ UDゴシック" panose="020B0400000000000000" pitchFamily="49" charset="-128"/>
+                        <a:cs typeface="Cascadia Code SemiBold" panose="020B0609020000020004" pitchFamily="49" charset="0"/>
+                      </a:endParaRPr>
+                    </a:p>
+                  </a:txBody>
+                  <a:tcPr marL="137160" marR="137160" marT="137160" marB="137160">
+                    <a:lnL w="12700" cap="flat" cmpd="sng" algn="ctr">
+                      <a:solidFill>
+                        <a:schemeClr val="tx1"/>
+                      </a:solidFill>
+                      <a:prstDash val="solid"/>
+                      <a:round/>
+                      <a:headEnd type="none" w="med" len="med"/>
+                      <a:tailEnd type="none" w="med" len="med"/>
+                    </a:lnL>
+                    <a:lnR w="12700" cap="flat" cmpd="sng" algn="ctr">
+                      <a:solidFill>
+                        <a:schemeClr val="tx1"/>
+                      </a:solidFill>
+                      <a:prstDash val="solid"/>
+                      <a:round/>
+                      <a:headEnd type="none" w="med" len="med"/>
+                      <a:tailEnd type="none" w="med" len="med"/>
+                    </a:lnR>
+                    <a:lnT w="12700" cap="flat" cmpd="sng" algn="ctr">
+                      <a:solidFill>
+                        <a:schemeClr val="tx1"/>
+                      </a:solidFill>
+                      <a:prstDash val="solid"/>
+                      <a:round/>
+                      <a:headEnd type="none" w="med" len="med"/>
+                      <a:tailEnd type="none" w="med" len="med"/>
+                    </a:lnT>
+                    <a:lnB w="12700" cap="flat" cmpd="sng" algn="ctr">
+                      <a:solidFill>
+                        <a:schemeClr val="tx1"/>
+                      </a:solidFill>
+                      <a:prstDash val="solid"/>
+                      <a:round/>
+                      <a:headEnd type="none" w="med" len="med"/>
+                      <a:tailEnd type="none" w="med" len="med"/>
+                    </a:lnB>
+                    <a:solidFill>
+                      <a:schemeClr val="bg1"/>
+                    </a:solidFill>
+                  </a:tcPr>
+                </a:tc>
+                <a:tc>
+                  <a:txBody>
+                    <a:bodyPr/>
+                    <a:lstStyle/>
+                    <a:p>
+                      <a:r>
+                        <a:rPr kumimoji="1" lang="en-US" altLang="ja-JP" sz="1200">
+                          <a:latin typeface="Cascadia Code SemiBold" panose="020B0609020000020004" pitchFamily="49" charset="0"/>
+                          <a:ea typeface="Cascadia Code SemiBold" panose="020B0609020000020004" pitchFamily="49" charset="0"/>
+                          <a:cs typeface="Cascadia Code SemiBold" panose="020B0609020000020004" pitchFamily="49" charset="0"/>
+                        </a:rPr>
+                        <a:t>This directory contains generated outputs such as </a:t>
+                      </a:r>
+                      <a:r>
+                        <a:rPr kumimoji="1" lang="en-US" altLang="ja-JP" sz="1200" b="1" i="1">
+                          <a:solidFill>
+                            <a:srgbClr val="FF0000"/>
+                          </a:solidFill>
+                          <a:latin typeface="Cascadia Code SemiBold" panose="020B0609020000020004" pitchFamily="49" charset="0"/>
+                          <a:ea typeface="Cascadia Code SemiBold" panose="020B0609020000020004" pitchFamily="49" charset="0"/>
+                          <a:cs typeface="Cascadia Code SemiBold" panose="020B0609020000020004" pitchFamily="49" charset="0"/>
+                        </a:rPr>
+                        <a:t>*.txt</a:t>
+                      </a:r>
+                      <a:r>
+                        <a:rPr kumimoji="1" lang="en-US" altLang="ja-JP" sz="1200">
+                          <a:latin typeface="Cascadia Code SemiBold" panose="020B0609020000020004" pitchFamily="49" charset="0"/>
+                          <a:ea typeface="Cascadia Code SemiBold" panose="020B0609020000020004" pitchFamily="49" charset="0"/>
+                          <a:cs typeface="Cascadia Code SemiBold" panose="020B0609020000020004" pitchFamily="49" charset="0"/>
+                        </a:rPr>
+                        <a:t>, </a:t>
+                      </a:r>
+                      <a:r>
+                        <a:rPr kumimoji="1" lang="en-US" altLang="ja-JP" sz="1200" b="1" i="1">
+                          <a:solidFill>
+                            <a:srgbClr val="FF0000"/>
+                          </a:solidFill>
+                          <a:latin typeface="Cascadia Code SemiBold" panose="020B0609020000020004" pitchFamily="49" charset="0"/>
+                          <a:ea typeface="Cascadia Code SemiBold" panose="020B0609020000020004" pitchFamily="49" charset="0"/>
+                          <a:cs typeface="Cascadia Code SemiBold" panose="020B0609020000020004" pitchFamily="49" charset="0"/>
+                        </a:rPr>
+                        <a:t>*.xlsx</a:t>
+                      </a:r>
+                      <a:r>
+                        <a:rPr kumimoji="1" lang="en-US" altLang="ja-JP" sz="1200">
+                          <a:latin typeface="Cascadia Code SemiBold" panose="020B0609020000020004" pitchFamily="49" charset="0"/>
+                          <a:ea typeface="Cascadia Code SemiBold" panose="020B0609020000020004" pitchFamily="49" charset="0"/>
+                          <a:cs typeface="Cascadia Code SemiBold" panose="020B0609020000020004" pitchFamily="49" charset="0"/>
+                        </a:rPr>
+                        <a:t>, and </a:t>
+                      </a:r>
+                      <a:r>
+                        <a:rPr kumimoji="1" lang="en-US" altLang="ja-JP" sz="1200" b="1" i="1">
+                          <a:solidFill>
+                            <a:srgbClr val="FF0000"/>
+                          </a:solidFill>
+                          <a:latin typeface="Cascadia Code SemiBold" panose="020B0609020000020004" pitchFamily="49" charset="0"/>
+                          <a:ea typeface="Cascadia Code SemiBold" panose="020B0609020000020004" pitchFamily="49" charset="0"/>
+                          <a:cs typeface="Cascadia Code SemiBold" panose="020B0609020000020004" pitchFamily="49" charset="0"/>
+                        </a:rPr>
+                        <a:t>report.html</a:t>
+                      </a:r>
+                      <a:r>
+                        <a:rPr kumimoji="1" lang="en-US" altLang="ja-JP" sz="1200">
+                          <a:latin typeface="Cascadia Code SemiBold" panose="020B0609020000020004" pitchFamily="49" charset="0"/>
+                          <a:ea typeface="Cascadia Code SemiBold" panose="020B0609020000020004" pitchFamily="49" charset="0"/>
+                          <a:cs typeface="Cascadia Code SemiBold" panose="020B0609020000020004" pitchFamily="49" charset="0"/>
+                        </a:rPr>
+                        <a:t>.</a:t>
+                      </a:r>
+                    </a:p>
+                  </a:txBody>
+                  <a:tcPr marL="137160" marR="137160" marT="137160" marB="137160">
+                    <a:lnL w="12700" cap="flat" cmpd="sng" algn="ctr">
+                      <a:solidFill>
+                        <a:schemeClr val="tx1"/>
+                      </a:solidFill>
+                      <a:prstDash val="solid"/>
+                      <a:round/>
+                      <a:headEnd type="none" w="med" len="med"/>
+                      <a:tailEnd type="none" w="med" len="med"/>
+                    </a:lnL>
+                    <a:lnR w="12700" cap="flat" cmpd="sng" algn="ctr">
+                      <a:solidFill>
+                        <a:schemeClr val="tx1"/>
+                      </a:solidFill>
+                      <a:prstDash val="solid"/>
+                      <a:round/>
+                      <a:headEnd type="none" w="med" len="med"/>
+                      <a:tailEnd type="none" w="med" len="med"/>
+                    </a:lnR>
+                    <a:lnT w="12700" cap="flat" cmpd="sng" algn="ctr">
+                      <a:solidFill>
+                        <a:schemeClr val="tx1"/>
+                      </a:solidFill>
+                      <a:prstDash val="solid"/>
+                      <a:round/>
+                      <a:headEnd type="none" w="med" len="med"/>
+                      <a:tailEnd type="none" w="med" len="med"/>
+                    </a:lnT>
+                    <a:lnB w="12700" cap="flat" cmpd="sng" algn="ctr">
+                      <a:solidFill>
+                        <a:schemeClr val="tx1"/>
+                      </a:solidFill>
+                      <a:prstDash val="solid"/>
+                      <a:round/>
+                      <a:headEnd type="none" w="med" len="med"/>
+                      <a:tailEnd type="none" w="med" len="med"/>
+                    </a:lnB>
+                    <a:solidFill>
+                      <a:schemeClr val="bg1"/>
+                    </a:solidFill>
+                  </a:tcPr>
+                </a:tc>
+                <a:extLst>
+                  <a:ext uri="{0D108BD9-81ED-4DB2-BD59-A6C34878D82A}">
+                    <a16:rowId xmlns:a16="http://schemas.microsoft.com/office/drawing/2014/main" val="3804432217"/>
+                  </a:ext>
+                </a:extLst>
+              </a:tr>
+            </a:tbl>
+          </a:graphicData>
+        </a:graphic>
+      </p:graphicFrame>
+    </p:spTree>
+    <p:extLst>
+      <p:ext uri="{BB962C8B-B14F-4D97-AF65-F5344CB8AC3E}">
+        <p14:creationId xmlns:p14="http://schemas.microsoft.com/office/powerpoint/2010/main" val="1133861260"/>
+      </p:ext>
+    </p:extLst>
+  </p:cSld>
+  <p:clrMapOvr>
+    <a:masterClrMapping/>
+  </p:clrMapOvr>
+</p:sldLayout>
+</file>
+
+<file path=ppt/slideLayouts/slideLayout5.xml><?xml version="1.0" encoding="utf-8"?>
 <p:sldLayout xmlns:a="http://schemas.openxmlformats.org/drawingml/2006/main" xmlns:r="http://schemas.openxmlformats.org/officeDocument/2006/relationships" xmlns:p="http://schemas.openxmlformats.org/presentationml/2006/main" preserve="1" userDrawn="1">
   <p:cSld name="1_ユーザー設定レイアウト">
     <p:spTree>
@@ -9540,7 +11218,7 @@
 </p:sldLayout>
 </file>
 
-<file path=ppt/slideLayouts/slideLayout5.xml><?xml version="1.0" encoding="utf-8"?>
+<file path=ppt/slideLayouts/slideLayout6.xml><?xml version="1.0" encoding="utf-8"?>
 <p:sldLayout xmlns:a="http://schemas.openxmlformats.org/drawingml/2006/main" xmlns:r="http://schemas.openxmlformats.org/officeDocument/2006/relationships" xmlns:p="http://schemas.openxmlformats.org/presentationml/2006/main" preserve="1" userDrawn="1">
   <p:cSld name="2_ユーザー設定レイアウト">
     <p:spTree>
@@ -15561,8 +17239,9 @@
     <p:sldLayoutId id="2147483649" r:id="rId1"/>
     <p:sldLayoutId id="2147483650" r:id="rId2"/>
     <p:sldLayoutId id="2147483653" r:id="rId3"/>
-    <p:sldLayoutId id="2147483651" r:id="rId4"/>
-    <p:sldLayoutId id="2147483652" r:id="rId5"/>
+    <p:sldLayoutId id="2147483654" r:id="rId4"/>
+    <p:sldLayoutId id="2147483651" r:id="rId5"/>
+    <p:sldLayoutId id="2147483652" r:id="rId6"/>
   </p:sldLayoutIdLst>
   <p:txStyles>
     <p:titleStyle>
@@ -16099,7 +17778,7 @@
         <p:cNvPr id="1" name="">
           <a:extLst>
             <a:ext uri="{FF2B5EF4-FFF2-40B4-BE49-F238E27FC236}">
-              <a16:creationId xmlns:a16="http://schemas.microsoft.com/office/drawing/2014/main" id="{889E7D3D-5029-08AB-8B26-CC73DB263EF9}"/>
+              <a16:creationId xmlns:a16="http://schemas.microsoft.com/office/drawing/2014/main" id="{097EBBFE-81F6-8DA4-B3BF-6606FED8754E}"/>
             </a:ext>
           </a:extLst>
         </p:cNvPr>
@@ -16119,7 +17798,7 @@
           <p:cNvPr id="4" name="フリーフォーム: 図形 3">
             <a:extLst>
               <a:ext uri="{FF2B5EF4-FFF2-40B4-BE49-F238E27FC236}">
-                <a16:creationId xmlns:a16="http://schemas.microsoft.com/office/drawing/2014/main" id="{75A6B03E-1A9C-E885-0A31-7E4E6AB63D64}"/>
+                <a16:creationId xmlns:a16="http://schemas.microsoft.com/office/drawing/2014/main" id="{2C2F29D6-4FE5-FB49-F635-6983E5B302C3}"/>
               </a:ext>
             </a:extLst>
           </p:cNvPr>
@@ -16134,14 +17813,14 @@
           <a:custGeom>
             <a:avLst/>
             <a:gdLst>
-              <a:gd name="csX0" fmla="*/ 1610315 w 12192000"/>
-              <a:gd name="csY0" fmla="*/ 2281940 h 6858000"/>
-              <a:gd name="csX1" fmla="*/ 1610315 w 12192000"/>
-              <a:gd name="csY1" fmla="*/ 2921211 h 6858000"/>
-              <a:gd name="csX2" fmla="*/ 10600566 w 12192000"/>
-              <a:gd name="csY2" fmla="*/ 2921211 h 6858000"/>
-              <a:gd name="csX3" fmla="*/ 10600566 w 12192000"/>
-              <a:gd name="csY3" fmla="*/ 2281940 h 6858000"/>
+              <a:gd name="csX0" fmla="*/ 769257 w 12192000"/>
+              <a:gd name="csY0" fmla="*/ 2242457 h 6858000"/>
+              <a:gd name="csX1" fmla="*/ 769257 w 12192000"/>
+              <a:gd name="csY1" fmla="*/ 2692400 h 6858000"/>
+              <a:gd name="csX2" fmla="*/ 11422743 w 12192000"/>
+              <a:gd name="csY2" fmla="*/ 2692400 h 6858000"/>
+              <a:gd name="csX3" fmla="*/ 11422743 w 12192000"/>
+              <a:gd name="csY3" fmla="*/ 2242457 h 6858000"/>
               <a:gd name="csX4" fmla="*/ 0 w 12192000"/>
               <a:gd name="csY4" fmla="*/ 0 h 6858000"/>
               <a:gd name="csX5" fmla="*/ 12192000 w 12192000"/>
@@ -16182,16 +17861,16 @@
             <a:pathLst>
               <a:path w="12192000" h="6858000">
                 <a:moveTo>
-                  <a:pt x="1610315" y="2281940"/>
+                  <a:pt x="769257" y="2242457"/>
                 </a:moveTo>
                 <a:lnTo>
-                  <a:pt x="1610315" y="2921211"/>
+                  <a:pt x="769257" y="2692400"/>
                 </a:lnTo>
                 <a:lnTo>
-                  <a:pt x="10600566" y="2921211"/>
+                  <a:pt x="11422743" y="2692400"/>
                 </a:lnTo>
                 <a:lnTo>
-                  <a:pt x="10600566" y="2281940"/>
+                  <a:pt x="11422743" y="2242457"/>
                 </a:lnTo>
                 <a:close/>
                 <a:moveTo>
@@ -16249,7 +17928,7 @@
     </p:spTree>
     <p:extLst>
       <p:ext uri="{BB962C8B-B14F-4D97-AF65-F5344CB8AC3E}">
-        <p14:creationId xmlns:p14="http://schemas.microsoft.com/office/powerpoint/2010/main" val="3477764586"/>
+        <p14:creationId xmlns:p14="http://schemas.microsoft.com/office/powerpoint/2010/main" val="856209537"/>
       </p:ext>
     </p:extLst>
   </p:cSld>
@@ -16451,174 +18130,6 @@
         <p:cNvPr id="1" name="">
           <a:extLst>
             <a:ext uri="{FF2B5EF4-FFF2-40B4-BE49-F238E27FC236}">
-              <a16:creationId xmlns:a16="http://schemas.microsoft.com/office/drawing/2014/main" id="{E9EEA28A-A641-A202-8DBA-AEB86A3B1A6E}"/>
-            </a:ext>
-          </a:extLst>
-        </p:cNvPr>
-        <p:cNvGrpSpPr/>
-        <p:nvPr/>
-      </p:nvGrpSpPr>
-      <p:grpSpPr>
-        <a:xfrm>
-          <a:off x="0" y="0"/>
-          <a:ext cx="0" cy="0"/>
-          <a:chOff x="0" y="0"/>
-          <a:chExt cx="0" cy="0"/>
-        </a:xfrm>
-      </p:grpSpPr>
-      <p:sp>
-        <p:nvSpPr>
-          <p:cNvPr id="4" name="フリーフォーム: 図形 3">
-            <a:extLst>
-              <a:ext uri="{FF2B5EF4-FFF2-40B4-BE49-F238E27FC236}">
-                <a16:creationId xmlns:a16="http://schemas.microsoft.com/office/drawing/2014/main" id="{66345C45-61AB-2278-1887-277D6F499385}"/>
-              </a:ext>
-            </a:extLst>
-          </p:cNvPr>
-          <p:cNvSpPr/>
-          <p:nvPr/>
-        </p:nvSpPr>
-        <p:spPr>
-          <a:xfrm>
-            <a:off x="0" y="0"/>
-            <a:ext cx="12192000" cy="6858000"/>
-          </a:xfrm>
-          <a:custGeom>
-            <a:avLst/>
-            <a:gdLst>
-              <a:gd name="csX0" fmla="*/ 1610315 w 12192000"/>
-              <a:gd name="csY0" fmla="*/ 2929303 h 6858000"/>
-              <a:gd name="csX1" fmla="*/ 1610315 w 12192000"/>
-              <a:gd name="csY1" fmla="*/ 3568574 h 6858000"/>
-              <a:gd name="csX2" fmla="*/ 10600566 w 12192000"/>
-              <a:gd name="csY2" fmla="*/ 3568574 h 6858000"/>
-              <a:gd name="csX3" fmla="*/ 10600566 w 12192000"/>
-              <a:gd name="csY3" fmla="*/ 2929303 h 6858000"/>
-              <a:gd name="csX4" fmla="*/ 0 w 12192000"/>
-              <a:gd name="csY4" fmla="*/ 0 h 6858000"/>
-              <a:gd name="csX5" fmla="*/ 12192000 w 12192000"/>
-              <a:gd name="csY5" fmla="*/ 0 h 6858000"/>
-              <a:gd name="csX6" fmla="*/ 12192000 w 12192000"/>
-              <a:gd name="csY6" fmla="*/ 6858000 h 6858000"/>
-              <a:gd name="csX7" fmla="*/ 0 w 12192000"/>
-              <a:gd name="csY7" fmla="*/ 6858000 h 6858000"/>
-            </a:gdLst>
-            <a:ahLst/>
-            <a:cxnLst>
-              <a:cxn ang="0">
-                <a:pos x="csX0" y="csY0"/>
-              </a:cxn>
-              <a:cxn ang="0">
-                <a:pos x="csX1" y="csY1"/>
-              </a:cxn>
-              <a:cxn ang="0">
-                <a:pos x="csX2" y="csY2"/>
-              </a:cxn>
-              <a:cxn ang="0">
-                <a:pos x="csX3" y="csY3"/>
-              </a:cxn>
-              <a:cxn ang="0">
-                <a:pos x="csX4" y="csY4"/>
-              </a:cxn>
-              <a:cxn ang="0">
-                <a:pos x="csX5" y="csY5"/>
-              </a:cxn>
-              <a:cxn ang="0">
-                <a:pos x="csX6" y="csY6"/>
-              </a:cxn>
-              <a:cxn ang="0">
-                <a:pos x="csX7" y="csY7"/>
-              </a:cxn>
-            </a:cxnLst>
-            <a:rect l="l" t="t" r="r" b="b"/>
-            <a:pathLst>
-              <a:path w="12192000" h="6858000">
-                <a:moveTo>
-                  <a:pt x="1610315" y="2929303"/>
-                </a:moveTo>
-                <a:lnTo>
-                  <a:pt x="1610315" y="3568574"/>
-                </a:lnTo>
-                <a:lnTo>
-                  <a:pt x="10600566" y="3568574"/>
-                </a:lnTo>
-                <a:lnTo>
-                  <a:pt x="10600566" y="2929303"/>
-                </a:lnTo>
-                <a:close/>
-                <a:moveTo>
-                  <a:pt x="0" y="0"/>
-                </a:moveTo>
-                <a:lnTo>
-                  <a:pt x="12192000" y="0"/>
-                </a:lnTo>
-                <a:lnTo>
-                  <a:pt x="12192000" y="6858000"/>
-                </a:lnTo>
-                <a:lnTo>
-                  <a:pt x="0" y="6858000"/>
-                </a:lnTo>
-                <a:close/>
-              </a:path>
-            </a:pathLst>
-          </a:custGeom>
-          <a:solidFill>
-            <a:srgbClr val="000000">
-              <a:alpha val="20000"/>
-            </a:srgbClr>
-          </a:solidFill>
-          <a:ln>
-            <a:noFill/>
-          </a:ln>
-        </p:spPr>
-        <p:style>
-          <a:lnRef idx="2">
-            <a:schemeClr val="accent1">
-              <a:shade val="15000"/>
-            </a:schemeClr>
-          </a:lnRef>
-          <a:fillRef idx="1">
-            <a:schemeClr val="accent1"/>
-          </a:fillRef>
-          <a:effectRef idx="0">
-            <a:schemeClr val="accent1"/>
-          </a:effectRef>
-          <a:fontRef idx="minor">
-            <a:schemeClr val="lt1"/>
-          </a:fontRef>
-        </p:style>
-        <p:txBody>
-          <a:bodyPr wrap="square" rtlCol="0" anchor="ctr">
-            <a:noAutofit/>
-          </a:bodyPr>
-          <a:lstStyle/>
-          <a:p>
-            <a:pPr algn="ctr"/>
-            <a:endParaRPr lang="ja-JP" altLang="en-US"/>
-          </a:p>
-        </p:txBody>
-      </p:sp>
-    </p:spTree>
-    <p:extLst>
-      <p:ext uri="{BB962C8B-B14F-4D97-AF65-F5344CB8AC3E}">
-        <p14:creationId xmlns:p14="http://schemas.microsoft.com/office/powerpoint/2010/main" val="2410991731"/>
-      </p:ext>
-    </p:extLst>
-  </p:cSld>
-  <p:clrMapOvr>
-    <a:masterClrMapping/>
-  </p:clrMapOvr>
-</p:sld>
-</file>
-
-<file path=ppt/slides/slide15.xml><?xml version="1.0" encoding="utf-8"?>
-<p:sld xmlns:a="http://schemas.openxmlformats.org/drawingml/2006/main" xmlns:r="http://schemas.openxmlformats.org/officeDocument/2006/relationships" xmlns:p="http://schemas.openxmlformats.org/presentationml/2006/main">
-  <p:cSld>
-    <p:spTree>
-      <p:nvGrpSpPr>
-        <p:cNvPr id="1" name="">
-          <a:extLst>
-            <a:ext uri="{FF2B5EF4-FFF2-40B4-BE49-F238E27FC236}">
               <a16:creationId xmlns:a16="http://schemas.microsoft.com/office/drawing/2014/main" id="{95BAB46B-E8FB-94E3-9AA5-8D05E4E30BA7}"/>
             </a:ext>
           </a:extLst>
@@ -16795,7 +18306,7 @@
 </p:sld>
 </file>
 
-<file path=ppt/slides/slide16.xml><?xml version="1.0" encoding="utf-8"?>
+<file path=ppt/slides/slide15.xml><?xml version="1.0" encoding="utf-8"?>
 <p:sld xmlns:a="http://schemas.openxmlformats.org/drawingml/2006/main" xmlns:r="http://schemas.openxmlformats.org/officeDocument/2006/relationships" xmlns:p="http://schemas.openxmlformats.org/presentationml/2006/main">
   <p:cSld>
     <p:spTree>
@@ -16803,7 +18314,7 @@
         <p:cNvPr id="1" name="">
           <a:extLst>
             <a:ext uri="{FF2B5EF4-FFF2-40B4-BE49-F238E27FC236}">
-              <a16:creationId xmlns:a16="http://schemas.microsoft.com/office/drawing/2014/main" id="{7AC1A9C8-FA0A-CD8E-047D-6026821CA7F1}"/>
+              <a16:creationId xmlns:a16="http://schemas.microsoft.com/office/drawing/2014/main" id="{2478EFC9-F590-DF86-538F-C3B5075DC253}"/>
             </a:ext>
           </a:extLst>
         </p:cNvPr>
@@ -16823,7 +18334,7 @@
           <p:cNvPr id="4" name="フリーフォーム: 図形 3">
             <a:extLst>
               <a:ext uri="{FF2B5EF4-FFF2-40B4-BE49-F238E27FC236}">
-                <a16:creationId xmlns:a16="http://schemas.microsoft.com/office/drawing/2014/main" id="{5A89E7C3-E37E-6EC5-1820-5845BB46D76C}"/>
+                <a16:creationId xmlns:a16="http://schemas.microsoft.com/office/drawing/2014/main" id="{F4D62485-0B0F-8EE7-8B42-CCA7C7EE9BA4}"/>
               </a:ext>
             </a:extLst>
           </p:cNvPr>
@@ -16838,14 +18349,14 @@
           <a:custGeom>
             <a:avLst/>
             <a:gdLst>
-              <a:gd name="csX0" fmla="*/ 1610315 w 12192000"/>
-              <a:gd name="csY0" fmla="*/ 3560481 h 6858000"/>
-              <a:gd name="csX1" fmla="*/ 1610315 w 12192000"/>
-              <a:gd name="csY1" fmla="*/ 4199752 h 6858000"/>
-              <a:gd name="csX2" fmla="*/ 10600566 w 12192000"/>
-              <a:gd name="csY2" fmla="*/ 4199752 h 6858000"/>
-              <a:gd name="csX3" fmla="*/ 10600566 w 12192000"/>
-              <a:gd name="csY3" fmla="*/ 3560481 h 6858000"/>
+              <a:gd name="csX0" fmla="*/ 769257 w 12192000"/>
+              <a:gd name="csY0" fmla="*/ 2692400 h 6858000"/>
+              <a:gd name="csX1" fmla="*/ 769257 w 12192000"/>
+              <a:gd name="csY1" fmla="*/ 3331029 h 6858000"/>
+              <a:gd name="csX2" fmla="*/ 11422743 w 12192000"/>
+              <a:gd name="csY2" fmla="*/ 3331029 h 6858000"/>
+              <a:gd name="csX3" fmla="*/ 11422743 w 12192000"/>
+              <a:gd name="csY3" fmla="*/ 2692400 h 6858000"/>
               <a:gd name="csX4" fmla="*/ 0 w 12192000"/>
               <a:gd name="csY4" fmla="*/ 0 h 6858000"/>
               <a:gd name="csX5" fmla="*/ 12192000 w 12192000"/>
@@ -16886,16 +18397,16 @@
             <a:pathLst>
               <a:path w="12192000" h="6858000">
                 <a:moveTo>
-                  <a:pt x="1610315" y="3560481"/>
+                  <a:pt x="769257" y="2692400"/>
                 </a:moveTo>
                 <a:lnTo>
-                  <a:pt x="1610315" y="4199752"/>
+                  <a:pt x="769257" y="3331029"/>
                 </a:lnTo>
                 <a:lnTo>
-                  <a:pt x="10600566" y="4199752"/>
+                  <a:pt x="11422743" y="3331029"/>
                 </a:lnTo>
                 <a:lnTo>
-                  <a:pt x="10600566" y="3560481"/>
+                  <a:pt x="11422743" y="2692400"/>
                 </a:lnTo>
                 <a:close/>
                 <a:moveTo>
@@ -16953,7 +18464,7 @@
     </p:spTree>
     <p:extLst>
       <p:ext uri="{BB962C8B-B14F-4D97-AF65-F5344CB8AC3E}">
-        <p14:creationId xmlns:p14="http://schemas.microsoft.com/office/powerpoint/2010/main" val="937610466"/>
+        <p14:creationId xmlns:p14="http://schemas.microsoft.com/office/powerpoint/2010/main" val="2382986504"/>
       </p:ext>
     </p:extLst>
   </p:cSld>
@@ -16963,7 +18474,7 @@
 </p:sld>
 </file>
 
-<file path=ppt/slides/slide17.xml><?xml version="1.0" encoding="utf-8"?>
+<file path=ppt/slides/slide16.xml><?xml version="1.0" encoding="utf-8"?>
 <p:sld xmlns:a="http://schemas.openxmlformats.org/drawingml/2006/main" xmlns:r="http://schemas.openxmlformats.org/officeDocument/2006/relationships" xmlns:p="http://schemas.openxmlformats.org/presentationml/2006/main">
   <p:cSld>
     <p:spTree>
@@ -17061,7 +18572,7 @@
     </p:spTree>
     <p:extLst>
       <p:ext uri="{BB962C8B-B14F-4D97-AF65-F5344CB8AC3E}">
-        <p14:creationId xmlns:p14="http://schemas.microsoft.com/office/powerpoint/2010/main" val="3814013074"/>
+        <p14:creationId xmlns:p14="http://schemas.microsoft.com/office/powerpoint/2010/main" val="3275880371"/>
       </p:ext>
     </p:extLst>
   </p:cSld>
@@ -17293,7 +18804,7 @@
         <p:cNvPr id="1" name="">
           <a:extLst>
             <a:ext uri="{FF2B5EF4-FFF2-40B4-BE49-F238E27FC236}">
-              <a16:creationId xmlns:a16="http://schemas.microsoft.com/office/drawing/2014/main" id="{D65B2E54-CD7D-3123-E610-A0E96C7BF5AC}"/>
+              <a16:creationId xmlns:a16="http://schemas.microsoft.com/office/drawing/2014/main" id="{4090C826-6139-AFB3-838F-43B79127378A}"/>
             </a:ext>
           </a:extLst>
         </p:cNvPr>
@@ -17313,7 +18824,7 @@
           <p:cNvPr id="4" name="フリーフォーム: 図形 3">
             <a:extLst>
               <a:ext uri="{FF2B5EF4-FFF2-40B4-BE49-F238E27FC236}">
-                <a16:creationId xmlns:a16="http://schemas.microsoft.com/office/drawing/2014/main" id="{C54D1445-C348-3C05-2C47-190B5720269B}"/>
+                <a16:creationId xmlns:a16="http://schemas.microsoft.com/office/drawing/2014/main" id="{7E219001-2B10-031A-D425-3707A45453FE}"/>
               </a:ext>
             </a:extLst>
           </p:cNvPr>
@@ -17328,14 +18839,14 @@
           <a:custGeom>
             <a:avLst/>
             <a:gdLst>
-              <a:gd name="csX0" fmla="*/ 1594131 w 12192000"/>
-              <a:gd name="csY0" fmla="*/ 4855221 h 6858000"/>
-              <a:gd name="csX1" fmla="*/ 1594131 w 12192000"/>
-              <a:gd name="csY1" fmla="*/ 5478308 h 6858000"/>
-              <a:gd name="csX2" fmla="*/ 10600566 w 12192000"/>
-              <a:gd name="csY2" fmla="*/ 5478308 h 6858000"/>
-              <a:gd name="csX3" fmla="*/ 10600566 w 12192000"/>
-              <a:gd name="csY3" fmla="*/ 4855221 h 6858000"/>
+              <a:gd name="csX0" fmla="*/ 754743 w 12192000"/>
+              <a:gd name="csY0" fmla="*/ 3331029 h 6858000"/>
+              <a:gd name="csX1" fmla="*/ 754743 w 12192000"/>
+              <a:gd name="csY1" fmla="*/ 3969657 h 6858000"/>
+              <a:gd name="csX2" fmla="*/ 11408229 w 12192000"/>
+              <a:gd name="csY2" fmla="*/ 3969657 h 6858000"/>
+              <a:gd name="csX3" fmla="*/ 11408229 w 12192000"/>
+              <a:gd name="csY3" fmla="*/ 3331029 h 6858000"/>
               <a:gd name="csX4" fmla="*/ 0 w 12192000"/>
               <a:gd name="csY4" fmla="*/ 0 h 6858000"/>
               <a:gd name="csX5" fmla="*/ 12192000 w 12192000"/>
@@ -17376,16 +18887,16 @@
             <a:pathLst>
               <a:path w="12192000" h="6858000">
                 <a:moveTo>
-                  <a:pt x="1594131" y="4855221"/>
+                  <a:pt x="754743" y="3331029"/>
                 </a:moveTo>
                 <a:lnTo>
-                  <a:pt x="1594131" y="5478308"/>
+                  <a:pt x="754743" y="3969657"/>
                 </a:lnTo>
                 <a:lnTo>
-                  <a:pt x="10600566" y="5478308"/>
+                  <a:pt x="11408229" y="3969657"/>
                 </a:lnTo>
                 <a:lnTo>
-                  <a:pt x="10600566" y="4855221"/>
+                  <a:pt x="11408229" y="3331029"/>
                 </a:lnTo>
                 <a:close/>
                 <a:moveTo>
@@ -17443,7 +18954,7 @@
     </p:spTree>
     <p:extLst>
       <p:ext uri="{BB962C8B-B14F-4D97-AF65-F5344CB8AC3E}">
-        <p14:creationId xmlns:p14="http://schemas.microsoft.com/office/powerpoint/2010/main" val="1784387623"/>
+        <p14:creationId xmlns:p14="http://schemas.microsoft.com/office/powerpoint/2010/main" val="3068836680"/>
       </p:ext>
     </p:extLst>
   </p:cSld>
@@ -17645,7 +19156,7 @@
         <p:cNvPr id="1" name="">
           <a:extLst>
             <a:ext uri="{FF2B5EF4-FFF2-40B4-BE49-F238E27FC236}">
-              <a16:creationId xmlns:a16="http://schemas.microsoft.com/office/drawing/2014/main" id="{A66F73D3-BB02-BA75-FC45-634BFBEB8328}"/>
+              <a16:creationId xmlns:a16="http://schemas.microsoft.com/office/drawing/2014/main" id="{8B64FDA8-7F14-2376-B367-D99DBD479BBE}"/>
             </a:ext>
           </a:extLst>
         </p:cNvPr>
@@ -17662,10 +19173,10 @@
       </p:grpSpPr>
       <p:sp>
         <p:nvSpPr>
-          <p:cNvPr id="5" name="フリーフォーム: 図形 4">
+          <p:cNvPr id="4" name="フリーフォーム: 図形 3">
             <a:extLst>
               <a:ext uri="{FF2B5EF4-FFF2-40B4-BE49-F238E27FC236}">
-                <a16:creationId xmlns:a16="http://schemas.microsoft.com/office/drawing/2014/main" id="{875AE042-ABA7-105C-4B46-923620CCFB6C}"/>
+                <a16:creationId xmlns:a16="http://schemas.microsoft.com/office/drawing/2014/main" id="{AE9F8A76-22A4-80CE-BF30-DCB6AA218F75}"/>
               </a:ext>
             </a:extLst>
           </p:cNvPr>
@@ -17680,14 +19191,14 @@
           <a:custGeom>
             <a:avLst/>
             <a:gdLst>
-              <a:gd name="csX0" fmla="*/ 1610315 w 12192000"/>
-              <a:gd name="csY0" fmla="*/ 1650775 h 6858000"/>
-              <a:gd name="csX1" fmla="*/ 1610315 w 12192000"/>
-              <a:gd name="csY1" fmla="*/ 2290046 h 6858000"/>
-              <a:gd name="csX2" fmla="*/ 10600566 w 12192000"/>
-              <a:gd name="csY2" fmla="*/ 2290046 h 6858000"/>
-              <a:gd name="csX3" fmla="*/ 10600566 w 12192000"/>
-              <a:gd name="csY3" fmla="*/ 1650775 h 6858000"/>
+              <a:gd name="csX0" fmla="*/ 754743 w 12192000"/>
+              <a:gd name="csY0" fmla="*/ 4434115 h 6858000"/>
+              <a:gd name="csX1" fmla="*/ 754743 w 12192000"/>
+              <a:gd name="csY1" fmla="*/ 5072743 h 6858000"/>
+              <a:gd name="csX2" fmla="*/ 11408229 w 12192000"/>
+              <a:gd name="csY2" fmla="*/ 5072743 h 6858000"/>
+              <a:gd name="csX3" fmla="*/ 11408229 w 12192000"/>
+              <a:gd name="csY3" fmla="*/ 4434115 h 6858000"/>
               <a:gd name="csX4" fmla="*/ 0 w 12192000"/>
               <a:gd name="csY4" fmla="*/ 0 h 6858000"/>
               <a:gd name="csX5" fmla="*/ 12192000 w 12192000"/>
@@ -17728,16 +19239,16 @@
             <a:pathLst>
               <a:path w="12192000" h="6858000">
                 <a:moveTo>
-                  <a:pt x="1610315" y="1650775"/>
+                  <a:pt x="754743" y="4434115"/>
                 </a:moveTo>
                 <a:lnTo>
-                  <a:pt x="1610315" y="2290046"/>
+                  <a:pt x="754743" y="5072743"/>
                 </a:lnTo>
                 <a:lnTo>
-                  <a:pt x="10600566" y="2290046"/>
+                  <a:pt x="11408229" y="5072743"/>
                 </a:lnTo>
                 <a:lnTo>
-                  <a:pt x="10600566" y="1650775"/>
+                  <a:pt x="11408229" y="4434115"/>
                 </a:lnTo>
                 <a:close/>
                 <a:moveTo>
@@ -17795,7 +19306,7 @@
     </p:spTree>
     <p:extLst>
       <p:ext uri="{BB962C8B-B14F-4D97-AF65-F5344CB8AC3E}">
-        <p14:creationId xmlns:p14="http://schemas.microsoft.com/office/powerpoint/2010/main" val="3799819293"/>
+        <p14:creationId xmlns:p14="http://schemas.microsoft.com/office/powerpoint/2010/main" val="1859568970"/>
       </p:ext>
     </p:extLst>
   </p:cSld>
@@ -17997,7 +19508,7 @@
         <p:cNvPr id="1" name="">
           <a:extLst>
             <a:ext uri="{FF2B5EF4-FFF2-40B4-BE49-F238E27FC236}">
-              <a16:creationId xmlns:a16="http://schemas.microsoft.com/office/drawing/2014/main" id="{6D081844-1962-BF5E-D05F-275B6BBFB3C3}"/>
+              <a16:creationId xmlns:a16="http://schemas.microsoft.com/office/drawing/2014/main" id="{67C555E5-4ACC-CCE6-F943-5BD7D7D4888E}"/>
             </a:ext>
           </a:extLst>
         </p:cNvPr>
@@ -18017,7 +19528,7 @@
           <p:cNvPr id="4" name="フリーフォーム: 図形 3">
             <a:extLst>
               <a:ext uri="{FF2B5EF4-FFF2-40B4-BE49-F238E27FC236}">
-                <a16:creationId xmlns:a16="http://schemas.microsoft.com/office/drawing/2014/main" id="{D06DB3B6-FEE7-DEBD-FC80-B2D228B1B09E}"/>
+                <a16:creationId xmlns:a16="http://schemas.microsoft.com/office/drawing/2014/main" id="{7CD49543-5441-EB77-DDD8-895FE925FF36}"/>
               </a:ext>
             </a:extLst>
           </p:cNvPr>
@@ -18032,14 +19543,14 @@
           <a:custGeom>
             <a:avLst/>
             <a:gdLst>
-              <a:gd name="csX0" fmla="*/ 1610315 w 12192000"/>
-              <a:gd name="csY0" fmla="*/ 4847115 h 6858000"/>
-              <a:gd name="csX1" fmla="*/ 1610315 w 12192000"/>
-              <a:gd name="csY1" fmla="*/ 5486386 h 6858000"/>
-              <a:gd name="csX2" fmla="*/ 10600566 w 12192000"/>
-              <a:gd name="csY2" fmla="*/ 5486386 h 6858000"/>
-              <a:gd name="csX3" fmla="*/ 10600566 w 12192000"/>
-              <a:gd name="csY3" fmla="*/ 4847115 h 6858000"/>
+              <a:gd name="csX0" fmla="*/ 769257 w 12192000"/>
+              <a:gd name="csY0" fmla="*/ 3338286 h 6858000"/>
+              <a:gd name="csX1" fmla="*/ 769257 w 12192000"/>
+              <a:gd name="csY1" fmla="*/ 3976914 h 6858000"/>
+              <a:gd name="csX2" fmla="*/ 11422743 w 12192000"/>
+              <a:gd name="csY2" fmla="*/ 3976914 h 6858000"/>
+              <a:gd name="csX3" fmla="*/ 11422743 w 12192000"/>
+              <a:gd name="csY3" fmla="*/ 3338286 h 6858000"/>
               <a:gd name="csX4" fmla="*/ 0 w 12192000"/>
               <a:gd name="csY4" fmla="*/ 0 h 6858000"/>
               <a:gd name="csX5" fmla="*/ 12192000 w 12192000"/>
@@ -18080,16 +19591,16 @@
             <a:pathLst>
               <a:path w="12192000" h="6858000">
                 <a:moveTo>
-                  <a:pt x="1610315" y="4847115"/>
+                  <a:pt x="769257" y="3338286"/>
                 </a:moveTo>
                 <a:lnTo>
-                  <a:pt x="1610315" y="5486386"/>
+                  <a:pt x="769257" y="3976914"/>
                 </a:lnTo>
                 <a:lnTo>
-                  <a:pt x="10600566" y="5486386"/>
+                  <a:pt x="11422743" y="3976914"/>
                 </a:lnTo>
                 <a:lnTo>
-                  <a:pt x="10600566" y="4847115"/>
+                  <a:pt x="11422743" y="3338286"/>
                 </a:lnTo>
                 <a:close/>
                 <a:moveTo>
@@ -18147,7 +19658,7 @@
     </p:spTree>
     <p:extLst>
       <p:ext uri="{BB962C8B-B14F-4D97-AF65-F5344CB8AC3E}">
-        <p14:creationId xmlns:p14="http://schemas.microsoft.com/office/powerpoint/2010/main" val="3979558141"/>
+        <p14:creationId xmlns:p14="http://schemas.microsoft.com/office/powerpoint/2010/main" val="2370855582"/>
       </p:ext>
     </p:extLst>
   </p:cSld>

--- a/tools/llm-as-a-judge/readme.pptx
+++ b/tools/llm-as-a-judge/readme.pptx
@@ -6,20 +6,20 @@
   </p:sldMasterIdLst>
   <p:sldIdLst>
     <p:sldId id="257" r:id="rId2"/>
-    <p:sldId id="276" r:id="rId3"/>
+    <p:sldId id="283" r:id="rId3"/>
     <p:sldId id="258" r:id="rId4"/>
     <p:sldId id="273" r:id="rId5"/>
-    <p:sldId id="277" r:id="rId6"/>
+    <p:sldId id="284" r:id="rId6"/>
     <p:sldId id="262" r:id="rId7"/>
-    <p:sldId id="278" r:id="rId8"/>
+    <p:sldId id="285" r:id="rId8"/>
     <p:sldId id="264" r:id="rId9"/>
-    <p:sldId id="279" r:id="rId10"/>
+    <p:sldId id="286" r:id="rId10"/>
     <p:sldId id="266" r:id="rId11"/>
     <p:sldId id="259" r:id="rId12"/>
-    <p:sldId id="280" r:id="rId13"/>
+    <p:sldId id="287" r:id="rId13"/>
     <p:sldId id="268" r:id="rId14"/>
     <p:sldId id="270" r:id="rId15"/>
-    <p:sldId id="281" r:id="rId16"/>
+    <p:sldId id="288" r:id="rId16"/>
     <p:sldId id="272" r:id="rId17"/>
   </p:sldIdLst>
   <p:sldSz cx="12192000" cy="6858000"/>
@@ -1413,7 +1413,7 @@
           <p:cNvPr id="3" name="表 2">
             <a:extLst>
               <a:ext uri="{FF2B5EF4-FFF2-40B4-BE49-F238E27FC236}">
-                <a16:creationId xmlns:a16="http://schemas.microsoft.com/office/drawing/2014/main" id="{F6F6C69F-3900-D96D-4733-E633F4F24EEC}"/>
+                <a16:creationId xmlns:a16="http://schemas.microsoft.com/office/drawing/2014/main" id="{65A5FB3B-4214-5ADE-71BD-09C9C68E8BB1}"/>
               </a:ext>
             </a:extLst>
           </p:cNvPr>
@@ -1423,1833 +1423,14 @@
           <p:nvPr userDrawn="1">
             <p:extLst>
               <p:ext uri="{D42A27DB-BD31-4B8C-83A1-F6EECF244321}">
-                <p14:modId xmlns:p14="http://schemas.microsoft.com/office/powerpoint/2010/main" val="4272971702"/>
+                <p14:modId xmlns:p14="http://schemas.microsoft.com/office/powerpoint/2010/main" val="780707192"/>
               </p:ext>
             </p:extLst>
           </p:nvPr>
         </p:nvGraphicFramePr>
         <p:xfrm>
-          <a:off x="1600874" y="274320"/>
-          <a:ext cx="8990252" cy="6309360"/>
-        </p:xfrm>
-        <a:graphic>
-          <a:graphicData uri="http://schemas.openxmlformats.org/drawingml/2006/table">
-            <a:tbl>
-              <a:tblPr firstRow="1" bandRow="1">
-                <a:effectLst>
-                  <a:outerShdw blurRad="50800" dist="38100" dir="2700000" algn="tl" rotWithShape="0">
-                    <a:prstClr val="black">
-                      <a:alpha val="40000"/>
-                    </a:prstClr>
-                  </a:outerShdw>
-                </a:effectLst>
-                <a:tableStyleId>{5C22544A-7EE6-4342-B048-85BDC9FD1C3A}</a:tableStyleId>
-              </a:tblPr>
-              <a:tblGrid>
-                <a:gridCol w="1896600">
-                  <a:extLst>
-                    <a:ext uri="{9D8B030D-6E8A-4147-A177-3AD203B41FA5}">
-                      <a16:colId xmlns:a16="http://schemas.microsoft.com/office/drawing/2014/main" val="2777621706"/>
-                    </a:ext>
-                  </a:extLst>
-                </a:gridCol>
-                <a:gridCol w="7093652">
-                  <a:extLst>
-                    <a:ext uri="{9D8B030D-6E8A-4147-A177-3AD203B41FA5}">
-                      <a16:colId xmlns:a16="http://schemas.microsoft.com/office/drawing/2014/main" val="2952094520"/>
-                    </a:ext>
-                  </a:extLst>
-                </a:gridCol>
-              </a:tblGrid>
-              <a:tr h="0">
-                <a:tc>
-                  <a:txBody>
-                    <a:bodyPr/>
-                    <a:lstStyle/>
-                    <a:p>
-                      <a:r>
-                        <a:rPr kumimoji="1" lang="en-US" altLang="ja-JP" sz="1200">
-                          <a:solidFill>
-                            <a:schemeClr val="bg1"/>
-                          </a:solidFill>
-                          <a:latin typeface="Cascadia Code SemiBold" panose="020B0609020000020004" pitchFamily="49" charset="0"/>
-                          <a:ea typeface="Cascadia Code SemiBold" panose="020B0609020000020004" pitchFamily="49" charset="0"/>
-                          <a:cs typeface="Cascadia Code SemiBold" panose="020B0609020000020004" pitchFamily="49" charset="0"/>
-                        </a:rPr>
-                        <a:t>resource</a:t>
-                      </a:r>
-                      <a:endParaRPr kumimoji="1" lang="ja-JP" altLang="en-US" sz="1200">
-                        <a:solidFill>
-                          <a:schemeClr val="bg1"/>
-                        </a:solidFill>
-                        <a:latin typeface="Cascadia Code SemiBold" panose="020B0609020000020004" pitchFamily="49" charset="0"/>
-                        <a:ea typeface="BIZ UDゴシック" panose="020B0400000000000000" pitchFamily="49" charset="-128"/>
-                        <a:cs typeface="Cascadia Code SemiBold" panose="020B0609020000020004" pitchFamily="49" charset="0"/>
-                      </a:endParaRPr>
-                    </a:p>
-                  </a:txBody>
-                  <a:tcPr marL="137160" marR="137160" marT="137160" marB="137160">
-                    <a:lnL w="12700" cap="flat" cmpd="sng" algn="ctr">
-                      <a:solidFill>
-                        <a:schemeClr val="tx1"/>
-                      </a:solidFill>
-                      <a:prstDash val="solid"/>
-                      <a:round/>
-                      <a:headEnd type="none" w="med" len="med"/>
-                      <a:tailEnd type="none" w="med" len="med"/>
-                    </a:lnL>
-                    <a:lnR w="12700" cap="flat" cmpd="sng" algn="ctr">
-                      <a:solidFill>
-                        <a:schemeClr val="tx1"/>
-                      </a:solidFill>
-                      <a:prstDash val="solid"/>
-                      <a:round/>
-                      <a:headEnd type="none" w="med" len="med"/>
-                      <a:tailEnd type="none" w="med" len="med"/>
-                    </a:lnR>
-                    <a:lnT w="12700" cap="flat" cmpd="sng" algn="ctr">
-                      <a:solidFill>
-                        <a:schemeClr val="tx1"/>
-                      </a:solidFill>
-                      <a:prstDash val="solid"/>
-                      <a:round/>
-                      <a:headEnd type="none" w="med" len="med"/>
-                      <a:tailEnd type="none" w="med" len="med"/>
-                    </a:lnT>
-                    <a:lnB w="12700" cap="flat" cmpd="sng" algn="ctr">
-                      <a:solidFill>
-                        <a:schemeClr val="tx1"/>
-                      </a:solidFill>
-                      <a:prstDash val="solid"/>
-                      <a:round/>
-                      <a:headEnd type="none" w="med" len="med"/>
-                      <a:tailEnd type="none" w="med" len="med"/>
-                    </a:lnB>
-                    <a:solidFill>
-                      <a:schemeClr val="tx1">
-                        <a:lumMod val="65000"/>
-                        <a:lumOff val="35000"/>
-                      </a:schemeClr>
-                    </a:solidFill>
-                  </a:tcPr>
-                </a:tc>
-                <a:tc>
-                  <a:txBody>
-                    <a:bodyPr/>
-                    <a:lstStyle/>
-                    <a:p>
-                      <a:r>
-                        <a:rPr kumimoji="1" lang="en-US" altLang="ja-JP" sz="1200">
-                          <a:solidFill>
-                            <a:schemeClr val="bg1"/>
-                          </a:solidFill>
-                          <a:latin typeface="Cascadia Code SemiBold" panose="020B0609020000020004" pitchFamily="49" charset="0"/>
-                          <a:ea typeface="Cascadia Code SemiBold" panose="020B0609020000020004" pitchFamily="49" charset="0"/>
-                          <a:cs typeface="Cascadia Code SemiBold" panose="020B0609020000020004" pitchFamily="49" charset="0"/>
-                        </a:rPr>
-                        <a:t>note</a:t>
-                      </a:r>
-                      <a:endParaRPr kumimoji="1" lang="ja-JP" altLang="en-US" sz="1200">
-                        <a:solidFill>
-                          <a:schemeClr val="bg1"/>
-                        </a:solidFill>
-                        <a:latin typeface="Cascadia Code SemiBold" panose="020B0609020000020004" pitchFamily="49" charset="0"/>
-                        <a:ea typeface="BIZ UDゴシック" panose="020B0400000000000000" pitchFamily="49" charset="-128"/>
-                        <a:cs typeface="Cascadia Code SemiBold" panose="020B0609020000020004" pitchFamily="49" charset="0"/>
-                      </a:endParaRPr>
-                    </a:p>
-                  </a:txBody>
-                  <a:tcPr marL="137160" marR="137160" marT="137160" marB="137160">
-                    <a:lnL w="12700" cap="flat" cmpd="sng" algn="ctr">
-                      <a:solidFill>
-                        <a:schemeClr val="tx1"/>
-                      </a:solidFill>
-                      <a:prstDash val="solid"/>
-                      <a:round/>
-                      <a:headEnd type="none" w="med" len="med"/>
-                      <a:tailEnd type="none" w="med" len="med"/>
-                    </a:lnL>
-                    <a:lnR w="12700" cap="flat" cmpd="sng" algn="ctr">
-                      <a:solidFill>
-                        <a:schemeClr val="tx1"/>
-                      </a:solidFill>
-                      <a:prstDash val="solid"/>
-                      <a:round/>
-                      <a:headEnd type="none" w="med" len="med"/>
-                      <a:tailEnd type="none" w="med" len="med"/>
-                    </a:lnR>
-                    <a:lnT w="12700" cap="flat" cmpd="sng" algn="ctr">
-                      <a:solidFill>
-                        <a:schemeClr val="tx1"/>
-                      </a:solidFill>
-                      <a:prstDash val="solid"/>
-                      <a:round/>
-                      <a:headEnd type="none" w="med" len="med"/>
-                      <a:tailEnd type="none" w="med" len="med"/>
-                    </a:lnT>
-                    <a:lnB w="12700" cap="flat" cmpd="sng" algn="ctr">
-                      <a:solidFill>
-                        <a:schemeClr val="tx1"/>
-                      </a:solidFill>
-                      <a:prstDash val="solid"/>
-                      <a:round/>
-                      <a:headEnd type="none" w="med" len="med"/>
-                      <a:tailEnd type="none" w="med" len="med"/>
-                    </a:lnB>
-                    <a:solidFill>
-                      <a:schemeClr val="tx1">
-                        <a:lumMod val="65000"/>
-                        <a:lumOff val="35000"/>
-                      </a:schemeClr>
-                    </a:solidFill>
-                  </a:tcPr>
-                </a:tc>
-                <a:extLst>
-                  <a:ext uri="{0D108BD9-81ED-4DB2-BD59-A6C34878D82A}">
-                    <a16:rowId xmlns:a16="http://schemas.microsoft.com/office/drawing/2014/main" val="526102552"/>
-                  </a:ext>
-                </a:extLst>
-              </a:tr>
-              <a:tr h="0">
-                <a:tc>
-                  <a:txBody>
-                    <a:bodyPr/>
-                    <a:lstStyle/>
-                    <a:p>
-                      <a:r>
-                        <a:rPr kumimoji="1" lang="en-US" altLang="ja-JP" sz="1200">
-                          <a:latin typeface="Cascadia Code SemiBold" panose="020B0609020000020004" pitchFamily="49" charset="0"/>
-                          <a:ea typeface="Cascadia Code SemiBold" panose="020B0609020000020004" pitchFamily="49" charset="0"/>
-                          <a:cs typeface="Cascadia Code SemiBold" panose="020B0609020000020004" pitchFamily="49" charset="0"/>
-                        </a:rPr>
-                        <a:t>.env</a:t>
-                      </a:r>
-                      <a:endParaRPr kumimoji="1" lang="ja-JP" altLang="en-US" sz="1200">
-                        <a:latin typeface="Cascadia Code SemiBold" panose="020B0609020000020004" pitchFamily="49" charset="0"/>
-                        <a:ea typeface="BIZ UDゴシック" panose="020B0400000000000000" pitchFamily="49" charset="-128"/>
-                        <a:cs typeface="Cascadia Code SemiBold" panose="020B0609020000020004" pitchFamily="49" charset="0"/>
-                      </a:endParaRPr>
-                    </a:p>
-                  </a:txBody>
-                  <a:tcPr marL="137160" marR="137160" marT="137160" marB="137160">
-                    <a:lnL w="12700" cap="flat" cmpd="sng" algn="ctr">
-                      <a:solidFill>
-                        <a:schemeClr val="tx1"/>
-                      </a:solidFill>
-                      <a:prstDash val="solid"/>
-                      <a:round/>
-                      <a:headEnd type="none" w="med" len="med"/>
-                      <a:tailEnd type="none" w="med" len="med"/>
-                    </a:lnL>
-                    <a:lnR w="12700" cap="flat" cmpd="sng" algn="ctr">
-                      <a:solidFill>
-                        <a:schemeClr val="tx1"/>
-                      </a:solidFill>
-                      <a:prstDash val="solid"/>
-                      <a:round/>
-                      <a:headEnd type="none" w="med" len="med"/>
-                      <a:tailEnd type="none" w="med" len="med"/>
-                    </a:lnR>
-                    <a:lnT w="12700" cap="flat" cmpd="sng" algn="ctr">
-                      <a:solidFill>
-                        <a:schemeClr val="tx1"/>
-                      </a:solidFill>
-                      <a:prstDash val="solid"/>
-                      <a:round/>
-                      <a:headEnd type="none" w="med" len="med"/>
-                      <a:tailEnd type="none" w="med" len="med"/>
-                    </a:lnT>
-                    <a:lnB w="12700" cap="flat" cmpd="sng" algn="ctr">
-                      <a:solidFill>
-                        <a:schemeClr val="tx1"/>
-                      </a:solidFill>
-                      <a:prstDash val="solid"/>
-                      <a:round/>
-                      <a:headEnd type="none" w="med" len="med"/>
-                      <a:tailEnd type="none" w="med" len="med"/>
-                    </a:lnB>
-                    <a:solidFill>
-                      <a:schemeClr val="bg1"/>
-                    </a:solidFill>
-                  </a:tcPr>
-                </a:tc>
-                <a:tc>
-                  <a:txBody>
-                    <a:bodyPr/>
-                    <a:lstStyle/>
-                    <a:p>
-                      <a:r>
-                        <a:rPr kumimoji="1" lang="en-US" altLang="ja-JP" sz="1200">
-                          <a:latin typeface="Cascadia Code SemiBold" panose="020B0609020000020004" pitchFamily="49" charset="0"/>
-                          <a:ea typeface="Cascadia Code SemiBold" panose="020B0609020000020004" pitchFamily="49" charset="0"/>
-                          <a:cs typeface="Cascadia Code SemiBold" panose="020B0609020000020004" pitchFamily="49" charset="0"/>
-                        </a:rPr>
-                        <a:t>File containing LLM API credentials</a:t>
-                      </a:r>
-                    </a:p>
-                  </a:txBody>
-                  <a:tcPr marL="137160" marR="137160" marT="137160" marB="137160">
-                    <a:lnL w="12700" cap="flat" cmpd="sng" algn="ctr">
-                      <a:solidFill>
-                        <a:schemeClr val="tx1"/>
-                      </a:solidFill>
-                      <a:prstDash val="solid"/>
-                      <a:round/>
-                      <a:headEnd type="none" w="med" len="med"/>
-                      <a:tailEnd type="none" w="med" len="med"/>
-                    </a:lnL>
-                    <a:lnR w="12700" cap="flat" cmpd="sng" algn="ctr">
-                      <a:solidFill>
-                        <a:schemeClr val="tx1"/>
-                      </a:solidFill>
-                      <a:prstDash val="solid"/>
-                      <a:round/>
-                      <a:headEnd type="none" w="med" len="med"/>
-                      <a:tailEnd type="none" w="med" len="med"/>
-                    </a:lnR>
-                    <a:lnT w="12700" cap="flat" cmpd="sng" algn="ctr">
-                      <a:solidFill>
-                        <a:schemeClr val="tx1"/>
-                      </a:solidFill>
-                      <a:prstDash val="solid"/>
-                      <a:round/>
-                      <a:headEnd type="none" w="med" len="med"/>
-                      <a:tailEnd type="none" w="med" len="med"/>
-                    </a:lnT>
-                    <a:lnB w="12700" cap="flat" cmpd="sng" algn="ctr">
-                      <a:solidFill>
-                        <a:schemeClr val="tx1"/>
-                      </a:solidFill>
-                      <a:prstDash val="solid"/>
-                      <a:round/>
-                      <a:headEnd type="none" w="med" len="med"/>
-                      <a:tailEnd type="none" w="med" len="med"/>
-                    </a:lnB>
-                    <a:solidFill>
-                      <a:schemeClr val="bg1"/>
-                    </a:solidFill>
-                  </a:tcPr>
-                </a:tc>
-                <a:extLst>
-                  <a:ext uri="{0D108BD9-81ED-4DB2-BD59-A6C34878D82A}">
-                    <a16:rowId xmlns:a16="http://schemas.microsoft.com/office/drawing/2014/main" val="1660497218"/>
-                  </a:ext>
-                </a:extLst>
-              </a:tr>
-              <a:tr h="0">
-                <a:tc>
-                  <a:txBody>
-                    <a:bodyPr/>
-                    <a:lstStyle/>
-                    <a:p>
-                      <a:r>
-                        <a:rPr kumimoji="1" lang="en-US" altLang="ja-JP" sz="1200">
-                          <a:latin typeface="Cascadia Code SemiBold" panose="020B0609020000020004" pitchFamily="49" charset="0"/>
-                          <a:ea typeface="Cascadia Code SemiBold" panose="020B0609020000020004" pitchFamily="49" charset="0"/>
-                          <a:cs typeface="Cascadia Code SemiBold" panose="020B0609020000020004" pitchFamily="49" charset="0"/>
-                        </a:rPr>
-                        <a:t>llmj.py</a:t>
-                      </a:r>
-                      <a:endParaRPr kumimoji="1" lang="ja-JP" altLang="en-US" sz="1200">
-                        <a:latin typeface="Cascadia Code SemiBold" panose="020B0609020000020004" pitchFamily="49" charset="0"/>
-                        <a:ea typeface="BIZ UDゴシック" panose="020B0400000000000000" pitchFamily="49" charset="-128"/>
-                        <a:cs typeface="Cascadia Code SemiBold" panose="020B0609020000020004" pitchFamily="49" charset="0"/>
-                      </a:endParaRPr>
-                    </a:p>
-                  </a:txBody>
-                  <a:tcPr marL="137160" marR="137160" marT="137160" marB="137160">
-                    <a:lnL w="12700" cap="flat" cmpd="sng" algn="ctr">
-                      <a:solidFill>
-                        <a:schemeClr val="tx1"/>
-                      </a:solidFill>
-                      <a:prstDash val="solid"/>
-                      <a:round/>
-                      <a:headEnd type="none" w="med" len="med"/>
-                      <a:tailEnd type="none" w="med" len="med"/>
-                    </a:lnL>
-                    <a:lnR w="12700" cap="flat" cmpd="sng" algn="ctr">
-                      <a:solidFill>
-                        <a:schemeClr val="tx1"/>
-                      </a:solidFill>
-                      <a:prstDash val="solid"/>
-                      <a:round/>
-                      <a:headEnd type="none" w="med" len="med"/>
-                      <a:tailEnd type="none" w="med" len="med"/>
-                    </a:lnR>
-                    <a:lnT w="12700" cap="flat" cmpd="sng" algn="ctr">
-                      <a:solidFill>
-                        <a:schemeClr val="tx1"/>
-                      </a:solidFill>
-                      <a:prstDash val="solid"/>
-                      <a:round/>
-                      <a:headEnd type="none" w="med" len="med"/>
-                      <a:tailEnd type="none" w="med" len="med"/>
-                    </a:lnT>
-                    <a:lnB w="12700" cap="flat" cmpd="sng" algn="ctr">
-                      <a:solidFill>
-                        <a:schemeClr val="tx1"/>
-                      </a:solidFill>
-                      <a:prstDash val="solid"/>
-                      <a:round/>
-                      <a:headEnd type="none" w="med" len="med"/>
-                      <a:tailEnd type="none" w="med" len="med"/>
-                    </a:lnB>
-                    <a:solidFill>
-                      <a:schemeClr val="bg1"/>
-                    </a:solidFill>
-                  </a:tcPr>
-                </a:tc>
-                <a:tc>
-                  <a:txBody>
-                    <a:bodyPr/>
-                    <a:lstStyle/>
-                    <a:p>
-                      <a:r>
-                        <a:rPr kumimoji="1" lang="en-US" altLang="ja-JP" sz="1200">
-                          <a:latin typeface="Cascadia Code SemiBold" panose="020B0609020000020004" pitchFamily="49" charset="0"/>
-                          <a:ea typeface="Cascadia Code SemiBold" panose="020B0609020000020004" pitchFamily="49" charset="0"/>
-                          <a:cs typeface="Cascadia Code SemiBold" panose="020B0609020000020004" pitchFamily="49" charset="0"/>
-                        </a:rPr>
-                        <a:t>Common definitions and common processing</a:t>
-                      </a:r>
-                    </a:p>
-                  </a:txBody>
-                  <a:tcPr marL="137160" marR="137160" marT="137160" marB="137160">
-                    <a:lnL w="12700" cap="flat" cmpd="sng" algn="ctr">
-                      <a:solidFill>
-                        <a:schemeClr val="tx1"/>
-                      </a:solidFill>
-                      <a:prstDash val="solid"/>
-                      <a:round/>
-                      <a:headEnd type="none" w="med" len="med"/>
-                      <a:tailEnd type="none" w="med" len="med"/>
-                    </a:lnL>
-                    <a:lnR w="12700" cap="flat" cmpd="sng" algn="ctr">
-                      <a:solidFill>
-                        <a:schemeClr val="tx1"/>
-                      </a:solidFill>
-                      <a:prstDash val="solid"/>
-                      <a:round/>
-                      <a:headEnd type="none" w="med" len="med"/>
-                      <a:tailEnd type="none" w="med" len="med"/>
-                    </a:lnR>
-                    <a:lnT w="12700" cap="flat" cmpd="sng" algn="ctr">
-                      <a:solidFill>
-                        <a:schemeClr val="tx1"/>
-                      </a:solidFill>
-                      <a:prstDash val="solid"/>
-                      <a:round/>
-                      <a:headEnd type="none" w="med" len="med"/>
-                      <a:tailEnd type="none" w="med" len="med"/>
-                    </a:lnT>
-                    <a:lnB w="12700" cap="flat" cmpd="sng" algn="ctr">
-                      <a:solidFill>
-                        <a:schemeClr val="tx1"/>
-                      </a:solidFill>
-                      <a:prstDash val="solid"/>
-                      <a:round/>
-                      <a:headEnd type="none" w="med" len="med"/>
-                      <a:tailEnd type="none" w="med" len="med"/>
-                    </a:lnB>
-                    <a:solidFill>
-                      <a:schemeClr val="bg1"/>
-                    </a:solidFill>
-                  </a:tcPr>
-                </a:tc>
-                <a:extLst>
-                  <a:ext uri="{0D108BD9-81ED-4DB2-BD59-A6C34878D82A}">
-                    <a16:rowId xmlns:a16="http://schemas.microsoft.com/office/drawing/2014/main" val="1288496352"/>
-                  </a:ext>
-                </a:extLst>
-              </a:tr>
-              <a:tr h="0">
-                <a:tc>
-                  <a:txBody>
-                    <a:bodyPr/>
-                    <a:lstStyle/>
-                    <a:p>
-                      <a:r>
-                        <a:rPr kumimoji="1" lang="en-US" altLang="ja-JP" sz="1200">
-                          <a:latin typeface="Cascadia Code SemiBold" panose="020B0609020000020004" pitchFamily="49" charset="0"/>
-                          <a:ea typeface="Cascadia Code SemiBold" panose="020B0609020000020004" pitchFamily="49" charset="0"/>
-                          <a:cs typeface="Cascadia Code SemiBold" panose="020B0609020000020004" pitchFamily="49" charset="0"/>
-                        </a:rPr>
-                        <a:t>llmj-0-initial.py</a:t>
-                      </a:r>
-                      <a:endParaRPr kumimoji="1" lang="ja-JP" altLang="en-US" sz="1200">
-                        <a:latin typeface="Cascadia Code SemiBold" panose="020B0609020000020004" pitchFamily="49" charset="0"/>
-                        <a:ea typeface="BIZ UDゴシック" panose="020B0400000000000000" pitchFamily="49" charset="-128"/>
-                        <a:cs typeface="Cascadia Code SemiBold" panose="020B0609020000020004" pitchFamily="49" charset="0"/>
-                      </a:endParaRPr>
-                    </a:p>
-                  </a:txBody>
-                  <a:tcPr marL="137160" marR="137160" marT="137160" marB="137160">
-                    <a:lnL w="12700" cap="flat" cmpd="sng" algn="ctr">
-                      <a:solidFill>
-                        <a:schemeClr val="tx1"/>
-                      </a:solidFill>
-                      <a:prstDash val="solid"/>
-                      <a:round/>
-                      <a:headEnd type="none" w="med" len="med"/>
-                      <a:tailEnd type="none" w="med" len="med"/>
-                    </a:lnL>
-                    <a:lnR w="12700" cap="flat" cmpd="sng" algn="ctr">
-                      <a:solidFill>
-                        <a:schemeClr val="tx1"/>
-                      </a:solidFill>
-                      <a:prstDash val="solid"/>
-                      <a:round/>
-                      <a:headEnd type="none" w="med" len="med"/>
-                      <a:tailEnd type="none" w="med" len="med"/>
-                    </a:lnR>
-                    <a:lnT w="12700" cap="flat" cmpd="sng" algn="ctr">
-                      <a:solidFill>
-                        <a:schemeClr val="tx1"/>
-                      </a:solidFill>
-                      <a:prstDash val="solid"/>
-                      <a:round/>
-                      <a:headEnd type="none" w="med" len="med"/>
-                      <a:tailEnd type="none" w="med" len="med"/>
-                    </a:lnT>
-                    <a:lnB w="12700" cap="flat" cmpd="sng" algn="ctr">
-                      <a:solidFill>
-                        <a:schemeClr val="tx1"/>
-                      </a:solidFill>
-                      <a:prstDash val="solid"/>
-                      <a:round/>
-                      <a:headEnd type="none" w="med" len="med"/>
-                      <a:tailEnd type="none" w="med" len="med"/>
-                    </a:lnB>
-                    <a:solidFill>
-                      <a:schemeClr val="bg1"/>
-                    </a:solidFill>
-                  </a:tcPr>
-                </a:tc>
-                <a:tc>
-                  <a:txBody>
-                    <a:bodyPr/>
-                    <a:lstStyle/>
-                    <a:p>
-                      <a:r>
-                        <a:rPr kumimoji="1" lang="en-US" altLang="ja-JP" sz="1200">
-                          <a:latin typeface="Cascadia Code SemiBold" panose="020B0609020000020004" pitchFamily="49" charset="0"/>
-                          <a:ea typeface="Cascadia Code SemiBold" panose="020B0609020000020004" pitchFamily="49" charset="0"/>
-                          <a:cs typeface="Cascadia Code SemiBold" panose="020B0609020000020004" pitchFamily="49" charset="0"/>
-                        </a:rPr>
-                        <a:t>This SCRIPT generates prompt templates from </a:t>
-                      </a:r>
-                      <a:r>
-                        <a:rPr kumimoji="1" lang="en-US" altLang="ja-JP" sz="1200" b="1" i="1">
-                          <a:solidFill>
-                            <a:srgbClr val="FF0000"/>
-                          </a:solidFill>
-                          <a:latin typeface="Cascadia Code SemiBold" panose="020B0609020000020004" pitchFamily="49" charset="0"/>
-                          <a:ea typeface="Cascadia Code SemiBold" panose="020B0609020000020004" pitchFamily="49" charset="0"/>
-                          <a:cs typeface="Cascadia Code SemiBold" panose="020B0609020000020004" pitchFamily="49" charset="0"/>
-                        </a:rPr>
-                        <a:t>rubric/*.json</a:t>
-                      </a:r>
-                      <a:r>
-                        <a:rPr kumimoji="1" lang="en-US" altLang="ja-JP" sz="1200">
-                          <a:latin typeface="Cascadia Code SemiBold" panose="020B0609020000020004" pitchFamily="49" charset="0"/>
-                          <a:ea typeface="Cascadia Code SemiBold" panose="020B0609020000020004" pitchFamily="49" charset="0"/>
-                          <a:cs typeface="Cascadia Code SemiBold" panose="020B0609020000020004" pitchFamily="49" charset="0"/>
-                        </a:rPr>
-                        <a:t> and writes them to </a:t>
-                      </a:r>
-                      <a:r>
-                        <a:rPr kumimoji="1" lang="en-US" altLang="ja-JP" sz="1200" b="1" i="1">
-                          <a:solidFill>
-                            <a:srgbClr val="FF0000"/>
-                          </a:solidFill>
-                          <a:latin typeface="Cascadia Code SemiBold" panose="020B0609020000020004" pitchFamily="49" charset="0"/>
-                          <a:ea typeface="Cascadia Code SemiBold" panose="020B0609020000020004" pitchFamily="49" charset="0"/>
-                          <a:cs typeface="Cascadia Code SemiBold" panose="020B0609020000020004" pitchFamily="49" charset="0"/>
-                        </a:rPr>
-                        <a:t>work/*.01-prompt.txt</a:t>
-                      </a:r>
-                      <a:r>
-                        <a:rPr kumimoji="1" lang="en-US" altLang="ja-JP" sz="1200">
-                          <a:latin typeface="Cascadia Code SemiBold" panose="020B0609020000020004" pitchFamily="49" charset="0"/>
-                          <a:ea typeface="Cascadia Code SemiBold" panose="020B0609020000020004" pitchFamily="49" charset="0"/>
-                          <a:cs typeface="Cascadia Code SemiBold" panose="020B0609020000020004" pitchFamily="49" charset="0"/>
-                        </a:rPr>
-                        <a:t>. These prompts serve as a baseline for human tuning.</a:t>
-                      </a:r>
-                    </a:p>
-                  </a:txBody>
-                  <a:tcPr marL="137160" marR="137160" marT="137160" marB="137160">
-                    <a:lnL w="12700" cap="flat" cmpd="sng" algn="ctr">
-                      <a:solidFill>
-                        <a:schemeClr val="tx1"/>
-                      </a:solidFill>
-                      <a:prstDash val="solid"/>
-                      <a:round/>
-                      <a:headEnd type="none" w="med" len="med"/>
-                      <a:tailEnd type="none" w="med" len="med"/>
-                    </a:lnL>
-                    <a:lnR w="12700" cap="flat" cmpd="sng" algn="ctr">
-                      <a:solidFill>
-                        <a:schemeClr val="tx1"/>
-                      </a:solidFill>
-                      <a:prstDash val="solid"/>
-                      <a:round/>
-                      <a:headEnd type="none" w="med" len="med"/>
-                      <a:tailEnd type="none" w="med" len="med"/>
-                    </a:lnR>
-                    <a:lnT w="12700" cap="flat" cmpd="sng" algn="ctr">
-                      <a:solidFill>
-                        <a:schemeClr val="tx1"/>
-                      </a:solidFill>
-                      <a:prstDash val="solid"/>
-                      <a:round/>
-                      <a:headEnd type="none" w="med" len="med"/>
-                      <a:tailEnd type="none" w="med" len="med"/>
-                    </a:lnT>
-                    <a:lnB w="12700" cap="flat" cmpd="sng" algn="ctr">
-                      <a:solidFill>
-                        <a:schemeClr val="tx1"/>
-                      </a:solidFill>
-                      <a:prstDash val="solid"/>
-                      <a:round/>
-                      <a:headEnd type="none" w="med" len="med"/>
-                      <a:tailEnd type="none" w="med" len="med"/>
-                    </a:lnB>
-                    <a:solidFill>
-                      <a:schemeClr val="bg1"/>
-                    </a:solidFill>
-                  </a:tcPr>
-                </a:tc>
-                <a:extLst>
-                  <a:ext uri="{0D108BD9-81ED-4DB2-BD59-A6C34878D82A}">
-                    <a16:rowId xmlns:a16="http://schemas.microsoft.com/office/drawing/2014/main" val="3135657923"/>
-                  </a:ext>
-                </a:extLst>
-              </a:tr>
-              <a:tr h="0">
-                <a:tc>
-                  <a:txBody>
-                    <a:bodyPr/>
-                    <a:lstStyle/>
-                    <a:p>
-                      <a:r>
-                        <a:rPr kumimoji="1" lang="en-US" altLang="ja-JP" sz="1200">
-                          <a:latin typeface="Cascadia Code SemiBold" panose="020B0609020000020004" pitchFamily="49" charset="0"/>
-                          <a:ea typeface="Cascadia Code SemiBold" panose="020B0609020000020004" pitchFamily="49" charset="0"/>
-                          <a:cs typeface="Cascadia Code SemiBold" panose="020B0609020000020004" pitchFamily="49" charset="0"/>
-                        </a:rPr>
-                        <a:t>llmj-1-generate.py</a:t>
-                      </a:r>
-                      <a:endParaRPr kumimoji="1" lang="ja-JP" altLang="en-US" sz="1200">
-                        <a:latin typeface="Cascadia Code SemiBold" panose="020B0609020000020004" pitchFamily="49" charset="0"/>
-                        <a:ea typeface="BIZ UDゴシック" panose="020B0400000000000000" pitchFamily="49" charset="-128"/>
-                        <a:cs typeface="Cascadia Code SemiBold" panose="020B0609020000020004" pitchFamily="49" charset="0"/>
-                      </a:endParaRPr>
-                    </a:p>
-                  </a:txBody>
-                  <a:tcPr marL="137160" marR="137160" marT="137160" marB="137160">
-                    <a:lnL w="12700" cap="flat" cmpd="sng" algn="ctr">
-                      <a:solidFill>
-                        <a:schemeClr val="tx1"/>
-                      </a:solidFill>
-                      <a:prstDash val="solid"/>
-                      <a:round/>
-                      <a:headEnd type="none" w="med" len="med"/>
-                      <a:tailEnd type="none" w="med" len="med"/>
-                    </a:lnL>
-                    <a:lnR w="12700" cap="flat" cmpd="sng" algn="ctr">
-                      <a:solidFill>
-                        <a:schemeClr val="tx1"/>
-                      </a:solidFill>
-                      <a:prstDash val="solid"/>
-                      <a:round/>
-                      <a:headEnd type="none" w="med" len="med"/>
-                      <a:tailEnd type="none" w="med" len="med"/>
-                    </a:lnR>
-                    <a:lnT w="12700" cap="flat" cmpd="sng" algn="ctr">
-                      <a:solidFill>
-                        <a:schemeClr val="tx1"/>
-                      </a:solidFill>
-                      <a:prstDash val="solid"/>
-                      <a:round/>
-                      <a:headEnd type="none" w="med" len="med"/>
-                      <a:tailEnd type="none" w="med" len="med"/>
-                    </a:lnT>
-                    <a:lnB w="12700" cap="flat" cmpd="sng" algn="ctr">
-                      <a:solidFill>
-                        <a:schemeClr val="tx1"/>
-                      </a:solidFill>
-                      <a:prstDash val="solid"/>
-                      <a:round/>
-                      <a:headEnd type="none" w="med" len="med"/>
-                      <a:tailEnd type="none" w="med" len="med"/>
-                    </a:lnB>
-                    <a:solidFill>
-                      <a:schemeClr val="bg1"/>
-                    </a:solidFill>
-                  </a:tcPr>
-                </a:tc>
-                <a:tc>
-                  <a:txBody>
-                    <a:bodyPr/>
-                    <a:lstStyle/>
-                    <a:p>
-                      <a:r>
-                        <a:rPr kumimoji="1" lang="en-US" altLang="ja-JP" sz="1200">
-                          <a:latin typeface="Cascadia Code SemiBold" panose="020B0609020000020004" pitchFamily="49" charset="0"/>
-                          <a:ea typeface="Cascadia Code SemiBold" panose="020B0609020000020004" pitchFamily="49" charset="0"/>
-                          <a:cs typeface="Cascadia Code SemiBold" panose="020B0609020000020004" pitchFamily="49" charset="0"/>
-                        </a:rPr>
-                        <a:t>This SCRIPT uses </a:t>
-                      </a:r>
-                      <a:r>
-                        <a:rPr kumimoji="1" lang="en-US" altLang="ja-JP" sz="1200" b="1" i="1">
-                          <a:solidFill>
-                            <a:srgbClr val="FF0000"/>
-                          </a:solidFill>
-                          <a:latin typeface="Cascadia Code SemiBold" panose="020B0609020000020004" pitchFamily="49" charset="0"/>
-                          <a:ea typeface="Cascadia Code SemiBold" panose="020B0609020000020004" pitchFamily="49" charset="0"/>
-                          <a:cs typeface="Cascadia Code SemiBold" panose="020B0609020000020004" pitchFamily="49" charset="0"/>
-                        </a:rPr>
-                        <a:t>work/*.01-prompt.txt</a:t>
-                      </a:r>
-                      <a:r>
-                        <a:rPr kumimoji="1" lang="en-US" altLang="ja-JP" sz="1200">
-                          <a:latin typeface="Cascadia Code SemiBold" panose="020B0609020000020004" pitchFamily="49" charset="0"/>
-                          <a:ea typeface="Cascadia Code SemiBold" panose="020B0609020000020004" pitchFamily="49" charset="0"/>
-                          <a:cs typeface="Cascadia Code SemiBold" panose="020B0609020000020004" pitchFamily="49" charset="0"/>
-                        </a:rPr>
-                        <a:t> to transform </a:t>
-                      </a:r>
-                      <a:r>
-                        <a:rPr kumimoji="1" lang="en-US" altLang="ja-JP" sz="1200" b="1" i="1">
-                          <a:solidFill>
-                            <a:srgbClr val="FF0000"/>
-                          </a:solidFill>
-                          <a:latin typeface="Cascadia Code SemiBold" panose="020B0609020000020004" pitchFamily="49" charset="0"/>
-                          <a:ea typeface="Cascadia Code SemiBold" panose="020B0609020000020004" pitchFamily="49" charset="0"/>
-                          <a:cs typeface="Cascadia Code SemiBold" panose="020B0609020000020004" pitchFamily="49" charset="0"/>
-                        </a:rPr>
-                        <a:t>source/*.txt</a:t>
-                      </a:r>
-                      <a:r>
-                        <a:rPr kumimoji="1" lang="en-US" altLang="ja-JP" sz="1200">
-                          <a:latin typeface="Cascadia Code SemiBold" panose="020B0609020000020004" pitchFamily="49" charset="0"/>
-                          <a:ea typeface="Cascadia Code SemiBold" panose="020B0609020000020004" pitchFamily="49" charset="0"/>
-                          <a:cs typeface="Cascadia Code SemiBold" panose="020B0609020000020004" pitchFamily="49" charset="0"/>
-                        </a:rPr>
-                        <a:t> and generates </a:t>
-                      </a:r>
-                      <a:r>
-                        <a:rPr kumimoji="1" lang="en-US" altLang="ja-JP" sz="1200" b="1" i="1">
-                          <a:solidFill>
-                            <a:srgbClr val="FF0000"/>
-                          </a:solidFill>
-                          <a:latin typeface="Cascadia Code SemiBold" panose="020B0609020000020004" pitchFamily="49" charset="0"/>
-                          <a:ea typeface="Cascadia Code SemiBold" panose="020B0609020000020004" pitchFamily="49" charset="0"/>
-                          <a:cs typeface="Cascadia Code SemiBold" panose="020B0609020000020004" pitchFamily="49" charset="0"/>
-                        </a:rPr>
-                        <a:t>work/*.02-generated.xlsx</a:t>
-                      </a:r>
-                      <a:r>
-                        <a:rPr kumimoji="1" lang="en-US" altLang="ja-JP" sz="1200">
-                          <a:latin typeface="Cascadia Code SemiBold" panose="020B0609020000020004" pitchFamily="49" charset="0"/>
-                          <a:ea typeface="Cascadia Code SemiBold" panose="020B0609020000020004" pitchFamily="49" charset="0"/>
-                          <a:cs typeface="Cascadia Code SemiBold" panose="020B0609020000020004" pitchFamily="49" charset="0"/>
-                        </a:rPr>
-                        <a:t>.</a:t>
-                      </a:r>
-                    </a:p>
-                  </a:txBody>
-                  <a:tcPr marL="137160" marR="137160" marT="137160" marB="137160">
-                    <a:lnL w="12700" cap="flat" cmpd="sng" algn="ctr">
-                      <a:solidFill>
-                        <a:schemeClr val="tx1"/>
-                      </a:solidFill>
-                      <a:prstDash val="solid"/>
-                      <a:round/>
-                      <a:headEnd type="none" w="med" len="med"/>
-                      <a:tailEnd type="none" w="med" len="med"/>
-                    </a:lnL>
-                    <a:lnR w="12700" cap="flat" cmpd="sng" algn="ctr">
-                      <a:solidFill>
-                        <a:schemeClr val="tx1"/>
-                      </a:solidFill>
-                      <a:prstDash val="solid"/>
-                      <a:round/>
-                      <a:headEnd type="none" w="med" len="med"/>
-                      <a:tailEnd type="none" w="med" len="med"/>
-                    </a:lnR>
-                    <a:lnT w="12700" cap="flat" cmpd="sng" algn="ctr">
-                      <a:solidFill>
-                        <a:schemeClr val="tx1"/>
-                      </a:solidFill>
-                      <a:prstDash val="solid"/>
-                      <a:round/>
-                      <a:headEnd type="none" w="med" len="med"/>
-                      <a:tailEnd type="none" w="med" len="med"/>
-                    </a:lnT>
-                    <a:lnB w="12700" cap="flat" cmpd="sng" algn="ctr">
-                      <a:solidFill>
-                        <a:schemeClr val="tx1"/>
-                      </a:solidFill>
-                      <a:prstDash val="solid"/>
-                      <a:round/>
-                      <a:headEnd type="none" w="med" len="med"/>
-                      <a:tailEnd type="none" w="med" len="med"/>
-                    </a:lnB>
-                    <a:solidFill>
-                      <a:schemeClr val="bg1"/>
-                    </a:solidFill>
-                  </a:tcPr>
-                </a:tc>
-                <a:extLst>
-                  <a:ext uri="{0D108BD9-81ED-4DB2-BD59-A6C34878D82A}">
-                    <a16:rowId xmlns:a16="http://schemas.microsoft.com/office/drawing/2014/main" val="1284133989"/>
-                  </a:ext>
-                </a:extLst>
-              </a:tr>
-              <a:tr h="0">
-                <a:tc>
-                  <a:txBody>
-                    <a:bodyPr/>
-                    <a:lstStyle/>
-                    <a:p>
-                      <a:r>
-                        <a:rPr kumimoji="1" lang="en-US" altLang="ja-JP" sz="1200">
-                          <a:latin typeface="Cascadia Code SemiBold" panose="020B0609020000020004" pitchFamily="49" charset="0"/>
-                          <a:ea typeface="Cascadia Code SemiBold" panose="020B0609020000020004" pitchFamily="49" charset="0"/>
-                          <a:cs typeface="Cascadia Code SemiBold" panose="020B0609020000020004" pitchFamily="49" charset="0"/>
-                        </a:rPr>
-                        <a:t>llmj-2-judge.py</a:t>
-                      </a:r>
-                      <a:endParaRPr kumimoji="1" lang="ja-JP" altLang="en-US" sz="1200">
-                        <a:latin typeface="Cascadia Code SemiBold" panose="020B0609020000020004" pitchFamily="49" charset="0"/>
-                        <a:ea typeface="BIZ UDゴシック" panose="020B0400000000000000" pitchFamily="49" charset="-128"/>
-                        <a:cs typeface="Cascadia Code SemiBold" panose="020B0609020000020004" pitchFamily="49" charset="0"/>
-                      </a:endParaRPr>
-                    </a:p>
-                  </a:txBody>
-                  <a:tcPr marL="137160" marR="137160" marT="137160" marB="137160">
-                    <a:lnL w="12700" cap="flat" cmpd="sng" algn="ctr">
-                      <a:solidFill>
-                        <a:schemeClr val="tx1"/>
-                      </a:solidFill>
-                      <a:prstDash val="solid"/>
-                      <a:round/>
-                      <a:headEnd type="none" w="med" len="med"/>
-                      <a:tailEnd type="none" w="med" len="med"/>
-                    </a:lnL>
-                    <a:lnR w="12700" cap="flat" cmpd="sng" algn="ctr">
-                      <a:solidFill>
-                        <a:schemeClr val="tx1"/>
-                      </a:solidFill>
-                      <a:prstDash val="solid"/>
-                      <a:round/>
-                      <a:headEnd type="none" w="med" len="med"/>
-                      <a:tailEnd type="none" w="med" len="med"/>
-                    </a:lnR>
-                    <a:lnT w="12700" cap="flat" cmpd="sng" algn="ctr">
-                      <a:solidFill>
-                        <a:schemeClr val="tx1"/>
-                      </a:solidFill>
-                      <a:prstDash val="solid"/>
-                      <a:round/>
-                      <a:headEnd type="none" w="med" len="med"/>
-                      <a:tailEnd type="none" w="med" len="med"/>
-                    </a:lnT>
-                    <a:lnB w="12700" cap="flat" cmpd="sng" algn="ctr">
-                      <a:solidFill>
-                        <a:schemeClr val="tx1"/>
-                      </a:solidFill>
-                      <a:prstDash val="solid"/>
-                      <a:round/>
-                      <a:headEnd type="none" w="med" len="med"/>
-                      <a:tailEnd type="none" w="med" len="med"/>
-                    </a:lnB>
-                    <a:solidFill>
-                      <a:schemeClr val="bg1"/>
-                    </a:solidFill>
-                  </a:tcPr>
-                </a:tc>
-                <a:tc>
-                  <a:txBody>
-                    <a:bodyPr/>
-                    <a:lstStyle/>
-                    <a:p>
-                      <a:r>
-                        <a:rPr kumimoji="1" lang="en-US" altLang="ja-JP" sz="1200">
-                          <a:latin typeface="Cascadia Code SemiBold" panose="020B0609020000020004" pitchFamily="49" charset="0"/>
-                          <a:ea typeface="Cascadia Code SemiBold" panose="020B0609020000020004" pitchFamily="49" charset="0"/>
-                          <a:cs typeface="Cascadia Code SemiBold" panose="020B0609020000020004" pitchFamily="49" charset="0"/>
-                        </a:rPr>
-                        <a:t>This SCRIPT evaluates the contents of </a:t>
-                      </a:r>
-                      <a:r>
-                        <a:rPr kumimoji="1" lang="en-US" altLang="ja-JP" sz="1200" b="1" i="1">
-                          <a:solidFill>
-                            <a:srgbClr val="FF0000"/>
-                          </a:solidFill>
-                          <a:latin typeface="Cascadia Code SemiBold" panose="020B0609020000020004" pitchFamily="49" charset="0"/>
-                          <a:ea typeface="Cascadia Code SemiBold" panose="020B0609020000020004" pitchFamily="49" charset="0"/>
-                          <a:cs typeface="Cascadia Code SemiBold" panose="020B0609020000020004" pitchFamily="49" charset="0"/>
-                        </a:rPr>
-                        <a:t>work/*.02-generated.xlsx</a:t>
-                      </a:r>
-                      <a:r>
-                        <a:rPr kumimoji="1" lang="en-US" altLang="ja-JP" sz="1200">
-                          <a:latin typeface="Cascadia Code SemiBold" panose="020B0609020000020004" pitchFamily="49" charset="0"/>
-                          <a:ea typeface="Cascadia Code SemiBold" panose="020B0609020000020004" pitchFamily="49" charset="0"/>
-                          <a:cs typeface="Cascadia Code SemiBold" panose="020B0609020000020004" pitchFamily="49" charset="0"/>
-                        </a:rPr>
-                        <a:t> against </a:t>
-                      </a:r>
-                      <a:r>
-                        <a:rPr kumimoji="1" lang="en-US" altLang="ja-JP" sz="1200" b="1" i="1">
-                          <a:solidFill>
-                            <a:srgbClr val="FF0000"/>
-                          </a:solidFill>
-                          <a:latin typeface="Cascadia Code SemiBold" panose="020B0609020000020004" pitchFamily="49" charset="0"/>
-                          <a:ea typeface="Cascadia Code SemiBold" panose="020B0609020000020004" pitchFamily="49" charset="0"/>
-                          <a:cs typeface="Cascadia Code SemiBold" panose="020B0609020000020004" pitchFamily="49" charset="0"/>
-                        </a:rPr>
-                        <a:t>rubric/*.json</a:t>
-                      </a:r>
-                      <a:r>
-                        <a:rPr kumimoji="1" lang="en-US" altLang="ja-JP" sz="1200">
-                          <a:latin typeface="Cascadia Code SemiBold" panose="020B0609020000020004" pitchFamily="49" charset="0"/>
-                          <a:ea typeface="Cascadia Code SemiBold" panose="020B0609020000020004" pitchFamily="49" charset="0"/>
-                          <a:cs typeface="Cascadia Code SemiBold" panose="020B0609020000020004" pitchFamily="49" charset="0"/>
-                        </a:rPr>
-                        <a:t> and outputs the results to </a:t>
-                      </a:r>
-                      <a:r>
-                        <a:rPr kumimoji="1" lang="en-US" altLang="ja-JP" sz="1200" b="1" i="1">
-                          <a:solidFill>
-                            <a:srgbClr val="FF0000"/>
-                          </a:solidFill>
-                          <a:latin typeface="Cascadia Code SemiBold" panose="020B0609020000020004" pitchFamily="49" charset="0"/>
-                          <a:ea typeface="Cascadia Code SemiBold" panose="020B0609020000020004" pitchFamily="49" charset="0"/>
-                          <a:cs typeface="Cascadia Code SemiBold" panose="020B0609020000020004" pitchFamily="49" charset="0"/>
-                        </a:rPr>
-                        <a:t>work/*.03-judged.xlsx</a:t>
-                      </a:r>
-                      <a:r>
-                        <a:rPr kumimoji="1" lang="en-US" altLang="ja-JP" sz="1200">
-                          <a:latin typeface="Cascadia Code SemiBold" panose="020B0609020000020004" pitchFamily="49" charset="0"/>
-                          <a:ea typeface="Cascadia Code SemiBold" panose="020B0609020000020004" pitchFamily="49" charset="0"/>
-                          <a:cs typeface="Cascadia Code SemiBold" panose="020B0609020000020004" pitchFamily="49" charset="0"/>
-                        </a:rPr>
-                        <a:t>.</a:t>
-                      </a:r>
-                    </a:p>
-                  </a:txBody>
-                  <a:tcPr marL="137160" marR="137160" marT="137160" marB="137160">
-                    <a:lnL w="12700" cap="flat" cmpd="sng" algn="ctr">
-                      <a:solidFill>
-                        <a:schemeClr val="tx1"/>
-                      </a:solidFill>
-                      <a:prstDash val="solid"/>
-                      <a:round/>
-                      <a:headEnd type="none" w="med" len="med"/>
-                      <a:tailEnd type="none" w="med" len="med"/>
-                    </a:lnL>
-                    <a:lnR w="12700" cap="flat" cmpd="sng" algn="ctr">
-                      <a:solidFill>
-                        <a:schemeClr val="tx1"/>
-                      </a:solidFill>
-                      <a:prstDash val="solid"/>
-                      <a:round/>
-                      <a:headEnd type="none" w="med" len="med"/>
-                      <a:tailEnd type="none" w="med" len="med"/>
-                    </a:lnR>
-                    <a:lnT w="12700" cap="flat" cmpd="sng" algn="ctr">
-                      <a:solidFill>
-                        <a:schemeClr val="tx1"/>
-                      </a:solidFill>
-                      <a:prstDash val="solid"/>
-                      <a:round/>
-                      <a:headEnd type="none" w="med" len="med"/>
-                      <a:tailEnd type="none" w="med" len="med"/>
-                    </a:lnT>
-                    <a:lnB w="12700" cap="flat" cmpd="sng" algn="ctr">
-                      <a:solidFill>
-                        <a:schemeClr val="tx1"/>
-                      </a:solidFill>
-                      <a:prstDash val="solid"/>
-                      <a:round/>
-                      <a:headEnd type="none" w="med" len="med"/>
-                      <a:tailEnd type="none" w="med" len="med"/>
-                    </a:lnB>
-                    <a:solidFill>
-                      <a:schemeClr val="bg1"/>
-                    </a:solidFill>
-                  </a:tcPr>
-                </a:tc>
-                <a:extLst>
-                  <a:ext uri="{0D108BD9-81ED-4DB2-BD59-A6C34878D82A}">
-                    <a16:rowId xmlns:a16="http://schemas.microsoft.com/office/drawing/2014/main" val="2706627039"/>
-                  </a:ext>
-                </a:extLst>
-              </a:tr>
-              <a:tr h="0">
-                <a:tc>
-                  <a:txBody>
-                    <a:bodyPr/>
-                    <a:lstStyle/>
-                    <a:p>
-                      <a:r>
-                        <a:rPr kumimoji="1" lang="en-US" altLang="ja-JP" sz="1200">
-                          <a:latin typeface="Cascadia Code SemiBold" panose="020B0609020000020004" pitchFamily="49" charset="0"/>
-                          <a:ea typeface="Cascadia Code SemiBold" panose="020B0609020000020004" pitchFamily="49" charset="0"/>
-                          <a:cs typeface="Cascadia Code SemiBold" panose="020B0609020000020004" pitchFamily="49" charset="0"/>
-                        </a:rPr>
-                        <a:t>llmj-3-report.py</a:t>
-                      </a:r>
-                      <a:endParaRPr kumimoji="1" lang="ja-JP" altLang="en-US" sz="1200">
-                        <a:latin typeface="Cascadia Code SemiBold" panose="020B0609020000020004" pitchFamily="49" charset="0"/>
-                        <a:ea typeface="BIZ UDゴシック" panose="020B0400000000000000" pitchFamily="49" charset="-128"/>
-                        <a:cs typeface="Cascadia Code SemiBold" panose="020B0609020000020004" pitchFamily="49" charset="0"/>
-                      </a:endParaRPr>
-                    </a:p>
-                  </a:txBody>
-                  <a:tcPr marL="137160" marR="137160" marT="137160" marB="137160">
-                    <a:lnL w="12700" cap="flat" cmpd="sng" algn="ctr">
-                      <a:solidFill>
-                        <a:schemeClr val="tx1"/>
-                      </a:solidFill>
-                      <a:prstDash val="solid"/>
-                      <a:round/>
-                      <a:headEnd type="none" w="med" len="med"/>
-                      <a:tailEnd type="none" w="med" len="med"/>
-                    </a:lnL>
-                    <a:lnR w="12700" cap="flat" cmpd="sng" algn="ctr">
-                      <a:solidFill>
-                        <a:schemeClr val="tx1"/>
-                      </a:solidFill>
-                      <a:prstDash val="solid"/>
-                      <a:round/>
-                      <a:headEnd type="none" w="med" len="med"/>
-                      <a:tailEnd type="none" w="med" len="med"/>
-                    </a:lnR>
-                    <a:lnT w="12700" cap="flat" cmpd="sng" algn="ctr">
-                      <a:solidFill>
-                        <a:schemeClr val="tx1"/>
-                      </a:solidFill>
-                      <a:prstDash val="solid"/>
-                      <a:round/>
-                      <a:headEnd type="none" w="med" len="med"/>
-                      <a:tailEnd type="none" w="med" len="med"/>
-                    </a:lnT>
-                    <a:lnB w="12700" cap="flat" cmpd="sng" algn="ctr">
-                      <a:solidFill>
-                        <a:schemeClr val="tx1"/>
-                      </a:solidFill>
-                      <a:prstDash val="solid"/>
-                      <a:round/>
-                      <a:headEnd type="none" w="med" len="med"/>
-                      <a:tailEnd type="none" w="med" len="med"/>
-                    </a:lnB>
-                    <a:solidFill>
-                      <a:schemeClr val="bg1"/>
-                    </a:solidFill>
-                  </a:tcPr>
-                </a:tc>
-                <a:tc>
-                  <a:txBody>
-                    <a:bodyPr/>
-                    <a:lstStyle/>
-                    <a:p>
-                      <a:r>
-                        <a:rPr kumimoji="1" lang="en-US" altLang="ja-JP" sz="1200">
-                          <a:latin typeface="Cascadia Code SemiBold" panose="020B0609020000020004" pitchFamily="49" charset="0"/>
-                          <a:ea typeface="Cascadia Code SemiBold" panose="020B0609020000020004" pitchFamily="49" charset="0"/>
-                          <a:cs typeface="Cascadia Code SemiBold" panose="020B0609020000020004" pitchFamily="49" charset="0"/>
-                        </a:rPr>
-                        <a:t>This SCRIPT generates </a:t>
-                      </a:r>
-                      <a:r>
-                        <a:rPr kumimoji="1" lang="en-US" altLang="ja-JP" sz="1200">
-                          <a:solidFill>
-                            <a:srgbClr val="FF0000"/>
-                          </a:solidFill>
-                          <a:latin typeface="Cascadia Code SemiBold" panose="020B0609020000020004" pitchFamily="49" charset="0"/>
-                          <a:ea typeface="Cascadia Code SemiBold" panose="020B0609020000020004" pitchFamily="49" charset="0"/>
-                          <a:cs typeface="Cascadia Code SemiBold" panose="020B0609020000020004" pitchFamily="49" charset="0"/>
-                        </a:rPr>
-                        <a:t>report.html</a:t>
-                      </a:r>
-                      <a:r>
-                        <a:rPr kumimoji="1" lang="en-US" altLang="ja-JP" sz="1200">
-                          <a:latin typeface="Cascadia Code SemiBold" panose="020B0609020000020004" pitchFamily="49" charset="0"/>
-                          <a:ea typeface="Cascadia Code SemiBold" panose="020B0609020000020004" pitchFamily="49" charset="0"/>
-                          <a:cs typeface="Cascadia Code SemiBold" panose="020B0609020000020004" pitchFamily="49" charset="0"/>
-                        </a:rPr>
-                        <a:t> based on the results in </a:t>
-                      </a:r>
-                      <a:r>
-                        <a:rPr kumimoji="1" lang="en-US" altLang="ja-JP" sz="1200" b="1" i="1">
-                          <a:solidFill>
-                            <a:srgbClr val="FF0000"/>
-                          </a:solidFill>
-                          <a:latin typeface="Cascadia Code SemiBold" panose="020B0609020000020004" pitchFamily="49" charset="0"/>
-                          <a:ea typeface="Cascadia Code SemiBold" panose="020B0609020000020004" pitchFamily="49" charset="0"/>
-                          <a:cs typeface="Cascadia Code SemiBold" panose="020B0609020000020004" pitchFamily="49" charset="0"/>
-                        </a:rPr>
-                        <a:t>work/*.03-judged.xlsx</a:t>
-                      </a:r>
-                      <a:r>
-                        <a:rPr kumimoji="1" lang="en-US" altLang="ja-JP" sz="1200">
-                          <a:latin typeface="Cascadia Code SemiBold" panose="020B0609020000020004" pitchFamily="49" charset="0"/>
-                          <a:ea typeface="Cascadia Code SemiBold" panose="020B0609020000020004" pitchFamily="49" charset="0"/>
-                          <a:cs typeface="Cascadia Code SemiBold" panose="020B0609020000020004" pitchFamily="49" charset="0"/>
-                        </a:rPr>
-                        <a:t>.</a:t>
-                      </a:r>
-                    </a:p>
-                  </a:txBody>
-                  <a:tcPr marL="137160" marR="137160" marT="137160" marB="137160">
-                    <a:lnL w="12700" cap="flat" cmpd="sng" algn="ctr">
-                      <a:solidFill>
-                        <a:schemeClr val="tx1"/>
-                      </a:solidFill>
-                      <a:prstDash val="solid"/>
-                      <a:round/>
-                      <a:headEnd type="none" w="med" len="med"/>
-                      <a:tailEnd type="none" w="med" len="med"/>
-                    </a:lnL>
-                    <a:lnR w="12700" cap="flat" cmpd="sng" algn="ctr">
-                      <a:solidFill>
-                        <a:schemeClr val="tx1"/>
-                      </a:solidFill>
-                      <a:prstDash val="solid"/>
-                      <a:round/>
-                      <a:headEnd type="none" w="med" len="med"/>
-                      <a:tailEnd type="none" w="med" len="med"/>
-                    </a:lnR>
-                    <a:lnT w="12700" cap="flat" cmpd="sng" algn="ctr">
-                      <a:solidFill>
-                        <a:schemeClr val="tx1"/>
-                      </a:solidFill>
-                      <a:prstDash val="solid"/>
-                      <a:round/>
-                      <a:headEnd type="none" w="med" len="med"/>
-                      <a:tailEnd type="none" w="med" len="med"/>
-                    </a:lnT>
-                    <a:lnB w="12700" cap="flat" cmpd="sng" algn="ctr">
-                      <a:solidFill>
-                        <a:schemeClr val="tx1"/>
-                      </a:solidFill>
-                      <a:prstDash val="solid"/>
-                      <a:round/>
-                      <a:headEnd type="none" w="med" len="med"/>
-                      <a:tailEnd type="none" w="med" len="med"/>
-                    </a:lnB>
-                    <a:solidFill>
-                      <a:schemeClr val="bg1"/>
-                    </a:solidFill>
-                  </a:tcPr>
-                </a:tc>
-                <a:extLst>
-                  <a:ext uri="{0D108BD9-81ED-4DB2-BD59-A6C34878D82A}">
-                    <a16:rowId xmlns:a16="http://schemas.microsoft.com/office/drawing/2014/main" val="999393350"/>
-                  </a:ext>
-                </a:extLst>
-              </a:tr>
-              <a:tr h="0">
-                <a:tc>
-                  <a:txBody>
-                    <a:bodyPr/>
-                    <a:lstStyle/>
-                    <a:p>
-                      <a:r>
-                        <a:rPr kumimoji="1" lang="en-US" altLang="ja-JP" sz="1200">
-                          <a:latin typeface="Cascadia Code SemiBold" panose="020B0609020000020004" pitchFamily="49" charset="0"/>
-                          <a:ea typeface="Cascadia Code SemiBold" panose="020B0609020000020004" pitchFamily="49" charset="0"/>
-                          <a:cs typeface="Cascadia Code SemiBold" panose="020B0609020000020004" pitchFamily="49" charset="0"/>
-                        </a:rPr>
-                        <a:t>llmj-run.py</a:t>
-                      </a:r>
-                      <a:endParaRPr kumimoji="1" lang="ja-JP" altLang="en-US" sz="1200">
-                        <a:latin typeface="Cascadia Code SemiBold" panose="020B0609020000020004" pitchFamily="49" charset="0"/>
-                        <a:ea typeface="BIZ UDゴシック" panose="020B0400000000000000" pitchFamily="49" charset="-128"/>
-                        <a:cs typeface="Cascadia Code SemiBold" panose="020B0609020000020004" pitchFamily="49" charset="0"/>
-                      </a:endParaRPr>
-                    </a:p>
-                  </a:txBody>
-                  <a:tcPr marL="137160" marR="137160" marT="137160" marB="137160">
-                    <a:lnL w="12700" cap="flat" cmpd="sng" algn="ctr">
-                      <a:solidFill>
-                        <a:schemeClr val="tx1"/>
-                      </a:solidFill>
-                      <a:prstDash val="solid"/>
-                      <a:round/>
-                      <a:headEnd type="none" w="med" len="med"/>
-                      <a:tailEnd type="none" w="med" len="med"/>
-                    </a:lnL>
-                    <a:lnR w="12700" cap="flat" cmpd="sng" algn="ctr">
-                      <a:solidFill>
-                        <a:schemeClr val="tx1"/>
-                      </a:solidFill>
-                      <a:prstDash val="solid"/>
-                      <a:round/>
-                      <a:headEnd type="none" w="med" len="med"/>
-                      <a:tailEnd type="none" w="med" len="med"/>
-                    </a:lnR>
-                    <a:lnT w="12700" cap="flat" cmpd="sng" algn="ctr">
-                      <a:solidFill>
-                        <a:schemeClr val="tx1"/>
-                      </a:solidFill>
-                      <a:prstDash val="solid"/>
-                      <a:round/>
-                      <a:headEnd type="none" w="med" len="med"/>
-                      <a:tailEnd type="none" w="med" len="med"/>
-                    </a:lnT>
-                    <a:lnB w="12700" cap="flat" cmpd="sng" algn="ctr">
-                      <a:solidFill>
-                        <a:schemeClr val="tx1"/>
-                      </a:solidFill>
-                      <a:prstDash val="solid"/>
-                      <a:round/>
-                      <a:headEnd type="none" w="med" len="med"/>
-                      <a:tailEnd type="none" w="med" len="med"/>
-                    </a:lnB>
-                    <a:solidFill>
-                      <a:schemeClr val="bg1"/>
-                    </a:solidFill>
-                  </a:tcPr>
-                </a:tc>
-                <a:tc>
-                  <a:txBody>
-                    <a:bodyPr/>
-                    <a:lstStyle/>
-                    <a:p>
-                      <a:r>
-                        <a:rPr kumimoji="1" lang="en-US" altLang="ja-JP" sz="1200">
-                          <a:latin typeface="Cascadia Code SemiBold" panose="020B0609020000020004" pitchFamily="49" charset="0"/>
-                          <a:ea typeface="Cascadia Code SemiBold" panose="020B0609020000020004" pitchFamily="49" charset="0"/>
-                          <a:cs typeface="Cascadia Code SemiBold" panose="020B0609020000020004" pitchFamily="49" charset="0"/>
-                        </a:rPr>
-                        <a:t>This SCRIPT runs </a:t>
-                      </a:r>
-                      <a:r>
-                        <a:rPr kumimoji="1" lang="en-US" altLang="ja-JP" sz="1200" b="1" i="1">
-                          <a:solidFill>
-                            <a:srgbClr val="FF0000"/>
-                          </a:solidFill>
-                          <a:latin typeface="Cascadia Code SemiBold" panose="020B0609020000020004" pitchFamily="49" charset="0"/>
-                          <a:ea typeface="Cascadia Code SemiBold" panose="020B0609020000020004" pitchFamily="49" charset="0"/>
-                          <a:cs typeface="Cascadia Code SemiBold" panose="020B0609020000020004" pitchFamily="49" charset="0"/>
-                        </a:rPr>
-                        <a:t>llmj-1-generate.py</a:t>
-                      </a:r>
-                      <a:r>
-                        <a:rPr kumimoji="1" lang="en-US" altLang="ja-JP" sz="1200">
-                          <a:latin typeface="Cascadia Code SemiBold" panose="020B0609020000020004" pitchFamily="49" charset="0"/>
-                          <a:ea typeface="Cascadia Code SemiBold" panose="020B0609020000020004" pitchFamily="49" charset="0"/>
-                          <a:cs typeface="Cascadia Code SemiBold" panose="020B0609020000020004" pitchFamily="49" charset="0"/>
-                        </a:rPr>
-                        <a:t>, </a:t>
-                      </a:r>
-                      <a:r>
-                        <a:rPr kumimoji="1" lang="en-US" altLang="ja-JP" sz="1200" b="1" i="1">
-                          <a:solidFill>
-                            <a:srgbClr val="FF0000"/>
-                          </a:solidFill>
-                          <a:latin typeface="Cascadia Code SemiBold" panose="020B0609020000020004" pitchFamily="49" charset="0"/>
-                          <a:ea typeface="Cascadia Code SemiBold" panose="020B0609020000020004" pitchFamily="49" charset="0"/>
-                          <a:cs typeface="Cascadia Code SemiBold" panose="020B0609020000020004" pitchFamily="49" charset="0"/>
-                        </a:rPr>
-                        <a:t>llmj-2-judge.py</a:t>
-                      </a:r>
-                      <a:r>
-                        <a:rPr kumimoji="1" lang="en-US" altLang="ja-JP" sz="1200">
-                          <a:latin typeface="Cascadia Code SemiBold" panose="020B0609020000020004" pitchFamily="49" charset="0"/>
-                          <a:ea typeface="Cascadia Code SemiBold" panose="020B0609020000020004" pitchFamily="49" charset="0"/>
-                          <a:cs typeface="Cascadia Code SemiBold" panose="020B0609020000020004" pitchFamily="49" charset="0"/>
-                        </a:rPr>
-                        <a:t>, and </a:t>
-                      </a:r>
-                      <a:r>
-                        <a:rPr kumimoji="1" lang="en-US" altLang="ja-JP" sz="1200" b="1" i="1">
-                          <a:solidFill>
-                            <a:srgbClr val="FF0000"/>
-                          </a:solidFill>
-                          <a:latin typeface="Cascadia Code SemiBold" panose="020B0609020000020004" pitchFamily="49" charset="0"/>
-                          <a:ea typeface="Cascadia Code SemiBold" panose="020B0609020000020004" pitchFamily="49" charset="0"/>
-                          <a:cs typeface="Cascadia Code SemiBold" panose="020B0609020000020004" pitchFamily="49" charset="0"/>
-                        </a:rPr>
-                        <a:t>llmj-3-report.py</a:t>
-                      </a:r>
-                      <a:r>
-                        <a:rPr kumimoji="1" lang="en-US" altLang="ja-JP" sz="1200">
-                          <a:latin typeface="Cascadia Code SemiBold" panose="020B0609020000020004" pitchFamily="49" charset="0"/>
-                          <a:ea typeface="Cascadia Code SemiBold" panose="020B0609020000020004" pitchFamily="49" charset="0"/>
-                          <a:cs typeface="Cascadia Code SemiBold" panose="020B0609020000020004" pitchFamily="49" charset="0"/>
-                        </a:rPr>
-                        <a:t> in sequence.</a:t>
-                      </a:r>
-                    </a:p>
-                  </a:txBody>
-                  <a:tcPr marL="137160" marR="137160" marT="137160" marB="137160">
-                    <a:lnL w="12700" cap="flat" cmpd="sng" algn="ctr">
-                      <a:solidFill>
-                        <a:schemeClr val="tx1"/>
-                      </a:solidFill>
-                      <a:prstDash val="solid"/>
-                      <a:round/>
-                      <a:headEnd type="none" w="med" len="med"/>
-                      <a:tailEnd type="none" w="med" len="med"/>
-                    </a:lnL>
-                    <a:lnR w="12700" cap="flat" cmpd="sng" algn="ctr">
-                      <a:solidFill>
-                        <a:schemeClr val="tx1"/>
-                      </a:solidFill>
-                      <a:prstDash val="solid"/>
-                      <a:round/>
-                      <a:headEnd type="none" w="med" len="med"/>
-                      <a:tailEnd type="none" w="med" len="med"/>
-                    </a:lnR>
-                    <a:lnT w="12700" cap="flat" cmpd="sng" algn="ctr">
-                      <a:solidFill>
-                        <a:schemeClr val="tx1"/>
-                      </a:solidFill>
-                      <a:prstDash val="solid"/>
-                      <a:round/>
-                      <a:headEnd type="none" w="med" len="med"/>
-                      <a:tailEnd type="none" w="med" len="med"/>
-                    </a:lnT>
-                    <a:lnB w="12700" cap="flat" cmpd="sng" algn="ctr">
-                      <a:solidFill>
-                        <a:schemeClr val="tx1"/>
-                      </a:solidFill>
-                      <a:prstDash val="solid"/>
-                      <a:round/>
-                      <a:headEnd type="none" w="med" len="med"/>
-                      <a:tailEnd type="none" w="med" len="med"/>
-                    </a:lnB>
-                    <a:solidFill>
-                      <a:schemeClr val="bg1"/>
-                    </a:solidFill>
-                  </a:tcPr>
-                </a:tc>
-                <a:extLst>
-                  <a:ext uri="{0D108BD9-81ED-4DB2-BD59-A6C34878D82A}">
-                    <a16:rowId xmlns:a16="http://schemas.microsoft.com/office/drawing/2014/main" val="3567524200"/>
-                  </a:ext>
-                </a:extLst>
-              </a:tr>
-              <a:tr h="0">
-                <a:tc>
-                  <a:txBody>
-                    <a:bodyPr/>
-                    <a:lstStyle/>
-                    <a:p>
-                      <a:r>
-                        <a:rPr kumimoji="1" lang="en-US" altLang="ja-JP" sz="1200">
-                          <a:latin typeface="Cascadia Code SemiBold" panose="020B0609020000020004" pitchFamily="49" charset="0"/>
-                          <a:ea typeface="Cascadia Code SemiBold" panose="020B0609020000020004" pitchFamily="49" charset="0"/>
-                          <a:cs typeface="Cascadia Code SemiBold" panose="020B0609020000020004" pitchFamily="49" charset="0"/>
-                        </a:rPr>
-                        <a:t>rubric/*.json</a:t>
-                      </a:r>
-                      <a:endParaRPr kumimoji="1" lang="ja-JP" altLang="en-US" sz="1200">
-                        <a:latin typeface="Cascadia Code SemiBold" panose="020B0609020000020004" pitchFamily="49" charset="0"/>
-                        <a:ea typeface="BIZ UDゴシック" panose="020B0400000000000000" pitchFamily="49" charset="-128"/>
-                        <a:cs typeface="Cascadia Code SemiBold" panose="020B0609020000020004" pitchFamily="49" charset="0"/>
-                      </a:endParaRPr>
-                    </a:p>
-                  </a:txBody>
-                  <a:tcPr marL="137160" marR="137160" marT="137160" marB="137160">
-                    <a:lnL w="12700" cap="flat" cmpd="sng" algn="ctr">
-                      <a:solidFill>
-                        <a:schemeClr val="tx1"/>
-                      </a:solidFill>
-                      <a:prstDash val="solid"/>
-                      <a:round/>
-                      <a:headEnd type="none" w="med" len="med"/>
-                      <a:tailEnd type="none" w="med" len="med"/>
-                    </a:lnL>
-                    <a:lnR w="12700" cap="flat" cmpd="sng" algn="ctr">
-                      <a:solidFill>
-                        <a:schemeClr val="tx1"/>
-                      </a:solidFill>
-                      <a:prstDash val="solid"/>
-                      <a:round/>
-                      <a:headEnd type="none" w="med" len="med"/>
-                      <a:tailEnd type="none" w="med" len="med"/>
-                    </a:lnR>
-                    <a:lnT w="12700" cap="flat" cmpd="sng" algn="ctr">
-                      <a:solidFill>
-                        <a:schemeClr val="tx1"/>
-                      </a:solidFill>
-                      <a:prstDash val="solid"/>
-                      <a:round/>
-                      <a:headEnd type="none" w="med" len="med"/>
-                      <a:tailEnd type="none" w="med" len="med"/>
-                    </a:lnT>
-                    <a:lnB w="12700" cap="flat" cmpd="sng" algn="ctr">
-                      <a:solidFill>
-                        <a:schemeClr val="tx1"/>
-                      </a:solidFill>
-                      <a:prstDash val="solid"/>
-                      <a:round/>
-                      <a:headEnd type="none" w="med" len="med"/>
-                      <a:tailEnd type="none" w="med" len="med"/>
-                    </a:lnB>
-                    <a:solidFill>
-                      <a:schemeClr val="bg1"/>
-                    </a:solidFill>
-                  </a:tcPr>
-                </a:tc>
-                <a:tc>
-                  <a:txBody>
-                    <a:bodyPr/>
-                    <a:lstStyle/>
-                    <a:p>
-                      <a:r>
-                        <a:rPr kumimoji="1" lang="en-US" altLang="ja-JP" sz="1200">
-                          <a:latin typeface="Cascadia Code SemiBold" panose="020B0609020000020004" pitchFamily="49" charset="0"/>
-                          <a:ea typeface="Cascadia Code SemiBold" panose="020B0609020000020004" pitchFamily="49" charset="0"/>
-                          <a:cs typeface="Cascadia Code SemiBold" panose="020B0609020000020004" pitchFamily="49" charset="0"/>
-                        </a:rPr>
-                        <a:t>This JSON defines the criteria used for both initial prompt template generation and LLM-as-a-Judge evaluation.</a:t>
-                      </a:r>
-                    </a:p>
-                  </a:txBody>
-                  <a:tcPr marL="137160" marR="137160" marT="137160" marB="137160">
-                    <a:lnL w="12700" cap="flat" cmpd="sng" algn="ctr">
-                      <a:solidFill>
-                        <a:schemeClr val="tx1"/>
-                      </a:solidFill>
-                      <a:prstDash val="solid"/>
-                      <a:round/>
-                      <a:headEnd type="none" w="med" len="med"/>
-                      <a:tailEnd type="none" w="med" len="med"/>
-                    </a:lnL>
-                    <a:lnR w="12700" cap="flat" cmpd="sng" algn="ctr">
-                      <a:solidFill>
-                        <a:schemeClr val="tx1"/>
-                      </a:solidFill>
-                      <a:prstDash val="solid"/>
-                      <a:round/>
-                      <a:headEnd type="none" w="med" len="med"/>
-                      <a:tailEnd type="none" w="med" len="med"/>
-                    </a:lnR>
-                    <a:lnT w="12700" cap="flat" cmpd="sng" algn="ctr">
-                      <a:solidFill>
-                        <a:schemeClr val="tx1"/>
-                      </a:solidFill>
-                      <a:prstDash val="solid"/>
-                      <a:round/>
-                      <a:headEnd type="none" w="med" len="med"/>
-                      <a:tailEnd type="none" w="med" len="med"/>
-                    </a:lnT>
-                    <a:lnB w="12700" cap="flat" cmpd="sng" algn="ctr">
-                      <a:solidFill>
-                        <a:schemeClr val="tx1"/>
-                      </a:solidFill>
-                      <a:prstDash val="solid"/>
-                      <a:round/>
-                      <a:headEnd type="none" w="med" len="med"/>
-                      <a:tailEnd type="none" w="med" len="med"/>
-                    </a:lnB>
-                    <a:solidFill>
-                      <a:schemeClr val="bg1"/>
-                    </a:solidFill>
-                  </a:tcPr>
-                </a:tc>
-                <a:extLst>
-                  <a:ext uri="{0D108BD9-81ED-4DB2-BD59-A6C34878D82A}">
-                    <a16:rowId xmlns:a16="http://schemas.microsoft.com/office/drawing/2014/main" val="1707978084"/>
-                  </a:ext>
-                </a:extLst>
-              </a:tr>
-              <a:tr h="0">
-                <a:tc>
-                  <a:txBody>
-                    <a:bodyPr/>
-                    <a:lstStyle/>
-                    <a:p>
-                      <a:r>
-                        <a:rPr kumimoji="1" lang="en-US" altLang="ja-JP" sz="1200">
-                          <a:latin typeface="Cascadia Code SemiBold" panose="020B0609020000020004" pitchFamily="49" charset="0"/>
-                          <a:ea typeface="Cascadia Code SemiBold" panose="020B0609020000020004" pitchFamily="49" charset="0"/>
-                          <a:cs typeface="Cascadia Code SemiBold" panose="020B0609020000020004" pitchFamily="49" charset="0"/>
-                        </a:rPr>
-                        <a:t>source/*.txt</a:t>
-                      </a:r>
-                      <a:endParaRPr kumimoji="1" lang="ja-JP" altLang="en-US" sz="1200">
-                        <a:latin typeface="Cascadia Code SemiBold" panose="020B0609020000020004" pitchFamily="49" charset="0"/>
-                        <a:ea typeface="BIZ UDゴシック" panose="020B0400000000000000" pitchFamily="49" charset="-128"/>
-                        <a:cs typeface="Cascadia Code SemiBold" panose="020B0609020000020004" pitchFamily="49" charset="0"/>
-                      </a:endParaRPr>
-                    </a:p>
-                  </a:txBody>
-                  <a:tcPr marL="137160" marR="137160" marT="137160" marB="137160">
-                    <a:lnL w="12700" cap="flat" cmpd="sng" algn="ctr">
-                      <a:solidFill>
-                        <a:schemeClr val="tx1"/>
-                      </a:solidFill>
-                      <a:prstDash val="solid"/>
-                      <a:round/>
-                      <a:headEnd type="none" w="med" len="med"/>
-                      <a:tailEnd type="none" w="med" len="med"/>
-                    </a:lnL>
-                    <a:lnR w="12700" cap="flat" cmpd="sng" algn="ctr">
-                      <a:solidFill>
-                        <a:schemeClr val="tx1"/>
-                      </a:solidFill>
-                      <a:prstDash val="solid"/>
-                      <a:round/>
-                      <a:headEnd type="none" w="med" len="med"/>
-                      <a:tailEnd type="none" w="med" len="med"/>
-                    </a:lnR>
-                    <a:lnT w="12700" cap="flat" cmpd="sng" algn="ctr">
-                      <a:solidFill>
-                        <a:schemeClr val="tx1"/>
-                      </a:solidFill>
-                      <a:prstDash val="solid"/>
-                      <a:round/>
-                      <a:headEnd type="none" w="med" len="med"/>
-                      <a:tailEnd type="none" w="med" len="med"/>
-                    </a:lnT>
-                    <a:lnB w="12700" cap="flat" cmpd="sng" algn="ctr">
-                      <a:solidFill>
-                        <a:schemeClr val="tx1"/>
-                      </a:solidFill>
-                      <a:prstDash val="solid"/>
-                      <a:round/>
-                      <a:headEnd type="none" w="med" len="med"/>
-                      <a:tailEnd type="none" w="med" len="med"/>
-                    </a:lnB>
-                    <a:solidFill>
-                      <a:schemeClr val="bg1"/>
-                    </a:solidFill>
-                  </a:tcPr>
-                </a:tc>
-                <a:tc>
-                  <a:txBody>
-                    <a:bodyPr/>
-                    <a:lstStyle/>
-                    <a:p>
-                      <a:r>
-                        <a:rPr kumimoji="1" lang="en-US" altLang="ja-JP" sz="1200">
-                          <a:latin typeface="Cascadia Code SemiBold" panose="020B0609020000020004" pitchFamily="49" charset="0"/>
-                          <a:ea typeface="Cascadia Code SemiBold" panose="020B0609020000020004" pitchFamily="49" charset="0"/>
-                          <a:cs typeface="Cascadia Code SemiBold" panose="020B0609020000020004" pitchFamily="49" charset="0"/>
-                        </a:rPr>
-                        <a:t>This TXT file contains the original text.</a:t>
-                      </a:r>
-                    </a:p>
-                  </a:txBody>
-                  <a:tcPr marL="137160" marR="137160" marT="137160" marB="137160">
-                    <a:lnL w="12700" cap="flat" cmpd="sng" algn="ctr">
-                      <a:solidFill>
-                        <a:schemeClr val="tx1"/>
-                      </a:solidFill>
-                      <a:prstDash val="solid"/>
-                      <a:round/>
-                      <a:headEnd type="none" w="med" len="med"/>
-                      <a:tailEnd type="none" w="med" len="med"/>
-                    </a:lnL>
-                    <a:lnR w="12700" cap="flat" cmpd="sng" algn="ctr">
-                      <a:solidFill>
-                        <a:schemeClr val="tx1"/>
-                      </a:solidFill>
-                      <a:prstDash val="solid"/>
-                      <a:round/>
-                      <a:headEnd type="none" w="med" len="med"/>
-                      <a:tailEnd type="none" w="med" len="med"/>
-                    </a:lnR>
-                    <a:lnT w="12700" cap="flat" cmpd="sng" algn="ctr">
-                      <a:solidFill>
-                        <a:schemeClr val="tx1"/>
-                      </a:solidFill>
-                      <a:prstDash val="solid"/>
-                      <a:round/>
-                      <a:headEnd type="none" w="med" len="med"/>
-                      <a:tailEnd type="none" w="med" len="med"/>
-                    </a:lnT>
-                    <a:lnB w="12700" cap="flat" cmpd="sng" algn="ctr">
-                      <a:solidFill>
-                        <a:schemeClr val="tx1"/>
-                      </a:solidFill>
-                      <a:prstDash val="solid"/>
-                      <a:round/>
-                      <a:headEnd type="none" w="med" len="med"/>
-                      <a:tailEnd type="none" w="med" len="med"/>
-                    </a:lnB>
-                    <a:solidFill>
-                      <a:schemeClr val="bg1"/>
-                    </a:solidFill>
-                  </a:tcPr>
-                </a:tc>
-                <a:extLst>
-                  <a:ext uri="{0D108BD9-81ED-4DB2-BD59-A6C34878D82A}">
-                    <a16:rowId xmlns:a16="http://schemas.microsoft.com/office/drawing/2014/main" val="1262082791"/>
-                  </a:ext>
-                </a:extLst>
-              </a:tr>
-              <a:tr h="0">
-                <a:tc>
-                  <a:txBody>
-                    <a:bodyPr/>
-                    <a:lstStyle/>
-                    <a:p>
-                      <a:r>
-                        <a:rPr kumimoji="1" lang="en-US" altLang="ja-JP" sz="1200">
-                          <a:latin typeface="Cascadia Code SemiBold" panose="020B0609020000020004" pitchFamily="49" charset="0"/>
-                          <a:ea typeface="Cascadia Code SemiBold" panose="020B0609020000020004" pitchFamily="49" charset="0"/>
-                          <a:cs typeface="Cascadia Code SemiBold" panose="020B0609020000020004" pitchFamily="49" charset="0"/>
-                        </a:rPr>
-                        <a:t>work</a:t>
-                      </a:r>
-                      <a:endParaRPr kumimoji="1" lang="ja-JP" altLang="en-US" sz="1200">
-                        <a:latin typeface="Cascadia Code SemiBold" panose="020B0609020000020004" pitchFamily="49" charset="0"/>
-                        <a:ea typeface="BIZ UDゴシック" panose="020B0400000000000000" pitchFamily="49" charset="-128"/>
-                        <a:cs typeface="Cascadia Code SemiBold" panose="020B0609020000020004" pitchFamily="49" charset="0"/>
-                      </a:endParaRPr>
-                    </a:p>
-                  </a:txBody>
-                  <a:tcPr marL="137160" marR="137160" marT="137160" marB="137160">
-                    <a:lnL w="12700" cap="flat" cmpd="sng" algn="ctr">
-                      <a:solidFill>
-                        <a:schemeClr val="tx1"/>
-                      </a:solidFill>
-                      <a:prstDash val="solid"/>
-                      <a:round/>
-                      <a:headEnd type="none" w="med" len="med"/>
-                      <a:tailEnd type="none" w="med" len="med"/>
-                    </a:lnL>
-                    <a:lnR w="12700" cap="flat" cmpd="sng" algn="ctr">
-                      <a:solidFill>
-                        <a:schemeClr val="tx1"/>
-                      </a:solidFill>
-                      <a:prstDash val="solid"/>
-                      <a:round/>
-                      <a:headEnd type="none" w="med" len="med"/>
-                      <a:tailEnd type="none" w="med" len="med"/>
-                    </a:lnR>
-                    <a:lnT w="12700" cap="flat" cmpd="sng" algn="ctr">
-                      <a:solidFill>
-                        <a:schemeClr val="tx1"/>
-                      </a:solidFill>
-                      <a:prstDash val="solid"/>
-                      <a:round/>
-                      <a:headEnd type="none" w="med" len="med"/>
-                      <a:tailEnd type="none" w="med" len="med"/>
-                    </a:lnT>
-                    <a:lnB w="12700" cap="flat" cmpd="sng" algn="ctr">
-                      <a:solidFill>
-                        <a:schemeClr val="tx1"/>
-                      </a:solidFill>
-                      <a:prstDash val="solid"/>
-                      <a:round/>
-                      <a:headEnd type="none" w="med" len="med"/>
-                      <a:tailEnd type="none" w="med" len="med"/>
-                    </a:lnB>
-                    <a:solidFill>
-                      <a:schemeClr val="bg1"/>
-                    </a:solidFill>
-                  </a:tcPr>
-                </a:tc>
-                <a:tc>
-                  <a:txBody>
-                    <a:bodyPr/>
-                    <a:lstStyle/>
-                    <a:p>
-                      <a:r>
-                        <a:rPr kumimoji="1" lang="en-US" altLang="ja-JP" sz="1200">
-                          <a:latin typeface="Cascadia Code SemiBold" panose="020B0609020000020004" pitchFamily="49" charset="0"/>
-                          <a:ea typeface="Cascadia Code SemiBold" panose="020B0609020000020004" pitchFamily="49" charset="0"/>
-                          <a:cs typeface="Cascadia Code SemiBold" panose="020B0609020000020004" pitchFamily="49" charset="0"/>
-                        </a:rPr>
-                        <a:t>This directory contains generated outputs such as </a:t>
-                      </a:r>
-                      <a:r>
-                        <a:rPr kumimoji="1" lang="en-US" altLang="ja-JP" sz="1200" b="1" i="1">
-                          <a:solidFill>
-                            <a:srgbClr val="FF0000"/>
-                          </a:solidFill>
-                          <a:latin typeface="Cascadia Code SemiBold" panose="020B0609020000020004" pitchFamily="49" charset="0"/>
-                          <a:ea typeface="Cascadia Code SemiBold" panose="020B0609020000020004" pitchFamily="49" charset="0"/>
-                          <a:cs typeface="Cascadia Code SemiBold" panose="020B0609020000020004" pitchFamily="49" charset="0"/>
-                        </a:rPr>
-                        <a:t>*.01-prompt.txt</a:t>
-                      </a:r>
-                      <a:r>
-                        <a:rPr kumimoji="1" lang="en-US" altLang="ja-JP" sz="1200">
-                          <a:latin typeface="Cascadia Code SemiBold" panose="020B0609020000020004" pitchFamily="49" charset="0"/>
-                          <a:ea typeface="Cascadia Code SemiBold" panose="020B0609020000020004" pitchFamily="49" charset="0"/>
-                          <a:cs typeface="Cascadia Code SemiBold" panose="020B0609020000020004" pitchFamily="49" charset="0"/>
-                        </a:rPr>
-                        <a:t>, </a:t>
-                      </a:r>
-                      <a:r>
-                        <a:rPr kumimoji="1" lang="en-US" altLang="ja-JP" sz="1200" b="1" i="1">
-                          <a:solidFill>
-                            <a:srgbClr val="FF0000"/>
-                          </a:solidFill>
-                          <a:latin typeface="Cascadia Code SemiBold" panose="020B0609020000020004" pitchFamily="49" charset="0"/>
-                          <a:ea typeface="Cascadia Code SemiBold" panose="020B0609020000020004" pitchFamily="49" charset="0"/>
-                          <a:cs typeface="Cascadia Code SemiBold" panose="020B0609020000020004" pitchFamily="49" charset="0"/>
-                        </a:rPr>
-                        <a:t>*.02-generated.xlsx</a:t>
-                      </a:r>
-                      <a:r>
-                        <a:rPr kumimoji="1" lang="en-US" altLang="ja-JP" sz="1200">
-                          <a:latin typeface="Cascadia Code SemiBold" panose="020B0609020000020004" pitchFamily="49" charset="0"/>
-                          <a:ea typeface="Cascadia Code SemiBold" panose="020B0609020000020004" pitchFamily="49" charset="0"/>
-                          <a:cs typeface="Cascadia Code SemiBold" panose="020B0609020000020004" pitchFamily="49" charset="0"/>
-                        </a:rPr>
-                        <a:t>, </a:t>
-                      </a:r>
-                      <a:r>
-                        <a:rPr kumimoji="1" lang="en-US" altLang="ja-JP" sz="1200" b="1" i="1">
-                          <a:solidFill>
-                            <a:srgbClr val="FF0000"/>
-                          </a:solidFill>
-                          <a:latin typeface="Cascadia Code SemiBold" panose="020B0609020000020004" pitchFamily="49" charset="0"/>
-                          <a:ea typeface="Cascadia Code SemiBold" panose="020B0609020000020004" pitchFamily="49" charset="0"/>
-                          <a:cs typeface="Cascadia Code SemiBold" panose="020B0609020000020004" pitchFamily="49" charset="0"/>
-                        </a:rPr>
-                        <a:t>*.03-judged.xlsx</a:t>
-                      </a:r>
-                      <a:r>
-                        <a:rPr kumimoji="1" lang="en-US" altLang="ja-JP" sz="1200">
-                          <a:latin typeface="Cascadia Code SemiBold" panose="020B0609020000020004" pitchFamily="49" charset="0"/>
-                          <a:ea typeface="Cascadia Code SemiBold" panose="020B0609020000020004" pitchFamily="49" charset="0"/>
-                          <a:cs typeface="Cascadia Code SemiBold" panose="020B0609020000020004" pitchFamily="49" charset="0"/>
-                        </a:rPr>
-                        <a:t>, and </a:t>
-                      </a:r>
-                      <a:r>
-                        <a:rPr kumimoji="1" lang="en-US" altLang="ja-JP" sz="1200" b="1" i="1">
-                          <a:solidFill>
-                            <a:srgbClr val="FF0000"/>
-                          </a:solidFill>
-                          <a:latin typeface="Cascadia Code SemiBold" panose="020B0609020000020004" pitchFamily="49" charset="0"/>
-                          <a:ea typeface="Cascadia Code SemiBold" panose="020B0609020000020004" pitchFamily="49" charset="0"/>
-                          <a:cs typeface="Cascadia Code SemiBold" panose="020B0609020000020004" pitchFamily="49" charset="0"/>
-                        </a:rPr>
-                        <a:t>report.html</a:t>
-                      </a:r>
-                      <a:r>
-                        <a:rPr kumimoji="1" lang="en-US" altLang="ja-JP" sz="1200">
-                          <a:latin typeface="Cascadia Code SemiBold" panose="020B0609020000020004" pitchFamily="49" charset="0"/>
-                          <a:ea typeface="Cascadia Code SemiBold" panose="020B0609020000020004" pitchFamily="49" charset="0"/>
-                          <a:cs typeface="Cascadia Code SemiBold" panose="020B0609020000020004" pitchFamily="49" charset="0"/>
-                        </a:rPr>
-                        <a:t>.</a:t>
-                      </a:r>
-                    </a:p>
-                  </a:txBody>
-                  <a:tcPr marL="137160" marR="137160" marT="137160" marB="137160">
-                    <a:lnL w="12700" cap="flat" cmpd="sng" algn="ctr">
-                      <a:solidFill>
-                        <a:schemeClr val="tx1"/>
-                      </a:solidFill>
-                      <a:prstDash val="solid"/>
-                      <a:round/>
-                      <a:headEnd type="none" w="med" len="med"/>
-                      <a:tailEnd type="none" w="med" len="med"/>
-                    </a:lnL>
-                    <a:lnR w="12700" cap="flat" cmpd="sng" algn="ctr">
-                      <a:solidFill>
-                        <a:schemeClr val="tx1"/>
-                      </a:solidFill>
-                      <a:prstDash val="solid"/>
-                      <a:round/>
-                      <a:headEnd type="none" w="med" len="med"/>
-                      <a:tailEnd type="none" w="med" len="med"/>
-                    </a:lnR>
-                    <a:lnT w="12700" cap="flat" cmpd="sng" algn="ctr">
-                      <a:solidFill>
-                        <a:schemeClr val="tx1"/>
-                      </a:solidFill>
-                      <a:prstDash val="solid"/>
-                      <a:round/>
-                      <a:headEnd type="none" w="med" len="med"/>
-                      <a:tailEnd type="none" w="med" len="med"/>
-                    </a:lnT>
-                    <a:lnB w="12700" cap="flat" cmpd="sng" algn="ctr">
-                      <a:solidFill>
-                        <a:schemeClr val="tx1"/>
-                      </a:solidFill>
-                      <a:prstDash val="solid"/>
-                      <a:round/>
-                      <a:headEnd type="none" w="med" len="med"/>
-                      <a:tailEnd type="none" w="med" len="med"/>
-                    </a:lnB>
-                    <a:solidFill>
-                      <a:schemeClr val="bg1"/>
-                    </a:solidFill>
-                  </a:tcPr>
-                </a:tc>
-                <a:extLst>
-                  <a:ext uri="{0D108BD9-81ED-4DB2-BD59-A6C34878D82A}">
-                    <a16:rowId xmlns:a16="http://schemas.microsoft.com/office/drawing/2014/main" val="3804432217"/>
-                  </a:ext>
-                </a:extLst>
-              </a:tr>
-            </a:tbl>
-          </a:graphicData>
-        </a:graphic>
-      </p:graphicFrame>
-    </p:spTree>
-    <p:extLst>
-      <p:ext uri="{BB962C8B-B14F-4D97-AF65-F5344CB8AC3E}">
-        <p14:creationId xmlns:p14="http://schemas.microsoft.com/office/powerpoint/2010/main" val="2565649066"/>
-      </p:ext>
-    </p:extLst>
-  </p:cSld>
-  <p:clrMapOvr>
-    <a:masterClrMapping/>
-  </p:clrMapOvr>
-</p:sldLayout>
-</file>
-
-<file path=ppt/slideLayouts/slideLayout4.xml><?xml version="1.0" encoding="utf-8"?>
-<p:sldLayout xmlns:a="http://schemas.openxmlformats.org/drawingml/2006/main" xmlns:r="http://schemas.openxmlformats.org/officeDocument/2006/relationships" xmlns:p="http://schemas.openxmlformats.org/presentationml/2006/main" preserve="1" userDrawn="1">
-  <p:cSld name="4_ユーザー設定レイアウト">
-    <p:spTree>
-      <p:nvGrpSpPr>
-        <p:cNvPr id="1" name=""/>
-        <p:cNvGrpSpPr/>
-        <p:nvPr/>
-      </p:nvGrpSpPr>
-      <p:grpSpPr>
-        <a:xfrm>
-          <a:off x="0" y="0"/>
-          <a:ext cx="0" cy="0"/>
-          <a:chOff x="0" y="0"/>
-          <a:chExt cx="0" cy="0"/>
-        </a:xfrm>
-      </p:grpSpPr>
-      <p:graphicFrame>
-        <p:nvGraphicFramePr>
-          <p:cNvPr id="3" name="表 2">
-            <a:extLst>
-              <a:ext uri="{FF2B5EF4-FFF2-40B4-BE49-F238E27FC236}">
-                <a16:creationId xmlns:a16="http://schemas.microsoft.com/office/drawing/2014/main" id="{EA636EB6-EB77-40C9-E45F-E03223F67DB1}"/>
-              </a:ext>
-            </a:extLst>
-          </p:cNvPr>
-          <p:cNvGraphicFramePr>
-            <a:graphicFrameLocks noGrp="1"/>
-          </p:cNvGraphicFramePr>
-          <p:nvPr userDrawn="1">
-            <p:extLst>
-              <p:ext uri="{D42A27DB-BD31-4B8C-83A1-F6EECF244321}">
-                <p14:modId xmlns:p14="http://schemas.microsoft.com/office/powerpoint/2010/main" val="2814276960"/>
-              </p:ext>
-            </p:extLst>
-          </p:nvPr>
-        </p:nvGraphicFramePr>
-        <p:xfrm>
-          <a:off x="765629" y="868680"/>
-          <a:ext cx="10660742" cy="5120640"/>
+          <a:off x="765629" y="548640"/>
+          <a:ext cx="10660742" cy="5760720"/>
         </p:xfrm>
         <a:graphic>
           <a:graphicData uri="http://schemas.openxmlformats.org/drawingml/2006/table">
@@ -4556,6 +2737,204 @@
                           <a:ea typeface="Cascadia Code SemiBold" panose="020B0609020000020004" pitchFamily="49" charset="0"/>
                           <a:cs typeface="Cascadia Code SemiBold" panose="020B0609020000020004" pitchFamily="49" charset="0"/>
                         </a:rPr>
+                        <a:t>supports/llmj-feedback.py</a:t>
+                      </a:r>
+                      <a:endParaRPr kumimoji="1" lang="ja-JP" altLang="en-US" sz="1200">
+                        <a:latin typeface="Cascadia Code SemiBold" panose="020B0609020000020004" pitchFamily="49" charset="0"/>
+                        <a:ea typeface="BIZ UDゴシック" panose="020B0400000000000000" pitchFamily="49" charset="-128"/>
+                        <a:cs typeface="Cascadia Code SemiBold" panose="020B0609020000020004" pitchFamily="49" charset="0"/>
+                      </a:endParaRPr>
+                    </a:p>
+                  </a:txBody>
+                  <a:tcPr marL="137160" marR="137160" marT="137160" marB="137160">
+                    <a:lnL w="12700" cap="flat" cmpd="sng" algn="ctr">
+                      <a:solidFill>
+                        <a:schemeClr val="tx1"/>
+                      </a:solidFill>
+                      <a:prstDash val="solid"/>
+                      <a:round/>
+                      <a:headEnd type="none" w="med" len="med"/>
+                      <a:tailEnd type="none" w="med" len="med"/>
+                    </a:lnL>
+                    <a:lnR w="12700" cap="flat" cmpd="sng" algn="ctr">
+                      <a:solidFill>
+                        <a:schemeClr val="tx1"/>
+                      </a:solidFill>
+                      <a:prstDash val="solid"/>
+                      <a:round/>
+                      <a:headEnd type="none" w="med" len="med"/>
+                      <a:tailEnd type="none" w="med" len="med"/>
+                    </a:lnR>
+                    <a:lnT w="12700" cap="flat" cmpd="sng" algn="ctr">
+                      <a:solidFill>
+                        <a:schemeClr val="tx1"/>
+                      </a:solidFill>
+                      <a:prstDash val="solid"/>
+                      <a:round/>
+                      <a:headEnd type="none" w="med" len="med"/>
+                      <a:tailEnd type="none" w="med" len="med"/>
+                    </a:lnT>
+                    <a:lnB w="12700" cap="flat" cmpd="sng" algn="ctr">
+                      <a:solidFill>
+                        <a:schemeClr val="tx1"/>
+                      </a:solidFill>
+                      <a:prstDash val="solid"/>
+                      <a:round/>
+                      <a:headEnd type="none" w="med" len="med"/>
+                      <a:tailEnd type="none" w="med" len="med"/>
+                    </a:lnB>
+                    <a:solidFill>
+                      <a:schemeClr val="bg1"/>
+                    </a:solidFill>
+                  </a:tcPr>
+                </a:tc>
+                <a:tc>
+                  <a:txBody>
+                    <a:bodyPr/>
+                    <a:lstStyle/>
+                    <a:p>
+                      <a:pPr marL="0" marR="0" lvl="0" indent="0" algn="l" defTabSz="914400" rtl="0" eaLnBrk="1" fontAlgn="auto" latinLnBrk="0" hangingPunct="1">
+                        <a:lnSpc>
+                          <a:spcPct val="100000"/>
+                        </a:lnSpc>
+                        <a:spcBef>
+                          <a:spcPts val="0"/>
+                        </a:spcBef>
+                        <a:spcAft>
+                          <a:spcPts val="0"/>
+                        </a:spcAft>
+                        <a:buClrTx/>
+                        <a:buSzTx/>
+                        <a:buFontTx/>
+                        <a:buNone/>
+                        <a:tabLst/>
+                        <a:defRPr/>
+                      </a:pPr>
+                      <a:r>
+                        <a:rPr kumimoji="1" lang="en-US" altLang="ja-JP" sz="1200">
+                          <a:latin typeface="Cascadia Code SemiBold" panose="020B0609020000020004" pitchFamily="49" charset="0"/>
+                          <a:ea typeface="Cascadia Code SemiBold" panose="020B0609020000020004" pitchFamily="49" charset="0"/>
+                          <a:cs typeface="Cascadia Code SemiBold" panose="020B0609020000020004" pitchFamily="49" charset="0"/>
+                        </a:rPr>
+                        <a:t>This SCRIPT provides improvement suggestions for the </a:t>
+                      </a:r>
+                      <a:r>
+                        <a:rPr kumimoji="1" lang="en-US" altLang="ja-JP" sz="1200" b="1" i="1">
+                          <a:solidFill>
+                            <a:srgbClr val="FF0000"/>
+                          </a:solidFill>
+                          <a:latin typeface="Cascadia Code SemiBold" panose="020B0609020000020004" pitchFamily="49" charset="0"/>
+                          <a:ea typeface="Cascadia Code SemiBold" panose="020B0609020000020004" pitchFamily="49" charset="0"/>
+                          <a:cs typeface="Cascadia Code SemiBold" panose="020B0609020000020004" pitchFamily="49" charset="0"/>
+                        </a:rPr>
+                        <a:t>rubric/*.json</a:t>
+                      </a:r>
+                      <a:r>
+                        <a:rPr kumimoji="1" lang="en-US" altLang="ja-JP" sz="1200">
+                          <a:latin typeface="Cascadia Code SemiBold" panose="020B0609020000020004" pitchFamily="49" charset="0"/>
+                          <a:ea typeface="Cascadia Code SemiBold" panose="020B0609020000020004" pitchFamily="49" charset="0"/>
+                          <a:cs typeface="Cascadia Code SemiBold" panose="020B0609020000020004" pitchFamily="49" charset="0"/>
+                        </a:rPr>
+                        <a:t> or for specific gold data in </a:t>
+                      </a:r>
+                      <a:r>
+                        <a:rPr kumimoji="1" lang="en-US" altLang="ja-JP" sz="1200" b="1" i="1">
+                          <a:solidFill>
+                            <a:srgbClr val="FF0000"/>
+                          </a:solidFill>
+                          <a:latin typeface="Cascadia Code SemiBold" panose="020B0609020000020004" pitchFamily="49" charset="0"/>
+                          <a:ea typeface="Cascadia Code SemiBold" panose="020B0609020000020004" pitchFamily="49" charset="0"/>
+                          <a:cs typeface="Cascadia Code SemiBold" panose="020B0609020000020004" pitchFamily="49" charset="0"/>
+                        </a:rPr>
+                        <a:t>work/*.xlsx </a:t>
+                      </a:r>
+                      <a:r>
+                        <a:rPr kumimoji="1" lang="en-US" altLang="ja-JP" sz="1200">
+                          <a:latin typeface="Cascadia Code SemiBold" panose="020B0609020000020004" pitchFamily="49" charset="0"/>
+                          <a:ea typeface="Cascadia Code SemiBold" panose="020B0609020000020004" pitchFamily="49" charset="0"/>
+                          <a:cs typeface="Cascadia Code SemiBold" panose="020B0609020000020004" pitchFamily="49" charset="0"/>
+                        </a:rPr>
+                        <a:t>based on the evaluation results of the gold data.</a:t>
+                      </a:r>
+                    </a:p>
+                  </a:txBody>
+                  <a:tcPr marL="137160" marR="137160" marT="137160" marB="137160">
+                    <a:lnL w="12700" cap="flat" cmpd="sng" algn="ctr">
+                      <a:solidFill>
+                        <a:schemeClr val="tx1"/>
+                      </a:solidFill>
+                      <a:prstDash val="solid"/>
+                      <a:round/>
+                      <a:headEnd type="none" w="med" len="med"/>
+                      <a:tailEnd type="none" w="med" len="med"/>
+                    </a:lnL>
+                    <a:lnR w="12700" cap="flat" cmpd="sng" algn="ctr">
+                      <a:solidFill>
+                        <a:schemeClr val="tx1"/>
+                      </a:solidFill>
+                      <a:prstDash val="solid"/>
+                      <a:round/>
+                      <a:headEnd type="none" w="med" len="med"/>
+                      <a:tailEnd type="none" w="med" len="med"/>
+                    </a:lnR>
+                    <a:lnT w="12700" cap="flat" cmpd="sng" algn="ctr">
+                      <a:solidFill>
+                        <a:schemeClr val="tx1"/>
+                      </a:solidFill>
+                      <a:prstDash val="solid"/>
+                      <a:round/>
+                      <a:headEnd type="none" w="med" len="med"/>
+                      <a:tailEnd type="none" w="med" len="med"/>
+                    </a:lnT>
+                    <a:lnB w="12700" cap="flat" cmpd="sng" algn="ctr">
+                      <a:solidFill>
+                        <a:schemeClr val="tx1"/>
+                      </a:solidFill>
+                      <a:prstDash val="solid"/>
+                      <a:round/>
+                      <a:headEnd type="none" w="med" len="med"/>
+                      <a:tailEnd type="none" w="med" len="med"/>
+                    </a:lnB>
+                    <a:solidFill>
+                      <a:schemeClr val="bg1"/>
+                    </a:solidFill>
+                  </a:tcPr>
+                </a:tc>
+                <a:extLst>
+                  <a:ext uri="{0D108BD9-81ED-4DB2-BD59-A6C34878D82A}">
+                    <a16:rowId xmlns:a16="http://schemas.microsoft.com/office/drawing/2014/main" val="65308053"/>
+                  </a:ext>
+                </a:extLst>
+              </a:tr>
+              <a:tr h="0">
+                <a:tc>
+                  <a:txBody>
+                    <a:bodyPr/>
+                    <a:lstStyle/>
+                    <a:p>
+                      <a:pPr marL="0" marR="0" lvl="0" indent="0" algn="l" defTabSz="914400" rtl="0" eaLnBrk="1" fontAlgn="auto" latinLnBrk="0" hangingPunct="1">
+                        <a:lnSpc>
+                          <a:spcPct val="100000"/>
+                        </a:lnSpc>
+                        <a:spcBef>
+                          <a:spcPts val="0"/>
+                        </a:spcBef>
+                        <a:spcAft>
+                          <a:spcPts val="0"/>
+                        </a:spcAft>
+                        <a:buClrTx/>
+                        <a:buSzTx/>
+                        <a:buFontTx/>
+                        <a:buNone/>
+                        <a:tabLst/>
+                        <a:defRPr/>
+                      </a:pPr>
+                      <a:r>
+                        <a:rPr kumimoji="1" lang="en-US" altLang="ja-JP" sz="1200">
+                          <a:latin typeface="Cascadia Code SemiBold" panose="020B0609020000020004" pitchFamily="49" charset="0"/>
+                          <a:ea typeface="Cascadia Code SemiBold" panose="020B0609020000020004" pitchFamily="49" charset="0"/>
+                          <a:cs typeface="Cascadia Code SemiBold" panose="020B0609020000020004" pitchFamily="49" charset="0"/>
+                        </a:rPr>
                         <a:t>supports/template-*</a:t>
                       </a:r>
                       <a:endParaRPr kumimoji="1" lang="ja-JP" altLang="en-US" sz="1200">
@@ -4879,7 +3258,7 @@
     </p:spTree>
     <p:extLst>
       <p:ext uri="{BB962C8B-B14F-4D97-AF65-F5344CB8AC3E}">
-        <p14:creationId xmlns:p14="http://schemas.microsoft.com/office/powerpoint/2010/main" val="1133861260"/>
+        <p14:creationId xmlns:p14="http://schemas.microsoft.com/office/powerpoint/2010/main" val="1222773587"/>
       </p:ext>
     </p:extLst>
   </p:cSld>
@@ -4889,7 +3268,7 @@
 </p:sldLayout>
 </file>
 
-<file path=ppt/slideLayouts/slideLayout5.xml><?xml version="1.0" encoding="utf-8"?>
+<file path=ppt/slideLayouts/slideLayout4.xml><?xml version="1.0" encoding="utf-8"?>
 <p:sldLayout xmlns:a="http://schemas.openxmlformats.org/drawingml/2006/main" xmlns:r="http://schemas.openxmlformats.org/officeDocument/2006/relationships" xmlns:p="http://schemas.openxmlformats.org/presentationml/2006/main" preserve="1" userDrawn="1">
   <p:cSld name="1_ユーザー設定レイアウト">
     <p:spTree>
@@ -11218,7 +9597,7 @@
 </p:sldLayout>
 </file>
 
-<file path=ppt/slideLayouts/slideLayout6.xml><?xml version="1.0" encoding="utf-8"?>
+<file path=ppt/slideLayouts/slideLayout5.xml><?xml version="1.0" encoding="utf-8"?>
 <p:sldLayout xmlns:a="http://schemas.openxmlformats.org/drawingml/2006/main" xmlns:r="http://schemas.openxmlformats.org/officeDocument/2006/relationships" xmlns:p="http://schemas.openxmlformats.org/presentationml/2006/main" preserve="1" userDrawn="1">
   <p:cSld name="2_ユーザー設定レイアウト">
     <p:spTree>
@@ -17238,10 +15617,9 @@
   <p:sldLayoutIdLst>
     <p:sldLayoutId id="2147483649" r:id="rId1"/>
     <p:sldLayoutId id="2147483650" r:id="rId2"/>
-    <p:sldLayoutId id="2147483653" r:id="rId3"/>
-    <p:sldLayoutId id="2147483654" r:id="rId4"/>
-    <p:sldLayoutId id="2147483651" r:id="rId5"/>
-    <p:sldLayoutId id="2147483652" r:id="rId6"/>
+    <p:sldLayoutId id="2147483655" r:id="rId3"/>
+    <p:sldLayoutId id="2147483651" r:id="rId4"/>
+    <p:sldLayoutId id="2147483652" r:id="rId5"/>
   </p:sldLayoutIdLst>
   <p:txStyles>
     <p:titleStyle>
@@ -17778,7 +16156,7 @@
         <p:cNvPr id="1" name="">
           <a:extLst>
             <a:ext uri="{FF2B5EF4-FFF2-40B4-BE49-F238E27FC236}">
-              <a16:creationId xmlns:a16="http://schemas.microsoft.com/office/drawing/2014/main" id="{097EBBFE-81F6-8DA4-B3BF-6606FED8754E}"/>
+              <a16:creationId xmlns:a16="http://schemas.microsoft.com/office/drawing/2014/main" id="{D7399D49-133A-63AE-ABB1-CCB23C492EC9}"/>
             </a:ext>
           </a:extLst>
         </p:cNvPr>
@@ -17798,7 +16176,7 @@
           <p:cNvPr id="4" name="フリーフォーム: 図形 3">
             <a:extLst>
               <a:ext uri="{FF2B5EF4-FFF2-40B4-BE49-F238E27FC236}">
-                <a16:creationId xmlns:a16="http://schemas.microsoft.com/office/drawing/2014/main" id="{2C2F29D6-4FE5-FB49-F635-6983E5B302C3}"/>
+                <a16:creationId xmlns:a16="http://schemas.microsoft.com/office/drawing/2014/main" id="{88B09063-1D45-B16A-583E-9A4535C9F761}"/>
               </a:ext>
             </a:extLst>
           </p:cNvPr>
@@ -17813,14 +16191,14 @@
           <a:custGeom>
             <a:avLst/>
             <a:gdLst>
-              <a:gd name="csX0" fmla="*/ 769257 w 12192000"/>
-              <a:gd name="csY0" fmla="*/ 2242457 h 6858000"/>
-              <a:gd name="csX1" fmla="*/ 769257 w 12192000"/>
-              <a:gd name="csY1" fmla="*/ 2692400 h 6858000"/>
-              <a:gd name="csX2" fmla="*/ 11422743 w 12192000"/>
-              <a:gd name="csY2" fmla="*/ 2692400 h 6858000"/>
-              <a:gd name="csX3" fmla="*/ 11422743 w 12192000"/>
-              <a:gd name="csY3" fmla="*/ 2242457 h 6858000"/>
+              <a:gd name="csX0" fmla="*/ 765544 w 12192000"/>
+              <a:gd name="csY0" fmla="*/ 1924494 h 6858000"/>
+              <a:gd name="csX1" fmla="*/ 765544 w 12192000"/>
+              <a:gd name="csY1" fmla="*/ 2381693 h 6858000"/>
+              <a:gd name="csX2" fmla="*/ 11419367 w 12192000"/>
+              <a:gd name="csY2" fmla="*/ 2381693 h 6858000"/>
+              <a:gd name="csX3" fmla="*/ 11419367 w 12192000"/>
+              <a:gd name="csY3" fmla="*/ 1924494 h 6858000"/>
               <a:gd name="csX4" fmla="*/ 0 w 12192000"/>
               <a:gd name="csY4" fmla="*/ 0 h 6858000"/>
               <a:gd name="csX5" fmla="*/ 12192000 w 12192000"/>
@@ -17861,16 +16239,16 @@
             <a:pathLst>
               <a:path w="12192000" h="6858000">
                 <a:moveTo>
-                  <a:pt x="769257" y="2242457"/>
+                  <a:pt x="765544" y="1924494"/>
                 </a:moveTo>
                 <a:lnTo>
-                  <a:pt x="769257" y="2692400"/>
+                  <a:pt x="765544" y="2381693"/>
                 </a:lnTo>
                 <a:lnTo>
-                  <a:pt x="11422743" y="2692400"/>
+                  <a:pt x="11419367" y="2381693"/>
                 </a:lnTo>
                 <a:lnTo>
-                  <a:pt x="11422743" y="2242457"/>
+                  <a:pt x="11419367" y="1924494"/>
                 </a:lnTo>
                 <a:close/>
                 <a:moveTo>
@@ -17928,7 +16306,7 @@
     </p:spTree>
     <p:extLst>
       <p:ext uri="{BB962C8B-B14F-4D97-AF65-F5344CB8AC3E}">
-        <p14:creationId xmlns:p14="http://schemas.microsoft.com/office/powerpoint/2010/main" val="856209537"/>
+        <p14:creationId xmlns:p14="http://schemas.microsoft.com/office/powerpoint/2010/main" val="1548012816"/>
       </p:ext>
     </p:extLst>
   </p:cSld>
@@ -18314,7 +16692,7 @@
         <p:cNvPr id="1" name="">
           <a:extLst>
             <a:ext uri="{FF2B5EF4-FFF2-40B4-BE49-F238E27FC236}">
-              <a16:creationId xmlns:a16="http://schemas.microsoft.com/office/drawing/2014/main" id="{2478EFC9-F590-DF86-538F-C3B5075DC253}"/>
+              <a16:creationId xmlns:a16="http://schemas.microsoft.com/office/drawing/2014/main" id="{47C13274-3203-7DEF-1674-1EC08116D525}"/>
             </a:ext>
           </a:extLst>
         </p:cNvPr>
@@ -18334,7 +16712,7 @@
           <p:cNvPr id="4" name="フリーフォーム: 図形 3">
             <a:extLst>
               <a:ext uri="{FF2B5EF4-FFF2-40B4-BE49-F238E27FC236}">
-                <a16:creationId xmlns:a16="http://schemas.microsoft.com/office/drawing/2014/main" id="{F4D62485-0B0F-8EE7-8B42-CCA7C7EE9BA4}"/>
+                <a16:creationId xmlns:a16="http://schemas.microsoft.com/office/drawing/2014/main" id="{3E00A912-91C5-A11E-BDEC-FAD4B45A7AE1}"/>
               </a:ext>
             </a:extLst>
           </p:cNvPr>
@@ -18349,14 +16727,14 @@
           <a:custGeom>
             <a:avLst/>
             <a:gdLst>
-              <a:gd name="csX0" fmla="*/ 769257 w 12192000"/>
-              <a:gd name="csY0" fmla="*/ 2692400 h 6858000"/>
-              <a:gd name="csX1" fmla="*/ 769257 w 12192000"/>
-              <a:gd name="csY1" fmla="*/ 3331029 h 6858000"/>
-              <a:gd name="csX2" fmla="*/ 11422743 w 12192000"/>
-              <a:gd name="csY2" fmla="*/ 3331029 h 6858000"/>
-              <a:gd name="csX3" fmla="*/ 11422743 w 12192000"/>
-              <a:gd name="csY3" fmla="*/ 2692400 h 6858000"/>
+              <a:gd name="csX0" fmla="*/ 765544 w 12192000"/>
+              <a:gd name="csY0" fmla="*/ 2371062 h 6858000"/>
+              <a:gd name="csX1" fmla="*/ 765544 w 12192000"/>
+              <a:gd name="csY1" fmla="*/ 3030279 h 6858000"/>
+              <a:gd name="csX2" fmla="*/ 11419367 w 12192000"/>
+              <a:gd name="csY2" fmla="*/ 3030279 h 6858000"/>
+              <a:gd name="csX3" fmla="*/ 11419367 w 12192000"/>
+              <a:gd name="csY3" fmla="*/ 2371062 h 6858000"/>
               <a:gd name="csX4" fmla="*/ 0 w 12192000"/>
               <a:gd name="csY4" fmla="*/ 0 h 6858000"/>
               <a:gd name="csX5" fmla="*/ 12192000 w 12192000"/>
@@ -18397,16 +16775,16 @@
             <a:pathLst>
               <a:path w="12192000" h="6858000">
                 <a:moveTo>
-                  <a:pt x="769257" y="2692400"/>
+                  <a:pt x="765544" y="2371062"/>
                 </a:moveTo>
                 <a:lnTo>
-                  <a:pt x="769257" y="3331029"/>
+                  <a:pt x="765544" y="3030279"/>
                 </a:lnTo>
                 <a:lnTo>
-                  <a:pt x="11422743" y="3331029"/>
+                  <a:pt x="11419367" y="3030279"/>
                 </a:lnTo>
                 <a:lnTo>
-                  <a:pt x="11422743" y="2692400"/>
+                  <a:pt x="11419367" y="2371062"/>
                 </a:lnTo>
                 <a:close/>
                 <a:moveTo>
@@ -18464,7 +16842,7 @@
     </p:spTree>
     <p:extLst>
       <p:ext uri="{BB962C8B-B14F-4D97-AF65-F5344CB8AC3E}">
-        <p14:creationId xmlns:p14="http://schemas.microsoft.com/office/powerpoint/2010/main" val="2382986504"/>
+        <p14:creationId xmlns:p14="http://schemas.microsoft.com/office/powerpoint/2010/main" val="3534174898"/>
       </p:ext>
     </p:extLst>
   </p:cSld>
@@ -18572,7 +16950,7 @@
     </p:spTree>
     <p:extLst>
       <p:ext uri="{BB962C8B-B14F-4D97-AF65-F5344CB8AC3E}">
-        <p14:creationId xmlns:p14="http://schemas.microsoft.com/office/powerpoint/2010/main" val="3275880371"/>
+        <p14:creationId xmlns:p14="http://schemas.microsoft.com/office/powerpoint/2010/main" val="1408041"/>
       </p:ext>
     </p:extLst>
   </p:cSld>
@@ -18804,7 +17182,7 @@
         <p:cNvPr id="1" name="">
           <a:extLst>
             <a:ext uri="{FF2B5EF4-FFF2-40B4-BE49-F238E27FC236}">
-              <a16:creationId xmlns:a16="http://schemas.microsoft.com/office/drawing/2014/main" id="{4090C826-6139-AFB3-838F-43B79127378A}"/>
+              <a16:creationId xmlns:a16="http://schemas.microsoft.com/office/drawing/2014/main" id="{DEB231A8-A91E-7BC3-5EF9-25E85C0A8FCB}"/>
             </a:ext>
           </a:extLst>
         </p:cNvPr>
@@ -18824,7 +17202,7 @@
           <p:cNvPr id="4" name="フリーフォーム: 図形 3">
             <a:extLst>
               <a:ext uri="{FF2B5EF4-FFF2-40B4-BE49-F238E27FC236}">
-                <a16:creationId xmlns:a16="http://schemas.microsoft.com/office/drawing/2014/main" id="{7E219001-2B10-031A-D425-3707A45453FE}"/>
+                <a16:creationId xmlns:a16="http://schemas.microsoft.com/office/drawing/2014/main" id="{FC19F8D0-8B9E-85F9-DD59-D9898AC3559A}"/>
               </a:ext>
             </a:extLst>
           </p:cNvPr>
@@ -18839,14 +17217,14 @@
           <a:custGeom>
             <a:avLst/>
             <a:gdLst>
-              <a:gd name="csX0" fmla="*/ 754743 w 12192000"/>
-              <a:gd name="csY0" fmla="*/ 3331029 h 6858000"/>
-              <a:gd name="csX1" fmla="*/ 754743 w 12192000"/>
-              <a:gd name="csY1" fmla="*/ 3969657 h 6858000"/>
-              <a:gd name="csX2" fmla="*/ 11408229 w 12192000"/>
-              <a:gd name="csY2" fmla="*/ 3969657 h 6858000"/>
-              <a:gd name="csX3" fmla="*/ 11408229 w 12192000"/>
-              <a:gd name="csY3" fmla="*/ 3331029 h 6858000"/>
+              <a:gd name="csX0" fmla="*/ 765544 w 12192000"/>
+              <a:gd name="csY0" fmla="*/ 3019647 h 6858000"/>
+              <a:gd name="csX1" fmla="*/ 765544 w 12192000"/>
+              <a:gd name="csY1" fmla="*/ 3657600 h 6858000"/>
+              <a:gd name="csX2" fmla="*/ 11419367 w 12192000"/>
+              <a:gd name="csY2" fmla="*/ 3657600 h 6858000"/>
+              <a:gd name="csX3" fmla="*/ 11419367 w 12192000"/>
+              <a:gd name="csY3" fmla="*/ 3019647 h 6858000"/>
               <a:gd name="csX4" fmla="*/ 0 w 12192000"/>
               <a:gd name="csY4" fmla="*/ 0 h 6858000"/>
               <a:gd name="csX5" fmla="*/ 12192000 w 12192000"/>
@@ -18887,16 +17265,16 @@
             <a:pathLst>
               <a:path w="12192000" h="6858000">
                 <a:moveTo>
-                  <a:pt x="754743" y="3331029"/>
+                  <a:pt x="765544" y="3019647"/>
                 </a:moveTo>
                 <a:lnTo>
-                  <a:pt x="754743" y="3969657"/>
+                  <a:pt x="765544" y="3657600"/>
                 </a:lnTo>
                 <a:lnTo>
-                  <a:pt x="11408229" y="3969657"/>
+                  <a:pt x="11419367" y="3657600"/>
                 </a:lnTo>
                 <a:lnTo>
-                  <a:pt x="11408229" y="3331029"/>
+                  <a:pt x="11419367" y="3019647"/>
                 </a:lnTo>
                 <a:close/>
                 <a:moveTo>
@@ -18954,7 +17332,7 @@
     </p:spTree>
     <p:extLst>
       <p:ext uri="{BB962C8B-B14F-4D97-AF65-F5344CB8AC3E}">
-        <p14:creationId xmlns:p14="http://schemas.microsoft.com/office/powerpoint/2010/main" val="3068836680"/>
+        <p14:creationId xmlns:p14="http://schemas.microsoft.com/office/powerpoint/2010/main" val="2943879215"/>
       </p:ext>
     </p:extLst>
   </p:cSld>
@@ -19156,7 +17534,7 @@
         <p:cNvPr id="1" name="">
           <a:extLst>
             <a:ext uri="{FF2B5EF4-FFF2-40B4-BE49-F238E27FC236}">
-              <a16:creationId xmlns:a16="http://schemas.microsoft.com/office/drawing/2014/main" id="{8B64FDA8-7F14-2376-B367-D99DBD479BBE}"/>
+              <a16:creationId xmlns:a16="http://schemas.microsoft.com/office/drawing/2014/main" id="{BAAB7060-C4C4-5649-AC56-B16E03F6BE0B}"/>
             </a:ext>
           </a:extLst>
         </p:cNvPr>
@@ -19176,7 +17554,7 @@
           <p:cNvPr id="4" name="フリーフォーム: 図形 3">
             <a:extLst>
               <a:ext uri="{FF2B5EF4-FFF2-40B4-BE49-F238E27FC236}">
-                <a16:creationId xmlns:a16="http://schemas.microsoft.com/office/drawing/2014/main" id="{AE9F8A76-22A4-80CE-BF30-DCB6AA218F75}"/>
+                <a16:creationId xmlns:a16="http://schemas.microsoft.com/office/drawing/2014/main" id="{ED69591E-0D0B-7A37-63E3-3A65A0A8FB3A}"/>
               </a:ext>
             </a:extLst>
           </p:cNvPr>
@@ -19191,14 +17569,14 @@
           <a:custGeom>
             <a:avLst/>
             <a:gdLst>
-              <a:gd name="csX0" fmla="*/ 754743 w 12192000"/>
-              <a:gd name="csY0" fmla="*/ 4434115 h 6858000"/>
-              <a:gd name="csX1" fmla="*/ 754743 w 12192000"/>
-              <a:gd name="csY1" fmla="*/ 5072743 h 6858000"/>
-              <a:gd name="csX2" fmla="*/ 11408229 w 12192000"/>
-              <a:gd name="csY2" fmla="*/ 5072743 h 6858000"/>
-              <a:gd name="csX3" fmla="*/ 11408229 w 12192000"/>
-              <a:gd name="csY3" fmla="*/ 4434115 h 6858000"/>
+              <a:gd name="csX0" fmla="*/ 765544 w 12192000"/>
+              <a:gd name="csY0" fmla="*/ 4125433 h 6858000"/>
+              <a:gd name="csX1" fmla="*/ 765544 w 12192000"/>
+              <a:gd name="csY1" fmla="*/ 4763386 h 6858000"/>
+              <a:gd name="csX2" fmla="*/ 11419367 w 12192000"/>
+              <a:gd name="csY2" fmla="*/ 4763386 h 6858000"/>
+              <a:gd name="csX3" fmla="*/ 11419367 w 12192000"/>
+              <a:gd name="csY3" fmla="*/ 4125433 h 6858000"/>
               <a:gd name="csX4" fmla="*/ 0 w 12192000"/>
               <a:gd name="csY4" fmla="*/ 0 h 6858000"/>
               <a:gd name="csX5" fmla="*/ 12192000 w 12192000"/>
@@ -19239,16 +17617,16 @@
             <a:pathLst>
               <a:path w="12192000" h="6858000">
                 <a:moveTo>
-                  <a:pt x="754743" y="4434115"/>
+                  <a:pt x="765544" y="4125433"/>
                 </a:moveTo>
                 <a:lnTo>
-                  <a:pt x="754743" y="5072743"/>
+                  <a:pt x="765544" y="4763386"/>
                 </a:lnTo>
                 <a:lnTo>
-                  <a:pt x="11408229" y="5072743"/>
+                  <a:pt x="11419367" y="4763386"/>
                 </a:lnTo>
                 <a:lnTo>
-                  <a:pt x="11408229" y="4434115"/>
+                  <a:pt x="11419367" y="4125433"/>
                 </a:lnTo>
                 <a:close/>
                 <a:moveTo>
@@ -19306,7 +17684,7 @@
     </p:spTree>
     <p:extLst>
       <p:ext uri="{BB962C8B-B14F-4D97-AF65-F5344CB8AC3E}">
-        <p14:creationId xmlns:p14="http://schemas.microsoft.com/office/powerpoint/2010/main" val="1859568970"/>
+        <p14:creationId xmlns:p14="http://schemas.microsoft.com/office/powerpoint/2010/main" val="3638333628"/>
       </p:ext>
     </p:extLst>
   </p:cSld>
@@ -19508,7 +17886,7 @@
         <p:cNvPr id="1" name="">
           <a:extLst>
             <a:ext uri="{FF2B5EF4-FFF2-40B4-BE49-F238E27FC236}">
-              <a16:creationId xmlns:a16="http://schemas.microsoft.com/office/drawing/2014/main" id="{67C555E5-4ACC-CCE6-F943-5BD7D7D4888E}"/>
+              <a16:creationId xmlns:a16="http://schemas.microsoft.com/office/drawing/2014/main" id="{C0094769-8894-3520-BE78-5E33A0136B67}"/>
             </a:ext>
           </a:extLst>
         </p:cNvPr>
@@ -19525,10 +17903,10 @@
       </p:grpSpPr>
       <p:sp>
         <p:nvSpPr>
-          <p:cNvPr id="4" name="フリーフォーム: 図形 3">
+          <p:cNvPr id="5" name="フリーフォーム: 図形 4">
             <a:extLst>
               <a:ext uri="{FF2B5EF4-FFF2-40B4-BE49-F238E27FC236}">
-                <a16:creationId xmlns:a16="http://schemas.microsoft.com/office/drawing/2014/main" id="{7CD49543-5441-EB77-DDD8-895FE925FF36}"/>
+                <a16:creationId xmlns:a16="http://schemas.microsoft.com/office/drawing/2014/main" id="{D6783863-FBAC-0161-EEEE-F21C9D1ADACC}"/>
               </a:ext>
             </a:extLst>
           </p:cNvPr>
@@ -19543,22 +17921,30 @@
           <a:custGeom>
             <a:avLst/>
             <a:gdLst>
-              <a:gd name="csX0" fmla="*/ 769257 w 12192000"/>
-              <a:gd name="csY0" fmla="*/ 3338286 h 6858000"/>
-              <a:gd name="csX1" fmla="*/ 769257 w 12192000"/>
-              <a:gd name="csY1" fmla="*/ 3976914 h 6858000"/>
-              <a:gd name="csX2" fmla="*/ 11422743 w 12192000"/>
-              <a:gd name="csY2" fmla="*/ 3976914 h 6858000"/>
-              <a:gd name="csX3" fmla="*/ 11422743 w 12192000"/>
-              <a:gd name="csY3" fmla="*/ 3338286 h 6858000"/>
-              <a:gd name="csX4" fmla="*/ 0 w 12192000"/>
-              <a:gd name="csY4" fmla="*/ 0 h 6858000"/>
-              <a:gd name="csX5" fmla="*/ 12192000 w 12192000"/>
-              <a:gd name="csY5" fmla="*/ 0 h 6858000"/>
-              <a:gd name="csX6" fmla="*/ 12192000 w 12192000"/>
-              <a:gd name="csY6" fmla="*/ 6858000 h 6858000"/>
-              <a:gd name="csX7" fmla="*/ 0 w 12192000"/>
-              <a:gd name="csY7" fmla="*/ 6858000 h 6858000"/>
+              <a:gd name="csX0" fmla="*/ 772633 w 12192000"/>
+              <a:gd name="csY0" fmla="*/ 4758070 h 6858000"/>
+              <a:gd name="csX1" fmla="*/ 772633 w 12192000"/>
+              <a:gd name="csY1" fmla="*/ 5396023 h 6858000"/>
+              <a:gd name="csX2" fmla="*/ 11426456 w 12192000"/>
+              <a:gd name="csY2" fmla="*/ 5396023 h 6858000"/>
+              <a:gd name="csX3" fmla="*/ 11426456 w 12192000"/>
+              <a:gd name="csY3" fmla="*/ 4758070 h 6858000"/>
+              <a:gd name="csX4" fmla="*/ 765544 w 12192000"/>
+              <a:gd name="csY4" fmla="*/ 3019649 h 6858000"/>
+              <a:gd name="csX5" fmla="*/ 765544 w 12192000"/>
+              <a:gd name="csY5" fmla="*/ 3657602 h 6858000"/>
+              <a:gd name="csX6" fmla="*/ 11419367 w 12192000"/>
+              <a:gd name="csY6" fmla="*/ 3657602 h 6858000"/>
+              <a:gd name="csX7" fmla="*/ 11419367 w 12192000"/>
+              <a:gd name="csY7" fmla="*/ 3019649 h 6858000"/>
+              <a:gd name="csX8" fmla="*/ 0 w 12192000"/>
+              <a:gd name="csY8" fmla="*/ 0 h 6858000"/>
+              <a:gd name="csX9" fmla="*/ 12192000 w 12192000"/>
+              <a:gd name="csY9" fmla="*/ 0 h 6858000"/>
+              <a:gd name="csX10" fmla="*/ 12192000 w 12192000"/>
+              <a:gd name="csY10" fmla="*/ 6858000 h 6858000"/>
+              <a:gd name="csX11" fmla="*/ 0 w 12192000"/>
+              <a:gd name="csY11" fmla="*/ 6858000 h 6858000"/>
             </a:gdLst>
             <a:ahLst/>
             <a:cxnLst>
@@ -19586,21 +17972,46 @@
               <a:cxn ang="0">
                 <a:pos x="csX7" y="csY7"/>
               </a:cxn>
+              <a:cxn ang="0">
+                <a:pos x="csX8" y="csY8"/>
+              </a:cxn>
+              <a:cxn ang="0">
+                <a:pos x="csX9" y="csY9"/>
+              </a:cxn>
+              <a:cxn ang="0">
+                <a:pos x="csX10" y="csY10"/>
+              </a:cxn>
+              <a:cxn ang="0">
+                <a:pos x="csX11" y="csY11"/>
+              </a:cxn>
             </a:cxnLst>
             <a:rect l="l" t="t" r="r" b="b"/>
             <a:pathLst>
               <a:path w="12192000" h="6858000">
                 <a:moveTo>
-                  <a:pt x="769257" y="3338286"/>
+                  <a:pt x="772633" y="4758070"/>
                 </a:moveTo>
                 <a:lnTo>
-                  <a:pt x="769257" y="3976914"/>
+                  <a:pt x="772633" y="5396023"/>
                 </a:lnTo>
                 <a:lnTo>
-                  <a:pt x="11422743" y="3976914"/>
+                  <a:pt x="11426456" y="5396023"/>
                 </a:lnTo>
                 <a:lnTo>
-                  <a:pt x="11422743" y="3338286"/>
+                  <a:pt x="11426456" y="4758070"/>
+                </a:lnTo>
+                <a:close/>
+                <a:moveTo>
+                  <a:pt x="765544" y="3019649"/>
+                </a:moveTo>
+                <a:lnTo>
+                  <a:pt x="765544" y="3657602"/>
+                </a:lnTo>
+                <a:lnTo>
+                  <a:pt x="11419367" y="3657602"/>
+                </a:lnTo>
+                <a:lnTo>
+                  <a:pt x="11419367" y="3019649"/>
                 </a:lnTo>
                 <a:close/>
                 <a:moveTo>
@@ -19658,7 +18069,7 @@
     </p:spTree>
     <p:extLst>
       <p:ext uri="{BB962C8B-B14F-4D97-AF65-F5344CB8AC3E}">
-        <p14:creationId xmlns:p14="http://schemas.microsoft.com/office/powerpoint/2010/main" val="2370855582"/>
+        <p14:creationId xmlns:p14="http://schemas.microsoft.com/office/powerpoint/2010/main" val="1930862860"/>
       </p:ext>
     </p:extLst>
   </p:cSld>

--- a/tools/llm-as-a-judge/readme.pptx
+++ b/tools/llm-as-a-judge/readme.pptx
@@ -6,20 +6,20 @@
   </p:sldMasterIdLst>
   <p:sldIdLst>
     <p:sldId id="257" r:id="rId2"/>
-    <p:sldId id="283" r:id="rId3"/>
+    <p:sldId id="289" r:id="rId3"/>
     <p:sldId id="258" r:id="rId4"/>
     <p:sldId id="273" r:id="rId5"/>
-    <p:sldId id="284" r:id="rId6"/>
+    <p:sldId id="290" r:id="rId6"/>
     <p:sldId id="262" r:id="rId7"/>
-    <p:sldId id="285" r:id="rId8"/>
+    <p:sldId id="291" r:id="rId8"/>
     <p:sldId id="264" r:id="rId9"/>
-    <p:sldId id="286" r:id="rId10"/>
+    <p:sldId id="292" r:id="rId10"/>
     <p:sldId id="266" r:id="rId11"/>
     <p:sldId id="259" r:id="rId12"/>
-    <p:sldId id="287" r:id="rId13"/>
+    <p:sldId id="293" r:id="rId13"/>
     <p:sldId id="268" r:id="rId14"/>
     <p:sldId id="270" r:id="rId15"/>
-    <p:sldId id="288" r:id="rId16"/>
+    <p:sldId id="294" r:id="rId16"/>
     <p:sldId id="272" r:id="rId17"/>
   </p:sldIdLst>
   <p:sldSz cx="12192000" cy="6858000"/>
@@ -1393,7 +1393,7 @@
 
 <file path=ppt/slideLayouts/slideLayout3.xml><?xml version="1.0" encoding="utf-8"?>
 <p:sldLayout xmlns:a="http://schemas.openxmlformats.org/drawingml/2006/main" xmlns:r="http://schemas.openxmlformats.org/officeDocument/2006/relationships" xmlns:p="http://schemas.openxmlformats.org/presentationml/2006/main" preserve="1" userDrawn="1">
-  <p:cSld name="3_ユーザー設定レイアウト">
+  <p:cSld name="4_ユーザー設定レイアウト">
     <p:spTree>
       <p:nvGrpSpPr>
         <p:cNvPr id="1" name=""/>
@@ -1410,10 +1410,10 @@
       </p:grpSpPr>
       <p:graphicFrame>
         <p:nvGraphicFramePr>
-          <p:cNvPr id="3" name="表 2">
+          <p:cNvPr id="4" name="表 3">
             <a:extLst>
               <a:ext uri="{FF2B5EF4-FFF2-40B4-BE49-F238E27FC236}">
-                <a16:creationId xmlns:a16="http://schemas.microsoft.com/office/drawing/2014/main" id="{65A5FB3B-4214-5ADE-71BD-09C9C68E8BB1}"/>
+                <a16:creationId xmlns:a16="http://schemas.microsoft.com/office/drawing/2014/main" id="{255D2F03-FFDC-CF07-4D4E-D8BD64B51726}"/>
               </a:ext>
             </a:extLst>
           </p:cNvPr>
@@ -1423,14 +1423,14 @@
           <p:nvPr userDrawn="1">
             <p:extLst>
               <p:ext uri="{D42A27DB-BD31-4B8C-83A1-F6EECF244321}">
-                <p14:modId xmlns:p14="http://schemas.microsoft.com/office/powerpoint/2010/main" val="780707192"/>
+                <p14:modId xmlns:p14="http://schemas.microsoft.com/office/powerpoint/2010/main" val="2248410479"/>
               </p:ext>
             </p:extLst>
           </p:nvPr>
         </p:nvGraphicFramePr>
         <p:xfrm>
-          <a:off x="765629" y="548640"/>
-          <a:ext cx="10660742" cy="5760720"/>
+          <a:off x="765629" y="228600"/>
+          <a:ext cx="10660742" cy="6400800"/>
         </p:xfrm>
         <a:graphic>
           <a:graphicData uri="http://schemas.openxmlformats.org/drawingml/2006/table">
@@ -1446,14 +1446,14 @@
                 <a:tableStyleId>{5C22544A-7EE6-4342-B048-85BDC9FD1C3A}</a:tableStyleId>
               </a:tblPr>
               <a:tblGrid>
-                <a:gridCol w="2524913">
+                <a:gridCol w="2857137">
                   <a:extLst>
                     <a:ext uri="{9D8B030D-6E8A-4147-A177-3AD203B41FA5}">
                       <a16:colId xmlns:a16="http://schemas.microsoft.com/office/drawing/2014/main" val="2777621706"/>
                     </a:ext>
                   </a:extLst>
                 </a:gridCol>
-                <a:gridCol w="8135829">
+                <a:gridCol w="7803605">
                   <a:extLst>
                     <a:ext uri="{9D8B030D-6E8A-4147-A177-3AD203B41FA5}">
                       <a16:colId xmlns:a16="http://schemas.microsoft.com/office/drawing/2014/main" val="2952094520"/>
@@ -2550,6 +2550,174 @@
                     <a:bodyPr/>
                     <a:lstStyle/>
                     <a:p>
+                      <a:pPr marL="0" marR="0" lvl="0" indent="0" algn="l" defTabSz="914400" rtl="0" eaLnBrk="1" fontAlgn="auto" latinLnBrk="0" hangingPunct="1">
+                        <a:lnSpc>
+                          <a:spcPct val="100000"/>
+                        </a:lnSpc>
+                        <a:spcBef>
+                          <a:spcPts val="0"/>
+                        </a:spcBef>
+                        <a:spcAft>
+                          <a:spcPts val="0"/>
+                        </a:spcAft>
+                        <a:buClrTx/>
+                        <a:buSzTx/>
+                        <a:buFontTx/>
+                        <a:buNone/>
+                        <a:tabLst/>
+                        <a:defRPr/>
+                      </a:pPr>
+                      <a:r>
+                        <a:rPr kumimoji="1" lang="en-US" altLang="ja-JP" sz="1200">
+                          <a:latin typeface="Cascadia Code SemiBold" panose="020B0609020000020004" pitchFamily="49" charset="0"/>
+                          <a:ea typeface="Cascadia Code SemiBold" panose="020B0609020000020004" pitchFamily="49" charset="0"/>
+                          <a:cs typeface="Cascadia Code SemiBold" panose="020B0609020000020004" pitchFamily="49" charset="0"/>
+                        </a:rPr>
+                        <a:t>supports/llmj-fake-source.py</a:t>
+                      </a:r>
+                      <a:endParaRPr kumimoji="1" lang="ja-JP" altLang="en-US" sz="1200">
+                        <a:latin typeface="Cascadia Code SemiBold" panose="020B0609020000020004" pitchFamily="49" charset="0"/>
+                        <a:ea typeface="BIZ UDゴシック" panose="020B0400000000000000" pitchFamily="49" charset="-128"/>
+                        <a:cs typeface="Cascadia Code SemiBold" panose="020B0609020000020004" pitchFamily="49" charset="0"/>
+                      </a:endParaRPr>
+                    </a:p>
+                  </a:txBody>
+                  <a:tcPr marL="137160" marR="137160" marT="137160" marB="137160">
+                    <a:lnL w="12700" cap="flat" cmpd="sng" algn="ctr">
+                      <a:solidFill>
+                        <a:schemeClr val="tx1"/>
+                      </a:solidFill>
+                      <a:prstDash val="solid"/>
+                      <a:round/>
+                      <a:headEnd type="none" w="med" len="med"/>
+                      <a:tailEnd type="none" w="med" len="med"/>
+                    </a:lnL>
+                    <a:lnR w="12700" cap="flat" cmpd="sng" algn="ctr">
+                      <a:solidFill>
+                        <a:schemeClr val="tx1"/>
+                      </a:solidFill>
+                      <a:prstDash val="solid"/>
+                      <a:round/>
+                      <a:headEnd type="none" w="med" len="med"/>
+                      <a:tailEnd type="none" w="med" len="med"/>
+                    </a:lnR>
+                    <a:lnT w="12700" cap="flat" cmpd="sng" algn="ctr">
+                      <a:solidFill>
+                        <a:schemeClr val="tx1"/>
+                      </a:solidFill>
+                      <a:prstDash val="solid"/>
+                      <a:round/>
+                      <a:headEnd type="none" w="med" len="med"/>
+                      <a:tailEnd type="none" w="med" len="med"/>
+                    </a:lnT>
+                    <a:lnB w="12700" cap="flat" cmpd="sng" algn="ctr">
+                      <a:solidFill>
+                        <a:schemeClr val="tx1"/>
+                      </a:solidFill>
+                      <a:prstDash val="solid"/>
+                      <a:round/>
+                      <a:headEnd type="none" w="med" len="med"/>
+                      <a:tailEnd type="none" w="med" len="med"/>
+                    </a:lnB>
+                    <a:solidFill>
+                      <a:schemeClr val="bg1"/>
+                    </a:solidFill>
+                  </a:tcPr>
+                </a:tc>
+                <a:tc>
+                  <a:txBody>
+                    <a:bodyPr/>
+                    <a:lstStyle/>
+                    <a:p>
+                      <a:r>
+                        <a:rPr kumimoji="1" lang="en-US" altLang="ja-JP" sz="1200" b="0" i="0">
+                          <a:solidFill>
+                            <a:schemeClr val="tx1"/>
+                          </a:solidFill>
+                          <a:latin typeface="Cascadia Code SemiBold" panose="020B0609020000020004" pitchFamily="49" charset="0"/>
+                          <a:ea typeface="Cascadia Code SemiBold" panose="020B0609020000020004" pitchFamily="49" charset="0"/>
+                          <a:cs typeface="Cascadia Code SemiBold" panose="020B0609020000020004" pitchFamily="49" charset="0"/>
+                        </a:rPr>
+                        <a:t>It generates a large number of text files </a:t>
+                      </a:r>
+                      <a:r>
+                        <a:rPr kumimoji="1" lang="en-US" altLang="ja-JP" sz="1200" b="1" i="1">
+                          <a:solidFill>
+                            <a:srgbClr val="FF0000"/>
+                          </a:solidFill>
+                          <a:latin typeface="Cascadia Code SemiBold" panose="020B0609020000020004" pitchFamily="49" charset="0"/>
+                          <a:ea typeface="Cascadia Code SemiBold" panose="020B0609020000020004" pitchFamily="49" charset="0"/>
+                          <a:cs typeface="Cascadia Code SemiBold" panose="020B0609020000020004" pitchFamily="49" charset="0"/>
+                        </a:rPr>
+                        <a:t>in source/*.txt</a:t>
+                      </a:r>
+                      <a:r>
+                        <a:rPr kumimoji="1" lang="en-US" altLang="ja-JP" sz="1200" b="0" i="0">
+                          <a:solidFill>
+                            <a:schemeClr val="tx1"/>
+                          </a:solidFill>
+                          <a:latin typeface="Cascadia Code SemiBold" panose="020B0609020000020004" pitchFamily="49" charset="0"/>
+                          <a:ea typeface="Cascadia Code SemiBold" panose="020B0609020000020004" pitchFamily="49" charset="0"/>
+                          <a:cs typeface="Cascadia Code SemiBold" panose="020B0609020000020004" pitchFamily="49" charset="0"/>
+                        </a:rPr>
+                        <a:t>. Please use them as input data for quality verification.</a:t>
+                      </a:r>
+                    </a:p>
+                  </a:txBody>
+                  <a:tcPr marL="137160" marR="137160" marT="137160" marB="137160">
+                    <a:lnL w="12700" cap="flat" cmpd="sng" algn="ctr">
+                      <a:solidFill>
+                        <a:schemeClr val="tx1"/>
+                      </a:solidFill>
+                      <a:prstDash val="solid"/>
+                      <a:round/>
+                      <a:headEnd type="none" w="med" len="med"/>
+                      <a:tailEnd type="none" w="med" len="med"/>
+                    </a:lnL>
+                    <a:lnR w="12700" cap="flat" cmpd="sng" algn="ctr">
+                      <a:solidFill>
+                        <a:schemeClr val="tx1"/>
+                      </a:solidFill>
+                      <a:prstDash val="solid"/>
+                      <a:round/>
+                      <a:headEnd type="none" w="med" len="med"/>
+                      <a:tailEnd type="none" w="med" len="med"/>
+                    </a:lnR>
+                    <a:lnT w="12700" cap="flat" cmpd="sng" algn="ctr">
+                      <a:solidFill>
+                        <a:schemeClr val="tx1"/>
+                      </a:solidFill>
+                      <a:prstDash val="solid"/>
+                      <a:round/>
+                      <a:headEnd type="none" w="med" len="med"/>
+                      <a:tailEnd type="none" w="med" len="med"/>
+                    </a:lnT>
+                    <a:lnB w="12700" cap="flat" cmpd="sng" algn="ctr">
+                      <a:solidFill>
+                        <a:schemeClr val="tx1"/>
+                      </a:solidFill>
+                      <a:prstDash val="solid"/>
+                      <a:round/>
+                      <a:headEnd type="none" w="med" len="med"/>
+                      <a:tailEnd type="none" w="med" len="med"/>
+                    </a:lnB>
+                    <a:solidFill>
+                      <a:schemeClr val="bg1"/>
+                    </a:solidFill>
+                  </a:tcPr>
+                </a:tc>
+                <a:extLst>
+                  <a:ext uri="{0D108BD9-81ED-4DB2-BD59-A6C34878D82A}">
+                    <a16:rowId xmlns:a16="http://schemas.microsoft.com/office/drawing/2014/main" val="2339504222"/>
+                  </a:ext>
+                </a:extLst>
+              </a:tr>
+              <a:tr h="0">
+                <a:tc>
+                  <a:txBody>
+                    <a:bodyPr/>
+                    <a:lstStyle/>
+                    <a:p>
                       <a:r>
                         <a:rPr kumimoji="1" lang="en-US" altLang="ja-JP" sz="1200">
                           <a:latin typeface="Cascadia Code SemiBold" panose="020B0609020000020004" pitchFamily="49" charset="0"/>
@@ -3258,6 +3426,1883 @@
     </p:spTree>
     <p:extLst>
       <p:ext uri="{BB962C8B-B14F-4D97-AF65-F5344CB8AC3E}">
+        <p14:creationId xmlns:p14="http://schemas.microsoft.com/office/powerpoint/2010/main" val="4036535481"/>
+      </p:ext>
+    </p:extLst>
+  </p:cSld>
+  <p:clrMapOvr>
+    <a:masterClrMapping/>
+  </p:clrMapOvr>
+</p:sldLayout>
+</file>
+
+<file path=ppt/slideLayouts/slideLayout4.xml><?xml version="1.0" encoding="utf-8"?>
+<p:sldLayout xmlns:a="http://schemas.openxmlformats.org/drawingml/2006/main" xmlns:r="http://schemas.openxmlformats.org/officeDocument/2006/relationships" xmlns:p="http://schemas.openxmlformats.org/presentationml/2006/main" preserve="1" userDrawn="1">
+  <p:cSld name="3_ユーザー設定レイアウト">
+    <p:spTree>
+      <p:nvGrpSpPr>
+        <p:cNvPr id="1" name=""/>
+        <p:cNvGrpSpPr/>
+        <p:nvPr/>
+      </p:nvGrpSpPr>
+      <p:grpSpPr>
+        <a:xfrm>
+          <a:off x="0" y="0"/>
+          <a:ext cx="0" cy="0"/>
+          <a:chOff x="0" y="0"/>
+          <a:chExt cx="0" cy="0"/>
+        </a:xfrm>
+      </p:grpSpPr>
+      <p:graphicFrame>
+        <p:nvGraphicFramePr>
+          <p:cNvPr id="3" name="表 2">
+            <a:extLst>
+              <a:ext uri="{FF2B5EF4-FFF2-40B4-BE49-F238E27FC236}">
+                <a16:creationId xmlns:a16="http://schemas.microsoft.com/office/drawing/2014/main" id="{65A5FB3B-4214-5ADE-71BD-09C9C68E8BB1}"/>
+              </a:ext>
+            </a:extLst>
+          </p:cNvPr>
+          <p:cNvGraphicFramePr>
+            <a:graphicFrameLocks noGrp="1"/>
+          </p:cNvGraphicFramePr>
+          <p:nvPr userDrawn="1">
+            <p:extLst>
+              <p:ext uri="{D42A27DB-BD31-4B8C-83A1-F6EECF244321}">
+                <p14:modId xmlns:p14="http://schemas.microsoft.com/office/powerpoint/2010/main" val="780707192"/>
+              </p:ext>
+            </p:extLst>
+          </p:nvPr>
+        </p:nvGraphicFramePr>
+        <p:xfrm>
+          <a:off x="765629" y="548640"/>
+          <a:ext cx="10660742" cy="5760720"/>
+        </p:xfrm>
+        <a:graphic>
+          <a:graphicData uri="http://schemas.openxmlformats.org/drawingml/2006/table">
+            <a:tbl>
+              <a:tblPr firstRow="1" bandRow="1">
+                <a:effectLst>
+                  <a:outerShdw blurRad="50800" dist="38100" dir="2700000" algn="tl" rotWithShape="0">
+                    <a:prstClr val="black">
+                      <a:alpha val="40000"/>
+                    </a:prstClr>
+                  </a:outerShdw>
+                </a:effectLst>
+                <a:tableStyleId>{5C22544A-7EE6-4342-B048-85BDC9FD1C3A}</a:tableStyleId>
+              </a:tblPr>
+              <a:tblGrid>
+                <a:gridCol w="2524913">
+                  <a:extLst>
+                    <a:ext uri="{9D8B030D-6E8A-4147-A177-3AD203B41FA5}">
+                      <a16:colId xmlns:a16="http://schemas.microsoft.com/office/drawing/2014/main" val="2777621706"/>
+                    </a:ext>
+                  </a:extLst>
+                </a:gridCol>
+                <a:gridCol w="8135829">
+                  <a:extLst>
+                    <a:ext uri="{9D8B030D-6E8A-4147-A177-3AD203B41FA5}">
+                      <a16:colId xmlns:a16="http://schemas.microsoft.com/office/drawing/2014/main" val="2952094520"/>
+                    </a:ext>
+                  </a:extLst>
+                </a:gridCol>
+              </a:tblGrid>
+              <a:tr h="0">
+                <a:tc>
+                  <a:txBody>
+                    <a:bodyPr/>
+                    <a:lstStyle/>
+                    <a:p>
+                      <a:r>
+                        <a:rPr kumimoji="1" lang="en-US" altLang="ja-JP" sz="1200">
+                          <a:solidFill>
+                            <a:schemeClr val="bg1"/>
+                          </a:solidFill>
+                          <a:latin typeface="Cascadia Code SemiBold" panose="020B0609020000020004" pitchFamily="49" charset="0"/>
+                          <a:ea typeface="Cascadia Code SemiBold" panose="020B0609020000020004" pitchFamily="49" charset="0"/>
+                          <a:cs typeface="Cascadia Code SemiBold" panose="020B0609020000020004" pitchFamily="49" charset="0"/>
+                        </a:rPr>
+                        <a:t>resource</a:t>
+                      </a:r>
+                      <a:endParaRPr kumimoji="1" lang="ja-JP" altLang="en-US" sz="1200">
+                        <a:solidFill>
+                          <a:schemeClr val="bg1"/>
+                        </a:solidFill>
+                        <a:latin typeface="Cascadia Code SemiBold" panose="020B0609020000020004" pitchFamily="49" charset="0"/>
+                        <a:ea typeface="BIZ UDゴシック" panose="020B0400000000000000" pitchFamily="49" charset="-128"/>
+                        <a:cs typeface="Cascadia Code SemiBold" panose="020B0609020000020004" pitchFamily="49" charset="0"/>
+                      </a:endParaRPr>
+                    </a:p>
+                  </a:txBody>
+                  <a:tcPr marL="137160" marR="137160" marT="137160" marB="137160">
+                    <a:lnL w="12700" cap="flat" cmpd="sng" algn="ctr">
+                      <a:solidFill>
+                        <a:schemeClr val="tx1"/>
+                      </a:solidFill>
+                      <a:prstDash val="solid"/>
+                      <a:round/>
+                      <a:headEnd type="none" w="med" len="med"/>
+                      <a:tailEnd type="none" w="med" len="med"/>
+                    </a:lnL>
+                    <a:lnR w="12700" cap="flat" cmpd="sng" algn="ctr">
+                      <a:solidFill>
+                        <a:schemeClr val="tx1"/>
+                      </a:solidFill>
+                      <a:prstDash val="solid"/>
+                      <a:round/>
+                      <a:headEnd type="none" w="med" len="med"/>
+                      <a:tailEnd type="none" w="med" len="med"/>
+                    </a:lnR>
+                    <a:lnT w="12700" cap="flat" cmpd="sng" algn="ctr">
+                      <a:solidFill>
+                        <a:schemeClr val="tx1"/>
+                      </a:solidFill>
+                      <a:prstDash val="solid"/>
+                      <a:round/>
+                      <a:headEnd type="none" w="med" len="med"/>
+                      <a:tailEnd type="none" w="med" len="med"/>
+                    </a:lnT>
+                    <a:lnB w="12700" cap="flat" cmpd="sng" algn="ctr">
+                      <a:solidFill>
+                        <a:schemeClr val="tx1"/>
+                      </a:solidFill>
+                      <a:prstDash val="solid"/>
+                      <a:round/>
+                      <a:headEnd type="none" w="med" len="med"/>
+                      <a:tailEnd type="none" w="med" len="med"/>
+                    </a:lnB>
+                    <a:solidFill>
+                      <a:schemeClr val="tx1">
+                        <a:lumMod val="65000"/>
+                        <a:lumOff val="35000"/>
+                      </a:schemeClr>
+                    </a:solidFill>
+                  </a:tcPr>
+                </a:tc>
+                <a:tc>
+                  <a:txBody>
+                    <a:bodyPr/>
+                    <a:lstStyle/>
+                    <a:p>
+                      <a:r>
+                        <a:rPr kumimoji="1" lang="en-US" altLang="ja-JP" sz="1200">
+                          <a:solidFill>
+                            <a:schemeClr val="bg1"/>
+                          </a:solidFill>
+                          <a:latin typeface="Cascadia Code SemiBold" panose="020B0609020000020004" pitchFamily="49" charset="0"/>
+                          <a:ea typeface="Cascadia Code SemiBold" panose="020B0609020000020004" pitchFamily="49" charset="0"/>
+                          <a:cs typeface="Cascadia Code SemiBold" panose="020B0609020000020004" pitchFamily="49" charset="0"/>
+                        </a:rPr>
+                        <a:t>note</a:t>
+                      </a:r>
+                      <a:endParaRPr kumimoji="1" lang="ja-JP" altLang="en-US" sz="1200">
+                        <a:solidFill>
+                          <a:schemeClr val="bg1"/>
+                        </a:solidFill>
+                        <a:latin typeface="Cascadia Code SemiBold" panose="020B0609020000020004" pitchFamily="49" charset="0"/>
+                        <a:ea typeface="BIZ UDゴシック" panose="020B0400000000000000" pitchFamily="49" charset="-128"/>
+                        <a:cs typeface="Cascadia Code SemiBold" panose="020B0609020000020004" pitchFamily="49" charset="0"/>
+                      </a:endParaRPr>
+                    </a:p>
+                  </a:txBody>
+                  <a:tcPr marL="137160" marR="137160" marT="137160" marB="137160">
+                    <a:lnL w="12700" cap="flat" cmpd="sng" algn="ctr">
+                      <a:solidFill>
+                        <a:schemeClr val="tx1"/>
+                      </a:solidFill>
+                      <a:prstDash val="solid"/>
+                      <a:round/>
+                      <a:headEnd type="none" w="med" len="med"/>
+                      <a:tailEnd type="none" w="med" len="med"/>
+                    </a:lnL>
+                    <a:lnR w="12700" cap="flat" cmpd="sng" algn="ctr">
+                      <a:solidFill>
+                        <a:schemeClr val="tx1"/>
+                      </a:solidFill>
+                      <a:prstDash val="solid"/>
+                      <a:round/>
+                      <a:headEnd type="none" w="med" len="med"/>
+                      <a:tailEnd type="none" w="med" len="med"/>
+                    </a:lnR>
+                    <a:lnT w="12700" cap="flat" cmpd="sng" algn="ctr">
+                      <a:solidFill>
+                        <a:schemeClr val="tx1"/>
+                      </a:solidFill>
+                      <a:prstDash val="solid"/>
+                      <a:round/>
+                      <a:headEnd type="none" w="med" len="med"/>
+                      <a:tailEnd type="none" w="med" len="med"/>
+                    </a:lnT>
+                    <a:lnB w="12700" cap="flat" cmpd="sng" algn="ctr">
+                      <a:solidFill>
+                        <a:schemeClr val="tx1"/>
+                      </a:solidFill>
+                      <a:prstDash val="solid"/>
+                      <a:round/>
+                      <a:headEnd type="none" w="med" len="med"/>
+                      <a:tailEnd type="none" w="med" len="med"/>
+                    </a:lnB>
+                    <a:solidFill>
+                      <a:schemeClr val="tx1">
+                        <a:lumMod val="65000"/>
+                        <a:lumOff val="35000"/>
+                      </a:schemeClr>
+                    </a:solidFill>
+                  </a:tcPr>
+                </a:tc>
+                <a:extLst>
+                  <a:ext uri="{0D108BD9-81ED-4DB2-BD59-A6C34878D82A}">
+                    <a16:rowId xmlns:a16="http://schemas.microsoft.com/office/drawing/2014/main" val="526102552"/>
+                  </a:ext>
+                </a:extLst>
+              </a:tr>
+              <a:tr h="0">
+                <a:tc>
+                  <a:txBody>
+                    <a:bodyPr/>
+                    <a:lstStyle/>
+                    <a:p>
+                      <a:r>
+                        <a:rPr kumimoji="1" lang="en-US" altLang="ja-JP" sz="1200">
+                          <a:latin typeface="Cascadia Code SemiBold" panose="020B0609020000020004" pitchFamily="49" charset="0"/>
+                          <a:ea typeface="Cascadia Code SemiBold" panose="020B0609020000020004" pitchFamily="49" charset="0"/>
+                          <a:cs typeface="Cascadia Code SemiBold" panose="020B0609020000020004" pitchFamily="49" charset="0"/>
+                        </a:rPr>
+                        <a:t>.env</a:t>
+                      </a:r>
+                      <a:endParaRPr kumimoji="1" lang="ja-JP" altLang="en-US" sz="1200">
+                        <a:latin typeface="Cascadia Code SemiBold" panose="020B0609020000020004" pitchFamily="49" charset="0"/>
+                        <a:ea typeface="BIZ UDゴシック" panose="020B0400000000000000" pitchFamily="49" charset="-128"/>
+                        <a:cs typeface="Cascadia Code SemiBold" panose="020B0609020000020004" pitchFamily="49" charset="0"/>
+                      </a:endParaRPr>
+                    </a:p>
+                  </a:txBody>
+                  <a:tcPr marL="137160" marR="137160" marT="137160" marB="137160">
+                    <a:lnL w="12700" cap="flat" cmpd="sng" algn="ctr">
+                      <a:solidFill>
+                        <a:schemeClr val="tx1"/>
+                      </a:solidFill>
+                      <a:prstDash val="solid"/>
+                      <a:round/>
+                      <a:headEnd type="none" w="med" len="med"/>
+                      <a:tailEnd type="none" w="med" len="med"/>
+                    </a:lnL>
+                    <a:lnR w="12700" cap="flat" cmpd="sng" algn="ctr">
+                      <a:solidFill>
+                        <a:schemeClr val="tx1"/>
+                      </a:solidFill>
+                      <a:prstDash val="solid"/>
+                      <a:round/>
+                      <a:headEnd type="none" w="med" len="med"/>
+                      <a:tailEnd type="none" w="med" len="med"/>
+                    </a:lnR>
+                    <a:lnT w="12700" cap="flat" cmpd="sng" algn="ctr">
+                      <a:solidFill>
+                        <a:schemeClr val="tx1"/>
+                      </a:solidFill>
+                      <a:prstDash val="solid"/>
+                      <a:round/>
+                      <a:headEnd type="none" w="med" len="med"/>
+                      <a:tailEnd type="none" w="med" len="med"/>
+                    </a:lnT>
+                    <a:lnB w="12700" cap="flat" cmpd="sng" algn="ctr">
+                      <a:solidFill>
+                        <a:schemeClr val="tx1"/>
+                      </a:solidFill>
+                      <a:prstDash val="solid"/>
+                      <a:round/>
+                      <a:headEnd type="none" w="med" len="med"/>
+                      <a:tailEnd type="none" w="med" len="med"/>
+                    </a:lnB>
+                    <a:solidFill>
+                      <a:schemeClr val="bg1"/>
+                    </a:solidFill>
+                  </a:tcPr>
+                </a:tc>
+                <a:tc>
+                  <a:txBody>
+                    <a:bodyPr/>
+                    <a:lstStyle/>
+                    <a:p>
+                      <a:r>
+                        <a:rPr kumimoji="1" lang="en-US" altLang="ja-JP" sz="1200">
+                          <a:latin typeface="Cascadia Code SemiBold" panose="020B0609020000020004" pitchFamily="49" charset="0"/>
+                          <a:ea typeface="Cascadia Code SemiBold" panose="020B0609020000020004" pitchFamily="49" charset="0"/>
+                          <a:cs typeface="Cascadia Code SemiBold" panose="020B0609020000020004" pitchFamily="49" charset="0"/>
+                        </a:rPr>
+                        <a:t>File containing LLM API credentials</a:t>
+                      </a:r>
+                    </a:p>
+                  </a:txBody>
+                  <a:tcPr marL="137160" marR="137160" marT="137160" marB="137160">
+                    <a:lnL w="12700" cap="flat" cmpd="sng" algn="ctr">
+                      <a:solidFill>
+                        <a:schemeClr val="tx1"/>
+                      </a:solidFill>
+                      <a:prstDash val="solid"/>
+                      <a:round/>
+                      <a:headEnd type="none" w="med" len="med"/>
+                      <a:tailEnd type="none" w="med" len="med"/>
+                    </a:lnL>
+                    <a:lnR w="12700" cap="flat" cmpd="sng" algn="ctr">
+                      <a:solidFill>
+                        <a:schemeClr val="tx1"/>
+                      </a:solidFill>
+                      <a:prstDash val="solid"/>
+                      <a:round/>
+                      <a:headEnd type="none" w="med" len="med"/>
+                      <a:tailEnd type="none" w="med" len="med"/>
+                    </a:lnR>
+                    <a:lnT w="12700" cap="flat" cmpd="sng" algn="ctr">
+                      <a:solidFill>
+                        <a:schemeClr val="tx1"/>
+                      </a:solidFill>
+                      <a:prstDash val="solid"/>
+                      <a:round/>
+                      <a:headEnd type="none" w="med" len="med"/>
+                      <a:tailEnd type="none" w="med" len="med"/>
+                    </a:lnT>
+                    <a:lnB w="12700" cap="flat" cmpd="sng" algn="ctr">
+                      <a:solidFill>
+                        <a:schemeClr val="tx1"/>
+                      </a:solidFill>
+                      <a:prstDash val="solid"/>
+                      <a:round/>
+                      <a:headEnd type="none" w="med" len="med"/>
+                      <a:tailEnd type="none" w="med" len="med"/>
+                    </a:lnB>
+                    <a:solidFill>
+                      <a:schemeClr val="bg1"/>
+                    </a:solidFill>
+                  </a:tcPr>
+                </a:tc>
+                <a:extLst>
+                  <a:ext uri="{0D108BD9-81ED-4DB2-BD59-A6C34878D82A}">
+                    <a16:rowId xmlns:a16="http://schemas.microsoft.com/office/drawing/2014/main" val="1660497218"/>
+                  </a:ext>
+                </a:extLst>
+              </a:tr>
+              <a:tr h="0">
+                <a:tc>
+                  <a:txBody>
+                    <a:bodyPr/>
+                    <a:lstStyle/>
+                    <a:p>
+                      <a:r>
+                        <a:rPr kumimoji="1" lang="en-US" altLang="ja-JP" sz="1200">
+                          <a:latin typeface="Cascadia Code SemiBold" panose="020B0609020000020004" pitchFamily="49" charset="0"/>
+                          <a:ea typeface="Cascadia Code SemiBold" panose="020B0609020000020004" pitchFamily="49" charset="0"/>
+                          <a:cs typeface="Cascadia Code SemiBold" panose="020B0609020000020004" pitchFamily="49" charset="0"/>
+                        </a:rPr>
+                        <a:t>llmj.py</a:t>
+                      </a:r>
+                      <a:endParaRPr kumimoji="1" lang="ja-JP" altLang="en-US" sz="1200">
+                        <a:latin typeface="Cascadia Code SemiBold" panose="020B0609020000020004" pitchFamily="49" charset="0"/>
+                        <a:ea typeface="BIZ UDゴシック" panose="020B0400000000000000" pitchFamily="49" charset="-128"/>
+                        <a:cs typeface="Cascadia Code SemiBold" panose="020B0609020000020004" pitchFamily="49" charset="0"/>
+                      </a:endParaRPr>
+                    </a:p>
+                  </a:txBody>
+                  <a:tcPr marL="137160" marR="137160" marT="137160" marB="137160">
+                    <a:lnL w="12700" cap="flat" cmpd="sng" algn="ctr">
+                      <a:solidFill>
+                        <a:schemeClr val="tx1"/>
+                      </a:solidFill>
+                      <a:prstDash val="solid"/>
+                      <a:round/>
+                      <a:headEnd type="none" w="med" len="med"/>
+                      <a:tailEnd type="none" w="med" len="med"/>
+                    </a:lnL>
+                    <a:lnR w="12700" cap="flat" cmpd="sng" algn="ctr">
+                      <a:solidFill>
+                        <a:schemeClr val="tx1"/>
+                      </a:solidFill>
+                      <a:prstDash val="solid"/>
+                      <a:round/>
+                      <a:headEnd type="none" w="med" len="med"/>
+                      <a:tailEnd type="none" w="med" len="med"/>
+                    </a:lnR>
+                    <a:lnT w="12700" cap="flat" cmpd="sng" algn="ctr">
+                      <a:solidFill>
+                        <a:schemeClr val="tx1"/>
+                      </a:solidFill>
+                      <a:prstDash val="solid"/>
+                      <a:round/>
+                      <a:headEnd type="none" w="med" len="med"/>
+                      <a:tailEnd type="none" w="med" len="med"/>
+                    </a:lnT>
+                    <a:lnB w="12700" cap="flat" cmpd="sng" algn="ctr">
+                      <a:solidFill>
+                        <a:schemeClr val="tx1"/>
+                      </a:solidFill>
+                      <a:prstDash val="solid"/>
+                      <a:round/>
+                      <a:headEnd type="none" w="med" len="med"/>
+                      <a:tailEnd type="none" w="med" len="med"/>
+                    </a:lnB>
+                    <a:solidFill>
+                      <a:schemeClr val="bg1"/>
+                    </a:solidFill>
+                  </a:tcPr>
+                </a:tc>
+                <a:tc>
+                  <a:txBody>
+                    <a:bodyPr/>
+                    <a:lstStyle/>
+                    <a:p>
+                      <a:r>
+                        <a:rPr kumimoji="1" lang="en-US" altLang="ja-JP" sz="1200">
+                          <a:latin typeface="Cascadia Code SemiBold" panose="020B0609020000020004" pitchFamily="49" charset="0"/>
+                          <a:ea typeface="Cascadia Code SemiBold" panose="020B0609020000020004" pitchFamily="49" charset="0"/>
+                          <a:cs typeface="Cascadia Code SemiBold" panose="020B0609020000020004" pitchFamily="49" charset="0"/>
+                        </a:rPr>
+                        <a:t>Common definitions and common processing</a:t>
+                      </a:r>
+                    </a:p>
+                  </a:txBody>
+                  <a:tcPr marL="137160" marR="137160" marT="137160" marB="137160">
+                    <a:lnL w="12700" cap="flat" cmpd="sng" algn="ctr">
+                      <a:solidFill>
+                        <a:schemeClr val="tx1"/>
+                      </a:solidFill>
+                      <a:prstDash val="solid"/>
+                      <a:round/>
+                      <a:headEnd type="none" w="med" len="med"/>
+                      <a:tailEnd type="none" w="med" len="med"/>
+                    </a:lnL>
+                    <a:lnR w="12700" cap="flat" cmpd="sng" algn="ctr">
+                      <a:solidFill>
+                        <a:schemeClr val="tx1"/>
+                      </a:solidFill>
+                      <a:prstDash val="solid"/>
+                      <a:round/>
+                      <a:headEnd type="none" w="med" len="med"/>
+                      <a:tailEnd type="none" w="med" len="med"/>
+                    </a:lnR>
+                    <a:lnT w="12700" cap="flat" cmpd="sng" algn="ctr">
+                      <a:solidFill>
+                        <a:schemeClr val="tx1"/>
+                      </a:solidFill>
+                      <a:prstDash val="solid"/>
+                      <a:round/>
+                      <a:headEnd type="none" w="med" len="med"/>
+                      <a:tailEnd type="none" w="med" len="med"/>
+                    </a:lnT>
+                    <a:lnB w="12700" cap="flat" cmpd="sng" algn="ctr">
+                      <a:solidFill>
+                        <a:schemeClr val="tx1"/>
+                      </a:solidFill>
+                      <a:prstDash val="solid"/>
+                      <a:round/>
+                      <a:headEnd type="none" w="med" len="med"/>
+                      <a:tailEnd type="none" w="med" len="med"/>
+                    </a:lnB>
+                    <a:solidFill>
+                      <a:schemeClr val="bg1"/>
+                    </a:solidFill>
+                  </a:tcPr>
+                </a:tc>
+                <a:extLst>
+                  <a:ext uri="{0D108BD9-81ED-4DB2-BD59-A6C34878D82A}">
+                    <a16:rowId xmlns:a16="http://schemas.microsoft.com/office/drawing/2014/main" val="1288496352"/>
+                  </a:ext>
+                </a:extLst>
+              </a:tr>
+              <a:tr h="0">
+                <a:tc>
+                  <a:txBody>
+                    <a:bodyPr/>
+                    <a:lstStyle/>
+                    <a:p>
+                      <a:pPr marL="0" marR="0" lvl="0" indent="0" algn="l" defTabSz="914400" rtl="0" eaLnBrk="1" fontAlgn="auto" latinLnBrk="0" hangingPunct="1">
+                        <a:lnSpc>
+                          <a:spcPct val="100000"/>
+                        </a:lnSpc>
+                        <a:spcBef>
+                          <a:spcPts val="0"/>
+                        </a:spcBef>
+                        <a:spcAft>
+                          <a:spcPts val="0"/>
+                        </a:spcAft>
+                        <a:buClrTx/>
+                        <a:buSzTx/>
+                        <a:buFontTx/>
+                        <a:buNone/>
+                        <a:tabLst/>
+                        <a:defRPr/>
+                      </a:pPr>
+                      <a:r>
+                        <a:rPr kumimoji="1" lang="en-US" altLang="ja-JP" sz="1200">
+                          <a:latin typeface="Cascadia Code SemiBold" panose="020B0609020000020004" pitchFamily="49" charset="0"/>
+                          <a:ea typeface="Cascadia Code SemiBold" panose="020B0609020000020004" pitchFamily="49" charset="0"/>
+                          <a:cs typeface="Cascadia Code SemiBold" panose="020B0609020000020004" pitchFamily="49" charset="0"/>
+                        </a:rPr>
+                        <a:t>llmj-generate.py</a:t>
+                      </a:r>
+                      <a:endParaRPr kumimoji="1" lang="ja-JP" altLang="en-US" sz="1200">
+                        <a:latin typeface="Cascadia Code SemiBold" panose="020B0609020000020004" pitchFamily="49" charset="0"/>
+                        <a:ea typeface="BIZ UDゴシック" panose="020B0400000000000000" pitchFamily="49" charset="-128"/>
+                        <a:cs typeface="Cascadia Code SemiBold" panose="020B0609020000020004" pitchFamily="49" charset="0"/>
+                      </a:endParaRPr>
+                    </a:p>
+                  </a:txBody>
+                  <a:tcPr marL="137160" marR="137160" marT="137160" marB="137160">
+                    <a:lnL w="12700" cap="flat" cmpd="sng" algn="ctr">
+                      <a:solidFill>
+                        <a:schemeClr val="tx1"/>
+                      </a:solidFill>
+                      <a:prstDash val="solid"/>
+                      <a:round/>
+                      <a:headEnd type="none" w="med" len="med"/>
+                      <a:tailEnd type="none" w="med" len="med"/>
+                    </a:lnL>
+                    <a:lnR w="12700" cap="flat" cmpd="sng" algn="ctr">
+                      <a:solidFill>
+                        <a:schemeClr val="tx1"/>
+                      </a:solidFill>
+                      <a:prstDash val="solid"/>
+                      <a:round/>
+                      <a:headEnd type="none" w="med" len="med"/>
+                      <a:tailEnd type="none" w="med" len="med"/>
+                    </a:lnR>
+                    <a:lnT w="12700" cap="flat" cmpd="sng" algn="ctr">
+                      <a:solidFill>
+                        <a:schemeClr val="tx1"/>
+                      </a:solidFill>
+                      <a:prstDash val="solid"/>
+                      <a:round/>
+                      <a:headEnd type="none" w="med" len="med"/>
+                      <a:tailEnd type="none" w="med" len="med"/>
+                    </a:lnT>
+                    <a:lnB w="12700" cap="flat" cmpd="sng" algn="ctr">
+                      <a:solidFill>
+                        <a:schemeClr val="tx1"/>
+                      </a:solidFill>
+                      <a:prstDash val="solid"/>
+                      <a:round/>
+                      <a:headEnd type="none" w="med" len="med"/>
+                      <a:tailEnd type="none" w="med" len="med"/>
+                    </a:lnB>
+                    <a:solidFill>
+                      <a:schemeClr val="bg1"/>
+                    </a:solidFill>
+                  </a:tcPr>
+                </a:tc>
+                <a:tc>
+                  <a:txBody>
+                    <a:bodyPr/>
+                    <a:lstStyle/>
+                    <a:p>
+                      <a:pPr marL="0" marR="0" lvl="0" indent="0" algn="l" defTabSz="914400" rtl="0" eaLnBrk="1" fontAlgn="auto" latinLnBrk="0" hangingPunct="1">
+                        <a:lnSpc>
+                          <a:spcPct val="100000"/>
+                        </a:lnSpc>
+                        <a:spcBef>
+                          <a:spcPts val="0"/>
+                        </a:spcBef>
+                        <a:spcAft>
+                          <a:spcPts val="0"/>
+                        </a:spcAft>
+                        <a:buClrTx/>
+                        <a:buSzTx/>
+                        <a:buFontTx/>
+                        <a:buNone/>
+                        <a:tabLst/>
+                        <a:defRPr/>
+                      </a:pPr>
+                      <a:r>
+                        <a:rPr kumimoji="1" lang="en-US" altLang="ja-JP" sz="1200">
+                          <a:latin typeface="Cascadia Code SemiBold" panose="020B0609020000020004" pitchFamily="49" charset="0"/>
+                          <a:ea typeface="Cascadia Code SemiBold" panose="020B0609020000020004" pitchFamily="49" charset="0"/>
+                          <a:cs typeface="Cascadia Code SemiBold" panose="020B0609020000020004" pitchFamily="49" charset="0"/>
+                        </a:rPr>
+                        <a:t>This SCRIPT uses </a:t>
+                      </a:r>
+                      <a:r>
+                        <a:rPr kumimoji="1" lang="en-US" altLang="ja-JP" sz="1200" b="1" i="1">
+                          <a:solidFill>
+                            <a:srgbClr val="FF0000"/>
+                          </a:solidFill>
+                          <a:latin typeface="Cascadia Code SemiBold" panose="020B0609020000020004" pitchFamily="49" charset="0"/>
+                          <a:ea typeface="Cascadia Code SemiBold" panose="020B0609020000020004" pitchFamily="49" charset="0"/>
+                          <a:cs typeface="Cascadia Code SemiBold" panose="020B0609020000020004" pitchFamily="49" charset="0"/>
+                        </a:rPr>
+                        <a:t>work/*.txt</a:t>
+                      </a:r>
+                      <a:r>
+                        <a:rPr kumimoji="1" lang="en-US" altLang="ja-JP" sz="1200">
+                          <a:latin typeface="Cascadia Code SemiBold" panose="020B0609020000020004" pitchFamily="49" charset="0"/>
+                          <a:ea typeface="Cascadia Code SemiBold" panose="020B0609020000020004" pitchFamily="49" charset="0"/>
+                          <a:cs typeface="Cascadia Code SemiBold" panose="020B0609020000020004" pitchFamily="49" charset="0"/>
+                        </a:rPr>
+                        <a:t> to transform </a:t>
+                      </a:r>
+                      <a:r>
+                        <a:rPr kumimoji="1" lang="en-US" altLang="ja-JP" sz="1200" b="1" i="1">
+                          <a:solidFill>
+                            <a:srgbClr val="FF0000"/>
+                          </a:solidFill>
+                          <a:latin typeface="Cascadia Code SemiBold" panose="020B0609020000020004" pitchFamily="49" charset="0"/>
+                          <a:ea typeface="Cascadia Code SemiBold" panose="020B0609020000020004" pitchFamily="49" charset="0"/>
+                          <a:cs typeface="Cascadia Code SemiBold" panose="020B0609020000020004" pitchFamily="49" charset="0"/>
+                        </a:rPr>
+                        <a:t>source/*.txt</a:t>
+                      </a:r>
+                      <a:r>
+                        <a:rPr kumimoji="1" lang="en-US" altLang="ja-JP" sz="1200">
+                          <a:latin typeface="Cascadia Code SemiBold" panose="020B0609020000020004" pitchFamily="49" charset="0"/>
+                          <a:ea typeface="Cascadia Code SemiBold" panose="020B0609020000020004" pitchFamily="49" charset="0"/>
+                          <a:cs typeface="Cascadia Code SemiBold" panose="020B0609020000020004" pitchFamily="49" charset="0"/>
+                        </a:rPr>
+                        <a:t> and generates </a:t>
+                      </a:r>
+                      <a:r>
+                        <a:rPr kumimoji="1" lang="en-US" altLang="ja-JP" sz="1200" b="1" i="1">
+                          <a:solidFill>
+                            <a:srgbClr val="FF0000"/>
+                          </a:solidFill>
+                          <a:latin typeface="Cascadia Code SemiBold" panose="020B0609020000020004" pitchFamily="49" charset="0"/>
+                          <a:ea typeface="Cascadia Code SemiBold" panose="020B0609020000020004" pitchFamily="49" charset="0"/>
+                          <a:cs typeface="Cascadia Code SemiBold" panose="020B0609020000020004" pitchFamily="49" charset="0"/>
+                        </a:rPr>
+                        <a:t>work/*.xlsx</a:t>
+                      </a:r>
+                      <a:r>
+                        <a:rPr kumimoji="1" lang="en-US" altLang="ja-JP" sz="1200">
+                          <a:latin typeface="Cascadia Code SemiBold" panose="020B0609020000020004" pitchFamily="49" charset="0"/>
+                          <a:ea typeface="Cascadia Code SemiBold" panose="020B0609020000020004" pitchFamily="49" charset="0"/>
+                          <a:cs typeface="Cascadia Code SemiBold" panose="020B0609020000020004" pitchFamily="49" charset="0"/>
+                        </a:rPr>
+                        <a:t>.</a:t>
+                      </a:r>
+                    </a:p>
+                  </a:txBody>
+                  <a:tcPr marL="137160" marR="137160" marT="137160" marB="137160">
+                    <a:lnL w="12700" cap="flat" cmpd="sng" algn="ctr">
+                      <a:solidFill>
+                        <a:schemeClr val="tx1"/>
+                      </a:solidFill>
+                      <a:prstDash val="solid"/>
+                      <a:round/>
+                      <a:headEnd type="none" w="med" len="med"/>
+                      <a:tailEnd type="none" w="med" len="med"/>
+                    </a:lnL>
+                    <a:lnR w="12700" cap="flat" cmpd="sng" algn="ctr">
+                      <a:solidFill>
+                        <a:schemeClr val="tx1"/>
+                      </a:solidFill>
+                      <a:prstDash val="solid"/>
+                      <a:round/>
+                      <a:headEnd type="none" w="med" len="med"/>
+                      <a:tailEnd type="none" w="med" len="med"/>
+                    </a:lnR>
+                    <a:lnT w="12700" cap="flat" cmpd="sng" algn="ctr">
+                      <a:solidFill>
+                        <a:schemeClr val="tx1"/>
+                      </a:solidFill>
+                      <a:prstDash val="solid"/>
+                      <a:round/>
+                      <a:headEnd type="none" w="med" len="med"/>
+                      <a:tailEnd type="none" w="med" len="med"/>
+                    </a:lnT>
+                    <a:lnB w="12700" cap="flat" cmpd="sng" algn="ctr">
+                      <a:solidFill>
+                        <a:schemeClr val="tx1"/>
+                      </a:solidFill>
+                      <a:prstDash val="solid"/>
+                      <a:round/>
+                      <a:headEnd type="none" w="med" len="med"/>
+                      <a:tailEnd type="none" w="med" len="med"/>
+                    </a:lnB>
+                    <a:solidFill>
+                      <a:schemeClr val="bg1"/>
+                    </a:solidFill>
+                  </a:tcPr>
+                </a:tc>
+                <a:extLst>
+                  <a:ext uri="{0D108BD9-81ED-4DB2-BD59-A6C34878D82A}">
+                    <a16:rowId xmlns:a16="http://schemas.microsoft.com/office/drawing/2014/main" val="2978836238"/>
+                  </a:ext>
+                </a:extLst>
+              </a:tr>
+              <a:tr h="0">
+                <a:tc>
+                  <a:txBody>
+                    <a:bodyPr/>
+                    <a:lstStyle/>
+                    <a:p>
+                      <a:r>
+                        <a:rPr kumimoji="1" lang="en-US" altLang="ja-JP" sz="1200">
+                          <a:latin typeface="Cascadia Code SemiBold" panose="020B0609020000020004" pitchFamily="49" charset="0"/>
+                          <a:ea typeface="Cascadia Code SemiBold" panose="020B0609020000020004" pitchFamily="49" charset="0"/>
+                          <a:cs typeface="Cascadia Code SemiBold" panose="020B0609020000020004" pitchFamily="49" charset="0"/>
+                        </a:rPr>
+                        <a:t>llmj-judge.py</a:t>
+                      </a:r>
+                      <a:endParaRPr kumimoji="1" lang="ja-JP" altLang="en-US" sz="1200">
+                        <a:latin typeface="Cascadia Code SemiBold" panose="020B0609020000020004" pitchFamily="49" charset="0"/>
+                        <a:ea typeface="BIZ UDゴシック" panose="020B0400000000000000" pitchFamily="49" charset="-128"/>
+                        <a:cs typeface="Cascadia Code SemiBold" panose="020B0609020000020004" pitchFamily="49" charset="0"/>
+                      </a:endParaRPr>
+                    </a:p>
+                  </a:txBody>
+                  <a:tcPr marL="137160" marR="137160" marT="137160" marB="137160">
+                    <a:lnL w="12700" cap="flat" cmpd="sng" algn="ctr">
+                      <a:solidFill>
+                        <a:schemeClr val="tx1"/>
+                      </a:solidFill>
+                      <a:prstDash val="solid"/>
+                      <a:round/>
+                      <a:headEnd type="none" w="med" len="med"/>
+                      <a:tailEnd type="none" w="med" len="med"/>
+                    </a:lnL>
+                    <a:lnR w="12700" cap="flat" cmpd="sng" algn="ctr">
+                      <a:solidFill>
+                        <a:schemeClr val="tx1"/>
+                      </a:solidFill>
+                      <a:prstDash val="solid"/>
+                      <a:round/>
+                      <a:headEnd type="none" w="med" len="med"/>
+                      <a:tailEnd type="none" w="med" len="med"/>
+                    </a:lnR>
+                    <a:lnT w="12700" cap="flat" cmpd="sng" algn="ctr">
+                      <a:solidFill>
+                        <a:schemeClr val="tx1"/>
+                      </a:solidFill>
+                      <a:prstDash val="solid"/>
+                      <a:round/>
+                      <a:headEnd type="none" w="med" len="med"/>
+                      <a:tailEnd type="none" w="med" len="med"/>
+                    </a:lnT>
+                    <a:lnB w="12700" cap="flat" cmpd="sng" algn="ctr">
+                      <a:solidFill>
+                        <a:schemeClr val="tx1"/>
+                      </a:solidFill>
+                      <a:prstDash val="solid"/>
+                      <a:round/>
+                      <a:headEnd type="none" w="med" len="med"/>
+                      <a:tailEnd type="none" w="med" len="med"/>
+                    </a:lnB>
+                    <a:solidFill>
+                      <a:schemeClr val="bg1"/>
+                    </a:solidFill>
+                  </a:tcPr>
+                </a:tc>
+                <a:tc>
+                  <a:txBody>
+                    <a:bodyPr/>
+                    <a:lstStyle/>
+                    <a:p>
+                      <a:r>
+                        <a:rPr kumimoji="1" lang="en-US" altLang="ja-JP" sz="1200">
+                          <a:latin typeface="Cascadia Code SemiBold" panose="020B0609020000020004" pitchFamily="49" charset="0"/>
+                          <a:ea typeface="Cascadia Code SemiBold" panose="020B0609020000020004" pitchFamily="49" charset="0"/>
+                          <a:cs typeface="Cascadia Code SemiBold" panose="020B0609020000020004" pitchFamily="49" charset="0"/>
+                        </a:rPr>
+                        <a:t>This SCRIPT evaluates the contents of </a:t>
+                      </a:r>
+                      <a:r>
+                        <a:rPr kumimoji="1" lang="en-US" altLang="ja-JP" sz="1200" b="1" i="1">
+                          <a:solidFill>
+                            <a:srgbClr val="FF0000"/>
+                          </a:solidFill>
+                          <a:latin typeface="Cascadia Code SemiBold" panose="020B0609020000020004" pitchFamily="49" charset="0"/>
+                          <a:ea typeface="Cascadia Code SemiBold" panose="020B0609020000020004" pitchFamily="49" charset="0"/>
+                          <a:cs typeface="Cascadia Code SemiBold" panose="020B0609020000020004" pitchFamily="49" charset="0"/>
+                        </a:rPr>
+                        <a:t>work/*.xlsx</a:t>
+                      </a:r>
+                      <a:r>
+                        <a:rPr kumimoji="1" lang="en-US" altLang="ja-JP" sz="1200">
+                          <a:latin typeface="Cascadia Code SemiBold" panose="020B0609020000020004" pitchFamily="49" charset="0"/>
+                          <a:ea typeface="Cascadia Code SemiBold" panose="020B0609020000020004" pitchFamily="49" charset="0"/>
+                          <a:cs typeface="Cascadia Code SemiBold" panose="020B0609020000020004" pitchFamily="49" charset="0"/>
+                        </a:rPr>
+                        <a:t> against </a:t>
+                      </a:r>
+                      <a:r>
+                        <a:rPr kumimoji="1" lang="en-US" altLang="ja-JP" sz="1200" b="1" i="1">
+                          <a:solidFill>
+                            <a:srgbClr val="FF0000"/>
+                          </a:solidFill>
+                          <a:latin typeface="Cascadia Code SemiBold" panose="020B0609020000020004" pitchFamily="49" charset="0"/>
+                          <a:ea typeface="Cascadia Code SemiBold" panose="020B0609020000020004" pitchFamily="49" charset="0"/>
+                          <a:cs typeface="Cascadia Code SemiBold" panose="020B0609020000020004" pitchFamily="49" charset="0"/>
+                        </a:rPr>
+                        <a:t>rubric/*.json</a:t>
+                      </a:r>
+                      <a:r>
+                        <a:rPr kumimoji="1" lang="en-US" altLang="ja-JP" sz="1200">
+                          <a:latin typeface="Cascadia Code SemiBold" panose="020B0609020000020004" pitchFamily="49" charset="0"/>
+                          <a:ea typeface="Cascadia Code SemiBold" panose="020B0609020000020004" pitchFamily="49" charset="0"/>
+                          <a:cs typeface="Cascadia Code SemiBold" panose="020B0609020000020004" pitchFamily="49" charset="0"/>
+                        </a:rPr>
+                        <a:t> and writes the results to </a:t>
+                      </a:r>
+                      <a:r>
+                        <a:rPr kumimoji="1" lang="en-US" altLang="ja-JP" sz="1200" b="1" i="1">
+                          <a:solidFill>
+                            <a:srgbClr val="FF0000"/>
+                          </a:solidFill>
+                          <a:latin typeface="Cascadia Code SemiBold" panose="020B0609020000020004" pitchFamily="49" charset="0"/>
+                          <a:ea typeface="Cascadia Code SemiBold" panose="020B0609020000020004" pitchFamily="49" charset="0"/>
+                          <a:cs typeface="Cascadia Code SemiBold" panose="020B0609020000020004" pitchFamily="49" charset="0"/>
+                        </a:rPr>
+                        <a:t>work/*.xlsx</a:t>
+                      </a:r>
+                      <a:r>
+                        <a:rPr kumimoji="1" lang="en-US" altLang="ja-JP" sz="1200" b="0" i="0">
+                          <a:solidFill>
+                            <a:schemeClr val="tx1"/>
+                          </a:solidFill>
+                          <a:latin typeface="Cascadia Code SemiBold" panose="020B0609020000020004" pitchFamily="49" charset="0"/>
+                          <a:ea typeface="Cascadia Code SemiBold" panose="020B0609020000020004" pitchFamily="49" charset="0"/>
+                          <a:cs typeface="Cascadia Code SemiBold" panose="020B0609020000020004" pitchFamily="49" charset="0"/>
+                        </a:rPr>
+                        <a:t>, and </a:t>
+                      </a:r>
+                      <a:r>
+                        <a:rPr kumimoji="1" lang="en-US" altLang="ja-JP" sz="1200">
+                          <a:latin typeface="Cascadia Code SemiBold" panose="020B0609020000020004" pitchFamily="49" charset="0"/>
+                          <a:ea typeface="Cascadia Code SemiBold" panose="020B0609020000020004" pitchFamily="49" charset="0"/>
+                          <a:cs typeface="Cascadia Code SemiBold" panose="020B0609020000020004" pitchFamily="49" charset="0"/>
+                        </a:rPr>
+                        <a:t>generates </a:t>
+                      </a:r>
+                      <a:r>
+                        <a:rPr kumimoji="1" lang="en-US" altLang="ja-JP" sz="1200">
+                          <a:solidFill>
+                            <a:srgbClr val="FF0000"/>
+                          </a:solidFill>
+                          <a:latin typeface="Cascadia Code SemiBold" panose="020B0609020000020004" pitchFamily="49" charset="0"/>
+                          <a:ea typeface="Cascadia Code SemiBold" panose="020B0609020000020004" pitchFamily="49" charset="0"/>
+                          <a:cs typeface="Cascadia Code SemiBold" panose="020B0609020000020004" pitchFamily="49" charset="0"/>
+                        </a:rPr>
+                        <a:t>report.html</a:t>
+                      </a:r>
+                      <a:r>
+                        <a:rPr kumimoji="1" lang="en-US" altLang="ja-JP" sz="1200">
+                          <a:latin typeface="Cascadia Code SemiBold" panose="020B0609020000020004" pitchFamily="49" charset="0"/>
+                          <a:ea typeface="Cascadia Code SemiBold" panose="020B0609020000020004" pitchFamily="49" charset="0"/>
+                          <a:cs typeface="Cascadia Code SemiBold" panose="020B0609020000020004" pitchFamily="49" charset="0"/>
+                        </a:rPr>
+                        <a:t> based on it.</a:t>
+                      </a:r>
+                    </a:p>
+                  </a:txBody>
+                  <a:tcPr marL="137160" marR="137160" marT="137160" marB="137160">
+                    <a:lnL w="12700" cap="flat" cmpd="sng" algn="ctr">
+                      <a:solidFill>
+                        <a:schemeClr val="tx1"/>
+                      </a:solidFill>
+                      <a:prstDash val="solid"/>
+                      <a:round/>
+                      <a:headEnd type="none" w="med" len="med"/>
+                      <a:tailEnd type="none" w="med" len="med"/>
+                    </a:lnL>
+                    <a:lnR w="12700" cap="flat" cmpd="sng" algn="ctr">
+                      <a:solidFill>
+                        <a:schemeClr val="tx1"/>
+                      </a:solidFill>
+                      <a:prstDash val="solid"/>
+                      <a:round/>
+                      <a:headEnd type="none" w="med" len="med"/>
+                      <a:tailEnd type="none" w="med" len="med"/>
+                    </a:lnR>
+                    <a:lnT w="12700" cap="flat" cmpd="sng" algn="ctr">
+                      <a:solidFill>
+                        <a:schemeClr val="tx1"/>
+                      </a:solidFill>
+                      <a:prstDash val="solid"/>
+                      <a:round/>
+                      <a:headEnd type="none" w="med" len="med"/>
+                      <a:tailEnd type="none" w="med" len="med"/>
+                    </a:lnT>
+                    <a:lnB w="12700" cap="flat" cmpd="sng" algn="ctr">
+                      <a:solidFill>
+                        <a:schemeClr val="tx1"/>
+                      </a:solidFill>
+                      <a:prstDash val="solid"/>
+                      <a:round/>
+                      <a:headEnd type="none" w="med" len="med"/>
+                      <a:tailEnd type="none" w="med" len="med"/>
+                    </a:lnB>
+                    <a:solidFill>
+                      <a:schemeClr val="bg1"/>
+                    </a:solidFill>
+                  </a:tcPr>
+                </a:tc>
+                <a:extLst>
+                  <a:ext uri="{0D108BD9-81ED-4DB2-BD59-A6C34878D82A}">
+                    <a16:rowId xmlns:a16="http://schemas.microsoft.com/office/drawing/2014/main" val="4198762670"/>
+                  </a:ext>
+                </a:extLst>
+              </a:tr>
+              <a:tr h="417498">
+                <a:tc>
+                  <a:txBody>
+                    <a:bodyPr/>
+                    <a:lstStyle/>
+                    <a:p>
+                      <a:r>
+                        <a:rPr kumimoji="1" lang="en-US" altLang="ja-JP" sz="1200">
+                          <a:latin typeface="Cascadia Code SemiBold" panose="020B0609020000020004" pitchFamily="49" charset="0"/>
+                          <a:ea typeface="Cascadia Code SemiBold" panose="020B0609020000020004" pitchFamily="49" charset="0"/>
+                          <a:cs typeface="Cascadia Code SemiBold" panose="020B0609020000020004" pitchFamily="49" charset="0"/>
+                        </a:rPr>
+                        <a:t>rubric/*.json</a:t>
+                      </a:r>
+                      <a:endParaRPr kumimoji="1" lang="ja-JP" altLang="en-US" sz="1200">
+                        <a:latin typeface="Cascadia Code SemiBold" panose="020B0609020000020004" pitchFamily="49" charset="0"/>
+                        <a:ea typeface="BIZ UDゴシック" panose="020B0400000000000000" pitchFamily="49" charset="-128"/>
+                        <a:cs typeface="Cascadia Code SemiBold" panose="020B0609020000020004" pitchFamily="49" charset="0"/>
+                      </a:endParaRPr>
+                    </a:p>
+                  </a:txBody>
+                  <a:tcPr marL="137160" marR="137160" marT="137160" marB="137160">
+                    <a:lnL w="12700" cap="flat" cmpd="sng" algn="ctr">
+                      <a:solidFill>
+                        <a:schemeClr val="tx1"/>
+                      </a:solidFill>
+                      <a:prstDash val="solid"/>
+                      <a:round/>
+                      <a:headEnd type="none" w="med" len="med"/>
+                      <a:tailEnd type="none" w="med" len="med"/>
+                    </a:lnL>
+                    <a:lnR w="12700" cap="flat" cmpd="sng" algn="ctr">
+                      <a:solidFill>
+                        <a:schemeClr val="tx1"/>
+                      </a:solidFill>
+                      <a:prstDash val="solid"/>
+                      <a:round/>
+                      <a:headEnd type="none" w="med" len="med"/>
+                      <a:tailEnd type="none" w="med" len="med"/>
+                    </a:lnR>
+                    <a:lnT w="12700" cap="flat" cmpd="sng" algn="ctr">
+                      <a:solidFill>
+                        <a:schemeClr val="tx1"/>
+                      </a:solidFill>
+                      <a:prstDash val="solid"/>
+                      <a:round/>
+                      <a:headEnd type="none" w="med" len="med"/>
+                      <a:tailEnd type="none" w="med" len="med"/>
+                    </a:lnT>
+                    <a:lnB w="12700" cap="flat" cmpd="sng" algn="ctr">
+                      <a:solidFill>
+                        <a:schemeClr val="tx1"/>
+                      </a:solidFill>
+                      <a:prstDash val="solid"/>
+                      <a:round/>
+                      <a:headEnd type="none" w="med" len="med"/>
+                      <a:tailEnd type="none" w="med" len="med"/>
+                    </a:lnB>
+                    <a:solidFill>
+                      <a:schemeClr val="bg1"/>
+                    </a:solidFill>
+                  </a:tcPr>
+                </a:tc>
+                <a:tc>
+                  <a:txBody>
+                    <a:bodyPr/>
+                    <a:lstStyle/>
+                    <a:p>
+                      <a:r>
+                        <a:rPr kumimoji="1" lang="en-US" altLang="ja-JP" sz="1200">
+                          <a:latin typeface="Cascadia Code SemiBold" panose="020B0609020000020004" pitchFamily="49" charset="0"/>
+                          <a:ea typeface="Cascadia Code SemiBold" panose="020B0609020000020004" pitchFamily="49" charset="0"/>
+                          <a:cs typeface="Cascadia Code SemiBold" panose="020B0609020000020004" pitchFamily="49" charset="0"/>
+                        </a:rPr>
+                        <a:t>This JSON defines the criteria used for both initial prompt template generation and LLM-as-a-Judge evaluation.</a:t>
+                      </a:r>
+                    </a:p>
+                  </a:txBody>
+                  <a:tcPr marL="137160" marR="137160" marT="137160" marB="137160">
+                    <a:lnL w="12700" cap="flat" cmpd="sng" algn="ctr">
+                      <a:solidFill>
+                        <a:schemeClr val="tx1"/>
+                      </a:solidFill>
+                      <a:prstDash val="solid"/>
+                      <a:round/>
+                      <a:headEnd type="none" w="med" len="med"/>
+                      <a:tailEnd type="none" w="med" len="med"/>
+                    </a:lnL>
+                    <a:lnR w="12700" cap="flat" cmpd="sng" algn="ctr">
+                      <a:solidFill>
+                        <a:schemeClr val="tx1"/>
+                      </a:solidFill>
+                      <a:prstDash val="solid"/>
+                      <a:round/>
+                      <a:headEnd type="none" w="med" len="med"/>
+                      <a:tailEnd type="none" w="med" len="med"/>
+                    </a:lnR>
+                    <a:lnT w="12700" cap="flat" cmpd="sng" algn="ctr">
+                      <a:solidFill>
+                        <a:schemeClr val="tx1"/>
+                      </a:solidFill>
+                      <a:prstDash val="solid"/>
+                      <a:round/>
+                      <a:headEnd type="none" w="med" len="med"/>
+                      <a:tailEnd type="none" w="med" len="med"/>
+                    </a:lnT>
+                    <a:lnB w="12700" cap="flat" cmpd="sng" algn="ctr">
+                      <a:solidFill>
+                        <a:schemeClr val="tx1"/>
+                      </a:solidFill>
+                      <a:prstDash val="solid"/>
+                      <a:round/>
+                      <a:headEnd type="none" w="med" len="med"/>
+                      <a:tailEnd type="none" w="med" len="med"/>
+                    </a:lnB>
+                    <a:solidFill>
+                      <a:schemeClr val="bg1"/>
+                    </a:solidFill>
+                  </a:tcPr>
+                </a:tc>
+                <a:extLst>
+                  <a:ext uri="{0D108BD9-81ED-4DB2-BD59-A6C34878D82A}">
+                    <a16:rowId xmlns:a16="http://schemas.microsoft.com/office/drawing/2014/main" val="1707978084"/>
+                  </a:ext>
+                </a:extLst>
+              </a:tr>
+              <a:tr h="0">
+                <a:tc>
+                  <a:txBody>
+                    <a:bodyPr/>
+                    <a:lstStyle/>
+                    <a:p>
+                      <a:r>
+                        <a:rPr kumimoji="1" lang="en-US" altLang="ja-JP" sz="1200">
+                          <a:latin typeface="Cascadia Code SemiBold" panose="020B0609020000020004" pitchFamily="49" charset="0"/>
+                          <a:ea typeface="Cascadia Code SemiBold" panose="020B0609020000020004" pitchFamily="49" charset="0"/>
+                          <a:cs typeface="Cascadia Code SemiBold" panose="020B0609020000020004" pitchFamily="49" charset="0"/>
+                        </a:rPr>
+                        <a:t>source/*.txt</a:t>
+                      </a:r>
+                      <a:endParaRPr kumimoji="1" lang="ja-JP" altLang="en-US" sz="1200">
+                        <a:latin typeface="Cascadia Code SemiBold" panose="020B0609020000020004" pitchFamily="49" charset="0"/>
+                        <a:ea typeface="BIZ UDゴシック" panose="020B0400000000000000" pitchFamily="49" charset="-128"/>
+                        <a:cs typeface="Cascadia Code SemiBold" panose="020B0609020000020004" pitchFamily="49" charset="0"/>
+                      </a:endParaRPr>
+                    </a:p>
+                  </a:txBody>
+                  <a:tcPr marL="137160" marR="137160" marT="137160" marB="137160">
+                    <a:lnL w="12700" cap="flat" cmpd="sng" algn="ctr">
+                      <a:solidFill>
+                        <a:schemeClr val="tx1"/>
+                      </a:solidFill>
+                      <a:prstDash val="solid"/>
+                      <a:round/>
+                      <a:headEnd type="none" w="med" len="med"/>
+                      <a:tailEnd type="none" w="med" len="med"/>
+                    </a:lnL>
+                    <a:lnR w="12700" cap="flat" cmpd="sng" algn="ctr">
+                      <a:solidFill>
+                        <a:schemeClr val="tx1"/>
+                      </a:solidFill>
+                      <a:prstDash val="solid"/>
+                      <a:round/>
+                      <a:headEnd type="none" w="med" len="med"/>
+                      <a:tailEnd type="none" w="med" len="med"/>
+                    </a:lnR>
+                    <a:lnT w="12700" cap="flat" cmpd="sng" algn="ctr">
+                      <a:solidFill>
+                        <a:schemeClr val="tx1"/>
+                      </a:solidFill>
+                      <a:prstDash val="solid"/>
+                      <a:round/>
+                      <a:headEnd type="none" w="med" len="med"/>
+                      <a:tailEnd type="none" w="med" len="med"/>
+                    </a:lnT>
+                    <a:lnB w="12700" cap="flat" cmpd="sng" algn="ctr">
+                      <a:solidFill>
+                        <a:schemeClr val="tx1"/>
+                      </a:solidFill>
+                      <a:prstDash val="solid"/>
+                      <a:round/>
+                      <a:headEnd type="none" w="med" len="med"/>
+                      <a:tailEnd type="none" w="med" len="med"/>
+                    </a:lnB>
+                    <a:solidFill>
+                      <a:schemeClr val="bg1"/>
+                    </a:solidFill>
+                  </a:tcPr>
+                </a:tc>
+                <a:tc>
+                  <a:txBody>
+                    <a:bodyPr/>
+                    <a:lstStyle/>
+                    <a:p>
+                      <a:r>
+                        <a:rPr kumimoji="1" lang="en-US" altLang="ja-JP" sz="1200">
+                          <a:latin typeface="Cascadia Code SemiBold" panose="020B0609020000020004" pitchFamily="49" charset="0"/>
+                          <a:ea typeface="Cascadia Code SemiBold" panose="020B0609020000020004" pitchFamily="49" charset="0"/>
+                          <a:cs typeface="Cascadia Code SemiBold" panose="020B0609020000020004" pitchFamily="49" charset="0"/>
+                        </a:rPr>
+                        <a:t>This TXT file contains the original text.</a:t>
+                      </a:r>
+                    </a:p>
+                  </a:txBody>
+                  <a:tcPr marL="137160" marR="137160" marT="137160" marB="137160">
+                    <a:lnL w="12700" cap="flat" cmpd="sng" algn="ctr">
+                      <a:solidFill>
+                        <a:schemeClr val="tx1"/>
+                      </a:solidFill>
+                      <a:prstDash val="solid"/>
+                      <a:round/>
+                      <a:headEnd type="none" w="med" len="med"/>
+                      <a:tailEnd type="none" w="med" len="med"/>
+                    </a:lnL>
+                    <a:lnR w="12700" cap="flat" cmpd="sng" algn="ctr">
+                      <a:solidFill>
+                        <a:schemeClr val="tx1"/>
+                      </a:solidFill>
+                      <a:prstDash val="solid"/>
+                      <a:round/>
+                      <a:headEnd type="none" w="med" len="med"/>
+                      <a:tailEnd type="none" w="med" len="med"/>
+                    </a:lnR>
+                    <a:lnT w="12700" cap="flat" cmpd="sng" algn="ctr">
+                      <a:solidFill>
+                        <a:schemeClr val="tx1"/>
+                      </a:solidFill>
+                      <a:prstDash val="solid"/>
+                      <a:round/>
+                      <a:headEnd type="none" w="med" len="med"/>
+                      <a:tailEnd type="none" w="med" len="med"/>
+                    </a:lnT>
+                    <a:lnB w="12700" cap="flat" cmpd="sng" algn="ctr">
+                      <a:solidFill>
+                        <a:schemeClr val="tx1"/>
+                      </a:solidFill>
+                      <a:prstDash val="solid"/>
+                      <a:round/>
+                      <a:headEnd type="none" w="med" len="med"/>
+                      <a:tailEnd type="none" w="med" len="med"/>
+                    </a:lnB>
+                    <a:solidFill>
+                      <a:schemeClr val="bg1"/>
+                    </a:solidFill>
+                  </a:tcPr>
+                </a:tc>
+                <a:extLst>
+                  <a:ext uri="{0D108BD9-81ED-4DB2-BD59-A6C34878D82A}">
+                    <a16:rowId xmlns:a16="http://schemas.microsoft.com/office/drawing/2014/main" val="1262082791"/>
+                  </a:ext>
+                </a:extLst>
+              </a:tr>
+              <a:tr h="0">
+                <a:tc>
+                  <a:txBody>
+                    <a:bodyPr/>
+                    <a:lstStyle/>
+                    <a:p>
+                      <a:r>
+                        <a:rPr kumimoji="1" lang="en-US" altLang="ja-JP" sz="1200">
+                          <a:latin typeface="Cascadia Code SemiBold" panose="020B0609020000020004" pitchFamily="49" charset="0"/>
+                          <a:ea typeface="Cascadia Code SemiBold" panose="020B0609020000020004" pitchFamily="49" charset="0"/>
+                          <a:cs typeface="Cascadia Code SemiBold" panose="020B0609020000020004" pitchFamily="49" charset="0"/>
+                        </a:rPr>
+                        <a:t>supports/llmj-initial.py</a:t>
+                      </a:r>
+                      <a:endParaRPr kumimoji="1" lang="ja-JP" altLang="en-US" sz="1200">
+                        <a:latin typeface="Cascadia Code SemiBold" panose="020B0609020000020004" pitchFamily="49" charset="0"/>
+                        <a:ea typeface="BIZ UDゴシック" panose="020B0400000000000000" pitchFamily="49" charset="-128"/>
+                        <a:cs typeface="Cascadia Code SemiBold" panose="020B0609020000020004" pitchFamily="49" charset="0"/>
+                      </a:endParaRPr>
+                    </a:p>
+                  </a:txBody>
+                  <a:tcPr marL="137160" marR="137160" marT="137160" marB="137160">
+                    <a:lnL w="12700" cap="flat" cmpd="sng" algn="ctr">
+                      <a:solidFill>
+                        <a:schemeClr val="tx1"/>
+                      </a:solidFill>
+                      <a:prstDash val="solid"/>
+                      <a:round/>
+                      <a:headEnd type="none" w="med" len="med"/>
+                      <a:tailEnd type="none" w="med" len="med"/>
+                    </a:lnL>
+                    <a:lnR w="12700" cap="flat" cmpd="sng" algn="ctr">
+                      <a:solidFill>
+                        <a:schemeClr val="tx1"/>
+                      </a:solidFill>
+                      <a:prstDash val="solid"/>
+                      <a:round/>
+                      <a:headEnd type="none" w="med" len="med"/>
+                      <a:tailEnd type="none" w="med" len="med"/>
+                    </a:lnR>
+                    <a:lnT w="12700" cap="flat" cmpd="sng" algn="ctr">
+                      <a:solidFill>
+                        <a:schemeClr val="tx1"/>
+                      </a:solidFill>
+                      <a:prstDash val="solid"/>
+                      <a:round/>
+                      <a:headEnd type="none" w="med" len="med"/>
+                      <a:tailEnd type="none" w="med" len="med"/>
+                    </a:lnT>
+                    <a:lnB w="12700" cap="flat" cmpd="sng" algn="ctr">
+                      <a:solidFill>
+                        <a:schemeClr val="tx1"/>
+                      </a:solidFill>
+                      <a:prstDash val="solid"/>
+                      <a:round/>
+                      <a:headEnd type="none" w="med" len="med"/>
+                      <a:tailEnd type="none" w="med" len="med"/>
+                    </a:lnB>
+                    <a:solidFill>
+                      <a:schemeClr val="bg1"/>
+                    </a:solidFill>
+                  </a:tcPr>
+                </a:tc>
+                <a:tc>
+                  <a:txBody>
+                    <a:bodyPr/>
+                    <a:lstStyle/>
+                    <a:p>
+                      <a:r>
+                        <a:rPr kumimoji="1" lang="en-US" altLang="ja-JP" sz="1200">
+                          <a:latin typeface="Cascadia Code SemiBold" panose="020B0609020000020004" pitchFamily="49" charset="0"/>
+                          <a:ea typeface="Cascadia Code SemiBold" panose="020B0609020000020004" pitchFamily="49" charset="0"/>
+                          <a:cs typeface="Cascadia Code SemiBold" panose="020B0609020000020004" pitchFamily="49" charset="0"/>
+                        </a:rPr>
+                        <a:t>This SCRIPT generates prompt templates from </a:t>
+                      </a:r>
+                      <a:r>
+                        <a:rPr kumimoji="1" lang="en-US" altLang="ja-JP" sz="1200" b="1" i="1">
+                          <a:solidFill>
+                            <a:srgbClr val="FF0000"/>
+                          </a:solidFill>
+                          <a:latin typeface="Cascadia Code SemiBold" panose="020B0609020000020004" pitchFamily="49" charset="0"/>
+                          <a:ea typeface="Cascadia Code SemiBold" panose="020B0609020000020004" pitchFamily="49" charset="0"/>
+                          <a:cs typeface="Cascadia Code SemiBold" panose="020B0609020000020004" pitchFamily="49" charset="0"/>
+                        </a:rPr>
+                        <a:t>rubric/*.json</a:t>
+                      </a:r>
+                      <a:r>
+                        <a:rPr kumimoji="1" lang="en-US" altLang="ja-JP" sz="1200">
+                          <a:latin typeface="Cascadia Code SemiBold" panose="020B0609020000020004" pitchFamily="49" charset="0"/>
+                          <a:ea typeface="Cascadia Code SemiBold" panose="020B0609020000020004" pitchFamily="49" charset="0"/>
+                          <a:cs typeface="Cascadia Code SemiBold" panose="020B0609020000020004" pitchFamily="49" charset="0"/>
+                        </a:rPr>
+                        <a:t> and writes them to </a:t>
+                      </a:r>
+                      <a:r>
+                        <a:rPr kumimoji="1" lang="en-US" altLang="ja-JP" sz="1200" b="1" i="1">
+                          <a:solidFill>
+                            <a:srgbClr val="FF0000"/>
+                          </a:solidFill>
+                          <a:latin typeface="Cascadia Code SemiBold" panose="020B0609020000020004" pitchFamily="49" charset="0"/>
+                          <a:ea typeface="Cascadia Code SemiBold" panose="020B0609020000020004" pitchFamily="49" charset="0"/>
+                          <a:cs typeface="Cascadia Code SemiBold" panose="020B0609020000020004" pitchFamily="49" charset="0"/>
+                        </a:rPr>
+                        <a:t>work/*.txt</a:t>
+                      </a:r>
+                      <a:r>
+                        <a:rPr kumimoji="1" lang="en-US" altLang="ja-JP" sz="1200">
+                          <a:latin typeface="Cascadia Code SemiBold" panose="020B0609020000020004" pitchFamily="49" charset="0"/>
+                          <a:ea typeface="Cascadia Code SemiBold" panose="020B0609020000020004" pitchFamily="49" charset="0"/>
+                          <a:cs typeface="Cascadia Code SemiBold" panose="020B0609020000020004" pitchFamily="49" charset="0"/>
+                        </a:rPr>
+                        <a:t>. These prompts serve as a baseline for human tuning.</a:t>
+                      </a:r>
+                    </a:p>
+                  </a:txBody>
+                  <a:tcPr marL="137160" marR="137160" marT="137160" marB="137160">
+                    <a:lnL w="12700" cap="flat" cmpd="sng" algn="ctr">
+                      <a:solidFill>
+                        <a:schemeClr val="tx1"/>
+                      </a:solidFill>
+                      <a:prstDash val="solid"/>
+                      <a:round/>
+                      <a:headEnd type="none" w="med" len="med"/>
+                      <a:tailEnd type="none" w="med" len="med"/>
+                    </a:lnL>
+                    <a:lnR w="12700" cap="flat" cmpd="sng" algn="ctr">
+                      <a:solidFill>
+                        <a:schemeClr val="tx1"/>
+                      </a:solidFill>
+                      <a:prstDash val="solid"/>
+                      <a:round/>
+                      <a:headEnd type="none" w="med" len="med"/>
+                      <a:tailEnd type="none" w="med" len="med"/>
+                    </a:lnR>
+                    <a:lnT w="12700" cap="flat" cmpd="sng" algn="ctr">
+                      <a:solidFill>
+                        <a:schemeClr val="tx1"/>
+                      </a:solidFill>
+                      <a:prstDash val="solid"/>
+                      <a:round/>
+                      <a:headEnd type="none" w="med" len="med"/>
+                      <a:tailEnd type="none" w="med" len="med"/>
+                    </a:lnT>
+                    <a:lnB w="12700" cap="flat" cmpd="sng" algn="ctr">
+                      <a:solidFill>
+                        <a:schemeClr val="tx1"/>
+                      </a:solidFill>
+                      <a:prstDash val="solid"/>
+                      <a:round/>
+                      <a:headEnd type="none" w="med" len="med"/>
+                      <a:tailEnd type="none" w="med" len="med"/>
+                    </a:lnB>
+                    <a:solidFill>
+                      <a:schemeClr val="bg1"/>
+                    </a:solidFill>
+                  </a:tcPr>
+                </a:tc>
+                <a:extLst>
+                  <a:ext uri="{0D108BD9-81ED-4DB2-BD59-A6C34878D82A}">
+                    <a16:rowId xmlns:a16="http://schemas.microsoft.com/office/drawing/2014/main" val="3817967045"/>
+                  </a:ext>
+                </a:extLst>
+              </a:tr>
+              <a:tr h="0">
+                <a:tc>
+                  <a:txBody>
+                    <a:bodyPr/>
+                    <a:lstStyle/>
+                    <a:p>
+                      <a:pPr marL="0" marR="0" lvl="0" indent="0" algn="l" defTabSz="914400" rtl="0" eaLnBrk="1" fontAlgn="auto" latinLnBrk="0" hangingPunct="1">
+                        <a:lnSpc>
+                          <a:spcPct val="100000"/>
+                        </a:lnSpc>
+                        <a:spcBef>
+                          <a:spcPts val="0"/>
+                        </a:spcBef>
+                        <a:spcAft>
+                          <a:spcPts val="0"/>
+                        </a:spcAft>
+                        <a:buClrTx/>
+                        <a:buSzTx/>
+                        <a:buFontTx/>
+                        <a:buNone/>
+                        <a:tabLst/>
+                        <a:defRPr/>
+                      </a:pPr>
+                      <a:r>
+                        <a:rPr kumimoji="1" lang="en-US" altLang="ja-JP" sz="1200">
+                          <a:latin typeface="Cascadia Code SemiBold" panose="020B0609020000020004" pitchFamily="49" charset="0"/>
+                          <a:ea typeface="Cascadia Code SemiBold" panose="020B0609020000020004" pitchFamily="49" charset="0"/>
+                          <a:cs typeface="Cascadia Code SemiBold" panose="020B0609020000020004" pitchFamily="49" charset="0"/>
+                        </a:rPr>
+                        <a:t>supports/llmj-feedback.py</a:t>
+                      </a:r>
+                      <a:endParaRPr kumimoji="1" lang="ja-JP" altLang="en-US" sz="1200">
+                        <a:latin typeface="Cascadia Code SemiBold" panose="020B0609020000020004" pitchFamily="49" charset="0"/>
+                        <a:ea typeface="BIZ UDゴシック" panose="020B0400000000000000" pitchFamily="49" charset="-128"/>
+                        <a:cs typeface="Cascadia Code SemiBold" panose="020B0609020000020004" pitchFamily="49" charset="0"/>
+                      </a:endParaRPr>
+                    </a:p>
+                  </a:txBody>
+                  <a:tcPr marL="137160" marR="137160" marT="137160" marB="137160">
+                    <a:lnL w="12700" cap="flat" cmpd="sng" algn="ctr">
+                      <a:solidFill>
+                        <a:schemeClr val="tx1"/>
+                      </a:solidFill>
+                      <a:prstDash val="solid"/>
+                      <a:round/>
+                      <a:headEnd type="none" w="med" len="med"/>
+                      <a:tailEnd type="none" w="med" len="med"/>
+                    </a:lnL>
+                    <a:lnR w="12700" cap="flat" cmpd="sng" algn="ctr">
+                      <a:solidFill>
+                        <a:schemeClr val="tx1"/>
+                      </a:solidFill>
+                      <a:prstDash val="solid"/>
+                      <a:round/>
+                      <a:headEnd type="none" w="med" len="med"/>
+                      <a:tailEnd type="none" w="med" len="med"/>
+                    </a:lnR>
+                    <a:lnT w="12700" cap="flat" cmpd="sng" algn="ctr">
+                      <a:solidFill>
+                        <a:schemeClr val="tx1"/>
+                      </a:solidFill>
+                      <a:prstDash val="solid"/>
+                      <a:round/>
+                      <a:headEnd type="none" w="med" len="med"/>
+                      <a:tailEnd type="none" w="med" len="med"/>
+                    </a:lnT>
+                    <a:lnB w="12700" cap="flat" cmpd="sng" algn="ctr">
+                      <a:solidFill>
+                        <a:schemeClr val="tx1"/>
+                      </a:solidFill>
+                      <a:prstDash val="solid"/>
+                      <a:round/>
+                      <a:headEnd type="none" w="med" len="med"/>
+                      <a:tailEnd type="none" w="med" len="med"/>
+                    </a:lnB>
+                    <a:solidFill>
+                      <a:schemeClr val="bg1"/>
+                    </a:solidFill>
+                  </a:tcPr>
+                </a:tc>
+                <a:tc>
+                  <a:txBody>
+                    <a:bodyPr/>
+                    <a:lstStyle/>
+                    <a:p>
+                      <a:pPr marL="0" marR="0" lvl="0" indent="0" algn="l" defTabSz="914400" rtl="0" eaLnBrk="1" fontAlgn="auto" latinLnBrk="0" hangingPunct="1">
+                        <a:lnSpc>
+                          <a:spcPct val="100000"/>
+                        </a:lnSpc>
+                        <a:spcBef>
+                          <a:spcPts val="0"/>
+                        </a:spcBef>
+                        <a:spcAft>
+                          <a:spcPts val="0"/>
+                        </a:spcAft>
+                        <a:buClrTx/>
+                        <a:buSzTx/>
+                        <a:buFontTx/>
+                        <a:buNone/>
+                        <a:tabLst/>
+                        <a:defRPr/>
+                      </a:pPr>
+                      <a:r>
+                        <a:rPr kumimoji="1" lang="en-US" altLang="ja-JP" sz="1200">
+                          <a:latin typeface="Cascadia Code SemiBold" panose="020B0609020000020004" pitchFamily="49" charset="0"/>
+                          <a:ea typeface="Cascadia Code SemiBold" panose="020B0609020000020004" pitchFamily="49" charset="0"/>
+                          <a:cs typeface="Cascadia Code SemiBold" panose="020B0609020000020004" pitchFamily="49" charset="0"/>
+                        </a:rPr>
+                        <a:t>This SCRIPT provides improvement suggestions for the </a:t>
+                      </a:r>
+                      <a:r>
+                        <a:rPr kumimoji="1" lang="en-US" altLang="ja-JP" sz="1200" b="1" i="1">
+                          <a:solidFill>
+                            <a:srgbClr val="FF0000"/>
+                          </a:solidFill>
+                          <a:latin typeface="Cascadia Code SemiBold" panose="020B0609020000020004" pitchFamily="49" charset="0"/>
+                          <a:ea typeface="Cascadia Code SemiBold" panose="020B0609020000020004" pitchFamily="49" charset="0"/>
+                          <a:cs typeface="Cascadia Code SemiBold" panose="020B0609020000020004" pitchFamily="49" charset="0"/>
+                        </a:rPr>
+                        <a:t>rubric/*.json</a:t>
+                      </a:r>
+                      <a:r>
+                        <a:rPr kumimoji="1" lang="en-US" altLang="ja-JP" sz="1200">
+                          <a:latin typeface="Cascadia Code SemiBold" panose="020B0609020000020004" pitchFamily="49" charset="0"/>
+                          <a:ea typeface="Cascadia Code SemiBold" panose="020B0609020000020004" pitchFamily="49" charset="0"/>
+                          <a:cs typeface="Cascadia Code SemiBold" panose="020B0609020000020004" pitchFamily="49" charset="0"/>
+                        </a:rPr>
+                        <a:t> or for specific gold data in </a:t>
+                      </a:r>
+                      <a:r>
+                        <a:rPr kumimoji="1" lang="en-US" altLang="ja-JP" sz="1200" b="1" i="1">
+                          <a:solidFill>
+                            <a:srgbClr val="FF0000"/>
+                          </a:solidFill>
+                          <a:latin typeface="Cascadia Code SemiBold" panose="020B0609020000020004" pitchFamily="49" charset="0"/>
+                          <a:ea typeface="Cascadia Code SemiBold" panose="020B0609020000020004" pitchFamily="49" charset="0"/>
+                          <a:cs typeface="Cascadia Code SemiBold" panose="020B0609020000020004" pitchFamily="49" charset="0"/>
+                        </a:rPr>
+                        <a:t>work/*.xlsx </a:t>
+                      </a:r>
+                      <a:r>
+                        <a:rPr kumimoji="1" lang="en-US" altLang="ja-JP" sz="1200">
+                          <a:latin typeface="Cascadia Code SemiBold" panose="020B0609020000020004" pitchFamily="49" charset="0"/>
+                          <a:ea typeface="Cascadia Code SemiBold" panose="020B0609020000020004" pitchFamily="49" charset="0"/>
+                          <a:cs typeface="Cascadia Code SemiBold" panose="020B0609020000020004" pitchFamily="49" charset="0"/>
+                        </a:rPr>
+                        <a:t>based on the evaluation results of the gold data.</a:t>
+                      </a:r>
+                    </a:p>
+                  </a:txBody>
+                  <a:tcPr marL="137160" marR="137160" marT="137160" marB="137160">
+                    <a:lnL w="12700" cap="flat" cmpd="sng" algn="ctr">
+                      <a:solidFill>
+                        <a:schemeClr val="tx1"/>
+                      </a:solidFill>
+                      <a:prstDash val="solid"/>
+                      <a:round/>
+                      <a:headEnd type="none" w="med" len="med"/>
+                      <a:tailEnd type="none" w="med" len="med"/>
+                    </a:lnL>
+                    <a:lnR w="12700" cap="flat" cmpd="sng" algn="ctr">
+                      <a:solidFill>
+                        <a:schemeClr val="tx1"/>
+                      </a:solidFill>
+                      <a:prstDash val="solid"/>
+                      <a:round/>
+                      <a:headEnd type="none" w="med" len="med"/>
+                      <a:tailEnd type="none" w="med" len="med"/>
+                    </a:lnR>
+                    <a:lnT w="12700" cap="flat" cmpd="sng" algn="ctr">
+                      <a:solidFill>
+                        <a:schemeClr val="tx1"/>
+                      </a:solidFill>
+                      <a:prstDash val="solid"/>
+                      <a:round/>
+                      <a:headEnd type="none" w="med" len="med"/>
+                      <a:tailEnd type="none" w="med" len="med"/>
+                    </a:lnT>
+                    <a:lnB w="12700" cap="flat" cmpd="sng" algn="ctr">
+                      <a:solidFill>
+                        <a:schemeClr val="tx1"/>
+                      </a:solidFill>
+                      <a:prstDash val="solid"/>
+                      <a:round/>
+                      <a:headEnd type="none" w="med" len="med"/>
+                      <a:tailEnd type="none" w="med" len="med"/>
+                    </a:lnB>
+                    <a:solidFill>
+                      <a:schemeClr val="bg1"/>
+                    </a:solidFill>
+                  </a:tcPr>
+                </a:tc>
+                <a:extLst>
+                  <a:ext uri="{0D108BD9-81ED-4DB2-BD59-A6C34878D82A}">
+                    <a16:rowId xmlns:a16="http://schemas.microsoft.com/office/drawing/2014/main" val="65308053"/>
+                  </a:ext>
+                </a:extLst>
+              </a:tr>
+              <a:tr h="0">
+                <a:tc>
+                  <a:txBody>
+                    <a:bodyPr/>
+                    <a:lstStyle/>
+                    <a:p>
+                      <a:pPr marL="0" marR="0" lvl="0" indent="0" algn="l" defTabSz="914400" rtl="0" eaLnBrk="1" fontAlgn="auto" latinLnBrk="0" hangingPunct="1">
+                        <a:lnSpc>
+                          <a:spcPct val="100000"/>
+                        </a:lnSpc>
+                        <a:spcBef>
+                          <a:spcPts val="0"/>
+                        </a:spcBef>
+                        <a:spcAft>
+                          <a:spcPts val="0"/>
+                        </a:spcAft>
+                        <a:buClrTx/>
+                        <a:buSzTx/>
+                        <a:buFontTx/>
+                        <a:buNone/>
+                        <a:tabLst/>
+                        <a:defRPr/>
+                      </a:pPr>
+                      <a:r>
+                        <a:rPr kumimoji="1" lang="en-US" altLang="ja-JP" sz="1200">
+                          <a:latin typeface="Cascadia Code SemiBold" panose="020B0609020000020004" pitchFamily="49" charset="0"/>
+                          <a:ea typeface="Cascadia Code SemiBold" panose="020B0609020000020004" pitchFamily="49" charset="0"/>
+                          <a:cs typeface="Cascadia Code SemiBold" panose="020B0609020000020004" pitchFamily="49" charset="0"/>
+                        </a:rPr>
+                        <a:t>supports/template-*</a:t>
+                      </a:r>
+                      <a:endParaRPr kumimoji="1" lang="ja-JP" altLang="en-US" sz="1200">
+                        <a:latin typeface="Cascadia Code SemiBold" panose="020B0609020000020004" pitchFamily="49" charset="0"/>
+                        <a:ea typeface="BIZ UDゴシック" panose="020B0400000000000000" pitchFamily="49" charset="-128"/>
+                        <a:cs typeface="Cascadia Code SemiBold" panose="020B0609020000020004" pitchFamily="49" charset="0"/>
+                      </a:endParaRPr>
+                    </a:p>
+                  </a:txBody>
+                  <a:tcPr marL="137160" marR="137160" marT="137160" marB="137160">
+                    <a:lnL w="12700" cap="flat" cmpd="sng" algn="ctr">
+                      <a:solidFill>
+                        <a:schemeClr val="tx1"/>
+                      </a:solidFill>
+                      <a:prstDash val="solid"/>
+                      <a:round/>
+                      <a:headEnd type="none" w="med" len="med"/>
+                      <a:tailEnd type="none" w="med" len="med"/>
+                    </a:lnL>
+                    <a:lnR w="12700" cap="flat" cmpd="sng" algn="ctr">
+                      <a:solidFill>
+                        <a:schemeClr val="tx1"/>
+                      </a:solidFill>
+                      <a:prstDash val="solid"/>
+                      <a:round/>
+                      <a:headEnd type="none" w="med" len="med"/>
+                      <a:tailEnd type="none" w="med" len="med"/>
+                    </a:lnR>
+                    <a:lnT w="12700" cap="flat" cmpd="sng" algn="ctr">
+                      <a:solidFill>
+                        <a:schemeClr val="tx1"/>
+                      </a:solidFill>
+                      <a:prstDash val="solid"/>
+                      <a:round/>
+                      <a:headEnd type="none" w="med" len="med"/>
+                      <a:tailEnd type="none" w="med" len="med"/>
+                    </a:lnT>
+                    <a:lnB w="12700" cap="flat" cmpd="sng" algn="ctr">
+                      <a:solidFill>
+                        <a:schemeClr val="tx1"/>
+                      </a:solidFill>
+                      <a:prstDash val="solid"/>
+                      <a:round/>
+                      <a:headEnd type="none" w="med" len="med"/>
+                      <a:tailEnd type="none" w="med" len="med"/>
+                    </a:lnB>
+                    <a:solidFill>
+                      <a:schemeClr val="bg1"/>
+                    </a:solidFill>
+                  </a:tcPr>
+                </a:tc>
+                <a:tc>
+                  <a:txBody>
+                    <a:bodyPr/>
+                    <a:lstStyle/>
+                    <a:p>
+                      <a:r>
+                        <a:rPr kumimoji="1" lang="en-US" altLang="ja-JP" sz="1200">
+                          <a:latin typeface="Cascadia Code SemiBold" panose="020B0609020000020004" pitchFamily="49" charset="0"/>
+                          <a:ea typeface="Cascadia Code SemiBold" panose="020B0609020000020004" pitchFamily="49" charset="0"/>
+                          <a:cs typeface="Cascadia Code SemiBold" panose="020B0609020000020004" pitchFamily="49" charset="0"/>
+                        </a:rPr>
+                        <a:t>These templates are used by </a:t>
+                      </a:r>
+                      <a:r>
+                        <a:rPr kumimoji="1" lang="en-US" altLang="ja-JP" sz="1200" b="1" i="1">
+                          <a:solidFill>
+                            <a:srgbClr val="FF0000"/>
+                          </a:solidFill>
+                          <a:latin typeface="Cascadia Code SemiBold" panose="020B0609020000020004" pitchFamily="49" charset="0"/>
+                          <a:ea typeface="Cascadia Code SemiBold" panose="020B0609020000020004" pitchFamily="49" charset="0"/>
+                          <a:cs typeface="Cascadia Code SemiBold" panose="020B0609020000020004" pitchFamily="49" charset="0"/>
+                        </a:rPr>
+                        <a:t>*.py</a:t>
+                      </a:r>
+                      <a:r>
+                        <a:rPr kumimoji="1" lang="en-US" altLang="ja-JP" sz="1200">
+                          <a:latin typeface="Cascadia Code SemiBold" panose="020B0609020000020004" pitchFamily="49" charset="0"/>
+                          <a:ea typeface="Cascadia Code SemiBold" panose="020B0609020000020004" pitchFamily="49" charset="0"/>
+                          <a:cs typeface="Cascadia Code SemiBold" panose="020B0609020000020004" pitchFamily="49" charset="0"/>
+                        </a:rPr>
+                        <a:t> scripts.</a:t>
+                      </a:r>
+                    </a:p>
+                  </a:txBody>
+                  <a:tcPr marL="137160" marR="137160" marT="137160" marB="137160">
+                    <a:lnL w="12700" cap="flat" cmpd="sng" algn="ctr">
+                      <a:solidFill>
+                        <a:schemeClr val="tx1"/>
+                      </a:solidFill>
+                      <a:prstDash val="solid"/>
+                      <a:round/>
+                      <a:headEnd type="none" w="med" len="med"/>
+                      <a:tailEnd type="none" w="med" len="med"/>
+                    </a:lnL>
+                    <a:lnR w="12700" cap="flat" cmpd="sng" algn="ctr">
+                      <a:solidFill>
+                        <a:schemeClr val="tx1"/>
+                      </a:solidFill>
+                      <a:prstDash val="solid"/>
+                      <a:round/>
+                      <a:headEnd type="none" w="med" len="med"/>
+                      <a:tailEnd type="none" w="med" len="med"/>
+                    </a:lnR>
+                    <a:lnT w="12700" cap="flat" cmpd="sng" algn="ctr">
+                      <a:solidFill>
+                        <a:schemeClr val="tx1"/>
+                      </a:solidFill>
+                      <a:prstDash val="solid"/>
+                      <a:round/>
+                      <a:headEnd type="none" w="med" len="med"/>
+                      <a:tailEnd type="none" w="med" len="med"/>
+                    </a:lnT>
+                    <a:lnB w="12700" cap="flat" cmpd="sng" algn="ctr">
+                      <a:solidFill>
+                        <a:schemeClr val="tx1"/>
+                      </a:solidFill>
+                      <a:prstDash val="solid"/>
+                      <a:round/>
+                      <a:headEnd type="none" w="med" len="med"/>
+                      <a:tailEnd type="none" w="med" len="med"/>
+                    </a:lnB>
+                    <a:solidFill>
+                      <a:schemeClr val="bg1"/>
+                    </a:solidFill>
+                  </a:tcPr>
+                </a:tc>
+                <a:extLst>
+                  <a:ext uri="{0D108BD9-81ED-4DB2-BD59-A6C34878D82A}">
+                    <a16:rowId xmlns:a16="http://schemas.microsoft.com/office/drawing/2014/main" val="1259418972"/>
+                  </a:ext>
+                </a:extLst>
+              </a:tr>
+              <a:tr h="417498">
+                <a:tc>
+                  <a:txBody>
+                    <a:bodyPr/>
+                    <a:lstStyle/>
+                    <a:p>
+                      <a:r>
+                        <a:rPr kumimoji="1" lang="en-US" altLang="ja-JP" sz="1200">
+                          <a:latin typeface="Cascadia Code SemiBold" panose="020B0609020000020004" pitchFamily="49" charset="0"/>
+                          <a:ea typeface="Cascadia Code SemiBold" panose="020B0609020000020004" pitchFamily="49" charset="0"/>
+                          <a:cs typeface="Cascadia Code SemiBold" panose="020B0609020000020004" pitchFamily="49" charset="0"/>
+                        </a:rPr>
+                        <a:t>work/*</a:t>
+                      </a:r>
+                      <a:endParaRPr kumimoji="1" lang="ja-JP" altLang="en-US" sz="1200">
+                        <a:latin typeface="Cascadia Code SemiBold" panose="020B0609020000020004" pitchFamily="49" charset="0"/>
+                        <a:ea typeface="BIZ UDゴシック" panose="020B0400000000000000" pitchFamily="49" charset="-128"/>
+                        <a:cs typeface="Cascadia Code SemiBold" panose="020B0609020000020004" pitchFamily="49" charset="0"/>
+                      </a:endParaRPr>
+                    </a:p>
+                  </a:txBody>
+                  <a:tcPr marL="137160" marR="137160" marT="137160" marB="137160">
+                    <a:lnL w="12700" cap="flat" cmpd="sng" algn="ctr">
+                      <a:solidFill>
+                        <a:schemeClr val="tx1"/>
+                      </a:solidFill>
+                      <a:prstDash val="solid"/>
+                      <a:round/>
+                      <a:headEnd type="none" w="med" len="med"/>
+                      <a:tailEnd type="none" w="med" len="med"/>
+                    </a:lnL>
+                    <a:lnR w="12700" cap="flat" cmpd="sng" algn="ctr">
+                      <a:solidFill>
+                        <a:schemeClr val="tx1"/>
+                      </a:solidFill>
+                      <a:prstDash val="solid"/>
+                      <a:round/>
+                      <a:headEnd type="none" w="med" len="med"/>
+                      <a:tailEnd type="none" w="med" len="med"/>
+                    </a:lnR>
+                    <a:lnT w="12700" cap="flat" cmpd="sng" algn="ctr">
+                      <a:solidFill>
+                        <a:schemeClr val="tx1"/>
+                      </a:solidFill>
+                      <a:prstDash val="solid"/>
+                      <a:round/>
+                      <a:headEnd type="none" w="med" len="med"/>
+                      <a:tailEnd type="none" w="med" len="med"/>
+                    </a:lnT>
+                    <a:lnB w="12700" cap="flat" cmpd="sng" algn="ctr">
+                      <a:solidFill>
+                        <a:schemeClr val="tx1"/>
+                      </a:solidFill>
+                      <a:prstDash val="solid"/>
+                      <a:round/>
+                      <a:headEnd type="none" w="med" len="med"/>
+                      <a:tailEnd type="none" w="med" len="med"/>
+                    </a:lnB>
+                    <a:solidFill>
+                      <a:schemeClr val="bg1"/>
+                    </a:solidFill>
+                  </a:tcPr>
+                </a:tc>
+                <a:tc>
+                  <a:txBody>
+                    <a:bodyPr/>
+                    <a:lstStyle/>
+                    <a:p>
+                      <a:r>
+                        <a:rPr kumimoji="1" lang="en-US" altLang="ja-JP" sz="1200">
+                          <a:latin typeface="Cascadia Code SemiBold" panose="020B0609020000020004" pitchFamily="49" charset="0"/>
+                          <a:ea typeface="Cascadia Code SemiBold" panose="020B0609020000020004" pitchFamily="49" charset="0"/>
+                          <a:cs typeface="Cascadia Code SemiBold" panose="020B0609020000020004" pitchFamily="49" charset="0"/>
+                        </a:rPr>
+                        <a:t>This directory contains generated outputs such as </a:t>
+                      </a:r>
+                      <a:r>
+                        <a:rPr kumimoji="1" lang="en-US" altLang="ja-JP" sz="1200" b="1" i="1">
+                          <a:solidFill>
+                            <a:srgbClr val="FF0000"/>
+                          </a:solidFill>
+                          <a:latin typeface="Cascadia Code SemiBold" panose="020B0609020000020004" pitchFamily="49" charset="0"/>
+                          <a:ea typeface="Cascadia Code SemiBold" panose="020B0609020000020004" pitchFamily="49" charset="0"/>
+                          <a:cs typeface="Cascadia Code SemiBold" panose="020B0609020000020004" pitchFamily="49" charset="0"/>
+                        </a:rPr>
+                        <a:t>*.txt</a:t>
+                      </a:r>
+                      <a:r>
+                        <a:rPr kumimoji="1" lang="en-US" altLang="ja-JP" sz="1200">
+                          <a:latin typeface="Cascadia Code SemiBold" panose="020B0609020000020004" pitchFamily="49" charset="0"/>
+                          <a:ea typeface="Cascadia Code SemiBold" panose="020B0609020000020004" pitchFamily="49" charset="0"/>
+                          <a:cs typeface="Cascadia Code SemiBold" panose="020B0609020000020004" pitchFamily="49" charset="0"/>
+                        </a:rPr>
+                        <a:t>, </a:t>
+                      </a:r>
+                      <a:r>
+                        <a:rPr kumimoji="1" lang="en-US" altLang="ja-JP" sz="1200" b="1" i="1">
+                          <a:solidFill>
+                            <a:srgbClr val="FF0000"/>
+                          </a:solidFill>
+                          <a:latin typeface="Cascadia Code SemiBold" panose="020B0609020000020004" pitchFamily="49" charset="0"/>
+                          <a:ea typeface="Cascadia Code SemiBold" panose="020B0609020000020004" pitchFamily="49" charset="0"/>
+                          <a:cs typeface="Cascadia Code SemiBold" panose="020B0609020000020004" pitchFamily="49" charset="0"/>
+                        </a:rPr>
+                        <a:t>*.xlsx</a:t>
+                      </a:r>
+                      <a:r>
+                        <a:rPr kumimoji="1" lang="en-US" altLang="ja-JP" sz="1200">
+                          <a:latin typeface="Cascadia Code SemiBold" panose="020B0609020000020004" pitchFamily="49" charset="0"/>
+                          <a:ea typeface="Cascadia Code SemiBold" panose="020B0609020000020004" pitchFamily="49" charset="0"/>
+                          <a:cs typeface="Cascadia Code SemiBold" panose="020B0609020000020004" pitchFamily="49" charset="0"/>
+                        </a:rPr>
+                        <a:t>, and </a:t>
+                      </a:r>
+                      <a:r>
+                        <a:rPr kumimoji="1" lang="en-US" altLang="ja-JP" sz="1200" b="1" i="1">
+                          <a:solidFill>
+                            <a:srgbClr val="FF0000"/>
+                          </a:solidFill>
+                          <a:latin typeface="Cascadia Code SemiBold" panose="020B0609020000020004" pitchFamily="49" charset="0"/>
+                          <a:ea typeface="Cascadia Code SemiBold" panose="020B0609020000020004" pitchFamily="49" charset="0"/>
+                          <a:cs typeface="Cascadia Code SemiBold" panose="020B0609020000020004" pitchFamily="49" charset="0"/>
+                        </a:rPr>
+                        <a:t>report.html</a:t>
+                      </a:r>
+                      <a:r>
+                        <a:rPr kumimoji="1" lang="en-US" altLang="ja-JP" sz="1200">
+                          <a:latin typeface="Cascadia Code SemiBold" panose="020B0609020000020004" pitchFamily="49" charset="0"/>
+                          <a:ea typeface="Cascadia Code SemiBold" panose="020B0609020000020004" pitchFamily="49" charset="0"/>
+                          <a:cs typeface="Cascadia Code SemiBold" panose="020B0609020000020004" pitchFamily="49" charset="0"/>
+                        </a:rPr>
+                        <a:t>.</a:t>
+                      </a:r>
+                    </a:p>
+                  </a:txBody>
+                  <a:tcPr marL="137160" marR="137160" marT="137160" marB="137160">
+                    <a:lnL w="12700" cap="flat" cmpd="sng" algn="ctr">
+                      <a:solidFill>
+                        <a:schemeClr val="tx1"/>
+                      </a:solidFill>
+                      <a:prstDash val="solid"/>
+                      <a:round/>
+                      <a:headEnd type="none" w="med" len="med"/>
+                      <a:tailEnd type="none" w="med" len="med"/>
+                    </a:lnL>
+                    <a:lnR w="12700" cap="flat" cmpd="sng" algn="ctr">
+                      <a:solidFill>
+                        <a:schemeClr val="tx1"/>
+                      </a:solidFill>
+                      <a:prstDash val="solid"/>
+                      <a:round/>
+                      <a:headEnd type="none" w="med" len="med"/>
+                      <a:tailEnd type="none" w="med" len="med"/>
+                    </a:lnR>
+                    <a:lnT w="12700" cap="flat" cmpd="sng" algn="ctr">
+                      <a:solidFill>
+                        <a:schemeClr val="tx1"/>
+                      </a:solidFill>
+                      <a:prstDash val="solid"/>
+                      <a:round/>
+                      <a:headEnd type="none" w="med" len="med"/>
+                      <a:tailEnd type="none" w="med" len="med"/>
+                    </a:lnT>
+                    <a:lnB w="12700" cap="flat" cmpd="sng" algn="ctr">
+                      <a:solidFill>
+                        <a:schemeClr val="tx1"/>
+                      </a:solidFill>
+                      <a:prstDash val="solid"/>
+                      <a:round/>
+                      <a:headEnd type="none" w="med" len="med"/>
+                      <a:tailEnd type="none" w="med" len="med"/>
+                    </a:lnB>
+                    <a:solidFill>
+                      <a:schemeClr val="bg1"/>
+                    </a:solidFill>
+                  </a:tcPr>
+                </a:tc>
+                <a:extLst>
+                  <a:ext uri="{0D108BD9-81ED-4DB2-BD59-A6C34878D82A}">
+                    <a16:rowId xmlns:a16="http://schemas.microsoft.com/office/drawing/2014/main" val="3804432217"/>
+                  </a:ext>
+                </a:extLst>
+              </a:tr>
+            </a:tbl>
+          </a:graphicData>
+        </a:graphic>
+      </p:graphicFrame>
+    </p:spTree>
+    <p:extLst>
+      <p:ext uri="{BB962C8B-B14F-4D97-AF65-F5344CB8AC3E}">
         <p14:creationId xmlns:p14="http://schemas.microsoft.com/office/powerpoint/2010/main" val="1222773587"/>
       </p:ext>
     </p:extLst>
@@ -3268,7 +5313,7 @@
 </p:sldLayout>
 </file>
 
-<file path=ppt/slideLayouts/slideLayout4.xml><?xml version="1.0" encoding="utf-8"?>
+<file path=ppt/slideLayouts/slideLayout5.xml><?xml version="1.0" encoding="utf-8"?>
 <p:sldLayout xmlns:a="http://schemas.openxmlformats.org/drawingml/2006/main" xmlns:r="http://schemas.openxmlformats.org/officeDocument/2006/relationships" xmlns:p="http://schemas.openxmlformats.org/presentationml/2006/main" preserve="1" userDrawn="1">
   <p:cSld name="1_ユーザー設定レイアウト">
     <p:spTree>
@@ -9597,7 +11642,7 @@
 </p:sldLayout>
 </file>
 
-<file path=ppt/slideLayouts/slideLayout5.xml><?xml version="1.0" encoding="utf-8"?>
+<file path=ppt/slideLayouts/slideLayout6.xml><?xml version="1.0" encoding="utf-8"?>
 <p:sldLayout xmlns:a="http://schemas.openxmlformats.org/drawingml/2006/main" xmlns:r="http://schemas.openxmlformats.org/officeDocument/2006/relationships" xmlns:p="http://schemas.openxmlformats.org/presentationml/2006/main" preserve="1" userDrawn="1">
   <p:cSld name="2_ユーザー設定レイアウト">
     <p:spTree>
@@ -15617,9 +17662,10 @@
   <p:sldLayoutIdLst>
     <p:sldLayoutId id="2147483649" r:id="rId1"/>
     <p:sldLayoutId id="2147483650" r:id="rId2"/>
-    <p:sldLayoutId id="2147483655" r:id="rId3"/>
-    <p:sldLayoutId id="2147483651" r:id="rId4"/>
-    <p:sldLayoutId id="2147483652" r:id="rId5"/>
+    <p:sldLayoutId id="2147483656" r:id="rId3"/>
+    <p:sldLayoutId id="2147483655" r:id="rId4"/>
+    <p:sldLayoutId id="2147483651" r:id="rId5"/>
+    <p:sldLayoutId id="2147483652" r:id="rId6"/>
   </p:sldLayoutIdLst>
   <p:txStyles>
     <p:titleStyle>
@@ -16156,7 +18202,7 @@
         <p:cNvPr id="1" name="">
           <a:extLst>
             <a:ext uri="{FF2B5EF4-FFF2-40B4-BE49-F238E27FC236}">
-              <a16:creationId xmlns:a16="http://schemas.microsoft.com/office/drawing/2014/main" id="{D7399D49-133A-63AE-ABB1-CCB23C492EC9}"/>
+              <a16:creationId xmlns:a16="http://schemas.microsoft.com/office/drawing/2014/main" id="{91CE7DE7-323B-F269-5A07-5ACA5E4F0BE2}"/>
             </a:ext>
           </a:extLst>
         </p:cNvPr>
@@ -16173,10 +18219,10 @@
       </p:grpSpPr>
       <p:sp>
         <p:nvSpPr>
-          <p:cNvPr id="4" name="フリーフォーム: 図形 3">
+          <p:cNvPr id="6" name="フリーフォーム: 図形 5">
             <a:extLst>
               <a:ext uri="{FF2B5EF4-FFF2-40B4-BE49-F238E27FC236}">
-                <a16:creationId xmlns:a16="http://schemas.microsoft.com/office/drawing/2014/main" id="{88B09063-1D45-B16A-583E-9A4535C9F761}"/>
+                <a16:creationId xmlns:a16="http://schemas.microsoft.com/office/drawing/2014/main" id="{B101E88B-B97F-707C-C0DB-17B6BD338C3D}"/>
               </a:ext>
             </a:extLst>
           </p:cNvPr>
@@ -16191,14 +18237,14 @@
           <a:custGeom>
             <a:avLst/>
             <a:gdLst>
-              <a:gd name="csX0" fmla="*/ 765544 w 12192000"/>
-              <a:gd name="csY0" fmla="*/ 1924494 h 6858000"/>
-              <a:gd name="csX1" fmla="*/ 765544 w 12192000"/>
-              <a:gd name="csY1" fmla="*/ 2381693 h 6858000"/>
-              <a:gd name="csX2" fmla="*/ 11419367 w 12192000"/>
-              <a:gd name="csY2" fmla="*/ 2381693 h 6858000"/>
-              <a:gd name="csX3" fmla="*/ 11419367 w 12192000"/>
-              <a:gd name="csY3" fmla="*/ 1924494 h 6858000"/>
+              <a:gd name="csX0" fmla="*/ 757646 w 12192000"/>
+              <a:gd name="csY0" fmla="*/ 1602368 h 6858000"/>
+              <a:gd name="csX1" fmla="*/ 757646 w 12192000"/>
+              <a:gd name="csY1" fmla="*/ 2055223 h 6858000"/>
+              <a:gd name="csX2" fmla="*/ 11434354 w 12192000"/>
+              <a:gd name="csY2" fmla="*/ 2055223 h 6858000"/>
+              <a:gd name="csX3" fmla="*/ 11434354 w 12192000"/>
+              <a:gd name="csY3" fmla="*/ 1602368 h 6858000"/>
               <a:gd name="csX4" fmla="*/ 0 w 12192000"/>
               <a:gd name="csY4" fmla="*/ 0 h 6858000"/>
               <a:gd name="csX5" fmla="*/ 12192000 w 12192000"/>
@@ -16239,16 +18285,16 @@
             <a:pathLst>
               <a:path w="12192000" h="6858000">
                 <a:moveTo>
-                  <a:pt x="765544" y="1924494"/>
+                  <a:pt x="757646" y="1602368"/>
                 </a:moveTo>
                 <a:lnTo>
-                  <a:pt x="765544" y="2381693"/>
+                  <a:pt x="757646" y="2055223"/>
                 </a:lnTo>
                 <a:lnTo>
-                  <a:pt x="11419367" y="2381693"/>
+                  <a:pt x="11434354" y="2055223"/>
                 </a:lnTo>
                 <a:lnTo>
-                  <a:pt x="11419367" y="1924494"/>
+                  <a:pt x="11434354" y="1602368"/>
                 </a:lnTo>
                 <a:close/>
                 <a:moveTo>
@@ -16306,7 +18352,7 @@
     </p:spTree>
     <p:extLst>
       <p:ext uri="{BB962C8B-B14F-4D97-AF65-F5344CB8AC3E}">
-        <p14:creationId xmlns:p14="http://schemas.microsoft.com/office/powerpoint/2010/main" val="1548012816"/>
+        <p14:creationId xmlns:p14="http://schemas.microsoft.com/office/powerpoint/2010/main" val="87978248"/>
       </p:ext>
     </p:extLst>
   </p:cSld>
@@ -16692,7 +18738,7 @@
         <p:cNvPr id="1" name="">
           <a:extLst>
             <a:ext uri="{FF2B5EF4-FFF2-40B4-BE49-F238E27FC236}">
-              <a16:creationId xmlns:a16="http://schemas.microsoft.com/office/drawing/2014/main" id="{47C13274-3203-7DEF-1674-1EC08116D525}"/>
+              <a16:creationId xmlns:a16="http://schemas.microsoft.com/office/drawing/2014/main" id="{D4B3923F-CE3E-A8C5-436F-C319723C6CBA}"/>
             </a:ext>
           </a:extLst>
         </p:cNvPr>
@@ -16709,10 +18755,10 @@
       </p:grpSpPr>
       <p:sp>
         <p:nvSpPr>
-          <p:cNvPr id="4" name="フリーフォーム: 図形 3">
+          <p:cNvPr id="5" name="フリーフォーム: 図形 4">
             <a:extLst>
               <a:ext uri="{FF2B5EF4-FFF2-40B4-BE49-F238E27FC236}">
-                <a16:creationId xmlns:a16="http://schemas.microsoft.com/office/drawing/2014/main" id="{3E00A912-91C5-A11E-BDEC-FAD4B45A7AE1}"/>
+                <a16:creationId xmlns:a16="http://schemas.microsoft.com/office/drawing/2014/main" id="{691BD15F-346A-0D98-2AFF-B992FD24942E}"/>
               </a:ext>
             </a:extLst>
           </p:cNvPr>
@@ -16727,14 +18773,14 @@
           <a:custGeom>
             <a:avLst/>
             <a:gdLst>
-              <a:gd name="csX0" fmla="*/ 765544 w 12192000"/>
-              <a:gd name="csY0" fmla="*/ 2371062 h 6858000"/>
-              <a:gd name="csX1" fmla="*/ 765544 w 12192000"/>
-              <a:gd name="csY1" fmla="*/ 3030279 h 6858000"/>
-              <a:gd name="csX2" fmla="*/ 11419367 w 12192000"/>
-              <a:gd name="csY2" fmla="*/ 3030279 h 6858000"/>
-              <a:gd name="csX3" fmla="*/ 11419367 w 12192000"/>
-              <a:gd name="csY3" fmla="*/ 2371062 h 6858000"/>
+              <a:gd name="csX0" fmla="*/ 757646 w 12192000"/>
+              <a:gd name="csY0" fmla="*/ 2046513 h 6858000"/>
+              <a:gd name="csX1" fmla="*/ 757646 w 12192000"/>
+              <a:gd name="csY1" fmla="*/ 2699656 h 6858000"/>
+              <a:gd name="csX2" fmla="*/ 11434354 w 12192000"/>
+              <a:gd name="csY2" fmla="*/ 2699656 h 6858000"/>
+              <a:gd name="csX3" fmla="*/ 11434354 w 12192000"/>
+              <a:gd name="csY3" fmla="*/ 2046513 h 6858000"/>
               <a:gd name="csX4" fmla="*/ 0 w 12192000"/>
               <a:gd name="csY4" fmla="*/ 0 h 6858000"/>
               <a:gd name="csX5" fmla="*/ 12192000 w 12192000"/>
@@ -16775,16 +18821,16 @@
             <a:pathLst>
               <a:path w="12192000" h="6858000">
                 <a:moveTo>
-                  <a:pt x="765544" y="2371062"/>
+                  <a:pt x="757646" y="2046513"/>
                 </a:moveTo>
                 <a:lnTo>
-                  <a:pt x="765544" y="3030279"/>
+                  <a:pt x="757646" y="2699656"/>
                 </a:lnTo>
                 <a:lnTo>
-                  <a:pt x="11419367" y="3030279"/>
+                  <a:pt x="11434354" y="2699656"/>
                 </a:lnTo>
                 <a:lnTo>
-                  <a:pt x="11419367" y="2371062"/>
+                  <a:pt x="11434354" y="2046513"/>
                 </a:lnTo>
                 <a:close/>
                 <a:moveTo>
@@ -16842,7 +18888,7 @@
     </p:spTree>
     <p:extLst>
       <p:ext uri="{BB962C8B-B14F-4D97-AF65-F5344CB8AC3E}">
-        <p14:creationId xmlns:p14="http://schemas.microsoft.com/office/powerpoint/2010/main" val="3534174898"/>
+        <p14:creationId xmlns:p14="http://schemas.microsoft.com/office/powerpoint/2010/main" val="1758691830"/>
       </p:ext>
     </p:extLst>
   </p:cSld>
@@ -16950,7 +18996,7 @@
     </p:spTree>
     <p:extLst>
       <p:ext uri="{BB962C8B-B14F-4D97-AF65-F5344CB8AC3E}">
-        <p14:creationId xmlns:p14="http://schemas.microsoft.com/office/powerpoint/2010/main" val="1408041"/>
+        <p14:creationId xmlns:p14="http://schemas.microsoft.com/office/powerpoint/2010/main" val="1467880725"/>
       </p:ext>
     </p:extLst>
   </p:cSld>
@@ -17182,7 +19228,7 @@
         <p:cNvPr id="1" name="">
           <a:extLst>
             <a:ext uri="{FF2B5EF4-FFF2-40B4-BE49-F238E27FC236}">
-              <a16:creationId xmlns:a16="http://schemas.microsoft.com/office/drawing/2014/main" id="{DEB231A8-A91E-7BC3-5EF9-25E85C0A8FCB}"/>
+              <a16:creationId xmlns:a16="http://schemas.microsoft.com/office/drawing/2014/main" id="{0D8BE5A8-0CDC-AB44-230D-5C9EB500FC9D}"/>
             </a:ext>
           </a:extLst>
         </p:cNvPr>
@@ -17199,10 +19245,10 @@
       </p:grpSpPr>
       <p:sp>
         <p:nvSpPr>
-          <p:cNvPr id="4" name="フリーフォーム: 図形 3">
+          <p:cNvPr id="5" name="フリーフォーム: 図形 4">
             <a:extLst>
               <a:ext uri="{FF2B5EF4-FFF2-40B4-BE49-F238E27FC236}">
-                <a16:creationId xmlns:a16="http://schemas.microsoft.com/office/drawing/2014/main" id="{FC19F8D0-8B9E-85F9-DD59-D9898AC3559A}"/>
+                <a16:creationId xmlns:a16="http://schemas.microsoft.com/office/drawing/2014/main" id="{2D669E66-D9BA-BDB8-C0E6-AC5AA79BEF1E}"/>
               </a:ext>
             </a:extLst>
           </p:cNvPr>
@@ -17217,14 +19263,14 @@
           <a:custGeom>
             <a:avLst/>
             <a:gdLst>
-              <a:gd name="csX0" fmla="*/ 765544 w 12192000"/>
-              <a:gd name="csY0" fmla="*/ 3019647 h 6858000"/>
-              <a:gd name="csX1" fmla="*/ 765544 w 12192000"/>
-              <a:gd name="csY1" fmla="*/ 3657600 h 6858000"/>
-              <a:gd name="csX2" fmla="*/ 11419367 w 12192000"/>
-              <a:gd name="csY2" fmla="*/ 3657600 h 6858000"/>
-              <a:gd name="csX3" fmla="*/ 11419367 w 12192000"/>
-              <a:gd name="csY3" fmla="*/ 3019647 h 6858000"/>
+              <a:gd name="csX0" fmla="*/ 757646 w 12192000"/>
+              <a:gd name="csY0" fmla="*/ 2690946 h 6858000"/>
+              <a:gd name="csX1" fmla="*/ 757646 w 12192000"/>
+              <a:gd name="csY1" fmla="*/ 3344089 h 6858000"/>
+              <a:gd name="csX2" fmla="*/ 11434354 w 12192000"/>
+              <a:gd name="csY2" fmla="*/ 3344089 h 6858000"/>
+              <a:gd name="csX3" fmla="*/ 11434354 w 12192000"/>
+              <a:gd name="csY3" fmla="*/ 2690946 h 6858000"/>
               <a:gd name="csX4" fmla="*/ 0 w 12192000"/>
               <a:gd name="csY4" fmla="*/ 0 h 6858000"/>
               <a:gd name="csX5" fmla="*/ 12192000 w 12192000"/>
@@ -17265,16 +19311,16 @@
             <a:pathLst>
               <a:path w="12192000" h="6858000">
                 <a:moveTo>
-                  <a:pt x="765544" y="3019647"/>
+                  <a:pt x="757646" y="2690946"/>
                 </a:moveTo>
                 <a:lnTo>
-                  <a:pt x="765544" y="3657600"/>
+                  <a:pt x="757646" y="3344089"/>
                 </a:lnTo>
                 <a:lnTo>
-                  <a:pt x="11419367" y="3657600"/>
+                  <a:pt x="11434354" y="3344089"/>
                 </a:lnTo>
                 <a:lnTo>
-                  <a:pt x="11419367" y="3019647"/>
+                  <a:pt x="11434354" y="2690946"/>
                 </a:lnTo>
                 <a:close/>
                 <a:moveTo>
@@ -17332,7 +19378,7 @@
     </p:spTree>
     <p:extLst>
       <p:ext uri="{BB962C8B-B14F-4D97-AF65-F5344CB8AC3E}">
-        <p14:creationId xmlns:p14="http://schemas.microsoft.com/office/powerpoint/2010/main" val="2943879215"/>
+        <p14:creationId xmlns:p14="http://schemas.microsoft.com/office/powerpoint/2010/main" val="250165530"/>
       </p:ext>
     </p:extLst>
   </p:cSld>
@@ -17534,7 +19580,7 @@
         <p:cNvPr id="1" name="">
           <a:extLst>
             <a:ext uri="{FF2B5EF4-FFF2-40B4-BE49-F238E27FC236}">
-              <a16:creationId xmlns:a16="http://schemas.microsoft.com/office/drawing/2014/main" id="{BAAB7060-C4C4-5649-AC56-B16E03F6BE0B}"/>
+              <a16:creationId xmlns:a16="http://schemas.microsoft.com/office/drawing/2014/main" id="{5ED95EFB-DD5F-D3F2-34BC-B95FAE9E34CD}"/>
             </a:ext>
           </a:extLst>
         </p:cNvPr>
@@ -17551,10 +19597,10 @@
       </p:grpSpPr>
       <p:sp>
         <p:nvSpPr>
-          <p:cNvPr id="4" name="フリーフォーム: 図形 3">
+          <p:cNvPr id="6" name="フリーフォーム: 図形 5">
             <a:extLst>
               <a:ext uri="{FF2B5EF4-FFF2-40B4-BE49-F238E27FC236}">
-                <a16:creationId xmlns:a16="http://schemas.microsoft.com/office/drawing/2014/main" id="{ED69591E-0D0B-7A37-63E3-3A65A0A8FB3A}"/>
+                <a16:creationId xmlns:a16="http://schemas.microsoft.com/office/drawing/2014/main" id="{7F7FE8D6-F3CC-57D2-4D20-A1BE0258CF66}"/>
               </a:ext>
             </a:extLst>
           </p:cNvPr>
@@ -17569,14 +19615,14 @@
           <a:custGeom>
             <a:avLst/>
             <a:gdLst>
-              <a:gd name="csX0" fmla="*/ 765544 w 12192000"/>
-              <a:gd name="csY0" fmla="*/ 4125433 h 6858000"/>
-              <a:gd name="csX1" fmla="*/ 765544 w 12192000"/>
-              <a:gd name="csY1" fmla="*/ 4763386 h 6858000"/>
-              <a:gd name="csX2" fmla="*/ 11419367 w 12192000"/>
-              <a:gd name="csY2" fmla="*/ 4763386 h 6858000"/>
-              <a:gd name="csX3" fmla="*/ 11419367 w 12192000"/>
-              <a:gd name="csY3" fmla="*/ 4125433 h 6858000"/>
+              <a:gd name="csX0" fmla="*/ 757646 w 12192000"/>
+              <a:gd name="csY0" fmla="*/ 4423963 h 6858000"/>
+              <a:gd name="csX1" fmla="*/ 757646 w 12192000"/>
+              <a:gd name="csY1" fmla="*/ 5077106 h 6858000"/>
+              <a:gd name="csX2" fmla="*/ 11434354 w 12192000"/>
+              <a:gd name="csY2" fmla="*/ 5077106 h 6858000"/>
+              <a:gd name="csX3" fmla="*/ 11434354 w 12192000"/>
+              <a:gd name="csY3" fmla="*/ 4423963 h 6858000"/>
               <a:gd name="csX4" fmla="*/ 0 w 12192000"/>
               <a:gd name="csY4" fmla="*/ 0 h 6858000"/>
               <a:gd name="csX5" fmla="*/ 12192000 w 12192000"/>
@@ -17617,16 +19663,16 @@
             <a:pathLst>
               <a:path w="12192000" h="6858000">
                 <a:moveTo>
-                  <a:pt x="765544" y="4125433"/>
+                  <a:pt x="757646" y="4423963"/>
                 </a:moveTo>
                 <a:lnTo>
-                  <a:pt x="765544" y="4763386"/>
+                  <a:pt x="757646" y="5077106"/>
                 </a:lnTo>
                 <a:lnTo>
-                  <a:pt x="11419367" y="4763386"/>
+                  <a:pt x="11434354" y="5077106"/>
                 </a:lnTo>
                 <a:lnTo>
-                  <a:pt x="11419367" y="4125433"/>
+                  <a:pt x="11434354" y="4423963"/>
                 </a:lnTo>
                 <a:close/>
                 <a:moveTo>
@@ -17684,7 +19730,7 @@
     </p:spTree>
     <p:extLst>
       <p:ext uri="{BB962C8B-B14F-4D97-AF65-F5344CB8AC3E}">
-        <p14:creationId xmlns:p14="http://schemas.microsoft.com/office/powerpoint/2010/main" val="3638333628"/>
+        <p14:creationId xmlns:p14="http://schemas.microsoft.com/office/powerpoint/2010/main" val="607295733"/>
       </p:ext>
     </p:extLst>
   </p:cSld>
@@ -17886,7 +19932,7 @@
         <p:cNvPr id="1" name="">
           <a:extLst>
             <a:ext uri="{FF2B5EF4-FFF2-40B4-BE49-F238E27FC236}">
-              <a16:creationId xmlns:a16="http://schemas.microsoft.com/office/drawing/2014/main" id="{C0094769-8894-3520-BE78-5E33A0136B67}"/>
+              <a16:creationId xmlns:a16="http://schemas.microsoft.com/office/drawing/2014/main" id="{FA96FB43-AD4B-702B-5415-D295028353C2}"/>
             </a:ext>
           </a:extLst>
         </p:cNvPr>
@@ -17903,10 +19949,10 @@
       </p:grpSpPr>
       <p:sp>
         <p:nvSpPr>
-          <p:cNvPr id="5" name="フリーフォーム: 図形 4">
+          <p:cNvPr id="8" name="フリーフォーム: 図形 7">
             <a:extLst>
               <a:ext uri="{FF2B5EF4-FFF2-40B4-BE49-F238E27FC236}">
-                <a16:creationId xmlns:a16="http://schemas.microsoft.com/office/drawing/2014/main" id="{D6783863-FBAC-0161-EEEE-F21C9D1ADACC}"/>
+                <a16:creationId xmlns:a16="http://schemas.microsoft.com/office/drawing/2014/main" id="{34E381A9-6DA6-65CC-8A0C-626E46CDB334}"/>
               </a:ext>
             </a:extLst>
           </p:cNvPr>
@@ -17921,22 +19967,22 @@
           <a:custGeom>
             <a:avLst/>
             <a:gdLst>
-              <a:gd name="csX0" fmla="*/ 772633 w 12192000"/>
-              <a:gd name="csY0" fmla="*/ 4758070 h 6858000"/>
-              <a:gd name="csX1" fmla="*/ 772633 w 12192000"/>
-              <a:gd name="csY1" fmla="*/ 5396023 h 6858000"/>
-              <a:gd name="csX2" fmla="*/ 11426456 w 12192000"/>
-              <a:gd name="csY2" fmla="*/ 5396023 h 6858000"/>
-              <a:gd name="csX3" fmla="*/ 11426456 w 12192000"/>
-              <a:gd name="csY3" fmla="*/ 4758070 h 6858000"/>
-              <a:gd name="csX4" fmla="*/ 765544 w 12192000"/>
-              <a:gd name="csY4" fmla="*/ 3019649 h 6858000"/>
-              <a:gd name="csX5" fmla="*/ 765544 w 12192000"/>
-              <a:gd name="csY5" fmla="*/ 3657602 h 6858000"/>
-              <a:gd name="csX6" fmla="*/ 11419367 w 12192000"/>
-              <a:gd name="csY6" fmla="*/ 3657602 h 6858000"/>
-              <a:gd name="csX7" fmla="*/ 11419367 w 12192000"/>
-              <a:gd name="csY7" fmla="*/ 3019649 h 6858000"/>
+              <a:gd name="csX0" fmla="*/ 757646 w 12192000"/>
+              <a:gd name="csY0" fmla="*/ 5068392 h 6858000"/>
+              <a:gd name="csX1" fmla="*/ 757646 w 12192000"/>
+              <a:gd name="csY1" fmla="*/ 5721535 h 6858000"/>
+              <a:gd name="csX2" fmla="*/ 11434354 w 12192000"/>
+              <a:gd name="csY2" fmla="*/ 5721535 h 6858000"/>
+              <a:gd name="csX3" fmla="*/ 11434354 w 12192000"/>
+              <a:gd name="csY3" fmla="*/ 5068392 h 6858000"/>
+              <a:gd name="csX4" fmla="*/ 757646 w 12192000"/>
+              <a:gd name="csY4" fmla="*/ 2690949 h 6858000"/>
+              <a:gd name="csX5" fmla="*/ 757646 w 12192000"/>
+              <a:gd name="csY5" fmla="*/ 3344092 h 6858000"/>
+              <a:gd name="csX6" fmla="*/ 11434354 w 12192000"/>
+              <a:gd name="csY6" fmla="*/ 3344092 h 6858000"/>
+              <a:gd name="csX7" fmla="*/ 11434354 w 12192000"/>
+              <a:gd name="csY7" fmla="*/ 2690949 h 6858000"/>
               <a:gd name="csX8" fmla="*/ 0 w 12192000"/>
               <a:gd name="csY8" fmla="*/ 0 h 6858000"/>
               <a:gd name="csX9" fmla="*/ 12192000 w 12192000"/>
@@ -17989,29 +20035,29 @@
             <a:pathLst>
               <a:path w="12192000" h="6858000">
                 <a:moveTo>
-                  <a:pt x="772633" y="4758070"/>
+                  <a:pt x="757646" y="5068392"/>
                 </a:moveTo>
                 <a:lnTo>
-                  <a:pt x="772633" y="5396023"/>
+                  <a:pt x="757646" y="5721535"/>
                 </a:lnTo>
                 <a:lnTo>
-                  <a:pt x="11426456" y="5396023"/>
+                  <a:pt x="11434354" y="5721535"/>
                 </a:lnTo>
                 <a:lnTo>
-                  <a:pt x="11426456" y="4758070"/>
+                  <a:pt x="11434354" y="5068392"/>
                 </a:lnTo>
                 <a:close/>
                 <a:moveTo>
-                  <a:pt x="765544" y="3019649"/>
+                  <a:pt x="757646" y="2690949"/>
                 </a:moveTo>
                 <a:lnTo>
-                  <a:pt x="765544" y="3657602"/>
+                  <a:pt x="757646" y="3344092"/>
                 </a:lnTo>
                 <a:lnTo>
-                  <a:pt x="11419367" y="3657602"/>
+                  <a:pt x="11434354" y="3344092"/>
                 </a:lnTo>
                 <a:lnTo>
-                  <a:pt x="11419367" y="3019649"/>
+                  <a:pt x="11434354" y="2690949"/>
                 </a:lnTo>
                 <a:close/>
                 <a:moveTo>
@@ -18069,7 +20115,7 @@
     </p:spTree>
     <p:extLst>
       <p:ext uri="{BB962C8B-B14F-4D97-AF65-F5344CB8AC3E}">
-        <p14:creationId xmlns:p14="http://schemas.microsoft.com/office/powerpoint/2010/main" val="1930862860"/>
+        <p14:creationId xmlns:p14="http://schemas.microsoft.com/office/powerpoint/2010/main" val="1265086683"/>
       </p:ext>
     </p:extLst>
   </p:cSld>

--- a/tools/llm-as-a-judge/readme.pptx
+++ b/tools/llm-as-a-judge/readme.pptx
@@ -6,21 +6,23 @@
   </p:sldMasterIdLst>
   <p:sldIdLst>
     <p:sldId id="257" r:id="rId2"/>
-    <p:sldId id="289" r:id="rId3"/>
+    <p:sldId id="295" r:id="rId3"/>
     <p:sldId id="258" r:id="rId4"/>
     <p:sldId id="273" r:id="rId5"/>
-    <p:sldId id="290" r:id="rId6"/>
+    <p:sldId id="296" r:id="rId6"/>
     <p:sldId id="262" r:id="rId7"/>
-    <p:sldId id="291" r:id="rId8"/>
+    <p:sldId id="297" r:id="rId8"/>
     <p:sldId id="264" r:id="rId9"/>
-    <p:sldId id="292" r:id="rId10"/>
-    <p:sldId id="266" r:id="rId11"/>
-    <p:sldId id="259" r:id="rId12"/>
-    <p:sldId id="293" r:id="rId13"/>
-    <p:sldId id="268" r:id="rId14"/>
-    <p:sldId id="270" r:id="rId15"/>
-    <p:sldId id="294" r:id="rId16"/>
-    <p:sldId id="272" r:id="rId17"/>
+    <p:sldId id="298" r:id="rId10"/>
+    <p:sldId id="301" r:id="rId11"/>
+    <p:sldId id="302" r:id="rId12"/>
+    <p:sldId id="266" r:id="rId13"/>
+    <p:sldId id="259" r:id="rId14"/>
+    <p:sldId id="299" r:id="rId15"/>
+    <p:sldId id="268" r:id="rId16"/>
+    <p:sldId id="270" r:id="rId17"/>
+    <p:sldId id="300" r:id="rId18"/>
+    <p:sldId id="272" r:id="rId19"/>
   </p:sldIdLst>
   <p:sldSz cx="12192000" cy="6858000"/>
   <p:notesSz cx="6858000" cy="9144000"/>
@@ -1393,7 +1395,7 @@
 
 <file path=ppt/slideLayouts/slideLayout3.xml><?xml version="1.0" encoding="utf-8"?>
 <p:sldLayout xmlns:a="http://schemas.openxmlformats.org/drawingml/2006/main" xmlns:r="http://schemas.openxmlformats.org/officeDocument/2006/relationships" xmlns:p="http://schemas.openxmlformats.org/presentationml/2006/main" preserve="1" userDrawn="1">
-  <p:cSld name="4_ユーザー設定レイアウト">
+  <p:cSld name="5_ユーザー設定レイアウト">
     <p:spTree>
       <p:nvGrpSpPr>
         <p:cNvPr id="1" name=""/>
@@ -1413,7 +1415,7 @@
           <p:cNvPr id="4" name="表 3">
             <a:extLst>
               <a:ext uri="{FF2B5EF4-FFF2-40B4-BE49-F238E27FC236}">
-                <a16:creationId xmlns:a16="http://schemas.microsoft.com/office/drawing/2014/main" id="{255D2F03-FFDC-CF07-4D4E-D8BD64B51726}"/>
+                <a16:creationId xmlns:a16="http://schemas.microsoft.com/office/drawing/2014/main" id="{2C74A805-1961-F34F-C862-5A6ACB7E7ECB}"/>
               </a:ext>
             </a:extLst>
           </p:cNvPr>
@@ -1423,14 +1425,14 @@
           <p:nvPr userDrawn="1">
             <p:extLst>
               <p:ext uri="{D42A27DB-BD31-4B8C-83A1-F6EECF244321}">
-                <p14:modId xmlns:p14="http://schemas.microsoft.com/office/powerpoint/2010/main" val="2248410479"/>
+                <p14:modId xmlns:p14="http://schemas.microsoft.com/office/powerpoint/2010/main" val="1276514818"/>
               </p:ext>
             </p:extLst>
           </p:nvPr>
         </p:nvGraphicFramePr>
         <p:xfrm>
-          <a:off x="765629" y="228600"/>
-          <a:ext cx="10660742" cy="6400800"/>
+          <a:off x="1439080" y="274320"/>
+          <a:ext cx="9313840" cy="6309360"/>
         </p:xfrm>
         <a:graphic>
           <a:graphicData uri="http://schemas.openxmlformats.org/drawingml/2006/table">
@@ -1446,14 +1448,21 @@
                 <a:tableStyleId>{5C22544A-7EE6-4342-B048-85BDC9FD1C3A}</a:tableStyleId>
               </a:tblPr>
               <a:tblGrid>
-                <a:gridCol w="2857137">
+                <a:gridCol w="1076173">
                   <a:extLst>
                     <a:ext uri="{9D8B030D-6E8A-4147-A177-3AD203B41FA5}">
                       <a16:colId xmlns:a16="http://schemas.microsoft.com/office/drawing/2014/main" val="2777621706"/>
                     </a:ext>
                   </a:extLst>
                 </a:gridCol>
-                <a:gridCol w="7803605">
+                <a:gridCol w="1783607">
+                  <a:extLst>
+                    <a:ext uri="{9D8B030D-6E8A-4147-A177-3AD203B41FA5}">
+                      <a16:colId xmlns:a16="http://schemas.microsoft.com/office/drawing/2014/main" val="308123450"/>
+                    </a:ext>
+                  </a:extLst>
+                </a:gridCol>
+                <a:gridCol w="6454060">
                   <a:extLst>
                     <a:ext uri="{9D8B030D-6E8A-4147-A177-3AD203B41FA5}">
                       <a16:colId xmlns:a16="http://schemas.microsoft.com/office/drawing/2014/main" val="2952094520"/>
@@ -1462,23 +1471,83 @@
                 </a:gridCol>
               </a:tblGrid>
               <a:tr h="0">
-                <a:tc>
+                <a:tc gridSpan="2">
                   <a:txBody>
                     <a:bodyPr/>
                     <a:lstStyle/>
                     <a:p>
                       <a:r>
-                        <a:rPr kumimoji="1" lang="en-US" altLang="ja-JP" sz="1200">
+                        <a:rPr kumimoji="1" lang="en-US" altLang="ja-JP" sz="1000">
                           <a:solidFill>
                             <a:schemeClr val="bg1"/>
                           </a:solidFill>
-                          <a:latin typeface="Cascadia Code SemiBold" panose="020B0609020000020004" pitchFamily="49" charset="0"/>
-                          <a:ea typeface="Cascadia Code SemiBold" panose="020B0609020000020004" pitchFamily="49" charset="0"/>
-                          <a:cs typeface="Cascadia Code SemiBold" panose="020B0609020000020004" pitchFamily="49" charset="0"/>
+                          <a:latin typeface="Cascadia Mono" panose="020B0609020000020004" pitchFamily="49" charset="0"/>
+                          <a:ea typeface="Cascadia Mono" panose="020B0609020000020004" pitchFamily="49" charset="0"/>
+                          <a:cs typeface="Cascadia Mono" panose="020B0609020000020004" pitchFamily="49" charset="0"/>
                         </a:rPr>
                         <a:t>resource</a:t>
                       </a:r>
-                      <a:endParaRPr kumimoji="1" lang="ja-JP" altLang="en-US" sz="1200">
+                      <a:endParaRPr kumimoji="1" lang="ja-JP" altLang="en-US" sz="1000">
+                        <a:solidFill>
+                          <a:schemeClr val="bg1"/>
+                        </a:solidFill>
+                        <a:latin typeface="Cascadia Mono" panose="020B0609020000020004" pitchFamily="49" charset="0"/>
+                        <a:ea typeface="BIZ UDゴシック" panose="020B0400000000000000" pitchFamily="49" charset="-128"/>
+                        <a:cs typeface="Cascadia Mono" panose="020B0609020000020004" pitchFamily="49" charset="0"/>
+                      </a:endParaRPr>
+                    </a:p>
+                  </a:txBody>
+                  <a:tcPr marL="137160" marR="137160" marT="137160" marB="137160">
+                    <a:lnL w="12700" cap="flat" cmpd="sng" algn="ctr">
+                      <a:solidFill>
+                        <a:schemeClr val="tx1"/>
+                      </a:solidFill>
+                      <a:prstDash val="solid"/>
+                      <a:round/>
+                      <a:headEnd type="none" w="med" len="med"/>
+                      <a:tailEnd type="none" w="med" len="med"/>
+                    </a:lnL>
+                    <a:lnR w="12700" cap="flat" cmpd="sng" algn="ctr">
+                      <a:solidFill>
+                        <a:schemeClr val="tx1"/>
+                      </a:solidFill>
+                      <a:prstDash val="solid"/>
+                      <a:round/>
+                      <a:headEnd type="none" w="med" len="med"/>
+                      <a:tailEnd type="none" w="med" len="med"/>
+                    </a:lnR>
+                    <a:lnT w="12700" cap="flat" cmpd="sng" algn="ctr">
+                      <a:solidFill>
+                        <a:schemeClr val="tx1"/>
+                      </a:solidFill>
+                      <a:prstDash val="solid"/>
+                      <a:round/>
+                      <a:headEnd type="none" w="med" len="med"/>
+                      <a:tailEnd type="none" w="med" len="med"/>
+                    </a:lnT>
+                    <a:lnB w="12700" cap="flat" cmpd="sng" algn="ctr">
+                      <a:solidFill>
+                        <a:schemeClr val="tx1"/>
+                      </a:solidFill>
+                      <a:prstDash val="solid"/>
+                      <a:round/>
+                      <a:headEnd type="none" w="med" len="med"/>
+                      <a:tailEnd type="none" w="med" len="med"/>
+                    </a:lnB>
+                    <a:solidFill>
+                      <a:schemeClr val="tx1">
+                        <a:lumMod val="65000"/>
+                        <a:lumOff val="35000"/>
+                      </a:schemeClr>
+                    </a:solidFill>
+                  </a:tcPr>
+                </a:tc>
+                <a:tc hMerge="1">
+                  <a:txBody>
+                    <a:bodyPr/>
+                    <a:lstStyle/>
+                    <a:p>
+                      <a:endParaRPr kumimoji="1" lang="ja-JP" altLang="en-US" sz="1000">
                         <a:solidFill>
                           <a:schemeClr val="bg1"/>
                         </a:solidFill>
@@ -1539,20 +1608,146 @@
                     <a:lstStyle/>
                     <a:p>
                       <a:r>
-                        <a:rPr kumimoji="1" lang="en-US" altLang="ja-JP" sz="1200">
+                        <a:rPr kumimoji="1" lang="en-US" altLang="ja-JP" sz="1000">
                           <a:solidFill>
                             <a:schemeClr val="bg1"/>
                           </a:solidFill>
-                          <a:latin typeface="Cascadia Code SemiBold" panose="020B0609020000020004" pitchFamily="49" charset="0"/>
-                          <a:ea typeface="Cascadia Code SemiBold" panose="020B0609020000020004" pitchFamily="49" charset="0"/>
-                          <a:cs typeface="Cascadia Code SemiBold" panose="020B0609020000020004" pitchFamily="49" charset="0"/>
+                          <a:latin typeface="Cascadia Mono" panose="020B0609020000020004" pitchFamily="49" charset="0"/>
+                          <a:ea typeface="Cascadia Mono" panose="020B0609020000020004" pitchFamily="49" charset="0"/>
+                          <a:cs typeface="Cascadia Mono" panose="020B0609020000020004" pitchFamily="49" charset="0"/>
                         </a:rPr>
                         <a:t>note</a:t>
                       </a:r>
-                      <a:endParaRPr kumimoji="1" lang="ja-JP" altLang="en-US" sz="1200">
+                      <a:endParaRPr kumimoji="1" lang="ja-JP" altLang="en-US" sz="1000">
                         <a:solidFill>
                           <a:schemeClr val="bg1"/>
                         </a:solidFill>
+                        <a:latin typeface="Cascadia Mono" panose="020B0609020000020004" pitchFamily="49" charset="0"/>
+                        <a:ea typeface="BIZ UDゴシック" panose="020B0400000000000000" pitchFamily="49" charset="-128"/>
+                        <a:cs typeface="Cascadia Mono" panose="020B0609020000020004" pitchFamily="49" charset="0"/>
+                      </a:endParaRPr>
+                    </a:p>
+                  </a:txBody>
+                  <a:tcPr marL="137160" marR="137160" marT="137160" marB="137160">
+                    <a:lnL w="12700" cap="flat" cmpd="sng" algn="ctr">
+                      <a:solidFill>
+                        <a:schemeClr val="tx1"/>
+                      </a:solidFill>
+                      <a:prstDash val="solid"/>
+                      <a:round/>
+                      <a:headEnd type="none" w="med" len="med"/>
+                      <a:tailEnd type="none" w="med" len="med"/>
+                    </a:lnL>
+                    <a:lnR w="12700" cap="flat" cmpd="sng" algn="ctr">
+                      <a:solidFill>
+                        <a:schemeClr val="tx1"/>
+                      </a:solidFill>
+                      <a:prstDash val="solid"/>
+                      <a:round/>
+                      <a:headEnd type="none" w="med" len="med"/>
+                      <a:tailEnd type="none" w="med" len="med"/>
+                    </a:lnR>
+                    <a:lnT w="12700" cap="flat" cmpd="sng" algn="ctr">
+                      <a:solidFill>
+                        <a:schemeClr val="tx1"/>
+                      </a:solidFill>
+                      <a:prstDash val="solid"/>
+                      <a:round/>
+                      <a:headEnd type="none" w="med" len="med"/>
+                      <a:tailEnd type="none" w="med" len="med"/>
+                    </a:lnT>
+                    <a:lnB w="12700" cap="flat" cmpd="sng" algn="ctr">
+                      <a:solidFill>
+                        <a:schemeClr val="tx1"/>
+                      </a:solidFill>
+                      <a:prstDash val="solid"/>
+                      <a:round/>
+                      <a:headEnd type="none" w="med" len="med"/>
+                      <a:tailEnd type="none" w="med" len="med"/>
+                    </a:lnB>
+                    <a:solidFill>
+                      <a:schemeClr val="tx1">
+                        <a:lumMod val="65000"/>
+                        <a:lumOff val="35000"/>
+                      </a:schemeClr>
+                    </a:solidFill>
+                  </a:tcPr>
+                </a:tc>
+                <a:extLst>
+                  <a:ext uri="{0D108BD9-81ED-4DB2-BD59-A6C34878D82A}">
+                    <a16:rowId xmlns:a16="http://schemas.microsoft.com/office/drawing/2014/main" val="526102552"/>
+                  </a:ext>
+                </a:extLst>
+              </a:tr>
+              <a:tr h="0">
+                <a:tc gridSpan="2">
+                  <a:txBody>
+                    <a:bodyPr/>
+                    <a:lstStyle/>
+                    <a:p>
+                      <a:r>
+                        <a:rPr kumimoji="1" lang="en-US" altLang="ja-JP" sz="1000">
+                          <a:latin typeface="Cascadia Mono" panose="020B0609020000020004" pitchFamily="49" charset="0"/>
+                          <a:ea typeface="Cascadia Mono" panose="020B0609020000020004" pitchFamily="49" charset="0"/>
+                          <a:cs typeface="Cascadia Mono" panose="020B0609020000020004" pitchFamily="49" charset="0"/>
+                        </a:rPr>
+                        <a:t>.env</a:t>
+                      </a:r>
+                      <a:endParaRPr kumimoji="1" lang="ja-JP" altLang="en-US" sz="1000">
+                        <a:latin typeface="Cascadia Mono" panose="020B0609020000020004" pitchFamily="49" charset="0"/>
+                        <a:ea typeface="BIZ UDゴシック" panose="020B0400000000000000" pitchFamily="49" charset="-128"/>
+                        <a:cs typeface="Cascadia Mono" panose="020B0609020000020004" pitchFamily="49" charset="0"/>
+                      </a:endParaRPr>
+                    </a:p>
+                  </a:txBody>
+                  <a:tcPr marL="137160" marR="137160" marT="137160" marB="137160">
+                    <a:lnL w="12700" cap="flat" cmpd="sng" algn="ctr">
+                      <a:solidFill>
+                        <a:schemeClr val="tx1"/>
+                      </a:solidFill>
+                      <a:prstDash val="solid"/>
+                      <a:round/>
+                      <a:headEnd type="none" w="med" len="med"/>
+                      <a:tailEnd type="none" w="med" len="med"/>
+                    </a:lnL>
+                    <a:lnR w="12700" cap="flat" cmpd="sng" algn="ctr">
+                      <a:solidFill>
+                        <a:schemeClr val="tx1"/>
+                      </a:solidFill>
+                      <a:prstDash val="solid"/>
+                      <a:round/>
+                      <a:headEnd type="none" w="med" len="med"/>
+                      <a:tailEnd type="none" w="med" len="med"/>
+                    </a:lnR>
+                    <a:lnT w="12700" cap="flat" cmpd="sng" algn="ctr">
+                      <a:solidFill>
+                        <a:schemeClr val="tx1"/>
+                      </a:solidFill>
+                      <a:prstDash val="solid"/>
+                      <a:round/>
+                      <a:headEnd type="none" w="med" len="med"/>
+                      <a:tailEnd type="none" w="med" len="med"/>
+                    </a:lnT>
+                    <a:lnB w="12700" cap="flat" cmpd="sng" algn="ctr">
+                      <a:solidFill>
+                        <a:schemeClr val="tx1"/>
+                      </a:solidFill>
+                      <a:prstDash val="solid"/>
+                      <a:round/>
+                      <a:headEnd type="none" w="med" len="med"/>
+                      <a:tailEnd type="none" w="med" len="med"/>
+                    </a:lnB>
+                    <a:solidFill>
+                      <a:schemeClr val="bg1"/>
+                    </a:solidFill>
+                  </a:tcPr>
+                </a:tc>
+                <a:tc hMerge="1">
+                  <a:txBody>
+                    <a:bodyPr/>
+                    <a:lstStyle/>
+                    <a:p>
+                      <a:endParaRPr kumimoji="1" lang="ja-JP" altLang="en-US" sz="1000">
                         <a:latin typeface="Cascadia Code SemiBold" panose="020B0609020000020004" pitchFamily="49" charset="0"/>
                         <a:ea typeface="BIZ UDゴシック" panose="020B0400000000000000" pitchFamily="49" charset="-128"/>
                         <a:cs typeface="Cascadia Code SemiBold" panose="020B0609020000020004" pitchFamily="49" charset="0"/>
@@ -1597,34 +1792,142 @@
                       <a:tailEnd type="none" w="med" len="med"/>
                     </a:lnB>
                     <a:solidFill>
-                      <a:schemeClr val="tx1">
-                        <a:lumMod val="65000"/>
-                        <a:lumOff val="35000"/>
-                      </a:schemeClr>
+                      <a:schemeClr val="bg1"/>
                     </a:solidFill>
                   </a:tcPr>
                 </a:tc>
-                <a:extLst>
-                  <a:ext uri="{0D108BD9-81ED-4DB2-BD59-A6C34878D82A}">
-                    <a16:rowId xmlns:a16="http://schemas.microsoft.com/office/drawing/2014/main" val="526102552"/>
-                  </a:ext>
-                </a:extLst>
-              </a:tr>
-              <a:tr h="0">
                 <a:tc>
                   <a:txBody>
                     <a:bodyPr/>
                     <a:lstStyle/>
                     <a:p>
                       <a:r>
-                        <a:rPr kumimoji="1" lang="en-US" altLang="ja-JP" sz="1200">
-                          <a:latin typeface="Cascadia Code SemiBold" panose="020B0609020000020004" pitchFamily="49" charset="0"/>
-                          <a:ea typeface="Cascadia Code SemiBold" panose="020B0609020000020004" pitchFamily="49" charset="0"/>
-                          <a:cs typeface="Cascadia Code SemiBold" panose="020B0609020000020004" pitchFamily="49" charset="0"/>
+                        <a:rPr kumimoji="1" lang="en-US" altLang="ja-JP" sz="1000">
+                          <a:latin typeface="Cascadia Mono" panose="020B0609020000020004" pitchFamily="49" charset="0"/>
+                          <a:ea typeface="Cascadia Mono" panose="020B0609020000020004" pitchFamily="49" charset="0"/>
+                          <a:cs typeface="Cascadia Mono" panose="020B0609020000020004" pitchFamily="49" charset="0"/>
                         </a:rPr>
-                        <a:t>.env</a:t>
+                        <a:t>File containing LLM API credentials</a:t>
                       </a:r>
-                      <a:endParaRPr kumimoji="1" lang="ja-JP" altLang="en-US" sz="1200">
+                    </a:p>
+                  </a:txBody>
+                  <a:tcPr marL="137160" marR="137160" marT="137160" marB="137160">
+                    <a:lnL w="12700" cap="flat" cmpd="sng" algn="ctr">
+                      <a:solidFill>
+                        <a:schemeClr val="tx1"/>
+                      </a:solidFill>
+                      <a:prstDash val="solid"/>
+                      <a:round/>
+                      <a:headEnd type="none" w="med" len="med"/>
+                      <a:tailEnd type="none" w="med" len="med"/>
+                    </a:lnL>
+                    <a:lnR w="12700" cap="flat" cmpd="sng" algn="ctr">
+                      <a:solidFill>
+                        <a:schemeClr val="tx1"/>
+                      </a:solidFill>
+                      <a:prstDash val="solid"/>
+                      <a:round/>
+                      <a:headEnd type="none" w="med" len="med"/>
+                      <a:tailEnd type="none" w="med" len="med"/>
+                    </a:lnR>
+                    <a:lnT w="12700" cap="flat" cmpd="sng" algn="ctr">
+                      <a:solidFill>
+                        <a:schemeClr val="tx1"/>
+                      </a:solidFill>
+                      <a:prstDash val="solid"/>
+                      <a:round/>
+                      <a:headEnd type="none" w="med" len="med"/>
+                      <a:tailEnd type="none" w="med" len="med"/>
+                    </a:lnT>
+                    <a:lnB w="12700" cap="flat" cmpd="sng" algn="ctr">
+                      <a:solidFill>
+                        <a:schemeClr val="tx1"/>
+                      </a:solidFill>
+                      <a:prstDash val="solid"/>
+                      <a:round/>
+                      <a:headEnd type="none" w="med" len="med"/>
+                      <a:tailEnd type="none" w="med" len="med"/>
+                    </a:lnB>
+                    <a:solidFill>
+                      <a:schemeClr val="bg1"/>
+                    </a:solidFill>
+                  </a:tcPr>
+                </a:tc>
+                <a:extLst>
+                  <a:ext uri="{0D108BD9-81ED-4DB2-BD59-A6C34878D82A}">
+                    <a16:rowId xmlns:a16="http://schemas.microsoft.com/office/drawing/2014/main" val="1660497218"/>
+                  </a:ext>
+                </a:extLst>
+              </a:tr>
+              <a:tr h="0">
+                <a:tc gridSpan="2">
+                  <a:txBody>
+                    <a:bodyPr/>
+                    <a:lstStyle/>
+                    <a:p>
+                      <a:r>
+                        <a:rPr kumimoji="1" lang="en-US" altLang="ja-JP" sz="1000">
+                          <a:latin typeface="Cascadia Mono" panose="020B0609020000020004" pitchFamily="49" charset="0"/>
+                          <a:ea typeface="Cascadia Mono" panose="020B0609020000020004" pitchFamily="49" charset="0"/>
+                          <a:cs typeface="Cascadia Mono" panose="020B0609020000020004" pitchFamily="49" charset="0"/>
+                        </a:rPr>
+                        <a:t>llmj.py</a:t>
+                      </a:r>
+                      <a:endParaRPr kumimoji="1" lang="ja-JP" altLang="en-US" sz="1000">
+                        <a:latin typeface="Cascadia Mono" panose="020B0609020000020004" pitchFamily="49" charset="0"/>
+                        <a:ea typeface="BIZ UDゴシック" panose="020B0400000000000000" pitchFamily="49" charset="-128"/>
+                        <a:cs typeface="Cascadia Mono" panose="020B0609020000020004" pitchFamily="49" charset="0"/>
+                      </a:endParaRPr>
+                    </a:p>
+                  </a:txBody>
+                  <a:tcPr marL="137160" marR="137160" marT="137160" marB="137160">
+                    <a:lnL w="12700" cap="flat" cmpd="sng" algn="ctr">
+                      <a:solidFill>
+                        <a:schemeClr val="tx1"/>
+                      </a:solidFill>
+                      <a:prstDash val="solid"/>
+                      <a:round/>
+                      <a:headEnd type="none" w="med" len="med"/>
+                      <a:tailEnd type="none" w="med" len="med"/>
+                    </a:lnL>
+                    <a:lnR w="12700" cap="flat" cmpd="sng" algn="ctr">
+                      <a:solidFill>
+                        <a:schemeClr val="tx1"/>
+                      </a:solidFill>
+                      <a:prstDash val="solid"/>
+                      <a:round/>
+                      <a:headEnd type="none" w="med" len="med"/>
+                      <a:tailEnd type="none" w="med" len="med"/>
+                    </a:lnR>
+                    <a:lnT w="12700" cap="flat" cmpd="sng" algn="ctr">
+                      <a:solidFill>
+                        <a:schemeClr val="tx1"/>
+                      </a:solidFill>
+                      <a:prstDash val="solid"/>
+                      <a:round/>
+                      <a:headEnd type="none" w="med" len="med"/>
+                      <a:tailEnd type="none" w="med" len="med"/>
+                    </a:lnT>
+                    <a:lnB w="12700" cap="flat" cmpd="sng" algn="ctr">
+                      <a:solidFill>
+                        <a:schemeClr val="tx1"/>
+                      </a:solidFill>
+                      <a:prstDash val="solid"/>
+                      <a:round/>
+                      <a:headEnd type="none" w="med" len="med"/>
+                      <a:tailEnd type="none" w="med" len="med"/>
+                    </a:lnB>
+                    <a:solidFill>
+                      <a:schemeClr val="bg1"/>
+                    </a:solidFill>
+                  </a:tcPr>
+                </a:tc>
+                <a:tc hMerge="1">
+                  <a:txBody>
+                    <a:bodyPr/>
+                    <a:lstStyle/>
+                    <a:p>
+                      <a:endParaRPr kumimoji="1" lang="ja-JP" altLang="en-US" sz="1000">
                         <a:latin typeface="Cascadia Code SemiBold" panose="020B0609020000020004" pitchFamily="49" charset="0"/>
                         <a:ea typeface="BIZ UDゴシック" panose="020B0400000000000000" pitchFamily="49" charset="-128"/>
                         <a:cs typeface="Cascadia Code SemiBold" panose="020B0609020000020004" pitchFamily="49" charset="0"/>
@@ -1679,12 +1982,12 @@
                     <a:lstStyle/>
                     <a:p>
                       <a:r>
-                        <a:rPr kumimoji="1" lang="en-US" altLang="ja-JP" sz="1200">
-                          <a:latin typeface="Cascadia Code SemiBold" panose="020B0609020000020004" pitchFamily="49" charset="0"/>
-                          <a:ea typeface="Cascadia Code SemiBold" panose="020B0609020000020004" pitchFamily="49" charset="0"/>
-                          <a:cs typeface="Cascadia Code SemiBold" panose="020B0609020000020004" pitchFamily="49" charset="0"/>
+                        <a:rPr kumimoji="1" lang="en-US" altLang="ja-JP" sz="1000">
+                          <a:latin typeface="Cascadia Mono" panose="020B0609020000020004" pitchFamily="49" charset="0"/>
+                          <a:ea typeface="Cascadia Mono" panose="020B0609020000020004" pitchFamily="49" charset="0"/>
+                          <a:cs typeface="Cascadia Mono" panose="020B0609020000020004" pitchFamily="49" charset="0"/>
                         </a:rPr>
-                        <a:t>File containing LLM API credentials</a:t>
+                        <a:t>Common definitions and common processing</a:t>
                       </a:r>
                     </a:p>
                   </a:txBody>
@@ -1732,25 +2035,113 @@
                 </a:tc>
                 <a:extLst>
                   <a:ext uri="{0D108BD9-81ED-4DB2-BD59-A6C34878D82A}">
-                    <a16:rowId xmlns:a16="http://schemas.microsoft.com/office/drawing/2014/main" val="1660497218"/>
+                    <a16:rowId xmlns:a16="http://schemas.microsoft.com/office/drawing/2014/main" val="1288496352"/>
                   </a:ext>
                 </a:extLst>
               </a:tr>
               <a:tr h="0">
-                <a:tc>
+                <a:tc gridSpan="2">
                   <a:txBody>
                     <a:bodyPr/>
                     <a:lstStyle/>
                     <a:p>
+                      <a:pPr marL="0" marR="0" lvl="0" indent="0" algn="l" defTabSz="914400" rtl="0" eaLnBrk="1" fontAlgn="auto" latinLnBrk="0" hangingPunct="1">
+                        <a:lnSpc>
+                          <a:spcPct val="100000"/>
+                        </a:lnSpc>
+                        <a:spcBef>
+                          <a:spcPts val="0"/>
+                        </a:spcBef>
+                        <a:spcAft>
+                          <a:spcPts val="0"/>
+                        </a:spcAft>
+                        <a:buClrTx/>
+                        <a:buSzTx/>
+                        <a:buFontTx/>
+                        <a:buNone/>
+                        <a:tabLst/>
+                        <a:defRPr/>
+                      </a:pPr>
                       <a:r>
-                        <a:rPr kumimoji="1" lang="en-US" altLang="ja-JP" sz="1200">
-                          <a:latin typeface="Cascadia Code SemiBold" panose="020B0609020000020004" pitchFamily="49" charset="0"/>
-                          <a:ea typeface="Cascadia Code SemiBold" panose="020B0609020000020004" pitchFamily="49" charset="0"/>
-                          <a:cs typeface="Cascadia Code SemiBold" panose="020B0609020000020004" pitchFamily="49" charset="0"/>
+                        <a:rPr kumimoji="1" lang="en-US" altLang="ja-JP" sz="1000">
+                          <a:latin typeface="Cascadia Mono" panose="020B0609020000020004" pitchFamily="49" charset="0"/>
+                          <a:ea typeface="Cascadia Mono" panose="020B0609020000020004" pitchFamily="49" charset="0"/>
+                          <a:cs typeface="Cascadia Mono" panose="020B0609020000020004" pitchFamily="49" charset="0"/>
                         </a:rPr>
-                        <a:t>llmj.py</a:t>
+                        <a:t>llmj-generate.py</a:t>
                       </a:r>
-                      <a:endParaRPr kumimoji="1" lang="ja-JP" altLang="en-US" sz="1200">
+                      <a:endParaRPr kumimoji="1" lang="ja-JP" altLang="en-US" sz="1000">
+                        <a:latin typeface="Cascadia Mono" panose="020B0609020000020004" pitchFamily="49" charset="0"/>
+                        <a:ea typeface="BIZ UDゴシック" panose="020B0400000000000000" pitchFamily="49" charset="-128"/>
+                        <a:cs typeface="Cascadia Mono" panose="020B0609020000020004" pitchFamily="49" charset="0"/>
+                      </a:endParaRPr>
+                    </a:p>
+                  </a:txBody>
+                  <a:tcPr marL="137160" marR="137160" marT="137160" marB="137160">
+                    <a:lnL w="12700" cap="flat" cmpd="sng" algn="ctr">
+                      <a:solidFill>
+                        <a:schemeClr val="tx1"/>
+                      </a:solidFill>
+                      <a:prstDash val="solid"/>
+                      <a:round/>
+                      <a:headEnd type="none" w="med" len="med"/>
+                      <a:tailEnd type="none" w="med" len="med"/>
+                    </a:lnL>
+                    <a:lnR w="12700" cap="flat" cmpd="sng" algn="ctr">
+                      <a:solidFill>
+                        <a:schemeClr val="tx1"/>
+                      </a:solidFill>
+                      <a:prstDash val="solid"/>
+                      <a:round/>
+                      <a:headEnd type="none" w="med" len="med"/>
+                      <a:tailEnd type="none" w="med" len="med"/>
+                    </a:lnR>
+                    <a:lnT w="12700" cap="flat" cmpd="sng" algn="ctr">
+                      <a:solidFill>
+                        <a:schemeClr val="tx1"/>
+                      </a:solidFill>
+                      <a:prstDash val="solid"/>
+                      <a:round/>
+                      <a:headEnd type="none" w="med" len="med"/>
+                      <a:tailEnd type="none" w="med" len="med"/>
+                    </a:lnT>
+                    <a:lnB w="12700" cap="flat" cmpd="sng" algn="ctr">
+                      <a:solidFill>
+                        <a:schemeClr val="tx1"/>
+                      </a:solidFill>
+                      <a:prstDash val="solid"/>
+                      <a:round/>
+                      <a:headEnd type="none" w="med" len="med"/>
+                      <a:tailEnd type="none" w="med" len="med"/>
+                    </a:lnB>
+                    <a:solidFill>
+                      <a:schemeClr val="bg1"/>
+                    </a:solidFill>
+                  </a:tcPr>
+                </a:tc>
+                <a:tc hMerge="1">
+                  <a:txBody>
+                    <a:bodyPr/>
+                    <a:lstStyle/>
+                    <a:p>
+                      <a:pPr marL="0" marR="0" lvl="0" indent="0" algn="l" defTabSz="914400" rtl="0" eaLnBrk="1" fontAlgn="auto" latinLnBrk="0" hangingPunct="1">
+                        <a:lnSpc>
+                          <a:spcPct val="100000"/>
+                        </a:lnSpc>
+                        <a:spcBef>
+                          <a:spcPts val="0"/>
+                        </a:spcBef>
+                        <a:spcAft>
+                          <a:spcPts val="0"/>
+                        </a:spcAft>
+                        <a:buClrTx/>
+                        <a:buSzTx/>
+                        <a:buFontTx/>
+                        <a:buNone/>
+                        <a:tabLst/>
+                        <a:defRPr/>
+                      </a:pPr>
+                      <a:endParaRPr kumimoji="1" lang="ja-JP" altLang="en-US" sz="1000">
                         <a:latin typeface="Cascadia Code SemiBold" panose="020B0609020000020004" pitchFamily="49" charset="0"/>
                         <a:ea typeface="BIZ UDゴシック" panose="020B0400000000000000" pitchFamily="49" charset="-128"/>
                         <a:cs typeface="Cascadia Code SemiBold" panose="020B0609020000020004" pitchFamily="49" charset="0"/>
@@ -1804,13 +2195,87 @@
                     <a:bodyPr/>
                     <a:lstStyle/>
                     <a:p>
+                      <a:pPr marL="0" marR="0" lvl="0" indent="0" algn="l" defTabSz="914400" rtl="0" eaLnBrk="1" fontAlgn="auto" latinLnBrk="0" hangingPunct="1">
+                        <a:lnSpc>
+                          <a:spcPct val="100000"/>
+                        </a:lnSpc>
+                        <a:spcBef>
+                          <a:spcPts val="0"/>
+                        </a:spcBef>
+                        <a:spcAft>
+                          <a:spcPts val="0"/>
+                        </a:spcAft>
+                        <a:buClrTx/>
+                        <a:buSzTx/>
+                        <a:buFontTx/>
+                        <a:buNone/>
+                        <a:tabLst/>
+                        <a:defRPr/>
+                      </a:pPr>
                       <a:r>
-                        <a:rPr kumimoji="1" lang="en-US" altLang="ja-JP" sz="1200">
-                          <a:latin typeface="Cascadia Code SemiBold" panose="020B0609020000020004" pitchFamily="49" charset="0"/>
-                          <a:ea typeface="Cascadia Code SemiBold" panose="020B0609020000020004" pitchFamily="49" charset="0"/>
-                          <a:cs typeface="Cascadia Code SemiBold" panose="020B0609020000020004" pitchFamily="49" charset="0"/>
+                        <a:rPr kumimoji="1" lang="en-US" altLang="ja-JP" sz="1000">
+                          <a:latin typeface="Cascadia Mono" panose="020B0609020000020004" pitchFamily="49" charset="0"/>
+                          <a:ea typeface="Cascadia Mono" panose="020B0609020000020004" pitchFamily="49" charset="0"/>
+                          <a:cs typeface="Cascadia Mono" panose="020B0609020000020004" pitchFamily="49" charset="0"/>
                         </a:rPr>
-                        <a:t>Common definitions and common processing</a:t>
+                        <a:t>This SCRIPT uses </a:t>
+                      </a:r>
+                      <a:r>
+                        <a:rPr kumimoji="1" lang="en-US" altLang="ja-JP" sz="1000" b="1" i="1">
+                          <a:solidFill>
+                            <a:srgbClr val="FF0000"/>
+                          </a:solidFill>
+                          <a:latin typeface="Cascadia Mono" panose="020B0609020000020004" pitchFamily="49" charset="0"/>
+                          <a:ea typeface="Cascadia Mono" panose="020B0609020000020004" pitchFamily="49" charset="0"/>
+                          <a:cs typeface="Cascadia Mono" panose="020B0609020000020004" pitchFamily="49" charset="0"/>
+                        </a:rPr>
+                        <a:t>work/*.txt</a:t>
+                      </a:r>
+                      <a:r>
+                        <a:rPr kumimoji="1" lang="en-US" altLang="ja-JP" sz="1000">
+                          <a:latin typeface="Cascadia Mono" panose="020B0609020000020004" pitchFamily="49" charset="0"/>
+                          <a:ea typeface="Cascadia Mono" panose="020B0609020000020004" pitchFamily="49" charset="0"/>
+                          <a:cs typeface="Cascadia Mono" panose="020B0609020000020004" pitchFamily="49" charset="0"/>
+                        </a:rPr>
+                        <a:t> to transform </a:t>
+                      </a:r>
+                      <a:r>
+                        <a:rPr kumimoji="1" lang="en-US" altLang="ja-JP" sz="1000" b="1" i="1">
+                          <a:solidFill>
+                            <a:srgbClr val="FF0000"/>
+                          </a:solidFill>
+                          <a:latin typeface="Cascadia Mono" panose="020B0609020000020004" pitchFamily="49" charset="0"/>
+                          <a:ea typeface="Cascadia Mono" panose="020B0609020000020004" pitchFamily="49" charset="0"/>
+                          <a:cs typeface="Cascadia Mono" panose="020B0609020000020004" pitchFamily="49" charset="0"/>
+                        </a:rPr>
+                        <a:t>source/*.txt</a:t>
+                      </a:r>
+                      <a:r>
+                        <a:rPr kumimoji="1" lang="en-US" altLang="ja-JP" sz="1000">
+                          <a:latin typeface="Cascadia Mono" panose="020B0609020000020004" pitchFamily="49" charset="0"/>
+                          <a:ea typeface="Cascadia Mono" panose="020B0609020000020004" pitchFamily="49" charset="0"/>
+                          <a:cs typeface="Cascadia Mono" panose="020B0609020000020004" pitchFamily="49" charset="0"/>
+                        </a:rPr>
+                        <a:t> and generates </a:t>
+                      </a:r>
+                      <a:r>
+                        <a:rPr kumimoji="1" lang="en-US" altLang="ja-JP" sz="1000" b="1" i="1">
+                          <a:solidFill>
+                            <a:srgbClr val="FF0000"/>
+                          </a:solidFill>
+                          <a:latin typeface="Cascadia Mono" panose="020B0609020000020004" pitchFamily="49" charset="0"/>
+                          <a:ea typeface="Cascadia Mono" panose="020B0609020000020004" pitchFamily="49" charset="0"/>
+                          <a:cs typeface="Cascadia Mono" panose="020B0609020000020004" pitchFamily="49" charset="0"/>
+                        </a:rPr>
+                        <a:t>work/*.xlsx</a:t>
+                      </a:r>
+                      <a:r>
+                        <a:rPr kumimoji="1" lang="en-US" altLang="ja-JP" sz="1000">
+                          <a:latin typeface="Cascadia Mono" panose="020B0609020000020004" pitchFamily="49" charset="0"/>
+                          <a:ea typeface="Cascadia Mono" panose="020B0609020000020004" pitchFamily="49" charset="0"/>
+                          <a:cs typeface="Cascadia Mono" panose="020B0609020000020004" pitchFamily="49" charset="0"/>
+                        </a:rPr>
+                        <a:t>.</a:t>
                       </a:r>
                     </a:p>
                   </a:txBody>
@@ -1858,42 +2323,79 @@
                 </a:tc>
                 <a:extLst>
                   <a:ext uri="{0D108BD9-81ED-4DB2-BD59-A6C34878D82A}">
-                    <a16:rowId xmlns:a16="http://schemas.microsoft.com/office/drawing/2014/main" val="1288496352"/>
+                    <a16:rowId xmlns:a16="http://schemas.microsoft.com/office/drawing/2014/main" val="2978836238"/>
                   </a:ext>
                 </a:extLst>
               </a:tr>
-              <a:tr h="0">
-                <a:tc>
+              <a:tr h="357067">
+                <a:tc gridSpan="2">
                   <a:txBody>
                     <a:bodyPr/>
                     <a:lstStyle/>
                     <a:p>
-                      <a:pPr marL="0" marR="0" lvl="0" indent="0" algn="l" defTabSz="914400" rtl="0" eaLnBrk="1" fontAlgn="auto" latinLnBrk="0" hangingPunct="1">
-                        <a:lnSpc>
-                          <a:spcPct val="100000"/>
-                        </a:lnSpc>
-                        <a:spcBef>
-                          <a:spcPts val="0"/>
-                        </a:spcBef>
-                        <a:spcAft>
-                          <a:spcPts val="0"/>
-                        </a:spcAft>
-                        <a:buClrTx/>
-                        <a:buSzTx/>
-                        <a:buFontTx/>
-                        <a:buNone/>
-                        <a:tabLst/>
-                        <a:defRPr/>
-                      </a:pPr>
                       <a:r>
-                        <a:rPr kumimoji="1" lang="en-US" altLang="ja-JP" sz="1200">
-                          <a:latin typeface="Cascadia Code SemiBold" panose="020B0609020000020004" pitchFamily="49" charset="0"/>
-                          <a:ea typeface="Cascadia Code SemiBold" panose="020B0609020000020004" pitchFamily="49" charset="0"/>
-                          <a:cs typeface="Cascadia Code SemiBold" panose="020B0609020000020004" pitchFamily="49" charset="0"/>
+                        <a:rPr kumimoji="1" lang="en-US" altLang="ja-JP" sz="1000">
+                          <a:latin typeface="Cascadia Mono" panose="020B0609020000020004" pitchFamily="49" charset="0"/>
+                          <a:ea typeface="Cascadia Mono" panose="020B0609020000020004" pitchFamily="49" charset="0"/>
+                          <a:cs typeface="Cascadia Mono" panose="020B0609020000020004" pitchFamily="49" charset="0"/>
                         </a:rPr>
-                        <a:t>llmj-generate.py</a:t>
+                        <a:t>llmj-judge.py</a:t>
                       </a:r>
-                      <a:endParaRPr kumimoji="1" lang="ja-JP" altLang="en-US" sz="1200">
+                      <a:endParaRPr kumimoji="1" lang="ja-JP" altLang="en-US" sz="1000">
+                        <a:latin typeface="Cascadia Mono" panose="020B0609020000020004" pitchFamily="49" charset="0"/>
+                        <a:ea typeface="BIZ UDゴシック" panose="020B0400000000000000" pitchFamily="49" charset="-128"/>
+                        <a:cs typeface="Cascadia Mono" panose="020B0609020000020004" pitchFamily="49" charset="0"/>
+                      </a:endParaRPr>
+                    </a:p>
+                  </a:txBody>
+                  <a:tcPr marL="137160" marR="137160" marT="137160" marB="137160">
+                    <a:lnL w="12700" cap="flat" cmpd="sng" algn="ctr">
+                      <a:solidFill>
+                        <a:schemeClr val="tx1"/>
+                      </a:solidFill>
+                      <a:prstDash val="solid"/>
+                      <a:round/>
+                      <a:headEnd type="none" w="med" len="med"/>
+                      <a:tailEnd type="none" w="med" len="med"/>
+                    </a:lnL>
+                    <a:lnR w="12700" cap="flat" cmpd="sng" algn="ctr">
+                      <a:solidFill>
+                        <a:schemeClr val="tx1"/>
+                      </a:solidFill>
+                      <a:prstDash val="solid"/>
+                      <a:round/>
+                      <a:headEnd type="none" w="med" len="med"/>
+                      <a:tailEnd type="none" w="med" len="med"/>
+                    </a:lnR>
+                    <a:lnT w="12700" cap="flat" cmpd="sng" algn="ctr">
+                      <a:solidFill>
+                        <a:schemeClr val="tx1"/>
+                      </a:solidFill>
+                      <a:prstDash val="solid"/>
+                      <a:round/>
+                      <a:headEnd type="none" w="med" len="med"/>
+                      <a:tailEnd type="none" w="med" len="med"/>
+                    </a:lnT>
+                    <a:lnB w="12700" cap="flat" cmpd="sng" algn="ctr">
+                      <a:solidFill>
+                        <a:schemeClr val="tx1"/>
+                      </a:solidFill>
+                      <a:prstDash val="solid"/>
+                      <a:round/>
+                      <a:headEnd type="none" w="med" len="med"/>
+                      <a:tailEnd type="none" w="med" len="med"/>
+                    </a:lnB>
+                    <a:solidFill>
+                      <a:schemeClr val="bg1"/>
+                    </a:solidFill>
+                  </a:tcPr>
+                </a:tc>
+                <a:tc hMerge="1">
+                  <a:txBody>
+                    <a:bodyPr/>
+                    <a:lstStyle/>
+                    <a:p>
+                      <a:endParaRPr kumimoji="1" lang="ja-JP" altLang="en-US" sz="1000">
                         <a:latin typeface="Cascadia Code SemiBold" panose="020B0609020000020004" pitchFamily="49" charset="0"/>
                         <a:ea typeface="BIZ UDゴシック" panose="020B0400000000000000" pitchFamily="49" charset="-128"/>
                         <a:cs typeface="Cascadia Code SemiBold" panose="020B0609020000020004" pitchFamily="49" charset="0"/>
@@ -1947,87 +2449,100 @@
                     <a:bodyPr/>
                     <a:lstStyle/>
                     <a:p>
-                      <a:pPr marL="0" marR="0" lvl="0" indent="0" algn="l" defTabSz="914400" rtl="0" eaLnBrk="1" fontAlgn="auto" latinLnBrk="0" hangingPunct="1">
-                        <a:lnSpc>
-                          <a:spcPct val="100000"/>
-                        </a:lnSpc>
-                        <a:spcBef>
-                          <a:spcPts val="0"/>
-                        </a:spcBef>
-                        <a:spcAft>
-                          <a:spcPts val="0"/>
-                        </a:spcAft>
-                        <a:buClrTx/>
-                        <a:buSzTx/>
-                        <a:buFontTx/>
-                        <a:buNone/>
-                        <a:tabLst/>
-                        <a:defRPr/>
-                      </a:pPr>
                       <a:r>
-                        <a:rPr kumimoji="1" lang="en-US" altLang="ja-JP" sz="1200">
-                          <a:latin typeface="Cascadia Code SemiBold" panose="020B0609020000020004" pitchFamily="49" charset="0"/>
-                          <a:ea typeface="Cascadia Code SemiBold" panose="020B0609020000020004" pitchFamily="49" charset="0"/>
-                          <a:cs typeface="Cascadia Code SemiBold" panose="020B0609020000020004" pitchFamily="49" charset="0"/>
+                        <a:rPr kumimoji="1" lang="en-US" altLang="ja-JP" sz="1000">
+                          <a:latin typeface="Cascadia Mono" panose="020B0609020000020004" pitchFamily="49" charset="0"/>
+                          <a:ea typeface="Cascadia Mono" panose="020B0609020000020004" pitchFamily="49" charset="0"/>
+                          <a:cs typeface="Cascadia Mono" panose="020B0609020000020004" pitchFamily="49" charset="0"/>
                         </a:rPr>
-                        <a:t>This SCRIPT uses </a:t>
+                        <a:t>This SCRIPT evaluates the contents of </a:t>
                       </a:r>
                       <a:r>
-                        <a:rPr kumimoji="1" lang="en-US" altLang="ja-JP" sz="1200" b="1" i="1">
+                        <a:rPr kumimoji="1" lang="en-US" altLang="ja-JP" sz="1000" b="1" i="1">
                           <a:solidFill>
                             <a:srgbClr val="FF0000"/>
                           </a:solidFill>
-                          <a:latin typeface="Cascadia Code SemiBold" panose="020B0609020000020004" pitchFamily="49" charset="0"/>
-                          <a:ea typeface="Cascadia Code SemiBold" panose="020B0609020000020004" pitchFamily="49" charset="0"/>
-                          <a:cs typeface="Cascadia Code SemiBold" panose="020B0609020000020004" pitchFamily="49" charset="0"/>
-                        </a:rPr>
-                        <a:t>work/*.txt</a:t>
-                      </a:r>
-                      <a:r>
-                        <a:rPr kumimoji="1" lang="en-US" altLang="ja-JP" sz="1200">
-                          <a:latin typeface="Cascadia Code SemiBold" panose="020B0609020000020004" pitchFamily="49" charset="0"/>
-                          <a:ea typeface="Cascadia Code SemiBold" panose="020B0609020000020004" pitchFamily="49" charset="0"/>
-                          <a:cs typeface="Cascadia Code SemiBold" panose="020B0609020000020004" pitchFamily="49" charset="0"/>
-                        </a:rPr>
-                        <a:t> to transform </a:t>
-                      </a:r>
-                      <a:r>
-                        <a:rPr kumimoji="1" lang="en-US" altLang="ja-JP" sz="1200" b="1" i="1">
-                          <a:solidFill>
-                            <a:srgbClr val="FF0000"/>
-                          </a:solidFill>
-                          <a:latin typeface="Cascadia Code SemiBold" panose="020B0609020000020004" pitchFamily="49" charset="0"/>
-                          <a:ea typeface="Cascadia Code SemiBold" panose="020B0609020000020004" pitchFamily="49" charset="0"/>
-                          <a:cs typeface="Cascadia Code SemiBold" panose="020B0609020000020004" pitchFamily="49" charset="0"/>
-                        </a:rPr>
-                        <a:t>source/*.txt</a:t>
-                      </a:r>
-                      <a:r>
-                        <a:rPr kumimoji="1" lang="en-US" altLang="ja-JP" sz="1200">
-                          <a:latin typeface="Cascadia Code SemiBold" panose="020B0609020000020004" pitchFamily="49" charset="0"/>
-                          <a:ea typeface="Cascadia Code SemiBold" panose="020B0609020000020004" pitchFamily="49" charset="0"/>
-                          <a:cs typeface="Cascadia Code SemiBold" panose="020B0609020000020004" pitchFamily="49" charset="0"/>
-                        </a:rPr>
-                        <a:t> and generates </a:t>
-                      </a:r>
-                      <a:r>
-                        <a:rPr kumimoji="1" lang="en-US" altLang="ja-JP" sz="1200" b="1" i="1">
-                          <a:solidFill>
-                            <a:srgbClr val="FF0000"/>
-                          </a:solidFill>
-                          <a:latin typeface="Cascadia Code SemiBold" panose="020B0609020000020004" pitchFamily="49" charset="0"/>
-                          <a:ea typeface="Cascadia Code SemiBold" panose="020B0609020000020004" pitchFamily="49" charset="0"/>
-                          <a:cs typeface="Cascadia Code SemiBold" panose="020B0609020000020004" pitchFamily="49" charset="0"/>
+                          <a:latin typeface="Cascadia Mono" panose="020B0609020000020004" pitchFamily="49" charset="0"/>
+                          <a:ea typeface="Cascadia Mono" panose="020B0609020000020004" pitchFamily="49" charset="0"/>
+                          <a:cs typeface="Cascadia Mono" panose="020B0609020000020004" pitchFamily="49" charset="0"/>
                         </a:rPr>
                         <a:t>work/*.xlsx</a:t>
                       </a:r>
                       <a:r>
-                        <a:rPr kumimoji="1" lang="en-US" altLang="ja-JP" sz="1200">
-                          <a:latin typeface="Cascadia Code SemiBold" panose="020B0609020000020004" pitchFamily="49" charset="0"/>
-                          <a:ea typeface="Cascadia Code SemiBold" panose="020B0609020000020004" pitchFamily="49" charset="0"/>
-                          <a:cs typeface="Cascadia Code SemiBold" panose="020B0609020000020004" pitchFamily="49" charset="0"/>
+                        <a:rPr kumimoji="1" lang="en-US" altLang="ja-JP" sz="1000">
+                          <a:latin typeface="Cascadia Mono" panose="020B0609020000020004" pitchFamily="49" charset="0"/>
+                          <a:ea typeface="Cascadia Mono" panose="020B0609020000020004" pitchFamily="49" charset="0"/>
+                          <a:cs typeface="Cascadia Mono" panose="020B0609020000020004" pitchFamily="49" charset="0"/>
                         </a:rPr>
-                        <a:t>.</a:t>
+                        <a:t> against </a:t>
+                      </a:r>
+                      <a:r>
+                        <a:rPr kumimoji="1" lang="en-US" altLang="ja-JP" sz="1000" b="1" i="1">
+                          <a:solidFill>
+                            <a:srgbClr val="FF0000"/>
+                          </a:solidFill>
+                          <a:latin typeface="Cascadia Mono" panose="020B0609020000020004" pitchFamily="49" charset="0"/>
+                          <a:ea typeface="Cascadia Mono" panose="020B0609020000020004" pitchFamily="49" charset="0"/>
+                          <a:cs typeface="Cascadia Mono" panose="020B0609020000020004" pitchFamily="49" charset="0"/>
+                        </a:rPr>
+                        <a:t>rubric/*.json</a:t>
+                      </a:r>
+                      <a:r>
+                        <a:rPr kumimoji="1" lang="en-US" altLang="ja-JP" sz="1000">
+                          <a:latin typeface="Cascadia Mono" panose="020B0609020000020004" pitchFamily="49" charset="0"/>
+                          <a:ea typeface="Cascadia Mono" panose="020B0609020000020004" pitchFamily="49" charset="0"/>
+                          <a:cs typeface="Cascadia Mono" panose="020B0609020000020004" pitchFamily="49" charset="0"/>
+                        </a:rPr>
+                        <a:t> and writes the results to </a:t>
+                      </a:r>
+                      <a:r>
+                        <a:rPr kumimoji="1" lang="en-US" altLang="ja-JP" sz="1000" b="1" i="1">
+                          <a:solidFill>
+                            <a:srgbClr val="FF0000"/>
+                          </a:solidFill>
+                          <a:latin typeface="Cascadia Mono" panose="020B0609020000020004" pitchFamily="49" charset="0"/>
+                          <a:ea typeface="Cascadia Mono" panose="020B0609020000020004" pitchFamily="49" charset="0"/>
+                          <a:cs typeface="Cascadia Mono" panose="020B0609020000020004" pitchFamily="49" charset="0"/>
+                        </a:rPr>
+                        <a:t>work/*.xlsx</a:t>
+                      </a:r>
+                      <a:r>
+                        <a:rPr kumimoji="1" lang="en-US" altLang="ja-JP" sz="1000" b="0" i="0">
+                          <a:solidFill>
+                            <a:schemeClr val="tx1"/>
+                          </a:solidFill>
+                          <a:latin typeface="Cascadia Mono" panose="020B0609020000020004" pitchFamily="49" charset="0"/>
+                          <a:ea typeface="Cascadia Mono" panose="020B0609020000020004" pitchFamily="49" charset="0"/>
+                          <a:cs typeface="Cascadia Mono" panose="020B0609020000020004" pitchFamily="49" charset="0"/>
+                        </a:rPr>
+                        <a:t>, and </a:t>
+                      </a:r>
+                      <a:r>
+                        <a:rPr kumimoji="1" lang="en-US" altLang="ja-JP" sz="1000">
+                          <a:latin typeface="Cascadia Mono" panose="020B0609020000020004" pitchFamily="49" charset="0"/>
+                          <a:ea typeface="Cascadia Mono" panose="020B0609020000020004" pitchFamily="49" charset="0"/>
+                          <a:cs typeface="Cascadia Mono" panose="020B0609020000020004" pitchFamily="49" charset="0"/>
+                        </a:rPr>
+                        <a:t>generates </a:t>
+                      </a:r>
+                      <a:r>
+                        <a:rPr kumimoji="1" lang="en-US" altLang="ja-JP" sz="1000" b="1" i="1">
+                          <a:solidFill>
+                            <a:srgbClr val="FF0000"/>
+                          </a:solidFill>
+                          <a:latin typeface="Cascadia Mono" panose="020B0609020000020004" pitchFamily="49" charset="0"/>
+                          <a:ea typeface="Cascadia Mono" panose="020B0609020000020004" pitchFamily="49" charset="0"/>
+                          <a:cs typeface="Cascadia Mono" panose="020B0609020000020004" pitchFamily="49" charset="0"/>
+                        </a:rPr>
+                        <a:t>work/report.html</a:t>
+                      </a:r>
+                      <a:r>
+                        <a:rPr kumimoji="1" lang="en-US" altLang="ja-JP" sz="1000">
+                          <a:latin typeface="Cascadia Mono" panose="020B0609020000020004" pitchFamily="49" charset="0"/>
+                          <a:ea typeface="Cascadia Mono" panose="020B0609020000020004" pitchFamily="49" charset="0"/>
+                          <a:cs typeface="Cascadia Mono" panose="020B0609020000020004" pitchFamily="49" charset="0"/>
+                        </a:rPr>
+                        <a:t> based on it.</a:t>
                       </a:r>
                     </a:p>
                   </a:txBody>
@@ -2075,7 +2590,195 @@
                 </a:tc>
                 <a:extLst>
                   <a:ext uri="{0D108BD9-81ED-4DB2-BD59-A6C34878D82A}">
-                    <a16:rowId xmlns:a16="http://schemas.microsoft.com/office/drawing/2014/main" val="2978836238"/>
+                    <a16:rowId xmlns:a16="http://schemas.microsoft.com/office/drawing/2014/main" val="4198762670"/>
+                  </a:ext>
+                </a:extLst>
+              </a:tr>
+              <a:tr h="357067">
+                <a:tc>
+                  <a:txBody>
+                    <a:bodyPr/>
+                    <a:lstStyle/>
+                    <a:p>
+                      <a:r>
+                        <a:rPr kumimoji="1" lang="en-US" altLang="ja-JP" sz="1000">
+                          <a:latin typeface="Cascadia Mono" panose="020B0609020000020004" pitchFamily="49" charset="0"/>
+                          <a:ea typeface="Cascadia Mono" panose="020B0609020000020004" pitchFamily="49" charset="0"/>
+                          <a:cs typeface="Cascadia Mono" panose="020B0609020000020004" pitchFamily="49" charset="0"/>
+                        </a:rPr>
+                        <a:t>rubric/</a:t>
+                      </a:r>
+                      <a:endParaRPr kumimoji="1" lang="ja-JP" altLang="en-US" sz="1000">
+                        <a:latin typeface="Cascadia Mono" panose="020B0609020000020004" pitchFamily="49" charset="0"/>
+                        <a:ea typeface="BIZ UDゴシック" panose="020B0400000000000000" pitchFamily="49" charset="-128"/>
+                        <a:cs typeface="Cascadia Mono" panose="020B0609020000020004" pitchFamily="49" charset="0"/>
+                      </a:endParaRPr>
+                    </a:p>
+                  </a:txBody>
+                  <a:tcPr marL="137160" marR="137160" marT="137160" marB="137160">
+                    <a:lnL w="12700" cap="flat" cmpd="sng" algn="ctr">
+                      <a:solidFill>
+                        <a:schemeClr val="tx1"/>
+                      </a:solidFill>
+                      <a:prstDash val="solid"/>
+                      <a:round/>
+                      <a:headEnd type="none" w="med" len="med"/>
+                      <a:tailEnd type="none" w="med" len="med"/>
+                    </a:lnL>
+                    <a:lnR w="12700" cap="flat" cmpd="sng" algn="ctr">
+                      <a:solidFill>
+                        <a:schemeClr val="tx1"/>
+                      </a:solidFill>
+                      <a:prstDash val="solid"/>
+                      <a:round/>
+                      <a:headEnd type="none" w="med" len="med"/>
+                      <a:tailEnd type="none" w="med" len="med"/>
+                    </a:lnR>
+                    <a:lnT w="12700" cap="flat" cmpd="sng" algn="ctr">
+                      <a:solidFill>
+                        <a:schemeClr val="tx1"/>
+                      </a:solidFill>
+                      <a:prstDash val="solid"/>
+                      <a:round/>
+                      <a:headEnd type="none" w="med" len="med"/>
+                      <a:tailEnd type="none" w="med" len="med"/>
+                    </a:lnT>
+                    <a:lnB w="12700" cap="flat" cmpd="sng" algn="ctr">
+                      <a:solidFill>
+                        <a:schemeClr val="tx1"/>
+                      </a:solidFill>
+                      <a:prstDash val="solid"/>
+                      <a:round/>
+                      <a:headEnd type="none" w="med" len="med"/>
+                      <a:tailEnd type="none" w="med" len="med"/>
+                    </a:lnB>
+                    <a:solidFill>
+                      <a:schemeClr val="bg1"/>
+                    </a:solidFill>
+                  </a:tcPr>
+                </a:tc>
+                <a:tc>
+                  <a:txBody>
+                    <a:bodyPr/>
+                    <a:lstStyle/>
+                    <a:p>
+                      <a:r>
+                        <a:rPr kumimoji="1" lang="en-US" altLang="ja-JP" sz="1000">
+                          <a:latin typeface="Cascadia Mono" panose="020B0609020000020004" pitchFamily="49" charset="0"/>
+                          <a:ea typeface="Cascadia Mono" panose="020B0609020000020004" pitchFamily="49" charset="0"/>
+                          <a:cs typeface="Cascadia Mono" panose="020B0609020000020004" pitchFamily="49" charset="0"/>
+                        </a:rPr>
+                        <a:t>*.json</a:t>
+                      </a:r>
+                      <a:endParaRPr kumimoji="1" lang="ja-JP" altLang="en-US" sz="1000">
+                        <a:latin typeface="Cascadia Mono" panose="020B0609020000020004" pitchFamily="49" charset="0"/>
+                        <a:ea typeface="BIZ UDゴシック" panose="020B0400000000000000" pitchFamily="49" charset="-128"/>
+                        <a:cs typeface="Cascadia Mono" panose="020B0609020000020004" pitchFamily="49" charset="0"/>
+                      </a:endParaRPr>
+                    </a:p>
+                  </a:txBody>
+                  <a:tcPr marL="137160" marR="137160" marT="137160" marB="137160">
+                    <a:lnL w="12700" cap="flat" cmpd="sng" algn="ctr">
+                      <a:solidFill>
+                        <a:schemeClr val="tx1"/>
+                      </a:solidFill>
+                      <a:prstDash val="solid"/>
+                      <a:round/>
+                      <a:headEnd type="none" w="med" len="med"/>
+                      <a:tailEnd type="none" w="med" len="med"/>
+                    </a:lnL>
+                    <a:lnR w="12700" cap="flat" cmpd="sng" algn="ctr">
+                      <a:solidFill>
+                        <a:schemeClr val="tx1"/>
+                      </a:solidFill>
+                      <a:prstDash val="solid"/>
+                      <a:round/>
+                      <a:headEnd type="none" w="med" len="med"/>
+                      <a:tailEnd type="none" w="med" len="med"/>
+                    </a:lnR>
+                    <a:lnT w="12700" cap="flat" cmpd="sng" algn="ctr">
+                      <a:solidFill>
+                        <a:schemeClr val="tx1"/>
+                      </a:solidFill>
+                      <a:prstDash val="solid"/>
+                      <a:round/>
+                      <a:headEnd type="none" w="med" len="med"/>
+                      <a:tailEnd type="none" w="med" len="med"/>
+                    </a:lnT>
+                    <a:lnB w="12700" cap="flat" cmpd="sng" algn="ctr">
+                      <a:solidFill>
+                        <a:schemeClr val="tx1"/>
+                      </a:solidFill>
+                      <a:prstDash val="solid"/>
+                      <a:round/>
+                      <a:headEnd type="none" w="med" len="med"/>
+                      <a:tailEnd type="none" w="med" len="med"/>
+                    </a:lnB>
+                    <a:solidFill>
+                      <a:schemeClr val="bg1"/>
+                    </a:solidFill>
+                  </a:tcPr>
+                </a:tc>
+                <a:tc>
+                  <a:txBody>
+                    <a:bodyPr/>
+                    <a:lstStyle/>
+                    <a:p>
+                      <a:r>
+                        <a:rPr kumimoji="1" lang="en-US" altLang="ja-JP" sz="1000">
+                          <a:latin typeface="Cascadia Mono" panose="020B0609020000020004" pitchFamily="49" charset="0"/>
+                          <a:ea typeface="Cascadia Mono" panose="020B0609020000020004" pitchFamily="49" charset="0"/>
+                          <a:cs typeface="Cascadia Mono" panose="020B0609020000020004" pitchFamily="49" charset="0"/>
+                        </a:rPr>
+                        <a:t>This JSON defines the criteria used for both initial prompt template generation and LLM-as-a-Judge evaluation.</a:t>
+                      </a:r>
+                    </a:p>
+                  </a:txBody>
+                  <a:tcPr marL="137160" marR="137160" marT="137160" marB="137160">
+                    <a:lnL w="12700" cap="flat" cmpd="sng" algn="ctr">
+                      <a:solidFill>
+                        <a:schemeClr val="tx1"/>
+                      </a:solidFill>
+                      <a:prstDash val="solid"/>
+                      <a:round/>
+                      <a:headEnd type="none" w="med" len="med"/>
+                      <a:tailEnd type="none" w="med" len="med"/>
+                    </a:lnL>
+                    <a:lnR w="12700" cap="flat" cmpd="sng" algn="ctr">
+                      <a:solidFill>
+                        <a:schemeClr val="tx1"/>
+                      </a:solidFill>
+                      <a:prstDash val="solid"/>
+                      <a:round/>
+                      <a:headEnd type="none" w="med" len="med"/>
+                      <a:tailEnd type="none" w="med" len="med"/>
+                    </a:lnR>
+                    <a:lnT w="12700" cap="flat" cmpd="sng" algn="ctr">
+                      <a:solidFill>
+                        <a:schemeClr val="tx1"/>
+                      </a:solidFill>
+                      <a:prstDash val="solid"/>
+                      <a:round/>
+                      <a:headEnd type="none" w="med" len="med"/>
+                      <a:tailEnd type="none" w="med" len="med"/>
+                    </a:lnT>
+                    <a:lnB w="12700" cap="flat" cmpd="sng" algn="ctr">
+                      <a:solidFill>
+                        <a:schemeClr val="tx1"/>
+                      </a:solidFill>
+                      <a:prstDash val="solid"/>
+                      <a:round/>
+                      <a:headEnd type="none" w="med" len="med"/>
+                      <a:tailEnd type="none" w="med" len="med"/>
+                    </a:lnB>
+                    <a:solidFill>
+                      <a:schemeClr val="bg1"/>
+                    </a:solidFill>
+                  </a:tcPr>
+                </a:tc>
+                <a:extLst>
+                  <a:ext uri="{0D108BD9-81ED-4DB2-BD59-A6C34878D82A}">
+                    <a16:rowId xmlns:a16="http://schemas.microsoft.com/office/drawing/2014/main" val="1707978084"/>
                   </a:ext>
                 </a:extLst>
               </a:tr>
@@ -2086,14 +2789,630 @@
                     <a:lstStyle/>
                     <a:p>
                       <a:r>
-                        <a:rPr kumimoji="1" lang="en-US" altLang="ja-JP" sz="1200">
-                          <a:latin typeface="Cascadia Code SemiBold" panose="020B0609020000020004" pitchFamily="49" charset="0"/>
-                          <a:ea typeface="Cascadia Code SemiBold" panose="020B0609020000020004" pitchFamily="49" charset="0"/>
-                          <a:cs typeface="Cascadia Code SemiBold" panose="020B0609020000020004" pitchFamily="49" charset="0"/>
+                        <a:rPr kumimoji="1" lang="en-US" altLang="ja-JP" sz="1000">
+                          <a:latin typeface="Cascadia Mono" panose="020B0609020000020004" pitchFamily="49" charset="0"/>
+                          <a:ea typeface="Cascadia Mono" panose="020B0609020000020004" pitchFamily="49" charset="0"/>
+                          <a:cs typeface="Cascadia Mono" panose="020B0609020000020004" pitchFamily="49" charset="0"/>
                         </a:rPr>
-                        <a:t>llmj-judge.py</a:t>
+                        <a:t>source/</a:t>
                       </a:r>
-                      <a:endParaRPr kumimoji="1" lang="ja-JP" altLang="en-US" sz="1200">
+                      <a:endParaRPr kumimoji="1" lang="ja-JP" altLang="en-US" sz="1000">
+                        <a:latin typeface="Cascadia Mono" panose="020B0609020000020004" pitchFamily="49" charset="0"/>
+                        <a:ea typeface="BIZ UDゴシック" panose="020B0400000000000000" pitchFamily="49" charset="-128"/>
+                        <a:cs typeface="Cascadia Mono" panose="020B0609020000020004" pitchFamily="49" charset="0"/>
+                      </a:endParaRPr>
+                    </a:p>
+                  </a:txBody>
+                  <a:tcPr marL="137160" marR="137160" marT="137160" marB="137160">
+                    <a:lnL w="12700" cap="flat" cmpd="sng" algn="ctr">
+                      <a:solidFill>
+                        <a:schemeClr val="tx1"/>
+                      </a:solidFill>
+                      <a:prstDash val="solid"/>
+                      <a:round/>
+                      <a:headEnd type="none" w="med" len="med"/>
+                      <a:tailEnd type="none" w="med" len="med"/>
+                    </a:lnL>
+                    <a:lnR w="12700" cap="flat" cmpd="sng" algn="ctr">
+                      <a:solidFill>
+                        <a:schemeClr val="tx1"/>
+                      </a:solidFill>
+                      <a:prstDash val="solid"/>
+                      <a:round/>
+                      <a:headEnd type="none" w="med" len="med"/>
+                      <a:tailEnd type="none" w="med" len="med"/>
+                    </a:lnR>
+                    <a:lnT w="12700" cap="flat" cmpd="sng" algn="ctr">
+                      <a:solidFill>
+                        <a:schemeClr val="tx1"/>
+                      </a:solidFill>
+                      <a:prstDash val="solid"/>
+                      <a:round/>
+                      <a:headEnd type="none" w="med" len="med"/>
+                      <a:tailEnd type="none" w="med" len="med"/>
+                    </a:lnT>
+                    <a:lnB w="12700" cap="flat" cmpd="sng" algn="ctr">
+                      <a:solidFill>
+                        <a:schemeClr val="tx1"/>
+                      </a:solidFill>
+                      <a:prstDash val="solid"/>
+                      <a:round/>
+                      <a:headEnd type="none" w="med" len="med"/>
+                      <a:tailEnd type="none" w="med" len="med"/>
+                    </a:lnB>
+                    <a:solidFill>
+                      <a:schemeClr val="bg1"/>
+                    </a:solidFill>
+                  </a:tcPr>
+                </a:tc>
+                <a:tc>
+                  <a:txBody>
+                    <a:bodyPr/>
+                    <a:lstStyle/>
+                    <a:p>
+                      <a:r>
+                        <a:rPr kumimoji="1" lang="en-US" altLang="ja-JP" sz="1000">
+                          <a:latin typeface="Cascadia Mono" panose="020B0609020000020004" pitchFamily="49" charset="0"/>
+                          <a:ea typeface="Cascadia Mono" panose="020B0609020000020004" pitchFamily="49" charset="0"/>
+                          <a:cs typeface="Cascadia Mono" panose="020B0609020000020004" pitchFamily="49" charset="0"/>
+                        </a:rPr>
+                        <a:t>*.txt</a:t>
+                      </a:r>
+                      <a:endParaRPr kumimoji="1" lang="ja-JP" altLang="en-US" sz="1000">
+                        <a:latin typeface="Cascadia Mono" panose="020B0609020000020004" pitchFamily="49" charset="0"/>
+                        <a:ea typeface="BIZ UDゴシック" panose="020B0400000000000000" pitchFamily="49" charset="-128"/>
+                        <a:cs typeface="Cascadia Mono" panose="020B0609020000020004" pitchFamily="49" charset="0"/>
+                      </a:endParaRPr>
+                    </a:p>
+                  </a:txBody>
+                  <a:tcPr marL="137160" marR="137160" marT="137160" marB="137160">
+                    <a:lnL w="12700" cap="flat" cmpd="sng" algn="ctr">
+                      <a:solidFill>
+                        <a:schemeClr val="tx1"/>
+                      </a:solidFill>
+                      <a:prstDash val="solid"/>
+                      <a:round/>
+                      <a:headEnd type="none" w="med" len="med"/>
+                      <a:tailEnd type="none" w="med" len="med"/>
+                    </a:lnL>
+                    <a:lnR w="12700" cap="flat" cmpd="sng" algn="ctr">
+                      <a:solidFill>
+                        <a:schemeClr val="tx1"/>
+                      </a:solidFill>
+                      <a:prstDash val="solid"/>
+                      <a:round/>
+                      <a:headEnd type="none" w="med" len="med"/>
+                      <a:tailEnd type="none" w="med" len="med"/>
+                    </a:lnR>
+                    <a:lnT w="12700" cap="flat" cmpd="sng" algn="ctr">
+                      <a:solidFill>
+                        <a:schemeClr val="tx1"/>
+                      </a:solidFill>
+                      <a:prstDash val="solid"/>
+                      <a:round/>
+                      <a:headEnd type="none" w="med" len="med"/>
+                      <a:tailEnd type="none" w="med" len="med"/>
+                    </a:lnT>
+                    <a:lnB w="12700" cap="flat" cmpd="sng" algn="ctr">
+                      <a:solidFill>
+                        <a:schemeClr val="tx1"/>
+                      </a:solidFill>
+                      <a:prstDash val="solid"/>
+                      <a:round/>
+                      <a:headEnd type="none" w="med" len="med"/>
+                      <a:tailEnd type="none" w="med" len="med"/>
+                    </a:lnB>
+                    <a:solidFill>
+                      <a:schemeClr val="bg1"/>
+                    </a:solidFill>
+                  </a:tcPr>
+                </a:tc>
+                <a:tc>
+                  <a:txBody>
+                    <a:bodyPr/>
+                    <a:lstStyle/>
+                    <a:p>
+                      <a:r>
+                        <a:rPr kumimoji="1" lang="en-US" altLang="ja-JP" sz="1000">
+                          <a:latin typeface="Cascadia Mono" panose="020B0609020000020004" pitchFamily="49" charset="0"/>
+                          <a:ea typeface="Cascadia Mono" panose="020B0609020000020004" pitchFamily="49" charset="0"/>
+                          <a:cs typeface="Cascadia Mono" panose="020B0609020000020004" pitchFamily="49" charset="0"/>
+                        </a:rPr>
+                        <a:t>This TXT file contains the original text.</a:t>
+                      </a:r>
+                    </a:p>
+                  </a:txBody>
+                  <a:tcPr marL="137160" marR="137160" marT="137160" marB="137160">
+                    <a:lnL w="12700" cap="flat" cmpd="sng" algn="ctr">
+                      <a:solidFill>
+                        <a:schemeClr val="tx1"/>
+                      </a:solidFill>
+                      <a:prstDash val="solid"/>
+                      <a:round/>
+                      <a:headEnd type="none" w="med" len="med"/>
+                      <a:tailEnd type="none" w="med" len="med"/>
+                    </a:lnL>
+                    <a:lnR w="12700" cap="flat" cmpd="sng" algn="ctr">
+                      <a:solidFill>
+                        <a:schemeClr val="tx1"/>
+                      </a:solidFill>
+                      <a:prstDash val="solid"/>
+                      <a:round/>
+                      <a:headEnd type="none" w="med" len="med"/>
+                      <a:tailEnd type="none" w="med" len="med"/>
+                    </a:lnR>
+                    <a:lnT w="12700" cap="flat" cmpd="sng" algn="ctr">
+                      <a:solidFill>
+                        <a:schemeClr val="tx1"/>
+                      </a:solidFill>
+                      <a:prstDash val="solid"/>
+                      <a:round/>
+                      <a:headEnd type="none" w="med" len="med"/>
+                      <a:tailEnd type="none" w="med" len="med"/>
+                    </a:lnT>
+                    <a:lnB w="12700" cap="flat" cmpd="sng" algn="ctr">
+                      <a:solidFill>
+                        <a:schemeClr val="tx1"/>
+                      </a:solidFill>
+                      <a:prstDash val="solid"/>
+                      <a:round/>
+                      <a:headEnd type="none" w="med" len="med"/>
+                      <a:tailEnd type="none" w="med" len="med"/>
+                    </a:lnB>
+                    <a:solidFill>
+                      <a:schemeClr val="bg1"/>
+                    </a:solidFill>
+                  </a:tcPr>
+                </a:tc>
+                <a:extLst>
+                  <a:ext uri="{0D108BD9-81ED-4DB2-BD59-A6C34878D82A}">
+                    <a16:rowId xmlns:a16="http://schemas.microsoft.com/office/drawing/2014/main" val="1262082791"/>
+                  </a:ext>
+                </a:extLst>
+              </a:tr>
+              <a:tr h="357067">
+                <a:tc rowSpan="4">
+                  <a:txBody>
+                    <a:bodyPr/>
+                    <a:lstStyle/>
+                    <a:p>
+                      <a:pPr marL="0" marR="0" lvl="0" indent="0" algn="l" defTabSz="914400" rtl="0" eaLnBrk="1" fontAlgn="auto" latinLnBrk="0" hangingPunct="1">
+                        <a:lnSpc>
+                          <a:spcPct val="100000"/>
+                        </a:lnSpc>
+                        <a:spcBef>
+                          <a:spcPts val="0"/>
+                        </a:spcBef>
+                        <a:spcAft>
+                          <a:spcPts val="0"/>
+                        </a:spcAft>
+                        <a:buClrTx/>
+                        <a:buSzTx/>
+                        <a:buFontTx/>
+                        <a:buNone/>
+                        <a:tabLst/>
+                        <a:defRPr/>
+                      </a:pPr>
+                      <a:r>
+                        <a:rPr kumimoji="1" lang="en-US" altLang="ja-JP" sz="1000">
+                          <a:latin typeface="Cascadia Mono" panose="020B0609020000020004" pitchFamily="49" charset="0"/>
+                          <a:ea typeface="Cascadia Mono" panose="020B0609020000020004" pitchFamily="49" charset="0"/>
+                          <a:cs typeface="Cascadia Mono" panose="020B0609020000020004" pitchFamily="49" charset="0"/>
+                        </a:rPr>
+                        <a:t>supports/</a:t>
+                      </a:r>
+                      <a:endParaRPr kumimoji="1" lang="ja-JP" altLang="en-US" sz="1000">
+                        <a:latin typeface="Cascadia Mono" panose="020B0609020000020004" pitchFamily="49" charset="0"/>
+                        <a:ea typeface="BIZ UDゴシック" panose="020B0400000000000000" pitchFamily="49" charset="-128"/>
+                        <a:cs typeface="Cascadia Mono" panose="020B0609020000020004" pitchFamily="49" charset="0"/>
+                      </a:endParaRPr>
+                    </a:p>
+                  </a:txBody>
+                  <a:tcPr marL="137160" marR="137160" marT="137160" marB="137160">
+                    <a:lnL w="12700" cap="flat" cmpd="sng" algn="ctr">
+                      <a:solidFill>
+                        <a:schemeClr val="tx1"/>
+                      </a:solidFill>
+                      <a:prstDash val="solid"/>
+                      <a:round/>
+                      <a:headEnd type="none" w="med" len="med"/>
+                      <a:tailEnd type="none" w="med" len="med"/>
+                    </a:lnL>
+                    <a:lnR w="12700" cap="flat" cmpd="sng" algn="ctr">
+                      <a:solidFill>
+                        <a:schemeClr val="tx1"/>
+                      </a:solidFill>
+                      <a:prstDash val="solid"/>
+                      <a:round/>
+                      <a:headEnd type="none" w="med" len="med"/>
+                      <a:tailEnd type="none" w="med" len="med"/>
+                    </a:lnR>
+                    <a:lnT w="12700" cap="flat" cmpd="sng" algn="ctr">
+                      <a:solidFill>
+                        <a:schemeClr val="tx1"/>
+                      </a:solidFill>
+                      <a:prstDash val="solid"/>
+                      <a:round/>
+                      <a:headEnd type="none" w="med" len="med"/>
+                      <a:tailEnd type="none" w="med" len="med"/>
+                    </a:lnT>
+                    <a:lnB w="12700" cap="flat" cmpd="sng" algn="ctr">
+                      <a:solidFill>
+                        <a:schemeClr val="tx1"/>
+                      </a:solidFill>
+                      <a:prstDash val="solid"/>
+                      <a:round/>
+                      <a:headEnd type="none" w="med" len="med"/>
+                      <a:tailEnd type="none" w="med" len="med"/>
+                    </a:lnB>
+                    <a:solidFill>
+                      <a:schemeClr val="bg1"/>
+                    </a:solidFill>
+                  </a:tcPr>
+                </a:tc>
+                <a:tc>
+                  <a:txBody>
+                    <a:bodyPr/>
+                    <a:lstStyle/>
+                    <a:p>
+                      <a:pPr marL="0" marR="0" lvl="0" indent="0" algn="l" defTabSz="914400" rtl="0" eaLnBrk="1" fontAlgn="auto" latinLnBrk="0" hangingPunct="1">
+                        <a:lnSpc>
+                          <a:spcPct val="100000"/>
+                        </a:lnSpc>
+                        <a:spcBef>
+                          <a:spcPts val="0"/>
+                        </a:spcBef>
+                        <a:spcAft>
+                          <a:spcPts val="0"/>
+                        </a:spcAft>
+                        <a:buClrTx/>
+                        <a:buSzTx/>
+                        <a:buFontTx/>
+                        <a:buNone/>
+                        <a:tabLst/>
+                        <a:defRPr/>
+                      </a:pPr>
+                      <a:r>
+                        <a:rPr kumimoji="1" lang="en-US" altLang="ja-JP" sz="1000">
+                          <a:latin typeface="Cascadia Mono" panose="020B0609020000020004" pitchFamily="49" charset="0"/>
+                          <a:ea typeface="Cascadia Mono" panose="020B0609020000020004" pitchFamily="49" charset="0"/>
+                          <a:cs typeface="Cascadia Mono" panose="020B0609020000020004" pitchFamily="49" charset="0"/>
+                        </a:rPr>
+                        <a:t>llmj-configure.py</a:t>
+                      </a:r>
+                      <a:endParaRPr kumimoji="1" lang="ja-JP" altLang="en-US" sz="1000">
+                        <a:latin typeface="Cascadia Mono" panose="020B0609020000020004" pitchFamily="49" charset="0"/>
+                        <a:ea typeface="BIZ UDゴシック" panose="020B0400000000000000" pitchFamily="49" charset="-128"/>
+                        <a:cs typeface="Cascadia Mono" panose="020B0609020000020004" pitchFamily="49" charset="0"/>
+                      </a:endParaRPr>
+                    </a:p>
+                  </a:txBody>
+                  <a:tcPr marL="137160" marR="137160" marT="137160" marB="137160">
+                    <a:lnL w="12700" cap="flat" cmpd="sng" algn="ctr">
+                      <a:solidFill>
+                        <a:schemeClr val="tx1"/>
+                      </a:solidFill>
+                      <a:prstDash val="solid"/>
+                      <a:round/>
+                      <a:headEnd type="none" w="med" len="med"/>
+                      <a:tailEnd type="none" w="med" len="med"/>
+                    </a:lnL>
+                    <a:lnR w="12700" cap="flat" cmpd="sng" algn="ctr">
+                      <a:solidFill>
+                        <a:schemeClr val="tx1"/>
+                      </a:solidFill>
+                      <a:prstDash val="solid"/>
+                      <a:round/>
+                      <a:headEnd type="none" w="med" len="med"/>
+                      <a:tailEnd type="none" w="med" len="med"/>
+                    </a:lnR>
+                    <a:lnT w="12700" cap="flat" cmpd="sng" algn="ctr">
+                      <a:solidFill>
+                        <a:schemeClr val="tx1"/>
+                      </a:solidFill>
+                      <a:prstDash val="solid"/>
+                      <a:round/>
+                      <a:headEnd type="none" w="med" len="med"/>
+                      <a:tailEnd type="none" w="med" len="med"/>
+                    </a:lnT>
+                    <a:lnB w="12700" cap="flat" cmpd="sng" algn="ctr">
+                      <a:solidFill>
+                        <a:schemeClr val="tx1"/>
+                      </a:solidFill>
+                      <a:prstDash val="solid"/>
+                      <a:round/>
+                      <a:headEnd type="none" w="med" len="med"/>
+                      <a:tailEnd type="none" w="med" len="med"/>
+                    </a:lnB>
+                    <a:solidFill>
+                      <a:schemeClr val="bg1"/>
+                    </a:solidFill>
+                  </a:tcPr>
+                </a:tc>
+                <a:tc>
+                  <a:txBody>
+                    <a:bodyPr/>
+                    <a:lstStyle/>
+                    <a:p>
+                      <a:r>
+                        <a:rPr kumimoji="1" lang="en-US" altLang="ja-JP" sz="1000" b="0" i="0">
+                          <a:solidFill>
+                            <a:schemeClr val="tx1"/>
+                          </a:solidFill>
+                          <a:latin typeface="Cascadia Mono" panose="020B0609020000020004" pitchFamily="49" charset="0"/>
+                          <a:ea typeface="Cascadia Mono" panose="020B0609020000020004" pitchFamily="49" charset="0"/>
+                          <a:cs typeface="Cascadia Mono" panose="020B0609020000020004" pitchFamily="49" charset="0"/>
+                        </a:rPr>
+                        <a:t>It generates </a:t>
+                      </a:r>
+                      <a:r>
+                        <a:rPr kumimoji="1" lang="en-US" altLang="ja-JP" sz="1000" b="1" i="1">
+                          <a:solidFill>
+                            <a:srgbClr val="FF0000"/>
+                          </a:solidFill>
+                          <a:latin typeface="Cascadia Mono" panose="020B0609020000020004" pitchFamily="49" charset="0"/>
+                          <a:ea typeface="Cascadia Mono" panose="020B0609020000020004" pitchFamily="49" charset="0"/>
+                          <a:cs typeface="Cascadia Mono" panose="020B0609020000020004" pitchFamily="49" charset="0"/>
+                        </a:rPr>
+                        <a:t>work/rubric-stats.json</a:t>
+                      </a:r>
+                      <a:r>
+                        <a:rPr kumimoji="1" lang="en-US" altLang="ja-JP" sz="1000" b="0" i="0">
+                          <a:solidFill>
+                            <a:srgbClr val="FF0000"/>
+                          </a:solidFill>
+                          <a:latin typeface="Cascadia Mono" panose="020B0609020000020004" pitchFamily="49" charset="0"/>
+                          <a:ea typeface="Cascadia Mono" panose="020B0609020000020004" pitchFamily="49" charset="0"/>
+                          <a:cs typeface="Cascadia Mono" panose="020B0609020000020004" pitchFamily="49" charset="0"/>
+                        </a:rPr>
+                        <a:t> </a:t>
+                      </a:r>
+                      <a:r>
+                        <a:rPr kumimoji="1" lang="en-US" altLang="ja-JP" sz="1000" b="0" i="0">
+                          <a:solidFill>
+                            <a:schemeClr val="tx1"/>
+                          </a:solidFill>
+                          <a:latin typeface="Cascadia Mono" panose="020B0609020000020004" pitchFamily="49" charset="0"/>
+                          <a:ea typeface="Cascadia Mono" panose="020B0609020000020004" pitchFamily="49" charset="0"/>
+                          <a:cs typeface="Cascadia Mono" panose="020B0609020000020004" pitchFamily="49" charset="0"/>
+                        </a:rPr>
+                        <a:t>for statistical analysis of the judge results.</a:t>
+                      </a:r>
+                    </a:p>
+                  </a:txBody>
+                  <a:tcPr marL="137160" marR="137160" marT="137160" marB="137160">
+                    <a:lnL w="12700" cap="flat" cmpd="sng" algn="ctr">
+                      <a:solidFill>
+                        <a:schemeClr val="tx1"/>
+                      </a:solidFill>
+                      <a:prstDash val="solid"/>
+                      <a:round/>
+                      <a:headEnd type="none" w="med" len="med"/>
+                      <a:tailEnd type="none" w="med" len="med"/>
+                    </a:lnL>
+                    <a:lnR w="12700" cap="flat" cmpd="sng" algn="ctr">
+                      <a:solidFill>
+                        <a:schemeClr val="tx1"/>
+                      </a:solidFill>
+                      <a:prstDash val="solid"/>
+                      <a:round/>
+                      <a:headEnd type="none" w="med" len="med"/>
+                      <a:tailEnd type="none" w="med" len="med"/>
+                    </a:lnR>
+                    <a:lnT w="12700" cap="flat" cmpd="sng" algn="ctr">
+                      <a:solidFill>
+                        <a:schemeClr val="tx1"/>
+                      </a:solidFill>
+                      <a:prstDash val="solid"/>
+                      <a:round/>
+                      <a:headEnd type="none" w="med" len="med"/>
+                      <a:tailEnd type="none" w="med" len="med"/>
+                    </a:lnT>
+                    <a:lnB w="12700" cap="flat" cmpd="sng" algn="ctr">
+                      <a:solidFill>
+                        <a:schemeClr val="tx1"/>
+                      </a:solidFill>
+                      <a:prstDash val="solid"/>
+                      <a:round/>
+                      <a:headEnd type="none" w="med" len="med"/>
+                      <a:tailEnd type="none" w="med" len="med"/>
+                    </a:lnB>
+                    <a:solidFill>
+                      <a:schemeClr val="bg1"/>
+                    </a:solidFill>
+                  </a:tcPr>
+                </a:tc>
+                <a:extLst>
+                  <a:ext uri="{0D108BD9-81ED-4DB2-BD59-A6C34878D82A}">
+                    <a16:rowId xmlns:a16="http://schemas.microsoft.com/office/drawing/2014/main" val="2339504222"/>
+                  </a:ext>
+                </a:extLst>
+              </a:tr>
+              <a:tr h="357067">
+                <a:tc vMerge="1">
+                  <a:txBody>
+                    <a:bodyPr/>
+                    <a:lstStyle/>
+                    <a:p>
+                      <a:endParaRPr kumimoji="1" lang="ja-JP" altLang="en-US"/>
+                    </a:p>
+                  </a:txBody>
+                  <a:tcPr/>
+                </a:tc>
+                <a:tc>
+                  <a:txBody>
+                    <a:bodyPr/>
+                    <a:lstStyle/>
+                    <a:p>
+                      <a:pPr marL="0" marR="0" lvl="0" indent="0" algn="l" defTabSz="914400" rtl="0" eaLnBrk="1" fontAlgn="auto" latinLnBrk="0" hangingPunct="1">
+                        <a:lnSpc>
+                          <a:spcPct val="100000"/>
+                        </a:lnSpc>
+                        <a:spcBef>
+                          <a:spcPts val="0"/>
+                        </a:spcBef>
+                        <a:spcAft>
+                          <a:spcPts val="0"/>
+                        </a:spcAft>
+                        <a:buClrTx/>
+                        <a:buSzTx/>
+                        <a:buFontTx/>
+                        <a:buNone/>
+                        <a:tabLst/>
+                        <a:defRPr/>
+                      </a:pPr>
+                      <a:r>
+                        <a:rPr kumimoji="1" lang="en-US" altLang="ja-JP" sz="1000">
+                          <a:latin typeface="Cascadia Mono" panose="020B0609020000020004" pitchFamily="49" charset="0"/>
+                          <a:ea typeface="Cascadia Mono" panose="020B0609020000020004" pitchFamily="49" charset="0"/>
+                          <a:cs typeface="Cascadia Mono" panose="020B0609020000020004" pitchFamily="49" charset="0"/>
+                        </a:rPr>
+                        <a:t>llmj-fake-source.py</a:t>
+                      </a:r>
+                      <a:endParaRPr kumimoji="1" lang="ja-JP" altLang="en-US" sz="1000">
+                        <a:latin typeface="Cascadia Mono" panose="020B0609020000020004" pitchFamily="49" charset="0"/>
+                        <a:ea typeface="BIZ UDゴシック" panose="020B0400000000000000" pitchFamily="49" charset="-128"/>
+                        <a:cs typeface="Cascadia Mono" panose="020B0609020000020004" pitchFamily="49" charset="0"/>
+                      </a:endParaRPr>
+                    </a:p>
+                  </a:txBody>
+                  <a:tcPr marL="137160" marR="137160" marT="137160" marB="137160">
+                    <a:lnL w="12700" cap="flat" cmpd="sng" algn="ctr">
+                      <a:solidFill>
+                        <a:schemeClr val="tx1"/>
+                      </a:solidFill>
+                      <a:prstDash val="solid"/>
+                      <a:round/>
+                      <a:headEnd type="none" w="med" len="med"/>
+                      <a:tailEnd type="none" w="med" len="med"/>
+                    </a:lnL>
+                    <a:lnR w="12700" cap="flat" cmpd="sng" algn="ctr">
+                      <a:solidFill>
+                        <a:schemeClr val="tx1"/>
+                      </a:solidFill>
+                      <a:prstDash val="solid"/>
+                      <a:round/>
+                      <a:headEnd type="none" w="med" len="med"/>
+                      <a:tailEnd type="none" w="med" len="med"/>
+                    </a:lnR>
+                    <a:lnT w="12700" cap="flat" cmpd="sng" algn="ctr">
+                      <a:solidFill>
+                        <a:schemeClr val="tx1"/>
+                      </a:solidFill>
+                      <a:prstDash val="solid"/>
+                      <a:round/>
+                      <a:headEnd type="none" w="med" len="med"/>
+                      <a:tailEnd type="none" w="med" len="med"/>
+                    </a:lnT>
+                    <a:lnB w="12700" cap="flat" cmpd="sng" algn="ctr">
+                      <a:solidFill>
+                        <a:schemeClr val="tx1"/>
+                      </a:solidFill>
+                      <a:prstDash val="solid"/>
+                      <a:round/>
+                      <a:headEnd type="none" w="med" len="med"/>
+                      <a:tailEnd type="none" w="med" len="med"/>
+                    </a:lnB>
+                    <a:solidFill>
+                      <a:schemeClr val="bg1"/>
+                    </a:solidFill>
+                  </a:tcPr>
+                </a:tc>
+                <a:tc>
+                  <a:txBody>
+                    <a:bodyPr/>
+                    <a:lstStyle/>
+                    <a:p>
+                      <a:r>
+                        <a:rPr kumimoji="1" lang="en-US" altLang="ja-JP" sz="1000" b="0" i="0">
+                          <a:solidFill>
+                            <a:schemeClr val="tx1"/>
+                          </a:solidFill>
+                          <a:latin typeface="Cascadia Mono" panose="020B0609020000020004" pitchFamily="49" charset="0"/>
+                          <a:ea typeface="Cascadia Mono" panose="020B0609020000020004" pitchFamily="49" charset="0"/>
+                          <a:cs typeface="Cascadia Mono" panose="020B0609020000020004" pitchFamily="49" charset="0"/>
+                        </a:rPr>
+                        <a:t>It generates a large number of text files </a:t>
+                      </a:r>
+                      <a:r>
+                        <a:rPr kumimoji="1" lang="en-US" altLang="ja-JP" sz="1000" b="1" i="1">
+                          <a:solidFill>
+                            <a:srgbClr val="FF0000"/>
+                          </a:solidFill>
+                          <a:latin typeface="Cascadia Mono" panose="020B0609020000020004" pitchFamily="49" charset="0"/>
+                          <a:ea typeface="Cascadia Mono" panose="020B0609020000020004" pitchFamily="49" charset="0"/>
+                          <a:cs typeface="Cascadia Mono" panose="020B0609020000020004" pitchFamily="49" charset="0"/>
+                        </a:rPr>
+                        <a:t>in source/*.txt</a:t>
+                      </a:r>
+                      <a:r>
+                        <a:rPr kumimoji="1" lang="en-US" altLang="ja-JP" sz="1000" b="0" i="0">
+                          <a:solidFill>
+                            <a:schemeClr val="tx1"/>
+                          </a:solidFill>
+                          <a:latin typeface="Cascadia Mono" panose="020B0609020000020004" pitchFamily="49" charset="0"/>
+                          <a:ea typeface="Cascadia Mono" panose="020B0609020000020004" pitchFamily="49" charset="0"/>
+                          <a:cs typeface="Cascadia Mono" panose="020B0609020000020004" pitchFamily="49" charset="0"/>
+                        </a:rPr>
+                        <a:t>. Please use them as input data for quality verification.</a:t>
+                      </a:r>
+                    </a:p>
+                  </a:txBody>
+                  <a:tcPr marL="137160" marR="137160" marT="137160" marB="137160">
+                    <a:lnL w="12700" cap="flat" cmpd="sng" algn="ctr">
+                      <a:solidFill>
+                        <a:schemeClr val="tx1"/>
+                      </a:solidFill>
+                      <a:prstDash val="solid"/>
+                      <a:round/>
+                      <a:headEnd type="none" w="med" len="med"/>
+                      <a:tailEnd type="none" w="med" len="med"/>
+                    </a:lnL>
+                    <a:lnR w="12700" cap="flat" cmpd="sng" algn="ctr">
+                      <a:solidFill>
+                        <a:schemeClr val="tx1"/>
+                      </a:solidFill>
+                      <a:prstDash val="solid"/>
+                      <a:round/>
+                      <a:headEnd type="none" w="med" len="med"/>
+                      <a:tailEnd type="none" w="med" len="med"/>
+                    </a:lnR>
+                    <a:lnT w="12700" cap="flat" cmpd="sng" algn="ctr">
+                      <a:solidFill>
+                        <a:schemeClr val="tx1"/>
+                      </a:solidFill>
+                      <a:prstDash val="solid"/>
+                      <a:round/>
+                      <a:headEnd type="none" w="med" len="med"/>
+                      <a:tailEnd type="none" w="med" len="med"/>
+                    </a:lnT>
+                    <a:lnB w="12700" cap="flat" cmpd="sng" algn="ctr">
+                      <a:solidFill>
+                        <a:schemeClr val="tx1"/>
+                      </a:solidFill>
+                      <a:prstDash val="solid"/>
+                      <a:round/>
+                      <a:headEnd type="none" w="med" len="med"/>
+                      <a:tailEnd type="none" w="med" len="med"/>
+                    </a:lnB>
+                    <a:solidFill>
+                      <a:schemeClr val="bg1"/>
+                    </a:solidFill>
+                  </a:tcPr>
+                </a:tc>
+                <a:extLst>
+                  <a:ext uri="{0D108BD9-81ED-4DB2-BD59-A6C34878D82A}">
+                    <a16:rowId xmlns:a16="http://schemas.microsoft.com/office/drawing/2014/main" val="2065486968"/>
+                  </a:ext>
+                </a:extLst>
+              </a:tr>
+              <a:tr h="357067">
+                <a:tc vMerge="1">
+                  <a:txBody>
+                    <a:bodyPr/>
+                    <a:lstStyle/>
+                    <a:p>
+                      <a:endParaRPr kumimoji="1" lang="ja-JP" altLang="en-US" sz="1000">
                         <a:latin typeface="Cascadia Code SemiBold" panose="020B0609020000020004" pitchFamily="49" charset="0"/>
                         <a:ea typeface="BIZ UDゴシック" panose="020B0400000000000000" pitchFamily="49" charset="-128"/>
                         <a:cs typeface="Cascadia Code SemiBold" panose="020B0609020000020004" pitchFamily="49" charset="0"/>
@@ -2148,99 +3467,112 @@
                     <a:lstStyle/>
                     <a:p>
                       <a:r>
-                        <a:rPr kumimoji="1" lang="en-US" altLang="ja-JP" sz="1200">
-                          <a:latin typeface="Cascadia Code SemiBold" panose="020B0609020000020004" pitchFamily="49" charset="0"/>
-                          <a:ea typeface="Cascadia Code SemiBold" panose="020B0609020000020004" pitchFamily="49" charset="0"/>
-                          <a:cs typeface="Cascadia Code SemiBold" panose="020B0609020000020004" pitchFamily="49" charset="0"/>
+                        <a:rPr kumimoji="1" lang="en-US" altLang="ja-JP" sz="1000">
+                          <a:latin typeface="Cascadia Mono" panose="020B0609020000020004" pitchFamily="49" charset="0"/>
+                          <a:ea typeface="Cascadia Mono" panose="020B0609020000020004" pitchFamily="49" charset="0"/>
+                          <a:cs typeface="Cascadia Mono" panose="020B0609020000020004" pitchFamily="49" charset="0"/>
                         </a:rPr>
-                        <a:t>This SCRIPT evaluates the contents of </a:t>
+                        <a:t>llmj-initial.py</a:t>
+                      </a:r>
+                      <a:endParaRPr kumimoji="1" lang="ja-JP" altLang="en-US" sz="1000">
+                        <a:latin typeface="Cascadia Mono" panose="020B0609020000020004" pitchFamily="49" charset="0"/>
+                        <a:ea typeface="BIZ UDゴシック" panose="020B0400000000000000" pitchFamily="49" charset="-128"/>
+                        <a:cs typeface="Cascadia Mono" panose="020B0609020000020004" pitchFamily="49" charset="0"/>
+                      </a:endParaRPr>
+                    </a:p>
+                  </a:txBody>
+                  <a:tcPr marL="137160" marR="137160" marT="137160" marB="137160">
+                    <a:lnL w="12700" cap="flat" cmpd="sng" algn="ctr">
+                      <a:solidFill>
+                        <a:schemeClr val="tx1"/>
+                      </a:solidFill>
+                      <a:prstDash val="solid"/>
+                      <a:round/>
+                      <a:headEnd type="none" w="med" len="med"/>
+                      <a:tailEnd type="none" w="med" len="med"/>
+                    </a:lnL>
+                    <a:lnR w="12700" cap="flat" cmpd="sng" algn="ctr">
+                      <a:solidFill>
+                        <a:schemeClr val="tx1"/>
+                      </a:solidFill>
+                      <a:prstDash val="solid"/>
+                      <a:round/>
+                      <a:headEnd type="none" w="med" len="med"/>
+                      <a:tailEnd type="none" w="med" len="med"/>
+                    </a:lnR>
+                    <a:lnT w="12700" cap="flat" cmpd="sng" algn="ctr">
+                      <a:solidFill>
+                        <a:schemeClr val="tx1"/>
+                      </a:solidFill>
+                      <a:prstDash val="solid"/>
+                      <a:round/>
+                      <a:headEnd type="none" w="med" len="med"/>
+                      <a:tailEnd type="none" w="med" len="med"/>
+                    </a:lnT>
+                    <a:lnB w="12700" cap="flat" cmpd="sng" algn="ctr">
+                      <a:solidFill>
+                        <a:schemeClr val="tx1"/>
+                      </a:solidFill>
+                      <a:prstDash val="solid"/>
+                      <a:round/>
+                      <a:headEnd type="none" w="med" len="med"/>
+                      <a:tailEnd type="none" w="med" len="med"/>
+                    </a:lnB>
+                    <a:solidFill>
+                      <a:schemeClr val="bg1"/>
+                    </a:solidFill>
+                  </a:tcPr>
+                </a:tc>
+                <a:tc>
+                  <a:txBody>
+                    <a:bodyPr/>
+                    <a:lstStyle/>
+                    <a:p>
+                      <a:r>
+                        <a:rPr kumimoji="1" lang="en-US" altLang="ja-JP" sz="1000">
+                          <a:latin typeface="Cascadia Mono" panose="020B0609020000020004" pitchFamily="49" charset="0"/>
+                          <a:ea typeface="Cascadia Mono" panose="020B0609020000020004" pitchFamily="49" charset="0"/>
+                          <a:cs typeface="Cascadia Mono" panose="020B0609020000020004" pitchFamily="49" charset="0"/>
+                        </a:rPr>
+                        <a:t>This SCRIPT generates prompt templates from </a:t>
                       </a:r>
                       <a:r>
-                        <a:rPr kumimoji="1" lang="en-US" altLang="ja-JP" sz="1200" b="1" i="1">
+                        <a:rPr kumimoji="1" lang="en-US" altLang="ja-JP" sz="1000" b="1" i="1">
                           <a:solidFill>
                             <a:srgbClr val="FF0000"/>
                           </a:solidFill>
-                          <a:latin typeface="Cascadia Code SemiBold" panose="020B0609020000020004" pitchFamily="49" charset="0"/>
-                          <a:ea typeface="Cascadia Code SemiBold" panose="020B0609020000020004" pitchFamily="49" charset="0"/>
-                          <a:cs typeface="Cascadia Code SemiBold" panose="020B0609020000020004" pitchFamily="49" charset="0"/>
-                        </a:rPr>
-                        <a:t>work/*.xlsx</a:t>
-                      </a:r>
-                      <a:r>
-                        <a:rPr kumimoji="1" lang="en-US" altLang="ja-JP" sz="1200">
-                          <a:latin typeface="Cascadia Code SemiBold" panose="020B0609020000020004" pitchFamily="49" charset="0"/>
-                          <a:ea typeface="Cascadia Code SemiBold" panose="020B0609020000020004" pitchFamily="49" charset="0"/>
-                          <a:cs typeface="Cascadia Code SemiBold" panose="020B0609020000020004" pitchFamily="49" charset="0"/>
-                        </a:rPr>
-                        <a:t> against </a:t>
-                      </a:r>
-                      <a:r>
-                        <a:rPr kumimoji="1" lang="en-US" altLang="ja-JP" sz="1200" b="1" i="1">
-                          <a:solidFill>
-                            <a:srgbClr val="FF0000"/>
-                          </a:solidFill>
-                          <a:latin typeface="Cascadia Code SemiBold" panose="020B0609020000020004" pitchFamily="49" charset="0"/>
-                          <a:ea typeface="Cascadia Code SemiBold" panose="020B0609020000020004" pitchFamily="49" charset="0"/>
-                          <a:cs typeface="Cascadia Code SemiBold" panose="020B0609020000020004" pitchFamily="49" charset="0"/>
+                          <a:latin typeface="Cascadia Mono" panose="020B0609020000020004" pitchFamily="49" charset="0"/>
+                          <a:ea typeface="Cascadia Mono" panose="020B0609020000020004" pitchFamily="49" charset="0"/>
+                          <a:cs typeface="Cascadia Mono" panose="020B0609020000020004" pitchFamily="49" charset="0"/>
                         </a:rPr>
                         <a:t>rubric/*.json</a:t>
                       </a:r>
                       <a:r>
-                        <a:rPr kumimoji="1" lang="en-US" altLang="ja-JP" sz="1200">
-                          <a:latin typeface="Cascadia Code SemiBold" panose="020B0609020000020004" pitchFamily="49" charset="0"/>
-                          <a:ea typeface="Cascadia Code SemiBold" panose="020B0609020000020004" pitchFamily="49" charset="0"/>
-                          <a:cs typeface="Cascadia Code SemiBold" panose="020B0609020000020004" pitchFamily="49" charset="0"/>
+                        <a:rPr kumimoji="1" lang="en-US" altLang="ja-JP" sz="1000">
+                          <a:latin typeface="Cascadia Mono" panose="020B0609020000020004" pitchFamily="49" charset="0"/>
+                          <a:ea typeface="Cascadia Mono" panose="020B0609020000020004" pitchFamily="49" charset="0"/>
+                          <a:cs typeface="Cascadia Mono" panose="020B0609020000020004" pitchFamily="49" charset="0"/>
                         </a:rPr>
-                        <a:t> and writes the results to </a:t>
+                        <a:t> and writes them to </a:t>
                       </a:r>
                       <a:r>
-                        <a:rPr kumimoji="1" lang="en-US" altLang="ja-JP" sz="1200" b="1" i="1">
+                        <a:rPr kumimoji="1" lang="en-US" altLang="ja-JP" sz="1000" b="1" i="1">
                           <a:solidFill>
                             <a:srgbClr val="FF0000"/>
                           </a:solidFill>
-                          <a:latin typeface="Cascadia Code SemiBold" panose="020B0609020000020004" pitchFamily="49" charset="0"/>
-                          <a:ea typeface="Cascadia Code SemiBold" panose="020B0609020000020004" pitchFamily="49" charset="0"/>
-                          <a:cs typeface="Cascadia Code SemiBold" panose="020B0609020000020004" pitchFamily="49" charset="0"/>
+                          <a:latin typeface="Cascadia Mono" panose="020B0609020000020004" pitchFamily="49" charset="0"/>
+                          <a:ea typeface="Cascadia Mono" panose="020B0609020000020004" pitchFamily="49" charset="0"/>
+                          <a:cs typeface="Cascadia Mono" panose="020B0609020000020004" pitchFamily="49" charset="0"/>
                         </a:rPr>
-                        <a:t>work/*.xlsx</a:t>
+                        <a:t>work/*.txt</a:t>
                       </a:r>
                       <a:r>
-                        <a:rPr kumimoji="1" lang="en-US" altLang="ja-JP" sz="1200" b="0" i="0">
-                          <a:solidFill>
-                            <a:schemeClr val="tx1"/>
-                          </a:solidFill>
-                          <a:latin typeface="Cascadia Code SemiBold" panose="020B0609020000020004" pitchFamily="49" charset="0"/>
-                          <a:ea typeface="Cascadia Code SemiBold" panose="020B0609020000020004" pitchFamily="49" charset="0"/>
-                          <a:cs typeface="Cascadia Code SemiBold" panose="020B0609020000020004" pitchFamily="49" charset="0"/>
+                        <a:rPr kumimoji="1" lang="en-US" altLang="ja-JP" sz="1000">
+                          <a:latin typeface="Cascadia Mono" panose="020B0609020000020004" pitchFamily="49" charset="0"/>
+                          <a:ea typeface="Cascadia Mono" panose="020B0609020000020004" pitchFamily="49" charset="0"/>
+                          <a:cs typeface="Cascadia Mono" panose="020B0609020000020004" pitchFamily="49" charset="0"/>
                         </a:rPr>
-                        <a:t>, and </a:t>
-                      </a:r>
-                      <a:r>
-                        <a:rPr kumimoji="1" lang="en-US" altLang="ja-JP" sz="1200">
-                          <a:latin typeface="Cascadia Code SemiBold" panose="020B0609020000020004" pitchFamily="49" charset="0"/>
-                          <a:ea typeface="Cascadia Code SemiBold" panose="020B0609020000020004" pitchFamily="49" charset="0"/>
-                          <a:cs typeface="Cascadia Code SemiBold" panose="020B0609020000020004" pitchFamily="49" charset="0"/>
-                        </a:rPr>
-                        <a:t>generates </a:t>
-                      </a:r>
-                      <a:r>
-                        <a:rPr kumimoji="1" lang="en-US" altLang="ja-JP" sz="1200">
-                          <a:solidFill>
-                            <a:srgbClr val="FF0000"/>
-                          </a:solidFill>
-                          <a:latin typeface="Cascadia Code SemiBold" panose="020B0609020000020004" pitchFamily="49" charset="0"/>
-                          <a:ea typeface="Cascadia Code SemiBold" panose="020B0609020000020004" pitchFamily="49" charset="0"/>
-                          <a:cs typeface="Cascadia Code SemiBold" panose="020B0609020000020004" pitchFamily="49" charset="0"/>
-                        </a:rPr>
-                        <a:t>report.html</a:t>
-                      </a:r>
-                      <a:r>
-                        <a:rPr kumimoji="1" lang="en-US" altLang="ja-JP" sz="1200">
-                          <a:latin typeface="Cascadia Code SemiBold" panose="020B0609020000020004" pitchFamily="49" charset="0"/>
-                          <a:ea typeface="Cascadia Code SemiBold" panose="020B0609020000020004" pitchFamily="49" charset="0"/>
-                          <a:cs typeface="Cascadia Code SemiBold" panose="020B0609020000020004" pitchFamily="49" charset="0"/>
-                        </a:rPr>
-                        <a:t> based on it.</a:t>
+                        <a:t>. These prompts serve as a baseline for human tuning.</a:t>
                       </a:r>
                     </a:p>
                   </a:txBody>
@@ -2288,25 +3620,34 @@
                 </a:tc>
                 <a:extLst>
                   <a:ext uri="{0D108BD9-81ED-4DB2-BD59-A6C34878D82A}">
-                    <a16:rowId xmlns:a16="http://schemas.microsoft.com/office/drawing/2014/main" val="4198762670"/>
+                    <a16:rowId xmlns:a16="http://schemas.microsoft.com/office/drawing/2014/main" val="3817967045"/>
                   </a:ext>
                 </a:extLst>
               </a:tr>
-              <a:tr h="417498">
-                <a:tc>
+              <a:tr h="357067">
+                <a:tc vMerge="1">
                   <a:txBody>
                     <a:bodyPr/>
                     <a:lstStyle/>
                     <a:p>
-                      <a:r>
-                        <a:rPr kumimoji="1" lang="en-US" altLang="ja-JP" sz="1200">
-                          <a:latin typeface="Cascadia Code SemiBold" panose="020B0609020000020004" pitchFamily="49" charset="0"/>
-                          <a:ea typeface="Cascadia Code SemiBold" panose="020B0609020000020004" pitchFamily="49" charset="0"/>
-                          <a:cs typeface="Cascadia Code SemiBold" panose="020B0609020000020004" pitchFamily="49" charset="0"/>
-                        </a:rPr>
-                        <a:t>rubric/*.json</a:t>
-                      </a:r>
-                      <a:endParaRPr kumimoji="1" lang="ja-JP" altLang="en-US" sz="1200">
+                      <a:pPr marL="0" marR="0" lvl="0" indent="0" algn="l" defTabSz="914400" rtl="0" eaLnBrk="1" fontAlgn="auto" latinLnBrk="0" hangingPunct="1">
+                        <a:lnSpc>
+                          <a:spcPct val="100000"/>
+                        </a:lnSpc>
+                        <a:spcBef>
+                          <a:spcPts val="0"/>
+                        </a:spcBef>
+                        <a:spcAft>
+                          <a:spcPts val="0"/>
+                        </a:spcAft>
+                        <a:buClrTx/>
+                        <a:buSzTx/>
+                        <a:buFontTx/>
+                        <a:buNone/>
+                        <a:tabLst/>
+                        <a:defRPr/>
+                      </a:pPr>
+                      <a:endParaRPr kumimoji="1" lang="ja-JP" altLang="en-US" sz="1000">
                         <a:latin typeface="Cascadia Code SemiBold" panose="020B0609020000020004" pitchFamily="49" charset="0"/>
                         <a:ea typeface="BIZ UDゴシック" panose="020B0400000000000000" pitchFamily="49" charset="-128"/>
                         <a:cs typeface="Cascadia Code SemiBold" panose="020B0609020000020004" pitchFamily="49" charset="0"/>
@@ -2360,82 +3701,35 @@
                     <a:bodyPr/>
                     <a:lstStyle/>
                     <a:p>
+                      <a:pPr marL="0" marR="0" lvl="0" indent="0" algn="l" defTabSz="914400" rtl="0" eaLnBrk="1" fontAlgn="auto" latinLnBrk="0" hangingPunct="1">
+                        <a:lnSpc>
+                          <a:spcPct val="100000"/>
+                        </a:lnSpc>
+                        <a:spcBef>
+                          <a:spcPts val="0"/>
+                        </a:spcBef>
+                        <a:spcAft>
+                          <a:spcPts val="0"/>
+                        </a:spcAft>
+                        <a:buClrTx/>
+                        <a:buSzTx/>
+                        <a:buFontTx/>
+                        <a:buNone/>
+                        <a:tabLst/>
+                        <a:defRPr/>
+                      </a:pPr>
                       <a:r>
-                        <a:rPr kumimoji="1" lang="en-US" altLang="ja-JP" sz="1200">
-                          <a:latin typeface="Cascadia Code SemiBold" panose="020B0609020000020004" pitchFamily="49" charset="0"/>
-                          <a:ea typeface="Cascadia Code SemiBold" panose="020B0609020000020004" pitchFamily="49" charset="0"/>
-                          <a:cs typeface="Cascadia Code SemiBold" panose="020B0609020000020004" pitchFamily="49" charset="0"/>
+                        <a:rPr kumimoji="1" lang="en-US" altLang="ja-JP" sz="1000">
+                          <a:latin typeface="Cascadia Mono" panose="020B0609020000020004" pitchFamily="49" charset="0"/>
+                          <a:ea typeface="Cascadia Mono" panose="020B0609020000020004" pitchFamily="49" charset="0"/>
+                          <a:cs typeface="Cascadia Mono" panose="020B0609020000020004" pitchFamily="49" charset="0"/>
                         </a:rPr>
-                        <a:t>This JSON defines the criteria used for both initial prompt template generation and LLM-as-a-Judge evaluation.</a:t>
+                        <a:t>llmj-feedback.py</a:t>
                       </a:r>
-                    </a:p>
-                  </a:txBody>
-                  <a:tcPr marL="137160" marR="137160" marT="137160" marB="137160">
-                    <a:lnL w="12700" cap="flat" cmpd="sng" algn="ctr">
-                      <a:solidFill>
-                        <a:schemeClr val="tx1"/>
-                      </a:solidFill>
-                      <a:prstDash val="solid"/>
-                      <a:round/>
-                      <a:headEnd type="none" w="med" len="med"/>
-                      <a:tailEnd type="none" w="med" len="med"/>
-                    </a:lnL>
-                    <a:lnR w="12700" cap="flat" cmpd="sng" algn="ctr">
-                      <a:solidFill>
-                        <a:schemeClr val="tx1"/>
-                      </a:solidFill>
-                      <a:prstDash val="solid"/>
-                      <a:round/>
-                      <a:headEnd type="none" w="med" len="med"/>
-                      <a:tailEnd type="none" w="med" len="med"/>
-                    </a:lnR>
-                    <a:lnT w="12700" cap="flat" cmpd="sng" algn="ctr">
-                      <a:solidFill>
-                        <a:schemeClr val="tx1"/>
-                      </a:solidFill>
-                      <a:prstDash val="solid"/>
-                      <a:round/>
-                      <a:headEnd type="none" w="med" len="med"/>
-                      <a:tailEnd type="none" w="med" len="med"/>
-                    </a:lnT>
-                    <a:lnB w="12700" cap="flat" cmpd="sng" algn="ctr">
-                      <a:solidFill>
-                        <a:schemeClr val="tx1"/>
-                      </a:solidFill>
-                      <a:prstDash val="solid"/>
-                      <a:round/>
-                      <a:headEnd type="none" w="med" len="med"/>
-                      <a:tailEnd type="none" w="med" len="med"/>
-                    </a:lnB>
-                    <a:solidFill>
-                      <a:schemeClr val="bg1"/>
-                    </a:solidFill>
-                  </a:tcPr>
-                </a:tc>
-                <a:extLst>
-                  <a:ext uri="{0D108BD9-81ED-4DB2-BD59-A6C34878D82A}">
-                    <a16:rowId xmlns:a16="http://schemas.microsoft.com/office/drawing/2014/main" val="1707978084"/>
-                  </a:ext>
-                </a:extLst>
-              </a:tr>
-              <a:tr h="0">
-                <a:tc>
-                  <a:txBody>
-                    <a:bodyPr/>
-                    <a:lstStyle/>
-                    <a:p>
-                      <a:r>
-                        <a:rPr kumimoji="1" lang="en-US" altLang="ja-JP" sz="1200">
-                          <a:latin typeface="Cascadia Code SemiBold" panose="020B0609020000020004" pitchFamily="49" charset="0"/>
-                          <a:ea typeface="Cascadia Code SemiBold" panose="020B0609020000020004" pitchFamily="49" charset="0"/>
-                          <a:cs typeface="Cascadia Code SemiBold" panose="020B0609020000020004" pitchFamily="49" charset="0"/>
-                        </a:rPr>
-                        <a:t>source/*.txt</a:t>
-                      </a:r>
-                      <a:endParaRPr kumimoji="1" lang="ja-JP" altLang="en-US" sz="1200">
-                        <a:latin typeface="Cascadia Code SemiBold" panose="020B0609020000020004" pitchFamily="49" charset="0"/>
+                      <a:endParaRPr kumimoji="1" lang="ja-JP" altLang="en-US" sz="1000">
+                        <a:latin typeface="Cascadia Mono" panose="020B0609020000020004" pitchFamily="49" charset="0"/>
                         <a:ea typeface="BIZ UDゴシック" panose="020B0400000000000000" pitchFamily="49" charset="-128"/>
-                        <a:cs typeface="Cascadia Code SemiBold" panose="020B0609020000020004" pitchFamily="49" charset="0"/>
+                        <a:cs typeface="Cascadia Mono" panose="020B0609020000020004" pitchFamily="49" charset="0"/>
                       </a:endParaRPr>
                     </a:p>
                   </a:txBody>
@@ -2486,70 +3780,6 @@
                     <a:bodyPr/>
                     <a:lstStyle/>
                     <a:p>
-                      <a:r>
-                        <a:rPr kumimoji="1" lang="en-US" altLang="ja-JP" sz="1200">
-                          <a:latin typeface="Cascadia Code SemiBold" panose="020B0609020000020004" pitchFamily="49" charset="0"/>
-                          <a:ea typeface="Cascadia Code SemiBold" panose="020B0609020000020004" pitchFamily="49" charset="0"/>
-                          <a:cs typeface="Cascadia Code SemiBold" panose="020B0609020000020004" pitchFamily="49" charset="0"/>
-                        </a:rPr>
-                        <a:t>This TXT file contains the original text.</a:t>
-                      </a:r>
-                    </a:p>
-                  </a:txBody>
-                  <a:tcPr marL="137160" marR="137160" marT="137160" marB="137160">
-                    <a:lnL w="12700" cap="flat" cmpd="sng" algn="ctr">
-                      <a:solidFill>
-                        <a:schemeClr val="tx1"/>
-                      </a:solidFill>
-                      <a:prstDash val="solid"/>
-                      <a:round/>
-                      <a:headEnd type="none" w="med" len="med"/>
-                      <a:tailEnd type="none" w="med" len="med"/>
-                    </a:lnL>
-                    <a:lnR w="12700" cap="flat" cmpd="sng" algn="ctr">
-                      <a:solidFill>
-                        <a:schemeClr val="tx1"/>
-                      </a:solidFill>
-                      <a:prstDash val="solid"/>
-                      <a:round/>
-                      <a:headEnd type="none" w="med" len="med"/>
-                      <a:tailEnd type="none" w="med" len="med"/>
-                    </a:lnR>
-                    <a:lnT w="12700" cap="flat" cmpd="sng" algn="ctr">
-                      <a:solidFill>
-                        <a:schemeClr val="tx1"/>
-                      </a:solidFill>
-                      <a:prstDash val="solid"/>
-                      <a:round/>
-                      <a:headEnd type="none" w="med" len="med"/>
-                      <a:tailEnd type="none" w="med" len="med"/>
-                    </a:lnT>
-                    <a:lnB w="12700" cap="flat" cmpd="sng" algn="ctr">
-                      <a:solidFill>
-                        <a:schemeClr val="tx1"/>
-                      </a:solidFill>
-                      <a:prstDash val="solid"/>
-                      <a:round/>
-                      <a:headEnd type="none" w="med" len="med"/>
-                      <a:tailEnd type="none" w="med" len="med"/>
-                    </a:lnB>
-                    <a:solidFill>
-                      <a:schemeClr val="bg1"/>
-                    </a:solidFill>
-                  </a:tcPr>
-                </a:tc>
-                <a:extLst>
-                  <a:ext uri="{0D108BD9-81ED-4DB2-BD59-A6C34878D82A}">
-                    <a16:rowId xmlns:a16="http://schemas.microsoft.com/office/drawing/2014/main" val="1262082791"/>
-                  </a:ext>
-                </a:extLst>
-              </a:tr>
-              <a:tr h="0">
-                <a:tc>
-                  <a:txBody>
-                    <a:bodyPr/>
-                    <a:lstStyle/>
-                    <a:p>
                       <a:pPr marL="0" marR="0" lvl="0" indent="0" algn="l" defTabSz="914400" rtl="0" eaLnBrk="1" fontAlgn="auto" latinLnBrk="0" hangingPunct="1">
                         <a:lnSpc>
                           <a:spcPct val="100000"/>
@@ -2568,459 +3798,48 @@
                         <a:defRPr/>
                       </a:pPr>
                       <a:r>
-                        <a:rPr kumimoji="1" lang="en-US" altLang="ja-JP" sz="1200">
-                          <a:latin typeface="Cascadia Code SemiBold" panose="020B0609020000020004" pitchFamily="49" charset="0"/>
-                          <a:ea typeface="Cascadia Code SemiBold" panose="020B0609020000020004" pitchFamily="49" charset="0"/>
-                          <a:cs typeface="Cascadia Code SemiBold" panose="020B0609020000020004" pitchFamily="49" charset="0"/>
+                        <a:rPr kumimoji="1" lang="en-US" altLang="ja-JP" sz="1000">
+                          <a:latin typeface="Cascadia Mono" panose="020B0609020000020004" pitchFamily="49" charset="0"/>
+                          <a:ea typeface="Cascadia Mono" panose="020B0609020000020004" pitchFamily="49" charset="0"/>
+                          <a:cs typeface="Cascadia Mono" panose="020B0609020000020004" pitchFamily="49" charset="0"/>
                         </a:rPr>
-                        <a:t>supports/llmj-fake-source.py</a:t>
-                      </a:r>
-                      <a:endParaRPr kumimoji="1" lang="ja-JP" altLang="en-US" sz="1200">
-                        <a:latin typeface="Cascadia Code SemiBold" panose="020B0609020000020004" pitchFamily="49" charset="0"/>
-                        <a:ea typeface="BIZ UDゴシック" panose="020B0400000000000000" pitchFamily="49" charset="-128"/>
-                        <a:cs typeface="Cascadia Code SemiBold" panose="020B0609020000020004" pitchFamily="49" charset="0"/>
-                      </a:endParaRPr>
-                    </a:p>
-                  </a:txBody>
-                  <a:tcPr marL="137160" marR="137160" marT="137160" marB="137160">
-                    <a:lnL w="12700" cap="flat" cmpd="sng" algn="ctr">
-                      <a:solidFill>
-                        <a:schemeClr val="tx1"/>
-                      </a:solidFill>
-                      <a:prstDash val="solid"/>
-                      <a:round/>
-                      <a:headEnd type="none" w="med" len="med"/>
-                      <a:tailEnd type="none" w="med" len="med"/>
-                    </a:lnL>
-                    <a:lnR w="12700" cap="flat" cmpd="sng" algn="ctr">
-                      <a:solidFill>
-                        <a:schemeClr val="tx1"/>
-                      </a:solidFill>
-                      <a:prstDash val="solid"/>
-                      <a:round/>
-                      <a:headEnd type="none" w="med" len="med"/>
-                      <a:tailEnd type="none" w="med" len="med"/>
-                    </a:lnR>
-                    <a:lnT w="12700" cap="flat" cmpd="sng" algn="ctr">
-                      <a:solidFill>
-                        <a:schemeClr val="tx1"/>
-                      </a:solidFill>
-                      <a:prstDash val="solid"/>
-                      <a:round/>
-                      <a:headEnd type="none" w="med" len="med"/>
-                      <a:tailEnd type="none" w="med" len="med"/>
-                    </a:lnT>
-                    <a:lnB w="12700" cap="flat" cmpd="sng" algn="ctr">
-                      <a:solidFill>
-                        <a:schemeClr val="tx1"/>
-                      </a:solidFill>
-                      <a:prstDash val="solid"/>
-                      <a:round/>
-                      <a:headEnd type="none" w="med" len="med"/>
-                      <a:tailEnd type="none" w="med" len="med"/>
-                    </a:lnB>
-                    <a:solidFill>
-                      <a:schemeClr val="bg1"/>
-                    </a:solidFill>
-                  </a:tcPr>
-                </a:tc>
-                <a:tc>
-                  <a:txBody>
-                    <a:bodyPr/>
-                    <a:lstStyle/>
-                    <a:p>
-                      <a:r>
-                        <a:rPr kumimoji="1" lang="en-US" altLang="ja-JP" sz="1200" b="0" i="0">
-                          <a:solidFill>
-                            <a:schemeClr val="tx1"/>
-                          </a:solidFill>
-                          <a:latin typeface="Cascadia Code SemiBold" panose="020B0609020000020004" pitchFamily="49" charset="0"/>
-                          <a:ea typeface="Cascadia Code SemiBold" panose="020B0609020000020004" pitchFamily="49" charset="0"/>
-                          <a:cs typeface="Cascadia Code SemiBold" panose="020B0609020000020004" pitchFamily="49" charset="0"/>
-                        </a:rPr>
-                        <a:t>It generates a large number of text files </a:t>
+                        <a:t>This SCRIPT provides improvement suggestions for the </a:t>
                       </a:r>
                       <a:r>
-                        <a:rPr kumimoji="1" lang="en-US" altLang="ja-JP" sz="1200" b="1" i="1">
+                        <a:rPr kumimoji="1" lang="en-US" altLang="ja-JP" sz="1000" b="1" i="1">
                           <a:solidFill>
                             <a:srgbClr val="FF0000"/>
                           </a:solidFill>
-                          <a:latin typeface="Cascadia Code SemiBold" panose="020B0609020000020004" pitchFamily="49" charset="0"/>
-                          <a:ea typeface="Cascadia Code SemiBold" panose="020B0609020000020004" pitchFamily="49" charset="0"/>
-                          <a:cs typeface="Cascadia Code SemiBold" panose="020B0609020000020004" pitchFamily="49" charset="0"/>
-                        </a:rPr>
-                        <a:t>in source/*.txt</a:t>
-                      </a:r>
-                      <a:r>
-                        <a:rPr kumimoji="1" lang="en-US" altLang="ja-JP" sz="1200" b="0" i="0">
-                          <a:solidFill>
-                            <a:schemeClr val="tx1"/>
-                          </a:solidFill>
-                          <a:latin typeface="Cascadia Code SemiBold" panose="020B0609020000020004" pitchFamily="49" charset="0"/>
-                          <a:ea typeface="Cascadia Code SemiBold" panose="020B0609020000020004" pitchFamily="49" charset="0"/>
-                          <a:cs typeface="Cascadia Code SemiBold" panose="020B0609020000020004" pitchFamily="49" charset="0"/>
-                        </a:rPr>
-                        <a:t>. Please use them as input data for quality verification.</a:t>
-                      </a:r>
-                    </a:p>
-                  </a:txBody>
-                  <a:tcPr marL="137160" marR="137160" marT="137160" marB="137160">
-                    <a:lnL w="12700" cap="flat" cmpd="sng" algn="ctr">
-                      <a:solidFill>
-                        <a:schemeClr val="tx1"/>
-                      </a:solidFill>
-                      <a:prstDash val="solid"/>
-                      <a:round/>
-                      <a:headEnd type="none" w="med" len="med"/>
-                      <a:tailEnd type="none" w="med" len="med"/>
-                    </a:lnL>
-                    <a:lnR w="12700" cap="flat" cmpd="sng" algn="ctr">
-                      <a:solidFill>
-                        <a:schemeClr val="tx1"/>
-                      </a:solidFill>
-                      <a:prstDash val="solid"/>
-                      <a:round/>
-                      <a:headEnd type="none" w="med" len="med"/>
-                      <a:tailEnd type="none" w="med" len="med"/>
-                    </a:lnR>
-                    <a:lnT w="12700" cap="flat" cmpd="sng" algn="ctr">
-                      <a:solidFill>
-                        <a:schemeClr val="tx1"/>
-                      </a:solidFill>
-                      <a:prstDash val="solid"/>
-                      <a:round/>
-                      <a:headEnd type="none" w="med" len="med"/>
-                      <a:tailEnd type="none" w="med" len="med"/>
-                    </a:lnT>
-                    <a:lnB w="12700" cap="flat" cmpd="sng" algn="ctr">
-                      <a:solidFill>
-                        <a:schemeClr val="tx1"/>
-                      </a:solidFill>
-                      <a:prstDash val="solid"/>
-                      <a:round/>
-                      <a:headEnd type="none" w="med" len="med"/>
-                      <a:tailEnd type="none" w="med" len="med"/>
-                    </a:lnB>
-                    <a:solidFill>
-                      <a:schemeClr val="bg1"/>
-                    </a:solidFill>
-                  </a:tcPr>
-                </a:tc>
-                <a:extLst>
-                  <a:ext uri="{0D108BD9-81ED-4DB2-BD59-A6C34878D82A}">
-                    <a16:rowId xmlns:a16="http://schemas.microsoft.com/office/drawing/2014/main" val="2339504222"/>
-                  </a:ext>
-                </a:extLst>
-              </a:tr>
-              <a:tr h="0">
-                <a:tc>
-                  <a:txBody>
-                    <a:bodyPr/>
-                    <a:lstStyle/>
-                    <a:p>
-                      <a:r>
-                        <a:rPr kumimoji="1" lang="en-US" altLang="ja-JP" sz="1200">
-                          <a:latin typeface="Cascadia Code SemiBold" panose="020B0609020000020004" pitchFamily="49" charset="0"/>
-                          <a:ea typeface="Cascadia Code SemiBold" panose="020B0609020000020004" pitchFamily="49" charset="0"/>
-                          <a:cs typeface="Cascadia Code SemiBold" panose="020B0609020000020004" pitchFamily="49" charset="0"/>
-                        </a:rPr>
-                        <a:t>supports/llmj-initial.py</a:t>
-                      </a:r>
-                      <a:endParaRPr kumimoji="1" lang="ja-JP" altLang="en-US" sz="1200">
-                        <a:latin typeface="Cascadia Code SemiBold" panose="020B0609020000020004" pitchFamily="49" charset="0"/>
-                        <a:ea typeface="BIZ UDゴシック" panose="020B0400000000000000" pitchFamily="49" charset="-128"/>
-                        <a:cs typeface="Cascadia Code SemiBold" panose="020B0609020000020004" pitchFamily="49" charset="0"/>
-                      </a:endParaRPr>
-                    </a:p>
-                  </a:txBody>
-                  <a:tcPr marL="137160" marR="137160" marT="137160" marB="137160">
-                    <a:lnL w="12700" cap="flat" cmpd="sng" algn="ctr">
-                      <a:solidFill>
-                        <a:schemeClr val="tx1"/>
-                      </a:solidFill>
-                      <a:prstDash val="solid"/>
-                      <a:round/>
-                      <a:headEnd type="none" w="med" len="med"/>
-                      <a:tailEnd type="none" w="med" len="med"/>
-                    </a:lnL>
-                    <a:lnR w="12700" cap="flat" cmpd="sng" algn="ctr">
-                      <a:solidFill>
-                        <a:schemeClr val="tx1"/>
-                      </a:solidFill>
-                      <a:prstDash val="solid"/>
-                      <a:round/>
-                      <a:headEnd type="none" w="med" len="med"/>
-                      <a:tailEnd type="none" w="med" len="med"/>
-                    </a:lnR>
-                    <a:lnT w="12700" cap="flat" cmpd="sng" algn="ctr">
-                      <a:solidFill>
-                        <a:schemeClr val="tx1"/>
-                      </a:solidFill>
-                      <a:prstDash val="solid"/>
-                      <a:round/>
-                      <a:headEnd type="none" w="med" len="med"/>
-                      <a:tailEnd type="none" w="med" len="med"/>
-                    </a:lnT>
-                    <a:lnB w="12700" cap="flat" cmpd="sng" algn="ctr">
-                      <a:solidFill>
-                        <a:schemeClr val="tx1"/>
-                      </a:solidFill>
-                      <a:prstDash val="solid"/>
-                      <a:round/>
-                      <a:headEnd type="none" w="med" len="med"/>
-                      <a:tailEnd type="none" w="med" len="med"/>
-                    </a:lnB>
-                    <a:solidFill>
-                      <a:schemeClr val="bg1"/>
-                    </a:solidFill>
-                  </a:tcPr>
-                </a:tc>
-                <a:tc>
-                  <a:txBody>
-                    <a:bodyPr/>
-                    <a:lstStyle/>
-                    <a:p>
-                      <a:r>
-                        <a:rPr kumimoji="1" lang="en-US" altLang="ja-JP" sz="1200">
-                          <a:latin typeface="Cascadia Code SemiBold" panose="020B0609020000020004" pitchFamily="49" charset="0"/>
-                          <a:ea typeface="Cascadia Code SemiBold" panose="020B0609020000020004" pitchFamily="49" charset="0"/>
-                          <a:cs typeface="Cascadia Code SemiBold" panose="020B0609020000020004" pitchFamily="49" charset="0"/>
-                        </a:rPr>
-                        <a:t>This SCRIPT generates prompt templates from </a:t>
-                      </a:r>
-                      <a:r>
-                        <a:rPr kumimoji="1" lang="en-US" altLang="ja-JP" sz="1200" b="1" i="1">
-                          <a:solidFill>
-                            <a:srgbClr val="FF0000"/>
-                          </a:solidFill>
-                          <a:latin typeface="Cascadia Code SemiBold" panose="020B0609020000020004" pitchFamily="49" charset="0"/>
-                          <a:ea typeface="Cascadia Code SemiBold" panose="020B0609020000020004" pitchFamily="49" charset="0"/>
-                          <a:cs typeface="Cascadia Code SemiBold" panose="020B0609020000020004" pitchFamily="49" charset="0"/>
+                          <a:latin typeface="Cascadia Mono" panose="020B0609020000020004" pitchFamily="49" charset="0"/>
+                          <a:ea typeface="Cascadia Mono" panose="020B0609020000020004" pitchFamily="49" charset="0"/>
+                          <a:cs typeface="Cascadia Mono" panose="020B0609020000020004" pitchFamily="49" charset="0"/>
                         </a:rPr>
                         <a:t>rubric/*.json</a:t>
                       </a:r>
                       <a:r>
-                        <a:rPr kumimoji="1" lang="en-US" altLang="ja-JP" sz="1200">
-                          <a:latin typeface="Cascadia Code SemiBold" panose="020B0609020000020004" pitchFamily="49" charset="0"/>
-                          <a:ea typeface="Cascadia Code SemiBold" panose="020B0609020000020004" pitchFamily="49" charset="0"/>
-                          <a:cs typeface="Cascadia Code SemiBold" panose="020B0609020000020004" pitchFamily="49" charset="0"/>
-                        </a:rPr>
-                        <a:t> and writes them to </a:t>
-                      </a:r>
-                      <a:r>
-                        <a:rPr kumimoji="1" lang="en-US" altLang="ja-JP" sz="1200" b="1" i="1">
-                          <a:solidFill>
-                            <a:srgbClr val="FF0000"/>
-                          </a:solidFill>
-                          <a:latin typeface="Cascadia Code SemiBold" panose="020B0609020000020004" pitchFamily="49" charset="0"/>
-                          <a:ea typeface="Cascadia Code SemiBold" panose="020B0609020000020004" pitchFamily="49" charset="0"/>
-                          <a:cs typeface="Cascadia Code SemiBold" panose="020B0609020000020004" pitchFamily="49" charset="0"/>
-                        </a:rPr>
-                        <a:t>work/*.txt</a:t>
-                      </a:r>
-                      <a:r>
-                        <a:rPr kumimoji="1" lang="en-US" altLang="ja-JP" sz="1200">
-                          <a:latin typeface="Cascadia Code SemiBold" panose="020B0609020000020004" pitchFamily="49" charset="0"/>
-                          <a:ea typeface="Cascadia Code SemiBold" panose="020B0609020000020004" pitchFamily="49" charset="0"/>
-                          <a:cs typeface="Cascadia Code SemiBold" panose="020B0609020000020004" pitchFamily="49" charset="0"/>
-                        </a:rPr>
-                        <a:t>. These prompts serve as a baseline for human tuning.</a:t>
-                      </a:r>
-                    </a:p>
-                  </a:txBody>
-                  <a:tcPr marL="137160" marR="137160" marT="137160" marB="137160">
-                    <a:lnL w="12700" cap="flat" cmpd="sng" algn="ctr">
-                      <a:solidFill>
-                        <a:schemeClr val="tx1"/>
-                      </a:solidFill>
-                      <a:prstDash val="solid"/>
-                      <a:round/>
-                      <a:headEnd type="none" w="med" len="med"/>
-                      <a:tailEnd type="none" w="med" len="med"/>
-                    </a:lnL>
-                    <a:lnR w="12700" cap="flat" cmpd="sng" algn="ctr">
-                      <a:solidFill>
-                        <a:schemeClr val="tx1"/>
-                      </a:solidFill>
-                      <a:prstDash val="solid"/>
-                      <a:round/>
-                      <a:headEnd type="none" w="med" len="med"/>
-                      <a:tailEnd type="none" w="med" len="med"/>
-                    </a:lnR>
-                    <a:lnT w="12700" cap="flat" cmpd="sng" algn="ctr">
-                      <a:solidFill>
-                        <a:schemeClr val="tx1"/>
-                      </a:solidFill>
-                      <a:prstDash val="solid"/>
-                      <a:round/>
-                      <a:headEnd type="none" w="med" len="med"/>
-                      <a:tailEnd type="none" w="med" len="med"/>
-                    </a:lnT>
-                    <a:lnB w="12700" cap="flat" cmpd="sng" algn="ctr">
-                      <a:solidFill>
-                        <a:schemeClr val="tx1"/>
-                      </a:solidFill>
-                      <a:prstDash val="solid"/>
-                      <a:round/>
-                      <a:headEnd type="none" w="med" len="med"/>
-                      <a:tailEnd type="none" w="med" len="med"/>
-                    </a:lnB>
-                    <a:solidFill>
-                      <a:schemeClr val="bg1"/>
-                    </a:solidFill>
-                  </a:tcPr>
-                </a:tc>
-                <a:extLst>
-                  <a:ext uri="{0D108BD9-81ED-4DB2-BD59-A6C34878D82A}">
-                    <a16:rowId xmlns:a16="http://schemas.microsoft.com/office/drawing/2014/main" val="3817967045"/>
-                  </a:ext>
-                </a:extLst>
-              </a:tr>
-              <a:tr h="0">
-                <a:tc>
-                  <a:txBody>
-                    <a:bodyPr/>
-                    <a:lstStyle/>
-                    <a:p>
-                      <a:pPr marL="0" marR="0" lvl="0" indent="0" algn="l" defTabSz="914400" rtl="0" eaLnBrk="1" fontAlgn="auto" latinLnBrk="0" hangingPunct="1">
-                        <a:lnSpc>
-                          <a:spcPct val="100000"/>
-                        </a:lnSpc>
-                        <a:spcBef>
-                          <a:spcPts val="0"/>
-                        </a:spcBef>
-                        <a:spcAft>
-                          <a:spcPts val="0"/>
-                        </a:spcAft>
-                        <a:buClrTx/>
-                        <a:buSzTx/>
-                        <a:buFontTx/>
-                        <a:buNone/>
-                        <a:tabLst/>
-                        <a:defRPr/>
-                      </a:pPr>
-                      <a:r>
-                        <a:rPr kumimoji="1" lang="en-US" altLang="ja-JP" sz="1200">
-                          <a:latin typeface="Cascadia Code SemiBold" panose="020B0609020000020004" pitchFamily="49" charset="0"/>
-                          <a:ea typeface="Cascadia Code SemiBold" panose="020B0609020000020004" pitchFamily="49" charset="0"/>
-                          <a:cs typeface="Cascadia Code SemiBold" panose="020B0609020000020004" pitchFamily="49" charset="0"/>
-                        </a:rPr>
-                        <a:t>supports/llmj-feedback.py</a:t>
-                      </a:r>
-                      <a:endParaRPr kumimoji="1" lang="ja-JP" altLang="en-US" sz="1200">
-                        <a:latin typeface="Cascadia Code SemiBold" panose="020B0609020000020004" pitchFamily="49" charset="0"/>
-                        <a:ea typeface="BIZ UDゴシック" panose="020B0400000000000000" pitchFamily="49" charset="-128"/>
-                        <a:cs typeface="Cascadia Code SemiBold" panose="020B0609020000020004" pitchFamily="49" charset="0"/>
-                      </a:endParaRPr>
-                    </a:p>
-                  </a:txBody>
-                  <a:tcPr marL="137160" marR="137160" marT="137160" marB="137160">
-                    <a:lnL w="12700" cap="flat" cmpd="sng" algn="ctr">
-                      <a:solidFill>
-                        <a:schemeClr val="tx1"/>
-                      </a:solidFill>
-                      <a:prstDash val="solid"/>
-                      <a:round/>
-                      <a:headEnd type="none" w="med" len="med"/>
-                      <a:tailEnd type="none" w="med" len="med"/>
-                    </a:lnL>
-                    <a:lnR w="12700" cap="flat" cmpd="sng" algn="ctr">
-                      <a:solidFill>
-                        <a:schemeClr val="tx1"/>
-                      </a:solidFill>
-                      <a:prstDash val="solid"/>
-                      <a:round/>
-                      <a:headEnd type="none" w="med" len="med"/>
-                      <a:tailEnd type="none" w="med" len="med"/>
-                    </a:lnR>
-                    <a:lnT w="12700" cap="flat" cmpd="sng" algn="ctr">
-                      <a:solidFill>
-                        <a:schemeClr val="tx1"/>
-                      </a:solidFill>
-                      <a:prstDash val="solid"/>
-                      <a:round/>
-                      <a:headEnd type="none" w="med" len="med"/>
-                      <a:tailEnd type="none" w="med" len="med"/>
-                    </a:lnT>
-                    <a:lnB w="12700" cap="flat" cmpd="sng" algn="ctr">
-                      <a:solidFill>
-                        <a:schemeClr val="tx1"/>
-                      </a:solidFill>
-                      <a:prstDash val="solid"/>
-                      <a:round/>
-                      <a:headEnd type="none" w="med" len="med"/>
-                      <a:tailEnd type="none" w="med" len="med"/>
-                    </a:lnB>
-                    <a:solidFill>
-                      <a:schemeClr val="bg1"/>
-                    </a:solidFill>
-                  </a:tcPr>
-                </a:tc>
-                <a:tc>
-                  <a:txBody>
-                    <a:bodyPr/>
-                    <a:lstStyle/>
-                    <a:p>
-                      <a:pPr marL="0" marR="0" lvl="0" indent="0" algn="l" defTabSz="914400" rtl="0" eaLnBrk="1" fontAlgn="auto" latinLnBrk="0" hangingPunct="1">
-                        <a:lnSpc>
-                          <a:spcPct val="100000"/>
-                        </a:lnSpc>
-                        <a:spcBef>
-                          <a:spcPts val="0"/>
-                        </a:spcBef>
-                        <a:spcAft>
-                          <a:spcPts val="0"/>
-                        </a:spcAft>
-                        <a:buClrTx/>
-                        <a:buSzTx/>
-                        <a:buFontTx/>
-                        <a:buNone/>
-                        <a:tabLst/>
-                        <a:defRPr/>
-                      </a:pPr>
-                      <a:r>
-                        <a:rPr kumimoji="1" lang="en-US" altLang="ja-JP" sz="1200">
-                          <a:latin typeface="Cascadia Code SemiBold" panose="020B0609020000020004" pitchFamily="49" charset="0"/>
-                          <a:ea typeface="Cascadia Code SemiBold" panose="020B0609020000020004" pitchFamily="49" charset="0"/>
-                          <a:cs typeface="Cascadia Code SemiBold" panose="020B0609020000020004" pitchFamily="49" charset="0"/>
-                        </a:rPr>
-                        <a:t>This SCRIPT provides improvement suggestions for the </a:t>
-                      </a:r>
-                      <a:r>
-                        <a:rPr kumimoji="1" lang="en-US" altLang="ja-JP" sz="1200" b="1" i="1">
-                          <a:solidFill>
-                            <a:srgbClr val="FF0000"/>
-                          </a:solidFill>
-                          <a:latin typeface="Cascadia Code SemiBold" panose="020B0609020000020004" pitchFamily="49" charset="0"/>
-                          <a:ea typeface="Cascadia Code SemiBold" panose="020B0609020000020004" pitchFamily="49" charset="0"/>
-                          <a:cs typeface="Cascadia Code SemiBold" panose="020B0609020000020004" pitchFamily="49" charset="0"/>
-                        </a:rPr>
-                        <a:t>rubric/*.json</a:t>
-                      </a:r>
-                      <a:r>
-                        <a:rPr kumimoji="1" lang="en-US" altLang="ja-JP" sz="1200">
-                          <a:latin typeface="Cascadia Code SemiBold" panose="020B0609020000020004" pitchFamily="49" charset="0"/>
-                          <a:ea typeface="Cascadia Code SemiBold" panose="020B0609020000020004" pitchFamily="49" charset="0"/>
-                          <a:cs typeface="Cascadia Code SemiBold" panose="020B0609020000020004" pitchFamily="49" charset="0"/>
+                        <a:rPr kumimoji="1" lang="en-US" altLang="ja-JP" sz="1000">
+                          <a:latin typeface="Cascadia Mono" panose="020B0609020000020004" pitchFamily="49" charset="0"/>
+                          <a:ea typeface="Cascadia Mono" panose="020B0609020000020004" pitchFamily="49" charset="0"/>
+                          <a:cs typeface="Cascadia Mono" panose="020B0609020000020004" pitchFamily="49" charset="0"/>
                         </a:rPr>
                         <a:t> or for specific gold data in </a:t>
                       </a:r>
                       <a:r>
-                        <a:rPr kumimoji="1" lang="en-US" altLang="ja-JP" sz="1200" b="1" i="1">
+                        <a:rPr kumimoji="1" lang="en-US" altLang="ja-JP" sz="1000" b="1" i="1">
                           <a:solidFill>
                             <a:srgbClr val="FF0000"/>
                           </a:solidFill>
-                          <a:latin typeface="Cascadia Code SemiBold" panose="020B0609020000020004" pitchFamily="49" charset="0"/>
-                          <a:ea typeface="Cascadia Code SemiBold" panose="020B0609020000020004" pitchFamily="49" charset="0"/>
-                          <a:cs typeface="Cascadia Code SemiBold" panose="020B0609020000020004" pitchFamily="49" charset="0"/>
+                          <a:latin typeface="Cascadia Mono" panose="020B0609020000020004" pitchFamily="49" charset="0"/>
+                          <a:ea typeface="Cascadia Mono" panose="020B0609020000020004" pitchFamily="49" charset="0"/>
+                          <a:cs typeface="Cascadia Mono" panose="020B0609020000020004" pitchFamily="49" charset="0"/>
                         </a:rPr>
                         <a:t>work/*.xlsx </a:t>
                       </a:r>
                       <a:r>
-                        <a:rPr kumimoji="1" lang="en-US" altLang="ja-JP" sz="1200">
-                          <a:latin typeface="Cascadia Code SemiBold" panose="020B0609020000020004" pitchFamily="49" charset="0"/>
-                          <a:ea typeface="Cascadia Code SemiBold" panose="020B0609020000020004" pitchFamily="49" charset="0"/>
-                          <a:cs typeface="Cascadia Code SemiBold" panose="020B0609020000020004" pitchFamily="49" charset="0"/>
+                        <a:rPr kumimoji="1" lang="en-US" altLang="ja-JP" sz="1000">
+                          <a:latin typeface="Cascadia Mono" panose="020B0609020000020004" pitchFamily="49" charset="0"/>
+                          <a:ea typeface="Cascadia Mono" panose="020B0609020000020004" pitchFamily="49" charset="0"/>
+                          <a:cs typeface="Cascadia Mono" panose="020B0609020000020004" pitchFamily="49" charset="0"/>
                         </a:rPr>
                         <a:t>based on the evaluation results of the gold data.</a:t>
                       </a:r>
@@ -3098,17 +3917,17 @@
                         <a:defRPr/>
                       </a:pPr>
                       <a:r>
-                        <a:rPr kumimoji="1" lang="en-US" altLang="ja-JP" sz="1200">
-                          <a:latin typeface="Cascadia Code SemiBold" panose="020B0609020000020004" pitchFamily="49" charset="0"/>
-                          <a:ea typeface="Cascadia Code SemiBold" panose="020B0609020000020004" pitchFamily="49" charset="0"/>
-                          <a:cs typeface="Cascadia Code SemiBold" panose="020B0609020000020004" pitchFamily="49" charset="0"/>
+                        <a:rPr kumimoji="1" lang="en-US" altLang="ja-JP" sz="1000">
+                          <a:latin typeface="Cascadia Mono" panose="020B0609020000020004" pitchFamily="49" charset="0"/>
+                          <a:ea typeface="Cascadia Mono" panose="020B0609020000020004" pitchFamily="49" charset="0"/>
+                          <a:cs typeface="Cascadia Mono" panose="020B0609020000020004" pitchFamily="49" charset="0"/>
                         </a:rPr>
-                        <a:t>supports/template-*</a:t>
+                        <a:t>supports/</a:t>
                       </a:r>
-                      <a:endParaRPr kumimoji="1" lang="ja-JP" altLang="en-US" sz="1200">
-                        <a:latin typeface="Cascadia Code SemiBold" panose="020B0609020000020004" pitchFamily="49" charset="0"/>
+                      <a:endParaRPr kumimoji="1" lang="ja-JP" altLang="en-US" sz="1000">
+                        <a:latin typeface="Cascadia Mono" panose="020B0609020000020004" pitchFamily="49" charset="0"/>
                         <a:ea typeface="BIZ UDゴシック" panose="020B0400000000000000" pitchFamily="49" charset="-128"/>
-                        <a:cs typeface="Cascadia Code SemiBold" panose="020B0609020000020004" pitchFamily="49" charset="0"/>
+                        <a:cs typeface="Cascadia Mono" panose="020B0609020000020004" pitchFamily="49" charset="0"/>
                       </a:endParaRPr>
                     </a:p>
                   </a:txBody>
@@ -3159,30 +3978,109 @@
                     <a:bodyPr/>
                     <a:lstStyle/>
                     <a:p>
+                      <a:pPr marL="0" marR="0" lvl="0" indent="0" algn="l" defTabSz="914400" rtl="0" eaLnBrk="1" fontAlgn="auto" latinLnBrk="0" hangingPunct="1">
+                        <a:lnSpc>
+                          <a:spcPct val="100000"/>
+                        </a:lnSpc>
+                        <a:spcBef>
+                          <a:spcPts val="0"/>
+                        </a:spcBef>
+                        <a:spcAft>
+                          <a:spcPts val="0"/>
+                        </a:spcAft>
+                        <a:buClrTx/>
+                        <a:buSzTx/>
+                        <a:buFontTx/>
+                        <a:buNone/>
+                        <a:tabLst/>
+                        <a:defRPr/>
+                      </a:pPr>
                       <a:r>
-                        <a:rPr kumimoji="1" lang="en-US" altLang="ja-JP" sz="1200">
-                          <a:latin typeface="Cascadia Code SemiBold" panose="020B0609020000020004" pitchFamily="49" charset="0"/>
-                          <a:ea typeface="Cascadia Code SemiBold" panose="020B0609020000020004" pitchFamily="49" charset="0"/>
-                          <a:cs typeface="Cascadia Code SemiBold" panose="020B0609020000020004" pitchFamily="49" charset="0"/>
+                        <a:rPr kumimoji="1" lang="en-US" altLang="ja-JP" sz="1000">
+                          <a:latin typeface="Cascadia Mono" panose="020B0609020000020004" pitchFamily="49" charset="0"/>
+                          <a:ea typeface="Cascadia Mono" panose="020B0609020000020004" pitchFamily="49" charset="0"/>
+                          <a:cs typeface="Cascadia Mono" panose="020B0609020000020004" pitchFamily="49" charset="0"/>
+                        </a:rPr>
+                        <a:t>template-*</a:t>
+                      </a:r>
+                      <a:endParaRPr kumimoji="1" lang="ja-JP" altLang="en-US" sz="1000">
+                        <a:latin typeface="Cascadia Mono" panose="020B0609020000020004" pitchFamily="49" charset="0"/>
+                        <a:ea typeface="BIZ UDゴシック" panose="020B0400000000000000" pitchFamily="49" charset="-128"/>
+                        <a:cs typeface="Cascadia Mono" panose="020B0609020000020004" pitchFamily="49" charset="0"/>
+                      </a:endParaRPr>
+                    </a:p>
+                  </a:txBody>
+                  <a:tcPr marL="137160" marR="137160" marT="137160" marB="137160">
+                    <a:lnL w="12700" cap="flat" cmpd="sng" algn="ctr">
+                      <a:solidFill>
+                        <a:schemeClr val="tx1"/>
+                      </a:solidFill>
+                      <a:prstDash val="solid"/>
+                      <a:round/>
+                      <a:headEnd type="none" w="med" len="med"/>
+                      <a:tailEnd type="none" w="med" len="med"/>
+                    </a:lnL>
+                    <a:lnR w="12700" cap="flat" cmpd="sng" algn="ctr">
+                      <a:solidFill>
+                        <a:schemeClr val="tx1"/>
+                      </a:solidFill>
+                      <a:prstDash val="solid"/>
+                      <a:round/>
+                      <a:headEnd type="none" w="med" len="med"/>
+                      <a:tailEnd type="none" w="med" len="med"/>
+                    </a:lnR>
+                    <a:lnT w="12700" cap="flat" cmpd="sng" algn="ctr">
+                      <a:solidFill>
+                        <a:schemeClr val="tx1"/>
+                      </a:solidFill>
+                      <a:prstDash val="solid"/>
+                      <a:round/>
+                      <a:headEnd type="none" w="med" len="med"/>
+                      <a:tailEnd type="none" w="med" len="med"/>
+                    </a:lnT>
+                    <a:lnB w="12700" cap="flat" cmpd="sng" algn="ctr">
+                      <a:solidFill>
+                        <a:schemeClr val="tx1"/>
+                      </a:solidFill>
+                      <a:prstDash val="solid"/>
+                      <a:round/>
+                      <a:headEnd type="none" w="med" len="med"/>
+                      <a:tailEnd type="none" w="med" len="med"/>
+                    </a:lnB>
+                    <a:solidFill>
+                      <a:schemeClr val="bg1"/>
+                    </a:solidFill>
+                  </a:tcPr>
+                </a:tc>
+                <a:tc>
+                  <a:txBody>
+                    <a:bodyPr/>
+                    <a:lstStyle/>
+                    <a:p>
+                      <a:r>
+                        <a:rPr kumimoji="1" lang="en-US" altLang="ja-JP" sz="1000">
+                          <a:latin typeface="Cascadia Mono" panose="020B0609020000020004" pitchFamily="49" charset="0"/>
+                          <a:ea typeface="Cascadia Mono" panose="020B0609020000020004" pitchFamily="49" charset="0"/>
+                          <a:cs typeface="Cascadia Mono" panose="020B0609020000020004" pitchFamily="49" charset="0"/>
                         </a:rPr>
                         <a:t>These templates are used by </a:t>
                       </a:r>
                       <a:r>
-                        <a:rPr kumimoji="1" lang="en-US" altLang="ja-JP" sz="1200" b="1" i="1">
+                        <a:rPr kumimoji="1" lang="en-US" altLang="ja-JP" sz="1000" b="1" i="1">
                           <a:solidFill>
                             <a:srgbClr val="FF0000"/>
                           </a:solidFill>
-                          <a:latin typeface="Cascadia Code SemiBold" panose="020B0609020000020004" pitchFamily="49" charset="0"/>
-                          <a:ea typeface="Cascadia Code SemiBold" panose="020B0609020000020004" pitchFamily="49" charset="0"/>
-                          <a:cs typeface="Cascadia Code SemiBold" panose="020B0609020000020004" pitchFamily="49" charset="0"/>
+                          <a:latin typeface="Cascadia Mono" panose="020B0609020000020004" pitchFamily="49" charset="0"/>
+                          <a:ea typeface="Cascadia Mono" panose="020B0609020000020004" pitchFamily="49" charset="0"/>
+                          <a:cs typeface="Cascadia Mono" panose="020B0609020000020004" pitchFamily="49" charset="0"/>
                         </a:rPr>
                         <a:t>*.py</a:t>
                       </a:r>
                       <a:r>
-                        <a:rPr kumimoji="1" lang="en-US" altLang="ja-JP" sz="1200">
-                          <a:latin typeface="Cascadia Code SemiBold" panose="020B0609020000020004" pitchFamily="49" charset="0"/>
-                          <a:ea typeface="Cascadia Code SemiBold" panose="020B0609020000020004" pitchFamily="49" charset="0"/>
-                          <a:cs typeface="Cascadia Code SemiBold" panose="020B0609020000020004" pitchFamily="49" charset="0"/>
+                        <a:rPr kumimoji="1" lang="en-US" altLang="ja-JP" sz="1000">
+                          <a:latin typeface="Cascadia Mono" panose="020B0609020000020004" pitchFamily="49" charset="0"/>
+                          <a:ea typeface="Cascadia Mono" panose="020B0609020000020004" pitchFamily="49" charset="0"/>
+                          <a:cs typeface="Cascadia Mono" panose="020B0609020000020004" pitchFamily="49" charset="0"/>
                         </a:rPr>
                         <a:t> scripts.</a:t>
                       </a:r>
@@ -3236,24 +4134,24 @@
                   </a:ext>
                 </a:extLst>
               </a:tr>
-              <a:tr h="417498">
+              <a:tr h="0">
                 <a:tc>
                   <a:txBody>
                     <a:bodyPr/>
                     <a:lstStyle/>
                     <a:p>
                       <a:r>
-                        <a:rPr kumimoji="1" lang="en-US" altLang="ja-JP" sz="1200">
-                          <a:latin typeface="Cascadia Code SemiBold" panose="020B0609020000020004" pitchFamily="49" charset="0"/>
-                          <a:ea typeface="Cascadia Code SemiBold" panose="020B0609020000020004" pitchFamily="49" charset="0"/>
-                          <a:cs typeface="Cascadia Code SemiBold" panose="020B0609020000020004" pitchFamily="49" charset="0"/>
+                        <a:rPr kumimoji="1" lang="en-US" altLang="ja-JP" sz="1000">
+                          <a:latin typeface="Cascadia Mono" panose="020B0609020000020004" pitchFamily="49" charset="0"/>
+                          <a:ea typeface="Cascadia Mono" panose="020B0609020000020004" pitchFamily="49" charset="0"/>
+                          <a:cs typeface="Cascadia Mono" panose="020B0609020000020004" pitchFamily="49" charset="0"/>
                         </a:rPr>
-                        <a:t>work/*</a:t>
+                        <a:t>work/</a:t>
                       </a:r>
-                      <a:endParaRPr kumimoji="1" lang="ja-JP" altLang="en-US" sz="1200">
-                        <a:latin typeface="Cascadia Code SemiBold" panose="020B0609020000020004" pitchFamily="49" charset="0"/>
+                      <a:endParaRPr kumimoji="1" lang="ja-JP" altLang="en-US" sz="1000">
+                        <a:latin typeface="Cascadia Mono" panose="020B0609020000020004" pitchFamily="49" charset="0"/>
                         <a:ea typeface="BIZ UDゴシック" panose="020B0400000000000000" pitchFamily="49" charset="-128"/>
-                        <a:cs typeface="Cascadia Code SemiBold" panose="020B0609020000020004" pitchFamily="49" charset="0"/>
+                        <a:cs typeface="Cascadia Mono" panose="020B0609020000020004" pitchFamily="49" charset="0"/>
                       </a:endParaRPr>
                     </a:p>
                   </a:txBody>
@@ -3305,67 +4203,129 @@
                     <a:lstStyle/>
                     <a:p>
                       <a:r>
-                        <a:rPr kumimoji="1" lang="en-US" altLang="ja-JP" sz="1200">
-                          <a:latin typeface="Cascadia Code SemiBold" panose="020B0609020000020004" pitchFamily="49" charset="0"/>
-                          <a:ea typeface="Cascadia Code SemiBold" panose="020B0609020000020004" pitchFamily="49" charset="0"/>
-                          <a:cs typeface="Cascadia Code SemiBold" panose="020B0609020000020004" pitchFamily="49" charset="0"/>
+                        <a:rPr kumimoji="1" lang="en-US" altLang="ja-JP" sz="1000">
+                          <a:latin typeface="Cascadia Mono" panose="020B0609020000020004" pitchFamily="49" charset="0"/>
+                          <a:ea typeface="Cascadia Mono" panose="020B0609020000020004" pitchFamily="49" charset="0"/>
+                          <a:cs typeface="Cascadia Mono" panose="020B0609020000020004" pitchFamily="49" charset="0"/>
+                        </a:rPr>
+                        <a:t>*</a:t>
+                      </a:r>
+                      <a:endParaRPr kumimoji="1" lang="ja-JP" altLang="en-US" sz="1000">
+                        <a:latin typeface="Cascadia Mono" panose="020B0609020000020004" pitchFamily="49" charset="0"/>
+                        <a:ea typeface="BIZ UDゴシック" panose="020B0400000000000000" pitchFamily="49" charset="-128"/>
+                        <a:cs typeface="Cascadia Mono" panose="020B0609020000020004" pitchFamily="49" charset="0"/>
+                      </a:endParaRPr>
+                    </a:p>
+                  </a:txBody>
+                  <a:tcPr marL="137160" marR="137160" marT="137160" marB="137160">
+                    <a:lnL w="12700" cap="flat" cmpd="sng" algn="ctr">
+                      <a:solidFill>
+                        <a:schemeClr val="tx1"/>
+                      </a:solidFill>
+                      <a:prstDash val="solid"/>
+                      <a:round/>
+                      <a:headEnd type="none" w="med" len="med"/>
+                      <a:tailEnd type="none" w="med" len="med"/>
+                    </a:lnL>
+                    <a:lnR w="12700" cap="flat" cmpd="sng" algn="ctr">
+                      <a:solidFill>
+                        <a:schemeClr val="tx1"/>
+                      </a:solidFill>
+                      <a:prstDash val="solid"/>
+                      <a:round/>
+                      <a:headEnd type="none" w="med" len="med"/>
+                      <a:tailEnd type="none" w="med" len="med"/>
+                    </a:lnR>
+                    <a:lnT w="12700" cap="flat" cmpd="sng" algn="ctr">
+                      <a:solidFill>
+                        <a:schemeClr val="tx1"/>
+                      </a:solidFill>
+                      <a:prstDash val="solid"/>
+                      <a:round/>
+                      <a:headEnd type="none" w="med" len="med"/>
+                      <a:tailEnd type="none" w="med" len="med"/>
+                    </a:lnT>
+                    <a:lnB w="12700" cap="flat" cmpd="sng" algn="ctr">
+                      <a:solidFill>
+                        <a:schemeClr val="tx1"/>
+                      </a:solidFill>
+                      <a:prstDash val="solid"/>
+                      <a:round/>
+                      <a:headEnd type="none" w="med" len="med"/>
+                      <a:tailEnd type="none" w="med" len="med"/>
+                    </a:lnB>
+                    <a:solidFill>
+                      <a:schemeClr val="bg1"/>
+                    </a:solidFill>
+                  </a:tcPr>
+                </a:tc>
+                <a:tc>
+                  <a:txBody>
+                    <a:bodyPr/>
+                    <a:lstStyle/>
+                    <a:p>
+                      <a:r>
+                        <a:rPr kumimoji="1" lang="en-US" altLang="ja-JP" sz="1000">
+                          <a:latin typeface="Cascadia Mono" panose="020B0609020000020004" pitchFamily="49" charset="0"/>
+                          <a:ea typeface="Cascadia Mono" panose="020B0609020000020004" pitchFamily="49" charset="0"/>
+                          <a:cs typeface="Cascadia Mono" panose="020B0609020000020004" pitchFamily="49" charset="0"/>
                         </a:rPr>
                         <a:t>This directory contains generated outputs such as </a:t>
                       </a:r>
                       <a:r>
-                        <a:rPr kumimoji="1" lang="en-US" altLang="ja-JP" sz="1200" b="1" i="1">
+                        <a:rPr kumimoji="1" lang="en-US" altLang="ja-JP" sz="1000" b="1" i="1">
                           <a:solidFill>
                             <a:srgbClr val="FF0000"/>
                           </a:solidFill>
-                          <a:latin typeface="Cascadia Code SemiBold" panose="020B0609020000020004" pitchFamily="49" charset="0"/>
-                          <a:ea typeface="Cascadia Code SemiBold" panose="020B0609020000020004" pitchFamily="49" charset="0"/>
-                          <a:cs typeface="Cascadia Code SemiBold" panose="020B0609020000020004" pitchFamily="49" charset="0"/>
+                          <a:latin typeface="Cascadia Mono" panose="020B0609020000020004" pitchFamily="49" charset="0"/>
+                          <a:ea typeface="Cascadia Mono" panose="020B0609020000020004" pitchFamily="49" charset="0"/>
+                          <a:cs typeface="Cascadia Mono" panose="020B0609020000020004" pitchFamily="49" charset="0"/>
                         </a:rPr>
                         <a:t>*.txt</a:t>
                       </a:r>
                       <a:r>
-                        <a:rPr kumimoji="1" lang="en-US" altLang="ja-JP" sz="1200">
-                          <a:latin typeface="Cascadia Code SemiBold" panose="020B0609020000020004" pitchFamily="49" charset="0"/>
-                          <a:ea typeface="Cascadia Code SemiBold" panose="020B0609020000020004" pitchFamily="49" charset="0"/>
-                          <a:cs typeface="Cascadia Code SemiBold" panose="020B0609020000020004" pitchFamily="49" charset="0"/>
+                        <a:rPr kumimoji="1" lang="en-US" altLang="ja-JP" sz="1000">
+                          <a:latin typeface="Cascadia Mono" panose="020B0609020000020004" pitchFamily="49" charset="0"/>
+                          <a:ea typeface="Cascadia Mono" panose="020B0609020000020004" pitchFamily="49" charset="0"/>
+                          <a:cs typeface="Cascadia Mono" panose="020B0609020000020004" pitchFamily="49" charset="0"/>
                         </a:rPr>
                         <a:t>, </a:t>
                       </a:r>
                       <a:r>
-                        <a:rPr kumimoji="1" lang="en-US" altLang="ja-JP" sz="1200" b="1" i="1">
+                        <a:rPr kumimoji="1" lang="en-US" altLang="ja-JP" sz="1000" b="1" i="1">
                           <a:solidFill>
                             <a:srgbClr val="FF0000"/>
                           </a:solidFill>
-                          <a:latin typeface="Cascadia Code SemiBold" panose="020B0609020000020004" pitchFamily="49" charset="0"/>
-                          <a:ea typeface="Cascadia Code SemiBold" panose="020B0609020000020004" pitchFamily="49" charset="0"/>
-                          <a:cs typeface="Cascadia Code SemiBold" panose="020B0609020000020004" pitchFamily="49" charset="0"/>
+                          <a:latin typeface="Cascadia Mono" panose="020B0609020000020004" pitchFamily="49" charset="0"/>
+                          <a:ea typeface="Cascadia Mono" panose="020B0609020000020004" pitchFamily="49" charset="0"/>
+                          <a:cs typeface="Cascadia Mono" panose="020B0609020000020004" pitchFamily="49" charset="0"/>
                         </a:rPr>
                         <a:t>*.xlsx</a:t>
                       </a:r>
                       <a:r>
-                        <a:rPr kumimoji="1" lang="en-US" altLang="ja-JP" sz="1200">
-                          <a:latin typeface="Cascadia Code SemiBold" panose="020B0609020000020004" pitchFamily="49" charset="0"/>
-                          <a:ea typeface="Cascadia Code SemiBold" panose="020B0609020000020004" pitchFamily="49" charset="0"/>
-                          <a:cs typeface="Cascadia Code SemiBold" panose="020B0609020000020004" pitchFamily="49" charset="0"/>
+                        <a:rPr kumimoji="1" lang="en-US" altLang="ja-JP" sz="1000">
+                          <a:latin typeface="Cascadia Mono" panose="020B0609020000020004" pitchFamily="49" charset="0"/>
+                          <a:ea typeface="Cascadia Mono" panose="020B0609020000020004" pitchFamily="49" charset="0"/>
+                          <a:cs typeface="Cascadia Mono" panose="020B0609020000020004" pitchFamily="49" charset="0"/>
                         </a:rPr>
                         <a:t>, and </a:t>
                       </a:r>
                       <a:r>
-                        <a:rPr kumimoji="1" lang="en-US" altLang="ja-JP" sz="1200" b="1" i="1">
+                        <a:rPr kumimoji="1" lang="en-US" altLang="ja-JP" sz="1000" b="1" i="1">
                           <a:solidFill>
                             <a:srgbClr val="FF0000"/>
                           </a:solidFill>
-                          <a:latin typeface="Cascadia Code SemiBold" panose="020B0609020000020004" pitchFamily="49" charset="0"/>
-                          <a:ea typeface="Cascadia Code SemiBold" panose="020B0609020000020004" pitchFamily="49" charset="0"/>
-                          <a:cs typeface="Cascadia Code SemiBold" panose="020B0609020000020004" pitchFamily="49" charset="0"/>
+                          <a:latin typeface="Cascadia Mono" panose="020B0609020000020004" pitchFamily="49" charset="0"/>
+                          <a:ea typeface="Cascadia Mono" panose="020B0609020000020004" pitchFamily="49" charset="0"/>
+                          <a:cs typeface="Cascadia Mono" panose="020B0609020000020004" pitchFamily="49" charset="0"/>
                         </a:rPr>
                         <a:t>report.html</a:t>
                       </a:r>
                       <a:r>
-                        <a:rPr kumimoji="1" lang="en-US" altLang="ja-JP" sz="1200">
-                          <a:latin typeface="Cascadia Code SemiBold" panose="020B0609020000020004" pitchFamily="49" charset="0"/>
-                          <a:ea typeface="Cascadia Code SemiBold" panose="020B0609020000020004" pitchFamily="49" charset="0"/>
-                          <a:cs typeface="Cascadia Code SemiBold" panose="020B0609020000020004" pitchFamily="49" charset="0"/>
+                        <a:rPr kumimoji="1" lang="en-US" altLang="ja-JP" sz="1000">
+                          <a:latin typeface="Cascadia Mono" panose="020B0609020000020004" pitchFamily="49" charset="0"/>
+                          <a:ea typeface="Cascadia Mono" panose="020B0609020000020004" pitchFamily="49" charset="0"/>
+                          <a:cs typeface="Cascadia Mono" panose="020B0609020000020004" pitchFamily="49" charset="0"/>
                         </a:rPr>
                         <a:t>.</a:t>
                       </a:r>
@@ -3426,7 +4386,7 @@
     </p:spTree>
     <p:extLst>
       <p:ext uri="{BB962C8B-B14F-4D97-AF65-F5344CB8AC3E}">
-        <p14:creationId xmlns:p14="http://schemas.microsoft.com/office/powerpoint/2010/main" val="4036535481"/>
+        <p14:creationId xmlns:p14="http://schemas.microsoft.com/office/powerpoint/2010/main" val="785005719"/>
       </p:ext>
     </p:extLst>
   </p:cSld>
@@ -3437,1883 +4397,6 @@
 </file>
 
 <file path=ppt/slideLayouts/slideLayout4.xml><?xml version="1.0" encoding="utf-8"?>
-<p:sldLayout xmlns:a="http://schemas.openxmlformats.org/drawingml/2006/main" xmlns:r="http://schemas.openxmlformats.org/officeDocument/2006/relationships" xmlns:p="http://schemas.openxmlformats.org/presentationml/2006/main" preserve="1" userDrawn="1">
-  <p:cSld name="3_ユーザー設定レイアウト">
-    <p:spTree>
-      <p:nvGrpSpPr>
-        <p:cNvPr id="1" name=""/>
-        <p:cNvGrpSpPr/>
-        <p:nvPr/>
-      </p:nvGrpSpPr>
-      <p:grpSpPr>
-        <a:xfrm>
-          <a:off x="0" y="0"/>
-          <a:ext cx="0" cy="0"/>
-          <a:chOff x="0" y="0"/>
-          <a:chExt cx="0" cy="0"/>
-        </a:xfrm>
-      </p:grpSpPr>
-      <p:graphicFrame>
-        <p:nvGraphicFramePr>
-          <p:cNvPr id="3" name="表 2">
-            <a:extLst>
-              <a:ext uri="{FF2B5EF4-FFF2-40B4-BE49-F238E27FC236}">
-                <a16:creationId xmlns:a16="http://schemas.microsoft.com/office/drawing/2014/main" id="{65A5FB3B-4214-5ADE-71BD-09C9C68E8BB1}"/>
-              </a:ext>
-            </a:extLst>
-          </p:cNvPr>
-          <p:cNvGraphicFramePr>
-            <a:graphicFrameLocks noGrp="1"/>
-          </p:cNvGraphicFramePr>
-          <p:nvPr userDrawn="1">
-            <p:extLst>
-              <p:ext uri="{D42A27DB-BD31-4B8C-83A1-F6EECF244321}">
-                <p14:modId xmlns:p14="http://schemas.microsoft.com/office/powerpoint/2010/main" val="780707192"/>
-              </p:ext>
-            </p:extLst>
-          </p:nvPr>
-        </p:nvGraphicFramePr>
-        <p:xfrm>
-          <a:off x="765629" y="548640"/>
-          <a:ext cx="10660742" cy="5760720"/>
-        </p:xfrm>
-        <a:graphic>
-          <a:graphicData uri="http://schemas.openxmlformats.org/drawingml/2006/table">
-            <a:tbl>
-              <a:tblPr firstRow="1" bandRow="1">
-                <a:effectLst>
-                  <a:outerShdw blurRad="50800" dist="38100" dir="2700000" algn="tl" rotWithShape="0">
-                    <a:prstClr val="black">
-                      <a:alpha val="40000"/>
-                    </a:prstClr>
-                  </a:outerShdw>
-                </a:effectLst>
-                <a:tableStyleId>{5C22544A-7EE6-4342-B048-85BDC9FD1C3A}</a:tableStyleId>
-              </a:tblPr>
-              <a:tblGrid>
-                <a:gridCol w="2524913">
-                  <a:extLst>
-                    <a:ext uri="{9D8B030D-6E8A-4147-A177-3AD203B41FA5}">
-                      <a16:colId xmlns:a16="http://schemas.microsoft.com/office/drawing/2014/main" val="2777621706"/>
-                    </a:ext>
-                  </a:extLst>
-                </a:gridCol>
-                <a:gridCol w="8135829">
-                  <a:extLst>
-                    <a:ext uri="{9D8B030D-6E8A-4147-A177-3AD203B41FA5}">
-                      <a16:colId xmlns:a16="http://schemas.microsoft.com/office/drawing/2014/main" val="2952094520"/>
-                    </a:ext>
-                  </a:extLst>
-                </a:gridCol>
-              </a:tblGrid>
-              <a:tr h="0">
-                <a:tc>
-                  <a:txBody>
-                    <a:bodyPr/>
-                    <a:lstStyle/>
-                    <a:p>
-                      <a:r>
-                        <a:rPr kumimoji="1" lang="en-US" altLang="ja-JP" sz="1200">
-                          <a:solidFill>
-                            <a:schemeClr val="bg1"/>
-                          </a:solidFill>
-                          <a:latin typeface="Cascadia Code SemiBold" panose="020B0609020000020004" pitchFamily="49" charset="0"/>
-                          <a:ea typeface="Cascadia Code SemiBold" panose="020B0609020000020004" pitchFamily="49" charset="0"/>
-                          <a:cs typeface="Cascadia Code SemiBold" panose="020B0609020000020004" pitchFamily="49" charset="0"/>
-                        </a:rPr>
-                        <a:t>resource</a:t>
-                      </a:r>
-                      <a:endParaRPr kumimoji="1" lang="ja-JP" altLang="en-US" sz="1200">
-                        <a:solidFill>
-                          <a:schemeClr val="bg1"/>
-                        </a:solidFill>
-                        <a:latin typeface="Cascadia Code SemiBold" panose="020B0609020000020004" pitchFamily="49" charset="0"/>
-                        <a:ea typeface="BIZ UDゴシック" panose="020B0400000000000000" pitchFamily="49" charset="-128"/>
-                        <a:cs typeface="Cascadia Code SemiBold" panose="020B0609020000020004" pitchFamily="49" charset="0"/>
-                      </a:endParaRPr>
-                    </a:p>
-                  </a:txBody>
-                  <a:tcPr marL="137160" marR="137160" marT="137160" marB="137160">
-                    <a:lnL w="12700" cap="flat" cmpd="sng" algn="ctr">
-                      <a:solidFill>
-                        <a:schemeClr val="tx1"/>
-                      </a:solidFill>
-                      <a:prstDash val="solid"/>
-                      <a:round/>
-                      <a:headEnd type="none" w="med" len="med"/>
-                      <a:tailEnd type="none" w="med" len="med"/>
-                    </a:lnL>
-                    <a:lnR w="12700" cap="flat" cmpd="sng" algn="ctr">
-                      <a:solidFill>
-                        <a:schemeClr val="tx1"/>
-                      </a:solidFill>
-                      <a:prstDash val="solid"/>
-                      <a:round/>
-                      <a:headEnd type="none" w="med" len="med"/>
-                      <a:tailEnd type="none" w="med" len="med"/>
-                    </a:lnR>
-                    <a:lnT w="12700" cap="flat" cmpd="sng" algn="ctr">
-                      <a:solidFill>
-                        <a:schemeClr val="tx1"/>
-                      </a:solidFill>
-                      <a:prstDash val="solid"/>
-                      <a:round/>
-                      <a:headEnd type="none" w="med" len="med"/>
-                      <a:tailEnd type="none" w="med" len="med"/>
-                    </a:lnT>
-                    <a:lnB w="12700" cap="flat" cmpd="sng" algn="ctr">
-                      <a:solidFill>
-                        <a:schemeClr val="tx1"/>
-                      </a:solidFill>
-                      <a:prstDash val="solid"/>
-                      <a:round/>
-                      <a:headEnd type="none" w="med" len="med"/>
-                      <a:tailEnd type="none" w="med" len="med"/>
-                    </a:lnB>
-                    <a:solidFill>
-                      <a:schemeClr val="tx1">
-                        <a:lumMod val="65000"/>
-                        <a:lumOff val="35000"/>
-                      </a:schemeClr>
-                    </a:solidFill>
-                  </a:tcPr>
-                </a:tc>
-                <a:tc>
-                  <a:txBody>
-                    <a:bodyPr/>
-                    <a:lstStyle/>
-                    <a:p>
-                      <a:r>
-                        <a:rPr kumimoji="1" lang="en-US" altLang="ja-JP" sz="1200">
-                          <a:solidFill>
-                            <a:schemeClr val="bg1"/>
-                          </a:solidFill>
-                          <a:latin typeface="Cascadia Code SemiBold" panose="020B0609020000020004" pitchFamily="49" charset="0"/>
-                          <a:ea typeface="Cascadia Code SemiBold" panose="020B0609020000020004" pitchFamily="49" charset="0"/>
-                          <a:cs typeface="Cascadia Code SemiBold" panose="020B0609020000020004" pitchFamily="49" charset="0"/>
-                        </a:rPr>
-                        <a:t>note</a:t>
-                      </a:r>
-                      <a:endParaRPr kumimoji="1" lang="ja-JP" altLang="en-US" sz="1200">
-                        <a:solidFill>
-                          <a:schemeClr val="bg1"/>
-                        </a:solidFill>
-                        <a:latin typeface="Cascadia Code SemiBold" panose="020B0609020000020004" pitchFamily="49" charset="0"/>
-                        <a:ea typeface="BIZ UDゴシック" panose="020B0400000000000000" pitchFamily="49" charset="-128"/>
-                        <a:cs typeface="Cascadia Code SemiBold" panose="020B0609020000020004" pitchFamily="49" charset="0"/>
-                      </a:endParaRPr>
-                    </a:p>
-                  </a:txBody>
-                  <a:tcPr marL="137160" marR="137160" marT="137160" marB="137160">
-                    <a:lnL w="12700" cap="flat" cmpd="sng" algn="ctr">
-                      <a:solidFill>
-                        <a:schemeClr val="tx1"/>
-                      </a:solidFill>
-                      <a:prstDash val="solid"/>
-                      <a:round/>
-                      <a:headEnd type="none" w="med" len="med"/>
-                      <a:tailEnd type="none" w="med" len="med"/>
-                    </a:lnL>
-                    <a:lnR w="12700" cap="flat" cmpd="sng" algn="ctr">
-                      <a:solidFill>
-                        <a:schemeClr val="tx1"/>
-                      </a:solidFill>
-                      <a:prstDash val="solid"/>
-                      <a:round/>
-                      <a:headEnd type="none" w="med" len="med"/>
-                      <a:tailEnd type="none" w="med" len="med"/>
-                    </a:lnR>
-                    <a:lnT w="12700" cap="flat" cmpd="sng" algn="ctr">
-                      <a:solidFill>
-                        <a:schemeClr val="tx1"/>
-                      </a:solidFill>
-                      <a:prstDash val="solid"/>
-                      <a:round/>
-                      <a:headEnd type="none" w="med" len="med"/>
-                      <a:tailEnd type="none" w="med" len="med"/>
-                    </a:lnT>
-                    <a:lnB w="12700" cap="flat" cmpd="sng" algn="ctr">
-                      <a:solidFill>
-                        <a:schemeClr val="tx1"/>
-                      </a:solidFill>
-                      <a:prstDash val="solid"/>
-                      <a:round/>
-                      <a:headEnd type="none" w="med" len="med"/>
-                      <a:tailEnd type="none" w="med" len="med"/>
-                    </a:lnB>
-                    <a:solidFill>
-                      <a:schemeClr val="tx1">
-                        <a:lumMod val="65000"/>
-                        <a:lumOff val="35000"/>
-                      </a:schemeClr>
-                    </a:solidFill>
-                  </a:tcPr>
-                </a:tc>
-                <a:extLst>
-                  <a:ext uri="{0D108BD9-81ED-4DB2-BD59-A6C34878D82A}">
-                    <a16:rowId xmlns:a16="http://schemas.microsoft.com/office/drawing/2014/main" val="526102552"/>
-                  </a:ext>
-                </a:extLst>
-              </a:tr>
-              <a:tr h="0">
-                <a:tc>
-                  <a:txBody>
-                    <a:bodyPr/>
-                    <a:lstStyle/>
-                    <a:p>
-                      <a:r>
-                        <a:rPr kumimoji="1" lang="en-US" altLang="ja-JP" sz="1200">
-                          <a:latin typeface="Cascadia Code SemiBold" panose="020B0609020000020004" pitchFamily="49" charset="0"/>
-                          <a:ea typeface="Cascadia Code SemiBold" panose="020B0609020000020004" pitchFamily="49" charset="0"/>
-                          <a:cs typeface="Cascadia Code SemiBold" panose="020B0609020000020004" pitchFamily="49" charset="0"/>
-                        </a:rPr>
-                        <a:t>.env</a:t>
-                      </a:r>
-                      <a:endParaRPr kumimoji="1" lang="ja-JP" altLang="en-US" sz="1200">
-                        <a:latin typeface="Cascadia Code SemiBold" panose="020B0609020000020004" pitchFamily="49" charset="0"/>
-                        <a:ea typeface="BIZ UDゴシック" panose="020B0400000000000000" pitchFamily="49" charset="-128"/>
-                        <a:cs typeface="Cascadia Code SemiBold" panose="020B0609020000020004" pitchFamily="49" charset="0"/>
-                      </a:endParaRPr>
-                    </a:p>
-                  </a:txBody>
-                  <a:tcPr marL="137160" marR="137160" marT="137160" marB="137160">
-                    <a:lnL w="12700" cap="flat" cmpd="sng" algn="ctr">
-                      <a:solidFill>
-                        <a:schemeClr val="tx1"/>
-                      </a:solidFill>
-                      <a:prstDash val="solid"/>
-                      <a:round/>
-                      <a:headEnd type="none" w="med" len="med"/>
-                      <a:tailEnd type="none" w="med" len="med"/>
-                    </a:lnL>
-                    <a:lnR w="12700" cap="flat" cmpd="sng" algn="ctr">
-                      <a:solidFill>
-                        <a:schemeClr val="tx1"/>
-                      </a:solidFill>
-                      <a:prstDash val="solid"/>
-                      <a:round/>
-                      <a:headEnd type="none" w="med" len="med"/>
-                      <a:tailEnd type="none" w="med" len="med"/>
-                    </a:lnR>
-                    <a:lnT w="12700" cap="flat" cmpd="sng" algn="ctr">
-                      <a:solidFill>
-                        <a:schemeClr val="tx1"/>
-                      </a:solidFill>
-                      <a:prstDash val="solid"/>
-                      <a:round/>
-                      <a:headEnd type="none" w="med" len="med"/>
-                      <a:tailEnd type="none" w="med" len="med"/>
-                    </a:lnT>
-                    <a:lnB w="12700" cap="flat" cmpd="sng" algn="ctr">
-                      <a:solidFill>
-                        <a:schemeClr val="tx1"/>
-                      </a:solidFill>
-                      <a:prstDash val="solid"/>
-                      <a:round/>
-                      <a:headEnd type="none" w="med" len="med"/>
-                      <a:tailEnd type="none" w="med" len="med"/>
-                    </a:lnB>
-                    <a:solidFill>
-                      <a:schemeClr val="bg1"/>
-                    </a:solidFill>
-                  </a:tcPr>
-                </a:tc>
-                <a:tc>
-                  <a:txBody>
-                    <a:bodyPr/>
-                    <a:lstStyle/>
-                    <a:p>
-                      <a:r>
-                        <a:rPr kumimoji="1" lang="en-US" altLang="ja-JP" sz="1200">
-                          <a:latin typeface="Cascadia Code SemiBold" panose="020B0609020000020004" pitchFamily="49" charset="0"/>
-                          <a:ea typeface="Cascadia Code SemiBold" panose="020B0609020000020004" pitchFamily="49" charset="0"/>
-                          <a:cs typeface="Cascadia Code SemiBold" panose="020B0609020000020004" pitchFamily="49" charset="0"/>
-                        </a:rPr>
-                        <a:t>File containing LLM API credentials</a:t>
-                      </a:r>
-                    </a:p>
-                  </a:txBody>
-                  <a:tcPr marL="137160" marR="137160" marT="137160" marB="137160">
-                    <a:lnL w="12700" cap="flat" cmpd="sng" algn="ctr">
-                      <a:solidFill>
-                        <a:schemeClr val="tx1"/>
-                      </a:solidFill>
-                      <a:prstDash val="solid"/>
-                      <a:round/>
-                      <a:headEnd type="none" w="med" len="med"/>
-                      <a:tailEnd type="none" w="med" len="med"/>
-                    </a:lnL>
-                    <a:lnR w="12700" cap="flat" cmpd="sng" algn="ctr">
-                      <a:solidFill>
-                        <a:schemeClr val="tx1"/>
-                      </a:solidFill>
-                      <a:prstDash val="solid"/>
-                      <a:round/>
-                      <a:headEnd type="none" w="med" len="med"/>
-                      <a:tailEnd type="none" w="med" len="med"/>
-                    </a:lnR>
-                    <a:lnT w="12700" cap="flat" cmpd="sng" algn="ctr">
-                      <a:solidFill>
-                        <a:schemeClr val="tx1"/>
-                      </a:solidFill>
-                      <a:prstDash val="solid"/>
-                      <a:round/>
-                      <a:headEnd type="none" w="med" len="med"/>
-                      <a:tailEnd type="none" w="med" len="med"/>
-                    </a:lnT>
-                    <a:lnB w="12700" cap="flat" cmpd="sng" algn="ctr">
-                      <a:solidFill>
-                        <a:schemeClr val="tx1"/>
-                      </a:solidFill>
-                      <a:prstDash val="solid"/>
-                      <a:round/>
-                      <a:headEnd type="none" w="med" len="med"/>
-                      <a:tailEnd type="none" w="med" len="med"/>
-                    </a:lnB>
-                    <a:solidFill>
-                      <a:schemeClr val="bg1"/>
-                    </a:solidFill>
-                  </a:tcPr>
-                </a:tc>
-                <a:extLst>
-                  <a:ext uri="{0D108BD9-81ED-4DB2-BD59-A6C34878D82A}">
-                    <a16:rowId xmlns:a16="http://schemas.microsoft.com/office/drawing/2014/main" val="1660497218"/>
-                  </a:ext>
-                </a:extLst>
-              </a:tr>
-              <a:tr h="0">
-                <a:tc>
-                  <a:txBody>
-                    <a:bodyPr/>
-                    <a:lstStyle/>
-                    <a:p>
-                      <a:r>
-                        <a:rPr kumimoji="1" lang="en-US" altLang="ja-JP" sz="1200">
-                          <a:latin typeface="Cascadia Code SemiBold" panose="020B0609020000020004" pitchFamily="49" charset="0"/>
-                          <a:ea typeface="Cascadia Code SemiBold" panose="020B0609020000020004" pitchFamily="49" charset="0"/>
-                          <a:cs typeface="Cascadia Code SemiBold" panose="020B0609020000020004" pitchFamily="49" charset="0"/>
-                        </a:rPr>
-                        <a:t>llmj.py</a:t>
-                      </a:r>
-                      <a:endParaRPr kumimoji="1" lang="ja-JP" altLang="en-US" sz="1200">
-                        <a:latin typeface="Cascadia Code SemiBold" panose="020B0609020000020004" pitchFamily="49" charset="0"/>
-                        <a:ea typeface="BIZ UDゴシック" panose="020B0400000000000000" pitchFamily="49" charset="-128"/>
-                        <a:cs typeface="Cascadia Code SemiBold" panose="020B0609020000020004" pitchFamily="49" charset="0"/>
-                      </a:endParaRPr>
-                    </a:p>
-                  </a:txBody>
-                  <a:tcPr marL="137160" marR="137160" marT="137160" marB="137160">
-                    <a:lnL w="12700" cap="flat" cmpd="sng" algn="ctr">
-                      <a:solidFill>
-                        <a:schemeClr val="tx1"/>
-                      </a:solidFill>
-                      <a:prstDash val="solid"/>
-                      <a:round/>
-                      <a:headEnd type="none" w="med" len="med"/>
-                      <a:tailEnd type="none" w="med" len="med"/>
-                    </a:lnL>
-                    <a:lnR w="12700" cap="flat" cmpd="sng" algn="ctr">
-                      <a:solidFill>
-                        <a:schemeClr val="tx1"/>
-                      </a:solidFill>
-                      <a:prstDash val="solid"/>
-                      <a:round/>
-                      <a:headEnd type="none" w="med" len="med"/>
-                      <a:tailEnd type="none" w="med" len="med"/>
-                    </a:lnR>
-                    <a:lnT w="12700" cap="flat" cmpd="sng" algn="ctr">
-                      <a:solidFill>
-                        <a:schemeClr val="tx1"/>
-                      </a:solidFill>
-                      <a:prstDash val="solid"/>
-                      <a:round/>
-                      <a:headEnd type="none" w="med" len="med"/>
-                      <a:tailEnd type="none" w="med" len="med"/>
-                    </a:lnT>
-                    <a:lnB w="12700" cap="flat" cmpd="sng" algn="ctr">
-                      <a:solidFill>
-                        <a:schemeClr val="tx1"/>
-                      </a:solidFill>
-                      <a:prstDash val="solid"/>
-                      <a:round/>
-                      <a:headEnd type="none" w="med" len="med"/>
-                      <a:tailEnd type="none" w="med" len="med"/>
-                    </a:lnB>
-                    <a:solidFill>
-                      <a:schemeClr val="bg1"/>
-                    </a:solidFill>
-                  </a:tcPr>
-                </a:tc>
-                <a:tc>
-                  <a:txBody>
-                    <a:bodyPr/>
-                    <a:lstStyle/>
-                    <a:p>
-                      <a:r>
-                        <a:rPr kumimoji="1" lang="en-US" altLang="ja-JP" sz="1200">
-                          <a:latin typeface="Cascadia Code SemiBold" panose="020B0609020000020004" pitchFamily="49" charset="0"/>
-                          <a:ea typeface="Cascadia Code SemiBold" panose="020B0609020000020004" pitchFamily="49" charset="0"/>
-                          <a:cs typeface="Cascadia Code SemiBold" panose="020B0609020000020004" pitchFamily="49" charset="0"/>
-                        </a:rPr>
-                        <a:t>Common definitions and common processing</a:t>
-                      </a:r>
-                    </a:p>
-                  </a:txBody>
-                  <a:tcPr marL="137160" marR="137160" marT="137160" marB="137160">
-                    <a:lnL w="12700" cap="flat" cmpd="sng" algn="ctr">
-                      <a:solidFill>
-                        <a:schemeClr val="tx1"/>
-                      </a:solidFill>
-                      <a:prstDash val="solid"/>
-                      <a:round/>
-                      <a:headEnd type="none" w="med" len="med"/>
-                      <a:tailEnd type="none" w="med" len="med"/>
-                    </a:lnL>
-                    <a:lnR w="12700" cap="flat" cmpd="sng" algn="ctr">
-                      <a:solidFill>
-                        <a:schemeClr val="tx1"/>
-                      </a:solidFill>
-                      <a:prstDash val="solid"/>
-                      <a:round/>
-                      <a:headEnd type="none" w="med" len="med"/>
-                      <a:tailEnd type="none" w="med" len="med"/>
-                    </a:lnR>
-                    <a:lnT w="12700" cap="flat" cmpd="sng" algn="ctr">
-                      <a:solidFill>
-                        <a:schemeClr val="tx1"/>
-                      </a:solidFill>
-                      <a:prstDash val="solid"/>
-                      <a:round/>
-                      <a:headEnd type="none" w="med" len="med"/>
-                      <a:tailEnd type="none" w="med" len="med"/>
-                    </a:lnT>
-                    <a:lnB w="12700" cap="flat" cmpd="sng" algn="ctr">
-                      <a:solidFill>
-                        <a:schemeClr val="tx1"/>
-                      </a:solidFill>
-                      <a:prstDash val="solid"/>
-                      <a:round/>
-                      <a:headEnd type="none" w="med" len="med"/>
-                      <a:tailEnd type="none" w="med" len="med"/>
-                    </a:lnB>
-                    <a:solidFill>
-                      <a:schemeClr val="bg1"/>
-                    </a:solidFill>
-                  </a:tcPr>
-                </a:tc>
-                <a:extLst>
-                  <a:ext uri="{0D108BD9-81ED-4DB2-BD59-A6C34878D82A}">
-                    <a16:rowId xmlns:a16="http://schemas.microsoft.com/office/drawing/2014/main" val="1288496352"/>
-                  </a:ext>
-                </a:extLst>
-              </a:tr>
-              <a:tr h="0">
-                <a:tc>
-                  <a:txBody>
-                    <a:bodyPr/>
-                    <a:lstStyle/>
-                    <a:p>
-                      <a:pPr marL="0" marR="0" lvl="0" indent="0" algn="l" defTabSz="914400" rtl="0" eaLnBrk="1" fontAlgn="auto" latinLnBrk="0" hangingPunct="1">
-                        <a:lnSpc>
-                          <a:spcPct val="100000"/>
-                        </a:lnSpc>
-                        <a:spcBef>
-                          <a:spcPts val="0"/>
-                        </a:spcBef>
-                        <a:spcAft>
-                          <a:spcPts val="0"/>
-                        </a:spcAft>
-                        <a:buClrTx/>
-                        <a:buSzTx/>
-                        <a:buFontTx/>
-                        <a:buNone/>
-                        <a:tabLst/>
-                        <a:defRPr/>
-                      </a:pPr>
-                      <a:r>
-                        <a:rPr kumimoji="1" lang="en-US" altLang="ja-JP" sz="1200">
-                          <a:latin typeface="Cascadia Code SemiBold" panose="020B0609020000020004" pitchFamily="49" charset="0"/>
-                          <a:ea typeface="Cascadia Code SemiBold" panose="020B0609020000020004" pitchFamily="49" charset="0"/>
-                          <a:cs typeface="Cascadia Code SemiBold" panose="020B0609020000020004" pitchFamily="49" charset="0"/>
-                        </a:rPr>
-                        <a:t>llmj-generate.py</a:t>
-                      </a:r>
-                      <a:endParaRPr kumimoji="1" lang="ja-JP" altLang="en-US" sz="1200">
-                        <a:latin typeface="Cascadia Code SemiBold" panose="020B0609020000020004" pitchFamily="49" charset="0"/>
-                        <a:ea typeface="BIZ UDゴシック" panose="020B0400000000000000" pitchFamily="49" charset="-128"/>
-                        <a:cs typeface="Cascadia Code SemiBold" panose="020B0609020000020004" pitchFamily="49" charset="0"/>
-                      </a:endParaRPr>
-                    </a:p>
-                  </a:txBody>
-                  <a:tcPr marL="137160" marR="137160" marT="137160" marB="137160">
-                    <a:lnL w="12700" cap="flat" cmpd="sng" algn="ctr">
-                      <a:solidFill>
-                        <a:schemeClr val="tx1"/>
-                      </a:solidFill>
-                      <a:prstDash val="solid"/>
-                      <a:round/>
-                      <a:headEnd type="none" w="med" len="med"/>
-                      <a:tailEnd type="none" w="med" len="med"/>
-                    </a:lnL>
-                    <a:lnR w="12700" cap="flat" cmpd="sng" algn="ctr">
-                      <a:solidFill>
-                        <a:schemeClr val="tx1"/>
-                      </a:solidFill>
-                      <a:prstDash val="solid"/>
-                      <a:round/>
-                      <a:headEnd type="none" w="med" len="med"/>
-                      <a:tailEnd type="none" w="med" len="med"/>
-                    </a:lnR>
-                    <a:lnT w="12700" cap="flat" cmpd="sng" algn="ctr">
-                      <a:solidFill>
-                        <a:schemeClr val="tx1"/>
-                      </a:solidFill>
-                      <a:prstDash val="solid"/>
-                      <a:round/>
-                      <a:headEnd type="none" w="med" len="med"/>
-                      <a:tailEnd type="none" w="med" len="med"/>
-                    </a:lnT>
-                    <a:lnB w="12700" cap="flat" cmpd="sng" algn="ctr">
-                      <a:solidFill>
-                        <a:schemeClr val="tx1"/>
-                      </a:solidFill>
-                      <a:prstDash val="solid"/>
-                      <a:round/>
-                      <a:headEnd type="none" w="med" len="med"/>
-                      <a:tailEnd type="none" w="med" len="med"/>
-                    </a:lnB>
-                    <a:solidFill>
-                      <a:schemeClr val="bg1"/>
-                    </a:solidFill>
-                  </a:tcPr>
-                </a:tc>
-                <a:tc>
-                  <a:txBody>
-                    <a:bodyPr/>
-                    <a:lstStyle/>
-                    <a:p>
-                      <a:pPr marL="0" marR="0" lvl="0" indent="0" algn="l" defTabSz="914400" rtl="0" eaLnBrk="1" fontAlgn="auto" latinLnBrk="0" hangingPunct="1">
-                        <a:lnSpc>
-                          <a:spcPct val="100000"/>
-                        </a:lnSpc>
-                        <a:spcBef>
-                          <a:spcPts val="0"/>
-                        </a:spcBef>
-                        <a:spcAft>
-                          <a:spcPts val="0"/>
-                        </a:spcAft>
-                        <a:buClrTx/>
-                        <a:buSzTx/>
-                        <a:buFontTx/>
-                        <a:buNone/>
-                        <a:tabLst/>
-                        <a:defRPr/>
-                      </a:pPr>
-                      <a:r>
-                        <a:rPr kumimoji="1" lang="en-US" altLang="ja-JP" sz="1200">
-                          <a:latin typeface="Cascadia Code SemiBold" panose="020B0609020000020004" pitchFamily="49" charset="0"/>
-                          <a:ea typeface="Cascadia Code SemiBold" panose="020B0609020000020004" pitchFamily="49" charset="0"/>
-                          <a:cs typeface="Cascadia Code SemiBold" panose="020B0609020000020004" pitchFamily="49" charset="0"/>
-                        </a:rPr>
-                        <a:t>This SCRIPT uses </a:t>
-                      </a:r>
-                      <a:r>
-                        <a:rPr kumimoji="1" lang="en-US" altLang="ja-JP" sz="1200" b="1" i="1">
-                          <a:solidFill>
-                            <a:srgbClr val="FF0000"/>
-                          </a:solidFill>
-                          <a:latin typeface="Cascadia Code SemiBold" panose="020B0609020000020004" pitchFamily="49" charset="0"/>
-                          <a:ea typeface="Cascadia Code SemiBold" panose="020B0609020000020004" pitchFamily="49" charset="0"/>
-                          <a:cs typeface="Cascadia Code SemiBold" panose="020B0609020000020004" pitchFamily="49" charset="0"/>
-                        </a:rPr>
-                        <a:t>work/*.txt</a:t>
-                      </a:r>
-                      <a:r>
-                        <a:rPr kumimoji="1" lang="en-US" altLang="ja-JP" sz="1200">
-                          <a:latin typeface="Cascadia Code SemiBold" panose="020B0609020000020004" pitchFamily="49" charset="0"/>
-                          <a:ea typeface="Cascadia Code SemiBold" panose="020B0609020000020004" pitchFamily="49" charset="0"/>
-                          <a:cs typeface="Cascadia Code SemiBold" panose="020B0609020000020004" pitchFamily="49" charset="0"/>
-                        </a:rPr>
-                        <a:t> to transform </a:t>
-                      </a:r>
-                      <a:r>
-                        <a:rPr kumimoji="1" lang="en-US" altLang="ja-JP" sz="1200" b="1" i="1">
-                          <a:solidFill>
-                            <a:srgbClr val="FF0000"/>
-                          </a:solidFill>
-                          <a:latin typeface="Cascadia Code SemiBold" panose="020B0609020000020004" pitchFamily="49" charset="0"/>
-                          <a:ea typeface="Cascadia Code SemiBold" panose="020B0609020000020004" pitchFamily="49" charset="0"/>
-                          <a:cs typeface="Cascadia Code SemiBold" panose="020B0609020000020004" pitchFamily="49" charset="0"/>
-                        </a:rPr>
-                        <a:t>source/*.txt</a:t>
-                      </a:r>
-                      <a:r>
-                        <a:rPr kumimoji="1" lang="en-US" altLang="ja-JP" sz="1200">
-                          <a:latin typeface="Cascadia Code SemiBold" panose="020B0609020000020004" pitchFamily="49" charset="0"/>
-                          <a:ea typeface="Cascadia Code SemiBold" panose="020B0609020000020004" pitchFamily="49" charset="0"/>
-                          <a:cs typeface="Cascadia Code SemiBold" panose="020B0609020000020004" pitchFamily="49" charset="0"/>
-                        </a:rPr>
-                        <a:t> and generates </a:t>
-                      </a:r>
-                      <a:r>
-                        <a:rPr kumimoji="1" lang="en-US" altLang="ja-JP" sz="1200" b="1" i="1">
-                          <a:solidFill>
-                            <a:srgbClr val="FF0000"/>
-                          </a:solidFill>
-                          <a:latin typeface="Cascadia Code SemiBold" panose="020B0609020000020004" pitchFamily="49" charset="0"/>
-                          <a:ea typeface="Cascadia Code SemiBold" panose="020B0609020000020004" pitchFamily="49" charset="0"/>
-                          <a:cs typeface="Cascadia Code SemiBold" panose="020B0609020000020004" pitchFamily="49" charset="0"/>
-                        </a:rPr>
-                        <a:t>work/*.xlsx</a:t>
-                      </a:r>
-                      <a:r>
-                        <a:rPr kumimoji="1" lang="en-US" altLang="ja-JP" sz="1200">
-                          <a:latin typeface="Cascadia Code SemiBold" panose="020B0609020000020004" pitchFamily="49" charset="0"/>
-                          <a:ea typeface="Cascadia Code SemiBold" panose="020B0609020000020004" pitchFamily="49" charset="0"/>
-                          <a:cs typeface="Cascadia Code SemiBold" panose="020B0609020000020004" pitchFamily="49" charset="0"/>
-                        </a:rPr>
-                        <a:t>.</a:t>
-                      </a:r>
-                    </a:p>
-                  </a:txBody>
-                  <a:tcPr marL="137160" marR="137160" marT="137160" marB="137160">
-                    <a:lnL w="12700" cap="flat" cmpd="sng" algn="ctr">
-                      <a:solidFill>
-                        <a:schemeClr val="tx1"/>
-                      </a:solidFill>
-                      <a:prstDash val="solid"/>
-                      <a:round/>
-                      <a:headEnd type="none" w="med" len="med"/>
-                      <a:tailEnd type="none" w="med" len="med"/>
-                    </a:lnL>
-                    <a:lnR w="12700" cap="flat" cmpd="sng" algn="ctr">
-                      <a:solidFill>
-                        <a:schemeClr val="tx1"/>
-                      </a:solidFill>
-                      <a:prstDash val="solid"/>
-                      <a:round/>
-                      <a:headEnd type="none" w="med" len="med"/>
-                      <a:tailEnd type="none" w="med" len="med"/>
-                    </a:lnR>
-                    <a:lnT w="12700" cap="flat" cmpd="sng" algn="ctr">
-                      <a:solidFill>
-                        <a:schemeClr val="tx1"/>
-                      </a:solidFill>
-                      <a:prstDash val="solid"/>
-                      <a:round/>
-                      <a:headEnd type="none" w="med" len="med"/>
-                      <a:tailEnd type="none" w="med" len="med"/>
-                    </a:lnT>
-                    <a:lnB w="12700" cap="flat" cmpd="sng" algn="ctr">
-                      <a:solidFill>
-                        <a:schemeClr val="tx1"/>
-                      </a:solidFill>
-                      <a:prstDash val="solid"/>
-                      <a:round/>
-                      <a:headEnd type="none" w="med" len="med"/>
-                      <a:tailEnd type="none" w="med" len="med"/>
-                    </a:lnB>
-                    <a:solidFill>
-                      <a:schemeClr val="bg1"/>
-                    </a:solidFill>
-                  </a:tcPr>
-                </a:tc>
-                <a:extLst>
-                  <a:ext uri="{0D108BD9-81ED-4DB2-BD59-A6C34878D82A}">
-                    <a16:rowId xmlns:a16="http://schemas.microsoft.com/office/drawing/2014/main" val="2978836238"/>
-                  </a:ext>
-                </a:extLst>
-              </a:tr>
-              <a:tr h="0">
-                <a:tc>
-                  <a:txBody>
-                    <a:bodyPr/>
-                    <a:lstStyle/>
-                    <a:p>
-                      <a:r>
-                        <a:rPr kumimoji="1" lang="en-US" altLang="ja-JP" sz="1200">
-                          <a:latin typeface="Cascadia Code SemiBold" panose="020B0609020000020004" pitchFamily="49" charset="0"/>
-                          <a:ea typeface="Cascadia Code SemiBold" panose="020B0609020000020004" pitchFamily="49" charset="0"/>
-                          <a:cs typeface="Cascadia Code SemiBold" panose="020B0609020000020004" pitchFamily="49" charset="0"/>
-                        </a:rPr>
-                        <a:t>llmj-judge.py</a:t>
-                      </a:r>
-                      <a:endParaRPr kumimoji="1" lang="ja-JP" altLang="en-US" sz="1200">
-                        <a:latin typeface="Cascadia Code SemiBold" panose="020B0609020000020004" pitchFamily="49" charset="0"/>
-                        <a:ea typeface="BIZ UDゴシック" panose="020B0400000000000000" pitchFamily="49" charset="-128"/>
-                        <a:cs typeface="Cascadia Code SemiBold" panose="020B0609020000020004" pitchFamily="49" charset="0"/>
-                      </a:endParaRPr>
-                    </a:p>
-                  </a:txBody>
-                  <a:tcPr marL="137160" marR="137160" marT="137160" marB="137160">
-                    <a:lnL w="12700" cap="flat" cmpd="sng" algn="ctr">
-                      <a:solidFill>
-                        <a:schemeClr val="tx1"/>
-                      </a:solidFill>
-                      <a:prstDash val="solid"/>
-                      <a:round/>
-                      <a:headEnd type="none" w="med" len="med"/>
-                      <a:tailEnd type="none" w="med" len="med"/>
-                    </a:lnL>
-                    <a:lnR w="12700" cap="flat" cmpd="sng" algn="ctr">
-                      <a:solidFill>
-                        <a:schemeClr val="tx1"/>
-                      </a:solidFill>
-                      <a:prstDash val="solid"/>
-                      <a:round/>
-                      <a:headEnd type="none" w="med" len="med"/>
-                      <a:tailEnd type="none" w="med" len="med"/>
-                    </a:lnR>
-                    <a:lnT w="12700" cap="flat" cmpd="sng" algn="ctr">
-                      <a:solidFill>
-                        <a:schemeClr val="tx1"/>
-                      </a:solidFill>
-                      <a:prstDash val="solid"/>
-                      <a:round/>
-                      <a:headEnd type="none" w="med" len="med"/>
-                      <a:tailEnd type="none" w="med" len="med"/>
-                    </a:lnT>
-                    <a:lnB w="12700" cap="flat" cmpd="sng" algn="ctr">
-                      <a:solidFill>
-                        <a:schemeClr val="tx1"/>
-                      </a:solidFill>
-                      <a:prstDash val="solid"/>
-                      <a:round/>
-                      <a:headEnd type="none" w="med" len="med"/>
-                      <a:tailEnd type="none" w="med" len="med"/>
-                    </a:lnB>
-                    <a:solidFill>
-                      <a:schemeClr val="bg1"/>
-                    </a:solidFill>
-                  </a:tcPr>
-                </a:tc>
-                <a:tc>
-                  <a:txBody>
-                    <a:bodyPr/>
-                    <a:lstStyle/>
-                    <a:p>
-                      <a:r>
-                        <a:rPr kumimoji="1" lang="en-US" altLang="ja-JP" sz="1200">
-                          <a:latin typeface="Cascadia Code SemiBold" panose="020B0609020000020004" pitchFamily="49" charset="0"/>
-                          <a:ea typeface="Cascadia Code SemiBold" panose="020B0609020000020004" pitchFamily="49" charset="0"/>
-                          <a:cs typeface="Cascadia Code SemiBold" panose="020B0609020000020004" pitchFamily="49" charset="0"/>
-                        </a:rPr>
-                        <a:t>This SCRIPT evaluates the contents of </a:t>
-                      </a:r>
-                      <a:r>
-                        <a:rPr kumimoji="1" lang="en-US" altLang="ja-JP" sz="1200" b="1" i="1">
-                          <a:solidFill>
-                            <a:srgbClr val="FF0000"/>
-                          </a:solidFill>
-                          <a:latin typeface="Cascadia Code SemiBold" panose="020B0609020000020004" pitchFamily="49" charset="0"/>
-                          <a:ea typeface="Cascadia Code SemiBold" panose="020B0609020000020004" pitchFamily="49" charset="0"/>
-                          <a:cs typeface="Cascadia Code SemiBold" panose="020B0609020000020004" pitchFamily="49" charset="0"/>
-                        </a:rPr>
-                        <a:t>work/*.xlsx</a:t>
-                      </a:r>
-                      <a:r>
-                        <a:rPr kumimoji="1" lang="en-US" altLang="ja-JP" sz="1200">
-                          <a:latin typeface="Cascadia Code SemiBold" panose="020B0609020000020004" pitchFamily="49" charset="0"/>
-                          <a:ea typeface="Cascadia Code SemiBold" panose="020B0609020000020004" pitchFamily="49" charset="0"/>
-                          <a:cs typeface="Cascadia Code SemiBold" panose="020B0609020000020004" pitchFamily="49" charset="0"/>
-                        </a:rPr>
-                        <a:t> against </a:t>
-                      </a:r>
-                      <a:r>
-                        <a:rPr kumimoji="1" lang="en-US" altLang="ja-JP" sz="1200" b="1" i="1">
-                          <a:solidFill>
-                            <a:srgbClr val="FF0000"/>
-                          </a:solidFill>
-                          <a:latin typeface="Cascadia Code SemiBold" panose="020B0609020000020004" pitchFamily="49" charset="0"/>
-                          <a:ea typeface="Cascadia Code SemiBold" panose="020B0609020000020004" pitchFamily="49" charset="0"/>
-                          <a:cs typeface="Cascadia Code SemiBold" panose="020B0609020000020004" pitchFamily="49" charset="0"/>
-                        </a:rPr>
-                        <a:t>rubric/*.json</a:t>
-                      </a:r>
-                      <a:r>
-                        <a:rPr kumimoji="1" lang="en-US" altLang="ja-JP" sz="1200">
-                          <a:latin typeface="Cascadia Code SemiBold" panose="020B0609020000020004" pitchFamily="49" charset="0"/>
-                          <a:ea typeface="Cascadia Code SemiBold" panose="020B0609020000020004" pitchFamily="49" charset="0"/>
-                          <a:cs typeface="Cascadia Code SemiBold" panose="020B0609020000020004" pitchFamily="49" charset="0"/>
-                        </a:rPr>
-                        <a:t> and writes the results to </a:t>
-                      </a:r>
-                      <a:r>
-                        <a:rPr kumimoji="1" lang="en-US" altLang="ja-JP" sz="1200" b="1" i="1">
-                          <a:solidFill>
-                            <a:srgbClr val="FF0000"/>
-                          </a:solidFill>
-                          <a:latin typeface="Cascadia Code SemiBold" panose="020B0609020000020004" pitchFamily="49" charset="0"/>
-                          <a:ea typeface="Cascadia Code SemiBold" panose="020B0609020000020004" pitchFamily="49" charset="0"/>
-                          <a:cs typeface="Cascadia Code SemiBold" panose="020B0609020000020004" pitchFamily="49" charset="0"/>
-                        </a:rPr>
-                        <a:t>work/*.xlsx</a:t>
-                      </a:r>
-                      <a:r>
-                        <a:rPr kumimoji="1" lang="en-US" altLang="ja-JP" sz="1200" b="0" i="0">
-                          <a:solidFill>
-                            <a:schemeClr val="tx1"/>
-                          </a:solidFill>
-                          <a:latin typeface="Cascadia Code SemiBold" panose="020B0609020000020004" pitchFamily="49" charset="0"/>
-                          <a:ea typeface="Cascadia Code SemiBold" panose="020B0609020000020004" pitchFamily="49" charset="0"/>
-                          <a:cs typeface="Cascadia Code SemiBold" panose="020B0609020000020004" pitchFamily="49" charset="0"/>
-                        </a:rPr>
-                        <a:t>, and </a:t>
-                      </a:r>
-                      <a:r>
-                        <a:rPr kumimoji="1" lang="en-US" altLang="ja-JP" sz="1200">
-                          <a:latin typeface="Cascadia Code SemiBold" panose="020B0609020000020004" pitchFamily="49" charset="0"/>
-                          <a:ea typeface="Cascadia Code SemiBold" panose="020B0609020000020004" pitchFamily="49" charset="0"/>
-                          <a:cs typeface="Cascadia Code SemiBold" panose="020B0609020000020004" pitchFamily="49" charset="0"/>
-                        </a:rPr>
-                        <a:t>generates </a:t>
-                      </a:r>
-                      <a:r>
-                        <a:rPr kumimoji="1" lang="en-US" altLang="ja-JP" sz="1200">
-                          <a:solidFill>
-                            <a:srgbClr val="FF0000"/>
-                          </a:solidFill>
-                          <a:latin typeface="Cascadia Code SemiBold" panose="020B0609020000020004" pitchFamily="49" charset="0"/>
-                          <a:ea typeface="Cascadia Code SemiBold" panose="020B0609020000020004" pitchFamily="49" charset="0"/>
-                          <a:cs typeface="Cascadia Code SemiBold" panose="020B0609020000020004" pitchFamily="49" charset="0"/>
-                        </a:rPr>
-                        <a:t>report.html</a:t>
-                      </a:r>
-                      <a:r>
-                        <a:rPr kumimoji="1" lang="en-US" altLang="ja-JP" sz="1200">
-                          <a:latin typeface="Cascadia Code SemiBold" panose="020B0609020000020004" pitchFamily="49" charset="0"/>
-                          <a:ea typeface="Cascadia Code SemiBold" panose="020B0609020000020004" pitchFamily="49" charset="0"/>
-                          <a:cs typeface="Cascadia Code SemiBold" panose="020B0609020000020004" pitchFamily="49" charset="0"/>
-                        </a:rPr>
-                        <a:t> based on it.</a:t>
-                      </a:r>
-                    </a:p>
-                  </a:txBody>
-                  <a:tcPr marL="137160" marR="137160" marT="137160" marB="137160">
-                    <a:lnL w="12700" cap="flat" cmpd="sng" algn="ctr">
-                      <a:solidFill>
-                        <a:schemeClr val="tx1"/>
-                      </a:solidFill>
-                      <a:prstDash val="solid"/>
-                      <a:round/>
-                      <a:headEnd type="none" w="med" len="med"/>
-                      <a:tailEnd type="none" w="med" len="med"/>
-                    </a:lnL>
-                    <a:lnR w="12700" cap="flat" cmpd="sng" algn="ctr">
-                      <a:solidFill>
-                        <a:schemeClr val="tx1"/>
-                      </a:solidFill>
-                      <a:prstDash val="solid"/>
-                      <a:round/>
-                      <a:headEnd type="none" w="med" len="med"/>
-                      <a:tailEnd type="none" w="med" len="med"/>
-                    </a:lnR>
-                    <a:lnT w="12700" cap="flat" cmpd="sng" algn="ctr">
-                      <a:solidFill>
-                        <a:schemeClr val="tx1"/>
-                      </a:solidFill>
-                      <a:prstDash val="solid"/>
-                      <a:round/>
-                      <a:headEnd type="none" w="med" len="med"/>
-                      <a:tailEnd type="none" w="med" len="med"/>
-                    </a:lnT>
-                    <a:lnB w="12700" cap="flat" cmpd="sng" algn="ctr">
-                      <a:solidFill>
-                        <a:schemeClr val="tx1"/>
-                      </a:solidFill>
-                      <a:prstDash val="solid"/>
-                      <a:round/>
-                      <a:headEnd type="none" w="med" len="med"/>
-                      <a:tailEnd type="none" w="med" len="med"/>
-                    </a:lnB>
-                    <a:solidFill>
-                      <a:schemeClr val="bg1"/>
-                    </a:solidFill>
-                  </a:tcPr>
-                </a:tc>
-                <a:extLst>
-                  <a:ext uri="{0D108BD9-81ED-4DB2-BD59-A6C34878D82A}">
-                    <a16:rowId xmlns:a16="http://schemas.microsoft.com/office/drawing/2014/main" val="4198762670"/>
-                  </a:ext>
-                </a:extLst>
-              </a:tr>
-              <a:tr h="417498">
-                <a:tc>
-                  <a:txBody>
-                    <a:bodyPr/>
-                    <a:lstStyle/>
-                    <a:p>
-                      <a:r>
-                        <a:rPr kumimoji="1" lang="en-US" altLang="ja-JP" sz="1200">
-                          <a:latin typeface="Cascadia Code SemiBold" panose="020B0609020000020004" pitchFamily="49" charset="0"/>
-                          <a:ea typeface="Cascadia Code SemiBold" panose="020B0609020000020004" pitchFamily="49" charset="0"/>
-                          <a:cs typeface="Cascadia Code SemiBold" panose="020B0609020000020004" pitchFamily="49" charset="0"/>
-                        </a:rPr>
-                        <a:t>rubric/*.json</a:t>
-                      </a:r>
-                      <a:endParaRPr kumimoji="1" lang="ja-JP" altLang="en-US" sz="1200">
-                        <a:latin typeface="Cascadia Code SemiBold" panose="020B0609020000020004" pitchFamily="49" charset="0"/>
-                        <a:ea typeface="BIZ UDゴシック" panose="020B0400000000000000" pitchFamily="49" charset="-128"/>
-                        <a:cs typeface="Cascadia Code SemiBold" panose="020B0609020000020004" pitchFamily="49" charset="0"/>
-                      </a:endParaRPr>
-                    </a:p>
-                  </a:txBody>
-                  <a:tcPr marL="137160" marR="137160" marT="137160" marB="137160">
-                    <a:lnL w="12700" cap="flat" cmpd="sng" algn="ctr">
-                      <a:solidFill>
-                        <a:schemeClr val="tx1"/>
-                      </a:solidFill>
-                      <a:prstDash val="solid"/>
-                      <a:round/>
-                      <a:headEnd type="none" w="med" len="med"/>
-                      <a:tailEnd type="none" w="med" len="med"/>
-                    </a:lnL>
-                    <a:lnR w="12700" cap="flat" cmpd="sng" algn="ctr">
-                      <a:solidFill>
-                        <a:schemeClr val="tx1"/>
-                      </a:solidFill>
-                      <a:prstDash val="solid"/>
-                      <a:round/>
-                      <a:headEnd type="none" w="med" len="med"/>
-                      <a:tailEnd type="none" w="med" len="med"/>
-                    </a:lnR>
-                    <a:lnT w="12700" cap="flat" cmpd="sng" algn="ctr">
-                      <a:solidFill>
-                        <a:schemeClr val="tx1"/>
-                      </a:solidFill>
-                      <a:prstDash val="solid"/>
-                      <a:round/>
-                      <a:headEnd type="none" w="med" len="med"/>
-                      <a:tailEnd type="none" w="med" len="med"/>
-                    </a:lnT>
-                    <a:lnB w="12700" cap="flat" cmpd="sng" algn="ctr">
-                      <a:solidFill>
-                        <a:schemeClr val="tx1"/>
-                      </a:solidFill>
-                      <a:prstDash val="solid"/>
-                      <a:round/>
-                      <a:headEnd type="none" w="med" len="med"/>
-                      <a:tailEnd type="none" w="med" len="med"/>
-                    </a:lnB>
-                    <a:solidFill>
-                      <a:schemeClr val="bg1"/>
-                    </a:solidFill>
-                  </a:tcPr>
-                </a:tc>
-                <a:tc>
-                  <a:txBody>
-                    <a:bodyPr/>
-                    <a:lstStyle/>
-                    <a:p>
-                      <a:r>
-                        <a:rPr kumimoji="1" lang="en-US" altLang="ja-JP" sz="1200">
-                          <a:latin typeface="Cascadia Code SemiBold" panose="020B0609020000020004" pitchFamily="49" charset="0"/>
-                          <a:ea typeface="Cascadia Code SemiBold" panose="020B0609020000020004" pitchFamily="49" charset="0"/>
-                          <a:cs typeface="Cascadia Code SemiBold" panose="020B0609020000020004" pitchFamily="49" charset="0"/>
-                        </a:rPr>
-                        <a:t>This JSON defines the criteria used for both initial prompt template generation and LLM-as-a-Judge evaluation.</a:t>
-                      </a:r>
-                    </a:p>
-                  </a:txBody>
-                  <a:tcPr marL="137160" marR="137160" marT="137160" marB="137160">
-                    <a:lnL w="12700" cap="flat" cmpd="sng" algn="ctr">
-                      <a:solidFill>
-                        <a:schemeClr val="tx1"/>
-                      </a:solidFill>
-                      <a:prstDash val="solid"/>
-                      <a:round/>
-                      <a:headEnd type="none" w="med" len="med"/>
-                      <a:tailEnd type="none" w="med" len="med"/>
-                    </a:lnL>
-                    <a:lnR w="12700" cap="flat" cmpd="sng" algn="ctr">
-                      <a:solidFill>
-                        <a:schemeClr val="tx1"/>
-                      </a:solidFill>
-                      <a:prstDash val="solid"/>
-                      <a:round/>
-                      <a:headEnd type="none" w="med" len="med"/>
-                      <a:tailEnd type="none" w="med" len="med"/>
-                    </a:lnR>
-                    <a:lnT w="12700" cap="flat" cmpd="sng" algn="ctr">
-                      <a:solidFill>
-                        <a:schemeClr val="tx1"/>
-                      </a:solidFill>
-                      <a:prstDash val="solid"/>
-                      <a:round/>
-                      <a:headEnd type="none" w="med" len="med"/>
-                      <a:tailEnd type="none" w="med" len="med"/>
-                    </a:lnT>
-                    <a:lnB w="12700" cap="flat" cmpd="sng" algn="ctr">
-                      <a:solidFill>
-                        <a:schemeClr val="tx1"/>
-                      </a:solidFill>
-                      <a:prstDash val="solid"/>
-                      <a:round/>
-                      <a:headEnd type="none" w="med" len="med"/>
-                      <a:tailEnd type="none" w="med" len="med"/>
-                    </a:lnB>
-                    <a:solidFill>
-                      <a:schemeClr val="bg1"/>
-                    </a:solidFill>
-                  </a:tcPr>
-                </a:tc>
-                <a:extLst>
-                  <a:ext uri="{0D108BD9-81ED-4DB2-BD59-A6C34878D82A}">
-                    <a16:rowId xmlns:a16="http://schemas.microsoft.com/office/drawing/2014/main" val="1707978084"/>
-                  </a:ext>
-                </a:extLst>
-              </a:tr>
-              <a:tr h="0">
-                <a:tc>
-                  <a:txBody>
-                    <a:bodyPr/>
-                    <a:lstStyle/>
-                    <a:p>
-                      <a:r>
-                        <a:rPr kumimoji="1" lang="en-US" altLang="ja-JP" sz="1200">
-                          <a:latin typeface="Cascadia Code SemiBold" panose="020B0609020000020004" pitchFamily="49" charset="0"/>
-                          <a:ea typeface="Cascadia Code SemiBold" panose="020B0609020000020004" pitchFamily="49" charset="0"/>
-                          <a:cs typeface="Cascadia Code SemiBold" panose="020B0609020000020004" pitchFamily="49" charset="0"/>
-                        </a:rPr>
-                        <a:t>source/*.txt</a:t>
-                      </a:r>
-                      <a:endParaRPr kumimoji="1" lang="ja-JP" altLang="en-US" sz="1200">
-                        <a:latin typeface="Cascadia Code SemiBold" panose="020B0609020000020004" pitchFamily="49" charset="0"/>
-                        <a:ea typeface="BIZ UDゴシック" panose="020B0400000000000000" pitchFamily="49" charset="-128"/>
-                        <a:cs typeface="Cascadia Code SemiBold" panose="020B0609020000020004" pitchFamily="49" charset="0"/>
-                      </a:endParaRPr>
-                    </a:p>
-                  </a:txBody>
-                  <a:tcPr marL="137160" marR="137160" marT="137160" marB="137160">
-                    <a:lnL w="12700" cap="flat" cmpd="sng" algn="ctr">
-                      <a:solidFill>
-                        <a:schemeClr val="tx1"/>
-                      </a:solidFill>
-                      <a:prstDash val="solid"/>
-                      <a:round/>
-                      <a:headEnd type="none" w="med" len="med"/>
-                      <a:tailEnd type="none" w="med" len="med"/>
-                    </a:lnL>
-                    <a:lnR w="12700" cap="flat" cmpd="sng" algn="ctr">
-                      <a:solidFill>
-                        <a:schemeClr val="tx1"/>
-                      </a:solidFill>
-                      <a:prstDash val="solid"/>
-                      <a:round/>
-                      <a:headEnd type="none" w="med" len="med"/>
-                      <a:tailEnd type="none" w="med" len="med"/>
-                    </a:lnR>
-                    <a:lnT w="12700" cap="flat" cmpd="sng" algn="ctr">
-                      <a:solidFill>
-                        <a:schemeClr val="tx1"/>
-                      </a:solidFill>
-                      <a:prstDash val="solid"/>
-                      <a:round/>
-                      <a:headEnd type="none" w="med" len="med"/>
-                      <a:tailEnd type="none" w="med" len="med"/>
-                    </a:lnT>
-                    <a:lnB w="12700" cap="flat" cmpd="sng" algn="ctr">
-                      <a:solidFill>
-                        <a:schemeClr val="tx1"/>
-                      </a:solidFill>
-                      <a:prstDash val="solid"/>
-                      <a:round/>
-                      <a:headEnd type="none" w="med" len="med"/>
-                      <a:tailEnd type="none" w="med" len="med"/>
-                    </a:lnB>
-                    <a:solidFill>
-                      <a:schemeClr val="bg1"/>
-                    </a:solidFill>
-                  </a:tcPr>
-                </a:tc>
-                <a:tc>
-                  <a:txBody>
-                    <a:bodyPr/>
-                    <a:lstStyle/>
-                    <a:p>
-                      <a:r>
-                        <a:rPr kumimoji="1" lang="en-US" altLang="ja-JP" sz="1200">
-                          <a:latin typeface="Cascadia Code SemiBold" panose="020B0609020000020004" pitchFamily="49" charset="0"/>
-                          <a:ea typeface="Cascadia Code SemiBold" panose="020B0609020000020004" pitchFamily="49" charset="0"/>
-                          <a:cs typeface="Cascadia Code SemiBold" panose="020B0609020000020004" pitchFamily="49" charset="0"/>
-                        </a:rPr>
-                        <a:t>This TXT file contains the original text.</a:t>
-                      </a:r>
-                    </a:p>
-                  </a:txBody>
-                  <a:tcPr marL="137160" marR="137160" marT="137160" marB="137160">
-                    <a:lnL w="12700" cap="flat" cmpd="sng" algn="ctr">
-                      <a:solidFill>
-                        <a:schemeClr val="tx1"/>
-                      </a:solidFill>
-                      <a:prstDash val="solid"/>
-                      <a:round/>
-                      <a:headEnd type="none" w="med" len="med"/>
-                      <a:tailEnd type="none" w="med" len="med"/>
-                    </a:lnL>
-                    <a:lnR w="12700" cap="flat" cmpd="sng" algn="ctr">
-                      <a:solidFill>
-                        <a:schemeClr val="tx1"/>
-                      </a:solidFill>
-                      <a:prstDash val="solid"/>
-                      <a:round/>
-                      <a:headEnd type="none" w="med" len="med"/>
-                      <a:tailEnd type="none" w="med" len="med"/>
-                    </a:lnR>
-                    <a:lnT w="12700" cap="flat" cmpd="sng" algn="ctr">
-                      <a:solidFill>
-                        <a:schemeClr val="tx1"/>
-                      </a:solidFill>
-                      <a:prstDash val="solid"/>
-                      <a:round/>
-                      <a:headEnd type="none" w="med" len="med"/>
-                      <a:tailEnd type="none" w="med" len="med"/>
-                    </a:lnT>
-                    <a:lnB w="12700" cap="flat" cmpd="sng" algn="ctr">
-                      <a:solidFill>
-                        <a:schemeClr val="tx1"/>
-                      </a:solidFill>
-                      <a:prstDash val="solid"/>
-                      <a:round/>
-                      <a:headEnd type="none" w="med" len="med"/>
-                      <a:tailEnd type="none" w="med" len="med"/>
-                    </a:lnB>
-                    <a:solidFill>
-                      <a:schemeClr val="bg1"/>
-                    </a:solidFill>
-                  </a:tcPr>
-                </a:tc>
-                <a:extLst>
-                  <a:ext uri="{0D108BD9-81ED-4DB2-BD59-A6C34878D82A}">
-                    <a16:rowId xmlns:a16="http://schemas.microsoft.com/office/drawing/2014/main" val="1262082791"/>
-                  </a:ext>
-                </a:extLst>
-              </a:tr>
-              <a:tr h="0">
-                <a:tc>
-                  <a:txBody>
-                    <a:bodyPr/>
-                    <a:lstStyle/>
-                    <a:p>
-                      <a:r>
-                        <a:rPr kumimoji="1" lang="en-US" altLang="ja-JP" sz="1200">
-                          <a:latin typeface="Cascadia Code SemiBold" panose="020B0609020000020004" pitchFamily="49" charset="0"/>
-                          <a:ea typeface="Cascadia Code SemiBold" panose="020B0609020000020004" pitchFamily="49" charset="0"/>
-                          <a:cs typeface="Cascadia Code SemiBold" panose="020B0609020000020004" pitchFamily="49" charset="0"/>
-                        </a:rPr>
-                        <a:t>supports/llmj-initial.py</a:t>
-                      </a:r>
-                      <a:endParaRPr kumimoji="1" lang="ja-JP" altLang="en-US" sz="1200">
-                        <a:latin typeface="Cascadia Code SemiBold" panose="020B0609020000020004" pitchFamily="49" charset="0"/>
-                        <a:ea typeface="BIZ UDゴシック" panose="020B0400000000000000" pitchFamily="49" charset="-128"/>
-                        <a:cs typeface="Cascadia Code SemiBold" panose="020B0609020000020004" pitchFamily="49" charset="0"/>
-                      </a:endParaRPr>
-                    </a:p>
-                  </a:txBody>
-                  <a:tcPr marL="137160" marR="137160" marT="137160" marB="137160">
-                    <a:lnL w="12700" cap="flat" cmpd="sng" algn="ctr">
-                      <a:solidFill>
-                        <a:schemeClr val="tx1"/>
-                      </a:solidFill>
-                      <a:prstDash val="solid"/>
-                      <a:round/>
-                      <a:headEnd type="none" w="med" len="med"/>
-                      <a:tailEnd type="none" w="med" len="med"/>
-                    </a:lnL>
-                    <a:lnR w="12700" cap="flat" cmpd="sng" algn="ctr">
-                      <a:solidFill>
-                        <a:schemeClr val="tx1"/>
-                      </a:solidFill>
-                      <a:prstDash val="solid"/>
-                      <a:round/>
-                      <a:headEnd type="none" w="med" len="med"/>
-                      <a:tailEnd type="none" w="med" len="med"/>
-                    </a:lnR>
-                    <a:lnT w="12700" cap="flat" cmpd="sng" algn="ctr">
-                      <a:solidFill>
-                        <a:schemeClr val="tx1"/>
-                      </a:solidFill>
-                      <a:prstDash val="solid"/>
-                      <a:round/>
-                      <a:headEnd type="none" w="med" len="med"/>
-                      <a:tailEnd type="none" w="med" len="med"/>
-                    </a:lnT>
-                    <a:lnB w="12700" cap="flat" cmpd="sng" algn="ctr">
-                      <a:solidFill>
-                        <a:schemeClr val="tx1"/>
-                      </a:solidFill>
-                      <a:prstDash val="solid"/>
-                      <a:round/>
-                      <a:headEnd type="none" w="med" len="med"/>
-                      <a:tailEnd type="none" w="med" len="med"/>
-                    </a:lnB>
-                    <a:solidFill>
-                      <a:schemeClr val="bg1"/>
-                    </a:solidFill>
-                  </a:tcPr>
-                </a:tc>
-                <a:tc>
-                  <a:txBody>
-                    <a:bodyPr/>
-                    <a:lstStyle/>
-                    <a:p>
-                      <a:r>
-                        <a:rPr kumimoji="1" lang="en-US" altLang="ja-JP" sz="1200">
-                          <a:latin typeface="Cascadia Code SemiBold" panose="020B0609020000020004" pitchFamily="49" charset="0"/>
-                          <a:ea typeface="Cascadia Code SemiBold" panose="020B0609020000020004" pitchFamily="49" charset="0"/>
-                          <a:cs typeface="Cascadia Code SemiBold" panose="020B0609020000020004" pitchFamily="49" charset="0"/>
-                        </a:rPr>
-                        <a:t>This SCRIPT generates prompt templates from </a:t>
-                      </a:r>
-                      <a:r>
-                        <a:rPr kumimoji="1" lang="en-US" altLang="ja-JP" sz="1200" b="1" i="1">
-                          <a:solidFill>
-                            <a:srgbClr val="FF0000"/>
-                          </a:solidFill>
-                          <a:latin typeface="Cascadia Code SemiBold" panose="020B0609020000020004" pitchFamily="49" charset="0"/>
-                          <a:ea typeface="Cascadia Code SemiBold" panose="020B0609020000020004" pitchFamily="49" charset="0"/>
-                          <a:cs typeface="Cascadia Code SemiBold" panose="020B0609020000020004" pitchFamily="49" charset="0"/>
-                        </a:rPr>
-                        <a:t>rubric/*.json</a:t>
-                      </a:r>
-                      <a:r>
-                        <a:rPr kumimoji="1" lang="en-US" altLang="ja-JP" sz="1200">
-                          <a:latin typeface="Cascadia Code SemiBold" panose="020B0609020000020004" pitchFamily="49" charset="0"/>
-                          <a:ea typeface="Cascadia Code SemiBold" panose="020B0609020000020004" pitchFamily="49" charset="0"/>
-                          <a:cs typeface="Cascadia Code SemiBold" panose="020B0609020000020004" pitchFamily="49" charset="0"/>
-                        </a:rPr>
-                        <a:t> and writes them to </a:t>
-                      </a:r>
-                      <a:r>
-                        <a:rPr kumimoji="1" lang="en-US" altLang="ja-JP" sz="1200" b="1" i="1">
-                          <a:solidFill>
-                            <a:srgbClr val="FF0000"/>
-                          </a:solidFill>
-                          <a:latin typeface="Cascadia Code SemiBold" panose="020B0609020000020004" pitchFamily="49" charset="0"/>
-                          <a:ea typeface="Cascadia Code SemiBold" panose="020B0609020000020004" pitchFamily="49" charset="0"/>
-                          <a:cs typeface="Cascadia Code SemiBold" panose="020B0609020000020004" pitchFamily="49" charset="0"/>
-                        </a:rPr>
-                        <a:t>work/*.txt</a:t>
-                      </a:r>
-                      <a:r>
-                        <a:rPr kumimoji="1" lang="en-US" altLang="ja-JP" sz="1200">
-                          <a:latin typeface="Cascadia Code SemiBold" panose="020B0609020000020004" pitchFamily="49" charset="0"/>
-                          <a:ea typeface="Cascadia Code SemiBold" panose="020B0609020000020004" pitchFamily="49" charset="0"/>
-                          <a:cs typeface="Cascadia Code SemiBold" panose="020B0609020000020004" pitchFamily="49" charset="0"/>
-                        </a:rPr>
-                        <a:t>. These prompts serve as a baseline for human tuning.</a:t>
-                      </a:r>
-                    </a:p>
-                  </a:txBody>
-                  <a:tcPr marL="137160" marR="137160" marT="137160" marB="137160">
-                    <a:lnL w="12700" cap="flat" cmpd="sng" algn="ctr">
-                      <a:solidFill>
-                        <a:schemeClr val="tx1"/>
-                      </a:solidFill>
-                      <a:prstDash val="solid"/>
-                      <a:round/>
-                      <a:headEnd type="none" w="med" len="med"/>
-                      <a:tailEnd type="none" w="med" len="med"/>
-                    </a:lnL>
-                    <a:lnR w="12700" cap="flat" cmpd="sng" algn="ctr">
-                      <a:solidFill>
-                        <a:schemeClr val="tx1"/>
-                      </a:solidFill>
-                      <a:prstDash val="solid"/>
-                      <a:round/>
-                      <a:headEnd type="none" w="med" len="med"/>
-                      <a:tailEnd type="none" w="med" len="med"/>
-                    </a:lnR>
-                    <a:lnT w="12700" cap="flat" cmpd="sng" algn="ctr">
-                      <a:solidFill>
-                        <a:schemeClr val="tx1"/>
-                      </a:solidFill>
-                      <a:prstDash val="solid"/>
-                      <a:round/>
-                      <a:headEnd type="none" w="med" len="med"/>
-                      <a:tailEnd type="none" w="med" len="med"/>
-                    </a:lnT>
-                    <a:lnB w="12700" cap="flat" cmpd="sng" algn="ctr">
-                      <a:solidFill>
-                        <a:schemeClr val="tx1"/>
-                      </a:solidFill>
-                      <a:prstDash val="solid"/>
-                      <a:round/>
-                      <a:headEnd type="none" w="med" len="med"/>
-                      <a:tailEnd type="none" w="med" len="med"/>
-                    </a:lnB>
-                    <a:solidFill>
-                      <a:schemeClr val="bg1"/>
-                    </a:solidFill>
-                  </a:tcPr>
-                </a:tc>
-                <a:extLst>
-                  <a:ext uri="{0D108BD9-81ED-4DB2-BD59-A6C34878D82A}">
-                    <a16:rowId xmlns:a16="http://schemas.microsoft.com/office/drawing/2014/main" val="3817967045"/>
-                  </a:ext>
-                </a:extLst>
-              </a:tr>
-              <a:tr h="0">
-                <a:tc>
-                  <a:txBody>
-                    <a:bodyPr/>
-                    <a:lstStyle/>
-                    <a:p>
-                      <a:pPr marL="0" marR="0" lvl="0" indent="0" algn="l" defTabSz="914400" rtl="0" eaLnBrk="1" fontAlgn="auto" latinLnBrk="0" hangingPunct="1">
-                        <a:lnSpc>
-                          <a:spcPct val="100000"/>
-                        </a:lnSpc>
-                        <a:spcBef>
-                          <a:spcPts val="0"/>
-                        </a:spcBef>
-                        <a:spcAft>
-                          <a:spcPts val="0"/>
-                        </a:spcAft>
-                        <a:buClrTx/>
-                        <a:buSzTx/>
-                        <a:buFontTx/>
-                        <a:buNone/>
-                        <a:tabLst/>
-                        <a:defRPr/>
-                      </a:pPr>
-                      <a:r>
-                        <a:rPr kumimoji="1" lang="en-US" altLang="ja-JP" sz="1200">
-                          <a:latin typeface="Cascadia Code SemiBold" panose="020B0609020000020004" pitchFamily="49" charset="0"/>
-                          <a:ea typeface="Cascadia Code SemiBold" panose="020B0609020000020004" pitchFamily="49" charset="0"/>
-                          <a:cs typeface="Cascadia Code SemiBold" panose="020B0609020000020004" pitchFamily="49" charset="0"/>
-                        </a:rPr>
-                        <a:t>supports/llmj-feedback.py</a:t>
-                      </a:r>
-                      <a:endParaRPr kumimoji="1" lang="ja-JP" altLang="en-US" sz="1200">
-                        <a:latin typeface="Cascadia Code SemiBold" panose="020B0609020000020004" pitchFamily="49" charset="0"/>
-                        <a:ea typeface="BIZ UDゴシック" panose="020B0400000000000000" pitchFamily="49" charset="-128"/>
-                        <a:cs typeface="Cascadia Code SemiBold" panose="020B0609020000020004" pitchFamily="49" charset="0"/>
-                      </a:endParaRPr>
-                    </a:p>
-                  </a:txBody>
-                  <a:tcPr marL="137160" marR="137160" marT="137160" marB="137160">
-                    <a:lnL w="12700" cap="flat" cmpd="sng" algn="ctr">
-                      <a:solidFill>
-                        <a:schemeClr val="tx1"/>
-                      </a:solidFill>
-                      <a:prstDash val="solid"/>
-                      <a:round/>
-                      <a:headEnd type="none" w="med" len="med"/>
-                      <a:tailEnd type="none" w="med" len="med"/>
-                    </a:lnL>
-                    <a:lnR w="12700" cap="flat" cmpd="sng" algn="ctr">
-                      <a:solidFill>
-                        <a:schemeClr val="tx1"/>
-                      </a:solidFill>
-                      <a:prstDash val="solid"/>
-                      <a:round/>
-                      <a:headEnd type="none" w="med" len="med"/>
-                      <a:tailEnd type="none" w="med" len="med"/>
-                    </a:lnR>
-                    <a:lnT w="12700" cap="flat" cmpd="sng" algn="ctr">
-                      <a:solidFill>
-                        <a:schemeClr val="tx1"/>
-                      </a:solidFill>
-                      <a:prstDash val="solid"/>
-                      <a:round/>
-                      <a:headEnd type="none" w="med" len="med"/>
-                      <a:tailEnd type="none" w="med" len="med"/>
-                    </a:lnT>
-                    <a:lnB w="12700" cap="flat" cmpd="sng" algn="ctr">
-                      <a:solidFill>
-                        <a:schemeClr val="tx1"/>
-                      </a:solidFill>
-                      <a:prstDash val="solid"/>
-                      <a:round/>
-                      <a:headEnd type="none" w="med" len="med"/>
-                      <a:tailEnd type="none" w="med" len="med"/>
-                    </a:lnB>
-                    <a:solidFill>
-                      <a:schemeClr val="bg1"/>
-                    </a:solidFill>
-                  </a:tcPr>
-                </a:tc>
-                <a:tc>
-                  <a:txBody>
-                    <a:bodyPr/>
-                    <a:lstStyle/>
-                    <a:p>
-                      <a:pPr marL="0" marR="0" lvl="0" indent="0" algn="l" defTabSz="914400" rtl="0" eaLnBrk="1" fontAlgn="auto" latinLnBrk="0" hangingPunct="1">
-                        <a:lnSpc>
-                          <a:spcPct val="100000"/>
-                        </a:lnSpc>
-                        <a:spcBef>
-                          <a:spcPts val="0"/>
-                        </a:spcBef>
-                        <a:spcAft>
-                          <a:spcPts val="0"/>
-                        </a:spcAft>
-                        <a:buClrTx/>
-                        <a:buSzTx/>
-                        <a:buFontTx/>
-                        <a:buNone/>
-                        <a:tabLst/>
-                        <a:defRPr/>
-                      </a:pPr>
-                      <a:r>
-                        <a:rPr kumimoji="1" lang="en-US" altLang="ja-JP" sz="1200">
-                          <a:latin typeface="Cascadia Code SemiBold" panose="020B0609020000020004" pitchFamily="49" charset="0"/>
-                          <a:ea typeface="Cascadia Code SemiBold" panose="020B0609020000020004" pitchFamily="49" charset="0"/>
-                          <a:cs typeface="Cascadia Code SemiBold" panose="020B0609020000020004" pitchFamily="49" charset="0"/>
-                        </a:rPr>
-                        <a:t>This SCRIPT provides improvement suggestions for the </a:t>
-                      </a:r>
-                      <a:r>
-                        <a:rPr kumimoji="1" lang="en-US" altLang="ja-JP" sz="1200" b="1" i="1">
-                          <a:solidFill>
-                            <a:srgbClr val="FF0000"/>
-                          </a:solidFill>
-                          <a:latin typeface="Cascadia Code SemiBold" panose="020B0609020000020004" pitchFamily="49" charset="0"/>
-                          <a:ea typeface="Cascadia Code SemiBold" panose="020B0609020000020004" pitchFamily="49" charset="0"/>
-                          <a:cs typeface="Cascadia Code SemiBold" panose="020B0609020000020004" pitchFamily="49" charset="0"/>
-                        </a:rPr>
-                        <a:t>rubric/*.json</a:t>
-                      </a:r>
-                      <a:r>
-                        <a:rPr kumimoji="1" lang="en-US" altLang="ja-JP" sz="1200">
-                          <a:latin typeface="Cascadia Code SemiBold" panose="020B0609020000020004" pitchFamily="49" charset="0"/>
-                          <a:ea typeface="Cascadia Code SemiBold" panose="020B0609020000020004" pitchFamily="49" charset="0"/>
-                          <a:cs typeface="Cascadia Code SemiBold" panose="020B0609020000020004" pitchFamily="49" charset="0"/>
-                        </a:rPr>
-                        <a:t> or for specific gold data in </a:t>
-                      </a:r>
-                      <a:r>
-                        <a:rPr kumimoji="1" lang="en-US" altLang="ja-JP" sz="1200" b="1" i="1">
-                          <a:solidFill>
-                            <a:srgbClr val="FF0000"/>
-                          </a:solidFill>
-                          <a:latin typeface="Cascadia Code SemiBold" panose="020B0609020000020004" pitchFamily="49" charset="0"/>
-                          <a:ea typeface="Cascadia Code SemiBold" panose="020B0609020000020004" pitchFamily="49" charset="0"/>
-                          <a:cs typeface="Cascadia Code SemiBold" panose="020B0609020000020004" pitchFamily="49" charset="0"/>
-                        </a:rPr>
-                        <a:t>work/*.xlsx </a:t>
-                      </a:r>
-                      <a:r>
-                        <a:rPr kumimoji="1" lang="en-US" altLang="ja-JP" sz="1200">
-                          <a:latin typeface="Cascadia Code SemiBold" panose="020B0609020000020004" pitchFamily="49" charset="0"/>
-                          <a:ea typeface="Cascadia Code SemiBold" panose="020B0609020000020004" pitchFamily="49" charset="0"/>
-                          <a:cs typeface="Cascadia Code SemiBold" panose="020B0609020000020004" pitchFamily="49" charset="0"/>
-                        </a:rPr>
-                        <a:t>based on the evaluation results of the gold data.</a:t>
-                      </a:r>
-                    </a:p>
-                  </a:txBody>
-                  <a:tcPr marL="137160" marR="137160" marT="137160" marB="137160">
-                    <a:lnL w="12700" cap="flat" cmpd="sng" algn="ctr">
-                      <a:solidFill>
-                        <a:schemeClr val="tx1"/>
-                      </a:solidFill>
-                      <a:prstDash val="solid"/>
-                      <a:round/>
-                      <a:headEnd type="none" w="med" len="med"/>
-                      <a:tailEnd type="none" w="med" len="med"/>
-                    </a:lnL>
-                    <a:lnR w="12700" cap="flat" cmpd="sng" algn="ctr">
-                      <a:solidFill>
-                        <a:schemeClr val="tx1"/>
-                      </a:solidFill>
-                      <a:prstDash val="solid"/>
-                      <a:round/>
-                      <a:headEnd type="none" w="med" len="med"/>
-                      <a:tailEnd type="none" w="med" len="med"/>
-                    </a:lnR>
-                    <a:lnT w="12700" cap="flat" cmpd="sng" algn="ctr">
-                      <a:solidFill>
-                        <a:schemeClr val="tx1"/>
-                      </a:solidFill>
-                      <a:prstDash val="solid"/>
-                      <a:round/>
-                      <a:headEnd type="none" w="med" len="med"/>
-                      <a:tailEnd type="none" w="med" len="med"/>
-                    </a:lnT>
-                    <a:lnB w="12700" cap="flat" cmpd="sng" algn="ctr">
-                      <a:solidFill>
-                        <a:schemeClr val="tx1"/>
-                      </a:solidFill>
-                      <a:prstDash val="solid"/>
-                      <a:round/>
-                      <a:headEnd type="none" w="med" len="med"/>
-                      <a:tailEnd type="none" w="med" len="med"/>
-                    </a:lnB>
-                    <a:solidFill>
-                      <a:schemeClr val="bg1"/>
-                    </a:solidFill>
-                  </a:tcPr>
-                </a:tc>
-                <a:extLst>
-                  <a:ext uri="{0D108BD9-81ED-4DB2-BD59-A6C34878D82A}">
-                    <a16:rowId xmlns:a16="http://schemas.microsoft.com/office/drawing/2014/main" val="65308053"/>
-                  </a:ext>
-                </a:extLst>
-              </a:tr>
-              <a:tr h="0">
-                <a:tc>
-                  <a:txBody>
-                    <a:bodyPr/>
-                    <a:lstStyle/>
-                    <a:p>
-                      <a:pPr marL="0" marR="0" lvl="0" indent="0" algn="l" defTabSz="914400" rtl="0" eaLnBrk="1" fontAlgn="auto" latinLnBrk="0" hangingPunct="1">
-                        <a:lnSpc>
-                          <a:spcPct val="100000"/>
-                        </a:lnSpc>
-                        <a:spcBef>
-                          <a:spcPts val="0"/>
-                        </a:spcBef>
-                        <a:spcAft>
-                          <a:spcPts val="0"/>
-                        </a:spcAft>
-                        <a:buClrTx/>
-                        <a:buSzTx/>
-                        <a:buFontTx/>
-                        <a:buNone/>
-                        <a:tabLst/>
-                        <a:defRPr/>
-                      </a:pPr>
-                      <a:r>
-                        <a:rPr kumimoji="1" lang="en-US" altLang="ja-JP" sz="1200">
-                          <a:latin typeface="Cascadia Code SemiBold" panose="020B0609020000020004" pitchFamily="49" charset="0"/>
-                          <a:ea typeface="Cascadia Code SemiBold" panose="020B0609020000020004" pitchFamily="49" charset="0"/>
-                          <a:cs typeface="Cascadia Code SemiBold" panose="020B0609020000020004" pitchFamily="49" charset="0"/>
-                        </a:rPr>
-                        <a:t>supports/template-*</a:t>
-                      </a:r>
-                      <a:endParaRPr kumimoji="1" lang="ja-JP" altLang="en-US" sz="1200">
-                        <a:latin typeface="Cascadia Code SemiBold" panose="020B0609020000020004" pitchFamily="49" charset="0"/>
-                        <a:ea typeface="BIZ UDゴシック" panose="020B0400000000000000" pitchFamily="49" charset="-128"/>
-                        <a:cs typeface="Cascadia Code SemiBold" panose="020B0609020000020004" pitchFamily="49" charset="0"/>
-                      </a:endParaRPr>
-                    </a:p>
-                  </a:txBody>
-                  <a:tcPr marL="137160" marR="137160" marT="137160" marB="137160">
-                    <a:lnL w="12700" cap="flat" cmpd="sng" algn="ctr">
-                      <a:solidFill>
-                        <a:schemeClr val="tx1"/>
-                      </a:solidFill>
-                      <a:prstDash val="solid"/>
-                      <a:round/>
-                      <a:headEnd type="none" w="med" len="med"/>
-                      <a:tailEnd type="none" w="med" len="med"/>
-                    </a:lnL>
-                    <a:lnR w="12700" cap="flat" cmpd="sng" algn="ctr">
-                      <a:solidFill>
-                        <a:schemeClr val="tx1"/>
-                      </a:solidFill>
-                      <a:prstDash val="solid"/>
-                      <a:round/>
-                      <a:headEnd type="none" w="med" len="med"/>
-                      <a:tailEnd type="none" w="med" len="med"/>
-                    </a:lnR>
-                    <a:lnT w="12700" cap="flat" cmpd="sng" algn="ctr">
-                      <a:solidFill>
-                        <a:schemeClr val="tx1"/>
-                      </a:solidFill>
-                      <a:prstDash val="solid"/>
-                      <a:round/>
-                      <a:headEnd type="none" w="med" len="med"/>
-                      <a:tailEnd type="none" w="med" len="med"/>
-                    </a:lnT>
-                    <a:lnB w="12700" cap="flat" cmpd="sng" algn="ctr">
-                      <a:solidFill>
-                        <a:schemeClr val="tx1"/>
-                      </a:solidFill>
-                      <a:prstDash val="solid"/>
-                      <a:round/>
-                      <a:headEnd type="none" w="med" len="med"/>
-                      <a:tailEnd type="none" w="med" len="med"/>
-                    </a:lnB>
-                    <a:solidFill>
-                      <a:schemeClr val="bg1"/>
-                    </a:solidFill>
-                  </a:tcPr>
-                </a:tc>
-                <a:tc>
-                  <a:txBody>
-                    <a:bodyPr/>
-                    <a:lstStyle/>
-                    <a:p>
-                      <a:r>
-                        <a:rPr kumimoji="1" lang="en-US" altLang="ja-JP" sz="1200">
-                          <a:latin typeface="Cascadia Code SemiBold" panose="020B0609020000020004" pitchFamily="49" charset="0"/>
-                          <a:ea typeface="Cascadia Code SemiBold" panose="020B0609020000020004" pitchFamily="49" charset="0"/>
-                          <a:cs typeface="Cascadia Code SemiBold" panose="020B0609020000020004" pitchFamily="49" charset="0"/>
-                        </a:rPr>
-                        <a:t>These templates are used by </a:t>
-                      </a:r>
-                      <a:r>
-                        <a:rPr kumimoji="1" lang="en-US" altLang="ja-JP" sz="1200" b="1" i="1">
-                          <a:solidFill>
-                            <a:srgbClr val="FF0000"/>
-                          </a:solidFill>
-                          <a:latin typeface="Cascadia Code SemiBold" panose="020B0609020000020004" pitchFamily="49" charset="0"/>
-                          <a:ea typeface="Cascadia Code SemiBold" panose="020B0609020000020004" pitchFamily="49" charset="0"/>
-                          <a:cs typeface="Cascadia Code SemiBold" panose="020B0609020000020004" pitchFamily="49" charset="0"/>
-                        </a:rPr>
-                        <a:t>*.py</a:t>
-                      </a:r>
-                      <a:r>
-                        <a:rPr kumimoji="1" lang="en-US" altLang="ja-JP" sz="1200">
-                          <a:latin typeface="Cascadia Code SemiBold" panose="020B0609020000020004" pitchFamily="49" charset="0"/>
-                          <a:ea typeface="Cascadia Code SemiBold" panose="020B0609020000020004" pitchFamily="49" charset="0"/>
-                          <a:cs typeface="Cascadia Code SemiBold" panose="020B0609020000020004" pitchFamily="49" charset="0"/>
-                        </a:rPr>
-                        <a:t> scripts.</a:t>
-                      </a:r>
-                    </a:p>
-                  </a:txBody>
-                  <a:tcPr marL="137160" marR="137160" marT="137160" marB="137160">
-                    <a:lnL w="12700" cap="flat" cmpd="sng" algn="ctr">
-                      <a:solidFill>
-                        <a:schemeClr val="tx1"/>
-                      </a:solidFill>
-                      <a:prstDash val="solid"/>
-                      <a:round/>
-                      <a:headEnd type="none" w="med" len="med"/>
-                      <a:tailEnd type="none" w="med" len="med"/>
-                    </a:lnL>
-                    <a:lnR w="12700" cap="flat" cmpd="sng" algn="ctr">
-                      <a:solidFill>
-                        <a:schemeClr val="tx1"/>
-                      </a:solidFill>
-                      <a:prstDash val="solid"/>
-                      <a:round/>
-                      <a:headEnd type="none" w="med" len="med"/>
-                      <a:tailEnd type="none" w="med" len="med"/>
-                    </a:lnR>
-                    <a:lnT w="12700" cap="flat" cmpd="sng" algn="ctr">
-                      <a:solidFill>
-                        <a:schemeClr val="tx1"/>
-                      </a:solidFill>
-                      <a:prstDash val="solid"/>
-                      <a:round/>
-                      <a:headEnd type="none" w="med" len="med"/>
-                      <a:tailEnd type="none" w="med" len="med"/>
-                    </a:lnT>
-                    <a:lnB w="12700" cap="flat" cmpd="sng" algn="ctr">
-                      <a:solidFill>
-                        <a:schemeClr val="tx1"/>
-                      </a:solidFill>
-                      <a:prstDash val="solid"/>
-                      <a:round/>
-                      <a:headEnd type="none" w="med" len="med"/>
-                      <a:tailEnd type="none" w="med" len="med"/>
-                    </a:lnB>
-                    <a:solidFill>
-                      <a:schemeClr val="bg1"/>
-                    </a:solidFill>
-                  </a:tcPr>
-                </a:tc>
-                <a:extLst>
-                  <a:ext uri="{0D108BD9-81ED-4DB2-BD59-A6C34878D82A}">
-                    <a16:rowId xmlns:a16="http://schemas.microsoft.com/office/drawing/2014/main" val="1259418972"/>
-                  </a:ext>
-                </a:extLst>
-              </a:tr>
-              <a:tr h="417498">
-                <a:tc>
-                  <a:txBody>
-                    <a:bodyPr/>
-                    <a:lstStyle/>
-                    <a:p>
-                      <a:r>
-                        <a:rPr kumimoji="1" lang="en-US" altLang="ja-JP" sz="1200">
-                          <a:latin typeface="Cascadia Code SemiBold" panose="020B0609020000020004" pitchFamily="49" charset="0"/>
-                          <a:ea typeface="Cascadia Code SemiBold" panose="020B0609020000020004" pitchFamily="49" charset="0"/>
-                          <a:cs typeface="Cascadia Code SemiBold" panose="020B0609020000020004" pitchFamily="49" charset="0"/>
-                        </a:rPr>
-                        <a:t>work/*</a:t>
-                      </a:r>
-                      <a:endParaRPr kumimoji="1" lang="ja-JP" altLang="en-US" sz="1200">
-                        <a:latin typeface="Cascadia Code SemiBold" panose="020B0609020000020004" pitchFamily="49" charset="0"/>
-                        <a:ea typeface="BIZ UDゴシック" panose="020B0400000000000000" pitchFamily="49" charset="-128"/>
-                        <a:cs typeface="Cascadia Code SemiBold" panose="020B0609020000020004" pitchFamily="49" charset="0"/>
-                      </a:endParaRPr>
-                    </a:p>
-                  </a:txBody>
-                  <a:tcPr marL="137160" marR="137160" marT="137160" marB="137160">
-                    <a:lnL w="12700" cap="flat" cmpd="sng" algn="ctr">
-                      <a:solidFill>
-                        <a:schemeClr val="tx1"/>
-                      </a:solidFill>
-                      <a:prstDash val="solid"/>
-                      <a:round/>
-                      <a:headEnd type="none" w="med" len="med"/>
-                      <a:tailEnd type="none" w="med" len="med"/>
-                    </a:lnL>
-                    <a:lnR w="12700" cap="flat" cmpd="sng" algn="ctr">
-                      <a:solidFill>
-                        <a:schemeClr val="tx1"/>
-                      </a:solidFill>
-                      <a:prstDash val="solid"/>
-                      <a:round/>
-                      <a:headEnd type="none" w="med" len="med"/>
-                      <a:tailEnd type="none" w="med" len="med"/>
-                    </a:lnR>
-                    <a:lnT w="12700" cap="flat" cmpd="sng" algn="ctr">
-                      <a:solidFill>
-                        <a:schemeClr val="tx1"/>
-                      </a:solidFill>
-                      <a:prstDash val="solid"/>
-                      <a:round/>
-                      <a:headEnd type="none" w="med" len="med"/>
-                      <a:tailEnd type="none" w="med" len="med"/>
-                    </a:lnT>
-                    <a:lnB w="12700" cap="flat" cmpd="sng" algn="ctr">
-                      <a:solidFill>
-                        <a:schemeClr val="tx1"/>
-                      </a:solidFill>
-                      <a:prstDash val="solid"/>
-                      <a:round/>
-                      <a:headEnd type="none" w="med" len="med"/>
-                      <a:tailEnd type="none" w="med" len="med"/>
-                    </a:lnB>
-                    <a:solidFill>
-                      <a:schemeClr val="bg1"/>
-                    </a:solidFill>
-                  </a:tcPr>
-                </a:tc>
-                <a:tc>
-                  <a:txBody>
-                    <a:bodyPr/>
-                    <a:lstStyle/>
-                    <a:p>
-                      <a:r>
-                        <a:rPr kumimoji="1" lang="en-US" altLang="ja-JP" sz="1200">
-                          <a:latin typeface="Cascadia Code SemiBold" panose="020B0609020000020004" pitchFamily="49" charset="0"/>
-                          <a:ea typeface="Cascadia Code SemiBold" panose="020B0609020000020004" pitchFamily="49" charset="0"/>
-                          <a:cs typeface="Cascadia Code SemiBold" panose="020B0609020000020004" pitchFamily="49" charset="0"/>
-                        </a:rPr>
-                        <a:t>This directory contains generated outputs such as </a:t>
-                      </a:r>
-                      <a:r>
-                        <a:rPr kumimoji="1" lang="en-US" altLang="ja-JP" sz="1200" b="1" i="1">
-                          <a:solidFill>
-                            <a:srgbClr val="FF0000"/>
-                          </a:solidFill>
-                          <a:latin typeface="Cascadia Code SemiBold" panose="020B0609020000020004" pitchFamily="49" charset="0"/>
-                          <a:ea typeface="Cascadia Code SemiBold" panose="020B0609020000020004" pitchFamily="49" charset="0"/>
-                          <a:cs typeface="Cascadia Code SemiBold" panose="020B0609020000020004" pitchFamily="49" charset="0"/>
-                        </a:rPr>
-                        <a:t>*.txt</a:t>
-                      </a:r>
-                      <a:r>
-                        <a:rPr kumimoji="1" lang="en-US" altLang="ja-JP" sz="1200">
-                          <a:latin typeface="Cascadia Code SemiBold" panose="020B0609020000020004" pitchFamily="49" charset="0"/>
-                          <a:ea typeface="Cascadia Code SemiBold" panose="020B0609020000020004" pitchFamily="49" charset="0"/>
-                          <a:cs typeface="Cascadia Code SemiBold" panose="020B0609020000020004" pitchFamily="49" charset="0"/>
-                        </a:rPr>
-                        <a:t>, </a:t>
-                      </a:r>
-                      <a:r>
-                        <a:rPr kumimoji="1" lang="en-US" altLang="ja-JP" sz="1200" b="1" i="1">
-                          <a:solidFill>
-                            <a:srgbClr val="FF0000"/>
-                          </a:solidFill>
-                          <a:latin typeface="Cascadia Code SemiBold" panose="020B0609020000020004" pitchFamily="49" charset="0"/>
-                          <a:ea typeface="Cascadia Code SemiBold" panose="020B0609020000020004" pitchFamily="49" charset="0"/>
-                          <a:cs typeface="Cascadia Code SemiBold" panose="020B0609020000020004" pitchFamily="49" charset="0"/>
-                        </a:rPr>
-                        <a:t>*.xlsx</a:t>
-                      </a:r>
-                      <a:r>
-                        <a:rPr kumimoji="1" lang="en-US" altLang="ja-JP" sz="1200">
-                          <a:latin typeface="Cascadia Code SemiBold" panose="020B0609020000020004" pitchFamily="49" charset="0"/>
-                          <a:ea typeface="Cascadia Code SemiBold" panose="020B0609020000020004" pitchFamily="49" charset="0"/>
-                          <a:cs typeface="Cascadia Code SemiBold" panose="020B0609020000020004" pitchFamily="49" charset="0"/>
-                        </a:rPr>
-                        <a:t>, and </a:t>
-                      </a:r>
-                      <a:r>
-                        <a:rPr kumimoji="1" lang="en-US" altLang="ja-JP" sz="1200" b="1" i="1">
-                          <a:solidFill>
-                            <a:srgbClr val="FF0000"/>
-                          </a:solidFill>
-                          <a:latin typeface="Cascadia Code SemiBold" panose="020B0609020000020004" pitchFamily="49" charset="0"/>
-                          <a:ea typeface="Cascadia Code SemiBold" panose="020B0609020000020004" pitchFamily="49" charset="0"/>
-                          <a:cs typeface="Cascadia Code SemiBold" panose="020B0609020000020004" pitchFamily="49" charset="0"/>
-                        </a:rPr>
-                        <a:t>report.html</a:t>
-                      </a:r>
-                      <a:r>
-                        <a:rPr kumimoji="1" lang="en-US" altLang="ja-JP" sz="1200">
-                          <a:latin typeface="Cascadia Code SemiBold" panose="020B0609020000020004" pitchFamily="49" charset="0"/>
-                          <a:ea typeface="Cascadia Code SemiBold" panose="020B0609020000020004" pitchFamily="49" charset="0"/>
-                          <a:cs typeface="Cascadia Code SemiBold" panose="020B0609020000020004" pitchFamily="49" charset="0"/>
-                        </a:rPr>
-                        <a:t>.</a:t>
-                      </a:r>
-                    </a:p>
-                  </a:txBody>
-                  <a:tcPr marL="137160" marR="137160" marT="137160" marB="137160">
-                    <a:lnL w="12700" cap="flat" cmpd="sng" algn="ctr">
-                      <a:solidFill>
-                        <a:schemeClr val="tx1"/>
-                      </a:solidFill>
-                      <a:prstDash val="solid"/>
-                      <a:round/>
-                      <a:headEnd type="none" w="med" len="med"/>
-                      <a:tailEnd type="none" w="med" len="med"/>
-                    </a:lnL>
-                    <a:lnR w="12700" cap="flat" cmpd="sng" algn="ctr">
-                      <a:solidFill>
-                        <a:schemeClr val="tx1"/>
-                      </a:solidFill>
-                      <a:prstDash val="solid"/>
-                      <a:round/>
-                      <a:headEnd type="none" w="med" len="med"/>
-                      <a:tailEnd type="none" w="med" len="med"/>
-                    </a:lnR>
-                    <a:lnT w="12700" cap="flat" cmpd="sng" algn="ctr">
-                      <a:solidFill>
-                        <a:schemeClr val="tx1"/>
-                      </a:solidFill>
-                      <a:prstDash val="solid"/>
-                      <a:round/>
-                      <a:headEnd type="none" w="med" len="med"/>
-                      <a:tailEnd type="none" w="med" len="med"/>
-                    </a:lnT>
-                    <a:lnB w="12700" cap="flat" cmpd="sng" algn="ctr">
-                      <a:solidFill>
-                        <a:schemeClr val="tx1"/>
-                      </a:solidFill>
-                      <a:prstDash val="solid"/>
-                      <a:round/>
-                      <a:headEnd type="none" w="med" len="med"/>
-                      <a:tailEnd type="none" w="med" len="med"/>
-                    </a:lnB>
-                    <a:solidFill>
-                      <a:schemeClr val="bg1"/>
-                    </a:solidFill>
-                  </a:tcPr>
-                </a:tc>
-                <a:extLst>
-                  <a:ext uri="{0D108BD9-81ED-4DB2-BD59-A6C34878D82A}">
-                    <a16:rowId xmlns:a16="http://schemas.microsoft.com/office/drawing/2014/main" val="3804432217"/>
-                  </a:ext>
-                </a:extLst>
-              </a:tr>
-            </a:tbl>
-          </a:graphicData>
-        </a:graphic>
-      </p:graphicFrame>
-    </p:spTree>
-    <p:extLst>
-      <p:ext uri="{BB962C8B-B14F-4D97-AF65-F5344CB8AC3E}">
-        <p14:creationId xmlns:p14="http://schemas.microsoft.com/office/powerpoint/2010/main" val="1222773587"/>
-      </p:ext>
-    </p:extLst>
-  </p:cSld>
-  <p:clrMapOvr>
-    <a:masterClrMapping/>
-  </p:clrMapOvr>
-</p:sldLayout>
-</file>
-
-<file path=ppt/slideLayouts/slideLayout5.xml><?xml version="1.0" encoding="utf-8"?>
 <p:sldLayout xmlns:a="http://schemas.openxmlformats.org/drawingml/2006/main" xmlns:r="http://schemas.openxmlformats.org/officeDocument/2006/relationships" xmlns:p="http://schemas.openxmlformats.org/presentationml/2006/main" preserve="1" userDrawn="1">
   <p:cSld name="1_ユーザー設定レイアウト">
     <p:spTree>
@@ -11642,7 +10725,7 @@
 </p:sldLayout>
 </file>
 
-<file path=ppt/slideLayouts/slideLayout6.xml><?xml version="1.0" encoding="utf-8"?>
+<file path=ppt/slideLayouts/slideLayout5.xml><?xml version="1.0" encoding="utf-8"?>
 <p:sldLayout xmlns:a="http://schemas.openxmlformats.org/drawingml/2006/main" xmlns:r="http://schemas.openxmlformats.org/officeDocument/2006/relationships" xmlns:p="http://schemas.openxmlformats.org/presentationml/2006/main" preserve="1" userDrawn="1">
   <p:cSld name="2_ユーザー設定レイアウト">
     <p:spTree>
@@ -17662,10 +16745,9 @@
   <p:sldLayoutIdLst>
     <p:sldLayoutId id="2147483649" r:id="rId1"/>
     <p:sldLayoutId id="2147483650" r:id="rId2"/>
-    <p:sldLayoutId id="2147483656" r:id="rId3"/>
-    <p:sldLayoutId id="2147483655" r:id="rId4"/>
-    <p:sldLayoutId id="2147483651" r:id="rId5"/>
-    <p:sldLayoutId id="2147483652" r:id="rId6"/>
+    <p:sldLayoutId id="2147483657" r:id="rId3"/>
+    <p:sldLayoutId id="2147483651" r:id="rId4"/>
+    <p:sldLayoutId id="2147483652" r:id="rId5"/>
   </p:sldLayoutIdLst>
   <p:txStyles>
     <p:titleStyle>
@@ -17988,6 +17070,792 @@
         <p:cNvPr id="1" name="">
           <a:extLst>
             <a:ext uri="{FF2B5EF4-FFF2-40B4-BE49-F238E27FC236}">
+              <a16:creationId xmlns:a16="http://schemas.microsoft.com/office/drawing/2014/main" id="{189ADD19-8A82-86C8-8BD4-C9C84B98209F}"/>
+            </a:ext>
+          </a:extLst>
+        </p:cNvPr>
+        <p:cNvGrpSpPr/>
+        <p:nvPr/>
+      </p:nvGrpSpPr>
+      <p:grpSpPr>
+        <a:xfrm>
+          <a:off x="0" y="0"/>
+          <a:ext cx="0" cy="0"/>
+          <a:chOff x="0" y="0"/>
+          <a:chExt cx="0" cy="0"/>
+        </a:xfrm>
+      </p:grpSpPr>
+      <p:sp>
+        <p:nvSpPr>
+          <p:cNvPr id="6" name="フリーフォーム: 図形 5">
+            <a:extLst>
+              <a:ext uri="{FF2B5EF4-FFF2-40B4-BE49-F238E27FC236}">
+                <a16:creationId xmlns:a16="http://schemas.microsoft.com/office/drawing/2014/main" id="{AD6F5327-32AF-C2D2-E4EC-2EA98178F28C}"/>
+              </a:ext>
+            </a:extLst>
+          </p:cNvPr>
+          <p:cNvSpPr/>
+          <p:nvPr/>
+        </p:nvSpPr>
+        <p:spPr>
+          <a:xfrm>
+            <a:off x="0" y="0"/>
+            <a:ext cx="12814978" cy="6858000"/>
+          </a:xfrm>
+          <a:custGeom>
+            <a:avLst/>
+            <a:gdLst>
+              <a:gd name="csX0" fmla="*/ 12192000 w 12814978"/>
+              <a:gd name="csY0" fmla="*/ 4565567 h 6858000"/>
+              <a:gd name="csX1" fmla="*/ 12288588 w 12814978"/>
+              <a:gd name="csY1" fmla="*/ 4624246 h 6858000"/>
+              <a:gd name="csX2" fmla="*/ 12814978 w 12814978"/>
+              <a:gd name="csY2" fmla="*/ 5614266 h 6858000"/>
+              <a:gd name="csX3" fmla="*/ 12288588 w 12814978"/>
+              <a:gd name="csY3" fmla="*/ 6604287 h 6858000"/>
+              <a:gd name="csX4" fmla="*/ 12192000 w 12814978"/>
+              <a:gd name="csY4" fmla="*/ 6662966 h 6858000"/>
+              <a:gd name="csX5" fmla="*/ 0 w 12814978"/>
+              <a:gd name="csY5" fmla="*/ 0 h 6858000"/>
+              <a:gd name="csX6" fmla="*/ 12192000 w 12814978"/>
+              <a:gd name="csY6" fmla="*/ 0 h 6858000"/>
+              <a:gd name="csX7" fmla="*/ 12192000 w 12814978"/>
+              <a:gd name="csY7" fmla="*/ 4565567 h 6858000"/>
+              <a:gd name="csX8" fmla="*/ 12190149 w 12814978"/>
+              <a:gd name="csY8" fmla="*/ 4564442 h 6858000"/>
+              <a:gd name="csX9" fmla="*/ 11621054 w 12814978"/>
+              <a:gd name="csY9" fmla="*/ 4420342 h 6858000"/>
+              <a:gd name="csX10" fmla="*/ 10427130 w 12814978"/>
+              <a:gd name="csY10" fmla="*/ 5614266 h 6858000"/>
+              <a:gd name="csX11" fmla="*/ 11621054 w 12814978"/>
+              <a:gd name="csY11" fmla="*/ 6808190 h 6858000"/>
+              <a:gd name="csX12" fmla="*/ 12190149 w 12814978"/>
+              <a:gd name="csY12" fmla="*/ 6664090 h 6858000"/>
+              <a:gd name="csX13" fmla="*/ 12192000 w 12814978"/>
+              <a:gd name="csY13" fmla="*/ 6662966 h 6858000"/>
+              <a:gd name="csX14" fmla="*/ 12192000 w 12814978"/>
+              <a:gd name="csY14" fmla="*/ 6858000 h 6858000"/>
+              <a:gd name="csX15" fmla="*/ 0 w 12814978"/>
+              <a:gd name="csY15" fmla="*/ 6858000 h 6858000"/>
+            </a:gdLst>
+            <a:ahLst/>
+            <a:cxnLst>
+              <a:cxn ang="0">
+                <a:pos x="csX0" y="csY0"/>
+              </a:cxn>
+              <a:cxn ang="0">
+                <a:pos x="csX1" y="csY1"/>
+              </a:cxn>
+              <a:cxn ang="0">
+                <a:pos x="csX2" y="csY2"/>
+              </a:cxn>
+              <a:cxn ang="0">
+                <a:pos x="csX3" y="csY3"/>
+              </a:cxn>
+              <a:cxn ang="0">
+                <a:pos x="csX4" y="csY4"/>
+              </a:cxn>
+              <a:cxn ang="0">
+                <a:pos x="csX5" y="csY5"/>
+              </a:cxn>
+              <a:cxn ang="0">
+                <a:pos x="csX6" y="csY6"/>
+              </a:cxn>
+              <a:cxn ang="0">
+                <a:pos x="csX7" y="csY7"/>
+              </a:cxn>
+              <a:cxn ang="0">
+                <a:pos x="csX8" y="csY8"/>
+              </a:cxn>
+              <a:cxn ang="0">
+                <a:pos x="csX9" y="csY9"/>
+              </a:cxn>
+              <a:cxn ang="0">
+                <a:pos x="csX10" y="csY10"/>
+              </a:cxn>
+              <a:cxn ang="0">
+                <a:pos x="csX11" y="csY11"/>
+              </a:cxn>
+              <a:cxn ang="0">
+                <a:pos x="csX12" y="csY12"/>
+              </a:cxn>
+              <a:cxn ang="0">
+                <a:pos x="csX13" y="csY13"/>
+              </a:cxn>
+              <a:cxn ang="0">
+                <a:pos x="csX14" y="csY14"/>
+              </a:cxn>
+              <a:cxn ang="0">
+                <a:pos x="csX15" y="csY15"/>
+              </a:cxn>
+            </a:cxnLst>
+            <a:rect l="l" t="t" r="r" b="b"/>
+            <a:pathLst>
+              <a:path w="12814978" h="6858000">
+                <a:moveTo>
+                  <a:pt x="12192000" y="4565567"/>
+                </a:moveTo>
+                <a:lnTo>
+                  <a:pt x="12288588" y="4624246"/>
+                </a:lnTo>
+                <a:cubicBezTo>
+                  <a:pt x="12606174" y="4838803"/>
+                  <a:pt x="12814978" y="5202150"/>
+                  <a:pt x="12814978" y="5614266"/>
+                </a:cubicBezTo>
+                <a:cubicBezTo>
+                  <a:pt x="12814978" y="6026383"/>
+                  <a:pt x="12606174" y="6389730"/>
+                  <a:pt x="12288588" y="6604287"/>
+                </a:cubicBezTo>
+                <a:lnTo>
+                  <a:pt x="12192000" y="6662966"/>
+                </a:lnTo>
+                <a:close/>
+                <a:moveTo>
+                  <a:pt x="0" y="0"/>
+                </a:moveTo>
+                <a:lnTo>
+                  <a:pt x="12192000" y="0"/>
+                </a:lnTo>
+                <a:lnTo>
+                  <a:pt x="12192000" y="4565567"/>
+                </a:lnTo>
+                <a:lnTo>
+                  <a:pt x="12190149" y="4564442"/>
+                </a:lnTo>
+                <a:cubicBezTo>
+                  <a:pt x="12020978" y="4472543"/>
+                  <a:pt x="11827112" y="4420342"/>
+                  <a:pt x="11621054" y="4420342"/>
+                </a:cubicBezTo>
+                <a:cubicBezTo>
+                  <a:pt x="10961668" y="4420342"/>
+                  <a:pt x="10427130" y="4954880"/>
+                  <a:pt x="10427130" y="5614266"/>
+                </a:cubicBezTo>
+                <a:cubicBezTo>
+                  <a:pt x="10427130" y="6273652"/>
+                  <a:pt x="10961668" y="6808190"/>
+                  <a:pt x="11621054" y="6808190"/>
+                </a:cubicBezTo>
+                <a:cubicBezTo>
+                  <a:pt x="11827112" y="6808190"/>
+                  <a:pt x="12020978" y="6755989"/>
+                  <a:pt x="12190149" y="6664090"/>
+                </a:cubicBezTo>
+                <a:lnTo>
+                  <a:pt x="12192000" y="6662966"/>
+                </a:lnTo>
+                <a:lnTo>
+                  <a:pt x="12192000" y="6858000"/>
+                </a:lnTo>
+                <a:lnTo>
+                  <a:pt x="0" y="6858000"/>
+                </a:lnTo>
+                <a:close/>
+              </a:path>
+            </a:pathLst>
+          </a:custGeom>
+          <a:solidFill>
+            <a:srgbClr val="000000">
+              <a:alpha val="20000"/>
+            </a:srgbClr>
+          </a:solidFill>
+          <a:ln>
+            <a:noFill/>
+          </a:ln>
+        </p:spPr>
+        <p:style>
+          <a:lnRef idx="2">
+            <a:schemeClr val="accent1">
+              <a:shade val="15000"/>
+            </a:schemeClr>
+          </a:lnRef>
+          <a:fillRef idx="1">
+            <a:schemeClr val="accent1"/>
+          </a:fillRef>
+          <a:effectRef idx="0">
+            <a:schemeClr val="accent1"/>
+          </a:effectRef>
+          <a:fontRef idx="minor">
+            <a:schemeClr val="lt1"/>
+          </a:fontRef>
+        </p:style>
+        <p:txBody>
+          <a:bodyPr wrap="square" rtlCol="0" anchor="ctr">
+            <a:noAutofit/>
+          </a:bodyPr>
+          <a:lstStyle/>
+          <a:p>
+            <a:pPr algn="ctr"/>
+            <a:endParaRPr lang="ja-JP" altLang="en-US"/>
+          </a:p>
+        </p:txBody>
+      </p:sp>
+    </p:spTree>
+    <p:extLst>
+      <p:ext uri="{BB962C8B-B14F-4D97-AF65-F5344CB8AC3E}">
+        <p14:creationId xmlns:p14="http://schemas.microsoft.com/office/powerpoint/2010/main" val="4113332473"/>
+      </p:ext>
+    </p:extLst>
+  </p:cSld>
+  <p:clrMapOvr>
+    <a:masterClrMapping/>
+  </p:clrMapOvr>
+</p:sld>
+</file>
+
+<file path=ppt/slides/slide11.xml><?xml version="1.0" encoding="utf-8"?>
+<p:sld xmlns:a="http://schemas.openxmlformats.org/drawingml/2006/main" xmlns:r="http://schemas.openxmlformats.org/officeDocument/2006/relationships" xmlns:p="http://schemas.openxmlformats.org/presentationml/2006/main">
+  <p:cSld>
+    <p:spTree>
+      <p:nvGrpSpPr>
+        <p:cNvPr id="1" name="">
+          <a:extLst>
+            <a:ext uri="{FF2B5EF4-FFF2-40B4-BE49-F238E27FC236}">
+              <a16:creationId xmlns:a16="http://schemas.microsoft.com/office/drawing/2014/main" id="{B4275742-E758-DE0B-656C-EED908133C78}"/>
+            </a:ext>
+          </a:extLst>
+        </p:cNvPr>
+        <p:cNvGrpSpPr/>
+        <p:nvPr/>
+      </p:nvGrpSpPr>
+      <p:grpSpPr>
+        <a:xfrm>
+          <a:off x="0" y="0"/>
+          <a:ext cx="0" cy="0"/>
+          <a:chOff x="0" y="0"/>
+          <a:chExt cx="0" cy="0"/>
+        </a:xfrm>
+      </p:grpSpPr>
+      <p:sp>
+        <p:nvSpPr>
+          <p:cNvPr id="8" name="フリーフォーム: 図形 7">
+            <a:extLst>
+              <a:ext uri="{FF2B5EF4-FFF2-40B4-BE49-F238E27FC236}">
+                <a16:creationId xmlns:a16="http://schemas.microsoft.com/office/drawing/2014/main" id="{E63BA42D-73C1-33CD-55A8-43E0A6466227}"/>
+              </a:ext>
+            </a:extLst>
+          </p:cNvPr>
+          <p:cNvSpPr/>
+          <p:nvPr/>
+        </p:nvSpPr>
+        <p:spPr>
+          <a:xfrm>
+            <a:off x="0" y="0"/>
+            <a:ext cx="12192000" cy="6858000"/>
+          </a:xfrm>
+          <a:custGeom>
+            <a:avLst/>
+            <a:gdLst>
+              <a:gd name="csX0" fmla="*/ 1437763 w 12192000"/>
+              <a:gd name="csY0" fmla="*/ 3572851 h 6858000"/>
+              <a:gd name="csX1" fmla="*/ 1437763 w 12192000"/>
+              <a:gd name="csY1" fmla="*/ 3987676 h 6858000"/>
+              <a:gd name="csX2" fmla="*/ 1437763 w 12192000"/>
+              <a:gd name="csY2" fmla="*/ 5727266 h 6858000"/>
+              <a:gd name="csX3" fmla="*/ 2511254 w 12192000"/>
+              <a:gd name="csY3" fmla="*/ 5727266 h 6858000"/>
+              <a:gd name="csX4" fmla="*/ 2511254 w 12192000"/>
+              <a:gd name="csY4" fmla="*/ 3987676 h 6858000"/>
+              <a:gd name="csX5" fmla="*/ 10754235 w 12192000"/>
+              <a:gd name="csY5" fmla="*/ 3987676 h 6858000"/>
+              <a:gd name="csX6" fmla="*/ 10754235 w 12192000"/>
+              <a:gd name="csY6" fmla="*/ 3572851 h 6858000"/>
+              <a:gd name="csX7" fmla="*/ 2511254 w 12192000"/>
+              <a:gd name="csY7" fmla="*/ 3572851 h 6858000"/>
+              <a:gd name="csX8" fmla="*/ 0 w 12192000"/>
+              <a:gd name="csY8" fmla="*/ 0 h 6858000"/>
+              <a:gd name="csX9" fmla="*/ 12192000 w 12192000"/>
+              <a:gd name="csY9" fmla="*/ 0 h 6858000"/>
+              <a:gd name="csX10" fmla="*/ 12192000 w 12192000"/>
+              <a:gd name="csY10" fmla="*/ 6858000 h 6858000"/>
+              <a:gd name="csX11" fmla="*/ 0 w 12192000"/>
+              <a:gd name="csY11" fmla="*/ 6858000 h 6858000"/>
+            </a:gdLst>
+            <a:ahLst/>
+            <a:cxnLst>
+              <a:cxn ang="0">
+                <a:pos x="csX0" y="csY0"/>
+              </a:cxn>
+              <a:cxn ang="0">
+                <a:pos x="csX1" y="csY1"/>
+              </a:cxn>
+              <a:cxn ang="0">
+                <a:pos x="csX2" y="csY2"/>
+              </a:cxn>
+              <a:cxn ang="0">
+                <a:pos x="csX3" y="csY3"/>
+              </a:cxn>
+              <a:cxn ang="0">
+                <a:pos x="csX4" y="csY4"/>
+              </a:cxn>
+              <a:cxn ang="0">
+                <a:pos x="csX5" y="csY5"/>
+              </a:cxn>
+              <a:cxn ang="0">
+                <a:pos x="csX6" y="csY6"/>
+              </a:cxn>
+              <a:cxn ang="0">
+                <a:pos x="csX7" y="csY7"/>
+              </a:cxn>
+              <a:cxn ang="0">
+                <a:pos x="csX8" y="csY8"/>
+              </a:cxn>
+              <a:cxn ang="0">
+                <a:pos x="csX9" y="csY9"/>
+              </a:cxn>
+              <a:cxn ang="0">
+                <a:pos x="csX10" y="csY10"/>
+              </a:cxn>
+              <a:cxn ang="0">
+                <a:pos x="csX11" y="csY11"/>
+              </a:cxn>
+            </a:cxnLst>
+            <a:rect l="l" t="t" r="r" b="b"/>
+            <a:pathLst>
+              <a:path w="12192000" h="6858000">
+                <a:moveTo>
+                  <a:pt x="1437763" y="3572851"/>
+                </a:moveTo>
+                <a:lnTo>
+                  <a:pt x="1437763" y="3987676"/>
+                </a:lnTo>
+                <a:lnTo>
+                  <a:pt x="1437763" y="5727266"/>
+                </a:lnTo>
+                <a:lnTo>
+                  <a:pt x="2511254" y="5727266"/>
+                </a:lnTo>
+                <a:lnTo>
+                  <a:pt x="2511254" y="3987676"/>
+                </a:lnTo>
+                <a:lnTo>
+                  <a:pt x="10754235" y="3987676"/>
+                </a:lnTo>
+                <a:lnTo>
+                  <a:pt x="10754235" y="3572851"/>
+                </a:lnTo>
+                <a:lnTo>
+                  <a:pt x="2511254" y="3572851"/>
+                </a:lnTo>
+                <a:close/>
+                <a:moveTo>
+                  <a:pt x="0" y="0"/>
+                </a:moveTo>
+                <a:lnTo>
+                  <a:pt x="12192000" y="0"/>
+                </a:lnTo>
+                <a:lnTo>
+                  <a:pt x="12192000" y="6858000"/>
+                </a:lnTo>
+                <a:lnTo>
+                  <a:pt x="0" y="6858000"/>
+                </a:lnTo>
+                <a:close/>
+              </a:path>
+            </a:pathLst>
+          </a:custGeom>
+          <a:solidFill>
+            <a:srgbClr val="000000">
+              <a:alpha val="20000"/>
+            </a:srgbClr>
+          </a:solidFill>
+          <a:ln>
+            <a:noFill/>
+          </a:ln>
+        </p:spPr>
+        <p:style>
+          <a:lnRef idx="2">
+            <a:schemeClr val="accent1">
+              <a:shade val="15000"/>
+            </a:schemeClr>
+          </a:lnRef>
+          <a:fillRef idx="1">
+            <a:schemeClr val="accent1"/>
+          </a:fillRef>
+          <a:effectRef idx="0">
+            <a:schemeClr val="accent1"/>
+          </a:effectRef>
+          <a:fontRef idx="minor">
+            <a:schemeClr val="lt1"/>
+          </a:fontRef>
+        </p:style>
+        <p:txBody>
+          <a:bodyPr wrap="square" rtlCol="0" anchor="ctr">
+            <a:noAutofit/>
+          </a:bodyPr>
+          <a:lstStyle/>
+          <a:p>
+            <a:pPr algn="ctr"/>
+            <a:endParaRPr lang="ja-JP" altLang="en-US"/>
+          </a:p>
+        </p:txBody>
+      </p:sp>
+      <p:grpSp>
+        <p:nvGrpSpPr>
+          <p:cNvPr id="2" name="グループ化 1">
+            <a:extLst>
+              <a:ext uri="{FF2B5EF4-FFF2-40B4-BE49-F238E27FC236}">
+                <a16:creationId xmlns:a16="http://schemas.microsoft.com/office/drawing/2014/main" id="{E12D0B43-E338-038C-70F5-BCAA45DD4525}"/>
+              </a:ext>
+            </a:extLst>
+          </p:cNvPr>
+          <p:cNvGrpSpPr/>
+          <p:nvPr/>
+        </p:nvGrpSpPr>
+        <p:grpSpPr>
+          <a:xfrm>
+            <a:off x="10018744" y="2655799"/>
+            <a:ext cx="1614399" cy="722865"/>
+            <a:chOff x="2328672" y="1310640"/>
+            <a:chExt cx="3267456" cy="1463040"/>
+          </a:xfrm>
+          <a:effectLst>
+            <a:outerShdw blurRad="50800" dist="38100" dir="2700000" algn="tl" rotWithShape="0">
+              <a:prstClr val="black">
+                <a:alpha val="40000"/>
+              </a:prstClr>
+            </a:outerShdw>
+          </a:effectLst>
+        </p:grpSpPr>
+        <p:grpSp>
+          <p:nvGrpSpPr>
+            <p:cNvPr id="3" name="グループ化 2">
+              <a:extLst>
+                <a:ext uri="{FF2B5EF4-FFF2-40B4-BE49-F238E27FC236}">
+                  <a16:creationId xmlns:a16="http://schemas.microsoft.com/office/drawing/2014/main" id="{5DD90B5B-3C01-EE5F-1301-E0BD9B715581}"/>
+                </a:ext>
+              </a:extLst>
+            </p:cNvPr>
+            <p:cNvGrpSpPr/>
+            <p:nvPr/>
+          </p:nvGrpSpPr>
+          <p:grpSpPr>
+            <a:xfrm>
+              <a:off x="2328672" y="1310640"/>
+              <a:ext cx="3267456" cy="1463040"/>
+              <a:chOff x="2663952" y="1414272"/>
+              <a:chExt cx="5108448" cy="3023616"/>
+            </a:xfrm>
+          </p:grpSpPr>
+          <p:sp>
+            <p:nvSpPr>
+              <p:cNvPr id="5" name="思考の吹き出し: 雲形 4">
+                <a:extLst>
+                  <a:ext uri="{FF2B5EF4-FFF2-40B4-BE49-F238E27FC236}">
+                    <a16:creationId xmlns:a16="http://schemas.microsoft.com/office/drawing/2014/main" id="{C214408C-0428-999D-B0C4-2AAB6DF14465}"/>
+                  </a:ext>
+                </a:extLst>
+              </p:cNvPr>
+              <p:cNvSpPr/>
+              <p:nvPr/>
+            </p:nvSpPr>
+            <p:spPr>
+              <a:xfrm rot="397592">
+                <a:off x="2663952" y="1414272"/>
+                <a:ext cx="5108448" cy="3023616"/>
+              </a:xfrm>
+              <a:prstGeom prst="cloudCallout">
+                <a:avLst>
+                  <a:gd name="adj1" fmla="val -23502"/>
+                  <a:gd name="adj2" fmla="val 92894"/>
+                </a:avLst>
+              </a:prstGeom>
+              <a:solidFill>
+                <a:schemeClr val="bg1"/>
+              </a:solidFill>
+              <a:ln w="12700">
+                <a:solidFill>
+                  <a:schemeClr val="tx1"/>
+                </a:solidFill>
+              </a:ln>
+            </p:spPr>
+            <p:style>
+              <a:lnRef idx="2">
+                <a:schemeClr val="accent1">
+                  <a:shade val="15000"/>
+                </a:schemeClr>
+              </a:lnRef>
+              <a:fillRef idx="1">
+                <a:schemeClr val="accent1"/>
+              </a:fillRef>
+              <a:effectRef idx="0">
+                <a:schemeClr val="accent1"/>
+              </a:effectRef>
+              <a:fontRef idx="minor">
+                <a:schemeClr val="lt1"/>
+              </a:fontRef>
+            </p:style>
+            <p:txBody>
+              <a:bodyPr rtlCol="0" anchor="ctr"/>
+              <a:lstStyle/>
+              <a:p>
+                <a:pPr algn="ctr"/>
+                <a:endParaRPr kumimoji="1" lang="ja-JP" altLang="en-US" sz="1200">
+                  <a:latin typeface="Cascadia Mono" panose="020B0609020000020004" pitchFamily="49" charset="0"/>
+                  <a:cs typeface="Cascadia Mono" panose="020B0609020000020004" pitchFamily="49" charset="0"/>
+                </a:endParaRPr>
+              </a:p>
+            </p:txBody>
+          </p:sp>
+          <p:sp>
+            <p:nvSpPr>
+              <p:cNvPr id="6" name="正方形/長方形 5">
+                <a:extLst>
+                  <a:ext uri="{FF2B5EF4-FFF2-40B4-BE49-F238E27FC236}">
+                    <a16:creationId xmlns:a16="http://schemas.microsoft.com/office/drawing/2014/main" id="{B6C08684-7D6D-16D2-6B93-C9FBF3F9196D}"/>
+                  </a:ext>
+                </a:extLst>
+              </p:cNvPr>
+              <p:cNvSpPr/>
+              <p:nvPr/>
+            </p:nvSpPr>
+            <p:spPr>
+              <a:xfrm rot="3751454">
+                <a:off x="6522721" y="3273552"/>
+                <a:ext cx="676656" cy="219456"/>
+              </a:xfrm>
+              <a:prstGeom prst="rect">
+                <a:avLst/>
+              </a:prstGeom>
+              <a:solidFill>
+                <a:schemeClr val="bg1"/>
+              </a:solidFill>
+              <a:ln>
+                <a:noFill/>
+              </a:ln>
+            </p:spPr>
+            <p:style>
+              <a:lnRef idx="2">
+                <a:schemeClr val="accent1">
+                  <a:shade val="15000"/>
+                </a:schemeClr>
+              </a:lnRef>
+              <a:fillRef idx="1">
+                <a:schemeClr val="accent1"/>
+              </a:fillRef>
+              <a:effectRef idx="0">
+                <a:schemeClr val="accent1"/>
+              </a:effectRef>
+              <a:fontRef idx="minor">
+                <a:schemeClr val="lt1"/>
+              </a:fontRef>
+            </p:style>
+            <p:txBody>
+              <a:bodyPr rtlCol="0" anchor="ctr"/>
+              <a:lstStyle/>
+              <a:p>
+                <a:pPr algn="ctr"/>
+                <a:endParaRPr kumimoji="1" lang="ja-JP" altLang="en-US" sz="1200">
+                  <a:latin typeface="Cascadia Mono" panose="020B0609020000020004" pitchFamily="49" charset="0"/>
+                  <a:cs typeface="Cascadia Mono" panose="020B0609020000020004" pitchFamily="49" charset="0"/>
+                </a:endParaRPr>
+              </a:p>
+            </p:txBody>
+          </p:sp>
+          <p:sp>
+            <p:nvSpPr>
+              <p:cNvPr id="7" name="正方形/長方形 6">
+                <a:extLst>
+                  <a:ext uri="{FF2B5EF4-FFF2-40B4-BE49-F238E27FC236}">
+                    <a16:creationId xmlns:a16="http://schemas.microsoft.com/office/drawing/2014/main" id="{832C6153-661B-5726-1570-FF3FC86747D6}"/>
+                  </a:ext>
+                </a:extLst>
+              </p:cNvPr>
+              <p:cNvSpPr/>
+              <p:nvPr/>
+            </p:nvSpPr>
+            <p:spPr>
+              <a:xfrm>
+                <a:off x="2962656" y="2871216"/>
+                <a:ext cx="304800" cy="219456"/>
+              </a:xfrm>
+              <a:prstGeom prst="rect">
+                <a:avLst/>
+              </a:prstGeom>
+              <a:solidFill>
+                <a:schemeClr val="bg1"/>
+              </a:solidFill>
+              <a:ln>
+                <a:noFill/>
+              </a:ln>
+            </p:spPr>
+            <p:style>
+              <a:lnRef idx="2">
+                <a:schemeClr val="accent1">
+                  <a:shade val="15000"/>
+                </a:schemeClr>
+              </a:lnRef>
+              <a:fillRef idx="1">
+                <a:schemeClr val="accent1"/>
+              </a:fillRef>
+              <a:effectRef idx="0">
+                <a:schemeClr val="accent1"/>
+              </a:effectRef>
+              <a:fontRef idx="minor">
+                <a:schemeClr val="lt1"/>
+              </a:fontRef>
+            </p:style>
+            <p:txBody>
+              <a:bodyPr rtlCol="0" anchor="ctr"/>
+              <a:lstStyle/>
+              <a:p>
+                <a:pPr algn="ctr"/>
+                <a:endParaRPr kumimoji="1" lang="ja-JP" altLang="en-US" sz="1200">
+                  <a:latin typeface="Cascadia Mono" panose="020B0609020000020004" pitchFamily="49" charset="0"/>
+                  <a:cs typeface="Cascadia Mono" panose="020B0609020000020004" pitchFamily="49" charset="0"/>
+                </a:endParaRPr>
+              </a:p>
+            </p:txBody>
+          </p:sp>
+          <p:sp>
+            <p:nvSpPr>
+              <p:cNvPr id="16" name="正方形/長方形 15">
+                <a:extLst>
+                  <a:ext uri="{FF2B5EF4-FFF2-40B4-BE49-F238E27FC236}">
+                    <a16:creationId xmlns:a16="http://schemas.microsoft.com/office/drawing/2014/main" id="{C589499D-D0A5-EDFD-8878-5AA9BDD12C7C}"/>
+                  </a:ext>
+                </a:extLst>
+              </p:cNvPr>
+              <p:cNvSpPr/>
+              <p:nvPr/>
+            </p:nvSpPr>
+            <p:spPr>
+              <a:xfrm rot="20257410">
+                <a:off x="7309105" y="2816352"/>
+                <a:ext cx="304800" cy="219456"/>
+              </a:xfrm>
+              <a:prstGeom prst="rect">
+                <a:avLst/>
+              </a:prstGeom>
+              <a:solidFill>
+                <a:schemeClr val="bg1"/>
+              </a:solidFill>
+              <a:ln>
+                <a:noFill/>
+              </a:ln>
+            </p:spPr>
+            <p:style>
+              <a:lnRef idx="2">
+                <a:schemeClr val="accent1">
+                  <a:shade val="15000"/>
+                </a:schemeClr>
+              </a:lnRef>
+              <a:fillRef idx="1">
+                <a:schemeClr val="accent1"/>
+              </a:fillRef>
+              <a:effectRef idx="0">
+                <a:schemeClr val="accent1"/>
+              </a:effectRef>
+              <a:fontRef idx="minor">
+                <a:schemeClr val="lt1"/>
+              </a:fontRef>
+            </p:style>
+            <p:txBody>
+              <a:bodyPr rtlCol="0" anchor="ctr"/>
+              <a:lstStyle/>
+              <a:p>
+                <a:pPr algn="ctr"/>
+                <a:endParaRPr kumimoji="1" lang="ja-JP" altLang="en-US" sz="1200">
+                  <a:latin typeface="Cascadia Mono" panose="020B0609020000020004" pitchFamily="49" charset="0"/>
+                  <a:cs typeface="Cascadia Mono" panose="020B0609020000020004" pitchFamily="49" charset="0"/>
+                </a:endParaRPr>
+              </a:p>
+            </p:txBody>
+          </p:sp>
+        </p:grpSp>
+        <p:sp>
+          <p:nvSpPr>
+            <p:cNvPr id="4" name="正方形/長方形 3">
+              <a:extLst>
+                <a:ext uri="{FF2B5EF4-FFF2-40B4-BE49-F238E27FC236}">
+                  <a16:creationId xmlns:a16="http://schemas.microsoft.com/office/drawing/2014/main" id="{61547E51-7F3E-2DE1-9CE5-B5DE12B5B20C}"/>
+                </a:ext>
+              </a:extLst>
+            </p:cNvPr>
+            <p:cNvSpPr/>
+            <p:nvPr/>
+          </p:nvSpPr>
+          <p:spPr>
+            <a:xfrm>
+              <a:off x="2770073" y="1631130"/>
+              <a:ext cx="2484680" cy="768965"/>
+            </a:xfrm>
+            <a:prstGeom prst="rect">
+              <a:avLst/>
+            </a:prstGeom>
+            <a:solidFill>
+              <a:schemeClr val="bg1"/>
+            </a:solidFill>
+            <a:ln>
+              <a:noFill/>
+            </a:ln>
+          </p:spPr>
+          <p:style>
+            <a:lnRef idx="2">
+              <a:schemeClr val="accent1">
+                <a:shade val="15000"/>
+              </a:schemeClr>
+            </a:lnRef>
+            <a:fillRef idx="1">
+              <a:schemeClr val="accent1"/>
+            </a:fillRef>
+            <a:effectRef idx="0">
+              <a:schemeClr val="accent1"/>
+            </a:effectRef>
+            <a:fontRef idx="minor">
+              <a:schemeClr val="lt1"/>
+            </a:fontRef>
+          </p:style>
+          <p:txBody>
+            <a:bodyPr rtlCol="0" anchor="ctr"/>
+            <a:lstStyle/>
+            <a:p>
+              <a:pPr algn="ctr"/>
+              <a:r>
+                <a:rPr kumimoji="1" lang="en-US" altLang="ja-JP" sz="1200">
+                  <a:solidFill>
+                    <a:schemeClr val="tx1"/>
+                  </a:solidFill>
+                  <a:latin typeface="Cascadia Mono" panose="020B0609020000020004" pitchFamily="49" charset="0"/>
+                  <a:cs typeface="Cascadia Mono" panose="020B0609020000020004" pitchFamily="49" charset="0"/>
+                </a:rPr>
+                <a:t>optional</a:t>
+              </a:r>
+              <a:endParaRPr kumimoji="1" lang="ja-JP" altLang="en-US" sz="1200">
+                <a:solidFill>
+                  <a:schemeClr val="tx1"/>
+                </a:solidFill>
+                <a:latin typeface="Cascadia Mono" panose="020B0609020000020004" pitchFamily="49" charset="0"/>
+                <a:cs typeface="Cascadia Mono" panose="020B0609020000020004" pitchFamily="49" charset="0"/>
+              </a:endParaRPr>
+            </a:p>
+          </p:txBody>
+        </p:sp>
+      </p:grpSp>
+    </p:spTree>
+    <p:extLst>
+      <p:ext uri="{BB962C8B-B14F-4D97-AF65-F5344CB8AC3E}">
+        <p14:creationId xmlns:p14="http://schemas.microsoft.com/office/powerpoint/2010/main" val="392986609"/>
+      </p:ext>
+    </p:extLst>
+  </p:cSld>
+  <p:clrMapOvr>
+    <a:masterClrMapping/>
+  </p:clrMapOvr>
+</p:sld>
+</file>
+
+<file path=ppt/slides/slide12.xml><?xml version="1.0" encoding="utf-8"?>
+<p:sld xmlns:a="http://schemas.openxmlformats.org/drawingml/2006/main" xmlns:r="http://schemas.openxmlformats.org/officeDocument/2006/relationships" xmlns:p="http://schemas.openxmlformats.org/presentationml/2006/main">
+  <p:cSld>
+    <p:spTree>
+      <p:nvGrpSpPr>
+        <p:cNvPr id="1" name="">
+          <a:extLst>
+            <a:ext uri="{FF2B5EF4-FFF2-40B4-BE49-F238E27FC236}">
               <a16:creationId xmlns:a16="http://schemas.microsoft.com/office/drawing/2014/main" id="{000D65ED-AB26-B0BD-CED1-C183D7EF3C95}"/>
             </a:ext>
           </a:extLst>
@@ -18016,7 +17884,7 @@
 </p:sld>
 </file>
 
-<file path=ppt/slides/slide11.xml><?xml version="1.0" encoding="utf-8"?>
+<file path=ppt/slides/slide13.xml><?xml version="1.0" encoding="utf-8"?>
 <p:sld xmlns:a="http://schemas.openxmlformats.org/drawingml/2006/main" xmlns:r="http://schemas.openxmlformats.org/officeDocument/2006/relationships" xmlns:p="http://schemas.openxmlformats.org/presentationml/2006/main">
   <p:cSld>
     <p:spTree>
@@ -18194,7 +18062,7 @@
 </p:sld>
 </file>
 
-<file path=ppt/slides/slide12.xml><?xml version="1.0" encoding="utf-8"?>
+<file path=ppt/slides/slide14.xml><?xml version="1.0" encoding="utf-8"?>
 <p:sld xmlns:a="http://schemas.openxmlformats.org/drawingml/2006/main" xmlns:r="http://schemas.openxmlformats.org/officeDocument/2006/relationships" xmlns:p="http://schemas.openxmlformats.org/presentationml/2006/main">
   <p:cSld>
     <p:spTree>
@@ -18202,7 +18070,7 @@
         <p:cNvPr id="1" name="">
           <a:extLst>
             <a:ext uri="{FF2B5EF4-FFF2-40B4-BE49-F238E27FC236}">
-              <a16:creationId xmlns:a16="http://schemas.microsoft.com/office/drawing/2014/main" id="{91CE7DE7-323B-F269-5A07-5ACA5E4F0BE2}"/>
+              <a16:creationId xmlns:a16="http://schemas.microsoft.com/office/drawing/2014/main" id="{CA9CF575-CA67-FBAF-AEDE-63C0B84FD237}"/>
             </a:ext>
           </a:extLst>
         </p:cNvPr>
@@ -18219,10 +18087,10 @@
       </p:grpSpPr>
       <p:sp>
         <p:nvSpPr>
-          <p:cNvPr id="6" name="フリーフォーム: 図形 5">
+          <p:cNvPr id="7" name="フリーフォーム: 図形 6">
             <a:extLst>
               <a:ext uri="{FF2B5EF4-FFF2-40B4-BE49-F238E27FC236}">
-                <a16:creationId xmlns:a16="http://schemas.microsoft.com/office/drawing/2014/main" id="{B101E88B-B97F-707C-C0DB-17B6BD338C3D}"/>
+                <a16:creationId xmlns:a16="http://schemas.microsoft.com/office/drawing/2014/main" id="{7A7BF9F8-403F-CCF3-1DCA-4C5178743A79}"/>
               </a:ext>
             </a:extLst>
           </p:cNvPr>
@@ -18237,14 +18105,14 @@
           <a:custGeom>
             <a:avLst/>
             <a:gdLst>
-              <a:gd name="csX0" fmla="*/ 757646 w 12192000"/>
-              <a:gd name="csY0" fmla="*/ 1602368 h 6858000"/>
-              <a:gd name="csX1" fmla="*/ 757646 w 12192000"/>
-              <a:gd name="csY1" fmla="*/ 2055223 h 6858000"/>
-              <a:gd name="csX2" fmla="*/ 11434354 w 12192000"/>
-              <a:gd name="csY2" fmla="*/ 2055223 h 6858000"/>
-              <a:gd name="csX3" fmla="*/ 11434354 w 12192000"/>
-              <a:gd name="csY3" fmla="*/ 1602368 h 6858000"/>
+              <a:gd name="csX0" fmla="*/ 1437764 w 12192000"/>
+              <a:gd name="csY0" fmla="*/ 1556711 h 6858000"/>
+              <a:gd name="csX1" fmla="*/ 1437764 w 12192000"/>
+              <a:gd name="csY1" fmla="*/ 1980457 h 6858000"/>
+              <a:gd name="csX2" fmla="*/ 10754236 w 12192000"/>
+              <a:gd name="csY2" fmla="*/ 1980457 h 6858000"/>
+              <a:gd name="csX3" fmla="*/ 10754236 w 12192000"/>
+              <a:gd name="csY3" fmla="*/ 1556711 h 6858000"/>
               <a:gd name="csX4" fmla="*/ 0 w 12192000"/>
               <a:gd name="csY4" fmla="*/ 0 h 6858000"/>
               <a:gd name="csX5" fmla="*/ 12192000 w 12192000"/>
@@ -18285,16 +18153,16 @@
             <a:pathLst>
               <a:path w="12192000" h="6858000">
                 <a:moveTo>
-                  <a:pt x="757646" y="1602368"/>
+                  <a:pt x="1437764" y="1556711"/>
                 </a:moveTo>
                 <a:lnTo>
-                  <a:pt x="757646" y="2055223"/>
+                  <a:pt x="1437764" y="1980457"/>
                 </a:lnTo>
                 <a:lnTo>
-                  <a:pt x="11434354" y="2055223"/>
+                  <a:pt x="10754236" y="1980457"/>
                 </a:lnTo>
                 <a:lnTo>
-                  <a:pt x="11434354" y="1602368"/>
+                  <a:pt x="10754236" y="1556711"/>
                 </a:lnTo>
                 <a:close/>
                 <a:moveTo>
@@ -18352,7 +18220,7 @@
     </p:spTree>
     <p:extLst>
       <p:ext uri="{BB962C8B-B14F-4D97-AF65-F5344CB8AC3E}">
-        <p14:creationId xmlns:p14="http://schemas.microsoft.com/office/powerpoint/2010/main" val="87978248"/>
+        <p14:creationId xmlns:p14="http://schemas.microsoft.com/office/powerpoint/2010/main" val="2479550699"/>
       </p:ext>
     </p:extLst>
   </p:cSld>
@@ -18362,7 +18230,7 @@
 </p:sld>
 </file>
 
-<file path=ppt/slides/slide13.xml><?xml version="1.0" encoding="utf-8"?>
+<file path=ppt/slides/slide15.xml><?xml version="1.0" encoding="utf-8"?>
 <p:sld xmlns:a="http://schemas.openxmlformats.org/drawingml/2006/main" xmlns:r="http://schemas.openxmlformats.org/officeDocument/2006/relationships" xmlns:p="http://schemas.openxmlformats.org/presentationml/2006/main">
   <p:cSld>
     <p:spTree>
@@ -18546,7 +18414,7 @@
 </p:sld>
 </file>
 
-<file path=ppt/slides/slide14.xml><?xml version="1.0" encoding="utf-8"?>
+<file path=ppt/slides/slide16.xml><?xml version="1.0" encoding="utf-8"?>
 <p:sld xmlns:a="http://schemas.openxmlformats.org/drawingml/2006/main" xmlns:r="http://schemas.openxmlformats.org/officeDocument/2006/relationships" xmlns:p="http://schemas.openxmlformats.org/presentationml/2006/main">
   <p:cSld>
     <p:spTree>
@@ -18730,7 +18598,7 @@
 </p:sld>
 </file>
 
-<file path=ppt/slides/slide15.xml><?xml version="1.0" encoding="utf-8"?>
+<file path=ppt/slides/slide17.xml><?xml version="1.0" encoding="utf-8"?>
 <p:sld xmlns:a="http://schemas.openxmlformats.org/drawingml/2006/main" xmlns:r="http://schemas.openxmlformats.org/officeDocument/2006/relationships" xmlns:p="http://schemas.openxmlformats.org/presentationml/2006/main">
   <p:cSld>
     <p:spTree>
@@ -18738,7 +18606,7 @@
         <p:cNvPr id="1" name="">
           <a:extLst>
             <a:ext uri="{FF2B5EF4-FFF2-40B4-BE49-F238E27FC236}">
-              <a16:creationId xmlns:a16="http://schemas.microsoft.com/office/drawing/2014/main" id="{D4B3923F-CE3E-A8C5-436F-C319723C6CBA}"/>
+              <a16:creationId xmlns:a16="http://schemas.microsoft.com/office/drawing/2014/main" id="{51A5E04C-770F-1B90-ADDC-F9670DC63987}"/>
             </a:ext>
           </a:extLst>
         </p:cNvPr>
@@ -18755,10 +18623,10 @@
       </p:grpSpPr>
       <p:sp>
         <p:nvSpPr>
-          <p:cNvPr id="5" name="フリーフォーム: 図形 4">
+          <p:cNvPr id="4" name="フリーフォーム: 図形 3">
             <a:extLst>
               <a:ext uri="{FF2B5EF4-FFF2-40B4-BE49-F238E27FC236}">
-                <a16:creationId xmlns:a16="http://schemas.microsoft.com/office/drawing/2014/main" id="{691BD15F-346A-0D98-2AFF-B992FD24942E}"/>
+                <a16:creationId xmlns:a16="http://schemas.microsoft.com/office/drawing/2014/main" id="{94C47695-8592-4C34-5043-92953CA80837}"/>
               </a:ext>
             </a:extLst>
           </p:cNvPr>
@@ -18773,14 +18641,14 @@
           <a:custGeom>
             <a:avLst/>
             <a:gdLst>
-              <a:gd name="csX0" fmla="*/ 757646 w 12192000"/>
-              <a:gd name="csY0" fmla="*/ 2046513 h 6858000"/>
-              <a:gd name="csX1" fmla="*/ 757646 w 12192000"/>
-              <a:gd name="csY1" fmla="*/ 2699656 h 6858000"/>
-              <a:gd name="csX2" fmla="*/ 11434354 w 12192000"/>
-              <a:gd name="csY2" fmla="*/ 2699656 h 6858000"/>
-              <a:gd name="csX3" fmla="*/ 11434354 w 12192000"/>
-              <a:gd name="csY3" fmla="*/ 2046513 h 6858000"/>
+              <a:gd name="csX0" fmla="*/ 1437764 w 12192000"/>
+              <a:gd name="csY0" fmla="*/ 1980456 h 6858000"/>
+              <a:gd name="csX1" fmla="*/ 1437764 w 12192000"/>
+              <a:gd name="csY1" fmla="*/ 2560319 h 6858000"/>
+              <a:gd name="csX2" fmla="*/ 10754236 w 12192000"/>
+              <a:gd name="csY2" fmla="*/ 2560319 h 6858000"/>
+              <a:gd name="csX3" fmla="*/ 10754236 w 12192000"/>
+              <a:gd name="csY3" fmla="*/ 1980456 h 6858000"/>
               <a:gd name="csX4" fmla="*/ 0 w 12192000"/>
               <a:gd name="csY4" fmla="*/ 0 h 6858000"/>
               <a:gd name="csX5" fmla="*/ 12192000 w 12192000"/>
@@ -18821,16 +18689,16 @@
             <a:pathLst>
               <a:path w="12192000" h="6858000">
                 <a:moveTo>
-                  <a:pt x="757646" y="2046513"/>
+                  <a:pt x="1437764" y="1980456"/>
                 </a:moveTo>
                 <a:lnTo>
-                  <a:pt x="757646" y="2699656"/>
+                  <a:pt x="1437764" y="2560319"/>
                 </a:lnTo>
                 <a:lnTo>
-                  <a:pt x="11434354" y="2699656"/>
+                  <a:pt x="10754236" y="2560319"/>
                 </a:lnTo>
                 <a:lnTo>
-                  <a:pt x="11434354" y="2046513"/>
+                  <a:pt x="10754236" y="1980456"/>
                 </a:lnTo>
                 <a:close/>
                 <a:moveTo>
@@ -18888,7 +18756,7 @@
     </p:spTree>
     <p:extLst>
       <p:ext uri="{BB962C8B-B14F-4D97-AF65-F5344CB8AC3E}">
-        <p14:creationId xmlns:p14="http://schemas.microsoft.com/office/powerpoint/2010/main" val="1758691830"/>
+        <p14:creationId xmlns:p14="http://schemas.microsoft.com/office/powerpoint/2010/main" val="1564734483"/>
       </p:ext>
     </p:extLst>
   </p:cSld>
@@ -18898,7 +18766,7 @@
 </p:sld>
 </file>
 
-<file path=ppt/slides/slide16.xml><?xml version="1.0" encoding="utf-8"?>
+<file path=ppt/slides/slide18.xml><?xml version="1.0" encoding="utf-8"?>
 <p:sld xmlns:a="http://schemas.openxmlformats.org/drawingml/2006/main" xmlns:r="http://schemas.openxmlformats.org/officeDocument/2006/relationships" xmlns:p="http://schemas.openxmlformats.org/presentationml/2006/main">
   <p:cSld>
     <p:spTree>
@@ -18996,7 +18864,7 @@
     </p:spTree>
     <p:extLst>
       <p:ext uri="{BB962C8B-B14F-4D97-AF65-F5344CB8AC3E}">
-        <p14:creationId xmlns:p14="http://schemas.microsoft.com/office/powerpoint/2010/main" val="1467880725"/>
+        <p14:creationId xmlns:p14="http://schemas.microsoft.com/office/powerpoint/2010/main" val="773515612"/>
       </p:ext>
     </p:extLst>
   </p:cSld>
@@ -19228,7 +19096,7 @@
         <p:cNvPr id="1" name="">
           <a:extLst>
             <a:ext uri="{FF2B5EF4-FFF2-40B4-BE49-F238E27FC236}">
-              <a16:creationId xmlns:a16="http://schemas.microsoft.com/office/drawing/2014/main" id="{0D8BE5A8-0CDC-AB44-230D-5C9EB500FC9D}"/>
+              <a16:creationId xmlns:a16="http://schemas.microsoft.com/office/drawing/2014/main" id="{4509990F-B93E-9633-B108-FCCF5F3B9CE7}"/>
             </a:ext>
           </a:extLst>
         </p:cNvPr>
@@ -19245,10 +19113,10 @@
       </p:grpSpPr>
       <p:sp>
         <p:nvSpPr>
-          <p:cNvPr id="5" name="フリーフォーム: 図形 4">
+          <p:cNvPr id="4" name="フリーフォーム: 図形 3">
             <a:extLst>
               <a:ext uri="{FF2B5EF4-FFF2-40B4-BE49-F238E27FC236}">
-                <a16:creationId xmlns:a16="http://schemas.microsoft.com/office/drawing/2014/main" id="{2D669E66-D9BA-BDB8-C0E6-AC5AA79BEF1E}"/>
+                <a16:creationId xmlns:a16="http://schemas.microsoft.com/office/drawing/2014/main" id="{8C499E7B-64E0-750C-EF9E-CC10008DE443}"/>
               </a:ext>
             </a:extLst>
           </p:cNvPr>
@@ -19263,14 +19131,14 @@
           <a:custGeom>
             <a:avLst/>
             <a:gdLst>
-              <a:gd name="csX0" fmla="*/ 757646 w 12192000"/>
-              <a:gd name="csY0" fmla="*/ 2690946 h 6858000"/>
-              <a:gd name="csX1" fmla="*/ 757646 w 12192000"/>
-              <a:gd name="csY1" fmla="*/ 3344089 h 6858000"/>
-              <a:gd name="csX2" fmla="*/ 11434354 w 12192000"/>
-              <a:gd name="csY2" fmla="*/ 3344089 h 6858000"/>
-              <a:gd name="csX3" fmla="*/ 11434354 w 12192000"/>
-              <a:gd name="csY3" fmla="*/ 2690946 h 6858000"/>
+              <a:gd name="csX0" fmla="*/ 1437764 w 12192000"/>
+              <a:gd name="csY0" fmla="*/ 2560320 h 6858000"/>
+              <a:gd name="csX1" fmla="*/ 1437764 w 12192000"/>
+              <a:gd name="csY1" fmla="*/ 3140182 h 6858000"/>
+              <a:gd name="csX2" fmla="*/ 10754236 w 12192000"/>
+              <a:gd name="csY2" fmla="*/ 3140182 h 6858000"/>
+              <a:gd name="csX3" fmla="*/ 10754236 w 12192000"/>
+              <a:gd name="csY3" fmla="*/ 2560320 h 6858000"/>
               <a:gd name="csX4" fmla="*/ 0 w 12192000"/>
               <a:gd name="csY4" fmla="*/ 0 h 6858000"/>
               <a:gd name="csX5" fmla="*/ 12192000 w 12192000"/>
@@ -19311,16 +19179,16 @@
             <a:pathLst>
               <a:path w="12192000" h="6858000">
                 <a:moveTo>
-                  <a:pt x="757646" y="2690946"/>
+                  <a:pt x="1437764" y="2560320"/>
                 </a:moveTo>
                 <a:lnTo>
-                  <a:pt x="757646" y="3344089"/>
+                  <a:pt x="1437764" y="3140182"/>
                 </a:lnTo>
                 <a:lnTo>
-                  <a:pt x="11434354" y="3344089"/>
+                  <a:pt x="10754236" y="3140182"/>
                 </a:lnTo>
                 <a:lnTo>
-                  <a:pt x="11434354" y="2690946"/>
+                  <a:pt x="10754236" y="2560320"/>
                 </a:lnTo>
                 <a:close/>
                 <a:moveTo>
@@ -19378,7 +19246,7 @@
     </p:spTree>
     <p:extLst>
       <p:ext uri="{BB962C8B-B14F-4D97-AF65-F5344CB8AC3E}">
-        <p14:creationId xmlns:p14="http://schemas.microsoft.com/office/powerpoint/2010/main" val="250165530"/>
+        <p14:creationId xmlns:p14="http://schemas.microsoft.com/office/powerpoint/2010/main" val="2744726224"/>
       </p:ext>
     </p:extLst>
   </p:cSld>
@@ -19580,7 +19448,7 @@
         <p:cNvPr id="1" name="">
           <a:extLst>
             <a:ext uri="{FF2B5EF4-FFF2-40B4-BE49-F238E27FC236}">
-              <a16:creationId xmlns:a16="http://schemas.microsoft.com/office/drawing/2014/main" id="{5ED95EFB-DD5F-D3F2-34BC-B95FAE9E34CD}"/>
+              <a16:creationId xmlns:a16="http://schemas.microsoft.com/office/drawing/2014/main" id="{CD8E9A92-21AB-8889-0EAF-122719745E5C}"/>
             </a:ext>
           </a:extLst>
         </p:cNvPr>
@@ -19597,10 +19465,10 @@
       </p:grpSpPr>
       <p:sp>
         <p:nvSpPr>
-          <p:cNvPr id="6" name="フリーフォーム: 図形 5">
+          <p:cNvPr id="9" name="フリーフォーム: 図形 8">
             <a:extLst>
               <a:ext uri="{FF2B5EF4-FFF2-40B4-BE49-F238E27FC236}">
-                <a16:creationId xmlns:a16="http://schemas.microsoft.com/office/drawing/2014/main" id="{7F7FE8D6-F3CC-57D2-4D20-A1BE0258CF66}"/>
+                <a16:creationId xmlns:a16="http://schemas.microsoft.com/office/drawing/2014/main" id="{D1D241B9-6327-9E8E-534B-EA798BDC4EEC}"/>
               </a:ext>
             </a:extLst>
           </p:cNvPr>
@@ -19615,22 +19483,34 @@
           <a:custGeom>
             <a:avLst/>
             <a:gdLst>
-              <a:gd name="csX0" fmla="*/ 757646 w 12192000"/>
-              <a:gd name="csY0" fmla="*/ 4423963 h 6858000"/>
-              <a:gd name="csX1" fmla="*/ 757646 w 12192000"/>
-              <a:gd name="csY1" fmla="*/ 5077106 h 6858000"/>
-              <a:gd name="csX2" fmla="*/ 11434354 w 12192000"/>
-              <a:gd name="csY2" fmla="*/ 5077106 h 6858000"/>
-              <a:gd name="csX3" fmla="*/ 11434354 w 12192000"/>
-              <a:gd name="csY3" fmla="*/ 4423963 h 6858000"/>
-              <a:gd name="csX4" fmla="*/ 0 w 12192000"/>
-              <a:gd name="csY4" fmla="*/ 0 h 6858000"/>
-              <a:gd name="csX5" fmla="*/ 12192000 w 12192000"/>
-              <a:gd name="csY5" fmla="*/ 0 h 6858000"/>
-              <a:gd name="csX6" fmla="*/ 12192000 w 12192000"/>
-              <a:gd name="csY6" fmla="*/ 6858000 h 6858000"/>
-              <a:gd name="csX7" fmla="*/ 0 w 12192000"/>
-              <a:gd name="csY7" fmla="*/ 6858000 h 6858000"/>
+              <a:gd name="csX0" fmla="*/ 1437763 w 12192000"/>
+              <a:gd name="csY0" fmla="*/ 3572851 h 6858000"/>
+              <a:gd name="csX1" fmla="*/ 1437763 w 12192000"/>
+              <a:gd name="csY1" fmla="*/ 4572000 h 6858000"/>
+              <a:gd name="csX2" fmla="*/ 1437763 w 12192000"/>
+              <a:gd name="csY2" fmla="*/ 5151862 h 6858000"/>
+              <a:gd name="csX3" fmla="*/ 1437763 w 12192000"/>
+              <a:gd name="csY3" fmla="*/ 5727266 h 6858000"/>
+              <a:gd name="csX4" fmla="*/ 2511254 w 12192000"/>
+              <a:gd name="csY4" fmla="*/ 5727266 h 6858000"/>
+              <a:gd name="csX5" fmla="*/ 2511254 w 12192000"/>
+              <a:gd name="csY5" fmla="*/ 5151862 h 6858000"/>
+              <a:gd name="csX6" fmla="*/ 10754235 w 12192000"/>
+              <a:gd name="csY6" fmla="*/ 5151862 h 6858000"/>
+              <a:gd name="csX7" fmla="*/ 10754235 w 12192000"/>
+              <a:gd name="csY7" fmla="*/ 4572000 h 6858000"/>
+              <a:gd name="csX8" fmla="*/ 2511254 w 12192000"/>
+              <a:gd name="csY8" fmla="*/ 4572000 h 6858000"/>
+              <a:gd name="csX9" fmla="*/ 2511254 w 12192000"/>
+              <a:gd name="csY9" fmla="*/ 3572851 h 6858000"/>
+              <a:gd name="csX10" fmla="*/ 0 w 12192000"/>
+              <a:gd name="csY10" fmla="*/ 0 h 6858000"/>
+              <a:gd name="csX11" fmla="*/ 12192000 w 12192000"/>
+              <a:gd name="csY11" fmla="*/ 0 h 6858000"/>
+              <a:gd name="csX12" fmla="*/ 12192000 w 12192000"/>
+              <a:gd name="csY12" fmla="*/ 6858000 h 6858000"/>
+              <a:gd name="csX13" fmla="*/ 0 w 12192000"/>
+              <a:gd name="csY13" fmla="*/ 6858000 h 6858000"/>
             </a:gdLst>
             <a:ahLst/>
             <a:cxnLst>
@@ -19658,21 +19538,57 @@
               <a:cxn ang="0">
                 <a:pos x="csX7" y="csY7"/>
               </a:cxn>
+              <a:cxn ang="0">
+                <a:pos x="csX8" y="csY8"/>
+              </a:cxn>
+              <a:cxn ang="0">
+                <a:pos x="csX9" y="csY9"/>
+              </a:cxn>
+              <a:cxn ang="0">
+                <a:pos x="csX10" y="csY10"/>
+              </a:cxn>
+              <a:cxn ang="0">
+                <a:pos x="csX11" y="csY11"/>
+              </a:cxn>
+              <a:cxn ang="0">
+                <a:pos x="csX12" y="csY12"/>
+              </a:cxn>
+              <a:cxn ang="0">
+                <a:pos x="csX13" y="csY13"/>
+              </a:cxn>
             </a:cxnLst>
             <a:rect l="l" t="t" r="r" b="b"/>
             <a:pathLst>
               <a:path w="12192000" h="6858000">
                 <a:moveTo>
-                  <a:pt x="757646" y="4423963"/>
+                  <a:pt x="1437763" y="3572851"/>
                 </a:moveTo>
                 <a:lnTo>
-                  <a:pt x="757646" y="5077106"/>
+                  <a:pt x="1437763" y="4572000"/>
                 </a:lnTo>
                 <a:lnTo>
-                  <a:pt x="11434354" y="5077106"/>
+                  <a:pt x="1437763" y="5151862"/>
                 </a:lnTo>
                 <a:lnTo>
-                  <a:pt x="11434354" y="4423963"/>
+                  <a:pt x="1437763" y="5727266"/>
+                </a:lnTo>
+                <a:lnTo>
+                  <a:pt x="2511254" y="5727266"/>
+                </a:lnTo>
+                <a:lnTo>
+                  <a:pt x="2511254" y="5151862"/>
+                </a:lnTo>
+                <a:lnTo>
+                  <a:pt x="10754235" y="5151862"/>
+                </a:lnTo>
+                <a:lnTo>
+                  <a:pt x="10754235" y="4572000"/>
+                </a:lnTo>
+                <a:lnTo>
+                  <a:pt x="2511254" y="4572000"/>
+                </a:lnTo>
+                <a:lnTo>
+                  <a:pt x="2511254" y="3572851"/>
                 </a:lnTo>
                 <a:close/>
                 <a:moveTo>
@@ -19727,10 +19643,352 @@
           </a:p>
         </p:txBody>
       </p:sp>
+      <p:grpSp>
+        <p:nvGrpSpPr>
+          <p:cNvPr id="10" name="グループ化 9">
+            <a:extLst>
+              <a:ext uri="{FF2B5EF4-FFF2-40B4-BE49-F238E27FC236}">
+                <a16:creationId xmlns:a16="http://schemas.microsoft.com/office/drawing/2014/main" id="{DE8F2589-ABEC-EA81-2935-D24D4293B986}"/>
+              </a:ext>
+            </a:extLst>
+          </p:cNvPr>
+          <p:cNvGrpSpPr/>
+          <p:nvPr/>
+        </p:nvGrpSpPr>
+        <p:grpSpPr>
+          <a:xfrm>
+            <a:off x="10018744" y="3677075"/>
+            <a:ext cx="1614399" cy="722865"/>
+            <a:chOff x="2328672" y="1310640"/>
+            <a:chExt cx="3267456" cy="1463040"/>
+          </a:xfrm>
+          <a:effectLst>
+            <a:outerShdw blurRad="50800" dist="38100" dir="2700000" algn="tl" rotWithShape="0">
+              <a:prstClr val="black">
+                <a:alpha val="40000"/>
+              </a:prstClr>
+            </a:outerShdw>
+          </a:effectLst>
+        </p:grpSpPr>
+        <p:grpSp>
+          <p:nvGrpSpPr>
+            <p:cNvPr id="11" name="グループ化 10">
+              <a:extLst>
+                <a:ext uri="{FF2B5EF4-FFF2-40B4-BE49-F238E27FC236}">
+                  <a16:creationId xmlns:a16="http://schemas.microsoft.com/office/drawing/2014/main" id="{ADA12C11-E597-9120-31BD-862373B52D66}"/>
+                </a:ext>
+              </a:extLst>
+            </p:cNvPr>
+            <p:cNvGrpSpPr/>
+            <p:nvPr/>
+          </p:nvGrpSpPr>
+          <p:grpSpPr>
+            <a:xfrm>
+              <a:off x="2328672" y="1310640"/>
+              <a:ext cx="3267456" cy="1463040"/>
+              <a:chOff x="2663952" y="1414272"/>
+              <a:chExt cx="5108448" cy="3023616"/>
+            </a:xfrm>
+          </p:grpSpPr>
+          <p:sp>
+            <p:nvSpPr>
+              <p:cNvPr id="13" name="思考の吹き出し: 雲形 12">
+                <a:extLst>
+                  <a:ext uri="{FF2B5EF4-FFF2-40B4-BE49-F238E27FC236}">
+                    <a16:creationId xmlns:a16="http://schemas.microsoft.com/office/drawing/2014/main" id="{86E1BA43-7420-FBCC-1B03-0A4A687564B5}"/>
+                  </a:ext>
+                </a:extLst>
+              </p:cNvPr>
+              <p:cNvSpPr/>
+              <p:nvPr/>
+            </p:nvSpPr>
+            <p:spPr>
+              <a:xfrm rot="397592">
+                <a:off x="2663952" y="1414272"/>
+                <a:ext cx="5108448" cy="3023616"/>
+              </a:xfrm>
+              <a:prstGeom prst="cloudCallout">
+                <a:avLst>
+                  <a:gd name="adj1" fmla="val -23502"/>
+                  <a:gd name="adj2" fmla="val 92894"/>
+                </a:avLst>
+              </a:prstGeom>
+              <a:solidFill>
+                <a:schemeClr val="bg1"/>
+              </a:solidFill>
+              <a:ln w="12700">
+                <a:solidFill>
+                  <a:schemeClr val="tx1"/>
+                </a:solidFill>
+              </a:ln>
+            </p:spPr>
+            <p:style>
+              <a:lnRef idx="2">
+                <a:schemeClr val="accent1">
+                  <a:shade val="15000"/>
+                </a:schemeClr>
+              </a:lnRef>
+              <a:fillRef idx="1">
+                <a:schemeClr val="accent1"/>
+              </a:fillRef>
+              <a:effectRef idx="0">
+                <a:schemeClr val="accent1"/>
+              </a:effectRef>
+              <a:fontRef idx="minor">
+                <a:schemeClr val="lt1"/>
+              </a:fontRef>
+            </p:style>
+            <p:txBody>
+              <a:bodyPr rtlCol="0" anchor="ctr"/>
+              <a:lstStyle/>
+              <a:p>
+                <a:pPr algn="ctr"/>
+                <a:endParaRPr kumimoji="1" lang="ja-JP" altLang="en-US" sz="1200">
+                  <a:latin typeface="Cascadia Mono" panose="020B0609020000020004" pitchFamily="49" charset="0"/>
+                  <a:cs typeface="Cascadia Mono" panose="020B0609020000020004" pitchFamily="49" charset="0"/>
+                </a:endParaRPr>
+              </a:p>
+            </p:txBody>
+          </p:sp>
+          <p:sp>
+            <p:nvSpPr>
+              <p:cNvPr id="14" name="正方形/長方形 13">
+                <a:extLst>
+                  <a:ext uri="{FF2B5EF4-FFF2-40B4-BE49-F238E27FC236}">
+                    <a16:creationId xmlns:a16="http://schemas.microsoft.com/office/drawing/2014/main" id="{ED6180C2-F421-750F-6976-7C67F39C9B3D}"/>
+                  </a:ext>
+                </a:extLst>
+              </p:cNvPr>
+              <p:cNvSpPr/>
+              <p:nvPr/>
+            </p:nvSpPr>
+            <p:spPr>
+              <a:xfrm rot="3751454">
+                <a:off x="6522721" y="3273552"/>
+                <a:ext cx="676656" cy="219456"/>
+              </a:xfrm>
+              <a:prstGeom prst="rect">
+                <a:avLst/>
+              </a:prstGeom>
+              <a:solidFill>
+                <a:schemeClr val="bg1"/>
+              </a:solidFill>
+              <a:ln>
+                <a:noFill/>
+              </a:ln>
+            </p:spPr>
+            <p:style>
+              <a:lnRef idx="2">
+                <a:schemeClr val="accent1">
+                  <a:shade val="15000"/>
+                </a:schemeClr>
+              </a:lnRef>
+              <a:fillRef idx="1">
+                <a:schemeClr val="accent1"/>
+              </a:fillRef>
+              <a:effectRef idx="0">
+                <a:schemeClr val="accent1"/>
+              </a:effectRef>
+              <a:fontRef idx="minor">
+                <a:schemeClr val="lt1"/>
+              </a:fontRef>
+            </p:style>
+            <p:txBody>
+              <a:bodyPr rtlCol="0" anchor="ctr"/>
+              <a:lstStyle/>
+              <a:p>
+                <a:pPr algn="ctr"/>
+                <a:endParaRPr kumimoji="1" lang="ja-JP" altLang="en-US" sz="1200">
+                  <a:latin typeface="Cascadia Mono" panose="020B0609020000020004" pitchFamily="49" charset="0"/>
+                  <a:cs typeface="Cascadia Mono" panose="020B0609020000020004" pitchFamily="49" charset="0"/>
+                </a:endParaRPr>
+              </a:p>
+            </p:txBody>
+          </p:sp>
+          <p:sp>
+            <p:nvSpPr>
+              <p:cNvPr id="15" name="正方形/長方形 14">
+                <a:extLst>
+                  <a:ext uri="{FF2B5EF4-FFF2-40B4-BE49-F238E27FC236}">
+                    <a16:creationId xmlns:a16="http://schemas.microsoft.com/office/drawing/2014/main" id="{2FA905A2-B966-791D-BCF7-E8ED1AB4715B}"/>
+                  </a:ext>
+                </a:extLst>
+              </p:cNvPr>
+              <p:cNvSpPr/>
+              <p:nvPr/>
+            </p:nvSpPr>
+            <p:spPr>
+              <a:xfrm>
+                <a:off x="2962656" y="2871216"/>
+                <a:ext cx="304800" cy="219456"/>
+              </a:xfrm>
+              <a:prstGeom prst="rect">
+                <a:avLst/>
+              </a:prstGeom>
+              <a:solidFill>
+                <a:schemeClr val="bg1"/>
+              </a:solidFill>
+              <a:ln>
+                <a:noFill/>
+              </a:ln>
+            </p:spPr>
+            <p:style>
+              <a:lnRef idx="2">
+                <a:schemeClr val="accent1">
+                  <a:shade val="15000"/>
+                </a:schemeClr>
+              </a:lnRef>
+              <a:fillRef idx="1">
+                <a:schemeClr val="accent1"/>
+              </a:fillRef>
+              <a:effectRef idx="0">
+                <a:schemeClr val="accent1"/>
+              </a:effectRef>
+              <a:fontRef idx="minor">
+                <a:schemeClr val="lt1"/>
+              </a:fontRef>
+            </p:style>
+            <p:txBody>
+              <a:bodyPr rtlCol="0" anchor="ctr"/>
+              <a:lstStyle/>
+              <a:p>
+                <a:pPr algn="ctr"/>
+                <a:endParaRPr kumimoji="1" lang="ja-JP" altLang="en-US" sz="1200">
+                  <a:latin typeface="Cascadia Mono" panose="020B0609020000020004" pitchFamily="49" charset="0"/>
+                  <a:cs typeface="Cascadia Mono" panose="020B0609020000020004" pitchFamily="49" charset="0"/>
+                </a:endParaRPr>
+              </a:p>
+            </p:txBody>
+          </p:sp>
+          <p:sp>
+            <p:nvSpPr>
+              <p:cNvPr id="16" name="正方形/長方形 15">
+                <a:extLst>
+                  <a:ext uri="{FF2B5EF4-FFF2-40B4-BE49-F238E27FC236}">
+                    <a16:creationId xmlns:a16="http://schemas.microsoft.com/office/drawing/2014/main" id="{E9C4A990-52DF-145D-B216-CA9904834001}"/>
+                  </a:ext>
+                </a:extLst>
+              </p:cNvPr>
+              <p:cNvSpPr/>
+              <p:nvPr/>
+            </p:nvSpPr>
+            <p:spPr>
+              <a:xfrm rot="20257410">
+                <a:off x="7309105" y="2816352"/>
+                <a:ext cx="304800" cy="219456"/>
+              </a:xfrm>
+              <a:prstGeom prst="rect">
+                <a:avLst/>
+              </a:prstGeom>
+              <a:solidFill>
+                <a:schemeClr val="bg1"/>
+              </a:solidFill>
+              <a:ln>
+                <a:noFill/>
+              </a:ln>
+            </p:spPr>
+            <p:style>
+              <a:lnRef idx="2">
+                <a:schemeClr val="accent1">
+                  <a:shade val="15000"/>
+                </a:schemeClr>
+              </a:lnRef>
+              <a:fillRef idx="1">
+                <a:schemeClr val="accent1"/>
+              </a:fillRef>
+              <a:effectRef idx="0">
+                <a:schemeClr val="accent1"/>
+              </a:effectRef>
+              <a:fontRef idx="minor">
+                <a:schemeClr val="lt1"/>
+              </a:fontRef>
+            </p:style>
+            <p:txBody>
+              <a:bodyPr rtlCol="0" anchor="ctr"/>
+              <a:lstStyle/>
+              <a:p>
+                <a:pPr algn="ctr"/>
+                <a:endParaRPr kumimoji="1" lang="ja-JP" altLang="en-US" sz="1200">
+                  <a:latin typeface="Cascadia Mono" panose="020B0609020000020004" pitchFamily="49" charset="0"/>
+                  <a:cs typeface="Cascadia Mono" panose="020B0609020000020004" pitchFamily="49" charset="0"/>
+                </a:endParaRPr>
+              </a:p>
+            </p:txBody>
+          </p:sp>
+        </p:grpSp>
+        <p:sp>
+          <p:nvSpPr>
+            <p:cNvPr id="12" name="正方形/長方形 11">
+              <a:extLst>
+                <a:ext uri="{FF2B5EF4-FFF2-40B4-BE49-F238E27FC236}">
+                  <a16:creationId xmlns:a16="http://schemas.microsoft.com/office/drawing/2014/main" id="{97C85EF7-157B-2B5B-A9BE-8320E8F76781}"/>
+                </a:ext>
+              </a:extLst>
+            </p:cNvPr>
+            <p:cNvSpPr/>
+            <p:nvPr/>
+          </p:nvSpPr>
+          <p:spPr>
+            <a:xfrm>
+              <a:off x="2770073" y="1631130"/>
+              <a:ext cx="2484680" cy="768965"/>
+            </a:xfrm>
+            <a:prstGeom prst="rect">
+              <a:avLst/>
+            </a:prstGeom>
+            <a:solidFill>
+              <a:schemeClr val="bg1"/>
+            </a:solidFill>
+            <a:ln>
+              <a:noFill/>
+            </a:ln>
+          </p:spPr>
+          <p:style>
+            <a:lnRef idx="2">
+              <a:schemeClr val="accent1">
+                <a:shade val="15000"/>
+              </a:schemeClr>
+            </a:lnRef>
+            <a:fillRef idx="1">
+              <a:schemeClr val="accent1"/>
+            </a:fillRef>
+            <a:effectRef idx="0">
+              <a:schemeClr val="accent1"/>
+            </a:effectRef>
+            <a:fontRef idx="minor">
+              <a:schemeClr val="lt1"/>
+            </a:fontRef>
+          </p:style>
+          <p:txBody>
+            <a:bodyPr rtlCol="0" anchor="ctr"/>
+            <a:lstStyle/>
+            <a:p>
+              <a:pPr algn="ctr"/>
+              <a:r>
+                <a:rPr kumimoji="1" lang="en-US" altLang="ja-JP" sz="1200">
+                  <a:solidFill>
+                    <a:schemeClr val="tx1"/>
+                  </a:solidFill>
+                  <a:latin typeface="Cascadia Mono" panose="020B0609020000020004" pitchFamily="49" charset="0"/>
+                  <a:cs typeface="Cascadia Mono" panose="020B0609020000020004" pitchFamily="49" charset="0"/>
+                </a:rPr>
+                <a:t>optional</a:t>
+              </a:r>
+              <a:endParaRPr kumimoji="1" lang="ja-JP" altLang="en-US" sz="1200">
+                <a:solidFill>
+                  <a:schemeClr val="tx1"/>
+                </a:solidFill>
+                <a:latin typeface="Cascadia Mono" panose="020B0609020000020004" pitchFamily="49" charset="0"/>
+                <a:cs typeface="Cascadia Mono" panose="020B0609020000020004" pitchFamily="49" charset="0"/>
+              </a:endParaRPr>
+            </a:p>
+          </p:txBody>
+        </p:sp>
+      </p:grpSp>
     </p:spTree>
     <p:extLst>
       <p:ext uri="{BB962C8B-B14F-4D97-AF65-F5344CB8AC3E}">
-        <p14:creationId xmlns:p14="http://schemas.microsoft.com/office/powerpoint/2010/main" val="607295733"/>
+        <p14:creationId xmlns:p14="http://schemas.microsoft.com/office/powerpoint/2010/main" val="3002811072"/>
       </p:ext>
     </p:extLst>
   </p:cSld>
@@ -19932,7 +20190,7 @@
         <p:cNvPr id="1" name="">
           <a:extLst>
             <a:ext uri="{FF2B5EF4-FFF2-40B4-BE49-F238E27FC236}">
-              <a16:creationId xmlns:a16="http://schemas.microsoft.com/office/drawing/2014/main" id="{FA96FB43-AD4B-702B-5415-D295028353C2}"/>
+              <a16:creationId xmlns:a16="http://schemas.microsoft.com/office/drawing/2014/main" id="{B26691C6-7196-357B-CF15-4A84909F6DCF}"/>
             </a:ext>
           </a:extLst>
         </p:cNvPr>
@@ -19949,10 +20207,10 @@
       </p:grpSpPr>
       <p:sp>
         <p:nvSpPr>
-          <p:cNvPr id="8" name="フリーフォーム: 図形 7">
+          <p:cNvPr id="9" name="フリーフォーム: 図形 8">
             <a:extLst>
               <a:ext uri="{FF2B5EF4-FFF2-40B4-BE49-F238E27FC236}">
-                <a16:creationId xmlns:a16="http://schemas.microsoft.com/office/drawing/2014/main" id="{34E381A9-6DA6-65CC-8A0C-626E46CDB334}"/>
+                <a16:creationId xmlns:a16="http://schemas.microsoft.com/office/drawing/2014/main" id="{F51F1D07-1363-8751-FA6F-C8E94B185A79}"/>
               </a:ext>
             </a:extLst>
           </p:cNvPr>
@@ -19967,30 +20225,38 @@
           <a:custGeom>
             <a:avLst/>
             <a:gdLst>
-              <a:gd name="csX0" fmla="*/ 757646 w 12192000"/>
-              <a:gd name="csY0" fmla="*/ 5068392 h 6858000"/>
-              <a:gd name="csX1" fmla="*/ 757646 w 12192000"/>
-              <a:gd name="csY1" fmla="*/ 5721535 h 6858000"/>
-              <a:gd name="csX2" fmla="*/ 11434354 w 12192000"/>
-              <a:gd name="csY2" fmla="*/ 5721535 h 6858000"/>
-              <a:gd name="csX3" fmla="*/ 11434354 w 12192000"/>
-              <a:gd name="csY3" fmla="*/ 5068392 h 6858000"/>
-              <a:gd name="csX4" fmla="*/ 757646 w 12192000"/>
-              <a:gd name="csY4" fmla="*/ 2690949 h 6858000"/>
-              <a:gd name="csX5" fmla="*/ 757646 w 12192000"/>
-              <a:gd name="csY5" fmla="*/ 3344092 h 6858000"/>
-              <a:gd name="csX6" fmla="*/ 11434354 w 12192000"/>
-              <a:gd name="csY6" fmla="*/ 3344092 h 6858000"/>
-              <a:gd name="csX7" fmla="*/ 11434354 w 12192000"/>
-              <a:gd name="csY7" fmla="*/ 2690949 h 6858000"/>
-              <a:gd name="csX8" fmla="*/ 0 w 12192000"/>
-              <a:gd name="csY8" fmla="*/ 0 h 6858000"/>
-              <a:gd name="csX9" fmla="*/ 12192000 w 12192000"/>
-              <a:gd name="csY9" fmla="*/ 0 h 6858000"/>
-              <a:gd name="csX10" fmla="*/ 12192000 w 12192000"/>
-              <a:gd name="csY10" fmla="*/ 6858000 h 6858000"/>
-              <a:gd name="csX11" fmla="*/ 0 w 12192000"/>
-              <a:gd name="csY11" fmla="*/ 6858000 h 6858000"/>
+              <a:gd name="csX0" fmla="*/ 1437763 w 12192000"/>
+              <a:gd name="csY0" fmla="*/ 3572851 h 6858000"/>
+              <a:gd name="csX1" fmla="*/ 1437763 w 12192000"/>
+              <a:gd name="csY1" fmla="*/ 5147404 h 6858000"/>
+              <a:gd name="csX2" fmla="*/ 1437763 w 12192000"/>
+              <a:gd name="csY2" fmla="*/ 5727266 h 6858000"/>
+              <a:gd name="csX3" fmla="*/ 2511255 w 12192000"/>
+              <a:gd name="csY3" fmla="*/ 5727266 h 6858000"/>
+              <a:gd name="csX4" fmla="*/ 10754235 w 12192000"/>
+              <a:gd name="csY4" fmla="*/ 5727266 h 6858000"/>
+              <a:gd name="csX5" fmla="*/ 10754235 w 12192000"/>
+              <a:gd name="csY5" fmla="*/ 5147404 h 6858000"/>
+              <a:gd name="csX6" fmla="*/ 2511255 w 12192000"/>
+              <a:gd name="csY6" fmla="*/ 5147404 h 6858000"/>
+              <a:gd name="csX7" fmla="*/ 2511255 w 12192000"/>
+              <a:gd name="csY7" fmla="*/ 3572851 h 6858000"/>
+              <a:gd name="csX8" fmla="*/ 1437764 w 12192000"/>
+              <a:gd name="csY8" fmla="*/ 2560320 h 6858000"/>
+              <a:gd name="csX9" fmla="*/ 1437764 w 12192000"/>
+              <a:gd name="csY9" fmla="*/ 3140182 h 6858000"/>
+              <a:gd name="csX10" fmla="*/ 10754236 w 12192000"/>
+              <a:gd name="csY10" fmla="*/ 3140182 h 6858000"/>
+              <a:gd name="csX11" fmla="*/ 10754236 w 12192000"/>
+              <a:gd name="csY11" fmla="*/ 2560320 h 6858000"/>
+              <a:gd name="csX12" fmla="*/ 0 w 12192000"/>
+              <a:gd name="csY12" fmla="*/ 0 h 6858000"/>
+              <a:gd name="csX13" fmla="*/ 12192000 w 12192000"/>
+              <a:gd name="csY13" fmla="*/ 0 h 6858000"/>
+              <a:gd name="csX14" fmla="*/ 12192000 w 12192000"/>
+              <a:gd name="csY14" fmla="*/ 6858000 h 6858000"/>
+              <a:gd name="csX15" fmla="*/ 0 w 12192000"/>
+              <a:gd name="csY15" fmla="*/ 6858000 h 6858000"/>
             </a:gdLst>
             <a:ahLst/>
             <a:cxnLst>
@@ -20030,34 +20296,58 @@
               <a:cxn ang="0">
                 <a:pos x="csX11" y="csY11"/>
               </a:cxn>
+              <a:cxn ang="0">
+                <a:pos x="csX12" y="csY12"/>
+              </a:cxn>
+              <a:cxn ang="0">
+                <a:pos x="csX13" y="csY13"/>
+              </a:cxn>
+              <a:cxn ang="0">
+                <a:pos x="csX14" y="csY14"/>
+              </a:cxn>
+              <a:cxn ang="0">
+                <a:pos x="csX15" y="csY15"/>
+              </a:cxn>
             </a:cxnLst>
             <a:rect l="l" t="t" r="r" b="b"/>
             <a:pathLst>
               <a:path w="12192000" h="6858000">
                 <a:moveTo>
-                  <a:pt x="757646" y="5068392"/>
+                  <a:pt x="1437763" y="3572851"/>
                 </a:moveTo>
                 <a:lnTo>
-                  <a:pt x="757646" y="5721535"/>
+                  <a:pt x="1437763" y="5147404"/>
                 </a:lnTo>
                 <a:lnTo>
-                  <a:pt x="11434354" y="5721535"/>
+                  <a:pt x="1437763" y="5727266"/>
                 </a:lnTo>
                 <a:lnTo>
-                  <a:pt x="11434354" y="5068392"/>
+                  <a:pt x="2511255" y="5727266"/>
+                </a:lnTo>
+                <a:lnTo>
+                  <a:pt x="10754235" y="5727266"/>
+                </a:lnTo>
+                <a:lnTo>
+                  <a:pt x="10754235" y="5147404"/>
+                </a:lnTo>
+                <a:lnTo>
+                  <a:pt x="2511255" y="5147404"/>
+                </a:lnTo>
+                <a:lnTo>
+                  <a:pt x="2511255" y="3572851"/>
                 </a:lnTo>
                 <a:close/>
                 <a:moveTo>
-                  <a:pt x="757646" y="2690949"/>
+                  <a:pt x="1437764" y="2560320"/>
                 </a:moveTo>
                 <a:lnTo>
-                  <a:pt x="757646" y="3344092"/>
+                  <a:pt x="1437764" y="3140182"/>
                 </a:lnTo>
                 <a:lnTo>
-                  <a:pt x="11434354" y="3344092"/>
+                  <a:pt x="10754236" y="3140182"/>
                 </a:lnTo>
                 <a:lnTo>
-                  <a:pt x="11434354" y="2690949"/>
+                  <a:pt x="10754236" y="2560320"/>
                 </a:lnTo>
                 <a:close/>
                 <a:moveTo>
@@ -20115,7 +20405,7 @@
     </p:spTree>
     <p:extLst>
       <p:ext uri="{BB962C8B-B14F-4D97-AF65-F5344CB8AC3E}">
-        <p14:creationId xmlns:p14="http://schemas.microsoft.com/office/powerpoint/2010/main" val="1265086683"/>
+        <p14:creationId xmlns:p14="http://schemas.microsoft.com/office/powerpoint/2010/main" val="4002300782"/>
       </p:ext>
     </p:extLst>
   </p:cSld>

--- a/tools/llm-as-a-judge/readme.pptx
+++ b/tools/llm-as-a-judge/readme.pptx
@@ -17087,10 +17087,10 @@
       </p:grpSpPr>
       <p:sp>
         <p:nvSpPr>
-          <p:cNvPr id="6" name="フリーフォーム: 図形 5">
+          <p:cNvPr id="16" name="フリーフォーム: 図形 15">
             <a:extLst>
               <a:ext uri="{FF2B5EF4-FFF2-40B4-BE49-F238E27FC236}">
-                <a16:creationId xmlns:a16="http://schemas.microsoft.com/office/drawing/2014/main" id="{AD6F5327-32AF-C2D2-E4EC-2EA98178F28C}"/>
+                <a16:creationId xmlns:a16="http://schemas.microsoft.com/office/drawing/2014/main" id="{F0BBD837-DB64-C438-AB96-63E4C09BE4FB}"/>
               </a:ext>
             </a:extLst>
           </p:cNvPr>
@@ -17100,43 +17100,35 @@
         <p:spPr>
           <a:xfrm>
             <a:off x="0" y="0"/>
-            <a:ext cx="12814978" cy="6858000"/>
+            <a:ext cx="12192000" cy="6858000"/>
           </a:xfrm>
           <a:custGeom>
             <a:avLst/>
             <a:gdLst>
-              <a:gd name="csX0" fmla="*/ 12192000 w 12814978"/>
-              <a:gd name="csY0" fmla="*/ 4565567 h 6858000"/>
-              <a:gd name="csX1" fmla="*/ 12288588 w 12814978"/>
-              <a:gd name="csY1" fmla="*/ 4624246 h 6858000"/>
-              <a:gd name="csX2" fmla="*/ 12814978 w 12814978"/>
-              <a:gd name="csY2" fmla="*/ 5614266 h 6858000"/>
-              <a:gd name="csX3" fmla="*/ 12288588 w 12814978"/>
-              <a:gd name="csY3" fmla="*/ 6604287 h 6858000"/>
-              <a:gd name="csX4" fmla="*/ 12192000 w 12814978"/>
-              <a:gd name="csY4" fmla="*/ 6662966 h 6858000"/>
-              <a:gd name="csX5" fmla="*/ 0 w 12814978"/>
-              <a:gd name="csY5" fmla="*/ 0 h 6858000"/>
-              <a:gd name="csX6" fmla="*/ 12192000 w 12814978"/>
-              <a:gd name="csY6" fmla="*/ 0 h 6858000"/>
-              <a:gd name="csX7" fmla="*/ 12192000 w 12814978"/>
-              <a:gd name="csY7" fmla="*/ 4565567 h 6858000"/>
-              <a:gd name="csX8" fmla="*/ 12190149 w 12814978"/>
-              <a:gd name="csY8" fmla="*/ 4564442 h 6858000"/>
-              <a:gd name="csX9" fmla="*/ 11621054 w 12814978"/>
-              <a:gd name="csY9" fmla="*/ 4420342 h 6858000"/>
-              <a:gd name="csX10" fmla="*/ 10427130 w 12814978"/>
-              <a:gd name="csY10" fmla="*/ 5614266 h 6858000"/>
-              <a:gd name="csX11" fmla="*/ 11621054 w 12814978"/>
-              <a:gd name="csY11" fmla="*/ 6808190 h 6858000"/>
-              <a:gd name="csX12" fmla="*/ 12190149 w 12814978"/>
-              <a:gd name="csY12" fmla="*/ 6664090 h 6858000"/>
-              <a:gd name="csX13" fmla="*/ 12192000 w 12814978"/>
-              <a:gd name="csY13" fmla="*/ 6662966 h 6858000"/>
-              <a:gd name="csX14" fmla="*/ 12192000 w 12814978"/>
-              <a:gd name="csY14" fmla="*/ 6858000 h 6858000"/>
-              <a:gd name="csX15" fmla="*/ 0 w 12814978"/>
-              <a:gd name="csY15" fmla="*/ 6858000 h 6858000"/>
+              <a:gd name="csX0" fmla="*/ 0 w 12192000"/>
+              <a:gd name="csY0" fmla="*/ 0 h 6858000"/>
+              <a:gd name="csX1" fmla="*/ 12192000 w 12192000"/>
+              <a:gd name="csY1" fmla="*/ 0 h 6858000"/>
+              <a:gd name="csX2" fmla="*/ 12192000 w 12192000"/>
+              <a:gd name="csY2" fmla="*/ 4566813 h 6858000"/>
+              <a:gd name="csX3" fmla="*/ 12088717 w 12192000"/>
+              <a:gd name="csY3" fmla="*/ 4517058 h 6858000"/>
+              <a:gd name="csX4" fmla="*/ 11625857 w 12192000"/>
+              <a:gd name="csY4" fmla="*/ 4423611 h 6858000"/>
+              <a:gd name="csX5" fmla="*/ 10436735 w 12192000"/>
+              <a:gd name="csY5" fmla="*/ 5612733 h 6858000"/>
+              <a:gd name="csX6" fmla="*/ 11625857 w 12192000"/>
+              <a:gd name="csY6" fmla="*/ 6801855 h 6858000"/>
+              <a:gd name="csX7" fmla="*/ 12088717 w 12192000"/>
+              <a:gd name="csY7" fmla="*/ 6708408 h 6858000"/>
+              <a:gd name="csX8" fmla="*/ 12192000 w 12192000"/>
+              <a:gd name="csY8" fmla="*/ 6658654 h 6858000"/>
+              <a:gd name="csX9" fmla="*/ 12192000 w 12192000"/>
+              <a:gd name="csY9" fmla="*/ 6858000 h 6858000"/>
+              <a:gd name="csX10" fmla="*/ 0 w 12192000"/>
+              <a:gd name="csY10" fmla="*/ 6858000 h 6858000"/>
+              <a:gd name="csX11" fmla="*/ 0 w 12192000"/>
+              <a:gd name="csY11" fmla="*/ 0 h 6858000"/>
             </a:gdLst>
             <a:ahLst/>
             <a:cxnLst>
@@ -17176,42 +17168,10 @@
               <a:cxn ang="0">
                 <a:pos x="csX11" y="csY11"/>
               </a:cxn>
-              <a:cxn ang="0">
-                <a:pos x="csX12" y="csY12"/>
-              </a:cxn>
-              <a:cxn ang="0">
-                <a:pos x="csX13" y="csY13"/>
-              </a:cxn>
-              <a:cxn ang="0">
-                <a:pos x="csX14" y="csY14"/>
-              </a:cxn>
-              <a:cxn ang="0">
-                <a:pos x="csX15" y="csY15"/>
-              </a:cxn>
             </a:cxnLst>
             <a:rect l="l" t="t" r="r" b="b"/>
             <a:pathLst>
-              <a:path w="12814978" h="6858000">
-                <a:moveTo>
-                  <a:pt x="12192000" y="4565567"/>
-                </a:moveTo>
-                <a:lnTo>
-                  <a:pt x="12288588" y="4624246"/>
-                </a:lnTo>
-                <a:cubicBezTo>
-                  <a:pt x="12606174" y="4838803"/>
-                  <a:pt x="12814978" y="5202150"/>
-                  <a:pt x="12814978" y="5614266"/>
-                </a:cubicBezTo>
-                <a:cubicBezTo>
-                  <a:pt x="12814978" y="6026383"/>
-                  <a:pt x="12606174" y="6389730"/>
-                  <a:pt x="12288588" y="6604287"/>
-                </a:cubicBezTo>
-                <a:lnTo>
-                  <a:pt x="12192000" y="6662966"/>
-                </a:lnTo>
-                <a:close/>
+              <a:path w="12192000" h="6858000">
                 <a:moveTo>
                   <a:pt x="0" y="0"/>
                 </a:moveTo>
@@ -17219,39 +17179,42 @@
                   <a:pt x="12192000" y="0"/>
                 </a:lnTo>
                 <a:lnTo>
-                  <a:pt x="12192000" y="4565567"/>
+                  <a:pt x="12192000" y="4566813"/>
                 </a:lnTo>
                 <a:lnTo>
-                  <a:pt x="12190149" y="4564442"/>
+                  <a:pt x="12088717" y="4517058"/>
                 </a:lnTo>
                 <a:cubicBezTo>
-                  <a:pt x="12020978" y="4472543"/>
-                  <a:pt x="11827112" y="4420342"/>
-                  <a:pt x="11621054" y="4420342"/>
+                  <a:pt x="11946452" y="4456885"/>
+                  <a:pt x="11790040" y="4423611"/>
+                  <a:pt x="11625857" y="4423611"/>
                 </a:cubicBezTo>
                 <a:cubicBezTo>
-                  <a:pt x="10961668" y="4420342"/>
-                  <a:pt x="10427130" y="4954880"/>
-                  <a:pt x="10427130" y="5614266"/>
+                  <a:pt x="10969123" y="4423611"/>
+                  <a:pt x="10436735" y="4955999"/>
+                  <a:pt x="10436735" y="5612733"/>
                 </a:cubicBezTo>
                 <a:cubicBezTo>
-                  <a:pt x="10427130" y="6273652"/>
-                  <a:pt x="10961668" y="6808190"/>
-                  <a:pt x="11621054" y="6808190"/>
+                  <a:pt x="10436735" y="6269467"/>
+                  <a:pt x="10969123" y="6801855"/>
+                  <a:pt x="11625857" y="6801855"/>
                 </a:cubicBezTo>
                 <a:cubicBezTo>
-                  <a:pt x="11827112" y="6808190"/>
-                  <a:pt x="12020978" y="6755989"/>
-                  <a:pt x="12190149" y="6664090"/>
+                  <a:pt x="11790040" y="6801855"/>
+                  <a:pt x="11946452" y="6768581"/>
+                  <a:pt x="12088717" y="6708408"/>
                 </a:cubicBezTo>
                 <a:lnTo>
-                  <a:pt x="12192000" y="6662966"/>
+                  <a:pt x="12192000" y="6658654"/>
                 </a:lnTo>
                 <a:lnTo>
                   <a:pt x="12192000" y="6858000"/>
                 </a:lnTo>
                 <a:lnTo>
                   <a:pt x="0" y="6858000"/>
+                </a:lnTo>
+                <a:lnTo>
+                  <a:pt x="0" y="0"/>
                 </a:lnTo>
                 <a:close/>
               </a:path>
@@ -17495,10 +17458,10 @@
       </p:sp>
       <p:grpSp>
         <p:nvGrpSpPr>
-          <p:cNvPr id="2" name="グループ化 1">
+          <p:cNvPr id="9" name="グループ化 8">
             <a:extLst>
               <a:ext uri="{FF2B5EF4-FFF2-40B4-BE49-F238E27FC236}">
-                <a16:creationId xmlns:a16="http://schemas.microsoft.com/office/drawing/2014/main" id="{E12D0B43-E338-038C-70F5-BCAA45DD4525}"/>
+                <a16:creationId xmlns:a16="http://schemas.microsoft.com/office/drawing/2014/main" id="{41232866-5A66-C85B-F257-652FACFBA5E2}"/>
               </a:ext>
             </a:extLst>
           </p:cNvPr>
@@ -17507,7 +17470,7 @@
         </p:nvGrpSpPr>
         <p:grpSpPr>
           <a:xfrm>
-            <a:off x="10018744" y="2655799"/>
+            <a:off x="718434" y="4308089"/>
             <a:ext cx="1614399" cy="722865"/>
             <a:chOff x="2328672" y="1310640"/>
             <a:chExt cx="3267456" cy="1463040"/>
@@ -17522,10 +17485,10 @@
         </p:grpSpPr>
         <p:grpSp>
           <p:nvGrpSpPr>
-            <p:cNvPr id="3" name="グループ化 2">
+            <p:cNvPr id="10" name="グループ化 9">
               <a:extLst>
                 <a:ext uri="{FF2B5EF4-FFF2-40B4-BE49-F238E27FC236}">
-                  <a16:creationId xmlns:a16="http://schemas.microsoft.com/office/drawing/2014/main" id="{5DD90B5B-3C01-EE5F-1301-E0BD9B715581}"/>
+                  <a16:creationId xmlns:a16="http://schemas.microsoft.com/office/drawing/2014/main" id="{5705B721-1B7B-B514-548A-9DC04F5001B4}"/>
                 </a:ext>
               </a:extLst>
             </p:cNvPr>
@@ -17542,10 +17505,10 @@
           </p:grpSpPr>
           <p:sp>
             <p:nvSpPr>
-              <p:cNvPr id="5" name="思考の吹き出し: 雲形 4">
+              <p:cNvPr id="12" name="思考の吹き出し: 雲形 11">
                 <a:extLst>
                   <a:ext uri="{FF2B5EF4-FFF2-40B4-BE49-F238E27FC236}">
-                    <a16:creationId xmlns:a16="http://schemas.microsoft.com/office/drawing/2014/main" id="{C214408C-0428-999D-B0C4-2AAB6DF14465}"/>
+                    <a16:creationId xmlns:a16="http://schemas.microsoft.com/office/drawing/2014/main" id="{00EF6743-D3A0-6769-1B99-22BE65B9590F}"/>
                   </a:ext>
                 </a:extLst>
               </p:cNvPr>
@@ -17559,8 +17522,8 @@
               </a:xfrm>
               <a:prstGeom prst="cloudCallout">
                 <a:avLst>
-                  <a:gd name="adj1" fmla="val -23502"/>
-                  <a:gd name="adj2" fmla="val 92894"/>
+                  <a:gd name="adj1" fmla="val 35504"/>
+                  <a:gd name="adj2" fmla="val -95076"/>
                 </a:avLst>
               </a:prstGeom>
               <a:solidFill>
@@ -17602,10 +17565,10 @@
           </p:sp>
           <p:sp>
             <p:nvSpPr>
-              <p:cNvPr id="6" name="正方形/長方形 5">
+              <p:cNvPr id="13" name="正方形/長方形 12">
                 <a:extLst>
                   <a:ext uri="{FF2B5EF4-FFF2-40B4-BE49-F238E27FC236}">
-                    <a16:creationId xmlns:a16="http://schemas.microsoft.com/office/drawing/2014/main" id="{B6C08684-7D6D-16D2-6B93-C9FBF3F9196D}"/>
+                    <a16:creationId xmlns:a16="http://schemas.microsoft.com/office/drawing/2014/main" id="{BC19A1AA-34FB-201D-505B-5FCE42961F0C}"/>
                   </a:ext>
                 </a:extLst>
               </p:cNvPr>
@@ -17657,10 +17620,10 @@
           </p:sp>
           <p:sp>
             <p:nvSpPr>
-              <p:cNvPr id="7" name="正方形/長方形 6">
+              <p:cNvPr id="14" name="正方形/長方形 13">
                 <a:extLst>
                   <a:ext uri="{FF2B5EF4-FFF2-40B4-BE49-F238E27FC236}">
-                    <a16:creationId xmlns:a16="http://schemas.microsoft.com/office/drawing/2014/main" id="{832C6153-661B-5726-1570-FF3FC86747D6}"/>
+                    <a16:creationId xmlns:a16="http://schemas.microsoft.com/office/drawing/2014/main" id="{F47CEE55-57FC-E5EC-90DA-E9E0FB2635E7}"/>
                   </a:ext>
                 </a:extLst>
               </p:cNvPr>
@@ -17712,10 +17675,10 @@
           </p:sp>
           <p:sp>
             <p:nvSpPr>
-              <p:cNvPr id="16" name="正方形/長方形 15">
+              <p:cNvPr id="15" name="正方形/長方形 14">
                 <a:extLst>
                   <a:ext uri="{FF2B5EF4-FFF2-40B4-BE49-F238E27FC236}">
-                    <a16:creationId xmlns:a16="http://schemas.microsoft.com/office/drawing/2014/main" id="{C589499D-D0A5-EDFD-8878-5AA9BDD12C7C}"/>
+                    <a16:creationId xmlns:a16="http://schemas.microsoft.com/office/drawing/2014/main" id="{0CDFF352-C922-52EE-6E0E-89E1601EE7FA}"/>
                   </a:ext>
                 </a:extLst>
               </p:cNvPr>
@@ -17768,10 +17731,10 @@
         </p:grpSp>
         <p:sp>
           <p:nvSpPr>
-            <p:cNvPr id="4" name="正方形/長方形 3">
+            <p:cNvPr id="11" name="正方形/長方形 10">
               <a:extLst>
                 <a:ext uri="{FF2B5EF4-FFF2-40B4-BE49-F238E27FC236}">
-                  <a16:creationId xmlns:a16="http://schemas.microsoft.com/office/drawing/2014/main" id="{61547E51-7F3E-2DE1-9CE5-B5DE12B5B20C}"/>
+                  <a16:creationId xmlns:a16="http://schemas.microsoft.com/office/drawing/2014/main" id="{7CEB7DEC-5622-6607-EA59-6DE841E5305E}"/>
                 </a:ext>
               </a:extLst>
             </p:cNvPr>
@@ -19657,7 +19620,7 @@
         </p:nvGrpSpPr>
         <p:grpSpPr>
           <a:xfrm>
-            <a:off x="10018744" y="3677075"/>
+            <a:off x="383898" y="4223340"/>
             <a:ext cx="1614399" cy="722865"/>
             <a:chOff x="2328672" y="1310640"/>
             <a:chExt cx="3267456" cy="1463040"/>
@@ -19709,8 +19672,8 @@
               </a:xfrm>
               <a:prstGeom prst="cloudCallout">
                 <a:avLst>
-                  <a:gd name="adj1" fmla="val -23502"/>
-                  <a:gd name="adj2" fmla="val 92894"/>
+                  <a:gd name="adj1" fmla="val 74292"/>
+                  <a:gd name="adj2" fmla="val 3572"/>
                 </a:avLst>
               </a:prstGeom>
               <a:solidFill>

--- a/tools/llm-as-a-judge/readme.pptx
+++ b/tools/llm-as-a-judge/readme.pptx
@@ -1425,7 +1425,7 @@
           <p:nvPr userDrawn="1">
             <p:extLst>
               <p:ext uri="{D42A27DB-BD31-4B8C-83A1-F6EECF244321}">
-                <p14:modId xmlns:p14="http://schemas.microsoft.com/office/powerpoint/2010/main" val="1276514818"/>
+                <p14:modId xmlns:p14="http://schemas.microsoft.com/office/powerpoint/2010/main" val="2802741959"/>
               </p:ext>
             </p:extLst>
           </p:nvPr>
@@ -3724,7 +3724,7 @@
                           <a:ea typeface="Cascadia Mono" panose="020B0609020000020004" pitchFamily="49" charset="0"/>
                           <a:cs typeface="Cascadia Mono" panose="020B0609020000020004" pitchFamily="49" charset="0"/>
                         </a:rPr>
-                        <a:t>llmj-feedback.py</a:t>
+                        <a:t>llmj-gold-review.py</a:t>
                       </a:r>
                       <a:endParaRPr kumimoji="1" lang="ja-JP" altLang="en-US" sz="1000">
                         <a:latin typeface="Cascadia Mono" panose="020B0609020000020004" pitchFamily="49" charset="0"/>

--- a/tools/llm-as-a-judge/readme.pptx
+++ b/tools/llm-as-a-judge/readme.pptx
@@ -9,19 +9,19 @@
     <p:sldId id="295" r:id="rId3"/>
     <p:sldId id="258" r:id="rId4"/>
     <p:sldId id="273" r:id="rId5"/>
-    <p:sldId id="296" r:id="rId6"/>
+    <p:sldId id="303" r:id="rId6"/>
     <p:sldId id="262" r:id="rId7"/>
-    <p:sldId id="297" r:id="rId8"/>
+    <p:sldId id="304" r:id="rId8"/>
     <p:sldId id="264" r:id="rId9"/>
-    <p:sldId id="298" r:id="rId10"/>
+    <p:sldId id="305" r:id="rId10"/>
     <p:sldId id="301" r:id="rId11"/>
-    <p:sldId id="302" r:id="rId12"/>
+    <p:sldId id="306" r:id="rId12"/>
     <p:sldId id="266" r:id="rId13"/>
     <p:sldId id="259" r:id="rId14"/>
-    <p:sldId id="299" r:id="rId15"/>
+    <p:sldId id="307" r:id="rId15"/>
     <p:sldId id="268" r:id="rId16"/>
     <p:sldId id="270" r:id="rId17"/>
-    <p:sldId id="300" r:id="rId18"/>
+    <p:sldId id="308" r:id="rId18"/>
     <p:sldId id="272" r:id="rId19"/>
   </p:sldIdLst>
   <p:sldSz cx="12192000" cy="6858000"/>
@@ -1425,14 +1425,14 @@
           <p:nvPr userDrawn="1">
             <p:extLst>
               <p:ext uri="{D42A27DB-BD31-4B8C-83A1-F6EECF244321}">
-                <p14:modId xmlns:p14="http://schemas.microsoft.com/office/powerpoint/2010/main" val="2802741959"/>
+                <p14:modId xmlns:p14="http://schemas.microsoft.com/office/powerpoint/2010/main" val="2285138478"/>
               </p:ext>
             </p:extLst>
           </p:nvPr>
         </p:nvGraphicFramePr>
         <p:xfrm>
-          <a:off x="1439080" y="274320"/>
-          <a:ext cx="9313840" cy="6309360"/>
+          <a:off x="1236000" y="274320"/>
+          <a:ext cx="9720000" cy="6309360"/>
         </p:xfrm>
         <a:graphic>
           <a:graphicData uri="http://schemas.openxmlformats.org/drawingml/2006/table">
@@ -1448,21 +1448,21 @@
                 <a:tableStyleId>{5C22544A-7EE6-4342-B048-85BDC9FD1C3A}</a:tableStyleId>
               </a:tblPr>
               <a:tblGrid>
-                <a:gridCol w="1076173">
+                <a:gridCol w="1059714">
                   <a:extLst>
                     <a:ext uri="{9D8B030D-6E8A-4147-A177-3AD203B41FA5}">
                       <a16:colId xmlns:a16="http://schemas.microsoft.com/office/drawing/2014/main" val="2777621706"/>
                     </a:ext>
                   </a:extLst>
                 </a:gridCol>
-                <a:gridCol w="1783607">
+                <a:gridCol w="1875112">
                   <a:extLst>
                     <a:ext uri="{9D8B030D-6E8A-4147-A177-3AD203B41FA5}">
                       <a16:colId xmlns:a16="http://schemas.microsoft.com/office/drawing/2014/main" val="308123450"/>
                     </a:ext>
                   </a:extLst>
                 </a:gridCol>
-                <a:gridCol w="6454060">
+                <a:gridCol w="6785174">
                   <a:extLst>
                     <a:ext uri="{9D8B030D-6E8A-4147-A177-3AD203B41FA5}">
                       <a16:colId xmlns:a16="http://schemas.microsoft.com/office/drawing/2014/main" val="2952094520"/>
@@ -3724,7 +3724,7 @@
                           <a:ea typeface="Cascadia Mono" panose="020B0609020000020004" pitchFamily="49" charset="0"/>
                           <a:cs typeface="Cascadia Mono" panose="020B0609020000020004" pitchFamily="49" charset="0"/>
                         </a:rPr>
-                        <a:t>llmj-gold-review.py</a:t>
+                        <a:t>llmj-rubric-review.py</a:t>
                       </a:r>
                       <a:endParaRPr kumimoji="1" lang="ja-JP" altLang="en-US" sz="1000">
                         <a:latin typeface="Cascadia Mono" panose="020B0609020000020004" pitchFamily="49" charset="0"/>
@@ -17277,7 +17277,7 @@
         <p:cNvPr id="1" name="">
           <a:extLst>
             <a:ext uri="{FF2B5EF4-FFF2-40B4-BE49-F238E27FC236}">
-              <a16:creationId xmlns:a16="http://schemas.microsoft.com/office/drawing/2014/main" id="{B4275742-E758-DE0B-656C-EED908133C78}"/>
+              <a16:creationId xmlns:a16="http://schemas.microsoft.com/office/drawing/2014/main" id="{FC744924-6947-8E94-FFA1-FD3D5779D0C6}"/>
             </a:ext>
           </a:extLst>
         </p:cNvPr>
@@ -17294,10 +17294,10 @@
       </p:grpSpPr>
       <p:sp>
         <p:nvSpPr>
-          <p:cNvPr id="8" name="フリーフォーム: 図形 7">
+          <p:cNvPr id="9" name="フリーフォーム: 図形 8">
             <a:extLst>
               <a:ext uri="{FF2B5EF4-FFF2-40B4-BE49-F238E27FC236}">
-                <a16:creationId xmlns:a16="http://schemas.microsoft.com/office/drawing/2014/main" id="{E63BA42D-73C1-33CD-55A8-43E0A6466227}"/>
+                <a16:creationId xmlns:a16="http://schemas.microsoft.com/office/drawing/2014/main" id="{36AF6CF6-704F-499F-C9C3-C9F96E3DC0AF}"/>
               </a:ext>
             </a:extLst>
           </p:cNvPr>
@@ -17312,22 +17312,22 @@
           <a:custGeom>
             <a:avLst/>
             <a:gdLst>
-              <a:gd name="csX0" fmla="*/ 1437763 w 12192000"/>
-              <a:gd name="csY0" fmla="*/ 3572851 h 6858000"/>
-              <a:gd name="csX1" fmla="*/ 1437763 w 12192000"/>
-              <a:gd name="csY1" fmla="*/ 3987676 h 6858000"/>
-              <a:gd name="csX2" fmla="*/ 1437763 w 12192000"/>
-              <a:gd name="csY2" fmla="*/ 5727266 h 6858000"/>
-              <a:gd name="csX3" fmla="*/ 2511254 w 12192000"/>
-              <a:gd name="csY3" fmla="*/ 5727266 h 6858000"/>
-              <a:gd name="csX4" fmla="*/ 2511254 w 12192000"/>
-              <a:gd name="csY4" fmla="*/ 3987676 h 6858000"/>
-              <a:gd name="csX5" fmla="*/ 10754235 w 12192000"/>
-              <a:gd name="csY5" fmla="*/ 3987676 h 6858000"/>
-              <a:gd name="csX6" fmla="*/ 10754235 w 12192000"/>
-              <a:gd name="csY6" fmla="*/ 3572851 h 6858000"/>
-              <a:gd name="csX7" fmla="*/ 2511254 w 12192000"/>
-              <a:gd name="csY7" fmla="*/ 3572851 h 6858000"/>
+              <a:gd name="csX0" fmla="*/ 1231075 w 12192000"/>
+              <a:gd name="csY0" fmla="*/ 3570513 h 6858000"/>
+              <a:gd name="csX1" fmla="*/ 1231075 w 12192000"/>
+              <a:gd name="csY1" fmla="*/ 3570514 h 6858000"/>
+              <a:gd name="csX2" fmla="*/ 1231075 w 12192000"/>
+              <a:gd name="csY2" fmla="*/ 3998026 h 6858000"/>
+              <a:gd name="csX3" fmla="*/ 1231075 w 12192000"/>
+              <a:gd name="csY3" fmla="*/ 5737760 h 6858000"/>
+              <a:gd name="csX4" fmla="*/ 2284021 w 12192000"/>
+              <a:gd name="csY4" fmla="*/ 5737760 h 6858000"/>
+              <a:gd name="csX5" fmla="*/ 2284021 w 12192000"/>
+              <a:gd name="csY5" fmla="*/ 3998026 h 6858000"/>
+              <a:gd name="csX6" fmla="*/ 10949049 w 12192000"/>
+              <a:gd name="csY6" fmla="*/ 3998026 h 6858000"/>
+              <a:gd name="csX7" fmla="*/ 10949049 w 12192000"/>
+              <a:gd name="csY7" fmla="*/ 3570513 h 6858000"/>
               <a:gd name="csX8" fmla="*/ 0 w 12192000"/>
               <a:gd name="csY8" fmla="*/ 0 h 6858000"/>
               <a:gd name="csX9" fmla="*/ 12192000 w 12192000"/>
@@ -17380,28 +17380,28 @@
             <a:pathLst>
               <a:path w="12192000" h="6858000">
                 <a:moveTo>
-                  <a:pt x="1437763" y="3572851"/>
+                  <a:pt x="1231075" y="3570513"/>
                 </a:moveTo>
                 <a:lnTo>
-                  <a:pt x="1437763" y="3987676"/>
+                  <a:pt x="1231075" y="3570514"/>
                 </a:lnTo>
                 <a:lnTo>
-                  <a:pt x="1437763" y="5727266"/>
+                  <a:pt x="1231075" y="3998026"/>
                 </a:lnTo>
                 <a:lnTo>
-                  <a:pt x="2511254" y="5727266"/>
+                  <a:pt x="1231075" y="5737760"/>
                 </a:lnTo>
                 <a:lnTo>
-                  <a:pt x="2511254" y="3987676"/>
+                  <a:pt x="2284021" y="5737760"/>
                 </a:lnTo>
                 <a:lnTo>
-                  <a:pt x="10754235" y="3987676"/>
+                  <a:pt x="2284021" y="3998026"/>
                 </a:lnTo>
                 <a:lnTo>
-                  <a:pt x="10754235" y="3572851"/>
+                  <a:pt x="10949049" y="3998026"/>
                 </a:lnTo>
                 <a:lnTo>
-                  <a:pt x="2511254" y="3572851"/>
+                  <a:pt x="10949049" y="3570513"/>
                 </a:lnTo>
                 <a:close/>
                 <a:moveTo>
@@ -17458,10 +17458,10 @@
       </p:sp>
       <p:grpSp>
         <p:nvGrpSpPr>
-          <p:cNvPr id="9" name="グループ化 8">
+          <p:cNvPr id="10" name="グループ化 9">
             <a:extLst>
               <a:ext uri="{FF2B5EF4-FFF2-40B4-BE49-F238E27FC236}">
-                <a16:creationId xmlns:a16="http://schemas.microsoft.com/office/drawing/2014/main" id="{41232866-5A66-C85B-F257-652FACFBA5E2}"/>
+                <a16:creationId xmlns:a16="http://schemas.microsoft.com/office/drawing/2014/main" id="{BA4D9806-347E-3303-ED02-879724577D6E}"/>
               </a:ext>
             </a:extLst>
           </p:cNvPr>
@@ -17485,10 +17485,10 @@
         </p:grpSpPr>
         <p:grpSp>
           <p:nvGrpSpPr>
-            <p:cNvPr id="10" name="グループ化 9">
+            <p:cNvPr id="11" name="グループ化 10">
               <a:extLst>
                 <a:ext uri="{FF2B5EF4-FFF2-40B4-BE49-F238E27FC236}">
-                  <a16:creationId xmlns:a16="http://schemas.microsoft.com/office/drawing/2014/main" id="{5705B721-1B7B-B514-548A-9DC04F5001B4}"/>
+                  <a16:creationId xmlns:a16="http://schemas.microsoft.com/office/drawing/2014/main" id="{DD88CE34-87EE-D3E9-1F38-6E88CC9AA1E7}"/>
                 </a:ext>
               </a:extLst>
             </p:cNvPr>
@@ -17505,10 +17505,10 @@
           </p:grpSpPr>
           <p:sp>
             <p:nvSpPr>
-              <p:cNvPr id="12" name="思考の吹き出し: 雲形 11">
+              <p:cNvPr id="13" name="思考の吹き出し: 雲形 12">
                 <a:extLst>
                   <a:ext uri="{FF2B5EF4-FFF2-40B4-BE49-F238E27FC236}">
-                    <a16:creationId xmlns:a16="http://schemas.microsoft.com/office/drawing/2014/main" id="{00EF6743-D3A0-6769-1B99-22BE65B9590F}"/>
+                    <a16:creationId xmlns:a16="http://schemas.microsoft.com/office/drawing/2014/main" id="{395F5AF6-EF08-E0A8-BE55-F1B34A65D66D}"/>
                   </a:ext>
                 </a:extLst>
               </p:cNvPr>
@@ -17565,10 +17565,10 @@
           </p:sp>
           <p:sp>
             <p:nvSpPr>
-              <p:cNvPr id="13" name="正方形/長方形 12">
+              <p:cNvPr id="14" name="正方形/長方形 13">
                 <a:extLst>
                   <a:ext uri="{FF2B5EF4-FFF2-40B4-BE49-F238E27FC236}">
-                    <a16:creationId xmlns:a16="http://schemas.microsoft.com/office/drawing/2014/main" id="{BC19A1AA-34FB-201D-505B-5FCE42961F0C}"/>
+                    <a16:creationId xmlns:a16="http://schemas.microsoft.com/office/drawing/2014/main" id="{C14B3224-7E53-EF8F-AF09-8545A5689C91}"/>
                   </a:ext>
                 </a:extLst>
               </p:cNvPr>
@@ -17620,10 +17620,10 @@
           </p:sp>
           <p:sp>
             <p:nvSpPr>
-              <p:cNvPr id="14" name="正方形/長方形 13">
+              <p:cNvPr id="15" name="正方形/長方形 14">
                 <a:extLst>
                   <a:ext uri="{FF2B5EF4-FFF2-40B4-BE49-F238E27FC236}">
-                    <a16:creationId xmlns:a16="http://schemas.microsoft.com/office/drawing/2014/main" id="{F47CEE55-57FC-E5EC-90DA-E9E0FB2635E7}"/>
+                    <a16:creationId xmlns:a16="http://schemas.microsoft.com/office/drawing/2014/main" id="{6A45CF11-2138-7410-E8E3-2121225986B7}"/>
                   </a:ext>
                 </a:extLst>
               </p:cNvPr>
@@ -17675,10 +17675,10 @@
           </p:sp>
           <p:sp>
             <p:nvSpPr>
-              <p:cNvPr id="15" name="正方形/長方形 14">
+              <p:cNvPr id="16" name="正方形/長方形 15">
                 <a:extLst>
                   <a:ext uri="{FF2B5EF4-FFF2-40B4-BE49-F238E27FC236}">
-                    <a16:creationId xmlns:a16="http://schemas.microsoft.com/office/drawing/2014/main" id="{0CDFF352-C922-52EE-6E0E-89E1601EE7FA}"/>
+                    <a16:creationId xmlns:a16="http://schemas.microsoft.com/office/drawing/2014/main" id="{D111CBF4-AE0C-C09A-B4C8-2CEC64BB5A09}"/>
                   </a:ext>
                 </a:extLst>
               </p:cNvPr>
@@ -17731,10 +17731,10 @@
         </p:grpSp>
         <p:sp>
           <p:nvSpPr>
-            <p:cNvPr id="11" name="正方形/長方形 10">
+            <p:cNvPr id="12" name="正方形/長方形 11">
               <a:extLst>
                 <a:ext uri="{FF2B5EF4-FFF2-40B4-BE49-F238E27FC236}">
-                  <a16:creationId xmlns:a16="http://schemas.microsoft.com/office/drawing/2014/main" id="{7CEB7DEC-5622-6607-EA59-6DE841E5305E}"/>
+                  <a16:creationId xmlns:a16="http://schemas.microsoft.com/office/drawing/2014/main" id="{F3CE796B-2BB6-0DF7-5B1A-87E136D2F5D0}"/>
                 </a:ext>
               </a:extLst>
             </p:cNvPr>
@@ -17801,7 +17801,7 @@
     </p:spTree>
     <p:extLst>
       <p:ext uri="{BB962C8B-B14F-4D97-AF65-F5344CB8AC3E}">
-        <p14:creationId xmlns:p14="http://schemas.microsoft.com/office/powerpoint/2010/main" val="392986609"/>
+        <p14:creationId xmlns:p14="http://schemas.microsoft.com/office/powerpoint/2010/main" val="2276484096"/>
       </p:ext>
     </p:extLst>
   </p:cSld>
@@ -18033,7 +18033,7 @@
         <p:cNvPr id="1" name="">
           <a:extLst>
             <a:ext uri="{FF2B5EF4-FFF2-40B4-BE49-F238E27FC236}">
-              <a16:creationId xmlns:a16="http://schemas.microsoft.com/office/drawing/2014/main" id="{CA9CF575-CA67-FBAF-AEDE-63C0B84FD237}"/>
+              <a16:creationId xmlns:a16="http://schemas.microsoft.com/office/drawing/2014/main" id="{5F05E020-9B95-4DE0-C6CF-ADBA6BAF3B2B}"/>
             </a:ext>
           </a:extLst>
         </p:cNvPr>
@@ -18050,10 +18050,10 @@
       </p:grpSpPr>
       <p:sp>
         <p:nvSpPr>
-          <p:cNvPr id="7" name="フリーフォーム: 図形 6">
+          <p:cNvPr id="6" name="フリーフォーム: 図形 5">
             <a:extLst>
               <a:ext uri="{FF2B5EF4-FFF2-40B4-BE49-F238E27FC236}">
-                <a16:creationId xmlns:a16="http://schemas.microsoft.com/office/drawing/2014/main" id="{7A7BF9F8-403F-CCF3-1DCA-4C5178743A79}"/>
+                <a16:creationId xmlns:a16="http://schemas.microsoft.com/office/drawing/2014/main" id="{E0BBFBD1-FA64-29D2-675B-C11EE9ECAA96}"/>
               </a:ext>
             </a:extLst>
           </p:cNvPr>
@@ -18068,14 +18068,14 @@
           <a:custGeom>
             <a:avLst/>
             <a:gdLst>
-              <a:gd name="csX0" fmla="*/ 1437764 w 12192000"/>
-              <a:gd name="csY0" fmla="*/ 1556711 h 6858000"/>
-              <a:gd name="csX1" fmla="*/ 1437764 w 12192000"/>
-              <a:gd name="csY1" fmla="*/ 1980457 h 6858000"/>
-              <a:gd name="csX2" fmla="*/ 10754236 w 12192000"/>
-              <a:gd name="csY2" fmla="*/ 1980457 h 6858000"/>
-              <a:gd name="csX3" fmla="*/ 10754236 w 12192000"/>
-              <a:gd name="csY3" fmla="*/ 1556711 h 6858000"/>
+              <a:gd name="csX0" fmla="*/ 1231075 w 12192000"/>
+              <a:gd name="csY0" fmla="*/ 1559626 h 6858000"/>
+              <a:gd name="csX1" fmla="*/ 1231075 w 12192000"/>
+              <a:gd name="csY1" fmla="*/ 1975262 h 6858000"/>
+              <a:gd name="csX2" fmla="*/ 10949049 w 12192000"/>
+              <a:gd name="csY2" fmla="*/ 1975262 h 6858000"/>
+              <a:gd name="csX3" fmla="*/ 10949049 w 12192000"/>
+              <a:gd name="csY3" fmla="*/ 1559626 h 6858000"/>
               <a:gd name="csX4" fmla="*/ 0 w 12192000"/>
               <a:gd name="csY4" fmla="*/ 0 h 6858000"/>
               <a:gd name="csX5" fmla="*/ 12192000 w 12192000"/>
@@ -18116,16 +18116,16 @@
             <a:pathLst>
               <a:path w="12192000" h="6858000">
                 <a:moveTo>
-                  <a:pt x="1437764" y="1556711"/>
+                  <a:pt x="1231075" y="1559626"/>
                 </a:moveTo>
                 <a:lnTo>
-                  <a:pt x="1437764" y="1980457"/>
+                  <a:pt x="1231075" y="1975262"/>
                 </a:lnTo>
                 <a:lnTo>
-                  <a:pt x="10754236" y="1980457"/>
+                  <a:pt x="10949049" y="1975262"/>
                 </a:lnTo>
                 <a:lnTo>
-                  <a:pt x="10754236" y="1556711"/>
+                  <a:pt x="10949049" y="1559626"/>
                 </a:lnTo>
                 <a:close/>
                 <a:moveTo>
@@ -18183,7 +18183,7 @@
     </p:spTree>
     <p:extLst>
       <p:ext uri="{BB962C8B-B14F-4D97-AF65-F5344CB8AC3E}">
-        <p14:creationId xmlns:p14="http://schemas.microsoft.com/office/powerpoint/2010/main" val="2479550699"/>
+        <p14:creationId xmlns:p14="http://schemas.microsoft.com/office/powerpoint/2010/main" val="134148486"/>
       </p:ext>
     </p:extLst>
   </p:cSld>
@@ -18569,7 +18569,7 @@
         <p:cNvPr id="1" name="">
           <a:extLst>
             <a:ext uri="{FF2B5EF4-FFF2-40B4-BE49-F238E27FC236}">
-              <a16:creationId xmlns:a16="http://schemas.microsoft.com/office/drawing/2014/main" id="{51A5E04C-770F-1B90-ADDC-F9670DC63987}"/>
+              <a16:creationId xmlns:a16="http://schemas.microsoft.com/office/drawing/2014/main" id="{E419AA2F-95BE-A431-59E5-BB390BF826D7}"/>
             </a:ext>
           </a:extLst>
         </p:cNvPr>
@@ -18586,10 +18586,10 @@
       </p:grpSpPr>
       <p:sp>
         <p:nvSpPr>
-          <p:cNvPr id="4" name="フリーフォーム: 図形 3">
+          <p:cNvPr id="5" name="フリーフォーム: 図形 4">
             <a:extLst>
               <a:ext uri="{FF2B5EF4-FFF2-40B4-BE49-F238E27FC236}">
-                <a16:creationId xmlns:a16="http://schemas.microsoft.com/office/drawing/2014/main" id="{94C47695-8592-4C34-5043-92953CA80837}"/>
+                <a16:creationId xmlns:a16="http://schemas.microsoft.com/office/drawing/2014/main" id="{959C94B8-7D7B-77A8-3B1F-31784949CD78}"/>
               </a:ext>
             </a:extLst>
           </p:cNvPr>
@@ -18604,14 +18604,14 @@
           <a:custGeom>
             <a:avLst/>
             <a:gdLst>
-              <a:gd name="csX0" fmla="*/ 1437764 w 12192000"/>
-              <a:gd name="csY0" fmla="*/ 1980456 h 6858000"/>
-              <a:gd name="csX1" fmla="*/ 1437764 w 12192000"/>
-              <a:gd name="csY1" fmla="*/ 2560319 h 6858000"/>
-              <a:gd name="csX2" fmla="*/ 10754236 w 12192000"/>
-              <a:gd name="csY2" fmla="*/ 2560319 h 6858000"/>
-              <a:gd name="csX3" fmla="*/ 10754236 w 12192000"/>
-              <a:gd name="csY3" fmla="*/ 1980456 h 6858000"/>
+              <a:gd name="csX0" fmla="*/ 1231075 w 12192000"/>
+              <a:gd name="csY0" fmla="*/ 1975262 h 6858000"/>
+              <a:gd name="csX1" fmla="*/ 1231075 w 12192000"/>
+              <a:gd name="csY1" fmla="*/ 2549236 h 6858000"/>
+              <a:gd name="csX2" fmla="*/ 10949049 w 12192000"/>
+              <a:gd name="csY2" fmla="*/ 2549236 h 6858000"/>
+              <a:gd name="csX3" fmla="*/ 10949049 w 12192000"/>
+              <a:gd name="csY3" fmla="*/ 1975262 h 6858000"/>
               <a:gd name="csX4" fmla="*/ 0 w 12192000"/>
               <a:gd name="csY4" fmla="*/ 0 h 6858000"/>
               <a:gd name="csX5" fmla="*/ 12192000 w 12192000"/>
@@ -18652,16 +18652,16 @@
             <a:pathLst>
               <a:path w="12192000" h="6858000">
                 <a:moveTo>
-                  <a:pt x="1437764" y="1980456"/>
+                  <a:pt x="1231075" y="1975262"/>
                 </a:moveTo>
                 <a:lnTo>
-                  <a:pt x="1437764" y="2560319"/>
+                  <a:pt x="1231075" y="2549236"/>
                 </a:lnTo>
                 <a:lnTo>
-                  <a:pt x="10754236" y="2560319"/>
+                  <a:pt x="10949049" y="2549236"/>
                 </a:lnTo>
                 <a:lnTo>
-                  <a:pt x="10754236" y="1980456"/>
+                  <a:pt x="10949049" y="1975262"/>
                 </a:lnTo>
                 <a:close/>
                 <a:moveTo>
@@ -18719,7 +18719,7 @@
     </p:spTree>
     <p:extLst>
       <p:ext uri="{BB962C8B-B14F-4D97-AF65-F5344CB8AC3E}">
-        <p14:creationId xmlns:p14="http://schemas.microsoft.com/office/powerpoint/2010/main" val="1564734483"/>
+        <p14:creationId xmlns:p14="http://schemas.microsoft.com/office/powerpoint/2010/main" val="1067268177"/>
       </p:ext>
     </p:extLst>
   </p:cSld>
@@ -19059,7 +19059,7 @@
         <p:cNvPr id="1" name="">
           <a:extLst>
             <a:ext uri="{FF2B5EF4-FFF2-40B4-BE49-F238E27FC236}">
-              <a16:creationId xmlns:a16="http://schemas.microsoft.com/office/drawing/2014/main" id="{4509990F-B93E-9633-B108-FCCF5F3B9CE7}"/>
+              <a16:creationId xmlns:a16="http://schemas.microsoft.com/office/drawing/2014/main" id="{4724B2FA-CAE3-073D-3914-16FA43C146F6}"/>
             </a:ext>
           </a:extLst>
         </p:cNvPr>
@@ -19076,10 +19076,10 @@
       </p:grpSpPr>
       <p:sp>
         <p:nvSpPr>
-          <p:cNvPr id="4" name="フリーフォーム: 図形 3">
+          <p:cNvPr id="5" name="フリーフォーム: 図形 4">
             <a:extLst>
               <a:ext uri="{FF2B5EF4-FFF2-40B4-BE49-F238E27FC236}">
-                <a16:creationId xmlns:a16="http://schemas.microsoft.com/office/drawing/2014/main" id="{8C499E7B-64E0-750C-EF9E-CC10008DE443}"/>
+                <a16:creationId xmlns:a16="http://schemas.microsoft.com/office/drawing/2014/main" id="{F148968B-C55B-0F29-3148-82B87B564A55}"/>
               </a:ext>
             </a:extLst>
           </p:cNvPr>
@@ -19094,14 +19094,14 @@
           <a:custGeom>
             <a:avLst/>
             <a:gdLst>
-              <a:gd name="csX0" fmla="*/ 1437764 w 12192000"/>
-              <a:gd name="csY0" fmla="*/ 2560320 h 6858000"/>
-              <a:gd name="csX1" fmla="*/ 1437764 w 12192000"/>
-              <a:gd name="csY1" fmla="*/ 3140182 h 6858000"/>
-              <a:gd name="csX2" fmla="*/ 10754236 w 12192000"/>
-              <a:gd name="csY2" fmla="*/ 3140182 h 6858000"/>
-              <a:gd name="csX3" fmla="*/ 10754236 w 12192000"/>
-              <a:gd name="csY3" fmla="*/ 2560320 h 6858000"/>
+              <a:gd name="csX0" fmla="*/ 1231075 w 12192000"/>
+              <a:gd name="csY0" fmla="*/ 2561112 h 6858000"/>
+              <a:gd name="csX1" fmla="*/ 1231075 w 12192000"/>
+              <a:gd name="csY1" fmla="*/ 3139044 h 6858000"/>
+              <a:gd name="csX2" fmla="*/ 10949049 w 12192000"/>
+              <a:gd name="csY2" fmla="*/ 3139044 h 6858000"/>
+              <a:gd name="csX3" fmla="*/ 10949049 w 12192000"/>
+              <a:gd name="csY3" fmla="*/ 2561112 h 6858000"/>
               <a:gd name="csX4" fmla="*/ 0 w 12192000"/>
               <a:gd name="csY4" fmla="*/ 0 h 6858000"/>
               <a:gd name="csX5" fmla="*/ 12192000 w 12192000"/>
@@ -19142,16 +19142,16 @@
             <a:pathLst>
               <a:path w="12192000" h="6858000">
                 <a:moveTo>
-                  <a:pt x="1437764" y="2560320"/>
+                  <a:pt x="1231075" y="2561112"/>
                 </a:moveTo>
                 <a:lnTo>
-                  <a:pt x="1437764" y="3140182"/>
+                  <a:pt x="1231075" y="3139044"/>
                 </a:lnTo>
                 <a:lnTo>
-                  <a:pt x="10754236" y="3140182"/>
+                  <a:pt x="10949049" y="3139044"/>
                 </a:lnTo>
                 <a:lnTo>
-                  <a:pt x="10754236" y="2560320"/>
+                  <a:pt x="10949049" y="2561112"/>
                 </a:lnTo>
                 <a:close/>
                 <a:moveTo>
@@ -19209,7 +19209,7 @@
     </p:spTree>
     <p:extLst>
       <p:ext uri="{BB962C8B-B14F-4D97-AF65-F5344CB8AC3E}">
-        <p14:creationId xmlns:p14="http://schemas.microsoft.com/office/powerpoint/2010/main" val="2744726224"/>
+        <p14:creationId xmlns:p14="http://schemas.microsoft.com/office/powerpoint/2010/main" val="1026212266"/>
       </p:ext>
     </p:extLst>
   </p:cSld>
@@ -19411,7 +19411,7 @@
         <p:cNvPr id="1" name="">
           <a:extLst>
             <a:ext uri="{FF2B5EF4-FFF2-40B4-BE49-F238E27FC236}">
-              <a16:creationId xmlns:a16="http://schemas.microsoft.com/office/drawing/2014/main" id="{CD8E9A92-21AB-8889-0EAF-122719745E5C}"/>
+              <a16:creationId xmlns:a16="http://schemas.microsoft.com/office/drawing/2014/main" id="{DF8C9F35-6A47-053D-A9B4-9DF3785186E3}"/>
             </a:ext>
           </a:extLst>
         </p:cNvPr>
@@ -19431,7 +19431,7 @@
           <p:cNvPr id="9" name="フリーフォーム: 図形 8">
             <a:extLst>
               <a:ext uri="{FF2B5EF4-FFF2-40B4-BE49-F238E27FC236}">
-                <a16:creationId xmlns:a16="http://schemas.microsoft.com/office/drawing/2014/main" id="{D1D241B9-6327-9E8E-534B-EA798BDC4EEC}"/>
+                <a16:creationId xmlns:a16="http://schemas.microsoft.com/office/drawing/2014/main" id="{41D468F9-87EE-D228-E052-73858281BF7D}"/>
               </a:ext>
             </a:extLst>
           </p:cNvPr>
@@ -19446,26 +19446,26 @@
           <a:custGeom>
             <a:avLst/>
             <a:gdLst>
-              <a:gd name="csX0" fmla="*/ 1437763 w 12192000"/>
-              <a:gd name="csY0" fmla="*/ 3572851 h 6858000"/>
-              <a:gd name="csX1" fmla="*/ 1437763 w 12192000"/>
-              <a:gd name="csY1" fmla="*/ 4572000 h 6858000"/>
-              <a:gd name="csX2" fmla="*/ 1437763 w 12192000"/>
-              <a:gd name="csY2" fmla="*/ 5151862 h 6858000"/>
-              <a:gd name="csX3" fmla="*/ 1437763 w 12192000"/>
-              <a:gd name="csY3" fmla="*/ 5727266 h 6858000"/>
-              <a:gd name="csX4" fmla="*/ 2511254 w 12192000"/>
-              <a:gd name="csY4" fmla="*/ 5727266 h 6858000"/>
-              <a:gd name="csX5" fmla="*/ 2511254 w 12192000"/>
-              <a:gd name="csY5" fmla="*/ 5151862 h 6858000"/>
-              <a:gd name="csX6" fmla="*/ 10754235 w 12192000"/>
-              <a:gd name="csY6" fmla="*/ 5151862 h 6858000"/>
-              <a:gd name="csX7" fmla="*/ 10754235 w 12192000"/>
-              <a:gd name="csY7" fmla="*/ 4572000 h 6858000"/>
-              <a:gd name="csX8" fmla="*/ 2511254 w 12192000"/>
-              <a:gd name="csY8" fmla="*/ 4572000 h 6858000"/>
-              <a:gd name="csX9" fmla="*/ 2511254 w 12192000"/>
-              <a:gd name="csY9" fmla="*/ 3572851 h 6858000"/>
+              <a:gd name="csX0" fmla="*/ 1231075 w 12192000"/>
+              <a:gd name="csY0" fmla="*/ 3570514 h 6858000"/>
+              <a:gd name="csX1" fmla="*/ 1231075 w 12192000"/>
+              <a:gd name="csY1" fmla="*/ 4571999 h 6858000"/>
+              <a:gd name="csX2" fmla="*/ 1231075 w 12192000"/>
+              <a:gd name="csY2" fmla="*/ 5145972 h 6858000"/>
+              <a:gd name="csX3" fmla="*/ 1231075 w 12192000"/>
+              <a:gd name="csY3" fmla="*/ 5737760 h 6858000"/>
+              <a:gd name="csX4" fmla="*/ 2284021 w 12192000"/>
+              <a:gd name="csY4" fmla="*/ 5737760 h 6858000"/>
+              <a:gd name="csX5" fmla="*/ 2284021 w 12192000"/>
+              <a:gd name="csY5" fmla="*/ 5145972 h 6858000"/>
+              <a:gd name="csX6" fmla="*/ 10949049 w 12192000"/>
+              <a:gd name="csY6" fmla="*/ 5145972 h 6858000"/>
+              <a:gd name="csX7" fmla="*/ 10949049 w 12192000"/>
+              <a:gd name="csY7" fmla="*/ 4571999 h 6858000"/>
+              <a:gd name="csX8" fmla="*/ 2284021 w 12192000"/>
+              <a:gd name="csY8" fmla="*/ 4571999 h 6858000"/>
+              <a:gd name="csX9" fmla="*/ 2284021 w 12192000"/>
+              <a:gd name="csY9" fmla="*/ 3570514 h 6858000"/>
               <a:gd name="csX10" fmla="*/ 0 w 12192000"/>
               <a:gd name="csY10" fmla="*/ 0 h 6858000"/>
               <a:gd name="csX11" fmla="*/ 12192000 w 12192000"/>
@@ -19524,34 +19524,34 @@
             <a:pathLst>
               <a:path w="12192000" h="6858000">
                 <a:moveTo>
-                  <a:pt x="1437763" y="3572851"/>
+                  <a:pt x="1231075" y="3570514"/>
                 </a:moveTo>
                 <a:lnTo>
-                  <a:pt x="1437763" y="4572000"/>
+                  <a:pt x="1231075" y="4571999"/>
                 </a:lnTo>
                 <a:lnTo>
-                  <a:pt x="1437763" y="5151862"/>
+                  <a:pt x="1231075" y="5145972"/>
                 </a:lnTo>
                 <a:lnTo>
-                  <a:pt x="1437763" y="5727266"/>
+                  <a:pt x="1231075" y="5737760"/>
                 </a:lnTo>
                 <a:lnTo>
-                  <a:pt x="2511254" y="5727266"/>
+                  <a:pt x="2284021" y="5737760"/>
                 </a:lnTo>
                 <a:lnTo>
-                  <a:pt x="2511254" y="5151862"/>
+                  <a:pt x="2284021" y="5145972"/>
                 </a:lnTo>
                 <a:lnTo>
-                  <a:pt x="10754235" y="5151862"/>
+                  <a:pt x="10949049" y="5145972"/>
                 </a:lnTo>
                 <a:lnTo>
-                  <a:pt x="10754235" y="4572000"/>
+                  <a:pt x="10949049" y="4571999"/>
                 </a:lnTo>
                 <a:lnTo>
-                  <a:pt x="2511254" y="4572000"/>
+                  <a:pt x="2284021" y="4571999"/>
                 </a:lnTo>
                 <a:lnTo>
-                  <a:pt x="2511254" y="3572851"/>
+                  <a:pt x="2284021" y="3570514"/>
                 </a:lnTo>
                 <a:close/>
                 <a:moveTo>
@@ -19611,7 +19611,7 @@
           <p:cNvPr id="10" name="グループ化 9">
             <a:extLst>
               <a:ext uri="{FF2B5EF4-FFF2-40B4-BE49-F238E27FC236}">
-                <a16:creationId xmlns:a16="http://schemas.microsoft.com/office/drawing/2014/main" id="{DE8F2589-ABEC-EA81-2935-D24D4293B986}"/>
+                <a16:creationId xmlns:a16="http://schemas.microsoft.com/office/drawing/2014/main" id="{4D01BDE8-E4CC-EA9E-98F3-6D61EA5D89D3}"/>
               </a:ext>
             </a:extLst>
           </p:cNvPr>
@@ -19638,7 +19638,7 @@
             <p:cNvPr id="11" name="グループ化 10">
               <a:extLst>
                 <a:ext uri="{FF2B5EF4-FFF2-40B4-BE49-F238E27FC236}">
-                  <a16:creationId xmlns:a16="http://schemas.microsoft.com/office/drawing/2014/main" id="{ADA12C11-E597-9120-31BD-862373B52D66}"/>
+                  <a16:creationId xmlns:a16="http://schemas.microsoft.com/office/drawing/2014/main" id="{9C0BC293-A11F-46B5-1BF1-282433EB5713}"/>
                 </a:ext>
               </a:extLst>
             </p:cNvPr>
@@ -19658,7 +19658,7 @@
               <p:cNvPr id="13" name="思考の吹き出し: 雲形 12">
                 <a:extLst>
                   <a:ext uri="{FF2B5EF4-FFF2-40B4-BE49-F238E27FC236}">
-                    <a16:creationId xmlns:a16="http://schemas.microsoft.com/office/drawing/2014/main" id="{86E1BA43-7420-FBCC-1B03-0A4A687564B5}"/>
+                    <a16:creationId xmlns:a16="http://schemas.microsoft.com/office/drawing/2014/main" id="{27FF92D8-B7E7-EFB8-7106-5F487D72DBBB}"/>
                   </a:ext>
                 </a:extLst>
               </p:cNvPr>
@@ -19718,7 +19718,7 @@
               <p:cNvPr id="14" name="正方形/長方形 13">
                 <a:extLst>
                   <a:ext uri="{FF2B5EF4-FFF2-40B4-BE49-F238E27FC236}">
-                    <a16:creationId xmlns:a16="http://schemas.microsoft.com/office/drawing/2014/main" id="{ED6180C2-F421-750F-6976-7C67F39C9B3D}"/>
+                    <a16:creationId xmlns:a16="http://schemas.microsoft.com/office/drawing/2014/main" id="{F8D90C52-E3BE-463F-7552-90613F6F50EC}"/>
                   </a:ext>
                 </a:extLst>
               </p:cNvPr>
@@ -19773,7 +19773,7 @@
               <p:cNvPr id="15" name="正方形/長方形 14">
                 <a:extLst>
                   <a:ext uri="{FF2B5EF4-FFF2-40B4-BE49-F238E27FC236}">
-                    <a16:creationId xmlns:a16="http://schemas.microsoft.com/office/drawing/2014/main" id="{2FA905A2-B966-791D-BCF7-E8ED1AB4715B}"/>
+                    <a16:creationId xmlns:a16="http://schemas.microsoft.com/office/drawing/2014/main" id="{9B670A6D-390F-FFCB-A014-8A7340BBC905}"/>
                   </a:ext>
                 </a:extLst>
               </p:cNvPr>
@@ -19828,7 +19828,7 @@
               <p:cNvPr id="16" name="正方形/長方形 15">
                 <a:extLst>
                   <a:ext uri="{FF2B5EF4-FFF2-40B4-BE49-F238E27FC236}">
-                    <a16:creationId xmlns:a16="http://schemas.microsoft.com/office/drawing/2014/main" id="{E9C4A990-52DF-145D-B216-CA9904834001}"/>
+                    <a16:creationId xmlns:a16="http://schemas.microsoft.com/office/drawing/2014/main" id="{285D2E3E-DBF3-49AA-524B-203A67B813BC}"/>
                   </a:ext>
                 </a:extLst>
               </p:cNvPr>
@@ -19884,7 +19884,7 @@
             <p:cNvPr id="12" name="正方形/長方形 11">
               <a:extLst>
                 <a:ext uri="{FF2B5EF4-FFF2-40B4-BE49-F238E27FC236}">
-                  <a16:creationId xmlns:a16="http://schemas.microsoft.com/office/drawing/2014/main" id="{97C85EF7-157B-2B5B-A9BE-8320E8F76781}"/>
+                  <a16:creationId xmlns:a16="http://schemas.microsoft.com/office/drawing/2014/main" id="{B478CC21-3279-796E-3986-ED59388EB786}"/>
                 </a:ext>
               </a:extLst>
             </p:cNvPr>
@@ -19951,7 +19951,7 @@
     </p:spTree>
     <p:extLst>
       <p:ext uri="{BB962C8B-B14F-4D97-AF65-F5344CB8AC3E}">
-        <p14:creationId xmlns:p14="http://schemas.microsoft.com/office/powerpoint/2010/main" val="3002811072"/>
+        <p14:creationId xmlns:p14="http://schemas.microsoft.com/office/powerpoint/2010/main" val="1453194258"/>
       </p:ext>
     </p:extLst>
   </p:cSld>
@@ -20153,7 +20153,7 @@
         <p:cNvPr id="1" name="">
           <a:extLst>
             <a:ext uri="{FF2B5EF4-FFF2-40B4-BE49-F238E27FC236}">
-              <a16:creationId xmlns:a16="http://schemas.microsoft.com/office/drawing/2014/main" id="{B26691C6-7196-357B-CF15-4A84909F6DCF}"/>
+              <a16:creationId xmlns:a16="http://schemas.microsoft.com/office/drawing/2014/main" id="{DD149B1D-0226-78BC-F63A-E99F13C93A5B}"/>
             </a:ext>
           </a:extLst>
         </p:cNvPr>
@@ -20170,10 +20170,10 @@
       </p:grpSpPr>
       <p:sp>
         <p:nvSpPr>
-          <p:cNvPr id="9" name="フリーフォーム: 図形 8">
+          <p:cNvPr id="18" name="フリーフォーム: 図形 17">
             <a:extLst>
               <a:ext uri="{FF2B5EF4-FFF2-40B4-BE49-F238E27FC236}">
-                <a16:creationId xmlns:a16="http://schemas.microsoft.com/office/drawing/2014/main" id="{F51F1D07-1363-8751-FA6F-C8E94B185A79}"/>
+                <a16:creationId xmlns:a16="http://schemas.microsoft.com/office/drawing/2014/main" id="{38FA1461-DE1D-2EC9-AB51-AC518350623D}"/>
               </a:ext>
             </a:extLst>
           </p:cNvPr>
@@ -20188,30 +20188,30 @@
           <a:custGeom>
             <a:avLst/>
             <a:gdLst>
-              <a:gd name="csX0" fmla="*/ 1437763 w 12192000"/>
-              <a:gd name="csY0" fmla="*/ 3572851 h 6858000"/>
-              <a:gd name="csX1" fmla="*/ 1437763 w 12192000"/>
-              <a:gd name="csY1" fmla="*/ 5147404 h 6858000"/>
-              <a:gd name="csX2" fmla="*/ 1437763 w 12192000"/>
-              <a:gd name="csY2" fmla="*/ 5727266 h 6858000"/>
-              <a:gd name="csX3" fmla="*/ 2511255 w 12192000"/>
-              <a:gd name="csY3" fmla="*/ 5727266 h 6858000"/>
-              <a:gd name="csX4" fmla="*/ 10754235 w 12192000"/>
-              <a:gd name="csY4" fmla="*/ 5727266 h 6858000"/>
-              <a:gd name="csX5" fmla="*/ 10754235 w 12192000"/>
-              <a:gd name="csY5" fmla="*/ 5147404 h 6858000"/>
-              <a:gd name="csX6" fmla="*/ 2511255 w 12192000"/>
-              <a:gd name="csY6" fmla="*/ 5147404 h 6858000"/>
-              <a:gd name="csX7" fmla="*/ 2511255 w 12192000"/>
-              <a:gd name="csY7" fmla="*/ 3572851 h 6858000"/>
-              <a:gd name="csX8" fmla="*/ 1437764 w 12192000"/>
-              <a:gd name="csY8" fmla="*/ 2560320 h 6858000"/>
-              <a:gd name="csX9" fmla="*/ 1437764 w 12192000"/>
-              <a:gd name="csY9" fmla="*/ 3140182 h 6858000"/>
-              <a:gd name="csX10" fmla="*/ 10754236 w 12192000"/>
-              <a:gd name="csY10" fmla="*/ 3140182 h 6858000"/>
-              <a:gd name="csX11" fmla="*/ 10754236 w 12192000"/>
-              <a:gd name="csY11" fmla="*/ 2560320 h 6858000"/>
+              <a:gd name="csX0" fmla="*/ 1231075 w 12192000"/>
+              <a:gd name="csY0" fmla="*/ 3570514 h 6858000"/>
+              <a:gd name="csX1" fmla="*/ 1231075 w 12192000"/>
+              <a:gd name="csY1" fmla="*/ 5147951 h 6858000"/>
+              <a:gd name="csX2" fmla="*/ 1231075 w 12192000"/>
+              <a:gd name="csY2" fmla="*/ 5737760 h 6858000"/>
+              <a:gd name="csX3" fmla="*/ 2284021 w 12192000"/>
+              <a:gd name="csY3" fmla="*/ 5737760 h 6858000"/>
+              <a:gd name="csX4" fmla="*/ 10949049 w 12192000"/>
+              <a:gd name="csY4" fmla="*/ 5737760 h 6858000"/>
+              <a:gd name="csX5" fmla="*/ 10949049 w 12192000"/>
+              <a:gd name="csY5" fmla="*/ 5147951 h 6858000"/>
+              <a:gd name="csX6" fmla="*/ 2284021 w 12192000"/>
+              <a:gd name="csY6" fmla="*/ 5147951 h 6858000"/>
+              <a:gd name="csX7" fmla="*/ 2284021 w 12192000"/>
+              <a:gd name="csY7" fmla="*/ 3570514 h 6858000"/>
+              <a:gd name="csX8" fmla="*/ 1231075 w 12192000"/>
+              <a:gd name="csY8" fmla="*/ 2553194 h 6858000"/>
+              <a:gd name="csX9" fmla="*/ 1231075 w 12192000"/>
+              <a:gd name="csY9" fmla="*/ 3143002 h 6858000"/>
+              <a:gd name="csX10" fmla="*/ 10949049 w 12192000"/>
+              <a:gd name="csY10" fmla="*/ 3143002 h 6858000"/>
+              <a:gd name="csX11" fmla="*/ 10949049 w 12192000"/>
+              <a:gd name="csY11" fmla="*/ 2553194 h 6858000"/>
               <a:gd name="csX12" fmla="*/ 0 w 12192000"/>
               <a:gd name="csY12" fmla="*/ 0 h 6858000"/>
               <a:gd name="csX13" fmla="*/ 12192000 w 12192000"/>
@@ -20276,41 +20276,41 @@
             <a:pathLst>
               <a:path w="12192000" h="6858000">
                 <a:moveTo>
-                  <a:pt x="1437763" y="3572851"/>
+                  <a:pt x="1231075" y="3570514"/>
                 </a:moveTo>
                 <a:lnTo>
-                  <a:pt x="1437763" y="5147404"/>
+                  <a:pt x="1231075" y="5147951"/>
                 </a:lnTo>
                 <a:lnTo>
-                  <a:pt x="1437763" y="5727266"/>
+                  <a:pt x="1231075" y="5737760"/>
                 </a:lnTo>
                 <a:lnTo>
-                  <a:pt x="2511255" y="5727266"/>
+                  <a:pt x="2284021" y="5737760"/>
                 </a:lnTo>
                 <a:lnTo>
-                  <a:pt x="10754235" y="5727266"/>
+                  <a:pt x="10949049" y="5737760"/>
                 </a:lnTo>
                 <a:lnTo>
-                  <a:pt x="10754235" y="5147404"/>
+                  <a:pt x="10949049" y="5147951"/>
                 </a:lnTo>
                 <a:lnTo>
-                  <a:pt x="2511255" y="5147404"/>
+                  <a:pt x="2284021" y="5147951"/>
                 </a:lnTo>
                 <a:lnTo>
-                  <a:pt x="2511255" y="3572851"/>
+                  <a:pt x="2284021" y="3570514"/>
                 </a:lnTo>
                 <a:close/>
                 <a:moveTo>
-                  <a:pt x="1437764" y="2560320"/>
+                  <a:pt x="1231075" y="2553194"/>
                 </a:moveTo>
                 <a:lnTo>
-                  <a:pt x="1437764" y="3140182"/>
+                  <a:pt x="1231075" y="3143002"/>
                 </a:lnTo>
                 <a:lnTo>
-                  <a:pt x="10754236" y="3140182"/>
+                  <a:pt x="10949049" y="3143002"/>
                 </a:lnTo>
                 <a:lnTo>
-                  <a:pt x="10754236" y="2560320"/>
+                  <a:pt x="10949049" y="2553194"/>
                 </a:lnTo>
                 <a:close/>
                 <a:moveTo>
@@ -20368,7 +20368,7 @@
     </p:spTree>
     <p:extLst>
       <p:ext uri="{BB962C8B-B14F-4D97-AF65-F5344CB8AC3E}">
-        <p14:creationId xmlns:p14="http://schemas.microsoft.com/office/powerpoint/2010/main" val="4002300782"/>
+        <p14:creationId xmlns:p14="http://schemas.microsoft.com/office/powerpoint/2010/main" val="98695772"/>
       </p:ext>
     </p:extLst>
   </p:cSld>

--- a/tools/llm-as-a-judge/readme.pptx
+++ b/tools/llm-as-a-judge/readme.pptx
@@ -10,19 +10,21 @@
     <p:sldId id="258" r:id="rId4"/>
     <p:sldId id="273" r:id="rId5"/>
     <p:sldId id="303" r:id="rId6"/>
-    <p:sldId id="262" r:id="rId7"/>
-    <p:sldId id="304" r:id="rId8"/>
-    <p:sldId id="264" r:id="rId9"/>
-    <p:sldId id="305" r:id="rId10"/>
-    <p:sldId id="301" r:id="rId11"/>
-    <p:sldId id="306" r:id="rId12"/>
-    <p:sldId id="266" r:id="rId13"/>
-    <p:sldId id="259" r:id="rId14"/>
-    <p:sldId id="307" r:id="rId15"/>
-    <p:sldId id="268" r:id="rId16"/>
-    <p:sldId id="270" r:id="rId17"/>
-    <p:sldId id="308" r:id="rId18"/>
-    <p:sldId id="272" r:id="rId19"/>
+    <p:sldId id="309" r:id="rId7"/>
+    <p:sldId id="262" r:id="rId8"/>
+    <p:sldId id="304" r:id="rId9"/>
+    <p:sldId id="264" r:id="rId10"/>
+    <p:sldId id="305" r:id="rId11"/>
+    <p:sldId id="301" r:id="rId12"/>
+    <p:sldId id="306" r:id="rId13"/>
+    <p:sldId id="310" r:id="rId14"/>
+    <p:sldId id="266" r:id="rId15"/>
+    <p:sldId id="259" r:id="rId16"/>
+    <p:sldId id="307" r:id="rId17"/>
+    <p:sldId id="268" r:id="rId18"/>
+    <p:sldId id="270" r:id="rId19"/>
+    <p:sldId id="308" r:id="rId20"/>
+    <p:sldId id="272" r:id="rId21"/>
   </p:sldIdLst>
   <p:sldSz cx="12192000" cy="6858000"/>
   <p:notesSz cx="6858000" cy="9144000"/>
@@ -17070,6 +17072,239 @@
         <p:cNvPr id="1" name="">
           <a:extLst>
             <a:ext uri="{FF2B5EF4-FFF2-40B4-BE49-F238E27FC236}">
+              <a16:creationId xmlns:a16="http://schemas.microsoft.com/office/drawing/2014/main" id="{DD149B1D-0226-78BC-F63A-E99F13C93A5B}"/>
+            </a:ext>
+          </a:extLst>
+        </p:cNvPr>
+        <p:cNvGrpSpPr/>
+        <p:nvPr/>
+      </p:nvGrpSpPr>
+      <p:grpSpPr>
+        <a:xfrm>
+          <a:off x="0" y="0"/>
+          <a:ext cx="0" cy="0"/>
+          <a:chOff x="0" y="0"/>
+          <a:chExt cx="0" cy="0"/>
+        </a:xfrm>
+      </p:grpSpPr>
+      <p:sp>
+        <p:nvSpPr>
+          <p:cNvPr id="18" name="フリーフォーム: 図形 17">
+            <a:extLst>
+              <a:ext uri="{FF2B5EF4-FFF2-40B4-BE49-F238E27FC236}">
+                <a16:creationId xmlns:a16="http://schemas.microsoft.com/office/drawing/2014/main" id="{38FA1461-DE1D-2EC9-AB51-AC518350623D}"/>
+              </a:ext>
+            </a:extLst>
+          </p:cNvPr>
+          <p:cNvSpPr/>
+          <p:nvPr/>
+        </p:nvSpPr>
+        <p:spPr>
+          <a:xfrm>
+            <a:off x="0" y="0"/>
+            <a:ext cx="12192000" cy="6858000"/>
+          </a:xfrm>
+          <a:custGeom>
+            <a:avLst/>
+            <a:gdLst>
+              <a:gd name="csX0" fmla="*/ 1231075 w 12192000"/>
+              <a:gd name="csY0" fmla="*/ 3570514 h 6858000"/>
+              <a:gd name="csX1" fmla="*/ 1231075 w 12192000"/>
+              <a:gd name="csY1" fmla="*/ 5147951 h 6858000"/>
+              <a:gd name="csX2" fmla="*/ 1231075 w 12192000"/>
+              <a:gd name="csY2" fmla="*/ 5737760 h 6858000"/>
+              <a:gd name="csX3" fmla="*/ 2284021 w 12192000"/>
+              <a:gd name="csY3" fmla="*/ 5737760 h 6858000"/>
+              <a:gd name="csX4" fmla="*/ 10949049 w 12192000"/>
+              <a:gd name="csY4" fmla="*/ 5737760 h 6858000"/>
+              <a:gd name="csX5" fmla="*/ 10949049 w 12192000"/>
+              <a:gd name="csY5" fmla="*/ 5147951 h 6858000"/>
+              <a:gd name="csX6" fmla="*/ 2284021 w 12192000"/>
+              <a:gd name="csY6" fmla="*/ 5147951 h 6858000"/>
+              <a:gd name="csX7" fmla="*/ 2284021 w 12192000"/>
+              <a:gd name="csY7" fmla="*/ 3570514 h 6858000"/>
+              <a:gd name="csX8" fmla="*/ 1231075 w 12192000"/>
+              <a:gd name="csY8" fmla="*/ 2553194 h 6858000"/>
+              <a:gd name="csX9" fmla="*/ 1231075 w 12192000"/>
+              <a:gd name="csY9" fmla="*/ 3143002 h 6858000"/>
+              <a:gd name="csX10" fmla="*/ 10949049 w 12192000"/>
+              <a:gd name="csY10" fmla="*/ 3143002 h 6858000"/>
+              <a:gd name="csX11" fmla="*/ 10949049 w 12192000"/>
+              <a:gd name="csY11" fmla="*/ 2553194 h 6858000"/>
+              <a:gd name="csX12" fmla="*/ 0 w 12192000"/>
+              <a:gd name="csY12" fmla="*/ 0 h 6858000"/>
+              <a:gd name="csX13" fmla="*/ 12192000 w 12192000"/>
+              <a:gd name="csY13" fmla="*/ 0 h 6858000"/>
+              <a:gd name="csX14" fmla="*/ 12192000 w 12192000"/>
+              <a:gd name="csY14" fmla="*/ 6858000 h 6858000"/>
+              <a:gd name="csX15" fmla="*/ 0 w 12192000"/>
+              <a:gd name="csY15" fmla="*/ 6858000 h 6858000"/>
+            </a:gdLst>
+            <a:ahLst/>
+            <a:cxnLst>
+              <a:cxn ang="0">
+                <a:pos x="csX0" y="csY0"/>
+              </a:cxn>
+              <a:cxn ang="0">
+                <a:pos x="csX1" y="csY1"/>
+              </a:cxn>
+              <a:cxn ang="0">
+                <a:pos x="csX2" y="csY2"/>
+              </a:cxn>
+              <a:cxn ang="0">
+                <a:pos x="csX3" y="csY3"/>
+              </a:cxn>
+              <a:cxn ang="0">
+                <a:pos x="csX4" y="csY4"/>
+              </a:cxn>
+              <a:cxn ang="0">
+                <a:pos x="csX5" y="csY5"/>
+              </a:cxn>
+              <a:cxn ang="0">
+                <a:pos x="csX6" y="csY6"/>
+              </a:cxn>
+              <a:cxn ang="0">
+                <a:pos x="csX7" y="csY7"/>
+              </a:cxn>
+              <a:cxn ang="0">
+                <a:pos x="csX8" y="csY8"/>
+              </a:cxn>
+              <a:cxn ang="0">
+                <a:pos x="csX9" y="csY9"/>
+              </a:cxn>
+              <a:cxn ang="0">
+                <a:pos x="csX10" y="csY10"/>
+              </a:cxn>
+              <a:cxn ang="0">
+                <a:pos x="csX11" y="csY11"/>
+              </a:cxn>
+              <a:cxn ang="0">
+                <a:pos x="csX12" y="csY12"/>
+              </a:cxn>
+              <a:cxn ang="0">
+                <a:pos x="csX13" y="csY13"/>
+              </a:cxn>
+              <a:cxn ang="0">
+                <a:pos x="csX14" y="csY14"/>
+              </a:cxn>
+              <a:cxn ang="0">
+                <a:pos x="csX15" y="csY15"/>
+              </a:cxn>
+            </a:cxnLst>
+            <a:rect l="l" t="t" r="r" b="b"/>
+            <a:pathLst>
+              <a:path w="12192000" h="6858000">
+                <a:moveTo>
+                  <a:pt x="1231075" y="3570514"/>
+                </a:moveTo>
+                <a:lnTo>
+                  <a:pt x="1231075" y="5147951"/>
+                </a:lnTo>
+                <a:lnTo>
+                  <a:pt x="1231075" y="5737760"/>
+                </a:lnTo>
+                <a:lnTo>
+                  <a:pt x="2284021" y="5737760"/>
+                </a:lnTo>
+                <a:lnTo>
+                  <a:pt x="10949049" y="5737760"/>
+                </a:lnTo>
+                <a:lnTo>
+                  <a:pt x="10949049" y="5147951"/>
+                </a:lnTo>
+                <a:lnTo>
+                  <a:pt x="2284021" y="5147951"/>
+                </a:lnTo>
+                <a:lnTo>
+                  <a:pt x="2284021" y="3570514"/>
+                </a:lnTo>
+                <a:close/>
+                <a:moveTo>
+                  <a:pt x="1231075" y="2553194"/>
+                </a:moveTo>
+                <a:lnTo>
+                  <a:pt x="1231075" y="3143002"/>
+                </a:lnTo>
+                <a:lnTo>
+                  <a:pt x="10949049" y="3143002"/>
+                </a:lnTo>
+                <a:lnTo>
+                  <a:pt x="10949049" y="2553194"/>
+                </a:lnTo>
+                <a:close/>
+                <a:moveTo>
+                  <a:pt x="0" y="0"/>
+                </a:moveTo>
+                <a:lnTo>
+                  <a:pt x="12192000" y="0"/>
+                </a:lnTo>
+                <a:lnTo>
+                  <a:pt x="12192000" y="6858000"/>
+                </a:lnTo>
+                <a:lnTo>
+                  <a:pt x="0" y="6858000"/>
+                </a:lnTo>
+                <a:close/>
+              </a:path>
+            </a:pathLst>
+          </a:custGeom>
+          <a:solidFill>
+            <a:srgbClr val="000000">
+              <a:alpha val="20000"/>
+            </a:srgbClr>
+          </a:solidFill>
+          <a:ln>
+            <a:noFill/>
+          </a:ln>
+        </p:spPr>
+        <p:style>
+          <a:lnRef idx="2">
+            <a:schemeClr val="accent1">
+              <a:shade val="15000"/>
+            </a:schemeClr>
+          </a:lnRef>
+          <a:fillRef idx="1">
+            <a:schemeClr val="accent1"/>
+          </a:fillRef>
+          <a:effectRef idx="0">
+            <a:schemeClr val="accent1"/>
+          </a:effectRef>
+          <a:fontRef idx="minor">
+            <a:schemeClr val="lt1"/>
+          </a:fontRef>
+        </p:style>
+        <p:txBody>
+          <a:bodyPr wrap="square" rtlCol="0" anchor="ctr">
+            <a:noAutofit/>
+          </a:bodyPr>
+          <a:lstStyle/>
+          <a:p>
+            <a:pPr algn="ctr"/>
+            <a:endParaRPr lang="ja-JP" altLang="en-US"/>
+          </a:p>
+        </p:txBody>
+      </p:sp>
+    </p:spTree>
+    <p:extLst>
+      <p:ext uri="{BB962C8B-B14F-4D97-AF65-F5344CB8AC3E}">
+        <p14:creationId xmlns:p14="http://schemas.microsoft.com/office/powerpoint/2010/main" val="98695772"/>
+      </p:ext>
+    </p:extLst>
+  </p:cSld>
+  <p:clrMapOvr>
+    <a:masterClrMapping/>
+  </p:clrMapOvr>
+</p:sld>
+</file>
+
+<file path=ppt/slides/slide11.xml><?xml version="1.0" encoding="utf-8"?>
+<p:sld xmlns:a="http://schemas.openxmlformats.org/drawingml/2006/main" xmlns:r="http://schemas.openxmlformats.org/officeDocument/2006/relationships" xmlns:p="http://schemas.openxmlformats.org/presentationml/2006/main">
+  <p:cSld>
+    <p:spTree>
+      <p:nvGrpSpPr>
+        <p:cNvPr id="1" name="">
+          <a:extLst>
+            <a:ext uri="{FF2B5EF4-FFF2-40B4-BE49-F238E27FC236}">
               <a16:creationId xmlns:a16="http://schemas.microsoft.com/office/drawing/2014/main" id="{189ADD19-8A82-86C8-8BD4-C9C84B98209F}"/>
             </a:ext>
           </a:extLst>
@@ -17269,7 +17504,7 @@
 </p:sld>
 </file>
 
-<file path=ppt/slides/slide11.xml><?xml version="1.0" encoding="utf-8"?>
+<file path=ppt/slides/slide12.xml><?xml version="1.0" encoding="utf-8"?>
 <p:sld xmlns:a="http://schemas.openxmlformats.org/drawingml/2006/main" xmlns:r="http://schemas.openxmlformats.org/officeDocument/2006/relationships" xmlns:p="http://schemas.openxmlformats.org/presentationml/2006/main">
   <p:cSld>
     <p:spTree>
@@ -17811,7 +18046,711 @@
 </p:sld>
 </file>
 
-<file path=ppt/slides/slide12.xml><?xml version="1.0" encoding="utf-8"?>
+<file path=ppt/slides/slide13.xml><?xml version="1.0" encoding="utf-8"?>
+<p:sld xmlns:a="http://schemas.openxmlformats.org/drawingml/2006/main" xmlns:r="http://schemas.openxmlformats.org/officeDocument/2006/relationships" xmlns:p="http://schemas.openxmlformats.org/presentationml/2006/main">
+  <p:cSld>
+    <p:bg>
+      <p:bgPr>
+        <a:solidFill>
+          <a:schemeClr val="tx1"/>
+        </a:solidFill>
+        <a:effectLst/>
+      </p:bgPr>
+    </p:bg>
+    <p:spTree>
+      <p:nvGrpSpPr>
+        <p:cNvPr id="1" name="">
+          <a:extLst>
+            <a:ext uri="{FF2B5EF4-FFF2-40B4-BE49-F238E27FC236}">
+              <a16:creationId xmlns:a16="http://schemas.microsoft.com/office/drawing/2014/main" id="{8C7BBE26-4BE3-FB0C-377C-41BF6F677392}"/>
+            </a:ext>
+          </a:extLst>
+        </p:cNvPr>
+        <p:cNvGrpSpPr/>
+        <p:nvPr/>
+      </p:nvGrpSpPr>
+      <p:grpSpPr>
+        <a:xfrm>
+          <a:off x="0" y="0"/>
+          <a:ext cx="0" cy="0"/>
+          <a:chOff x="0" y="0"/>
+          <a:chExt cx="0" cy="0"/>
+        </a:xfrm>
+      </p:grpSpPr>
+      <p:sp>
+        <p:nvSpPr>
+          <p:cNvPr id="2" name="テキスト ボックス 1">
+            <a:extLst>
+              <a:ext uri="{FF2B5EF4-FFF2-40B4-BE49-F238E27FC236}">
+                <a16:creationId xmlns:a16="http://schemas.microsoft.com/office/drawing/2014/main" id="{26B2A3C3-FBB2-6E14-F248-E3D78445E8A7}"/>
+              </a:ext>
+            </a:extLst>
+          </p:cNvPr>
+          <p:cNvSpPr txBox="1"/>
+          <p:nvPr/>
+        </p:nvSpPr>
+        <p:spPr>
+          <a:xfrm>
+            <a:off x="1663641" y="181957"/>
+            <a:ext cx="8864718" cy="6494085"/>
+          </a:xfrm>
+          <a:prstGeom prst="rect">
+            <a:avLst/>
+          </a:prstGeom>
+          <a:noFill/>
+        </p:spPr>
+        <p:txBody>
+          <a:bodyPr wrap="square" rtlCol="0">
+            <a:spAutoFit/>
+          </a:bodyPr>
+          <a:lstStyle/>
+          <a:p>
+            <a:r>
+              <a:rPr lang="en-US" altLang="ja-JP" sz="800">
+                <a:solidFill>
+                  <a:schemeClr val="bg1"/>
+                </a:solidFill>
+                <a:latin typeface="BIZ UDゴシック" panose="020B0400000000000000" pitchFamily="49" charset="-128"/>
+                <a:ea typeface="BIZ UDゴシック" panose="020B0400000000000000" pitchFamily="49" charset="-128"/>
+              </a:rPr>
+              <a:t>{</a:t>
+            </a:r>
+          </a:p>
+          <a:p>
+            <a:r>
+              <a:rPr lang="en-US" altLang="ja-JP" sz="800">
+                <a:solidFill>
+                  <a:schemeClr val="bg1"/>
+                </a:solidFill>
+                <a:latin typeface="BIZ UDゴシック" panose="020B0400000000000000" pitchFamily="49" charset="-128"/>
+                <a:ea typeface="BIZ UDゴシック" panose="020B0400000000000000" pitchFamily="49" charset="-128"/>
+              </a:rPr>
+              <a:t>    "model" : "us.anthropic.claude-sonnet-4-6",</a:t>
+            </a:r>
+          </a:p>
+          <a:p>
+            <a:r>
+              <a:rPr lang="en-US" altLang="ja-JP" sz="800">
+                <a:solidFill>
+                  <a:schemeClr val="bg1"/>
+                </a:solidFill>
+                <a:latin typeface="BIZ UDゴシック" panose="020B0400000000000000" pitchFamily="49" charset="-128"/>
+                <a:ea typeface="BIZ UDゴシック" panose="020B0400000000000000" pitchFamily="49" charset="-128"/>
+              </a:rPr>
+              <a:t>    "articles" : 50,</a:t>
+            </a:r>
+          </a:p>
+          <a:p>
+            <a:r>
+              <a:rPr lang="en-US" altLang="ja-JP" sz="800">
+                <a:solidFill>
+                  <a:schemeClr val="bg1"/>
+                </a:solidFill>
+                <a:latin typeface="BIZ UDゴシック" panose="020B0400000000000000" pitchFamily="49" charset="-128"/>
+                <a:ea typeface="BIZ UDゴシック" panose="020B0400000000000000" pitchFamily="49" charset="-128"/>
+              </a:rPr>
+              <a:t>    "iterations" : 3,</a:t>
+            </a:r>
+          </a:p>
+          <a:p>
+            <a:r>
+              <a:rPr lang="en-US" altLang="ja-JP" sz="800">
+                <a:solidFill>
+                  <a:schemeClr val="bg1"/>
+                </a:solidFill>
+                <a:latin typeface="BIZ UDゴシック" panose="020B0400000000000000" pitchFamily="49" charset="-128"/>
+                <a:ea typeface="BIZ UDゴシック" panose="020B0400000000000000" pitchFamily="49" charset="-128"/>
+              </a:rPr>
+              <a:t>    "note" : {</a:t>
+            </a:r>
+          </a:p>
+          <a:p>
+            <a:r>
+              <a:rPr lang="en-US" altLang="ja-JP" sz="800">
+                <a:solidFill>
+                  <a:schemeClr val="bg1"/>
+                </a:solidFill>
+                <a:latin typeface="BIZ UDゴシック" panose="020B0400000000000000" pitchFamily="49" charset="-128"/>
+                <a:ea typeface="BIZ UDゴシック" panose="020B0400000000000000" pitchFamily="49" charset="-128"/>
+              </a:rPr>
+              <a:t>        "stddevAvg" : "Average standard deviation of repeated evaluations for the same test data. Lower values indicate more consistent scoring.",</a:t>
+            </a:r>
+          </a:p>
+          <a:p>
+            <a:r>
+              <a:rPr lang="en-US" altLang="ja-JP" sz="800">
+                <a:solidFill>
+                  <a:schemeClr val="bg1"/>
+                </a:solidFill>
+                <a:latin typeface="BIZ UDゴシック" panose="020B0400000000000000" pitchFamily="49" charset="-128"/>
+                <a:ea typeface="BIZ UDゴシック" panose="020B0400000000000000" pitchFamily="49" charset="-128"/>
+              </a:rPr>
+              <a:t>        "stddevMax" : "Maximum standard deviation among all test data. Lower values indicate the worst-case evaluation inconsistency is smaller.",</a:t>
+            </a:r>
+          </a:p>
+          <a:p>
+            <a:r>
+              <a:rPr lang="en-US" altLang="ja-JP" sz="800">
+                <a:solidFill>
+                  <a:schemeClr val="bg1"/>
+                </a:solidFill>
+                <a:latin typeface="BIZ UDゴシック" panose="020B0400000000000000" pitchFamily="49" charset="-128"/>
+                <a:ea typeface="BIZ UDゴシック" panose="020B0400000000000000" pitchFamily="49" charset="-128"/>
+              </a:rPr>
+              <a:t>        "testDataInfo.stddev" : "Standard deviation of the average scores across the test data. Higher values indicate the test data covers a wider range of quality."</a:t>
+            </a:r>
+          </a:p>
+          <a:p>
+            <a:r>
+              <a:rPr lang="en-US" altLang="ja-JP" sz="800">
+                <a:solidFill>
+                  <a:schemeClr val="bg1"/>
+                </a:solidFill>
+                <a:latin typeface="BIZ UDゴシック" panose="020B0400000000000000" pitchFamily="49" charset="-128"/>
+                <a:ea typeface="BIZ UDゴシック" panose="020B0400000000000000" pitchFamily="49" charset="-128"/>
+              </a:rPr>
+              <a:t>    },</a:t>
+            </a:r>
+          </a:p>
+          <a:p>
+            <a:r>
+              <a:rPr lang="en-US" altLang="ja-JP" sz="800">
+                <a:solidFill>
+                  <a:schemeClr val="bg1"/>
+                </a:solidFill>
+                <a:latin typeface="BIZ UDゴシック" panose="020B0400000000000000" pitchFamily="49" charset="-128"/>
+                <a:ea typeface="BIZ UDゴシック" panose="020B0400000000000000" pitchFamily="49" charset="-128"/>
+              </a:rPr>
+              <a:t>    "rubrics" : {</a:t>
+            </a:r>
+          </a:p>
+          <a:p>
+            <a:r>
+              <a:rPr lang="en-US" altLang="ja-JP" sz="800">
+                <a:solidFill>
+                  <a:schemeClr val="bg1"/>
+                </a:solidFill>
+                <a:latin typeface="BIZ UDゴシック" panose="020B0400000000000000" pitchFamily="49" charset="-128"/>
+                <a:ea typeface="BIZ UDゴシック" panose="020B0400000000000000" pitchFamily="49" charset="-128"/>
+              </a:rPr>
+              <a:t>        "engagement" : {</a:t>
+            </a:r>
+          </a:p>
+          <a:p>
+            <a:r>
+              <a:rPr lang="en-US" altLang="ja-JP" sz="800">
+                <a:solidFill>
+                  <a:schemeClr val="bg1"/>
+                </a:solidFill>
+                <a:latin typeface="BIZ UDゴシック" panose="020B0400000000000000" pitchFamily="49" charset="-128"/>
+                <a:ea typeface="BIZ UDゴシック" panose="020B0400000000000000" pitchFamily="49" charset="-128"/>
+              </a:rPr>
+              <a:t>            "stddevAvg" : 0.13867277437171838,</a:t>
+            </a:r>
+          </a:p>
+          <a:p>
+            <a:r>
+              <a:rPr lang="en-US" altLang="ja-JP" sz="800">
+                <a:solidFill>
+                  <a:schemeClr val="bg1"/>
+                </a:solidFill>
+                <a:latin typeface="BIZ UDゴシック" panose="020B0400000000000000" pitchFamily="49" charset="-128"/>
+                <a:ea typeface="BIZ UDゴシック" panose="020B0400000000000000" pitchFamily="49" charset="-128"/>
+              </a:rPr>
+              <a:t>            "stddevMax" : 0.30912061651652345,</a:t>
+            </a:r>
+          </a:p>
+          <a:p>
+            <a:r>
+              <a:rPr lang="en-US" altLang="ja-JP" sz="800">
+                <a:solidFill>
+                  <a:schemeClr val="bg1"/>
+                </a:solidFill>
+                <a:latin typeface="BIZ UDゴシック" panose="020B0400000000000000" pitchFamily="49" charset="-128"/>
+                <a:ea typeface="BIZ UDゴシック" panose="020B0400000000000000" pitchFamily="49" charset="-128"/>
+              </a:rPr>
+              <a:t>            "testDataInfo" : {</a:t>
+            </a:r>
+          </a:p>
+          <a:p>
+            <a:r>
+              <a:rPr lang="en-US" altLang="ja-JP" sz="800">
+                <a:solidFill>
+                  <a:schemeClr val="bg1"/>
+                </a:solidFill>
+                <a:latin typeface="BIZ UDゴシック" panose="020B0400000000000000" pitchFamily="49" charset="-128"/>
+                <a:ea typeface="BIZ UDゴシック" panose="020B0400000000000000" pitchFamily="49" charset="-128"/>
+              </a:rPr>
+              <a:t>                "max" : 0.8666666666666667,</a:t>
+            </a:r>
+          </a:p>
+          <a:p>
+            <a:r>
+              <a:rPr lang="en-US" altLang="ja-JP" sz="800">
+                <a:solidFill>
+                  <a:schemeClr val="bg1"/>
+                </a:solidFill>
+                <a:latin typeface="BIZ UDゴシック" panose="020B0400000000000000" pitchFamily="49" charset="-128"/>
+                <a:ea typeface="BIZ UDゴシック" panose="020B0400000000000000" pitchFamily="49" charset="-128"/>
+              </a:rPr>
+              <a:t>                "min" : 0.4666666666666667,</a:t>
+            </a:r>
+          </a:p>
+          <a:p>
+            <a:r>
+              <a:rPr lang="en-US" altLang="ja-JP" sz="800">
+                <a:solidFill>
+                  <a:schemeClr val="bg1"/>
+                </a:solidFill>
+                <a:latin typeface="BIZ UDゴシック" panose="020B0400000000000000" pitchFamily="49" charset="-128"/>
+                <a:ea typeface="BIZ UDゴシック" panose="020B0400000000000000" pitchFamily="49" charset="-128"/>
+              </a:rPr>
+              <a:t>                "avg" : 0.6773333333333333,</a:t>
+            </a:r>
+          </a:p>
+          <a:p>
+            <a:r>
+              <a:rPr lang="en-US" altLang="ja-JP" sz="800">
+                <a:solidFill>
+                  <a:schemeClr val="bg1"/>
+                </a:solidFill>
+                <a:latin typeface="BIZ UDゴシック" panose="020B0400000000000000" pitchFamily="49" charset="-128"/>
+                <a:ea typeface="BIZ UDゴシック" panose="020B0400000000000000" pitchFamily="49" charset="-128"/>
+              </a:rPr>
+              <a:t>                "stddev" : 0.09875671566475311</a:t>
+            </a:r>
+          </a:p>
+          <a:p>
+            <a:r>
+              <a:rPr lang="en-US" altLang="ja-JP" sz="800">
+                <a:solidFill>
+                  <a:schemeClr val="bg1"/>
+                </a:solidFill>
+                <a:latin typeface="BIZ UDゴシック" panose="020B0400000000000000" pitchFamily="49" charset="-128"/>
+                <a:ea typeface="BIZ UDゴシック" panose="020B0400000000000000" pitchFamily="49" charset="-128"/>
+              </a:rPr>
+              <a:t>            }</a:t>
+            </a:r>
+          </a:p>
+          <a:p>
+            <a:r>
+              <a:rPr lang="en-US" altLang="ja-JP" sz="800">
+                <a:solidFill>
+                  <a:schemeClr val="bg1"/>
+                </a:solidFill>
+                <a:latin typeface="BIZ UDゴシック" panose="020B0400000000000000" pitchFamily="49" charset="-128"/>
+                <a:ea typeface="BIZ UDゴシック" panose="020B0400000000000000" pitchFamily="49" charset="-128"/>
+              </a:rPr>
+              <a:t>        },</a:t>
+            </a:r>
+          </a:p>
+          <a:p>
+            <a:r>
+              <a:rPr lang="en-US" altLang="ja-JP" sz="800">
+                <a:solidFill>
+                  <a:schemeClr val="bg1"/>
+                </a:solidFill>
+                <a:latin typeface="BIZ UDゴシック" panose="020B0400000000000000" pitchFamily="49" charset="-128"/>
+                <a:ea typeface="BIZ UDゴシック" panose="020B0400000000000000" pitchFamily="49" charset="-128"/>
+              </a:rPr>
+              <a:t>        "accuracy" : {</a:t>
+            </a:r>
+          </a:p>
+          <a:p>
+            <a:r>
+              <a:rPr lang="en-US" altLang="ja-JP" sz="800">
+                <a:solidFill>
+                  <a:schemeClr val="bg1"/>
+                </a:solidFill>
+                <a:latin typeface="BIZ UDゴシック" panose="020B0400000000000000" pitchFamily="49" charset="-128"/>
+                <a:ea typeface="BIZ UDゴシック" panose="020B0400000000000000" pitchFamily="49" charset="-128"/>
+              </a:rPr>
+              <a:t>            "stddevAvg" : 0.15468800946668051,</a:t>
+            </a:r>
+          </a:p>
+          <a:p>
+            <a:r>
+              <a:rPr lang="en-US" altLang="ja-JP" sz="800">
+                <a:solidFill>
+                  <a:schemeClr val="bg1"/>
+                </a:solidFill>
+                <a:latin typeface="BIZ UDゴシック" panose="020B0400000000000000" pitchFamily="49" charset="-128"/>
+                <a:ea typeface="BIZ UDゴシック" panose="020B0400000000000000" pitchFamily="49" charset="-128"/>
+              </a:rPr>
+              <a:t>            "stddevMax" : 0.3559026084010437,</a:t>
+            </a:r>
+          </a:p>
+          <a:p>
+            <a:r>
+              <a:rPr lang="en-US" altLang="ja-JP" sz="800">
+                <a:solidFill>
+                  <a:schemeClr val="bg1"/>
+                </a:solidFill>
+                <a:latin typeface="BIZ UDゴシック" panose="020B0400000000000000" pitchFamily="49" charset="-128"/>
+                <a:ea typeface="BIZ UDゴシック" panose="020B0400000000000000" pitchFamily="49" charset="-128"/>
+              </a:rPr>
+              <a:t>            "testDataInfo" : {</a:t>
+            </a:r>
+          </a:p>
+          <a:p>
+            <a:r>
+              <a:rPr lang="en-US" altLang="ja-JP" sz="800">
+                <a:solidFill>
+                  <a:schemeClr val="bg1"/>
+                </a:solidFill>
+                <a:latin typeface="BIZ UDゴシック" panose="020B0400000000000000" pitchFamily="49" charset="-128"/>
+                <a:ea typeface="BIZ UDゴシック" panose="020B0400000000000000" pitchFamily="49" charset="-128"/>
+              </a:rPr>
+              <a:t>                "max" : 0.9333333333333333,</a:t>
+            </a:r>
+          </a:p>
+          <a:p>
+            <a:r>
+              <a:rPr lang="en-US" altLang="ja-JP" sz="800">
+                <a:solidFill>
+                  <a:schemeClr val="bg1"/>
+                </a:solidFill>
+                <a:latin typeface="BIZ UDゴシック" panose="020B0400000000000000" pitchFamily="49" charset="-128"/>
+                <a:ea typeface="BIZ UDゴシック" panose="020B0400000000000000" pitchFamily="49" charset="-128"/>
+              </a:rPr>
+              <a:t>                "min" : 0.4666666666666667,</a:t>
+            </a:r>
+          </a:p>
+          <a:p>
+            <a:r>
+              <a:rPr lang="en-US" altLang="ja-JP" sz="800">
+                <a:solidFill>
+                  <a:schemeClr val="bg1"/>
+                </a:solidFill>
+                <a:latin typeface="BIZ UDゴシック" panose="020B0400000000000000" pitchFamily="49" charset="-128"/>
+                <a:ea typeface="BIZ UDゴシック" panose="020B0400000000000000" pitchFamily="49" charset="-128"/>
+              </a:rPr>
+              <a:t>                "avg" : 0.724,</a:t>
+            </a:r>
+          </a:p>
+          <a:p>
+            <a:r>
+              <a:rPr lang="en-US" altLang="ja-JP" sz="800">
+                <a:solidFill>
+                  <a:schemeClr val="bg1"/>
+                </a:solidFill>
+                <a:latin typeface="BIZ UDゴシック" panose="020B0400000000000000" pitchFamily="49" charset="-128"/>
+                <a:ea typeface="BIZ UDゴシック" panose="020B0400000000000000" pitchFamily="49" charset="-128"/>
+              </a:rPr>
+              <a:t>                "stddev" : 0.10198910617207008</a:t>
+            </a:r>
+          </a:p>
+          <a:p>
+            <a:r>
+              <a:rPr lang="en-US" altLang="ja-JP" sz="800">
+                <a:solidFill>
+                  <a:schemeClr val="bg1"/>
+                </a:solidFill>
+                <a:latin typeface="BIZ UDゴシック" panose="020B0400000000000000" pitchFamily="49" charset="-128"/>
+                <a:ea typeface="BIZ UDゴシック" panose="020B0400000000000000" pitchFamily="49" charset="-128"/>
+              </a:rPr>
+              <a:t>            }</a:t>
+            </a:r>
+          </a:p>
+          <a:p>
+            <a:r>
+              <a:rPr lang="en-US" altLang="ja-JP" sz="800">
+                <a:solidFill>
+                  <a:schemeClr val="bg1"/>
+                </a:solidFill>
+                <a:latin typeface="BIZ UDゴシック" panose="020B0400000000000000" pitchFamily="49" charset="-128"/>
+                <a:ea typeface="BIZ UDゴシック" panose="020B0400000000000000" pitchFamily="49" charset="-128"/>
+              </a:rPr>
+              <a:t>        },</a:t>
+            </a:r>
+          </a:p>
+          <a:p>
+            <a:r>
+              <a:rPr lang="en-US" altLang="ja-JP" sz="800">
+                <a:solidFill>
+                  <a:schemeClr val="bg1"/>
+                </a:solidFill>
+                <a:latin typeface="BIZ UDゴシック" panose="020B0400000000000000" pitchFamily="49" charset="-128"/>
+                <a:ea typeface="BIZ UDゴシック" panose="020B0400000000000000" pitchFamily="49" charset="-128"/>
+              </a:rPr>
+              <a:t>        "constraints" : {</a:t>
+            </a:r>
+          </a:p>
+          <a:p>
+            <a:r>
+              <a:rPr lang="en-US" altLang="ja-JP" sz="800">
+                <a:solidFill>
+                  <a:schemeClr val="bg1"/>
+                </a:solidFill>
+                <a:latin typeface="BIZ UDゴシック" panose="020B0400000000000000" pitchFamily="49" charset="-128"/>
+                <a:ea typeface="BIZ UDゴシック" panose="020B0400000000000000" pitchFamily="49" charset="-128"/>
+              </a:rPr>
+              <a:t>            "stddevAvg" : 0.04714045207910317,</a:t>
+            </a:r>
+          </a:p>
+          <a:p>
+            <a:r>
+              <a:rPr lang="en-US" altLang="ja-JP" sz="800">
+                <a:solidFill>
+                  <a:schemeClr val="bg1"/>
+                </a:solidFill>
+                <a:latin typeface="BIZ UDゴシック" panose="020B0400000000000000" pitchFamily="49" charset="-128"/>
+                <a:ea typeface="BIZ UDゴシック" panose="020B0400000000000000" pitchFamily="49" charset="-128"/>
+              </a:rPr>
+              <a:t>            "stddevMax" : 0.4714045207910317,</a:t>
+            </a:r>
+          </a:p>
+          <a:p>
+            <a:r>
+              <a:rPr lang="en-US" altLang="ja-JP" sz="800">
+                <a:solidFill>
+                  <a:schemeClr val="bg1"/>
+                </a:solidFill>
+                <a:latin typeface="BIZ UDゴシック" panose="020B0400000000000000" pitchFamily="49" charset="-128"/>
+                <a:ea typeface="BIZ UDゴシック" panose="020B0400000000000000" pitchFamily="49" charset="-128"/>
+              </a:rPr>
+              <a:t>            "testDataInfo" : {</a:t>
+            </a:r>
+          </a:p>
+          <a:p>
+            <a:r>
+              <a:rPr lang="en-US" altLang="ja-JP" sz="800">
+                <a:solidFill>
+                  <a:schemeClr val="bg1"/>
+                </a:solidFill>
+                <a:latin typeface="BIZ UDゴシック" panose="020B0400000000000000" pitchFamily="49" charset="-128"/>
+                <a:ea typeface="BIZ UDゴシック" panose="020B0400000000000000" pitchFamily="49" charset="-128"/>
+              </a:rPr>
+              <a:t>                "max" : 1.0,</a:t>
+            </a:r>
+          </a:p>
+          <a:p>
+            <a:r>
+              <a:rPr lang="en-US" altLang="ja-JP" sz="800">
+                <a:solidFill>
+                  <a:schemeClr val="bg1"/>
+                </a:solidFill>
+                <a:latin typeface="BIZ UDゴシック" panose="020B0400000000000000" pitchFamily="49" charset="-128"/>
+                <a:ea typeface="BIZ UDゴシック" panose="020B0400000000000000" pitchFamily="49" charset="-128"/>
+              </a:rPr>
+              <a:t>                "min" : 0.6666666666666666,</a:t>
+            </a:r>
+          </a:p>
+          <a:p>
+            <a:r>
+              <a:rPr lang="en-US" altLang="ja-JP" sz="800">
+                <a:solidFill>
+                  <a:schemeClr val="bg1"/>
+                </a:solidFill>
+                <a:latin typeface="BIZ UDゴシック" panose="020B0400000000000000" pitchFamily="49" charset="-128"/>
+                <a:ea typeface="BIZ UDゴシック" panose="020B0400000000000000" pitchFamily="49" charset="-128"/>
+              </a:rPr>
+              <a:t>                "avg" : 0.9666666666666667,</a:t>
+            </a:r>
+          </a:p>
+          <a:p>
+            <a:r>
+              <a:rPr lang="en-US" altLang="ja-JP" sz="800">
+                <a:solidFill>
+                  <a:schemeClr val="bg1"/>
+                </a:solidFill>
+                <a:latin typeface="BIZ UDゴシック" panose="020B0400000000000000" pitchFamily="49" charset="-128"/>
+                <a:ea typeface="BIZ UDゴシック" panose="020B0400000000000000" pitchFamily="49" charset="-128"/>
+              </a:rPr>
+              <a:t>                "stddev" : 0.1</a:t>
+            </a:r>
+          </a:p>
+          <a:p>
+            <a:r>
+              <a:rPr lang="en-US" altLang="ja-JP" sz="800">
+                <a:solidFill>
+                  <a:schemeClr val="bg1"/>
+                </a:solidFill>
+                <a:latin typeface="BIZ UDゴシック" panose="020B0400000000000000" pitchFamily="49" charset="-128"/>
+                <a:ea typeface="BIZ UDゴシック" panose="020B0400000000000000" pitchFamily="49" charset="-128"/>
+              </a:rPr>
+              <a:t>            }</a:t>
+            </a:r>
+          </a:p>
+          <a:p>
+            <a:r>
+              <a:rPr lang="en-US" altLang="ja-JP" sz="800">
+                <a:solidFill>
+                  <a:schemeClr val="bg1"/>
+                </a:solidFill>
+                <a:latin typeface="BIZ UDゴシック" panose="020B0400000000000000" pitchFamily="49" charset="-128"/>
+                <a:ea typeface="BIZ UDゴシック" panose="020B0400000000000000" pitchFamily="49" charset="-128"/>
+              </a:rPr>
+              <a:t>        },</a:t>
+            </a:r>
+          </a:p>
+          <a:p>
+            <a:r>
+              <a:rPr lang="en-US" altLang="ja-JP" sz="800">
+                <a:solidFill>
+                  <a:schemeClr val="bg1"/>
+                </a:solidFill>
+                <a:latin typeface="BIZ UDゴシック" panose="020B0400000000000000" pitchFamily="49" charset="-128"/>
+                <a:ea typeface="BIZ UDゴシック" panose="020B0400000000000000" pitchFamily="49" charset="-128"/>
+              </a:rPr>
+              <a:t>        "sensitivity" : {</a:t>
+            </a:r>
+          </a:p>
+          <a:p>
+            <a:r>
+              <a:rPr lang="en-US" altLang="ja-JP" sz="800">
+                <a:solidFill>
+                  <a:schemeClr val="bg1"/>
+                </a:solidFill>
+                <a:latin typeface="BIZ UDゴシック" panose="020B0400000000000000" pitchFamily="49" charset="-128"/>
+                <a:ea typeface="BIZ UDゴシック" panose="020B0400000000000000" pitchFamily="49" charset="-128"/>
+              </a:rPr>
+              <a:t>            "stddevAvg" : 0.14290687637235944,</a:t>
+            </a:r>
+          </a:p>
+          <a:p>
+            <a:r>
+              <a:rPr lang="en-US" altLang="ja-JP" sz="800">
+                <a:solidFill>
+                  <a:schemeClr val="bg1"/>
+                </a:solidFill>
+                <a:latin typeface="BIZ UDゴシック" panose="020B0400000000000000" pitchFamily="49" charset="-128"/>
+                <a:ea typeface="BIZ UDゴシック" panose="020B0400000000000000" pitchFamily="49" charset="-128"/>
+              </a:rPr>
+              <a:t>            "stddevMax" : 0.2943920288775949,</a:t>
+            </a:r>
+          </a:p>
+          <a:p>
+            <a:r>
+              <a:rPr lang="en-US" altLang="ja-JP" sz="800">
+                <a:solidFill>
+                  <a:schemeClr val="bg1"/>
+                </a:solidFill>
+                <a:latin typeface="BIZ UDゴシック" panose="020B0400000000000000" pitchFamily="49" charset="-128"/>
+                <a:ea typeface="BIZ UDゴシック" panose="020B0400000000000000" pitchFamily="49" charset="-128"/>
+              </a:rPr>
+              <a:t>            "testDataInfo" : {</a:t>
+            </a:r>
+          </a:p>
+          <a:p>
+            <a:r>
+              <a:rPr lang="en-US" altLang="ja-JP" sz="800">
+                <a:solidFill>
+                  <a:schemeClr val="bg1"/>
+                </a:solidFill>
+                <a:latin typeface="BIZ UDゴシック" panose="020B0400000000000000" pitchFamily="49" charset="-128"/>
+                <a:ea typeface="BIZ UDゴシック" panose="020B0400000000000000" pitchFamily="49" charset="-128"/>
+              </a:rPr>
+              <a:t>                "max" : 0.9666666666666667,</a:t>
+            </a:r>
+          </a:p>
+          <a:p>
+            <a:r>
+              <a:rPr lang="en-US" altLang="ja-JP" sz="800">
+                <a:solidFill>
+                  <a:schemeClr val="bg1"/>
+                </a:solidFill>
+                <a:latin typeface="BIZ UDゴシック" panose="020B0400000000000000" pitchFamily="49" charset="-128"/>
+                <a:ea typeface="BIZ UDゴシック" panose="020B0400000000000000" pitchFamily="49" charset="-128"/>
+              </a:rPr>
+              <a:t>                "min" : 0.5333333333333333,</a:t>
+            </a:r>
+          </a:p>
+          <a:p>
+            <a:r>
+              <a:rPr lang="en-US" altLang="ja-JP" sz="800">
+                <a:solidFill>
+                  <a:schemeClr val="bg1"/>
+                </a:solidFill>
+                <a:latin typeface="BIZ UDゴシック" panose="020B0400000000000000" pitchFamily="49" charset="-128"/>
+                <a:ea typeface="BIZ UDゴシック" panose="020B0400000000000000" pitchFamily="49" charset="-128"/>
+              </a:rPr>
+              <a:t>                "avg" : 0.7366666666666667,</a:t>
+            </a:r>
+          </a:p>
+          <a:p>
+            <a:r>
+              <a:rPr lang="en-US" altLang="ja-JP" sz="800">
+                <a:solidFill>
+                  <a:schemeClr val="bg1"/>
+                </a:solidFill>
+                <a:latin typeface="BIZ UDゴシック" panose="020B0400000000000000" pitchFamily="49" charset="-128"/>
+                <a:ea typeface="BIZ UDゴシック" panose="020B0400000000000000" pitchFamily="49" charset="-128"/>
+              </a:rPr>
+              <a:t>                "stddev" : 0.10268614533832911</a:t>
+            </a:r>
+          </a:p>
+          <a:p>
+            <a:r>
+              <a:rPr lang="en-US" altLang="ja-JP" sz="800">
+                <a:solidFill>
+                  <a:schemeClr val="bg1"/>
+                </a:solidFill>
+                <a:latin typeface="BIZ UDゴシック" panose="020B0400000000000000" pitchFamily="49" charset="-128"/>
+                <a:ea typeface="BIZ UDゴシック" panose="020B0400000000000000" pitchFamily="49" charset="-128"/>
+              </a:rPr>
+              <a:t>            }</a:t>
+            </a:r>
+          </a:p>
+          <a:p>
+            <a:r>
+              <a:rPr lang="en-US" altLang="ja-JP" sz="800">
+                <a:solidFill>
+                  <a:schemeClr val="bg1"/>
+                </a:solidFill>
+                <a:latin typeface="BIZ UDゴシック" panose="020B0400000000000000" pitchFamily="49" charset="-128"/>
+                <a:ea typeface="BIZ UDゴシック" panose="020B0400000000000000" pitchFamily="49" charset="-128"/>
+              </a:rPr>
+              <a:t>        }</a:t>
+            </a:r>
+          </a:p>
+          <a:p>
+            <a:r>
+              <a:rPr lang="en-US" altLang="ja-JP" sz="800">
+                <a:solidFill>
+                  <a:schemeClr val="bg1"/>
+                </a:solidFill>
+                <a:latin typeface="BIZ UDゴシック" panose="020B0400000000000000" pitchFamily="49" charset="-128"/>
+                <a:ea typeface="BIZ UDゴシック" panose="020B0400000000000000" pitchFamily="49" charset="-128"/>
+              </a:rPr>
+              <a:t>    }</a:t>
+            </a:r>
+          </a:p>
+          <a:p>
+            <a:r>
+              <a:rPr lang="en-US" altLang="ja-JP" sz="800">
+                <a:solidFill>
+                  <a:schemeClr val="bg1"/>
+                </a:solidFill>
+                <a:latin typeface="BIZ UDゴシック" panose="020B0400000000000000" pitchFamily="49" charset="-128"/>
+                <a:ea typeface="BIZ UDゴシック" panose="020B0400000000000000" pitchFamily="49" charset="-128"/>
+              </a:rPr>
+              <a:t>}</a:t>
+            </a:r>
+            <a:endParaRPr kumimoji="1" lang="ja-JP" altLang="en-US" sz="800">
+              <a:solidFill>
+                <a:schemeClr val="bg1"/>
+              </a:solidFill>
+              <a:latin typeface="BIZ UDゴシック" panose="020B0400000000000000" pitchFamily="49" charset="-128"/>
+              <a:ea typeface="BIZ UDゴシック" panose="020B0400000000000000" pitchFamily="49" charset="-128"/>
+            </a:endParaRPr>
+          </a:p>
+        </p:txBody>
+      </p:sp>
+    </p:spTree>
+    <p:extLst>
+      <p:ext uri="{BB962C8B-B14F-4D97-AF65-F5344CB8AC3E}">
+        <p14:creationId xmlns:p14="http://schemas.microsoft.com/office/powerpoint/2010/main" val="1224954253"/>
+      </p:ext>
+    </p:extLst>
+  </p:cSld>
+  <p:clrMapOvr>
+    <a:masterClrMapping/>
+  </p:clrMapOvr>
+</p:sld>
+</file>
+
+<file path=ppt/slides/slide14.xml><?xml version="1.0" encoding="utf-8"?>
 <p:sld xmlns:a="http://schemas.openxmlformats.org/drawingml/2006/main" xmlns:r="http://schemas.openxmlformats.org/officeDocument/2006/relationships" xmlns:p="http://schemas.openxmlformats.org/presentationml/2006/main">
   <p:cSld>
     <p:spTree>
@@ -17847,7 +18786,7 @@
 </p:sld>
 </file>
 
-<file path=ppt/slides/slide13.xml><?xml version="1.0" encoding="utf-8"?>
+<file path=ppt/slides/slide15.xml><?xml version="1.0" encoding="utf-8"?>
 <p:sld xmlns:a="http://schemas.openxmlformats.org/drawingml/2006/main" xmlns:r="http://schemas.openxmlformats.org/officeDocument/2006/relationships" xmlns:p="http://schemas.openxmlformats.org/presentationml/2006/main">
   <p:cSld>
     <p:spTree>
@@ -18025,7 +18964,7 @@
 </p:sld>
 </file>
 
-<file path=ppt/slides/slide14.xml><?xml version="1.0" encoding="utf-8"?>
+<file path=ppt/slides/slide16.xml><?xml version="1.0" encoding="utf-8"?>
 <p:sld xmlns:a="http://schemas.openxmlformats.org/drawingml/2006/main" xmlns:r="http://schemas.openxmlformats.org/officeDocument/2006/relationships" xmlns:p="http://schemas.openxmlformats.org/presentationml/2006/main">
   <p:cSld>
     <p:spTree>
@@ -18193,7 +19132,7 @@
 </p:sld>
 </file>
 
-<file path=ppt/slides/slide15.xml><?xml version="1.0" encoding="utf-8"?>
+<file path=ppt/slides/slide17.xml><?xml version="1.0" encoding="utf-8"?>
 <p:sld xmlns:a="http://schemas.openxmlformats.org/drawingml/2006/main" xmlns:r="http://schemas.openxmlformats.org/officeDocument/2006/relationships" xmlns:p="http://schemas.openxmlformats.org/presentationml/2006/main">
   <p:cSld>
     <p:spTree>
@@ -18377,7 +19316,7 @@
 </p:sld>
 </file>
 
-<file path=ppt/slides/slide16.xml><?xml version="1.0" encoding="utf-8"?>
+<file path=ppt/slides/slide18.xml><?xml version="1.0" encoding="utf-8"?>
 <p:sld xmlns:a="http://schemas.openxmlformats.org/drawingml/2006/main" xmlns:r="http://schemas.openxmlformats.org/officeDocument/2006/relationships" xmlns:p="http://schemas.openxmlformats.org/presentationml/2006/main">
   <p:cSld>
     <p:spTree>
@@ -18561,7 +19500,7 @@
 </p:sld>
 </file>
 
-<file path=ppt/slides/slide17.xml><?xml version="1.0" encoding="utf-8"?>
+<file path=ppt/slides/slide19.xml><?xml version="1.0" encoding="utf-8"?>
 <p:sld xmlns:a="http://schemas.openxmlformats.org/drawingml/2006/main" xmlns:r="http://schemas.openxmlformats.org/officeDocument/2006/relationships" xmlns:p="http://schemas.openxmlformats.org/presentationml/2006/main">
   <p:cSld>
     <p:spTree>
@@ -18729,7 +19668,37 @@
 </p:sld>
 </file>
 
-<file path=ppt/slides/slide18.xml><?xml version="1.0" encoding="utf-8"?>
+<file path=ppt/slides/slide2.xml><?xml version="1.0" encoding="utf-8"?>
+<p:sld xmlns:a="http://schemas.openxmlformats.org/drawingml/2006/main" xmlns:r="http://schemas.openxmlformats.org/officeDocument/2006/relationships" xmlns:p="http://schemas.openxmlformats.org/presentationml/2006/main">
+  <p:cSld>
+    <p:spTree>
+      <p:nvGrpSpPr>
+        <p:cNvPr id="1" name=""/>
+        <p:cNvGrpSpPr/>
+        <p:nvPr/>
+      </p:nvGrpSpPr>
+      <p:grpSpPr>
+        <a:xfrm>
+          <a:off x="0" y="0"/>
+          <a:ext cx="0" cy="0"/>
+          <a:chOff x="0" y="0"/>
+          <a:chExt cx="0" cy="0"/>
+        </a:xfrm>
+      </p:grpSpPr>
+    </p:spTree>
+    <p:extLst>
+      <p:ext uri="{BB962C8B-B14F-4D97-AF65-F5344CB8AC3E}">
+        <p14:creationId xmlns:p14="http://schemas.microsoft.com/office/powerpoint/2010/main" val="773515612"/>
+      </p:ext>
+    </p:extLst>
+  </p:cSld>
+  <p:clrMapOvr>
+    <a:masterClrMapping/>
+  </p:clrMapOvr>
+</p:sld>
+</file>
+
+<file path=ppt/slides/slide20.xml><?xml version="1.0" encoding="utf-8"?>
 <p:sld xmlns:a="http://schemas.openxmlformats.org/drawingml/2006/main" xmlns:r="http://schemas.openxmlformats.org/officeDocument/2006/relationships" xmlns:p="http://schemas.openxmlformats.org/presentationml/2006/main">
   <p:cSld>
     <p:spTree>
@@ -18798,36 +19767,6 @@
     <p:extLst>
       <p:ext uri="{BB962C8B-B14F-4D97-AF65-F5344CB8AC3E}">
         <p14:creationId xmlns:p14="http://schemas.microsoft.com/office/powerpoint/2010/main" val="3793198946"/>
-      </p:ext>
-    </p:extLst>
-  </p:cSld>
-  <p:clrMapOvr>
-    <a:masterClrMapping/>
-  </p:clrMapOvr>
-</p:sld>
-</file>
-
-<file path=ppt/slides/slide2.xml><?xml version="1.0" encoding="utf-8"?>
-<p:sld xmlns:a="http://schemas.openxmlformats.org/drawingml/2006/main" xmlns:r="http://schemas.openxmlformats.org/officeDocument/2006/relationships" xmlns:p="http://schemas.openxmlformats.org/presentationml/2006/main">
-  <p:cSld>
-    <p:spTree>
-      <p:nvGrpSpPr>
-        <p:cNvPr id="1" name=""/>
-        <p:cNvGrpSpPr/>
-        <p:nvPr/>
-      </p:nvGrpSpPr>
-      <p:grpSpPr>
-        <a:xfrm>
-          <a:off x="0" y="0"/>
-          <a:ext cx="0" cy="0"/>
-          <a:chOff x="0" y="0"/>
-          <a:chExt cx="0" cy="0"/>
-        </a:xfrm>
-      </p:grpSpPr>
-    </p:spTree>
-    <p:extLst>
-      <p:ext uri="{BB962C8B-B14F-4D97-AF65-F5344CB8AC3E}">
-        <p14:creationId xmlns:p14="http://schemas.microsoft.com/office/powerpoint/2010/main" val="773515612"/>
       </p:ext>
     </p:extLst>
   </p:cSld>
@@ -19222,6 +20161,559 @@
 <file path=ppt/slides/slide6.xml><?xml version="1.0" encoding="utf-8"?>
 <p:sld xmlns:a="http://schemas.openxmlformats.org/drawingml/2006/main" xmlns:r="http://schemas.openxmlformats.org/officeDocument/2006/relationships" xmlns:p="http://schemas.openxmlformats.org/presentationml/2006/main">
   <p:cSld>
+    <p:bg>
+      <p:bgPr>
+        <a:solidFill>
+          <a:schemeClr val="tx1"/>
+        </a:solidFill>
+        <a:effectLst/>
+      </p:bgPr>
+    </p:bg>
+    <p:spTree>
+      <p:nvGrpSpPr>
+        <p:cNvPr id="1" name=""/>
+        <p:cNvGrpSpPr/>
+        <p:nvPr/>
+      </p:nvGrpSpPr>
+      <p:grpSpPr>
+        <a:xfrm>
+          <a:off x="0" y="0"/>
+          <a:ext cx="0" cy="0"/>
+          <a:chOff x="0" y="0"/>
+          <a:chExt cx="0" cy="0"/>
+        </a:xfrm>
+      </p:grpSpPr>
+      <p:sp>
+        <p:nvSpPr>
+          <p:cNvPr id="2" name="テキスト ボックス 1">
+            <a:extLst>
+              <a:ext uri="{FF2B5EF4-FFF2-40B4-BE49-F238E27FC236}">
+                <a16:creationId xmlns:a16="http://schemas.microsoft.com/office/drawing/2014/main" id="{3902510D-6A1C-C57D-8887-693EE7C98DBE}"/>
+              </a:ext>
+            </a:extLst>
+          </p:cNvPr>
+          <p:cNvSpPr txBox="1"/>
+          <p:nvPr/>
+        </p:nvSpPr>
+        <p:spPr>
+          <a:xfrm>
+            <a:off x="1800801" y="1659285"/>
+            <a:ext cx="8590398" cy="3539430"/>
+          </a:xfrm>
+          <a:prstGeom prst="rect">
+            <a:avLst/>
+          </a:prstGeom>
+          <a:noFill/>
+        </p:spPr>
+        <p:txBody>
+          <a:bodyPr wrap="square" rtlCol="0">
+            <a:spAutoFit/>
+          </a:bodyPr>
+          <a:lstStyle/>
+          <a:p>
+            <a:r>
+              <a:rPr lang="en-US" altLang="ja-JP" sz="800">
+                <a:solidFill>
+                  <a:schemeClr val="bg1"/>
+                </a:solidFill>
+                <a:latin typeface="BIZ UDゴシック" panose="020B0400000000000000" pitchFamily="49" charset="-128"/>
+                <a:ea typeface="BIZ UDゴシック" panose="020B0400000000000000" pitchFamily="49" charset="-128"/>
+              </a:rPr>
+              <a:t>{</a:t>
+            </a:r>
+          </a:p>
+          <a:p>
+            <a:r>
+              <a:rPr lang="en-US" altLang="ja-JP" sz="800">
+                <a:solidFill>
+                  <a:schemeClr val="bg1"/>
+                </a:solidFill>
+                <a:latin typeface="BIZ UDゴシック" panose="020B0400000000000000" pitchFamily="49" charset="-128"/>
+                <a:ea typeface="BIZ UDゴシック" panose="020B0400000000000000" pitchFamily="49" charset="-128"/>
+              </a:rPr>
+              <a:t>  </a:t>
+            </a:r>
+            <a:r>
+              <a:rPr lang="ja-JP" altLang="en-US" sz="800">
+                <a:solidFill>
+                  <a:schemeClr val="bg1"/>
+                </a:solidFill>
+                <a:latin typeface="BIZ UDゴシック" panose="020B0400000000000000" pitchFamily="49" charset="-128"/>
+                <a:ea typeface="BIZ UDゴシック" panose="020B0400000000000000" pitchFamily="49" charset="-128"/>
+              </a:rPr>
+              <a:t>  </a:t>
+            </a:r>
+            <a:r>
+              <a:rPr lang="en-US" altLang="ja-JP" sz="800">
+                <a:solidFill>
+                  <a:schemeClr val="bg1"/>
+                </a:solidFill>
+                <a:latin typeface="BIZ UDゴシック" panose="020B0400000000000000" pitchFamily="49" charset="-128"/>
+                <a:ea typeface="BIZ UDゴシック" panose="020B0400000000000000" pitchFamily="49" charset="-128"/>
+              </a:rPr>
+              <a:t>"name"</a:t>
+            </a:r>
+            <a:r>
+              <a:rPr lang="ja-JP" altLang="en-US" sz="800">
+                <a:solidFill>
+                  <a:schemeClr val="bg1"/>
+                </a:solidFill>
+                <a:latin typeface="BIZ UDゴシック" panose="020B0400000000000000" pitchFamily="49" charset="-128"/>
+                <a:ea typeface="BIZ UDゴシック" panose="020B0400000000000000" pitchFamily="49" charset="-128"/>
+              </a:rPr>
+              <a:t> </a:t>
+            </a:r>
+            <a:r>
+              <a:rPr lang="en-US" altLang="ja-JP" sz="800">
+                <a:solidFill>
+                  <a:schemeClr val="bg1"/>
+                </a:solidFill>
+                <a:latin typeface="BIZ UDゴシック" panose="020B0400000000000000" pitchFamily="49" charset="-128"/>
+                <a:ea typeface="BIZ UDゴシック" panose="020B0400000000000000" pitchFamily="49" charset="-128"/>
+              </a:rPr>
+              <a:t>: "accuracy",</a:t>
+            </a:r>
+          </a:p>
+          <a:p>
+            <a:r>
+              <a:rPr lang="en-US" altLang="ja-JP" sz="800">
+                <a:solidFill>
+                  <a:schemeClr val="bg1"/>
+                </a:solidFill>
+                <a:latin typeface="BIZ UDゴシック" panose="020B0400000000000000" pitchFamily="49" charset="-128"/>
+                <a:ea typeface="BIZ UDゴシック" panose="020B0400000000000000" pitchFamily="49" charset="-128"/>
+              </a:rPr>
+              <a:t>  </a:t>
+            </a:r>
+            <a:r>
+              <a:rPr lang="ja-JP" altLang="en-US" sz="800">
+                <a:solidFill>
+                  <a:schemeClr val="bg1"/>
+                </a:solidFill>
+                <a:latin typeface="BIZ UDゴシック" panose="020B0400000000000000" pitchFamily="49" charset="-128"/>
+                <a:ea typeface="BIZ UDゴシック" panose="020B0400000000000000" pitchFamily="49" charset="-128"/>
+              </a:rPr>
+              <a:t>  </a:t>
+            </a:r>
+            <a:r>
+              <a:rPr lang="en-US" altLang="ja-JP" sz="800">
+                <a:solidFill>
+                  <a:schemeClr val="bg1"/>
+                </a:solidFill>
+                <a:latin typeface="BIZ UDゴシック" panose="020B0400000000000000" pitchFamily="49" charset="-128"/>
+                <a:ea typeface="BIZ UDゴシック" panose="020B0400000000000000" pitchFamily="49" charset="-128"/>
+              </a:rPr>
+              <a:t>"criteria"</a:t>
+            </a:r>
+            <a:r>
+              <a:rPr lang="ja-JP" altLang="en-US" sz="800">
+                <a:solidFill>
+                  <a:schemeClr val="bg1"/>
+                </a:solidFill>
+                <a:latin typeface="BIZ UDゴシック" panose="020B0400000000000000" pitchFamily="49" charset="-128"/>
+                <a:ea typeface="BIZ UDゴシック" panose="020B0400000000000000" pitchFamily="49" charset="-128"/>
+              </a:rPr>
+              <a:t> </a:t>
+            </a:r>
+            <a:r>
+              <a:rPr lang="en-US" altLang="ja-JP" sz="800">
+                <a:solidFill>
+                  <a:schemeClr val="bg1"/>
+                </a:solidFill>
+                <a:latin typeface="BIZ UDゴシック" panose="020B0400000000000000" pitchFamily="49" charset="-128"/>
+                <a:ea typeface="BIZ UDゴシック" panose="020B0400000000000000" pitchFamily="49" charset="-128"/>
+              </a:rPr>
+              <a:t>: "The generated text does not contradict the original, and accurately reflects its content. It does not add facts, speculations, exaggerations, or assertions not present in the original, and does not treat uncertain information as fact. Insufficient amount of information should not be grounds for point deduction."</a:t>
+            </a:r>
+          </a:p>
+          <a:p>
+            <a:r>
+              <a:rPr lang="en-US" altLang="ja-JP" sz="800">
+                <a:solidFill>
+                  <a:schemeClr val="bg1"/>
+                </a:solidFill>
+                <a:latin typeface="BIZ UDゴシック" panose="020B0400000000000000" pitchFamily="49" charset="-128"/>
+                <a:ea typeface="BIZ UDゴシック" panose="020B0400000000000000" pitchFamily="49" charset="-128"/>
+              </a:rPr>
+              <a:t>}</a:t>
+            </a:r>
+          </a:p>
+          <a:p>
+            <a:endParaRPr lang="en-US" altLang="ja-JP" sz="800">
+              <a:solidFill>
+                <a:schemeClr val="bg1"/>
+              </a:solidFill>
+              <a:latin typeface="BIZ UDゴシック" panose="020B0400000000000000" pitchFamily="49" charset="-128"/>
+              <a:ea typeface="BIZ UDゴシック" panose="020B0400000000000000" pitchFamily="49" charset="-128"/>
+            </a:endParaRPr>
+          </a:p>
+          <a:p>
+            <a:r>
+              <a:rPr lang="en-US" altLang="ja-JP" sz="800">
+                <a:solidFill>
+                  <a:schemeClr val="bg1"/>
+                </a:solidFill>
+                <a:latin typeface="BIZ UDゴシック" panose="020B0400000000000000" pitchFamily="49" charset="-128"/>
+                <a:ea typeface="BIZ UDゴシック" panose="020B0400000000000000" pitchFamily="49" charset="-128"/>
+              </a:rPr>
+              <a:t>{</a:t>
+            </a:r>
+          </a:p>
+          <a:p>
+            <a:r>
+              <a:rPr lang="ja-JP" altLang="en-US" sz="800">
+                <a:solidFill>
+                  <a:schemeClr val="bg1"/>
+                </a:solidFill>
+                <a:latin typeface="BIZ UDゴシック" panose="020B0400000000000000" pitchFamily="49" charset="-128"/>
+                <a:ea typeface="BIZ UDゴシック" panose="020B0400000000000000" pitchFamily="49" charset="-128"/>
+              </a:rPr>
+              <a:t>  </a:t>
+            </a:r>
+            <a:r>
+              <a:rPr lang="en-US" altLang="ja-JP" sz="800">
+                <a:solidFill>
+                  <a:schemeClr val="bg1"/>
+                </a:solidFill>
+                <a:latin typeface="BIZ UDゴシック" panose="020B0400000000000000" pitchFamily="49" charset="-128"/>
+                <a:ea typeface="BIZ UDゴシック" panose="020B0400000000000000" pitchFamily="49" charset="-128"/>
+              </a:rPr>
+              <a:t>  "name"</a:t>
+            </a:r>
+            <a:r>
+              <a:rPr lang="ja-JP" altLang="en-US" sz="800">
+                <a:solidFill>
+                  <a:schemeClr val="bg1"/>
+                </a:solidFill>
+                <a:latin typeface="BIZ UDゴシック" panose="020B0400000000000000" pitchFamily="49" charset="-128"/>
+                <a:ea typeface="BIZ UDゴシック" panose="020B0400000000000000" pitchFamily="49" charset="-128"/>
+              </a:rPr>
+              <a:t> </a:t>
+            </a:r>
+            <a:r>
+              <a:rPr lang="en-US" altLang="ja-JP" sz="800">
+                <a:solidFill>
+                  <a:schemeClr val="bg1"/>
+                </a:solidFill>
+                <a:latin typeface="BIZ UDゴシック" panose="020B0400000000000000" pitchFamily="49" charset="-128"/>
+                <a:ea typeface="BIZ UDゴシック" panose="020B0400000000000000" pitchFamily="49" charset="-128"/>
+              </a:rPr>
+              <a:t>: "constraints",</a:t>
+            </a:r>
+          </a:p>
+          <a:p>
+            <a:r>
+              <a:rPr lang="ja-JP" altLang="en-US" sz="800">
+                <a:solidFill>
+                  <a:schemeClr val="bg1"/>
+                </a:solidFill>
+                <a:latin typeface="BIZ UDゴシック" panose="020B0400000000000000" pitchFamily="49" charset="-128"/>
+                <a:ea typeface="BIZ UDゴシック" panose="020B0400000000000000" pitchFamily="49" charset="-128"/>
+              </a:rPr>
+              <a:t>  </a:t>
+            </a:r>
+            <a:r>
+              <a:rPr lang="en-US" altLang="ja-JP" sz="800">
+                <a:solidFill>
+                  <a:schemeClr val="bg1"/>
+                </a:solidFill>
+                <a:latin typeface="BIZ UDゴシック" panose="020B0400000000000000" pitchFamily="49" charset="-128"/>
+                <a:ea typeface="BIZ UDゴシック" panose="020B0400000000000000" pitchFamily="49" charset="-128"/>
+              </a:rPr>
+              <a:t>  "criteria"</a:t>
+            </a:r>
+            <a:r>
+              <a:rPr lang="ja-JP" altLang="en-US" sz="800">
+                <a:solidFill>
+                  <a:schemeClr val="bg1"/>
+                </a:solidFill>
+                <a:latin typeface="BIZ UDゴシック" panose="020B0400000000000000" pitchFamily="49" charset="-128"/>
+                <a:ea typeface="BIZ UDゴシック" panose="020B0400000000000000" pitchFamily="49" charset="-128"/>
+              </a:rPr>
+              <a:t> </a:t>
+            </a:r>
+            <a:r>
+              <a:rPr lang="en-US" altLang="ja-JP" sz="800">
+                <a:solidFill>
+                  <a:schemeClr val="bg1"/>
+                </a:solidFill>
+                <a:latin typeface="BIZ UDゴシック" panose="020B0400000000000000" pitchFamily="49" charset="-128"/>
+                <a:ea typeface="BIZ UDゴシック" panose="020B0400000000000000" pitchFamily="49" charset="-128"/>
+              </a:rPr>
+              <a:t>: "The generated text must use the same language as the input text and be 32 characters or less."</a:t>
+            </a:r>
+          </a:p>
+          <a:p>
+            <a:r>
+              <a:rPr lang="en-US" altLang="ja-JP" sz="800">
+                <a:solidFill>
+                  <a:schemeClr val="bg1"/>
+                </a:solidFill>
+                <a:latin typeface="BIZ UDゴシック" panose="020B0400000000000000" pitchFamily="49" charset="-128"/>
+                <a:ea typeface="BIZ UDゴシック" panose="020B0400000000000000" pitchFamily="49" charset="-128"/>
+              </a:rPr>
+              <a:t>}</a:t>
+            </a:r>
+          </a:p>
+          <a:p>
+            <a:endParaRPr lang="en-US" altLang="ja-JP" sz="800">
+              <a:solidFill>
+                <a:schemeClr val="bg1"/>
+              </a:solidFill>
+              <a:latin typeface="BIZ UDゴシック" panose="020B0400000000000000" pitchFamily="49" charset="-128"/>
+              <a:ea typeface="BIZ UDゴシック" panose="020B0400000000000000" pitchFamily="49" charset="-128"/>
+            </a:endParaRPr>
+          </a:p>
+          <a:p>
+            <a:r>
+              <a:rPr lang="en-US" altLang="ja-JP" sz="800">
+                <a:solidFill>
+                  <a:schemeClr val="bg1"/>
+                </a:solidFill>
+                <a:latin typeface="BIZ UDゴシック" panose="020B0400000000000000" pitchFamily="49" charset="-128"/>
+                <a:ea typeface="BIZ UDゴシック" panose="020B0400000000000000" pitchFamily="49" charset="-128"/>
+              </a:rPr>
+              <a:t>{</a:t>
+            </a:r>
+          </a:p>
+          <a:p>
+            <a:r>
+              <a:rPr lang="ja-JP" altLang="en-US" sz="800">
+                <a:solidFill>
+                  <a:schemeClr val="bg1"/>
+                </a:solidFill>
+                <a:latin typeface="BIZ UDゴシック" panose="020B0400000000000000" pitchFamily="49" charset="-128"/>
+                <a:ea typeface="BIZ UDゴシック" panose="020B0400000000000000" pitchFamily="49" charset="-128"/>
+              </a:rPr>
+              <a:t>  </a:t>
+            </a:r>
+            <a:r>
+              <a:rPr lang="en-US" altLang="ja-JP" sz="800">
+                <a:solidFill>
+                  <a:schemeClr val="bg1"/>
+                </a:solidFill>
+                <a:latin typeface="BIZ UDゴシック" panose="020B0400000000000000" pitchFamily="49" charset="-128"/>
+                <a:ea typeface="BIZ UDゴシック" panose="020B0400000000000000" pitchFamily="49" charset="-128"/>
+              </a:rPr>
+              <a:t>  "name"</a:t>
+            </a:r>
+            <a:r>
+              <a:rPr lang="ja-JP" altLang="en-US" sz="800">
+                <a:solidFill>
+                  <a:schemeClr val="bg1"/>
+                </a:solidFill>
+                <a:latin typeface="BIZ UDゴシック" panose="020B0400000000000000" pitchFamily="49" charset="-128"/>
+                <a:ea typeface="BIZ UDゴシック" panose="020B0400000000000000" pitchFamily="49" charset="-128"/>
+              </a:rPr>
+              <a:t> </a:t>
+            </a:r>
+            <a:r>
+              <a:rPr lang="en-US" altLang="ja-JP" sz="800">
+                <a:solidFill>
+                  <a:schemeClr val="bg1"/>
+                </a:solidFill>
+                <a:latin typeface="BIZ UDゴシック" panose="020B0400000000000000" pitchFamily="49" charset="-128"/>
+                <a:ea typeface="BIZ UDゴシック" panose="020B0400000000000000" pitchFamily="49" charset="-128"/>
+              </a:rPr>
+              <a:t>: "engagement",</a:t>
+            </a:r>
+          </a:p>
+          <a:p>
+            <a:r>
+              <a:rPr lang="ja-JP" altLang="en-US" sz="800">
+                <a:solidFill>
+                  <a:schemeClr val="bg1"/>
+                </a:solidFill>
+                <a:latin typeface="BIZ UDゴシック" panose="020B0400000000000000" pitchFamily="49" charset="-128"/>
+                <a:ea typeface="BIZ UDゴシック" panose="020B0400000000000000" pitchFamily="49" charset="-128"/>
+              </a:rPr>
+              <a:t>  </a:t>
+            </a:r>
+            <a:r>
+              <a:rPr lang="en-US" altLang="ja-JP" sz="800">
+                <a:solidFill>
+                  <a:schemeClr val="bg1"/>
+                </a:solidFill>
+                <a:latin typeface="BIZ UDゴシック" panose="020B0400000000000000" pitchFamily="49" charset="-128"/>
+                <a:ea typeface="BIZ UDゴシック" panose="020B0400000000000000" pitchFamily="49" charset="-128"/>
+              </a:rPr>
+              <a:t>  "criteria"</a:t>
+            </a:r>
+            <a:r>
+              <a:rPr lang="ja-JP" altLang="en-US" sz="800">
+                <a:solidFill>
+                  <a:schemeClr val="bg1"/>
+                </a:solidFill>
+                <a:latin typeface="BIZ UDゴシック" panose="020B0400000000000000" pitchFamily="49" charset="-128"/>
+                <a:ea typeface="BIZ UDゴシック" panose="020B0400000000000000" pitchFamily="49" charset="-128"/>
+              </a:rPr>
+              <a:t> </a:t>
+            </a:r>
+            <a:r>
+              <a:rPr lang="en-US" altLang="ja-JP" sz="800">
+                <a:solidFill>
+                  <a:schemeClr val="bg1"/>
+                </a:solidFill>
+                <a:latin typeface="BIZ UDゴシック" panose="020B0400000000000000" pitchFamily="49" charset="-128"/>
+                <a:ea typeface="BIZ UDゴシック" panose="020B0400000000000000" pitchFamily="49" charset="-128"/>
+              </a:rPr>
+              <a:t>: "The generated text roughly and accurately indicates the topic of the original and functions as a label that motivates readers to continue reading the article. It must not be heavily penalized solely for omitting the most striking element or for insufficient hook strength. Even if it is a concise expression focusing on a specific fact, statement, or person within the article, it meets the requirements as long as it appropriately indicates the topic based on the original. The fact that it does not cover the entire article, or that it only picks up a part of multiple characters or events, is not itself a reason for deduction. Only when information not present in the original is added to create artificial interest will it be considered a major penalty factor."</a:t>
+            </a:r>
+          </a:p>
+          <a:p>
+            <a:r>
+              <a:rPr lang="en-US" altLang="ja-JP" sz="800">
+                <a:solidFill>
+                  <a:schemeClr val="bg1"/>
+                </a:solidFill>
+                <a:latin typeface="BIZ UDゴシック" panose="020B0400000000000000" pitchFamily="49" charset="-128"/>
+                <a:ea typeface="BIZ UDゴシック" panose="020B0400000000000000" pitchFamily="49" charset="-128"/>
+              </a:rPr>
+              <a:t>}</a:t>
+            </a:r>
+          </a:p>
+          <a:p>
+            <a:endParaRPr lang="en-US" altLang="ja-JP" sz="800">
+              <a:solidFill>
+                <a:schemeClr val="bg1"/>
+              </a:solidFill>
+              <a:latin typeface="BIZ UDゴシック" panose="020B0400000000000000" pitchFamily="49" charset="-128"/>
+              <a:ea typeface="BIZ UDゴシック" panose="020B0400000000000000" pitchFamily="49" charset="-128"/>
+            </a:endParaRPr>
+          </a:p>
+          <a:p>
+            <a:r>
+              <a:rPr lang="en-US" altLang="ja-JP" sz="800">
+                <a:solidFill>
+                  <a:schemeClr val="bg1"/>
+                </a:solidFill>
+                <a:latin typeface="BIZ UDゴシック" panose="020B0400000000000000" pitchFamily="49" charset="-128"/>
+                <a:ea typeface="BIZ UDゴシック" panose="020B0400000000000000" pitchFamily="49" charset="-128"/>
+              </a:rPr>
+              <a:t>{</a:t>
+            </a:r>
+          </a:p>
+          <a:p>
+            <a:r>
+              <a:rPr lang="ja-JP" altLang="en-US" sz="800">
+                <a:solidFill>
+                  <a:schemeClr val="bg1"/>
+                </a:solidFill>
+                <a:latin typeface="BIZ UDゴシック" panose="020B0400000000000000" pitchFamily="49" charset="-128"/>
+                <a:ea typeface="BIZ UDゴシック" panose="020B0400000000000000" pitchFamily="49" charset="-128"/>
+              </a:rPr>
+              <a:t>  </a:t>
+            </a:r>
+            <a:r>
+              <a:rPr lang="en-US" altLang="ja-JP" sz="800">
+                <a:solidFill>
+                  <a:schemeClr val="bg1"/>
+                </a:solidFill>
+                <a:latin typeface="BIZ UDゴシック" panose="020B0400000000000000" pitchFamily="49" charset="-128"/>
+                <a:ea typeface="BIZ UDゴシック" panose="020B0400000000000000" pitchFamily="49" charset="-128"/>
+              </a:rPr>
+              <a:t>  "name"</a:t>
+            </a:r>
+            <a:r>
+              <a:rPr lang="ja-JP" altLang="en-US" sz="800">
+                <a:solidFill>
+                  <a:schemeClr val="bg1"/>
+                </a:solidFill>
+                <a:latin typeface="BIZ UDゴシック" panose="020B0400000000000000" pitchFamily="49" charset="-128"/>
+                <a:ea typeface="BIZ UDゴシック" panose="020B0400000000000000" pitchFamily="49" charset="-128"/>
+              </a:rPr>
+              <a:t>  </a:t>
+            </a:r>
+            <a:r>
+              <a:rPr lang="en-US" altLang="ja-JP" sz="800">
+                <a:solidFill>
+                  <a:schemeClr val="bg1"/>
+                </a:solidFill>
+                <a:latin typeface="BIZ UDゴシック" panose="020B0400000000000000" pitchFamily="49" charset="-128"/>
+                <a:ea typeface="BIZ UDゴシック" panose="020B0400000000000000" pitchFamily="49" charset="-128"/>
+              </a:rPr>
+              <a:t>: "sensitivity",</a:t>
+            </a:r>
+          </a:p>
+          <a:p>
+            <a:r>
+              <a:rPr lang="ja-JP" altLang="en-US" sz="800">
+                <a:solidFill>
+                  <a:schemeClr val="bg1"/>
+                </a:solidFill>
+                <a:latin typeface="BIZ UDゴシック" panose="020B0400000000000000" pitchFamily="49" charset="-128"/>
+                <a:ea typeface="BIZ UDゴシック" panose="020B0400000000000000" pitchFamily="49" charset="-128"/>
+              </a:rPr>
+              <a:t>  </a:t>
+            </a:r>
+            <a:r>
+              <a:rPr lang="en-US" altLang="ja-JP" sz="800">
+                <a:solidFill>
+                  <a:schemeClr val="bg1"/>
+                </a:solidFill>
+                <a:latin typeface="BIZ UDゴシック" panose="020B0400000000000000" pitchFamily="49" charset="-128"/>
+                <a:ea typeface="BIZ UDゴシック" panose="020B0400000000000000" pitchFamily="49" charset="-128"/>
+              </a:rPr>
+              <a:t>  "criteria"</a:t>
+            </a:r>
+            <a:r>
+              <a:rPr lang="ja-JP" altLang="en-US" sz="800">
+                <a:solidFill>
+                  <a:schemeClr val="bg1"/>
+                </a:solidFill>
+                <a:latin typeface="BIZ UDゴシック" panose="020B0400000000000000" pitchFamily="49" charset="-128"/>
+                <a:ea typeface="BIZ UDゴシック" panose="020B0400000000000000" pitchFamily="49" charset="-128"/>
+              </a:rPr>
+              <a:t>  </a:t>
+            </a:r>
+            <a:r>
+              <a:rPr lang="en-US" altLang="ja-JP" sz="800">
+                <a:solidFill>
+                  <a:schemeClr val="bg1"/>
+                </a:solidFill>
+                <a:latin typeface="BIZ UDゴシック" panose="020B0400000000000000" pitchFamily="49" charset="-128"/>
+                <a:ea typeface="BIZ UDゴシック" panose="020B0400000000000000" pitchFamily="49" charset="-128"/>
+              </a:rPr>
+              <a:t>: "The generated text shows appropriate consideration for sensitive content such as deaths, accidents, disasters, crimes, illnesses, suicide, discrimination, and human rights issues. It does not contain unnecessary condemnation or mockery toward victims, bereaved families, related parties, or individuals suspected of wrongdoing. It does not damage honor or credibility through speculation or unverified information. It does not use overly sensational or entertaining expressions regarding sensitive content to arouse reader interest."</a:t>
+            </a:r>
+          </a:p>
+          <a:p>
+            <a:r>
+              <a:rPr lang="en-US" altLang="ja-JP" sz="800">
+                <a:solidFill>
+                  <a:schemeClr val="bg1"/>
+                </a:solidFill>
+                <a:latin typeface="BIZ UDゴシック" panose="020B0400000000000000" pitchFamily="49" charset="-128"/>
+                <a:ea typeface="BIZ UDゴシック" panose="020B0400000000000000" pitchFamily="49" charset="-128"/>
+              </a:rPr>
+              <a:t>}</a:t>
+            </a:r>
+            <a:endParaRPr kumimoji="1" lang="ja-JP" altLang="en-US" sz="800">
+              <a:solidFill>
+                <a:schemeClr val="bg1"/>
+              </a:solidFill>
+              <a:latin typeface="BIZ UDゴシック" panose="020B0400000000000000" pitchFamily="49" charset="-128"/>
+              <a:ea typeface="BIZ UDゴシック" panose="020B0400000000000000" pitchFamily="49" charset="-128"/>
+            </a:endParaRPr>
+          </a:p>
+        </p:txBody>
+      </p:sp>
+    </p:spTree>
+    <p:extLst>
+      <p:ext uri="{BB962C8B-B14F-4D97-AF65-F5344CB8AC3E}">
+        <p14:creationId xmlns:p14="http://schemas.microsoft.com/office/powerpoint/2010/main" val="2549054483"/>
+      </p:ext>
+    </p:extLst>
+  </p:cSld>
+  <p:clrMapOvr>
+    <a:masterClrMapping/>
+  </p:clrMapOvr>
+</p:sld>
+</file>
+
+<file path=ppt/slides/slide7.xml><?xml version="1.0" encoding="utf-8"?>
+<p:sld xmlns:a="http://schemas.openxmlformats.org/drawingml/2006/main" xmlns:r="http://schemas.openxmlformats.org/officeDocument/2006/relationships" xmlns:p="http://schemas.openxmlformats.org/presentationml/2006/main">
+  <p:cSld>
     <p:spTree>
       <p:nvGrpSpPr>
         <p:cNvPr id="1" name="">
@@ -19403,7 +20895,7 @@
 </p:sld>
 </file>
 
-<file path=ppt/slides/slide7.xml><?xml version="1.0" encoding="utf-8"?>
+<file path=ppt/slides/slide8.xml><?xml version="1.0" encoding="utf-8"?>
 <p:sld xmlns:a="http://schemas.openxmlformats.org/drawingml/2006/main" xmlns:r="http://schemas.openxmlformats.org/officeDocument/2006/relationships" xmlns:p="http://schemas.openxmlformats.org/presentationml/2006/main">
   <p:cSld>
     <p:spTree>
@@ -19961,7 +21453,7 @@
 </p:sld>
 </file>
 
-<file path=ppt/slides/slide8.xml><?xml version="1.0" encoding="utf-8"?>
+<file path=ppt/slides/slide9.xml><?xml version="1.0" encoding="utf-8"?>
 <p:sld xmlns:a="http://schemas.openxmlformats.org/drawingml/2006/main" xmlns:r="http://schemas.openxmlformats.org/officeDocument/2006/relationships" xmlns:p="http://schemas.openxmlformats.org/presentationml/2006/main">
   <p:cSld>
     <p:spTree>
@@ -20136,239 +21628,6 @@
     <p:extLst>
       <p:ext uri="{BB962C8B-B14F-4D97-AF65-F5344CB8AC3E}">
         <p14:creationId xmlns:p14="http://schemas.microsoft.com/office/powerpoint/2010/main" val="548628078"/>
-      </p:ext>
-    </p:extLst>
-  </p:cSld>
-  <p:clrMapOvr>
-    <a:masterClrMapping/>
-  </p:clrMapOvr>
-</p:sld>
-</file>
-
-<file path=ppt/slides/slide9.xml><?xml version="1.0" encoding="utf-8"?>
-<p:sld xmlns:a="http://schemas.openxmlformats.org/drawingml/2006/main" xmlns:r="http://schemas.openxmlformats.org/officeDocument/2006/relationships" xmlns:p="http://schemas.openxmlformats.org/presentationml/2006/main">
-  <p:cSld>
-    <p:spTree>
-      <p:nvGrpSpPr>
-        <p:cNvPr id="1" name="">
-          <a:extLst>
-            <a:ext uri="{FF2B5EF4-FFF2-40B4-BE49-F238E27FC236}">
-              <a16:creationId xmlns:a16="http://schemas.microsoft.com/office/drawing/2014/main" id="{DD149B1D-0226-78BC-F63A-E99F13C93A5B}"/>
-            </a:ext>
-          </a:extLst>
-        </p:cNvPr>
-        <p:cNvGrpSpPr/>
-        <p:nvPr/>
-      </p:nvGrpSpPr>
-      <p:grpSpPr>
-        <a:xfrm>
-          <a:off x="0" y="0"/>
-          <a:ext cx="0" cy="0"/>
-          <a:chOff x="0" y="0"/>
-          <a:chExt cx="0" cy="0"/>
-        </a:xfrm>
-      </p:grpSpPr>
-      <p:sp>
-        <p:nvSpPr>
-          <p:cNvPr id="18" name="フリーフォーム: 図形 17">
-            <a:extLst>
-              <a:ext uri="{FF2B5EF4-FFF2-40B4-BE49-F238E27FC236}">
-                <a16:creationId xmlns:a16="http://schemas.microsoft.com/office/drawing/2014/main" id="{38FA1461-DE1D-2EC9-AB51-AC518350623D}"/>
-              </a:ext>
-            </a:extLst>
-          </p:cNvPr>
-          <p:cNvSpPr/>
-          <p:nvPr/>
-        </p:nvSpPr>
-        <p:spPr>
-          <a:xfrm>
-            <a:off x="0" y="0"/>
-            <a:ext cx="12192000" cy="6858000"/>
-          </a:xfrm>
-          <a:custGeom>
-            <a:avLst/>
-            <a:gdLst>
-              <a:gd name="csX0" fmla="*/ 1231075 w 12192000"/>
-              <a:gd name="csY0" fmla="*/ 3570514 h 6858000"/>
-              <a:gd name="csX1" fmla="*/ 1231075 w 12192000"/>
-              <a:gd name="csY1" fmla="*/ 5147951 h 6858000"/>
-              <a:gd name="csX2" fmla="*/ 1231075 w 12192000"/>
-              <a:gd name="csY2" fmla="*/ 5737760 h 6858000"/>
-              <a:gd name="csX3" fmla="*/ 2284021 w 12192000"/>
-              <a:gd name="csY3" fmla="*/ 5737760 h 6858000"/>
-              <a:gd name="csX4" fmla="*/ 10949049 w 12192000"/>
-              <a:gd name="csY4" fmla="*/ 5737760 h 6858000"/>
-              <a:gd name="csX5" fmla="*/ 10949049 w 12192000"/>
-              <a:gd name="csY5" fmla="*/ 5147951 h 6858000"/>
-              <a:gd name="csX6" fmla="*/ 2284021 w 12192000"/>
-              <a:gd name="csY6" fmla="*/ 5147951 h 6858000"/>
-              <a:gd name="csX7" fmla="*/ 2284021 w 12192000"/>
-              <a:gd name="csY7" fmla="*/ 3570514 h 6858000"/>
-              <a:gd name="csX8" fmla="*/ 1231075 w 12192000"/>
-              <a:gd name="csY8" fmla="*/ 2553194 h 6858000"/>
-              <a:gd name="csX9" fmla="*/ 1231075 w 12192000"/>
-              <a:gd name="csY9" fmla="*/ 3143002 h 6858000"/>
-              <a:gd name="csX10" fmla="*/ 10949049 w 12192000"/>
-              <a:gd name="csY10" fmla="*/ 3143002 h 6858000"/>
-              <a:gd name="csX11" fmla="*/ 10949049 w 12192000"/>
-              <a:gd name="csY11" fmla="*/ 2553194 h 6858000"/>
-              <a:gd name="csX12" fmla="*/ 0 w 12192000"/>
-              <a:gd name="csY12" fmla="*/ 0 h 6858000"/>
-              <a:gd name="csX13" fmla="*/ 12192000 w 12192000"/>
-              <a:gd name="csY13" fmla="*/ 0 h 6858000"/>
-              <a:gd name="csX14" fmla="*/ 12192000 w 12192000"/>
-              <a:gd name="csY14" fmla="*/ 6858000 h 6858000"/>
-              <a:gd name="csX15" fmla="*/ 0 w 12192000"/>
-              <a:gd name="csY15" fmla="*/ 6858000 h 6858000"/>
-            </a:gdLst>
-            <a:ahLst/>
-            <a:cxnLst>
-              <a:cxn ang="0">
-                <a:pos x="csX0" y="csY0"/>
-              </a:cxn>
-              <a:cxn ang="0">
-                <a:pos x="csX1" y="csY1"/>
-              </a:cxn>
-              <a:cxn ang="0">
-                <a:pos x="csX2" y="csY2"/>
-              </a:cxn>
-              <a:cxn ang="0">
-                <a:pos x="csX3" y="csY3"/>
-              </a:cxn>
-              <a:cxn ang="0">
-                <a:pos x="csX4" y="csY4"/>
-              </a:cxn>
-              <a:cxn ang="0">
-                <a:pos x="csX5" y="csY5"/>
-              </a:cxn>
-              <a:cxn ang="0">
-                <a:pos x="csX6" y="csY6"/>
-              </a:cxn>
-              <a:cxn ang="0">
-                <a:pos x="csX7" y="csY7"/>
-              </a:cxn>
-              <a:cxn ang="0">
-                <a:pos x="csX8" y="csY8"/>
-              </a:cxn>
-              <a:cxn ang="0">
-                <a:pos x="csX9" y="csY9"/>
-              </a:cxn>
-              <a:cxn ang="0">
-                <a:pos x="csX10" y="csY10"/>
-              </a:cxn>
-              <a:cxn ang="0">
-                <a:pos x="csX11" y="csY11"/>
-              </a:cxn>
-              <a:cxn ang="0">
-                <a:pos x="csX12" y="csY12"/>
-              </a:cxn>
-              <a:cxn ang="0">
-                <a:pos x="csX13" y="csY13"/>
-              </a:cxn>
-              <a:cxn ang="0">
-                <a:pos x="csX14" y="csY14"/>
-              </a:cxn>
-              <a:cxn ang="0">
-                <a:pos x="csX15" y="csY15"/>
-              </a:cxn>
-            </a:cxnLst>
-            <a:rect l="l" t="t" r="r" b="b"/>
-            <a:pathLst>
-              <a:path w="12192000" h="6858000">
-                <a:moveTo>
-                  <a:pt x="1231075" y="3570514"/>
-                </a:moveTo>
-                <a:lnTo>
-                  <a:pt x="1231075" y="5147951"/>
-                </a:lnTo>
-                <a:lnTo>
-                  <a:pt x="1231075" y="5737760"/>
-                </a:lnTo>
-                <a:lnTo>
-                  <a:pt x="2284021" y="5737760"/>
-                </a:lnTo>
-                <a:lnTo>
-                  <a:pt x="10949049" y="5737760"/>
-                </a:lnTo>
-                <a:lnTo>
-                  <a:pt x="10949049" y="5147951"/>
-                </a:lnTo>
-                <a:lnTo>
-                  <a:pt x="2284021" y="5147951"/>
-                </a:lnTo>
-                <a:lnTo>
-                  <a:pt x="2284021" y="3570514"/>
-                </a:lnTo>
-                <a:close/>
-                <a:moveTo>
-                  <a:pt x="1231075" y="2553194"/>
-                </a:moveTo>
-                <a:lnTo>
-                  <a:pt x="1231075" y="3143002"/>
-                </a:lnTo>
-                <a:lnTo>
-                  <a:pt x="10949049" y="3143002"/>
-                </a:lnTo>
-                <a:lnTo>
-                  <a:pt x="10949049" y="2553194"/>
-                </a:lnTo>
-                <a:close/>
-                <a:moveTo>
-                  <a:pt x="0" y="0"/>
-                </a:moveTo>
-                <a:lnTo>
-                  <a:pt x="12192000" y="0"/>
-                </a:lnTo>
-                <a:lnTo>
-                  <a:pt x="12192000" y="6858000"/>
-                </a:lnTo>
-                <a:lnTo>
-                  <a:pt x="0" y="6858000"/>
-                </a:lnTo>
-                <a:close/>
-              </a:path>
-            </a:pathLst>
-          </a:custGeom>
-          <a:solidFill>
-            <a:srgbClr val="000000">
-              <a:alpha val="20000"/>
-            </a:srgbClr>
-          </a:solidFill>
-          <a:ln>
-            <a:noFill/>
-          </a:ln>
-        </p:spPr>
-        <p:style>
-          <a:lnRef idx="2">
-            <a:schemeClr val="accent1">
-              <a:shade val="15000"/>
-            </a:schemeClr>
-          </a:lnRef>
-          <a:fillRef idx="1">
-            <a:schemeClr val="accent1"/>
-          </a:fillRef>
-          <a:effectRef idx="0">
-            <a:schemeClr val="accent1"/>
-          </a:effectRef>
-          <a:fontRef idx="minor">
-            <a:schemeClr val="lt1"/>
-          </a:fontRef>
-        </p:style>
-        <p:txBody>
-          <a:bodyPr wrap="square" rtlCol="0" anchor="ctr">
-            <a:noAutofit/>
-          </a:bodyPr>
-          <a:lstStyle/>
-          <a:p>
-            <a:pPr algn="ctr"/>
-            <a:endParaRPr lang="ja-JP" altLang="en-US"/>
-          </a:p>
-        </p:txBody>
-      </p:sp>
-    </p:spTree>
-    <p:extLst>
-      <p:ext uri="{BB962C8B-B14F-4D97-AF65-F5344CB8AC3E}">
-        <p14:creationId xmlns:p14="http://schemas.microsoft.com/office/powerpoint/2010/main" val="98695772"/>
       </p:ext>
     </p:extLst>
   </p:cSld>
